--- a/docs/test/stress/e2e-outputs/income_pro_gradeC_pr07.pptx
+++ b/docs/test/stress/e2e-outputs/income_pro_gradeC_pr07.pptx
@@ -17,11 +17,9 @@
     <p:sldId id="265" r:id="rId11"/>
     <p:sldId id="266" r:id="rId12"/>
     <p:sldId id="267" r:id="rId13"/>
-    <p:sldId id="268" r:id="rId14"/>
-    <p:sldId id="269" r:id="rId15"/>
   </p:sldIdLst>
   <p:notesMasterIdLst>
-    <p:notesMasterId r:id="rId16"/>
+    <p:notesMasterId r:id="rId14"/>
   </p:notesMasterIdLst>
   <p:sldSz cx="12192000" cy="6858000"/>
   <p:notesSz cx="6858000" cy="12192000"/>
@@ -803,182 +801,6 @@
             <a:fld id="{F7021451-1387-4CA6-816F-3879F97B5CBC}" type="slidenum">
               <a:rPr lang="en-US"/>
               <a:t>12</a:t>
-            </a:fld>
-            <a:endParaRPr lang="en-US"/>
-          </a:p>
-        </p:txBody>
-      </p:sp>
-    </p:spTree>
-    <p:extLst>
-      <p:ext uri="{BB962C8B-B14F-4D97-AF65-F5344CB8AC3E}">
-        <p14:creationId xmlns:p14="http://schemas.microsoft.com/office/powerpoint/2010/main" val="1024086991"/>
-      </p:ext>
-    </p:extLst>
-  </p:cSld>
-  <p:clrMapOvr>
-    <a:masterClrMapping/>
-  </p:clrMapOvr>
-</p:notes>
-</file>
-
-<file path=ppt/notesSlides/notesSlide13.xml><?xml version="1.0" encoding="utf-8"?>
-<p:notes xmlns:a="http://schemas.openxmlformats.org/drawingml/2006/main" xmlns:r="http://schemas.openxmlformats.org/officeDocument/2006/relationships" xmlns:p="http://schemas.openxmlformats.org/presentationml/2006/main">
-  <p:cSld>
-    <p:spTree>
-      <p:nvGrpSpPr>
-        <p:cNvPr id="1" name=""/>
-        <p:cNvGrpSpPr/>
-        <p:nvPr/>
-      </p:nvGrpSpPr>
-      <p:grpSpPr>
-        <a:xfrm>
-          <a:off x="0" y="0"/>
-          <a:ext cx="0" cy="0"/>
-          <a:chOff x="0" y="0"/>
-          <a:chExt cx="0" cy="0"/>
-        </a:xfrm>
-      </p:grpSpPr>
-      <p:sp>
-        <p:nvSpPr>
-          <p:cNvPr id="2" name="Slide Image Placeholder 1"/>
-          <p:cNvSpPr>
-            <a:spLocks noGrp="1" noRot="1" noChangeAspect="1"/>
-          </p:cNvSpPr>
-          <p:nvPr>
-            <p:ph type="sldImg"/>
-          </p:nvPr>
-        </p:nvSpPr>
-        <p:spPr/>
-      </p:sp>
-      <p:sp>
-        <p:nvSpPr>
-          <p:cNvPr id="3" name="Notes Placeholder 2"/>
-          <p:cNvSpPr>
-            <a:spLocks noGrp="1"/>
-          </p:cNvSpPr>
-          <p:nvPr>
-            <p:ph type="body" idx="1"/>
-          </p:nvPr>
-        </p:nvSpPr>
-        <p:spPr/>
-        <p:txBody>
-          <a:bodyPr/>
-          <a:lstStyle/>
-          <a:p>
-            <a:r>
-              <a:rPr lang="en-US" dirty="0"/>
-              <a:t/>
-            </a:r>
-            <a:endParaRPr lang="en-US" dirty="0"/>
-          </a:p>
-        </p:txBody>
-      </p:sp>
-      <p:sp>
-        <p:nvSpPr>
-          <p:cNvPr id="4" name="Slide Number Placeholder 3"/>
-          <p:cNvSpPr>
-            <a:spLocks noGrp="1"/>
-          </p:cNvSpPr>
-          <p:nvPr>
-            <p:ph type="sldNum" sz="quarter" idx="10"/>
-          </p:nvPr>
-        </p:nvSpPr>
-        <p:spPr/>
-        <p:txBody>
-          <a:bodyPr/>
-          <a:lstStyle/>
-          <a:p>
-            <a:fld id="{F7021451-1387-4CA6-816F-3879F97B5CBC}" type="slidenum">
-              <a:rPr lang="en-US"/>
-              <a:t>13</a:t>
-            </a:fld>
-            <a:endParaRPr lang="en-US"/>
-          </a:p>
-        </p:txBody>
-      </p:sp>
-    </p:spTree>
-    <p:extLst>
-      <p:ext uri="{BB962C8B-B14F-4D97-AF65-F5344CB8AC3E}">
-        <p14:creationId xmlns:p14="http://schemas.microsoft.com/office/powerpoint/2010/main" val="1024086991"/>
-      </p:ext>
-    </p:extLst>
-  </p:cSld>
-  <p:clrMapOvr>
-    <a:masterClrMapping/>
-  </p:clrMapOvr>
-</p:notes>
-</file>
-
-<file path=ppt/notesSlides/notesSlide14.xml><?xml version="1.0" encoding="utf-8"?>
-<p:notes xmlns:a="http://schemas.openxmlformats.org/drawingml/2006/main" xmlns:r="http://schemas.openxmlformats.org/officeDocument/2006/relationships" xmlns:p="http://schemas.openxmlformats.org/presentationml/2006/main">
-  <p:cSld>
-    <p:spTree>
-      <p:nvGrpSpPr>
-        <p:cNvPr id="1" name=""/>
-        <p:cNvGrpSpPr/>
-        <p:nvPr/>
-      </p:nvGrpSpPr>
-      <p:grpSpPr>
-        <a:xfrm>
-          <a:off x="0" y="0"/>
-          <a:ext cx="0" cy="0"/>
-          <a:chOff x="0" y="0"/>
-          <a:chExt cx="0" cy="0"/>
-        </a:xfrm>
-      </p:grpSpPr>
-      <p:sp>
-        <p:nvSpPr>
-          <p:cNvPr id="2" name="Slide Image Placeholder 1"/>
-          <p:cNvSpPr>
-            <a:spLocks noGrp="1" noRot="1" noChangeAspect="1"/>
-          </p:cNvSpPr>
-          <p:nvPr>
-            <p:ph type="sldImg"/>
-          </p:nvPr>
-        </p:nvSpPr>
-        <p:spPr/>
-      </p:sp>
-      <p:sp>
-        <p:nvSpPr>
-          <p:cNvPr id="3" name="Notes Placeholder 2"/>
-          <p:cNvSpPr>
-            <a:spLocks noGrp="1"/>
-          </p:cNvSpPr>
-          <p:nvPr>
-            <p:ph type="body" idx="1"/>
-          </p:nvPr>
-        </p:nvSpPr>
-        <p:spPr/>
-        <p:txBody>
-          <a:bodyPr/>
-          <a:lstStyle/>
-          <a:p>
-            <a:r>
-              <a:rPr lang="en-US" dirty="0"/>
-              <a:t/>
-            </a:r>
-            <a:endParaRPr lang="en-US" dirty="0"/>
-          </a:p>
-        </p:txBody>
-      </p:sp>
-      <p:sp>
-        <p:nvSpPr>
-          <p:cNvPr id="4" name="Slide Number Placeholder 3"/>
-          <p:cNvSpPr>
-            <a:spLocks noGrp="1"/>
-          </p:cNvSpPr>
-          <p:nvPr>
-            <p:ph type="sldNum" sz="quarter" idx="10"/>
-          </p:nvPr>
-        </p:nvSpPr>
-        <p:spPr/>
-        <p:txBody>
-          <a:bodyPr/>
-          <a:lstStyle/>
-          <a:p>
-            <a:fld id="{F7021451-1387-4CA6-816F-3879F97B5CBC}" type="slidenum">
-              <a:rPr lang="en-US"/>
-              <a:t>14</a:t>
             </a:fld>
             <a:endParaRPr lang="en-US"/>
           </a:p>
@@ -2353,8 +2175,8 @@
         </p:nvSpPr>
         <p:spPr>
           <a:xfrm>
-            <a:off x="566928" y="3584448"/>
-            <a:ext cx="1097280" cy="310896"/>
+            <a:off x="566928" y="3685032"/>
+            <a:ext cx="1097280" cy="292608"/>
           </a:xfrm>
           <a:prstGeom prst="roundRect">
             <a:avLst>
@@ -2375,8 +2197,8 @@
         </p:nvSpPr>
         <p:spPr>
           <a:xfrm>
-            <a:off x="566928" y="3584448"/>
-            <a:ext cx="1097280" cy="310896"/>
+            <a:off x="566928" y="3685032"/>
+            <a:ext cx="1097280" cy="292608"/>
           </a:xfrm>
           <a:prstGeom prst="rect">
             <a:avLst/>
@@ -2392,7 +2214,7 @@
               <a:buNone/>
             </a:pPr>
             <a:r>
-              <a:rPr lang="en-US" sz="1000" b="1" dirty="0">
+              <a:rPr lang="en-US" sz="950" b="1" dirty="0">
                 <a:solidFill>
                   <a:srgbClr val="FFFFFF"/>
                 </a:solidFill>
@@ -2402,7 +2224,7 @@
               </a:rPr>
               <a:t>메디컬빌딩</a:t>
             </a:r>
-            <a:endParaRPr lang="en-US" sz="1000" dirty="0"/>
+            <a:endParaRPr lang="en-US" sz="950" dirty="0"/>
           </a:p>
         </p:txBody>
       </p:sp>
@@ -2414,8 +2236,8 @@
         </p:nvSpPr>
         <p:spPr>
           <a:xfrm>
-            <a:off x="1773936" y="3584448"/>
-            <a:ext cx="1097280" cy="310896"/>
+            <a:off x="1755648" y="3685032"/>
+            <a:ext cx="1005840" cy="292608"/>
           </a:xfrm>
           <a:prstGeom prst="roundRect">
             <a:avLst>
@@ -2436,8 +2258,8 @@
         </p:nvSpPr>
         <p:spPr>
           <a:xfrm>
-            <a:off x="1773936" y="3584448"/>
-            <a:ext cx="1097280" cy="310896"/>
+            <a:off x="1755648" y="3685032"/>
+            <a:ext cx="1005840" cy="292608"/>
           </a:xfrm>
           <a:prstGeom prst="rect">
             <a:avLst/>
@@ -2453,7 +2275,7 @@
               <a:buNone/>
             </a:pPr>
             <a:r>
-              <a:rPr lang="en-US" sz="1000" b="1" dirty="0">
+              <a:rPr lang="en-US" sz="950" b="1" dirty="0">
                 <a:solidFill>
                   <a:srgbClr val="FFFFFF"/>
                 </a:solidFill>
@@ -2463,7 +2285,7 @@
               </a:rPr>
               <a:t>165억</a:t>
             </a:r>
-            <a:endParaRPr lang="en-US" sz="1000" dirty="0"/>
+            <a:endParaRPr lang="en-US" sz="950" dirty="0"/>
           </a:p>
         </p:txBody>
       </p:sp>
@@ -2475,12 +2297,12 @@
         </p:nvSpPr>
         <p:spPr>
           <a:xfrm>
-            <a:off x="566928" y="4224528"/>
-            <a:ext cx="6858000" cy="1225296"/>
+            <a:off x="566928" y="4187952"/>
+            <a:ext cx="6858000" cy="1051560"/>
           </a:xfrm>
           <a:prstGeom prst="roundRect">
             <a:avLst>
-              <a:gd name="adj" fmla="val 2985"/>
+              <a:gd name="adj" fmla="val 3478"/>
             </a:avLst>
           </a:prstGeom>
           <a:solidFill>
@@ -2502,8 +2324,8 @@
         </p:nvSpPr>
         <p:spPr>
           <a:xfrm>
-            <a:off x="822960" y="4425696"/>
-            <a:ext cx="6345936" cy="822960"/>
+            <a:off x="822960" y="4297680"/>
+            <a:ext cx="6345936" cy="832104"/>
           </a:xfrm>
           <a:prstGeom prst="rect">
             <a:avLst/>
@@ -2519,7 +2341,7 @@
               <a:buNone/>
             </a:pPr>
             <a:r>
-              <a:rPr lang="en-US" sz="2200" b="1" dirty="0">
+              <a:rPr lang="en-US" sz="2100" b="1" dirty="0">
                 <a:solidFill>
                   <a:srgbClr val="F3EBDA"/>
                 </a:solidFill>
@@ -2529,7 +2351,7 @@
               </a:rPr>
               <a:t>165억</a:t>
             </a:r>
-            <a:endParaRPr lang="en-US" sz="2200" dirty="0"/>
+            <a:endParaRPr lang="en-US" sz="2100" dirty="0"/>
           </a:p>
         </p:txBody>
       </p:sp>
@@ -2724,7 +2546,7 @@
                 <a:ea typeface="Arial" pitchFamily="34" charset="-122"/>
                 <a:cs typeface="Arial" pitchFamily="34" charset="-120"/>
               </a:rPr>
-              <a:t>09</a:t>
+              <a:t>10</a:t>
             </a:r>
             <a:endParaRPr lang="en-US" sz="1300" dirty="0"/>
           </a:p>
@@ -2763,7 +2585,7 @@
                 <a:ea typeface="Arial" pitchFamily="34" charset="-122"/>
                 <a:cs typeface="Arial" pitchFamily="34" charset="-120"/>
               </a:rPr>
-              <a:t>Thesis</a:t>
+              <a:t>Checklist</a:t>
             </a:r>
             <a:endParaRPr lang="en-US" sz="950" dirty="0"/>
           </a:p>
@@ -2802,7 +2624,7 @@
                 <a:ea typeface="Pretendard" pitchFamily="34" charset="-122"/>
                 <a:cs typeface="Pretendard" pitchFamily="34" charset="-120"/>
               </a:rPr>
-              <a:t>투자 포인트</a:t>
+              <a:t>실사 체크리스트</a:t>
             </a:r>
             <a:endParaRPr lang="en-US" sz="2300" dirty="0"/>
           </a:p>
@@ -2810,24 +2632,61 @@
       </p:sp>
       <p:sp>
         <p:nvSpPr>
-          <p:cNvPr id="6" name="Shape 4"/>
-          <p:cNvSpPr/>
-          <p:nvPr/>
-        </p:nvSpPr>
-        <p:spPr>
-          <a:xfrm>
-            <a:off x="566928" y="4983480"/>
-            <a:ext cx="11057839" cy="804672"/>
-          </a:xfrm>
-          <a:prstGeom prst="roundRect">
-            <a:avLst>
-              <a:gd name="adj" fmla="val 6818"/>
-            </a:avLst>
+          <p:cNvPr id="6" name="Text 4"/>
+          <p:cNvSpPr/>
+          <p:nvPr/>
+        </p:nvSpPr>
+        <p:spPr>
+          <a:xfrm>
+            <a:off x="566928" y="1371600"/>
+            <a:ext cx="11057839" cy="237744"/>
+          </a:xfrm>
+          <a:prstGeom prst="rect">
+            <a:avLst/>
+          </a:prstGeom>
+          <a:noFill/>
+          <a:ln/>
+        </p:spPr>
+        <p:txBody>
+          <a:bodyPr wrap="square" lIns="0" tIns="0" rIns="0" bIns="0" rtlCol="0" anchor="ctr"/>
+          <a:lstStyle/>
+          <a:p>
+            <a:pPr indent="0" marL="0">
+              <a:buNone/>
+            </a:pPr>
+            <a:r>
+              <a:rPr lang="en-US" sz="1100" b="1" dirty="0">
+                <a:solidFill>
+                  <a:srgbClr val="10161F"/>
+                </a:solidFill>
+                <a:latin typeface="Pretendard" pitchFamily="34" charset="0"/>
+                <a:ea typeface="Pretendard" pitchFamily="34" charset="-122"/>
+                <a:cs typeface="Pretendard" pitchFamily="34" charset="-120"/>
+              </a:rPr>
+              <a:t>거래 안정성 확보를 위한 필수 법률·물리·임대차 실사 점검 항목 (총 6건)</a:t>
+            </a:r>
+            <a:endParaRPr lang="en-US" sz="1100" dirty="0"/>
+          </a:p>
+        </p:txBody>
+      </p:sp>
+      <p:sp>
+        <p:nvSpPr>
+          <p:cNvPr id="7" name="Shape 5"/>
+          <p:cNvSpPr/>
+          <p:nvPr/>
+        </p:nvSpPr>
+        <p:spPr>
+          <a:xfrm>
+            <a:off x="566928" y="1719072"/>
+            <a:ext cx="5368900" cy="868680"/>
+          </a:xfrm>
+          <a:prstGeom prst="rect">
+            <a:avLst/>
           </a:prstGeom>
           <a:solidFill>
-            <a:srgbClr val="F3EBDA"/>
+            <a:srgbClr val="F7FAFC"/>
           </a:solidFill>
-          <a:ln w="10160">
+          <a:ln w="6350">
             <a:solidFill>
               <a:srgbClr val="D9B668"/>
             </a:solidFill>
@@ -2837,72 +2696,92 @@
       </p:sp>
       <p:sp>
         <p:nvSpPr>
-          <p:cNvPr id="7" name="Text 5"/>
-          <p:cNvSpPr/>
-          <p:nvPr/>
-        </p:nvSpPr>
-        <p:spPr>
-          <a:xfrm>
-            <a:off x="749808" y="5093208"/>
-            <a:ext cx="1691640" cy="256032"/>
-          </a:xfrm>
-          <a:prstGeom prst="rect">
-            <a:avLst/>
-          </a:prstGeom>
-          <a:noFill/>
-          <a:ln/>
-        </p:spPr>
-        <p:txBody>
-          <a:bodyPr wrap="square" lIns="0" tIns="0" rIns="0" bIns="0" rtlCol="0" anchor="ctr"/>
-          <a:lstStyle/>
-          <a:p>
-            <a:pPr indent="0" marL="0">
-              <a:buNone/>
-            </a:pPr>
-            <a:r>
-              <a:rPr lang="en-US" sz="1050" b="1" dirty="0">
-                <a:solidFill>
-                  <a:srgbClr val="977024"/>
-                </a:solidFill>
-                <a:latin typeface="Pretendard" pitchFamily="34" charset="0"/>
-                <a:ea typeface="Pretendard" pitchFamily="34" charset="-122"/>
-                <a:cs typeface="Pretendard" pitchFamily="34" charset="-120"/>
-              </a:rPr>
-              <a:t>종합 가치 제안</a:t>
-            </a:r>
-            <a:endParaRPr lang="en-US" sz="1050" dirty="0"/>
-          </a:p>
-        </p:txBody>
-      </p:sp>
-      <p:sp>
-        <p:nvSpPr>
-          <p:cNvPr id="8" name="Text 6"/>
-          <p:cNvSpPr/>
-          <p:nvPr/>
-        </p:nvSpPr>
-        <p:spPr>
-          <a:xfrm>
-            <a:off x="2487168" y="5056632"/>
-            <a:ext cx="8954719" cy="658368"/>
-          </a:xfrm>
-          <a:prstGeom prst="rect">
-            <a:avLst/>
-          </a:prstGeom>
-          <a:noFill/>
-          <a:ln/>
-        </p:spPr>
-        <p:txBody>
-          <a:bodyPr wrap="square" lIns="0" tIns="0" rIns="0" bIns="0" rtlCol="0" anchor="ctr"/>
+          <p:cNvPr id="8" name="Shape 6"/>
+          <p:cNvSpPr/>
+          <p:nvPr/>
+        </p:nvSpPr>
+        <p:spPr>
+          <a:xfrm>
+            <a:off x="704088" y="1883664"/>
+            <a:ext cx="320040" cy="320040"/>
+          </a:xfrm>
+          <a:prstGeom prst="rect">
+            <a:avLst/>
+          </a:prstGeom>
+          <a:solidFill>
+            <a:srgbClr val="977024"/>
+          </a:solidFill>
+          <a:ln/>
+        </p:spPr>
+      </p:sp>
+      <p:sp>
+        <p:nvSpPr>
+          <p:cNvPr id="9" name="Text 7"/>
+          <p:cNvSpPr/>
+          <p:nvPr/>
+        </p:nvSpPr>
+        <p:spPr>
+          <a:xfrm>
+            <a:off x="704088" y="1883664"/>
+            <a:ext cx="320040" cy="320040"/>
+          </a:xfrm>
+          <a:prstGeom prst="rect">
+            <a:avLst/>
+          </a:prstGeom>
+          <a:noFill/>
+          <a:ln/>
+        </p:spPr>
+        <p:txBody>
+          <a:bodyPr wrap="square" rtlCol="0" anchor="ctr"/>
+          <a:lstStyle/>
+          <a:p>
+            <a:pPr algn="ctr" indent="0" marL="0">
+              <a:buNone/>
+            </a:pPr>
+            <a:r>
+              <a:rPr lang="en-US" sz="1100" b="1" dirty="0">
+                <a:solidFill>
+                  <a:srgbClr val="000000"/>
+                </a:solidFill>
+                <a:latin typeface="Pretendard" pitchFamily="34" charset="0"/>
+                <a:ea typeface="Pretendard" pitchFamily="34" charset="-122"/>
+                <a:cs typeface="Pretendard" pitchFamily="34" charset="-120"/>
+              </a:rPr>
+              <a:t>✓</a:t>
+            </a:r>
+            <a:endParaRPr lang="en-US" sz="1100" dirty="0"/>
+          </a:p>
+        </p:txBody>
+      </p:sp>
+      <p:sp>
+        <p:nvSpPr>
+          <p:cNvPr id="10" name="Text 8"/>
+          <p:cNvSpPr/>
+          <p:nvPr/>
+        </p:nvSpPr>
+        <p:spPr>
+          <a:xfrm>
+            <a:off x="1115568" y="1810512"/>
+            <a:ext cx="4683100" cy="722376"/>
+          </a:xfrm>
+          <a:prstGeom prst="rect">
+            <a:avLst/>
+          </a:prstGeom>
+          <a:noFill/>
+          <a:ln/>
+        </p:spPr>
+        <p:txBody>
+          <a:bodyPr wrap="square" rtlCol="0" anchor="ctr"/>
           <a:lstStyle/>
           <a:p>
             <a:pPr indent="0" marL="0">
               <a:lnSpc>
-                <a:spcPct val="125000"/>
+                <a:spcPct val="110000"/>
               </a:lnSpc>
               <a:buNone/>
             </a:pPr>
             <a:r>
-              <a:rPr lang="en-US" sz="1100" dirty="0">
+              <a:rPr lang="en-US" sz="950" dirty="0">
                 <a:solidFill>
                   <a:srgbClr val="10161F"/>
                 </a:solidFill>
@@ -2910,7 +2789,91 @@
                 <a:ea typeface="Pretendard" pitchFamily="34" charset="-122"/>
                 <a:cs typeface="Pretendard" pitchFamily="34" charset="-120"/>
               </a:rPr>
-              <a:t>관점에서 안정적 월 임대수익과 우량 메디컬 테넌트를 보유한 핵심 투자 자산입니다.</a:t>
+              <a:t>등기부등본 갑구/을구 권리관계 및 근저당 채권최고액 전액 말소 조건 원본 대조</a:t>
+            </a:r>
+            <a:endParaRPr lang="en-US" sz="950" dirty="0"/>
+          </a:p>
+        </p:txBody>
+      </p:sp>
+      <p:sp>
+        <p:nvSpPr>
+          <p:cNvPr id="11" name="Shape 9"/>
+          <p:cNvSpPr/>
+          <p:nvPr/>
+        </p:nvSpPr>
+        <p:spPr>
+          <a:xfrm>
+            <a:off x="566928" y="2715768"/>
+            <a:ext cx="5368900" cy="868680"/>
+          </a:xfrm>
+          <a:prstGeom prst="rect">
+            <a:avLst/>
+          </a:prstGeom>
+          <a:solidFill>
+            <a:srgbClr val="F7FAFC"/>
+          </a:solidFill>
+          <a:ln w="6350">
+            <a:solidFill>
+              <a:srgbClr val="D9B668"/>
+            </a:solidFill>
+            <a:prstDash val="solid"/>
+          </a:ln>
+        </p:spPr>
+      </p:sp>
+      <p:sp>
+        <p:nvSpPr>
+          <p:cNvPr id="12" name="Shape 10"/>
+          <p:cNvSpPr/>
+          <p:nvPr/>
+        </p:nvSpPr>
+        <p:spPr>
+          <a:xfrm>
+            <a:off x="704088" y="2880360"/>
+            <a:ext cx="320040" cy="320040"/>
+          </a:xfrm>
+          <a:prstGeom prst="rect">
+            <a:avLst/>
+          </a:prstGeom>
+          <a:solidFill>
+            <a:srgbClr val="977024"/>
+          </a:solidFill>
+          <a:ln/>
+        </p:spPr>
+      </p:sp>
+      <p:sp>
+        <p:nvSpPr>
+          <p:cNvPr id="13" name="Text 11"/>
+          <p:cNvSpPr/>
+          <p:nvPr/>
+        </p:nvSpPr>
+        <p:spPr>
+          <a:xfrm>
+            <a:off x="704088" y="2880360"/>
+            <a:ext cx="320040" cy="320040"/>
+          </a:xfrm>
+          <a:prstGeom prst="rect">
+            <a:avLst/>
+          </a:prstGeom>
+          <a:noFill/>
+          <a:ln/>
+        </p:spPr>
+        <p:txBody>
+          <a:bodyPr wrap="square" rtlCol="0" anchor="ctr"/>
+          <a:lstStyle/>
+          <a:p>
+            <a:pPr algn="ctr" indent="0" marL="0">
+              <a:buNone/>
+            </a:pPr>
+            <a:r>
+              <a:rPr lang="en-US" sz="1100" b="1" dirty="0">
+                <a:solidFill>
+                  <a:srgbClr val="000000"/>
+                </a:solidFill>
+                <a:latin typeface="Pretendard" pitchFamily="34" charset="0"/>
+                <a:ea typeface="Pretendard" pitchFamily="34" charset="-122"/>
+                <a:cs typeface="Pretendard" pitchFamily="34" charset="-120"/>
+              </a:rPr>
+              <a:t>✓</a:t>
             </a:r>
             <a:endParaRPr lang="en-US" sz="1100" dirty="0"/>
           </a:p>
@@ -2918,7 +2881,612 @@
       </p:sp>
       <p:sp>
         <p:nvSpPr>
-          <p:cNvPr id="9" name="Text 7"/>
+          <p:cNvPr id="14" name="Text 12"/>
+          <p:cNvSpPr/>
+          <p:nvPr/>
+        </p:nvSpPr>
+        <p:spPr>
+          <a:xfrm>
+            <a:off x="1115568" y="2807208"/>
+            <a:ext cx="4683100" cy="722376"/>
+          </a:xfrm>
+          <a:prstGeom prst="rect">
+            <a:avLst/>
+          </a:prstGeom>
+          <a:noFill/>
+          <a:ln/>
+        </p:spPr>
+        <p:txBody>
+          <a:bodyPr wrap="square" rtlCol="0" anchor="ctr"/>
+          <a:lstStyle/>
+          <a:p>
+            <a:pPr indent="0" marL="0">
+              <a:lnSpc>
+                <a:spcPct val="110000"/>
+              </a:lnSpc>
+              <a:buNone/>
+            </a:pPr>
+            <a:r>
+              <a:rPr lang="en-US" sz="950" dirty="0">
+                <a:solidFill>
+                  <a:srgbClr val="10161F"/>
+                </a:solidFill>
+                <a:latin typeface="Pretendard" pitchFamily="34" charset="0"/>
+                <a:ea typeface="Pretendard" pitchFamily="34" charset="-122"/>
+                <a:cs typeface="Pretendard" pitchFamily="34" charset="-120"/>
+              </a:rPr>
+              <a:t>임대차 원본 계약서 대조 (보증금, 월임대료, 관리비 실입금 내역 및 제소전화해조서)</a:t>
+            </a:r>
+            <a:endParaRPr lang="en-US" sz="950" dirty="0"/>
+          </a:p>
+        </p:txBody>
+      </p:sp>
+      <p:sp>
+        <p:nvSpPr>
+          <p:cNvPr id="15" name="Shape 13"/>
+          <p:cNvSpPr/>
+          <p:nvPr/>
+        </p:nvSpPr>
+        <p:spPr>
+          <a:xfrm>
+            <a:off x="566928" y="3712464"/>
+            <a:ext cx="5368900" cy="868680"/>
+          </a:xfrm>
+          <a:prstGeom prst="rect">
+            <a:avLst/>
+          </a:prstGeom>
+          <a:solidFill>
+            <a:srgbClr val="F7FAFC"/>
+          </a:solidFill>
+          <a:ln w="6350">
+            <a:solidFill>
+              <a:srgbClr val="D9B668"/>
+            </a:solidFill>
+            <a:prstDash val="solid"/>
+          </a:ln>
+        </p:spPr>
+      </p:sp>
+      <p:sp>
+        <p:nvSpPr>
+          <p:cNvPr id="16" name="Shape 14"/>
+          <p:cNvSpPr/>
+          <p:nvPr/>
+        </p:nvSpPr>
+        <p:spPr>
+          <a:xfrm>
+            <a:off x="704088" y="3877056"/>
+            <a:ext cx="320040" cy="320040"/>
+          </a:xfrm>
+          <a:prstGeom prst="rect">
+            <a:avLst/>
+          </a:prstGeom>
+          <a:solidFill>
+            <a:srgbClr val="977024"/>
+          </a:solidFill>
+          <a:ln/>
+        </p:spPr>
+      </p:sp>
+      <p:sp>
+        <p:nvSpPr>
+          <p:cNvPr id="17" name="Text 15"/>
+          <p:cNvSpPr/>
+          <p:nvPr/>
+        </p:nvSpPr>
+        <p:spPr>
+          <a:xfrm>
+            <a:off x="704088" y="3877056"/>
+            <a:ext cx="320040" cy="320040"/>
+          </a:xfrm>
+          <a:prstGeom prst="rect">
+            <a:avLst/>
+          </a:prstGeom>
+          <a:noFill/>
+          <a:ln/>
+        </p:spPr>
+        <p:txBody>
+          <a:bodyPr wrap="square" rtlCol="0" anchor="ctr"/>
+          <a:lstStyle/>
+          <a:p>
+            <a:pPr algn="ctr" indent="0" marL="0">
+              <a:buNone/>
+            </a:pPr>
+            <a:r>
+              <a:rPr lang="en-US" sz="1100" b="1" dirty="0">
+                <a:solidFill>
+                  <a:srgbClr val="000000"/>
+                </a:solidFill>
+                <a:latin typeface="Pretendard" pitchFamily="34" charset="0"/>
+                <a:ea typeface="Pretendard" pitchFamily="34" charset="-122"/>
+                <a:cs typeface="Pretendard" pitchFamily="34" charset="-120"/>
+              </a:rPr>
+              <a:t>✓</a:t>
+            </a:r>
+            <a:endParaRPr lang="en-US" sz="1100" dirty="0"/>
+          </a:p>
+        </p:txBody>
+      </p:sp>
+      <p:sp>
+        <p:nvSpPr>
+          <p:cNvPr id="18" name="Text 16"/>
+          <p:cNvSpPr/>
+          <p:nvPr/>
+        </p:nvSpPr>
+        <p:spPr>
+          <a:xfrm>
+            <a:off x="1115568" y="3803904"/>
+            <a:ext cx="4683100" cy="722376"/>
+          </a:xfrm>
+          <a:prstGeom prst="rect">
+            <a:avLst/>
+          </a:prstGeom>
+          <a:noFill/>
+          <a:ln/>
+        </p:spPr>
+        <p:txBody>
+          <a:bodyPr wrap="square" rtlCol="0" anchor="ctr"/>
+          <a:lstStyle/>
+          <a:p>
+            <a:pPr indent="0" marL="0">
+              <a:lnSpc>
+                <a:spcPct val="110000"/>
+              </a:lnSpc>
+              <a:buNone/>
+            </a:pPr>
+            <a:r>
+              <a:rPr lang="en-US" sz="950" dirty="0">
+                <a:solidFill>
+                  <a:srgbClr val="10161F"/>
+                </a:solidFill>
+                <a:latin typeface="Pretendard" pitchFamily="34" charset="0"/>
+                <a:ea typeface="Pretendard" pitchFamily="34" charset="-122"/>
+                <a:cs typeface="Pretendard" pitchFamily="34" charset="-120"/>
+              </a:rPr>
+              <a:t>건축물대장상 위반건축물 등재 여부 및 불법 증축·용도변경 이행강제금 납부 이력 점검</a:t>
+            </a:r>
+            <a:endParaRPr lang="en-US" sz="950" dirty="0"/>
+          </a:p>
+        </p:txBody>
+      </p:sp>
+      <p:sp>
+        <p:nvSpPr>
+          <p:cNvPr id="19" name="Shape 17"/>
+          <p:cNvSpPr/>
+          <p:nvPr/>
+        </p:nvSpPr>
+        <p:spPr>
+          <a:xfrm>
+            <a:off x="6255868" y="1719072"/>
+            <a:ext cx="5368900" cy="868680"/>
+          </a:xfrm>
+          <a:prstGeom prst="rect">
+            <a:avLst/>
+          </a:prstGeom>
+          <a:solidFill>
+            <a:srgbClr val="F7FAFC"/>
+          </a:solidFill>
+          <a:ln w="6350">
+            <a:solidFill>
+              <a:srgbClr val="D9B668"/>
+            </a:solidFill>
+            <a:prstDash val="solid"/>
+          </a:ln>
+        </p:spPr>
+      </p:sp>
+      <p:sp>
+        <p:nvSpPr>
+          <p:cNvPr id="20" name="Shape 18"/>
+          <p:cNvSpPr/>
+          <p:nvPr/>
+        </p:nvSpPr>
+        <p:spPr>
+          <a:xfrm>
+            <a:off x="6393028" y="1883664"/>
+            <a:ext cx="320040" cy="320040"/>
+          </a:xfrm>
+          <a:prstGeom prst="rect">
+            <a:avLst/>
+          </a:prstGeom>
+          <a:solidFill>
+            <a:srgbClr val="977024"/>
+          </a:solidFill>
+          <a:ln/>
+        </p:spPr>
+      </p:sp>
+      <p:sp>
+        <p:nvSpPr>
+          <p:cNvPr id="21" name="Text 19"/>
+          <p:cNvSpPr/>
+          <p:nvPr/>
+        </p:nvSpPr>
+        <p:spPr>
+          <a:xfrm>
+            <a:off x="6393028" y="1883664"/>
+            <a:ext cx="320040" cy="320040"/>
+          </a:xfrm>
+          <a:prstGeom prst="rect">
+            <a:avLst/>
+          </a:prstGeom>
+          <a:noFill/>
+          <a:ln/>
+        </p:spPr>
+        <p:txBody>
+          <a:bodyPr wrap="square" rtlCol="0" anchor="ctr"/>
+          <a:lstStyle/>
+          <a:p>
+            <a:pPr algn="ctr" indent="0" marL="0">
+              <a:buNone/>
+            </a:pPr>
+            <a:r>
+              <a:rPr lang="en-US" sz="1100" b="1" dirty="0">
+                <a:solidFill>
+                  <a:srgbClr val="000000"/>
+                </a:solidFill>
+                <a:latin typeface="Pretendard" pitchFamily="34" charset="0"/>
+                <a:ea typeface="Pretendard" pitchFamily="34" charset="-122"/>
+                <a:cs typeface="Pretendard" pitchFamily="34" charset="-120"/>
+              </a:rPr>
+              <a:t>✓</a:t>
+            </a:r>
+            <a:endParaRPr lang="en-US" sz="1100" dirty="0"/>
+          </a:p>
+        </p:txBody>
+      </p:sp>
+      <p:sp>
+        <p:nvSpPr>
+          <p:cNvPr id="22" name="Text 20"/>
+          <p:cNvSpPr/>
+          <p:nvPr/>
+        </p:nvSpPr>
+        <p:spPr>
+          <a:xfrm>
+            <a:off x="6804508" y="1810512"/>
+            <a:ext cx="4683100" cy="722376"/>
+          </a:xfrm>
+          <a:prstGeom prst="rect">
+            <a:avLst/>
+          </a:prstGeom>
+          <a:noFill/>
+          <a:ln/>
+        </p:spPr>
+        <p:txBody>
+          <a:bodyPr wrap="square" rtlCol="0" anchor="ctr"/>
+          <a:lstStyle/>
+          <a:p>
+            <a:pPr indent="0" marL="0">
+              <a:lnSpc>
+                <a:spcPct val="110000"/>
+              </a:lnSpc>
+              <a:buNone/>
+            </a:pPr>
+            <a:r>
+              <a:rPr lang="en-US" sz="950" dirty="0">
+                <a:solidFill>
+                  <a:srgbClr val="10161F"/>
+                </a:solidFill>
+                <a:latin typeface="Pretendard" pitchFamily="34" charset="0"/>
+                <a:ea typeface="Pretendard" pitchFamily="34" charset="-122"/>
+                <a:cs typeface="Pretendard" pitchFamily="34" charset="-120"/>
+              </a:rPr>
+              <a:t>토지이용계획확인원상 도시계획시설 저촉, 건축선 후퇴, 지구단위계획 특별계획구역 확인</a:t>
+            </a:r>
+            <a:endParaRPr lang="en-US" sz="950" dirty="0"/>
+          </a:p>
+        </p:txBody>
+      </p:sp>
+      <p:sp>
+        <p:nvSpPr>
+          <p:cNvPr id="23" name="Shape 21"/>
+          <p:cNvSpPr/>
+          <p:nvPr/>
+        </p:nvSpPr>
+        <p:spPr>
+          <a:xfrm>
+            <a:off x="6255868" y="2715768"/>
+            <a:ext cx="5368900" cy="868680"/>
+          </a:xfrm>
+          <a:prstGeom prst="rect">
+            <a:avLst/>
+          </a:prstGeom>
+          <a:solidFill>
+            <a:srgbClr val="F7FAFC"/>
+          </a:solidFill>
+          <a:ln w="6350">
+            <a:solidFill>
+              <a:srgbClr val="D9B668"/>
+            </a:solidFill>
+            <a:prstDash val="solid"/>
+          </a:ln>
+        </p:spPr>
+      </p:sp>
+      <p:sp>
+        <p:nvSpPr>
+          <p:cNvPr id="24" name="Shape 22"/>
+          <p:cNvSpPr/>
+          <p:nvPr/>
+        </p:nvSpPr>
+        <p:spPr>
+          <a:xfrm>
+            <a:off x="6393028" y="2880360"/>
+            <a:ext cx="320040" cy="320040"/>
+          </a:xfrm>
+          <a:prstGeom prst="rect">
+            <a:avLst/>
+          </a:prstGeom>
+          <a:solidFill>
+            <a:srgbClr val="977024"/>
+          </a:solidFill>
+          <a:ln/>
+        </p:spPr>
+      </p:sp>
+      <p:sp>
+        <p:nvSpPr>
+          <p:cNvPr id="25" name="Text 23"/>
+          <p:cNvSpPr/>
+          <p:nvPr/>
+        </p:nvSpPr>
+        <p:spPr>
+          <a:xfrm>
+            <a:off x="6393028" y="2880360"/>
+            <a:ext cx="320040" cy="320040"/>
+          </a:xfrm>
+          <a:prstGeom prst="rect">
+            <a:avLst/>
+          </a:prstGeom>
+          <a:noFill/>
+          <a:ln/>
+        </p:spPr>
+        <p:txBody>
+          <a:bodyPr wrap="square" rtlCol="0" anchor="ctr"/>
+          <a:lstStyle/>
+          <a:p>
+            <a:pPr algn="ctr" indent="0" marL="0">
+              <a:buNone/>
+            </a:pPr>
+            <a:r>
+              <a:rPr lang="en-US" sz="1100" b="1" dirty="0">
+                <a:solidFill>
+                  <a:srgbClr val="000000"/>
+                </a:solidFill>
+                <a:latin typeface="Pretendard" pitchFamily="34" charset="0"/>
+                <a:ea typeface="Pretendard" pitchFamily="34" charset="-122"/>
+                <a:cs typeface="Pretendard" pitchFamily="34" charset="-120"/>
+              </a:rPr>
+              <a:t>✓</a:t>
+            </a:r>
+            <a:endParaRPr lang="en-US" sz="1100" dirty="0"/>
+          </a:p>
+        </p:txBody>
+      </p:sp>
+      <p:sp>
+        <p:nvSpPr>
+          <p:cNvPr id="26" name="Text 24"/>
+          <p:cNvSpPr/>
+          <p:nvPr/>
+        </p:nvSpPr>
+        <p:spPr>
+          <a:xfrm>
+            <a:off x="6804508" y="2807208"/>
+            <a:ext cx="4683100" cy="722376"/>
+          </a:xfrm>
+          <a:prstGeom prst="rect">
+            <a:avLst/>
+          </a:prstGeom>
+          <a:noFill/>
+          <a:ln/>
+        </p:spPr>
+        <p:txBody>
+          <a:bodyPr wrap="square" rtlCol="0" anchor="ctr"/>
+          <a:lstStyle/>
+          <a:p>
+            <a:pPr indent="0" marL="0">
+              <a:lnSpc>
+                <a:spcPct val="110000"/>
+              </a:lnSpc>
+              <a:buNone/>
+            </a:pPr>
+            <a:r>
+              <a:rPr lang="en-US" sz="950" dirty="0">
+                <a:solidFill>
+                  <a:srgbClr val="10161F"/>
+                </a:solidFill>
+                <a:latin typeface="Pretendard" pitchFamily="34" charset="0"/>
+                <a:ea typeface="Pretendard" pitchFamily="34" charset="-122"/>
+                <a:cs typeface="Pretendard" pitchFamily="34" charset="-120"/>
+              </a:rPr>
+              <a:t>기계식 주차기 정기 안전점검 합격증, 승강기 검사필증, 소방 완비증명서 실물 실사</a:t>
+            </a:r>
+            <a:endParaRPr lang="en-US" sz="950" dirty="0"/>
+          </a:p>
+        </p:txBody>
+      </p:sp>
+      <p:sp>
+        <p:nvSpPr>
+          <p:cNvPr id="27" name="Shape 25"/>
+          <p:cNvSpPr/>
+          <p:nvPr/>
+        </p:nvSpPr>
+        <p:spPr>
+          <a:xfrm>
+            <a:off x="6255868" y="3712464"/>
+            <a:ext cx="5368900" cy="868680"/>
+          </a:xfrm>
+          <a:prstGeom prst="rect">
+            <a:avLst/>
+          </a:prstGeom>
+          <a:solidFill>
+            <a:srgbClr val="F7FAFC"/>
+          </a:solidFill>
+          <a:ln w="6350">
+            <a:solidFill>
+              <a:srgbClr val="D9B668"/>
+            </a:solidFill>
+            <a:prstDash val="solid"/>
+          </a:ln>
+        </p:spPr>
+      </p:sp>
+      <p:sp>
+        <p:nvSpPr>
+          <p:cNvPr id="28" name="Shape 26"/>
+          <p:cNvSpPr/>
+          <p:nvPr/>
+        </p:nvSpPr>
+        <p:spPr>
+          <a:xfrm>
+            <a:off x="6393028" y="3877056"/>
+            <a:ext cx="320040" cy="320040"/>
+          </a:xfrm>
+          <a:prstGeom prst="rect">
+            <a:avLst/>
+          </a:prstGeom>
+          <a:solidFill>
+            <a:srgbClr val="977024"/>
+          </a:solidFill>
+          <a:ln/>
+        </p:spPr>
+      </p:sp>
+      <p:sp>
+        <p:nvSpPr>
+          <p:cNvPr id="29" name="Text 27"/>
+          <p:cNvSpPr/>
+          <p:nvPr/>
+        </p:nvSpPr>
+        <p:spPr>
+          <a:xfrm>
+            <a:off x="6393028" y="3877056"/>
+            <a:ext cx="320040" cy="320040"/>
+          </a:xfrm>
+          <a:prstGeom prst="rect">
+            <a:avLst/>
+          </a:prstGeom>
+          <a:noFill/>
+          <a:ln/>
+        </p:spPr>
+        <p:txBody>
+          <a:bodyPr wrap="square" rtlCol="0" anchor="ctr"/>
+          <a:lstStyle/>
+          <a:p>
+            <a:pPr algn="ctr" indent="0" marL="0">
+              <a:buNone/>
+            </a:pPr>
+            <a:r>
+              <a:rPr lang="en-US" sz="1100" b="1" dirty="0">
+                <a:solidFill>
+                  <a:srgbClr val="000000"/>
+                </a:solidFill>
+                <a:latin typeface="Pretendard" pitchFamily="34" charset="0"/>
+                <a:ea typeface="Pretendard" pitchFamily="34" charset="-122"/>
+                <a:cs typeface="Pretendard" pitchFamily="34" charset="-120"/>
+              </a:rPr>
+              <a:t>✓</a:t>
+            </a:r>
+            <a:endParaRPr lang="en-US" sz="1100" dirty="0"/>
+          </a:p>
+        </p:txBody>
+      </p:sp>
+      <p:sp>
+        <p:nvSpPr>
+          <p:cNvPr id="30" name="Text 28"/>
+          <p:cNvSpPr/>
+          <p:nvPr/>
+        </p:nvSpPr>
+        <p:spPr>
+          <a:xfrm>
+            <a:off x="6804508" y="3803904"/>
+            <a:ext cx="4683100" cy="722376"/>
+          </a:xfrm>
+          <a:prstGeom prst="rect">
+            <a:avLst/>
+          </a:prstGeom>
+          <a:noFill/>
+          <a:ln/>
+        </p:spPr>
+        <p:txBody>
+          <a:bodyPr wrap="square" rtlCol="0" anchor="ctr"/>
+          <a:lstStyle/>
+          <a:p>
+            <a:pPr indent="0" marL="0">
+              <a:lnSpc>
+                <a:spcPct val="110000"/>
+              </a:lnSpc>
+              <a:buNone/>
+            </a:pPr>
+            <a:r>
+              <a:rPr lang="en-US" sz="950" dirty="0">
+                <a:solidFill>
+                  <a:srgbClr val="10161F"/>
+                </a:solidFill>
+                <a:latin typeface="Pretendard" pitchFamily="34" charset="0"/>
+                <a:ea typeface="Pretendard" pitchFamily="34" charset="-122"/>
+                <a:cs typeface="Pretendard" pitchFamily="34" charset="-120"/>
+              </a:rPr>
+              <a:t>정화조 용량 대비 현 업종 적합성 및 하수도 원인자부담금 추가 부과 대상 여부 확인</a:t>
+            </a:r>
+            <a:endParaRPr lang="en-US" sz="950" dirty="0"/>
+          </a:p>
+        </p:txBody>
+      </p:sp>
+      <p:sp>
+        <p:nvSpPr>
+          <p:cNvPr id="31" name="Shape 29"/>
+          <p:cNvSpPr/>
+          <p:nvPr/>
+        </p:nvSpPr>
+        <p:spPr>
+          <a:xfrm>
+            <a:off x="566928" y="5760720"/>
+            <a:ext cx="11057839" cy="594360"/>
+          </a:xfrm>
+          <a:prstGeom prst="rect">
+            <a:avLst/>
+          </a:prstGeom>
+          <a:solidFill>
+            <a:srgbClr val="D9B668"/>
+          </a:solidFill>
+          <a:ln/>
+        </p:spPr>
+      </p:sp>
+      <p:sp>
+        <p:nvSpPr>
+          <p:cNvPr id="32" name="Text 30"/>
+          <p:cNvSpPr/>
+          <p:nvPr/>
+        </p:nvSpPr>
+        <p:spPr>
+          <a:xfrm>
+            <a:off x="749808" y="5833872"/>
+            <a:ext cx="10692079" cy="448056"/>
+          </a:xfrm>
+          <a:prstGeom prst="rect">
+            <a:avLst/>
+          </a:prstGeom>
+          <a:noFill/>
+          <a:ln/>
+        </p:spPr>
+        <p:txBody>
+          <a:bodyPr wrap="square" rtlCol="0" anchor="ctr"/>
+          <a:lstStyle/>
+          <a:p>
+            <a:pPr indent="0" marL="0">
+              <a:buNone/>
+            </a:pPr>
+            <a:r>
+              <a:rPr lang="en-US" sz="950" b="1" dirty="0">
+                <a:solidFill>
+                  <a:srgbClr val="977024"/>
+                </a:solidFill>
+                <a:latin typeface="Pretendard" pitchFamily="34" charset="0"/>
+                <a:ea typeface="Pretendard" pitchFamily="34" charset="-122"/>
+                <a:cs typeface="Pretendard" pitchFamily="34" charset="-120"/>
+              </a:rPr>
+              <a:t>※ 본 체크리스트는 계약 전 매수인의 안전한 자산 인수를 위한 필수 확인 사항이며, 실사(Due Diligence) 결과에 따라 매매 조건 및 잔금 일정이 조정될 수 있습니다.</a:t>
+            </a:r>
+            <a:endParaRPr lang="en-US" sz="950" dirty="0"/>
+          </a:p>
+        </p:txBody>
+      </p:sp>
+      <p:sp>
+        <p:nvSpPr>
+          <p:cNvPr id="33" name="Text 31"/>
           <p:cNvSpPr/>
           <p:nvPr/>
         </p:nvSpPr>
@@ -2957,7 +3525,7 @@
       </p:sp>
       <p:sp>
         <p:nvSpPr>
-          <p:cNvPr id="10" name="Text 8"/>
+          <p:cNvPr id="34" name="Text 32"/>
           <p:cNvSpPr/>
           <p:nvPr/>
         </p:nvSpPr>
@@ -2988,7 +3556,7 @@
                 <a:ea typeface="Arial" pitchFamily="34" charset="-122"/>
                 <a:cs typeface="Arial" pitchFamily="34" charset="-120"/>
               </a:rPr>
-              <a:t>9</a:t>
+              <a:t>10</a:t>
             </a:r>
             <a:endParaRPr lang="en-US" sz="900" dirty="0"/>
           </a:p>
@@ -3079,7 +3647,7 @@
                 <a:ea typeface="Arial" pitchFamily="34" charset="-122"/>
                 <a:cs typeface="Arial" pitchFamily="34" charset="-120"/>
               </a:rPr>
-              <a:t>10</a:t>
+              <a:t>11</a:t>
             </a:r>
             <a:endParaRPr lang="en-US" sz="1300" dirty="0"/>
           </a:p>
@@ -3118,7 +3686,7 @@
                 <a:ea typeface="Arial" pitchFamily="34" charset="-122"/>
                 <a:cs typeface="Arial" pitchFamily="34" charset="-120"/>
               </a:rPr>
-              <a:t>Risk</a:t>
+              <a:t>Process</a:t>
             </a:r>
             <a:endParaRPr lang="en-US" sz="950" dirty="0"/>
           </a:p>
@@ -3157,7 +3725,7 @@
                 <a:ea typeface="Pretendard" pitchFamily="34" charset="-122"/>
                 <a:cs typeface="Pretendard" pitchFamily="34" charset="-120"/>
               </a:rPr>
-              <a:t>리스크 점검</a:t>
+              <a:t>진행 절차</a:t>
             </a:r>
             <a:endParaRPr lang="en-US" sz="2300" dirty="0"/>
           </a:p>
@@ -3171,12 +3739,12 @@
         </p:nvSpPr>
         <p:spPr>
           <a:xfrm>
-            <a:off x="566928" y="1417320"/>
-            <a:ext cx="5400904" cy="3657600"/>
+            <a:off x="566928" y="1572768"/>
+            <a:ext cx="11057839" cy="3200400"/>
           </a:xfrm>
           <a:prstGeom prst="roundRect">
             <a:avLst>
-              <a:gd name="adj" fmla="val 1500"/>
+              <a:gd name="adj" fmla="val 1714"/>
             </a:avLst>
           </a:prstGeom>
           <a:solidFill>
@@ -3198,10 +3766,10 @@
         </p:nvSpPr>
         <p:spPr>
           <a:xfrm>
-            <a:off x="566928" y="1417320"/>
-            <a:ext cx="5400904" cy="45720"/>
-          </a:xfrm>
-          <a:prstGeom prst="rect">
+            <a:off x="786384" y="1792224"/>
+            <a:ext cx="438912" cy="438912"/>
+          </a:xfrm>
+          <a:prstGeom prst="ellipse">
             <a:avLst/>
           </a:prstGeom>
           <a:solidFill>
@@ -3218,434 +3786,205 @@
         </p:nvSpPr>
         <p:spPr>
           <a:xfrm>
-            <a:off x="795528" y="1618488"/>
-            <a:ext cx="4943704" cy="292608"/>
-          </a:xfrm>
-          <a:prstGeom prst="rect">
-            <a:avLst/>
-          </a:prstGeom>
-          <a:noFill/>
-          <a:ln/>
-        </p:spPr>
-        <p:txBody>
-          <a:bodyPr wrap="square" lIns="0" tIns="0" rIns="0" bIns="0" rtlCol="0" anchor="ctr"/>
-          <a:lstStyle/>
-          <a:p>
-            <a:pPr indent="0" marL="0">
-              <a:buNone/>
-            </a:pPr>
-            <a:r>
-              <a:rPr lang="en-US" sz="1350" b="1" dirty="0">
-                <a:solidFill>
-                  <a:srgbClr val="977024"/>
-                </a:solidFill>
-                <a:latin typeface="Pretendard" pitchFamily="34" charset="0"/>
-                <a:ea typeface="Pretendard" pitchFamily="34" charset="-122"/>
-                <a:cs typeface="Pretendard" pitchFamily="34" charset="-120"/>
-              </a:rPr>
-              <a:t>메디컬 단일업종 집중</a:t>
-            </a:r>
-            <a:endParaRPr lang="en-US" sz="1350" dirty="0"/>
-          </a:p>
-        </p:txBody>
-      </p:sp>
-      <p:sp>
-        <p:nvSpPr>
-          <p:cNvPr id="9" name="Text 7"/>
-          <p:cNvSpPr/>
-          <p:nvPr/>
-        </p:nvSpPr>
-        <p:spPr>
-          <a:xfrm>
-            <a:off x="795528" y="1947672"/>
-            <a:ext cx="4943704" cy="365760"/>
-          </a:xfrm>
-          <a:prstGeom prst="rect">
-            <a:avLst/>
-          </a:prstGeom>
-          <a:noFill/>
-          <a:ln/>
-        </p:spPr>
-        <p:txBody>
-          <a:bodyPr wrap="square" lIns="0" tIns="0" rIns="0" bIns="0" rtlCol="0" anchor="ctr">
-            <a:normAutofit/>
-          </a:bodyPr>
-          <a:lstStyle/>
-          <a:p>
-            <a:pPr indent="0" marL="0">
-              <a:buNone/>
-            </a:pPr>
-            <a:r>
-              <a:rPr lang="en-US" sz="1250" b="1" dirty="0">
-                <a:solidFill>
-                  <a:srgbClr val="10161F"/>
-                </a:solidFill>
-                <a:latin typeface="Pretendard" pitchFamily="34" charset="0"/>
-                <a:ea typeface="Pretendard" pitchFamily="34" charset="-122"/>
-                <a:cs typeface="Pretendard" pitchFamily="34" charset="-120"/>
-              </a:rPr>
-              <a:t>전층 의료</a:t>
-            </a:r>
-            <a:endParaRPr lang="en-US" sz="1250" dirty="0"/>
-          </a:p>
-        </p:txBody>
-      </p:sp>
-      <p:sp>
-        <p:nvSpPr>
-          <p:cNvPr id="10" name="Text 8"/>
-          <p:cNvSpPr/>
-          <p:nvPr/>
-        </p:nvSpPr>
-        <p:spPr>
-          <a:xfrm>
-            <a:off x="795528" y="2377440"/>
-            <a:ext cx="4943704" cy="2606040"/>
-          </a:xfrm>
-          <a:prstGeom prst="rect">
-            <a:avLst/>
-          </a:prstGeom>
-          <a:noFill/>
-          <a:ln/>
-        </p:spPr>
-        <p:txBody>
-          <a:bodyPr wrap="square" lIns="0" tIns="0" rIns="0" bIns="0" rtlCol="0" anchor="t">
-            <a:normAutofit/>
-          </a:bodyPr>
-          <a:lstStyle/>
-          <a:p>
-            <a:pPr marL="342900" indent="-342900">
-              <a:lnSpc>
-                <a:spcPct val="125000"/>
-              </a:lnSpc>
-              <a:buSzPct val="100000"/>
-              <a:buChar char="•"/>
-            </a:pPr>
-            <a:r>
-              <a:rPr lang="en-US" sz="1100" dirty="0">
-                <a:solidFill>
-                  <a:srgbClr val="10161F"/>
-                </a:solidFill>
-                <a:latin typeface="Pretendard" pitchFamily="34" charset="0"/>
-                <a:ea typeface="Pretendard" pitchFamily="34" charset="-122"/>
-                <a:cs typeface="Pretendard" pitchFamily="34" charset="-120"/>
-              </a:rPr>
-              <a:t>업종 다각화 검토</a:t>
-            </a:r>
-            <a:endParaRPr lang="en-US" sz="1100" dirty="0"/>
-          </a:p>
-        </p:txBody>
-      </p:sp>
-      <p:sp>
-        <p:nvSpPr>
-          <p:cNvPr id="11" name="Shape 9"/>
-          <p:cNvSpPr/>
-          <p:nvPr/>
-        </p:nvSpPr>
-        <p:spPr>
-          <a:xfrm>
-            <a:off x="6223864" y="1417320"/>
-            <a:ext cx="5400904" cy="3657600"/>
-          </a:xfrm>
-          <a:prstGeom prst="roundRect">
-            <a:avLst>
-              <a:gd name="adj" fmla="val 1500"/>
-            </a:avLst>
-          </a:prstGeom>
-          <a:solidFill>
-            <a:srgbClr val="F7FAFC"/>
-          </a:solidFill>
-          <a:ln w="6350">
-            <a:solidFill>
-              <a:srgbClr val="CBD5E0"/>
-            </a:solidFill>
-            <a:prstDash val="solid"/>
-          </a:ln>
-        </p:spPr>
-      </p:sp>
-      <p:sp>
-        <p:nvSpPr>
-          <p:cNvPr id="12" name="Shape 10"/>
-          <p:cNvSpPr/>
-          <p:nvPr/>
-        </p:nvSpPr>
-        <p:spPr>
-          <a:xfrm>
-            <a:off x="6223864" y="1417320"/>
-            <a:ext cx="5400904" cy="45720"/>
-          </a:xfrm>
-          <a:prstGeom prst="rect">
-            <a:avLst/>
-          </a:prstGeom>
-          <a:solidFill>
-            <a:srgbClr val="B98A2E"/>
-          </a:solidFill>
-          <a:ln/>
-        </p:spPr>
-      </p:sp>
-      <p:sp>
-        <p:nvSpPr>
-          <p:cNvPr id="13" name="Text 11"/>
-          <p:cNvSpPr/>
-          <p:nvPr/>
-        </p:nvSpPr>
-        <p:spPr>
-          <a:xfrm>
-            <a:off x="6452464" y="1618488"/>
-            <a:ext cx="4943704" cy="292608"/>
-          </a:xfrm>
-          <a:prstGeom prst="rect">
-            <a:avLst/>
-          </a:prstGeom>
-          <a:noFill/>
-          <a:ln/>
-        </p:spPr>
-        <p:txBody>
-          <a:bodyPr wrap="square" lIns="0" tIns="0" rIns="0" bIns="0" rtlCol="0" anchor="ctr"/>
-          <a:lstStyle/>
-          <a:p>
-            <a:pPr indent="0" marL="0">
-              <a:buNone/>
-            </a:pPr>
-            <a:r>
-              <a:rPr lang="en-US" sz="1350" b="1" dirty="0">
-                <a:solidFill>
-                  <a:srgbClr val="977024"/>
-                </a:solidFill>
-                <a:latin typeface="Pretendard" pitchFamily="34" charset="0"/>
-                <a:ea typeface="Pretendard" pitchFamily="34" charset="-122"/>
-                <a:cs typeface="Pretendard" pitchFamily="34" charset="-120"/>
-              </a:rPr>
-              <a:t>금리 변동</a:t>
-            </a:r>
-            <a:endParaRPr lang="en-US" sz="1350" dirty="0"/>
-          </a:p>
-        </p:txBody>
-      </p:sp>
-      <p:sp>
-        <p:nvSpPr>
-          <p:cNvPr id="14" name="Text 12"/>
-          <p:cNvSpPr/>
-          <p:nvPr/>
-        </p:nvSpPr>
-        <p:spPr>
-          <a:xfrm>
-            <a:off x="6452464" y="1947672"/>
-            <a:ext cx="4943704" cy="365760"/>
-          </a:xfrm>
-          <a:prstGeom prst="rect">
-            <a:avLst/>
-          </a:prstGeom>
-          <a:noFill/>
-          <a:ln/>
-        </p:spPr>
-        <p:txBody>
-          <a:bodyPr wrap="square" lIns="0" tIns="0" rIns="0" bIns="0" rtlCol="0" anchor="ctr">
-            <a:normAutofit/>
-          </a:bodyPr>
-          <a:lstStyle/>
-          <a:p>
-            <a:pPr indent="0" marL="0">
-              <a:buNone/>
-            </a:pPr>
-            <a:r>
-              <a:rPr lang="en-US" sz="1250" b="1" dirty="0">
-                <a:solidFill>
-                  <a:srgbClr val="10161F"/>
-                </a:solidFill>
-                <a:latin typeface="Pretendard" pitchFamily="34" charset="0"/>
-                <a:ea typeface="Pretendard" pitchFamily="34" charset="-122"/>
-                <a:cs typeface="Pretendard" pitchFamily="34" charset="-120"/>
-              </a:rPr>
-              <a:t>4.1% 고정</a:t>
-            </a:r>
-            <a:endParaRPr lang="en-US" sz="1250" dirty="0"/>
-          </a:p>
-        </p:txBody>
-      </p:sp>
-      <p:sp>
-        <p:nvSpPr>
-          <p:cNvPr id="15" name="Text 13"/>
-          <p:cNvSpPr/>
-          <p:nvPr/>
-        </p:nvSpPr>
-        <p:spPr>
-          <a:xfrm>
-            <a:off x="6452464" y="2377440"/>
-            <a:ext cx="4943704" cy="2606040"/>
-          </a:xfrm>
-          <a:prstGeom prst="rect">
-            <a:avLst/>
-          </a:prstGeom>
-          <a:noFill/>
-          <a:ln/>
-        </p:spPr>
-        <p:txBody>
-          <a:bodyPr wrap="square" lIns="0" tIns="0" rIns="0" bIns="0" rtlCol="0" anchor="t">
-            <a:normAutofit/>
-          </a:bodyPr>
-          <a:lstStyle/>
-          <a:p>
-            <a:pPr marL="342900" indent="-342900">
-              <a:lnSpc>
-                <a:spcPct val="125000"/>
-              </a:lnSpc>
-              <a:buSzPct val="100000"/>
-              <a:buChar char="•"/>
-            </a:pPr>
-            <a:r>
-              <a:rPr lang="en-US" sz="1100" dirty="0">
-                <a:solidFill>
-                  <a:srgbClr val="10161F"/>
-                </a:solidFill>
-                <a:latin typeface="Pretendard" pitchFamily="34" charset="0"/>
-                <a:ea typeface="Pretendard" pitchFamily="34" charset="-122"/>
-                <a:cs typeface="Pretendard" pitchFamily="34" charset="-120"/>
-              </a:rPr>
-              <a:t>승계 대출 활용</a:t>
-            </a:r>
-            <a:endParaRPr lang="en-US" sz="1100" dirty="0"/>
-          </a:p>
-        </p:txBody>
-      </p:sp>
-      <p:sp>
-        <p:nvSpPr>
-          <p:cNvPr id="16" name="Shape 14"/>
-          <p:cNvSpPr/>
-          <p:nvPr/>
-        </p:nvSpPr>
-        <p:spPr>
-          <a:xfrm>
-            <a:off x="566928" y="5193792"/>
-            <a:ext cx="11057839" cy="621792"/>
-          </a:xfrm>
-          <a:prstGeom prst="roundRect">
-            <a:avLst>
-              <a:gd name="adj" fmla="val 8824"/>
-            </a:avLst>
-          </a:prstGeom>
-          <a:solidFill>
-            <a:srgbClr val="F7FAFC"/>
-          </a:solidFill>
-          <a:ln w="6350">
-            <a:solidFill>
-              <a:srgbClr val="CBD5E0"/>
-            </a:solidFill>
-            <a:prstDash val="solid"/>
-          </a:ln>
-        </p:spPr>
-      </p:sp>
-      <p:sp>
-        <p:nvSpPr>
-          <p:cNvPr id="17" name="Text 15"/>
-          <p:cNvSpPr/>
-          <p:nvPr/>
-        </p:nvSpPr>
-        <p:spPr>
-          <a:xfrm>
-            <a:off x="795528" y="5193792"/>
-            <a:ext cx="10600639" cy="621792"/>
-          </a:xfrm>
-          <a:prstGeom prst="rect">
-            <a:avLst/>
-          </a:prstGeom>
-          <a:noFill/>
-          <a:ln/>
-        </p:spPr>
-        <p:txBody>
-          <a:bodyPr wrap="square" lIns="0" tIns="0" rIns="0" bIns="0" rtlCol="0" anchor="ctr"/>
-          <a:lstStyle/>
-          <a:p>
-            <a:pPr indent="0" marL="0">
-              <a:buNone/>
-            </a:pPr>
-            <a:r>
-              <a:rPr lang="en-US" sz="1100" dirty="0">
-                <a:solidFill>
-                  <a:srgbClr val="10161F"/>
-                </a:solidFill>
-                <a:latin typeface="Pretendard" pitchFamily="34" charset="0"/>
-                <a:ea typeface="Pretendard" pitchFamily="34" charset="-122"/>
-                <a:cs typeface="Pretendard" pitchFamily="34" charset="-120"/>
-              </a:rPr>
-              <a:t>※ 본 리스크 체크는 공부 및 브로커 확인 기반이며, 매수 전 전문 실사팀(변호사/건축사)을 통한 정밀 실사가 필요합니다.</a:t>
-            </a:r>
-            <a:endParaRPr lang="en-US" sz="1100" dirty="0"/>
-          </a:p>
-        </p:txBody>
-      </p:sp>
-      <p:sp>
-        <p:nvSpPr>
-          <p:cNvPr id="18" name="Text 16"/>
-          <p:cNvSpPr/>
-          <p:nvPr/>
-        </p:nvSpPr>
-        <p:spPr>
-          <a:xfrm>
-            <a:off x="566928" y="6382512"/>
-            <a:ext cx="7315200" cy="219456"/>
-          </a:xfrm>
-          <a:prstGeom prst="rect">
-            <a:avLst/>
-          </a:prstGeom>
-          <a:noFill/>
-          <a:ln/>
-        </p:spPr>
-        <p:txBody>
-          <a:bodyPr wrap="square" lIns="0" tIns="0" rIns="0" bIns="0" rtlCol="0" anchor="ctr"/>
-          <a:lstStyle/>
-          <a:p>
-            <a:pPr indent="0" marL="0">
-              <a:buNone/>
-            </a:pPr>
-            <a:r>
-              <a:rPr lang="en-US" sz="800" dirty="0">
-                <a:solidFill>
-                  <a:srgbClr val="718096"/>
-                </a:solidFill>
-                <a:latin typeface="Pretendard" pitchFamily="34" charset="0"/>
-                <a:ea typeface="Pretendard" pitchFamily="34" charset="-122"/>
-                <a:cs typeface="Pretendard" pitchFamily="34" charset="-120"/>
-              </a:rPr>
-              <a:t>크리딜   |   </a:t>
-            </a:r>
-            <a:endParaRPr lang="en-US" sz="800" dirty="0"/>
-          </a:p>
-        </p:txBody>
-      </p:sp>
-      <p:sp>
-        <p:nvSpPr>
-          <p:cNvPr id="19" name="Text 17"/>
-          <p:cNvSpPr/>
-          <p:nvPr/>
-        </p:nvSpPr>
-        <p:spPr>
-          <a:xfrm>
-            <a:off x="10710367" y="6382512"/>
-            <a:ext cx="914400" cy="219456"/>
-          </a:xfrm>
-          <a:prstGeom prst="rect">
-            <a:avLst/>
-          </a:prstGeom>
-          <a:noFill/>
-          <a:ln/>
-        </p:spPr>
-        <p:txBody>
-          <a:bodyPr wrap="square" lIns="0" tIns="0" rIns="0" bIns="0" rtlCol="0" anchor="ctr"/>
-          <a:lstStyle/>
-          <a:p>
-            <a:pPr algn="r" indent="0" marL="0">
-              <a:buNone/>
-            </a:pPr>
-            <a:r>
-              <a:rPr lang="en-US" sz="900" b="1" dirty="0">
-                <a:solidFill>
-                  <a:srgbClr val="B98A2E"/>
+            <a:off x="786384" y="1792224"/>
+            <a:ext cx="438912" cy="438912"/>
+          </a:xfrm>
+          <a:prstGeom prst="rect">
+            <a:avLst/>
+          </a:prstGeom>
+          <a:noFill/>
+          <a:ln/>
+        </p:spPr>
+        <p:txBody>
+          <a:bodyPr wrap="square" lIns="0" tIns="0" rIns="0" bIns="0" rtlCol="0" anchor="ctr"/>
+          <a:lstStyle/>
+          <a:p>
+            <a:pPr algn="ctr" indent="0" marL="0">
+              <a:buNone/>
+            </a:pPr>
+            <a:r>
+              <a:rPr lang="en-US" sz="1400" b="1" dirty="0">
+                <a:solidFill>
+                  <a:srgbClr val="FFFFFF"/>
                 </a:solidFill>
                 <a:latin typeface="Arial" pitchFamily="34" charset="0"/>
                 <a:ea typeface="Arial" pitchFamily="34" charset="-122"/>
                 <a:cs typeface="Arial" pitchFamily="34" charset="-120"/>
               </a:rPr>
-              <a:t>10</a:t>
+              <a:t>01</a:t>
+            </a:r>
+            <a:endParaRPr lang="en-US" sz="1400" dirty="0"/>
+          </a:p>
+        </p:txBody>
+      </p:sp>
+      <p:sp>
+        <p:nvSpPr>
+          <p:cNvPr id="9" name="Text 7"/>
+          <p:cNvSpPr/>
+          <p:nvPr/>
+        </p:nvSpPr>
+        <p:spPr>
+          <a:xfrm>
+            <a:off x="786384" y="2304288"/>
+            <a:ext cx="10618927" cy="365760"/>
+          </a:xfrm>
+          <a:prstGeom prst="rect">
+            <a:avLst/>
+          </a:prstGeom>
+          <a:noFill/>
+          <a:ln/>
+        </p:spPr>
+        <p:txBody>
+          <a:bodyPr wrap="square" rtlCol="0" anchor="ctr"/>
+          <a:lstStyle/>
+          <a:p>
+            <a:pPr indent="0" marL="0">
+              <a:buNone/>
+            </a:pPr>
+            <a:r>
+              <a:rPr lang="en-US" sz="1600" b="1" dirty="0">
+                <a:solidFill>
+                  <a:srgbClr val="10161F"/>
+                </a:solidFill>
+                <a:latin typeface="Pretendard" pitchFamily="34" charset="0"/>
+                <a:ea typeface="Pretendard" pitchFamily="34" charset="-122"/>
+                <a:cs typeface="Pretendard" pitchFamily="34" charset="-120"/>
+              </a:rPr>
+              <a:t>1단계</a:t>
+            </a:r>
+            <a:endParaRPr lang="en-US" sz="1600" dirty="0"/>
+          </a:p>
+        </p:txBody>
+      </p:sp>
+      <p:sp>
+        <p:nvSpPr>
+          <p:cNvPr id="10" name="Text 8"/>
+          <p:cNvSpPr/>
+          <p:nvPr/>
+        </p:nvSpPr>
+        <p:spPr>
+          <a:xfrm>
+            <a:off x="786384" y="2761488"/>
+            <a:ext cx="10618927" cy="1828800"/>
+          </a:xfrm>
+          <a:prstGeom prst="rect">
+            <a:avLst/>
+          </a:prstGeom>
+          <a:noFill/>
+          <a:ln/>
+        </p:spPr>
+        <p:txBody>
+          <a:bodyPr wrap="square" rtlCol="0" anchor="t"/>
+          <a:lstStyle/>
+          <a:p>
+            <a:pPr indent="0" marL="0">
+              <a:buNone/>
+            </a:pPr>
+            <a:r>
+              <a:rPr lang="en-US" sz="1100" dirty="0">
+                <a:solidFill>
+                  <a:srgbClr val="10161F"/>
+                </a:solidFill>
+                <a:latin typeface="Pretendard" pitchFamily="34" charset="0"/>
+                <a:ea typeface="Pretendard" pitchFamily="34" charset="-122"/>
+                <a:cs typeface="Pretendard" pitchFamily="34" charset="-120"/>
+              </a:rPr>
+              <a:t>현장 실사 및 임대차계약서 원본 확인을 권장합니다.</a:t>
+            </a:r>
+            <a:endParaRPr lang="en-US" sz="1100" dirty="0"/>
+          </a:p>
+          <a:p>
+            <a:pPr indent="0" marL="0">
+              <a:buNone/>
+            </a:pPr>
+            <a:r>
+              <a:rPr lang="en-US" sz="1100" dirty="0">
+                <a:solidFill>
+                  <a:srgbClr val="10161F"/>
+                </a:solidFill>
+                <a:latin typeface="Pretendard" pitchFamily="34" charset="0"/>
+                <a:ea typeface="Pretendard" pitchFamily="34" charset="-122"/>
+                <a:cs typeface="Pretendard" pitchFamily="34" charset="-120"/>
+              </a:rPr>
+              <a:t>현장 실사 및 임대차계약서 원본 확인을 권장합니다.</a:t>
+            </a:r>
+            <a:endParaRPr lang="en-US" sz="1100" dirty="0"/>
+          </a:p>
+        </p:txBody>
+      </p:sp>
+      <p:sp>
+        <p:nvSpPr>
+          <p:cNvPr id="11" name="Text 9"/>
+          <p:cNvSpPr/>
+          <p:nvPr/>
+        </p:nvSpPr>
+        <p:spPr>
+          <a:xfrm>
+            <a:off x="566928" y="6382512"/>
+            <a:ext cx="7315200" cy="219456"/>
+          </a:xfrm>
+          <a:prstGeom prst="rect">
+            <a:avLst/>
+          </a:prstGeom>
+          <a:noFill/>
+          <a:ln/>
+        </p:spPr>
+        <p:txBody>
+          <a:bodyPr wrap="square" lIns="0" tIns="0" rIns="0" bIns="0" rtlCol="0" anchor="ctr"/>
+          <a:lstStyle/>
+          <a:p>
+            <a:pPr indent="0" marL="0">
+              <a:buNone/>
+            </a:pPr>
+            <a:r>
+              <a:rPr lang="en-US" sz="800" dirty="0">
+                <a:solidFill>
+                  <a:srgbClr val="718096"/>
+                </a:solidFill>
+                <a:latin typeface="Pretendard" pitchFamily="34" charset="0"/>
+                <a:ea typeface="Pretendard" pitchFamily="34" charset="-122"/>
+                <a:cs typeface="Pretendard" pitchFamily="34" charset="-120"/>
+              </a:rPr>
+              <a:t>크리딜   |   </a:t>
+            </a:r>
+            <a:endParaRPr lang="en-US" sz="800" dirty="0"/>
+          </a:p>
+        </p:txBody>
+      </p:sp>
+      <p:sp>
+        <p:nvSpPr>
+          <p:cNvPr id="12" name="Text 10"/>
+          <p:cNvSpPr/>
+          <p:nvPr/>
+        </p:nvSpPr>
+        <p:spPr>
+          <a:xfrm>
+            <a:off x="10710367" y="6382512"/>
+            <a:ext cx="914400" cy="219456"/>
+          </a:xfrm>
+          <a:prstGeom prst="rect">
+            <a:avLst/>
+          </a:prstGeom>
+          <a:noFill/>
+          <a:ln/>
+        </p:spPr>
+        <p:txBody>
+          <a:bodyPr wrap="square" lIns="0" tIns="0" rIns="0" bIns="0" rtlCol="0" anchor="ctr"/>
+          <a:lstStyle/>
+          <a:p>
+            <a:pPr algn="r" indent="0" marL="0">
+              <a:buNone/>
+            </a:pPr>
+            <a:r>
+              <a:rPr lang="en-US" sz="900" b="1" dirty="0">
+                <a:solidFill>
+                  <a:srgbClr val="B98A2E"/>
+                </a:solidFill>
+                <a:latin typeface="Arial" pitchFamily="34" charset="0"/>
+                <a:ea typeface="Arial" pitchFamily="34" charset="-122"/>
+                <a:cs typeface="Arial" pitchFamily="34" charset="-120"/>
+              </a:rPr>
+              <a:t>11</a:t>
             </a:r>
             <a:endParaRPr lang="en-US" sz="900" dirty="0"/>
           </a:p>
@@ -3662,1535 +4001,6 @@
 <file path=ppt/slides/slide12.xml><?xml version="1.0" encoding="utf-8"?>
 <p:sld xmlns:a="http://schemas.openxmlformats.org/drawingml/2006/main" xmlns:r="http://schemas.openxmlformats.org/officeDocument/2006/relationships" xmlns:p="http://schemas.openxmlformats.org/presentationml/2006/main">
   <p:cSld name="Slide 12">
-    <p:bg>
-      <p:bgPr>
-        <a:solidFill>
-          <a:srgbClr val="FFFFFF"/>
-        </a:solidFill>
-      </p:bgPr>
-    </p:bg>
-    <p:spTree>
-      <p:nvGrpSpPr>
-        <p:cNvPr id="1" name=""/>
-        <p:cNvGrpSpPr/>
-        <p:nvPr/>
-      </p:nvGrpSpPr>
-      <p:grpSpPr>
-        <a:xfrm>
-          <a:off x="0" y="0"/>
-          <a:ext cx="0" cy="0"/>
-          <a:chOff x="0" y="0"/>
-          <a:chExt cx="0" cy="0"/>
-        </a:xfrm>
-      </p:grpSpPr>
-      <p:sp>
-        <p:nvSpPr>
-          <p:cNvPr id="2" name="Shape 0"/>
-          <p:cNvSpPr/>
-          <p:nvPr/>
-        </p:nvSpPr>
-        <p:spPr>
-          <a:xfrm>
-            <a:off x="566928" y="457200"/>
-            <a:ext cx="384048" cy="384048"/>
-          </a:xfrm>
-          <a:prstGeom prst="ellipse">
-            <a:avLst/>
-          </a:prstGeom>
-          <a:solidFill>
-            <a:srgbClr val="B98A2E"/>
-          </a:solidFill>
-          <a:ln/>
-        </p:spPr>
-      </p:sp>
-      <p:sp>
-        <p:nvSpPr>
-          <p:cNvPr id="3" name="Text 1"/>
-          <p:cNvSpPr/>
-          <p:nvPr/>
-        </p:nvSpPr>
-        <p:spPr>
-          <a:xfrm>
-            <a:off x="566928" y="457200"/>
-            <a:ext cx="384048" cy="384048"/>
-          </a:xfrm>
-          <a:prstGeom prst="rect">
-            <a:avLst/>
-          </a:prstGeom>
-          <a:noFill/>
-          <a:ln/>
-        </p:spPr>
-        <p:txBody>
-          <a:bodyPr wrap="square" lIns="0" tIns="0" rIns="0" bIns="0" rtlCol="0" anchor="ctr"/>
-          <a:lstStyle/>
-          <a:p>
-            <a:pPr algn="ctr" indent="0" marL="0">
-              <a:buNone/>
-            </a:pPr>
-            <a:r>
-              <a:rPr lang="en-US" sz="1300" b="1" dirty="0">
-                <a:solidFill>
-                  <a:srgbClr val="FFFFFF"/>
-                </a:solidFill>
-                <a:latin typeface="Arial" pitchFamily="34" charset="0"/>
-                <a:ea typeface="Arial" pitchFamily="34" charset="-122"/>
-                <a:cs typeface="Arial" pitchFamily="34" charset="-120"/>
-              </a:rPr>
-              <a:t>11</a:t>
-            </a:r>
-            <a:endParaRPr lang="en-US" sz="1300" dirty="0"/>
-          </a:p>
-        </p:txBody>
-      </p:sp>
-      <p:sp>
-        <p:nvSpPr>
-          <p:cNvPr id="4" name="Text 2"/>
-          <p:cNvSpPr/>
-          <p:nvPr/>
-        </p:nvSpPr>
-        <p:spPr>
-          <a:xfrm>
-            <a:off x="1133856" y="457200"/>
-            <a:ext cx="10490911" cy="182880"/>
-          </a:xfrm>
-          <a:prstGeom prst="rect">
-            <a:avLst/>
-          </a:prstGeom>
-          <a:noFill/>
-          <a:ln/>
-        </p:spPr>
-        <p:txBody>
-          <a:bodyPr wrap="square" lIns="0" tIns="0" rIns="0" bIns="0" rtlCol="0" anchor="ctr"/>
-          <a:lstStyle/>
-          <a:p>
-            <a:pPr indent="0" marL="0">
-              <a:buNone/>
-            </a:pPr>
-            <a:r>
-              <a:rPr lang="en-US" sz="950" b="1" spc="200" kern="0" dirty="0">
-                <a:solidFill>
-                  <a:srgbClr val="B98A2E"/>
-                </a:solidFill>
-                <a:latin typeface="Arial" pitchFamily="34" charset="0"/>
-                <a:ea typeface="Arial" pitchFamily="34" charset="-122"/>
-                <a:cs typeface="Arial" pitchFamily="34" charset="-120"/>
-              </a:rPr>
-              <a:t>Checklist</a:t>
-            </a:r>
-            <a:endParaRPr lang="en-US" sz="950" dirty="0"/>
-          </a:p>
-        </p:txBody>
-      </p:sp>
-      <p:sp>
-        <p:nvSpPr>
-          <p:cNvPr id="5" name="Text 3"/>
-          <p:cNvSpPr/>
-          <p:nvPr/>
-        </p:nvSpPr>
-        <p:spPr>
-          <a:xfrm>
-            <a:off x="1133856" y="640080"/>
-            <a:ext cx="10490911" cy="365760"/>
-          </a:xfrm>
-          <a:prstGeom prst="rect">
-            <a:avLst/>
-          </a:prstGeom>
-          <a:noFill/>
-          <a:ln/>
-        </p:spPr>
-        <p:txBody>
-          <a:bodyPr wrap="square" lIns="0" tIns="0" rIns="0" bIns="0" rtlCol="0" anchor="ctr"/>
-          <a:lstStyle/>
-          <a:p>
-            <a:pPr indent="0" marL="0">
-              <a:buNone/>
-            </a:pPr>
-            <a:r>
-              <a:rPr lang="en-US" sz="2300" b="1" dirty="0">
-                <a:solidFill>
-                  <a:srgbClr val="10161F"/>
-                </a:solidFill>
-                <a:latin typeface="Pretendard" pitchFamily="34" charset="0"/>
-                <a:ea typeface="Pretendard" pitchFamily="34" charset="-122"/>
-                <a:cs typeface="Pretendard" pitchFamily="34" charset="-120"/>
-              </a:rPr>
-              <a:t>실사 및 확인 필요사항</a:t>
-            </a:r>
-            <a:endParaRPr lang="en-US" sz="2300" dirty="0"/>
-          </a:p>
-        </p:txBody>
-      </p:sp>
-      <p:sp>
-        <p:nvSpPr>
-          <p:cNvPr id="6" name="Text 4"/>
-          <p:cNvSpPr/>
-          <p:nvPr/>
-        </p:nvSpPr>
-        <p:spPr>
-          <a:xfrm>
-            <a:off x="566928" y="1371600"/>
-            <a:ext cx="11057839" cy="237744"/>
-          </a:xfrm>
-          <a:prstGeom prst="rect">
-            <a:avLst/>
-          </a:prstGeom>
-          <a:noFill/>
-          <a:ln/>
-        </p:spPr>
-        <p:txBody>
-          <a:bodyPr wrap="square" lIns="0" tIns="0" rIns="0" bIns="0" rtlCol="0" anchor="ctr"/>
-          <a:lstStyle/>
-          <a:p>
-            <a:pPr indent="0" marL="0">
-              <a:buNone/>
-            </a:pPr>
-            <a:r>
-              <a:rPr lang="en-US" sz="1100" b="1" dirty="0">
-                <a:solidFill>
-                  <a:srgbClr val="10161F"/>
-                </a:solidFill>
-                <a:latin typeface="Pretendard" pitchFamily="34" charset="0"/>
-                <a:ea typeface="Pretendard" pitchFamily="34" charset="-122"/>
-                <a:cs typeface="Pretendard" pitchFamily="34" charset="-120"/>
-              </a:rPr>
-              <a:t>거래 안정성 확보를 위한 필수 법률·물리·임대차 실사 점검 항목 (총 6건)</a:t>
-            </a:r>
-            <a:endParaRPr lang="en-US" sz="1100" dirty="0"/>
-          </a:p>
-        </p:txBody>
-      </p:sp>
-      <p:sp>
-        <p:nvSpPr>
-          <p:cNvPr id="7" name="Shape 5"/>
-          <p:cNvSpPr/>
-          <p:nvPr/>
-        </p:nvSpPr>
-        <p:spPr>
-          <a:xfrm>
-            <a:off x="566928" y="1719072"/>
-            <a:ext cx="5368900" cy="868680"/>
-          </a:xfrm>
-          <a:prstGeom prst="rect">
-            <a:avLst/>
-          </a:prstGeom>
-          <a:solidFill>
-            <a:srgbClr val="F7FAFC"/>
-          </a:solidFill>
-          <a:ln w="6350">
-            <a:solidFill>
-              <a:srgbClr val="D9B668"/>
-            </a:solidFill>
-            <a:prstDash val="solid"/>
-          </a:ln>
-        </p:spPr>
-      </p:sp>
-      <p:sp>
-        <p:nvSpPr>
-          <p:cNvPr id="8" name="Shape 6"/>
-          <p:cNvSpPr/>
-          <p:nvPr/>
-        </p:nvSpPr>
-        <p:spPr>
-          <a:xfrm>
-            <a:off x="704088" y="1883664"/>
-            <a:ext cx="320040" cy="320040"/>
-          </a:xfrm>
-          <a:prstGeom prst="rect">
-            <a:avLst/>
-          </a:prstGeom>
-          <a:solidFill>
-            <a:srgbClr val="977024"/>
-          </a:solidFill>
-          <a:ln/>
-        </p:spPr>
-      </p:sp>
-      <p:sp>
-        <p:nvSpPr>
-          <p:cNvPr id="9" name="Text 7"/>
-          <p:cNvSpPr/>
-          <p:nvPr/>
-        </p:nvSpPr>
-        <p:spPr>
-          <a:xfrm>
-            <a:off x="704088" y="1883664"/>
-            <a:ext cx="320040" cy="320040"/>
-          </a:xfrm>
-          <a:prstGeom prst="rect">
-            <a:avLst/>
-          </a:prstGeom>
-          <a:noFill/>
-          <a:ln/>
-        </p:spPr>
-        <p:txBody>
-          <a:bodyPr wrap="square" rtlCol="0" anchor="ctr"/>
-          <a:lstStyle/>
-          <a:p>
-            <a:pPr algn="ctr" indent="0" marL="0">
-              <a:buNone/>
-            </a:pPr>
-            <a:r>
-              <a:rPr lang="en-US" sz="1100" b="1" dirty="0">
-                <a:solidFill>
-                  <a:srgbClr val="000000"/>
-                </a:solidFill>
-                <a:latin typeface="Pretendard" pitchFamily="34" charset="0"/>
-                <a:ea typeface="Pretendard" pitchFamily="34" charset="-122"/>
-                <a:cs typeface="Pretendard" pitchFamily="34" charset="-120"/>
-              </a:rPr>
-              <a:t>✓</a:t>
-            </a:r>
-            <a:endParaRPr lang="en-US" sz="1100" dirty="0"/>
-          </a:p>
-        </p:txBody>
-      </p:sp>
-      <p:sp>
-        <p:nvSpPr>
-          <p:cNvPr id="10" name="Text 8"/>
-          <p:cNvSpPr/>
-          <p:nvPr/>
-        </p:nvSpPr>
-        <p:spPr>
-          <a:xfrm>
-            <a:off x="1115568" y="1828800"/>
-            <a:ext cx="4683100" cy="685800"/>
-          </a:xfrm>
-          <a:prstGeom prst="rect">
-            <a:avLst/>
-          </a:prstGeom>
-          <a:noFill/>
-          <a:ln/>
-        </p:spPr>
-        <p:txBody>
-          <a:bodyPr wrap="square" rtlCol="0" anchor="ctr"/>
-          <a:lstStyle/>
-          <a:p>
-            <a:pPr indent="0" marL="0">
-              <a:lnSpc>
-                <a:spcPct val="115000"/>
-              </a:lnSpc>
-              <a:buNone/>
-            </a:pPr>
-            <a:r>
-              <a:rPr lang="en-US" sz="1050" dirty="0">
-                <a:solidFill>
-                  <a:srgbClr val="10161F"/>
-                </a:solidFill>
-                <a:latin typeface="Pretendard" pitchFamily="34" charset="0"/>
-                <a:ea typeface="Pretendard" pitchFamily="34" charset="-122"/>
-                <a:cs typeface="Pretendard" pitchFamily="34" charset="-120"/>
-              </a:rPr>
-              <a:t>등기부등본 갑구/을구 권리관계 및 근저당 채권최고액 전액 말소 조건 원본 대조</a:t>
-            </a:r>
-            <a:endParaRPr lang="en-US" sz="1050" dirty="0"/>
-          </a:p>
-        </p:txBody>
-      </p:sp>
-      <p:sp>
-        <p:nvSpPr>
-          <p:cNvPr id="11" name="Shape 9"/>
-          <p:cNvSpPr/>
-          <p:nvPr/>
-        </p:nvSpPr>
-        <p:spPr>
-          <a:xfrm>
-            <a:off x="566928" y="2715768"/>
-            <a:ext cx="5368900" cy="868680"/>
-          </a:xfrm>
-          <a:prstGeom prst="rect">
-            <a:avLst/>
-          </a:prstGeom>
-          <a:solidFill>
-            <a:srgbClr val="F7FAFC"/>
-          </a:solidFill>
-          <a:ln w="6350">
-            <a:solidFill>
-              <a:srgbClr val="D9B668"/>
-            </a:solidFill>
-            <a:prstDash val="solid"/>
-          </a:ln>
-        </p:spPr>
-      </p:sp>
-      <p:sp>
-        <p:nvSpPr>
-          <p:cNvPr id="12" name="Shape 10"/>
-          <p:cNvSpPr/>
-          <p:nvPr/>
-        </p:nvSpPr>
-        <p:spPr>
-          <a:xfrm>
-            <a:off x="704088" y="2880360"/>
-            <a:ext cx="320040" cy="320040"/>
-          </a:xfrm>
-          <a:prstGeom prst="rect">
-            <a:avLst/>
-          </a:prstGeom>
-          <a:solidFill>
-            <a:srgbClr val="977024"/>
-          </a:solidFill>
-          <a:ln/>
-        </p:spPr>
-      </p:sp>
-      <p:sp>
-        <p:nvSpPr>
-          <p:cNvPr id="13" name="Text 11"/>
-          <p:cNvSpPr/>
-          <p:nvPr/>
-        </p:nvSpPr>
-        <p:spPr>
-          <a:xfrm>
-            <a:off x="704088" y="2880360"/>
-            <a:ext cx="320040" cy="320040"/>
-          </a:xfrm>
-          <a:prstGeom prst="rect">
-            <a:avLst/>
-          </a:prstGeom>
-          <a:noFill/>
-          <a:ln/>
-        </p:spPr>
-        <p:txBody>
-          <a:bodyPr wrap="square" rtlCol="0" anchor="ctr"/>
-          <a:lstStyle/>
-          <a:p>
-            <a:pPr algn="ctr" indent="0" marL="0">
-              <a:buNone/>
-            </a:pPr>
-            <a:r>
-              <a:rPr lang="en-US" sz="1100" b="1" dirty="0">
-                <a:solidFill>
-                  <a:srgbClr val="000000"/>
-                </a:solidFill>
-                <a:latin typeface="Pretendard" pitchFamily="34" charset="0"/>
-                <a:ea typeface="Pretendard" pitchFamily="34" charset="-122"/>
-                <a:cs typeface="Pretendard" pitchFamily="34" charset="-120"/>
-              </a:rPr>
-              <a:t>✓</a:t>
-            </a:r>
-            <a:endParaRPr lang="en-US" sz="1100" dirty="0"/>
-          </a:p>
-        </p:txBody>
-      </p:sp>
-      <p:sp>
-        <p:nvSpPr>
-          <p:cNvPr id="14" name="Text 12"/>
-          <p:cNvSpPr/>
-          <p:nvPr/>
-        </p:nvSpPr>
-        <p:spPr>
-          <a:xfrm>
-            <a:off x="1115568" y="2825496"/>
-            <a:ext cx="4683100" cy="685800"/>
-          </a:xfrm>
-          <a:prstGeom prst="rect">
-            <a:avLst/>
-          </a:prstGeom>
-          <a:noFill/>
-          <a:ln/>
-        </p:spPr>
-        <p:txBody>
-          <a:bodyPr wrap="square" rtlCol="0" anchor="ctr"/>
-          <a:lstStyle/>
-          <a:p>
-            <a:pPr indent="0" marL="0">
-              <a:lnSpc>
-                <a:spcPct val="115000"/>
-              </a:lnSpc>
-              <a:buNone/>
-            </a:pPr>
-            <a:r>
-              <a:rPr lang="en-US" sz="1050" dirty="0">
-                <a:solidFill>
-                  <a:srgbClr val="10161F"/>
-                </a:solidFill>
-                <a:latin typeface="Pretendard" pitchFamily="34" charset="0"/>
-                <a:ea typeface="Pretendard" pitchFamily="34" charset="-122"/>
-                <a:cs typeface="Pretendard" pitchFamily="34" charset="-120"/>
-              </a:rPr>
-              <a:t>임대차 원본 계약서 대조 (보증금, 월임대료, 관리비 실입금 내역 및 제소전화해조서)</a:t>
-            </a:r>
-            <a:endParaRPr lang="en-US" sz="1050" dirty="0"/>
-          </a:p>
-        </p:txBody>
-      </p:sp>
-      <p:sp>
-        <p:nvSpPr>
-          <p:cNvPr id="15" name="Shape 13"/>
-          <p:cNvSpPr/>
-          <p:nvPr/>
-        </p:nvSpPr>
-        <p:spPr>
-          <a:xfrm>
-            <a:off x="566928" y="3712464"/>
-            <a:ext cx="5368900" cy="868680"/>
-          </a:xfrm>
-          <a:prstGeom prst="rect">
-            <a:avLst/>
-          </a:prstGeom>
-          <a:solidFill>
-            <a:srgbClr val="F7FAFC"/>
-          </a:solidFill>
-          <a:ln w="6350">
-            <a:solidFill>
-              <a:srgbClr val="D9B668"/>
-            </a:solidFill>
-            <a:prstDash val="solid"/>
-          </a:ln>
-        </p:spPr>
-      </p:sp>
-      <p:sp>
-        <p:nvSpPr>
-          <p:cNvPr id="16" name="Shape 14"/>
-          <p:cNvSpPr/>
-          <p:nvPr/>
-        </p:nvSpPr>
-        <p:spPr>
-          <a:xfrm>
-            <a:off x="704088" y="3877056"/>
-            <a:ext cx="320040" cy="320040"/>
-          </a:xfrm>
-          <a:prstGeom prst="rect">
-            <a:avLst/>
-          </a:prstGeom>
-          <a:solidFill>
-            <a:srgbClr val="977024"/>
-          </a:solidFill>
-          <a:ln/>
-        </p:spPr>
-      </p:sp>
-      <p:sp>
-        <p:nvSpPr>
-          <p:cNvPr id="17" name="Text 15"/>
-          <p:cNvSpPr/>
-          <p:nvPr/>
-        </p:nvSpPr>
-        <p:spPr>
-          <a:xfrm>
-            <a:off x="704088" y="3877056"/>
-            <a:ext cx="320040" cy="320040"/>
-          </a:xfrm>
-          <a:prstGeom prst="rect">
-            <a:avLst/>
-          </a:prstGeom>
-          <a:noFill/>
-          <a:ln/>
-        </p:spPr>
-        <p:txBody>
-          <a:bodyPr wrap="square" rtlCol="0" anchor="ctr"/>
-          <a:lstStyle/>
-          <a:p>
-            <a:pPr algn="ctr" indent="0" marL="0">
-              <a:buNone/>
-            </a:pPr>
-            <a:r>
-              <a:rPr lang="en-US" sz="1100" b="1" dirty="0">
-                <a:solidFill>
-                  <a:srgbClr val="000000"/>
-                </a:solidFill>
-                <a:latin typeface="Pretendard" pitchFamily="34" charset="0"/>
-                <a:ea typeface="Pretendard" pitchFamily="34" charset="-122"/>
-                <a:cs typeface="Pretendard" pitchFamily="34" charset="-120"/>
-              </a:rPr>
-              <a:t>✓</a:t>
-            </a:r>
-            <a:endParaRPr lang="en-US" sz="1100" dirty="0"/>
-          </a:p>
-        </p:txBody>
-      </p:sp>
-      <p:sp>
-        <p:nvSpPr>
-          <p:cNvPr id="18" name="Text 16"/>
-          <p:cNvSpPr/>
-          <p:nvPr/>
-        </p:nvSpPr>
-        <p:spPr>
-          <a:xfrm>
-            <a:off x="1115568" y="3822192"/>
-            <a:ext cx="4683100" cy="685800"/>
-          </a:xfrm>
-          <a:prstGeom prst="rect">
-            <a:avLst/>
-          </a:prstGeom>
-          <a:noFill/>
-          <a:ln/>
-        </p:spPr>
-        <p:txBody>
-          <a:bodyPr wrap="square" rtlCol="0" anchor="ctr"/>
-          <a:lstStyle/>
-          <a:p>
-            <a:pPr indent="0" marL="0">
-              <a:lnSpc>
-                <a:spcPct val="115000"/>
-              </a:lnSpc>
-              <a:buNone/>
-            </a:pPr>
-            <a:r>
-              <a:rPr lang="en-US" sz="1050" dirty="0">
-                <a:solidFill>
-                  <a:srgbClr val="10161F"/>
-                </a:solidFill>
-                <a:latin typeface="Pretendard" pitchFamily="34" charset="0"/>
-                <a:ea typeface="Pretendard" pitchFamily="34" charset="-122"/>
-                <a:cs typeface="Pretendard" pitchFamily="34" charset="-120"/>
-              </a:rPr>
-              <a:t>건축물대장상 위반건축물 등재 여부 및 불법 증축·용도변경 이행강제금 납부 이력 점검</a:t>
-            </a:r>
-            <a:endParaRPr lang="en-US" sz="1050" dirty="0"/>
-          </a:p>
-        </p:txBody>
-      </p:sp>
-      <p:sp>
-        <p:nvSpPr>
-          <p:cNvPr id="19" name="Shape 17"/>
-          <p:cNvSpPr/>
-          <p:nvPr/>
-        </p:nvSpPr>
-        <p:spPr>
-          <a:xfrm>
-            <a:off x="6255868" y="1719072"/>
-            <a:ext cx="5368900" cy="868680"/>
-          </a:xfrm>
-          <a:prstGeom prst="rect">
-            <a:avLst/>
-          </a:prstGeom>
-          <a:solidFill>
-            <a:srgbClr val="F7FAFC"/>
-          </a:solidFill>
-          <a:ln w="6350">
-            <a:solidFill>
-              <a:srgbClr val="D9B668"/>
-            </a:solidFill>
-            <a:prstDash val="solid"/>
-          </a:ln>
-        </p:spPr>
-      </p:sp>
-      <p:sp>
-        <p:nvSpPr>
-          <p:cNvPr id="20" name="Shape 18"/>
-          <p:cNvSpPr/>
-          <p:nvPr/>
-        </p:nvSpPr>
-        <p:spPr>
-          <a:xfrm>
-            <a:off x="6393028" y="1883664"/>
-            <a:ext cx="320040" cy="320040"/>
-          </a:xfrm>
-          <a:prstGeom prst="rect">
-            <a:avLst/>
-          </a:prstGeom>
-          <a:solidFill>
-            <a:srgbClr val="977024"/>
-          </a:solidFill>
-          <a:ln/>
-        </p:spPr>
-      </p:sp>
-      <p:sp>
-        <p:nvSpPr>
-          <p:cNvPr id="21" name="Text 19"/>
-          <p:cNvSpPr/>
-          <p:nvPr/>
-        </p:nvSpPr>
-        <p:spPr>
-          <a:xfrm>
-            <a:off x="6393028" y="1883664"/>
-            <a:ext cx="320040" cy="320040"/>
-          </a:xfrm>
-          <a:prstGeom prst="rect">
-            <a:avLst/>
-          </a:prstGeom>
-          <a:noFill/>
-          <a:ln/>
-        </p:spPr>
-        <p:txBody>
-          <a:bodyPr wrap="square" rtlCol="0" anchor="ctr"/>
-          <a:lstStyle/>
-          <a:p>
-            <a:pPr algn="ctr" indent="0" marL="0">
-              <a:buNone/>
-            </a:pPr>
-            <a:r>
-              <a:rPr lang="en-US" sz="1100" b="1" dirty="0">
-                <a:solidFill>
-                  <a:srgbClr val="000000"/>
-                </a:solidFill>
-                <a:latin typeface="Pretendard" pitchFamily="34" charset="0"/>
-                <a:ea typeface="Pretendard" pitchFamily="34" charset="-122"/>
-                <a:cs typeface="Pretendard" pitchFamily="34" charset="-120"/>
-              </a:rPr>
-              <a:t>✓</a:t>
-            </a:r>
-            <a:endParaRPr lang="en-US" sz="1100" dirty="0"/>
-          </a:p>
-        </p:txBody>
-      </p:sp>
-      <p:sp>
-        <p:nvSpPr>
-          <p:cNvPr id="22" name="Text 20"/>
-          <p:cNvSpPr/>
-          <p:nvPr/>
-        </p:nvSpPr>
-        <p:spPr>
-          <a:xfrm>
-            <a:off x="6804508" y="1828800"/>
-            <a:ext cx="4683100" cy="685800"/>
-          </a:xfrm>
-          <a:prstGeom prst="rect">
-            <a:avLst/>
-          </a:prstGeom>
-          <a:noFill/>
-          <a:ln/>
-        </p:spPr>
-        <p:txBody>
-          <a:bodyPr wrap="square" rtlCol="0" anchor="ctr"/>
-          <a:lstStyle/>
-          <a:p>
-            <a:pPr indent="0" marL="0">
-              <a:lnSpc>
-                <a:spcPct val="115000"/>
-              </a:lnSpc>
-              <a:buNone/>
-            </a:pPr>
-            <a:r>
-              <a:rPr lang="en-US" sz="1050" dirty="0">
-                <a:solidFill>
-                  <a:srgbClr val="10161F"/>
-                </a:solidFill>
-                <a:latin typeface="Pretendard" pitchFamily="34" charset="0"/>
-                <a:ea typeface="Pretendard" pitchFamily="34" charset="-122"/>
-                <a:cs typeface="Pretendard" pitchFamily="34" charset="-120"/>
-              </a:rPr>
-              <a:t>토지이용계획확인원상 도시계획시설 저촉, 건축선 후퇴, 지구단위계획 특별계획구역 확인</a:t>
-            </a:r>
-            <a:endParaRPr lang="en-US" sz="1050" dirty="0"/>
-          </a:p>
-        </p:txBody>
-      </p:sp>
-      <p:sp>
-        <p:nvSpPr>
-          <p:cNvPr id="23" name="Shape 21"/>
-          <p:cNvSpPr/>
-          <p:nvPr/>
-        </p:nvSpPr>
-        <p:spPr>
-          <a:xfrm>
-            <a:off x="6255868" y="2715768"/>
-            <a:ext cx="5368900" cy="868680"/>
-          </a:xfrm>
-          <a:prstGeom prst="rect">
-            <a:avLst/>
-          </a:prstGeom>
-          <a:solidFill>
-            <a:srgbClr val="F7FAFC"/>
-          </a:solidFill>
-          <a:ln w="6350">
-            <a:solidFill>
-              <a:srgbClr val="D9B668"/>
-            </a:solidFill>
-            <a:prstDash val="solid"/>
-          </a:ln>
-        </p:spPr>
-      </p:sp>
-      <p:sp>
-        <p:nvSpPr>
-          <p:cNvPr id="24" name="Shape 22"/>
-          <p:cNvSpPr/>
-          <p:nvPr/>
-        </p:nvSpPr>
-        <p:spPr>
-          <a:xfrm>
-            <a:off x="6393028" y="2880360"/>
-            <a:ext cx="320040" cy="320040"/>
-          </a:xfrm>
-          <a:prstGeom prst="rect">
-            <a:avLst/>
-          </a:prstGeom>
-          <a:solidFill>
-            <a:srgbClr val="977024"/>
-          </a:solidFill>
-          <a:ln/>
-        </p:spPr>
-      </p:sp>
-      <p:sp>
-        <p:nvSpPr>
-          <p:cNvPr id="25" name="Text 23"/>
-          <p:cNvSpPr/>
-          <p:nvPr/>
-        </p:nvSpPr>
-        <p:spPr>
-          <a:xfrm>
-            <a:off x="6393028" y="2880360"/>
-            <a:ext cx="320040" cy="320040"/>
-          </a:xfrm>
-          <a:prstGeom prst="rect">
-            <a:avLst/>
-          </a:prstGeom>
-          <a:noFill/>
-          <a:ln/>
-        </p:spPr>
-        <p:txBody>
-          <a:bodyPr wrap="square" rtlCol="0" anchor="ctr"/>
-          <a:lstStyle/>
-          <a:p>
-            <a:pPr algn="ctr" indent="0" marL="0">
-              <a:buNone/>
-            </a:pPr>
-            <a:r>
-              <a:rPr lang="en-US" sz="1100" b="1" dirty="0">
-                <a:solidFill>
-                  <a:srgbClr val="000000"/>
-                </a:solidFill>
-                <a:latin typeface="Pretendard" pitchFamily="34" charset="0"/>
-                <a:ea typeface="Pretendard" pitchFamily="34" charset="-122"/>
-                <a:cs typeface="Pretendard" pitchFamily="34" charset="-120"/>
-              </a:rPr>
-              <a:t>✓</a:t>
-            </a:r>
-            <a:endParaRPr lang="en-US" sz="1100" dirty="0"/>
-          </a:p>
-        </p:txBody>
-      </p:sp>
-      <p:sp>
-        <p:nvSpPr>
-          <p:cNvPr id="26" name="Text 24"/>
-          <p:cNvSpPr/>
-          <p:nvPr/>
-        </p:nvSpPr>
-        <p:spPr>
-          <a:xfrm>
-            <a:off x="6804508" y="2825496"/>
-            <a:ext cx="4683100" cy="685800"/>
-          </a:xfrm>
-          <a:prstGeom prst="rect">
-            <a:avLst/>
-          </a:prstGeom>
-          <a:noFill/>
-          <a:ln/>
-        </p:spPr>
-        <p:txBody>
-          <a:bodyPr wrap="square" rtlCol="0" anchor="ctr"/>
-          <a:lstStyle/>
-          <a:p>
-            <a:pPr indent="0" marL="0">
-              <a:lnSpc>
-                <a:spcPct val="115000"/>
-              </a:lnSpc>
-              <a:buNone/>
-            </a:pPr>
-            <a:r>
-              <a:rPr lang="en-US" sz="1050" dirty="0">
-                <a:solidFill>
-                  <a:srgbClr val="10161F"/>
-                </a:solidFill>
-                <a:latin typeface="Pretendard" pitchFamily="34" charset="0"/>
-                <a:ea typeface="Pretendard" pitchFamily="34" charset="-122"/>
-                <a:cs typeface="Pretendard" pitchFamily="34" charset="-120"/>
-              </a:rPr>
-              <a:t>기계식 주차기 정기 안전점검 합격증, 승강기 검사필증, 소방 완비증명서 실물 실사</a:t>
-            </a:r>
-            <a:endParaRPr lang="en-US" sz="1050" dirty="0"/>
-          </a:p>
-        </p:txBody>
-      </p:sp>
-      <p:sp>
-        <p:nvSpPr>
-          <p:cNvPr id="27" name="Shape 25"/>
-          <p:cNvSpPr/>
-          <p:nvPr/>
-        </p:nvSpPr>
-        <p:spPr>
-          <a:xfrm>
-            <a:off x="6255868" y="3712464"/>
-            <a:ext cx="5368900" cy="868680"/>
-          </a:xfrm>
-          <a:prstGeom prst="rect">
-            <a:avLst/>
-          </a:prstGeom>
-          <a:solidFill>
-            <a:srgbClr val="F7FAFC"/>
-          </a:solidFill>
-          <a:ln w="6350">
-            <a:solidFill>
-              <a:srgbClr val="D9B668"/>
-            </a:solidFill>
-            <a:prstDash val="solid"/>
-          </a:ln>
-        </p:spPr>
-      </p:sp>
-      <p:sp>
-        <p:nvSpPr>
-          <p:cNvPr id="28" name="Shape 26"/>
-          <p:cNvSpPr/>
-          <p:nvPr/>
-        </p:nvSpPr>
-        <p:spPr>
-          <a:xfrm>
-            <a:off x="6393028" y="3877056"/>
-            <a:ext cx="320040" cy="320040"/>
-          </a:xfrm>
-          <a:prstGeom prst="rect">
-            <a:avLst/>
-          </a:prstGeom>
-          <a:solidFill>
-            <a:srgbClr val="977024"/>
-          </a:solidFill>
-          <a:ln/>
-        </p:spPr>
-      </p:sp>
-      <p:sp>
-        <p:nvSpPr>
-          <p:cNvPr id="29" name="Text 27"/>
-          <p:cNvSpPr/>
-          <p:nvPr/>
-        </p:nvSpPr>
-        <p:spPr>
-          <a:xfrm>
-            <a:off x="6393028" y="3877056"/>
-            <a:ext cx="320040" cy="320040"/>
-          </a:xfrm>
-          <a:prstGeom prst="rect">
-            <a:avLst/>
-          </a:prstGeom>
-          <a:noFill/>
-          <a:ln/>
-        </p:spPr>
-        <p:txBody>
-          <a:bodyPr wrap="square" rtlCol="0" anchor="ctr"/>
-          <a:lstStyle/>
-          <a:p>
-            <a:pPr algn="ctr" indent="0" marL="0">
-              <a:buNone/>
-            </a:pPr>
-            <a:r>
-              <a:rPr lang="en-US" sz="1100" b="1" dirty="0">
-                <a:solidFill>
-                  <a:srgbClr val="000000"/>
-                </a:solidFill>
-                <a:latin typeface="Pretendard" pitchFamily="34" charset="0"/>
-                <a:ea typeface="Pretendard" pitchFamily="34" charset="-122"/>
-                <a:cs typeface="Pretendard" pitchFamily="34" charset="-120"/>
-              </a:rPr>
-              <a:t>✓</a:t>
-            </a:r>
-            <a:endParaRPr lang="en-US" sz="1100" dirty="0"/>
-          </a:p>
-        </p:txBody>
-      </p:sp>
-      <p:sp>
-        <p:nvSpPr>
-          <p:cNvPr id="30" name="Text 28"/>
-          <p:cNvSpPr/>
-          <p:nvPr/>
-        </p:nvSpPr>
-        <p:spPr>
-          <a:xfrm>
-            <a:off x="6804508" y="3822192"/>
-            <a:ext cx="4683100" cy="685800"/>
-          </a:xfrm>
-          <a:prstGeom prst="rect">
-            <a:avLst/>
-          </a:prstGeom>
-          <a:noFill/>
-          <a:ln/>
-        </p:spPr>
-        <p:txBody>
-          <a:bodyPr wrap="square" rtlCol="0" anchor="ctr"/>
-          <a:lstStyle/>
-          <a:p>
-            <a:pPr indent="0" marL="0">
-              <a:lnSpc>
-                <a:spcPct val="115000"/>
-              </a:lnSpc>
-              <a:buNone/>
-            </a:pPr>
-            <a:r>
-              <a:rPr lang="en-US" sz="1050" dirty="0">
-                <a:solidFill>
-                  <a:srgbClr val="10161F"/>
-                </a:solidFill>
-                <a:latin typeface="Pretendard" pitchFamily="34" charset="0"/>
-                <a:ea typeface="Pretendard" pitchFamily="34" charset="-122"/>
-                <a:cs typeface="Pretendard" pitchFamily="34" charset="-120"/>
-              </a:rPr>
-              <a:t>정화조 용량 대비 현 업종 적합성 및 하수도 원인자부담금 추가 부과 대상 여부 확인</a:t>
-            </a:r>
-            <a:endParaRPr lang="en-US" sz="1050" dirty="0"/>
-          </a:p>
-        </p:txBody>
-      </p:sp>
-      <p:sp>
-        <p:nvSpPr>
-          <p:cNvPr id="31" name="Shape 29"/>
-          <p:cNvSpPr/>
-          <p:nvPr/>
-        </p:nvSpPr>
-        <p:spPr>
-          <a:xfrm>
-            <a:off x="566928" y="5760720"/>
-            <a:ext cx="11057839" cy="594360"/>
-          </a:xfrm>
-          <a:prstGeom prst="rect">
-            <a:avLst/>
-          </a:prstGeom>
-          <a:solidFill>
-            <a:srgbClr val="D9B668"/>
-          </a:solidFill>
-          <a:ln/>
-        </p:spPr>
-      </p:sp>
-      <p:sp>
-        <p:nvSpPr>
-          <p:cNvPr id="32" name="Text 30"/>
-          <p:cNvSpPr/>
-          <p:nvPr/>
-        </p:nvSpPr>
-        <p:spPr>
-          <a:xfrm>
-            <a:off x="749808" y="5833872"/>
-            <a:ext cx="10692079" cy="448056"/>
-          </a:xfrm>
-          <a:prstGeom prst="rect">
-            <a:avLst/>
-          </a:prstGeom>
-          <a:noFill/>
-          <a:ln/>
-        </p:spPr>
-        <p:txBody>
-          <a:bodyPr wrap="square" rtlCol="0" anchor="ctr"/>
-          <a:lstStyle/>
-          <a:p>
-            <a:pPr indent="0" marL="0">
-              <a:buNone/>
-            </a:pPr>
-            <a:r>
-              <a:rPr lang="en-US" sz="950" b="1" dirty="0">
-                <a:solidFill>
-                  <a:srgbClr val="977024"/>
-                </a:solidFill>
-                <a:latin typeface="Pretendard" pitchFamily="34" charset="0"/>
-                <a:ea typeface="Pretendard" pitchFamily="34" charset="-122"/>
-                <a:cs typeface="Pretendard" pitchFamily="34" charset="-120"/>
-              </a:rPr>
-              <a:t>※ 본 체크리스트는 계약 전 매수인의 안전한 자산 인수를 위한 필수 확인 사항이며, 실사(Due Diligence) 결과에 따라 매매 조건 및 잔금 일정이 조정될 수 있습니다.</a:t>
-            </a:r>
-            <a:endParaRPr lang="en-US" sz="950" dirty="0"/>
-          </a:p>
-        </p:txBody>
-      </p:sp>
-      <p:sp>
-        <p:nvSpPr>
-          <p:cNvPr id="33" name="Text 31"/>
-          <p:cNvSpPr/>
-          <p:nvPr/>
-        </p:nvSpPr>
-        <p:spPr>
-          <a:xfrm>
-            <a:off x="566928" y="6382512"/>
-            <a:ext cx="7315200" cy="219456"/>
-          </a:xfrm>
-          <a:prstGeom prst="rect">
-            <a:avLst/>
-          </a:prstGeom>
-          <a:noFill/>
-          <a:ln/>
-        </p:spPr>
-        <p:txBody>
-          <a:bodyPr wrap="square" lIns="0" tIns="0" rIns="0" bIns="0" rtlCol="0" anchor="ctr"/>
-          <a:lstStyle/>
-          <a:p>
-            <a:pPr indent="0" marL="0">
-              <a:buNone/>
-            </a:pPr>
-            <a:r>
-              <a:rPr lang="en-US" sz="800" dirty="0">
-                <a:solidFill>
-                  <a:srgbClr val="718096"/>
-                </a:solidFill>
-                <a:latin typeface="Pretendard" pitchFamily="34" charset="0"/>
-                <a:ea typeface="Pretendard" pitchFamily="34" charset="-122"/>
-                <a:cs typeface="Pretendard" pitchFamily="34" charset="-120"/>
-              </a:rPr>
-              <a:t>크리딜   |   </a:t>
-            </a:r>
-            <a:endParaRPr lang="en-US" sz="800" dirty="0"/>
-          </a:p>
-        </p:txBody>
-      </p:sp>
-      <p:sp>
-        <p:nvSpPr>
-          <p:cNvPr id="34" name="Text 32"/>
-          <p:cNvSpPr/>
-          <p:nvPr/>
-        </p:nvSpPr>
-        <p:spPr>
-          <a:xfrm>
-            <a:off x="10710367" y="6382512"/>
-            <a:ext cx="914400" cy="219456"/>
-          </a:xfrm>
-          <a:prstGeom prst="rect">
-            <a:avLst/>
-          </a:prstGeom>
-          <a:noFill/>
-          <a:ln/>
-        </p:spPr>
-        <p:txBody>
-          <a:bodyPr wrap="square" lIns="0" tIns="0" rIns="0" bIns="0" rtlCol="0" anchor="ctr"/>
-          <a:lstStyle/>
-          <a:p>
-            <a:pPr algn="r" indent="0" marL="0">
-              <a:buNone/>
-            </a:pPr>
-            <a:r>
-              <a:rPr lang="en-US" sz="900" b="1" dirty="0">
-                <a:solidFill>
-                  <a:srgbClr val="B98A2E"/>
-                </a:solidFill>
-                <a:latin typeface="Arial" pitchFamily="34" charset="0"/>
-                <a:ea typeface="Arial" pitchFamily="34" charset="-122"/>
-                <a:cs typeface="Arial" pitchFamily="34" charset="-120"/>
-              </a:rPr>
-              <a:t>11</a:t>
-            </a:r>
-            <a:endParaRPr lang="en-US" sz="900" dirty="0"/>
-          </a:p>
-        </p:txBody>
-      </p:sp>
-    </p:spTree>
-  </p:cSld>
-  <p:clrMapOvr>
-    <a:masterClrMapping/>
-  </p:clrMapOvr>
-</p:sld>
-</file>
-
-<file path=ppt/slides/slide13.xml><?xml version="1.0" encoding="utf-8"?>
-<p:sld xmlns:a="http://schemas.openxmlformats.org/drawingml/2006/main" xmlns:r="http://schemas.openxmlformats.org/officeDocument/2006/relationships" xmlns:p="http://schemas.openxmlformats.org/presentationml/2006/main">
-  <p:cSld name="Slide 13">
-    <p:bg>
-      <p:bgPr>
-        <a:solidFill>
-          <a:srgbClr val="FFFFFF"/>
-        </a:solidFill>
-      </p:bgPr>
-    </p:bg>
-    <p:spTree>
-      <p:nvGrpSpPr>
-        <p:cNvPr id="1" name=""/>
-        <p:cNvGrpSpPr/>
-        <p:nvPr/>
-      </p:nvGrpSpPr>
-      <p:grpSpPr>
-        <a:xfrm>
-          <a:off x="0" y="0"/>
-          <a:ext cx="0" cy="0"/>
-          <a:chOff x="0" y="0"/>
-          <a:chExt cx="0" cy="0"/>
-        </a:xfrm>
-      </p:grpSpPr>
-      <p:sp>
-        <p:nvSpPr>
-          <p:cNvPr id="2" name="Shape 0"/>
-          <p:cNvSpPr/>
-          <p:nvPr/>
-        </p:nvSpPr>
-        <p:spPr>
-          <a:xfrm>
-            <a:off x="566928" y="457200"/>
-            <a:ext cx="384048" cy="384048"/>
-          </a:xfrm>
-          <a:prstGeom prst="ellipse">
-            <a:avLst/>
-          </a:prstGeom>
-          <a:solidFill>
-            <a:srgbClr val="B98A2E"/>
-          </a:solidFill>
-          <a:ln/>
-        </p:spPr>
-      </p:sp>
-      <p:sp>
-        <p:nvSpPr>
-          <p:cNvPr id="3" name="Text 1"/>
-          <p:cNvSpPr/>
-          <p:nvPr/>
-        </p:nvSpPr>
-        <p:spPr>
-          <a:xfrm>
-            <a:off x="566928" y="457200"/>
-            <a:ext cx="384048" cy="384048"/>
-          </a:xfrm>
-          <a:prstGeom prst="rect">
-            <a:avLst/>
-          </a:prstGeom>
-          <a:noFill/>
-          <a:ln/>
-        </p:spPr>
-        <p:txBody>
-          <a:bodyPr wrap="square" lIns="0" tIns="0" rIns="0" bIns="0" rtlCol="0" anchor="ctr"/>
-          <a:lstStyle/>
-          <a:p>
-            <a:pPr algn="ctr" indent="0" marL="0">
-              <a:buNone/>
-            </a:pPr>
-            <a:r>
-              <a:rPr lang="en-US" sz="1300" b="1" dirty="0">
-                <a:solidFill>
-                  <a:srgbClr val="FFFFFF"/>
-                </a:solidFill>
-                <a:latin typeface="Arial" pitchFamily="34" charset="0"/>
-                <a:ea typeface="Arial" pitchFamily="34" charset="-122"/>
-                <a:cs typeface="Arial" pitchFamily="34" charset="-120"/>
-              </a:rPr>
-              <a:t>12</a:t>
-            </a:r>
-            <a:endParaRPr lang="en-US" sz="1300" dirty="0"/>
-          </a:p>
-        </p:txBody>
-      </p:sp>
-      <p:sp>
-        <p:nvSpPr>
-          <p:cNvPr id="4" name="Text 2"/>
-          <p:cNvSpPr/>
-          <p:nvPr/>
-        </p:nvSpPr>
-        <p:spPr>
-          <a:xfrm>
-            <a:off x="1133856" y="457200"/>
-            <a:ext cx="10490911" cy="182880"/>
-          </a:xfrm>
-          <a:prstGeom prst="rect">
-            <a:avLst/>
-          </a:prstGeom>
-          <a:noFill/>
-          <a:ln/>
-        </p:spPr>
-        <p:txBody>
-          <a:bodyPr wrap="square" lIns="0" tIns="0" rIns="0" bIns="0" rtlCol="0" anchor="ctr"/>
-          <a:lstStyle/>
-          <a:p>
-            <a:pPr indent="0" marL="0">
-              <a:buNone/>
-            </a:pPr>
-            <a:r>
-              <a:rPr lang="en-US" sz="950" b="1" spc="200" kern="0" dirty="0">
-                <a:solidFill>
-                  <a:srgbClr val="B98A2E"/>
-                </a:solidFill>
-                <a:latin typeface="Arial" pitchFamily="34" charset="0"/>
-                <a:ea typeface="Arial" pitchFamily="34" charset="-122"/>
-                <a:cs typeface="Arial" pitchFamily="34" charset="-120"/>
-              </a:rPr>
-              <a:t>Process</a:t>
-            </a:r>
-            <a:endParaRPr lang="en-US" sz="950" dirty="0"/>
-          </a:p>
-        </p:txBody>
-      </p:sp>
-      <p:sp>
-        <p:nvSpPr>
-          <p:cNvPr id="5" name="Text 3"/>
-          <p:cNvSpPr/>
-          <p:nvPr/>
-        </p:nvSpPr>
-        <p:spPr>
-          <a:xfrm>
-            <a:off x="1133856" y="640080"/>
-            <a:ext cx="10490911" cy="365760"/>
-          </a:xfrm>
-          <a:prstGeom prst="rect">
-            <a:avLst/>
-          </a:prstGeom>
-          <a:noFill/>
-          <a:ln/>
-        </p:spPr>
-        <p:txBody>
-          <a:bodyPr wrap="square" lIns="0" tIns="0" rIns="0" bIns="0" rtlCol="0" anchor="ctr"/>
-          <a:lstStyle/>
-          <a:p>
-            <a:pPr indent="0" marL="0">
-              <a:buNone/>
-            </a:pPr>
-            <a:r>
-              <a:rPr lang="en-US" sz="2300" b="1" dirty="0">
-                <a:solidFill>
-                  <a:srgbClr val="10161F"/>
-                </a:solidFill>
-                <a:latin typeface="Pretendard" pitchFamily="34" charset="0"/>
-                <a:ea typeface="Pretendard" pitchFamily="34" charset="-122"/>
-                <a:cs typeface="Pretendard" pitchFamily="34" charset="-120"/>
-              </a:rPr>
-              <a:t>다음 단계</a:t>
-            </a:r>
-            <a:endParaRPr lang="en-US" sz="2300" dirty="0"/>
-          </a:p>
-        </p:txBody>
-      </p:sp>
-      <p:sp>
-        <p:nvSpPr>
-          <p:cNvPr id="6" name="Shape 4"/>
-          <p:cNvSpPr/>
-          <p:nvPr/>
-        </p:nvSpPr>
-        <p:spPr>
-          <a:xfrm>
-            <a:off x="566928" y="1572768"/>
-            <a:ext cx="11057839" cy="3200400"/>
-          </a:xfrm>
-          <a:prstGeom prst="roundRect">
-            <a:avLst>
-              <a:gd name="adj" fmla="val 1714"/>
-            </a:avLst>
-          </a:prstGeom>
-          <a:solidFill>
-            <a:srgbClr val="F7FAFC"/>
-          </a:solidFill>
-          <a:ln w="6350">
-            <a:solidFill>
-              <a:srgbClr val="CBD5E0"/>
-            </a:solidFill>
-            <a:prstDash val="solid"/>
-          </a:ln>
-        </p:spPr>
-      </p:sp>
-      <p:sp>
-        <p:nvSpPr>
-          <p:cNvPr id="7" name="Shape 5"/>
-          <p:cNvSpPr/>
-          <p:nvPr/>
-        </p:nvSpPr>
-        <p:spPr>
-          <a:xfrm>
-            <a:off x="786384" y="1792224"/>
-            <a:ext cx="438912" cy="438912"/>
-          </a:xfrm>
-          <a:prstGeom prst="ellipse">
-            <a:avLst/>
-          </a:prstGeom>
-          <a:solidFill>
-            <a:srgbClr val="B98A2E"/>
-          </a:solidFill>
-          <a:ln/>
-        </p:spPr>
-      </p:sp>
-      <p:sp>
-        <p:nvSpPr>
-          <p:cNvPr id="8" name="Text 6"/>
-          <p:cNvSpPr/>
-          <p:nvPr/>
-        </p:nvSpPr>
-        <p:spPr>
-          <a:xfrm>
-            <a:off x="786384" y="1792224"/>
-            <a:ext cx="438912" cy="438912"/>
-          </a:xfrm>
-          <a:prstGeom prst="rect">
-            <a:avLst/>
-          </a:prstGeom>
-          <a:noFill/>
-          <a:ln/>
-        </p:spPr>
-        <p:txBody>
-          <a:bodyPr wrap="square" lIns="0" tIns="0" rIns="0" bIns="0" rtlCol="0" anchor="ctr"/>
-          <a:lstStyle/>
-          <a:p>
-            <a:pPr algn="ctr" indent="0" marL="0">
-              <a:buNone/>
-            </a:pPr>
-            <a:r>
-              <a:rPr lang="en-US" sz="1400" b="1" dirty="0">
-                <a:solidFill>
-                  <a:srgbClr val="FFFFFF"/>
-                </a:solidFill>
-                <a:latin typeface="Arial" pitchFamily="34" charset="0"/>
-                <a:ea typeface="Arial" pitchFamily="34" charset="-122"/>
-                <a:cs typeface="Arial" pitchFamily="34" charset="-120"/>
-              </a:rPr>
-              <a:t>01</a:t>
-            </a:r>
-            <a:endParaRPr lang="en-US" sz="1400" dirty="0"/>
-          </a:p>
-        </p:txBody>
-      </p:sp>
-      <p:sp>
-        <p:nvSpPr>
-          <p:cNvPr id="9" name="Text 7"/>
-          <p:cNvSpPr/>
-          <p:nvPr/>
-        </p:nvSpPr>
-        <p:spPr>
-          <a:xfrm>
-            <a:off x="786384" y="2304288"/>
-            <a:ext cx="10618927" cy="365760"/>
-          </a:xfrm>
-          <a:prstGeom prst="rect">
-            <a:avLst/>
-          </a:prstGeom>
-          <a:noFill/>
-          <a:ln/>
-        </p:spPr>
-        <p:txBody>
-          <a:bodyPr wrap="square" rtlCol="0" anchor="ctr"/>
-          <a:lstStyle/>
-          <a:p>
-            <a:pPr indent="0" marL="0">
-              <a:buNone/>
-            </a:pPr>
-            <a:r>
-              <a:rPr lang="en-US" sz="1600" b="1" dirty="0">
-                <a:solidFill>
-                  <a:srgbClr val="10161F"/>
-                </a:solidFill>
-                <a:latin typeface="Pretendard" pitchFamily="34" charset="0"/>
-                <a:ea typeface="Pretendard" pitchFamily="34" charset="-122"/>
-                <a:cs typeface="Pretendard" pitchFamily="34" charset="-120"/>
-              </a:rPr>
-              <a:t>1단계</a:t>
-            </a:r>
-            <a:endParaRPr lang="en-US" sz="1600" dirty="0"/>
-          </a:p>
-        </p:txBody>
-      </p:sp>
-      <p:sp>
-        <p:nvSpPr>
-          <p:cNvPr id="10" name="Text 8"/>
-          <p:cNvSpPr/>
-          <p:nvPr/>
-        </p:nvSpPr>
-        <p:spPr>
-          <a:xfrm>
-            <a:off x="786384" y="2761488"/>
-            <a:ext cx="10618927" cy="1828800"/>
-          </a:xfrm>
-          <a:prstGeom prst="rect">
-            <a:avLst/>
-          </a:prstGeom>
-          <a:noFill/>
-          <a:ln/>
-        </p:spPr>
-        <p:txBody>
-          <a:bodyPr wrap="square" rtlCol="0" anchor="t"/>
-          <a:lstStyle/>
-          <a:p>
-            <a:pPr indent="0" marL="0">
-              <a:buNone/>
-            </a:pPr>
-            <a:r>
-              <a:rPr lang="en-US" sz="1100" dirty="0">
-                <a:solidFill>
-                  <a:srgbClr val="10161F"/>
-                </a:solidFill>
-                <a:latin typeface="Pretendard" pitchFamily="34" charset="0"/>
-                <a:ea typeface="Pretendard" pitchFamily="34" charset="-122"/>
-                <a:cs typeface="Pretendard" pitchFamily="34" charset="-120"/>
-              </a:rPr>
-              <a:t>현장 실사 및 임대차계약서 원본 확인을 권장합니다.</a:t>
-            </a:r>
-            <a:endParaRPr lang="en-US" sz="1100" dirty="0"/>
-          </a:p>
-          <a:p>
-            <a:pPr indent="0" marL="0">
-              <a:buNone/>
-            </a:pPr>
-            <a:r>
-              <a:rPr lang="en-US" sz="1100" dirty="0">
-                <a:solidFill>
-                  <a:srgbClr val="10161F"/>
-                </a:solidFill>
-                <a:latin typeface="Pretendard" pitchFamily="34" charset="0"/>
-                <a:ea typeface="Pretendard" pitchFamily="34" charset="-122"/>
-                <a:cs typeface="Pretendard" pitchFamily="34" charset="-120"/>
-              </a:rPr>
-              <a:t>현장 실사 및 임대차계약서 원본 확인을 권장합니다.</a:t>
-            </a:r>
-            <a:endParaRPr lang="en-US" sz="1100" dirty="0"/>
-          </a:p>
-        </p:txBody>
-      </p:sp>
-      <p:sp>
-        <p:nvSpPr>
-          <p:cNvPr id="11" name="Text 9"/>
-          <p:cNvSpPr/>
-          <p:nvPr/>
-        </p:nvSpPr>
-        <p:spPr>
-          <a:xfrm>
-            <a:off x="566928" y="6382512"/>
-            <a:ext cx="7315200" cy="219456"/>
-          </a:xfrm>
-          <a:prstGeom prst="rect">
-            <a:avLst/>
-          </a:prstGeom>
-          <a:noFill/>
-          <a:ln/>
-        </p:spPr>
-        <p:txBody>
-          <a:bodyPr wrap="square" lIns="0" tIns="0" rIns="0" bIns="0" rtlCol="0" anchor="ctr"/>
-          <a:lstStyle/>
-          <a:p>
-            <a:pPr indent="0" marL="0">
-              <a:buNone/>
-            </a:pPr>
-            <a:r>
-              <a:rPr lang="en-US" sz="800" dirty="0">
-                <a:solidFill>
-                  <a:srgbClr val="718096"/>
-                </a:solidFill>
-                <a:latin typeface="Pretendard" pitchFamily="34" charset="0"/>
-                <a:ea typeface="Pretendard" pitchFamily="34" charset="-122"/>
-                <a:cs typeface="Pretendard" pitchFamily="34" charset="-120"/>
-              </a:rPr>
-              <a:t>크리딜   |   </a:t>
-            </a:r>
-            <a:endParaRPr lang="en-US" sz="800" dirty="0"/>
-          </a:p>
-        </p:txBody>
-      </p:sp>
-      <p:sp>
-        <p:nvSpPr>
-          <p:cNvPr id="12" name="Text 10"/>
-          <p:cNvSpPr/>
-          <p:nvPr/>
-        </p:nvSpPr>
-        <p:spPr>
-          <a:xfrm>
-            <a:off x="10710367" y="6382512"/>
-            <a:ext cx="914400" cy="219456"/>
-          </a:xfrm>
-          <a:prstGeom prst="rect">
-            <a:avLst/>
-          </a:prstGeom>
-          <a:noFill/>
-          <a:ln/>
-        </p:spPr>
-        <p:txBody>
-          <a:bodyPr wrap="square" lIns="0" tIns="0" rIns="0" bIns="0" rtlCol="0" anchor="ctr"/>
-          <a:lstStyle/>
-          <a:p>
-            <a:pPr algn="r" indent="0" marL="0">
-              <a:buNone/>
-            </a:pPr>
-            <a:r>
-              <a:rPr lang="en-US" sz="900" b="1" dirty="0">
-                <a:solidFill>
-                  <a:srgbClr val="B98A2E"/>
-                </a:solidFill>
-                <a:latin typeface="Arial" pitchFamily="34" charset="0"/>
-                <a:ea typeface="Arial" pitchFamily="34" charset="-122"/>
-                <a:cs typeface="Arial" pitchFamily="34" charset="-120"/>
-              </a:rPr>
-              <a:t>12</a:t>
-            </a:r>
-            <a:endParaRPr lang="en-US" sz="900" dirty="0"/>
-          </a:p>
-        </p:txBody>
-      </p:sp>
-    </p:spTree>
-  </p:cSld>
-  <p:clrMapOvr>
-    <a:masterClrMapping/>
-  </p:clrMapOvr>
-</p:sld>
-</file>
-
-<file path=ppt/slides/slide14.xml><?xml version="1.0" encoding="utf-8"?>
-<p:sld xmlns:a="http://schemas.openxmlformats.org/drawingml/2006/main" xmlns:r="http://schemas.openxmlformats.org/officeDocument/2006/relationships" xmlns:p="http://schemas.openxmlformats.org/presentationml/2006/main">
-  <p:cSld name="Slide 14">
     <p:bg>
       <p:bgPr>
         <a:solidFill>
@@ -5265,7 +4075,7 @@
                 <a:ea typeface="Arial" pitchFamily="34" charset="-122"/>
                 <a:cs typeface="Arial" pitchFamily="34" charset="-120"/>
               </a:rPr>
-              <a:t>13</a:t>
+              <a:t>12</a:t>
             </a:r>
             <a:endParaRPr lang="en-US" sz="1300" dirty="0"/>
           </a:p>
@@ -6451,7 +5261,7 @@
         </p:nvSpPr>
         <p:spPr>
           <a:xfrm>
-            <a:off x="6492240" y="2395728"/>
+            <a:off x="6492240" y="2414016"/>
             <a:ext cx="5129784" cy="237744"/>
           </a:xfrm>
           <a:prstGeom prst="rect">
@@ -6491,11 +5301,11 @@
         <p:spPr>
           <a:xfrm>
             <a:off x="6492240" y="2724912"/>
-            <a:ext cx="5129784" cy="1645920"/>
+            <a:ext cx="5129784" cy="1005840"/>
           </a:xfrm>
           <a:prstGeom prst="roundRect">
             <a:avLst>
-              <a:gd name="adj" fmla="val 2222"/>
+              <a:gd name="adj" fmla="val 3636"/>
             </a:avLst>
           </a:prstGeom>
           <a:solidFill>
@@ -6513,7 +5323,7 @@
         <p:spPr>
           <a:xfrm>
             <a:off x="6675120" y="2834640"/>
-            <a:ext cx="4764024" cy="1426464"/>
+            <a:ext cx="4764024" cy="786384"/>
           </a:xfrm>
           <a:prstGeom prst="rect">
             <a:avLst/>
@@ -6677,7 +5487,7 @@
                 <a:ea typeface="Arial" pitchFamily="34" charset="-122"/>
                 <a:cs typeface="Arial" pitchFamily="34" charset="-120"/>
               </a:rPr>
-              <a:t>13</a:t>
+              <a:t>12</a:t>
             </a:r>
             <a:endParaRPr lang="en-US" sz="900" dirty="0"/>
           </a:p>
@@ -6846,7 +5656,7 @@
                 <a:ea typeface="Pretendard" pitchFamily="34" charset="-122"/>
                 <a:cs typeface="Pretendard" pitchFamily="34" charset="-120"/>
               </a:rPr>
-              <a:t>핵심요약</a:t>
+              <a:t>핵심 투자 지표 요약</a:t>
             </a:r>
             <a:endParaRPr lang="en-US" sz="2300" dirty="0"/>
           </a:p>
@@ -6923,11 +5733,11 @@
         <p:spPr>
           <a:xfrm>
             <a:off x="566928" y="1965960"/>
-            <a:ext cx="2627300" cy="1280160"/>
+            <a:ext cx="2641016" cy="960120"/>
           </a:xfrm>
           <a:prstGeom prst="roundRect">
             <a:avLst>
-              <a:gd name="adj" fmla="val 4286"/>
+              <a:gd name="adj" fmla="val 5714"/>
             </a:avLst>
           </a:prstGeom>
           <a:solidFill>
@@ -6950,7 +5760,7 @@
         <p:spPr>
           <a:xfrm>
             <a:off x="731520" y="2093976"/>
-            <a:ext cx="2298116" cy="201168"/>
+            <a:ext cx="2311832" cy="201168"/>
           </a:xfrm>
           <a:prstGeom prst="rect">
             <a:avLst/>
@@ -6974,7 +5784,7 @@
                 <a:ea typeface="Pretendard" pitchFamily="34" charset="-122"/>
                 <a:cs typeface="Pretendard" pitchFamily="34" charset="-120"/>
               </a:rPr>
-              <a:t>대지면적</a:t>
+              <a:t>매매 희망가</a:t>
             </a:r>
             <a:endParaRPr lang="en-US" sz="950" dirty="0"/>
           </a:p>
@@ -6989,7 +5799,7 @@
         <p:spPr>
           <a:xfrm>
             <a:off x="731520" y="2313432"/>
-            <a:ext cx="2298116" cy="402336"/>
+            <a:ext cx="2311832" cy="274320"/>
           </a:xfrm>
           <a:prstGeom prst="rect">
             <a:avLst/>
@@ -7007,17 +5817,17 @@
               <a:buNone/>
             </a:pPr>
             <a:r>
-              <a:rPr lang="en-US" sz="2000" b="1" dirty="0">
+              <a:rPr lang="en-US" sz="1700" b="1" dirty="0">
                 <a:solidFill>
                   <a:srgbClr val="10161F"/>
                 </a:solidFill>
-                <a:latin typeface="Pretendard" pitchFamily="34" charset="0"/>
-                <a:ea typeface="Pretendard" pitchFamily="34" charset="-122"/>
-                <a:cs typeface="Pretendard" pitchFamily="34" charset="-120"/>
-              </a:rPr>
-              <a:t>142.5평</a:t>
-            </a:r>
-            <a:endParaRPr lang="en-US" sz="2000" dirty="0"/>
+                <a:latin typeface="Arial" pitchFamily="34" charset="0"/>
+                <a:ea typeface="Arial" pitchFamily="34" charset="-122"/>
+                <a:cs typeface="Arial" pitchFamily="34" charset="-120"/>
+              </a:rPr>
+              <a:t>-</a:t>
+            </a:r>
+            <a:endParaRPr lang="en-US" sz="1700" dirty="0"/>
           </a:p>
         </p:txBody>
       </p:sp>
@@ -7029,12 +5839,12 @@
         </p:nvSpPr>
         <p:spPr>
           <a:xfrm>
-            <a:off x="3377108" y="1965960"/>
-            <a:ext cx="2627300" cy="1280160"/>
+            <a:off x="3372536" y="1965960"/>
+            <a:ext cx="2641016" cy="960120"/>
           </a:xfrm>
           <a:prstGeom prst="roundRect">
             <a:avLst>
-              <a:gd name="adj" fmla="val 4286"/>
+              <a:gd name="adj" fmla="val 5714"/>
             </a:avLst>
           </a:prstGeom>
           <a:solidFill>
@@ -7056,8 +5866,8 @@
         </p:nvSpPr>
         <p:spPr>
           <a:xfrm>
-            <a:off x="3541700" y="2093976"/>
-            <a:ext cx="2298116" cy="201168"/>
+            <a:off x="3537128" y="2093976"/>
+            <a:ext cx="2311832" cy="201168"/>
           </a:xfrm>
           <a:prstGeom prst="rect">
             <a:avLst/>
@@ -7081,7 +5891,7 @@
                 <a:ea typeface="Pretendard" pitchFamily="34" charset="-122"/>
                 <a:cs typeface="Pretendard" pitchFamily="34" charset="-120"/>
               </a:rPr>
-              <a:t>연면적</a:t>
+              <a:t>대지면적</a:t>
             </a:r>
             <a:endParaRPr lang="en-US" sz="950" dirty="0"/>
           </a:p>
@@ -7095,8 +5905,8 @@
         </p:nvSpPr>
         <p:spPr>
           <a:xfrm>
-            <a:off x="3541700" y="2313432"/>
-            <a:ext cx="2298116" cy="402336"/>
+            <a:off x="3537128" y="2313432"/>
+            <a:ext cx="2311832" cy="274320"/>
           </a:xfrm>
           <a:prstGeom prst="rect">
             <a:avLst/>
@@ -7114,7 +5924,7 @@
               <a:buNone/>
             </a:pPr>
             <a:r>
-              <a:rPr lang="en-US" sz="2000" b="1" dirty="0">
+              <a:rPr lang="en-US" sz="1700" b="1" dirty="0">
                 <a:solidFill>
                   <a:srgbClr val="10161F"/>
                 </a:solidFill>
@@ -7122,9 +5932,9 @@
                 <a:ea typeface="Pretendard" pitchFamily="34" charset="-122"/>
                 <a:cs typeface="Pretendard" pitchFamily="34" charset="-120"/>
               </a:rPr>
-              <a:t>620.8평</a:t>
-            </a:r>
-            <a:endParaRPr lang="en-US" sz="2000" dirty="0"/>
+              <a:t>142.5평</a:t>
+            </a:r>
+            <a:endParaRPr lang="en-US" sz="1700" dirty="0"/>
           </a:p>
         </p:txBody>
       </p:sp>
@@ -7136,12 +5946,12 @@
         </p:nvSpPr>
         <p:spPr>
           <a:xfrm>
-            <a:off x="6187288" y="1965960"/>
-            <a:ext cx="2627300" cy="1280160"/>
+            <a:off x="6178144" y="1965960"/>
+            <a:ext cx="2641016" cy="960120"/>
           </a:xfrm>
           <a:prstGeom prst="roundRect">
             <a:avLst>
-              <a:gd name="adj" fmla="val 4286"/>
+              <a:gd name="adj" fmla="val 5714"/>
             </a:avLst>
           </a:prstGeom>
           <a:solidFill>
@@ -7163,8 +5973,8 @@
         </p:nvSpPr>
         <p:spPr>
           <a:xfrm>
-            <a:off x="6351880" y="2093976"/>
-            <a:ext cx="2298116" cy="201168"/>
+            <a:off x="6342736" y="2093976"/>
+            <a:ext cx="2311832" cy="201168"/>
           </a:xfrm>
           <a:prstGeom prst="rect">
             <a:avLst/>
@@ -7188,7 +5998,7 @@
                 <a:ea typeface="Pretendard" pitchFamily="34" charset="-122"/>
                 <a:cs typeface="Pretendard" pitchFamily="34" charset="-120"/>
               </a:rPr>
-              <a:t>준공</a:t>
+              <a:t>연면적</a:t>
             </a:r>
             <a:endParaRPr lang="en-US" sz="950" dirty="0"/>
           </a:p>
@@ -7202,8 +6012,8 @@
         </p:nvSpPr>
         <p:spPr>
           <a:xfrm>
-            <a:off x="6351880" y="2313432"/>
-            <a:ext cx="2298116" cy="402336"/>
+            <a:off x="6342736" y="2313432"/>
+            <a:ext cx="2311832" cy="274320"/>
           </a:xfrm>
           <a:prstGeom prst="rect">
             <a:avLst/>
@@ -7221,7 +6031,7 @@
               <a:buNone/>
             </a:pPr>
             <a:r>
-              <a:rPr lang="en-US" sz="2000" b="1" dirty="0">
+              <a:rPr lang="en-US" sz="1700" b="1" dirty="0">
                 <a:solidFill>
                   <a:srgbClr val="10161F"/>
                 </a:solidFill>
@@ -7229,9 +6039,9 @@
                 <a:ea typeface="Pretendard" pitchFamily="34" charset="-122"/>
                 <a:cs typeface="Pretendard" pitchFamily="34" charset="-120"/>
               </a:rPr>
-              <a:t>2017년</a:t>
-            </a:r>
-            <a:endParaRPr lang="en-US" sz="2000" dirty="0"/>
+              <a:t>620.8평</a:t>
+            </a:r>
+            <a:endParaRPr lang="en-US" sz="1700" dirty="0"/>
           </a:p>
         </p:txBody>
       </p:sp>
@@ -7243,12 +6053,12 @@
         </p:nvSpPr>
         <p:spPr>
           <a:xfrm>
-            <a:off x="8997467" y="1965960"/>
-            <a:ext cx="2627300" cy="1280160"/>
+            <a:off x="8983751" y="1965960"/>
+            <a:ext cx="2641016" cy="960120"/>
           </a:xfrm>
           <a:prstGeom prst="roundRect">
             <a:avLst>
-              <a:gd name="adj" fmla="val 4286"/>
+              <a:gd name="adj" fmla="val 5714"/>
             </a:avLst>
           </a:prstGeom>
           <a:solidFill>
@@ -7270,8 +6080,8 @@
         </p:nvSpPr>
         <p:spPr>
           <a:xfrm>
-            <a:off x="9162059" y="2093976"/>
-            <a:ext cx="2298116" cy="201168"/>
+            <a:off x="9148343" y="2093976"/>
+            <a:ext cx="2311832" cy="201168"/>
           </a:xfrm>
           <a:prstGeom prst="rect">
             <a:avLst/>
@@ -7295,7 +6105,7 @@
                 <a:ea typeface="Pretendard" pitchFamily="34" charset="-122"/>
                 <a:cs typeface="Pretendard" pitchFamily="34" charset="-120"/>
               </a:rPr>
-              <a:t>서초 메디컬 빌딩은 지하2</a:t>
+              <a:t>준공</a:t>
             </a:r>
             <a:endParaRPr lang="en-US" sz="950" dirty="0"/>
           </a:p>
@@ -7309,8 +6119,8 @@
         </p:nvSpPr>
         <p:spPr>
           <a:xfrm>
-            <a:off x="9162059" y="2313432"/>
-            <a:ext cx="2298116" cy="402336"/>
+            <a:off x="9148343" y="2313432"/>
+            <a:ext cx="2311832" cy="274320"/>
           </a:xfrm>
           <a:prstGeom prst="rect">
             <a:avLst/>
@@ -7328,7 +6138,7 @@
               <a:buNone/>
             </a:pPr>
             <a:r>
-              <a:rPr lang="en-US" sz="2000" b="1" dirty="0">
+              <a:rPr lang="en-US" sz="1700" b="1" dirty="0">
                 <a:solidFill>
                   <a:srgbClr val="10161F"/>
                 </a:solidFill>
@@ -7336,65 +6146,493 @@
                 <a:ea typeface="Pretendard" pitchFamily="34" charset="-122"/>
                 <a:cs typeface="Pretendard" pitchFamily="34" charset="-120"/>
               </a:rPr>
-              <a:t>2층</a:t>
-            </a:r>
-            <a:endParaRPr lang="en-US" sz="2000" dirty="0"/>
-          </a:p>
-        </p:txBody>
-      </p:sp>
-      <p:sp>
-        <p:nvSpPr>
-          <p:cNvPr id="20" name="Text 18"/>
-          <p:cNvSpPr/>
-          <p:nvPr/>
-        </p:nvSpPr>
-        <p:spPr>
-          <a:xfrm>
-            <a:off x="566928" y="3502152"/>
-            <a:ext cx="11057839" cy="274320"/>
-          </a:xfrm>
-          <a:prstGeom prst="rect">
-            <a:avLst/>
-          </a:prstGeom>
-          <a:noFill/>
-          <a:ln/>
-        </p:spPr>
-        <p:txBody>
-          <a:bodyPr wrap="square" lIns="0" tIns="0" rIns="0" bIns="0" rtlCol="0" anchor="ctr"/>
-          <a:lstStyle/>
-          <a:p>
-            <a:pPr indent="0" marL="0">
-              <a:buNone/>
-            </a:pPr>
-            <a:r>
-              <a:rPr lang="en-US" sz="1250" b="1" dirty="0">
-                <a:solidFill>
-                  <a:srgbClr val="977024"/>
-                </a:solidFill>
-                <a:latin typeface="Pretendard" pitchFamily="34" charset="0"/>
-                <a:ea typeface="Pretendard" pitchFamily="34" charset="-122"/>
-                <a:cs typeface="Pretendard" pitchFamily="34" charset="-120"/>
-              </a:rPr>
-              <a:t>3대 핵심 투자 포인트 (Investment Highlights)</a:t>
-            </a:r>
-            <a:endParaRPr lang="en-US" sz="1250" dirty="0"/>
-          </a:p>
-        </p:txBody>
-      </p:sp>
-      <p:sp>
-        <p:nvSpPr>
-          <p:cNvPr id="21" name="Shape 19"/>
-          <p:cNvSpPr/>
-          <p:nvPr/>
-        </p:nvSpPr>
-        <p:spPr>
-          <a:xfrm>
-            <a:off x="566928" y="3831336"/>
-            <a:ext cx="11057839" cy="585216"/>
+              <a:t>2017년</a:t>
+            </a:r>
+            <a:endParaRPr lang="en-US" sz="1700" dirty="0"/>
+          </a:p>
+        </p:txBody>
+      </p:sp>
+      <p:sp>
+        <p:nvSpPr>
+          <p:cNvPr id="20" name="Shape 18"/>
+          <p:cNvSpPr/>
+          <p:nvPr/>
+        </p:nvSpPr>
+        <p:spPr>
+          <a:xfrm>
+            <a:off x="566928" y="3090672"/>
+            <a:ext cx="2641016" cy="960120"/>
           </a:xfrm>
           <a:prstGeom prst="roundRect">
             <a:avLst>
-              <a:gd name="adj" fmla="val 7813"/>
+              <a:gd name="adj" fmla="val 5714"/>
+            </a:avLst>
+          </a:prstGeom>
+          <a:solidFill>
+            <a:srgbClr val="F7FAFC"/>
+          </a:solidFill>
+          <a:ln w="6350">
+            <a:solidFill>
+              <a:srgbClr val="CBD5E0"/>
+            </a:solidFill>
+            <a:prstDash val="solid"/>
+          </a:ln>
+        </p:spPr>
+      </p:sp>
+      <p:sp>
+        <p:nvSpPr>
+          <p:cNvPr id="21" name="Text 19"/>
+          <p:cNvSpPr/>
+          <p:nvPr/>
+        </p:nvSpPr>
+        <p:spPr>
+          <a:xfrm>
+            <a:off x="731520" y="3218688"/>
+            <a:ext cx="2311832" cy="201168"/>
+          </a:xfrm>
+          <a:prstGeom prst="rect">
+            <a:avLst/>
+          </a:prstGeom>
+          <a:noFill/>
+          <a:ln/>
+        </p:spPr>
+        <p:txBody>
+          <a:bodyPr wrap="square" lIns="0" tIns="0" rIns="0" bIns="0" rtlCol="0" anchor="ctr"/>
+          <a:lstStyle/>
+          <a:p>
+            <a:pPr indent="0" marL="0">
+              <a:buNone/>
+            </a:pPr>
+            <a:r>
+              <a:rPr lang="en-US" sz="950" dirty="0">
+                <a:solidFill>
+                  <a:srgbClr val="718096"/>
+                </a:solidFill>
+                <a:latin typeface="Pretendard" pitchFamily="34" charset="0"/>
+                <a:ea typeface="Pretendard" pitchFamily="34" charset="-122"/>
+                <a:cs typeface="Pretendard" pitchFamily="34" charset="-120"/>
+              </a:rPr>
+              <a:t>서초 메디컬 빌딩은 지하2</a:t>
+            </a:r>
+            <a:endParaRPr lang="en-US" sz="950" dirty="0"/>
+          </a:p>
+        </p:txBody>
+      </p:sp>
+      <p:sp>
+        <p:nvSpPr>
+          <p:cNvPr id="22" name="Text 20"/>
+          <p:cNvSpPr/>
+          <p:nvPr/>
+        </p:nvSpPr>
+        <p:spPr>
+          <a:xfrm>
+            <a:off x="731520" y="3438144"/>
+            <a:ext cx="2311832" cy="274320"/>
+          </a:xfrm>
+          <a:prstGeom prst="rect">
+            <a:avLst/>
+          </a:prstGeom>
+          <a:noFill/>
+          <a:ln/>
+        </p:spPr>
+        <p:txBody>
+          <a:bodyPr wrap="square" lIns="0" tIns="0" rIns="0" bIns="0" rtlCol="0" anchor="ctr">
+            <a:normAutofit/>
+          </a:bodyPr>
+          <a:lstStyle/>
+          <a:p>
+            <a:pPr indent="0" marL="0">
+              <a:buNone/>
+            </a:pPr>
+            <a:r>
+              <a:rPr lang="en-US" sz="1700" b="1" dirty="0">
+                <a:solidFill>
+                  <a:srgbClr val="10161F"/>
+                </a:solidFill>
+                <a:latin typeface="Pretendard" pitchFamily="34" charset="0"/>
+                <a:ea typeface="Pretendard" pitchFamily="34" charset="-122"/>
+                <a:cs typeface="Pretendard" pitchFamily="34" charset="-120"/>
+              </a:rPr>
+              <a:t>2층</a:t>
+            </a:r>
+            <a:endParaRPr lang="en-US" sz="1700" dirty="0"/>
+          </a:p>
+        </p:txBody>
+      </p:sp>
+      <p:sp>
+        <p:nvSpPr>
+          <p:cNvPr id="23" name="Shape 21"/>
+          <p:cNvSpPr/>
+          <p:nvPr/>
+        </p:nvSpPr>
+        <p:spPr>
+          <a:xfrm>
+            <a:off x="3372536" y="3090672"/>
+            <a:ext cx="2641016" cy="960120"/>
+          </a:xfrm>
+          <a:prstGeom prst="roundRect">
+            <a:avLst>
+              <a:gd name="adj" fmla="val 5714"/>
+            </a:avLst>
+          </a:prstGeom>
+          <a:solidFill>
+            <a:srgbClr val="F7FAFC"/>
+          </a:solidFill>
+          <a:ln w="6350">
+            <a:solidFill>
+              <a:srgbClr val="CBD5E0"/>
+            </a:solidFill>
+            <a:prstDash val="solid"/>
+          </a:ln>
+        </p:spPr>
+      </p:sp>
+      <p:sp>
+        <p:nvSpPr>
+          <p:cNvPr id="24" name="Text 22"/>
+          <p:cNvSpPr/>
+          <p:nvPr/>
+        </p:nvSpPr>
+        <p:spPr>
+          <a:xfrm>
+            <a:off x="3537128" y="3218688"/>
+            <a:ext cx="2311832" cy="201168"/>
+          </a:xfrm>
+          <a:prstGeom prst="rect">
+            <a:avLst/>
+          </a:prstGeom>
+          <a:noFill/>
+          <a:ln/>
+        </p:spPr>
+        <p:txBody>
+          <a:bodyPr wrap="square" lIns="0" tIns="0" rIns="0" bIns="0" rtlCol="0" anchor="ctr"/>
+          <a:lstStyle/>
+          <a:p>
+            <a:pPr indent="0" marL="0">
+              <a:buNone/>
+            </a:pPr>
+            <a:r>
+              <a:rPr lang="en-US" sz="950" dirty="0">
+                <a:solidFill>
+                  <a:srgbClr val="718096"/>
+                </a:solidFill>
+                <a:latin typeface="Pretendard" pitchFamily="34" charset="0"/>
+                <a:ea typeface="Pretendard" pitchFamily="34" charset="-122"/>
+                <a:cs typeface="Pretendard" pitchFamily="34" charset="-120"/>
+              </a:rPr>
+              <a:t>연 수익률(Cap Rate)</a:t>
+            </a:r>
+            <a:endParaRPr lang="en-US" sz="950" dirty="0"/>
+          </a:p>
+        </p:txBody>
+      </p:sp>
+      <p:sp>
+        <p:nvSpPr>
+          <p:cNvPr id="25" name="Text 23"/>
+          <p:cNvSpPr/>
+          <p:nvPr/>
+        </p:nvSpPr>
+        <p:spPr>
+          <a:xfrm>
+            <a:off x="3537128" y="3438144"/>
+            <a:ext cx="2311832" cy="274320"/>
+          </a:xfrm>
+          <a:prstGeom prst="rect">
+            <a:avLst/>
+          </a:prstGeom>
+          <a:noFill/>
+          <a:ln/>
+        </p:spPr>
+        <p:txBody>
+          <a:bodyPr wrap="square" lIns="0" tIns="0" rIns="0" bIns="0" rtlCol="0" anchor="ctr">
+            <a:normAutofit/>
+          </a:bodyPr>
+          <a:lstStyle/>
+          <a:p>
+            <a:pPr indent="0" marL="0">
+              <a:buNone/>
+            </a:pPr>
+            <a:r>
+              <a:rPr lang="en-US" sz="1700" b="1" dirty="0">
+                <a:solidFill>
+                  <a:srgbClr val="10161F"/>
+                </a:solidFill>
+                <a:latin typeface="Arial" pitchFamily="34" charset="0"/>
+                <a:ea typeface="Arial" pitchFamily="34" charset="-122"/>
+                <a:cs typeface="Arial" pitchFamily="34" charset="-120"/>
+              </a:rPr>
+              <a:t>-</a:t>
+            </a:r>
+            <a:endParaRPr lang="en-US" sz="1700" dirty="0"/>
+          </a:p>
+        </p:txBody>
+      </p:sp>
+      <p:sp>
+        <p:nvSpPr>
+          <p:cNvPr id="26" name="Shape 24"/>
+          <p:cNvSpPr/>
+          <p:nvPr/>
+        </p:nvSpPr>
+        <p:spPr>
+          <a:xfrm>
+            <a:off x="6178144" y="3090672"/>
+            <a:ext cx="2641016" cy="960120"/>
+          </a:xfrm>
+          <a:prstGeom prst="roundRect">
+            <a:avLst>
+              <a:gd name="adj" fmla="val 5714"/>
+            </a:avLst>
+          </a:prstGeom>
+          <a:solidFill>
+            <a:srgbClr val="F7FAFC"/>
+          </a:solidFill>
+          <a:ln w="6350">
+            <a:solidFill>
+              <a:srgbClr val="CBD5E0"/>
+            </a:solidFill>
+            <a:prstDash val="solid"/>
+          </a:ln>
+        </p:spPr>
+      </p:sp>
+      <p:sp>
+        <p:nvSpPr>
+          <p:cNvPr id="27" name="Text 25"/>
+          <p:cNvSpPr/>
+          <p:nvPr/>
+        </p:nvSpPr>
+        <p:spPr>
+          <a:xfrm>
+            <a:off x="6342736" y="3218688"/>
+            <a:ext cx="2311832" cy="201168"/>
+          </a:xfrm>
+          <a:prstGeom prst="rect">
+            <a:avLst/>
+          </a:prstGeom>
+          <a:noFill/>
+          <a:ln/>
+        </p:spPr>
+        <p:txBody>
+          <a:bodyPr wrap="square" lIns="0" tIns="0" rIns="0" bIns="0" rtlCol="0" anchor="ctr"/>
+          <a:lstStyle/>
+          <a:p>
+            <a:pPr indent="0" marL="0">
+              <a:buNone/>
+            </a:pPr>
+            <a:r>
+              <a:rPr lang="en-US" sz="950" dirty="0">
+                <a:solidFill>
+                  <a:srgbClr val="718096"/>
+                </a:solidFill>
+                <a:latin typeface="Pretendard" pitchFamily="34" charset="0"/>
+                <a:ea typeface="Pretendard" pitchFamily="34" charset="-122"/>
+                <a:cs typeface="Pretendard" pitchFamily="34" charset="-120"/>
+              </a:rPr>
+              <a:t>실투자금</a:t>
+            </a:r>
+            <a:endParaRPr lang="en-US" sz="950" dirty="0"/>
+          </a:p>
+        </p:txBody>
+      </p:sp>
+      <p:sp>
+        <p:nvSpPr>
+          <p:cNvPr id="28" name="Text 26"/>
+          <p:cNvSpPr/>
+          <p:nvPr/>
+        </p:nvSpPr>
+        <p:spPr>
+          <a:xfrm>
+            <a:off x="6342736" y="3438144"/>
+            <a:ext cx="2311832" cy="274320"/>
+          </a:xfrm>
+          <a:prstGeom prst="rect">
+            <a:avLst/>
+          </a:prstGeom>
+          <a:noFill/>
+          <a:ln/>
+        </p:spPr>
+        <p:txBody>
+          <a:bodyPr wrap="square" lIns="0" tIns="0" rIns="0" bIns="0" rtlCol="0" anchor="ctr">
+            <a:normAutofit/>
+          </a:bodyPr>
+          <a:lstStyle/>
+          <a:p>
+            <a:pPr indent="0" marL="0">
+              <a:buNone/>
+            </a:pPr>
+            <a:r>
+              <a:rPr lang="en-US" sz="1700" b="1" dirty="0">
+                <a:solidFill>
+                  <a:srgbClr val="10161F"/>
+                </a:solidFill>
+                <a:latin typeface="Arial" pitchFamily="34" charset="0"/>
+                <a:ea typeface="Arial" pitchFamily="34" charset="-122"/>
+                <a:cs typeface="Arial" pitchFamily="34" charset="-120"/>
+              </a:rPr>
+              <a:t>-</a:t>
+            </a:r>
+            <a:endParaRPr lang="en-US" sz="1700" dirty="0"/>
+          </a:p>
+        </p:txBody>
+      </p:sp>
+      <p:sp>
+        <p:nvSpPr>
+          <p:cNvPr id="29" name="Shape 27"/>
+          <p:cNvSpPr/>
+          <p:nvPr/>
+        </p:nvSpPr>
+        <p:spPr>
+          <a:xfrm>
+            <a:off x="8983751" y="3090672"/>
+            <a:ext cx="2641016" cy="960120"/>
+          </a:xfrm>
+          <a:prstGeom prst="roundRect">
+            <a:avLst>
+              <a:gd name="adj" fmla="val 5714"/>
+            </a:avLst>
+          </a:prstGeom>
+          <a:solidFill>
+            <a:srgbClr val="F7FAFC"/>
+          </a:solidFill>
+          <a:ln w="6350">
+            <a:solidFill>
+              <a:srgbClr val="CBD5E0"/>
+            </a:solidFill>
+            <a:prstDash val="solid"/>
+          </a:ln>
+        </p:spPr>
+      </p:sp>
+      <p:sp>
+        <p:nvSpPr>
+          <p:cNvPr id="30" name="Text 28"/>
+          <p:cNvSpPr/>
+          <p:nvPr/>
+        </p:nvSpPr>
+        <p:spPr>
+          <a:xfrm>
+            <a:off x="9148343" y="3218688"/>
+            <a:ext cx="2311832" cy="201168"/>
+          </a:xfrm>
+          <a:prstGeom prst="rect">
+            <a:avLst/>
+          </a:prstGeom>
+          <a:noFill/>
+          <a:ln/>
+        </p:spPr>
+        <p:txBody>
+          <a:bodyPr wrap="square" lIns="0" tIns="0" rIns="0" bIns="0" rtlCol="0" anchor="ctr"/>
+          <a:lstStyle/>
+          <a:p>
+            <a:pPr indent="0" marL="0">
+              <a:buNone/>
+            </a:pPr>
+            <a:r>
+              <a:rPr lang="en-US" sz="950" dirty="0">
+                <a:solidFill>
+                  <a:srgbClr val="718096"/>
+                </a:solidFill>
+                <a:latin typeface="Pretendard" pitchFamily="34" charset="0"/>
+                <a:ea typeface="Pretendard" pitchFamily="34" charset="-122"/>
+                <a:cs typeface="Pretendard" pitchFamily="34" charset="-120"/>
+              </a:rPr>
+              <a:t>공실 현황</a:t>
+            </a:r>
+            <a:endParaRPr lang="en-US" sz="950" dirty="0"/>
+          </a:p>
+        </p:txBody>
+      </p:sp>
+      <p:sp>
+        <p:nvSpPr>
+          <p:cNvPr id="31" name="Text 29"/>
+          <p:cNvSpPr/>
+          <p:nvPr/>
+        </p:nvSpPr>
+        <p:spPr>
+          <a:xfrm>
+            <a:off x="9148343" y="3438144"/>
+            <a:ext cx="2311832" cy="274320"/>
+          </a:xfrm>
+          <a:prstGeom prst="rect">
+            <a:avLst/>
+          </a:prstGeom>
+          <a:noFill/>
+          <a:ln/>
+        </p:spPr>
+        <p:txBody>
+          <a:bodyPr wrap="square" lIns="0" tIns="0" rIns="0" bIns="0" rtlCol="0" anchor="ctr">
+            <a:normAutofit/>
+          </a:bodyPr>
+          <a:lstStyle/>
+          <a:p>
+            <a:pPr indent="0" marL="0">
+              <a:buNone/>
+            </a:pPr>
+            <a:r>
+              <a:rPr lang="en-US" sz="1700" b="1" dirty="0">
+                <a:solidFill>
+                  <a:srgbClr val="10161F"/>
+                </a:solidFill>
+                <a:latin typeface="Pretendard" pitchFamily="34" charset="0"/>
+                <a:ea typeface="Pretendard" pitchFamily="34" charset="-122"/>
+                <a:cs typeface="Pretendard" pitchFamily="34" charset="-120"/>
+              </a:rPr>
+              <a:t>확인 중</a:t>
+            </a:r>
+            <a:endParaRPr lang="en-US" sz="1700" dirty="0"/>
+          </a:p>
+        </p:txBody>
+      </p:sp>
+      <p:sp>
+        <p:nvSpPr>
+          <p:cNvPr id="32" name="Text 30"/>
+          <p:cNvSpPr/>
+          <p:nvPr/>
+        </p:nvSpPr>
+        <p:spPr>
+          <a:xfrm>
+            <a:off x="566928" y="4306824"/>
+            <a:ext cx="11057839" cy="274320"/>
+          </a:xfrm>
+          <a:prstGeom prst="rect">
+            <a:avLst/>
+          </a:prstGeom>
+          <a:noFill/>
+          <a:ln/>
+        </p:spPr>
+        <p:txBody>
+          <a:bodyPr wrap="square" lIns="0" tIns="0" rIns="0" bIns="0" rtlCol="0" anchor="ctr"/>
+          <a:lstStyle/>
+          <a:p>
+            <a:pPr indent="0" marL="0">
+              <a:buNone/>
+            </a:pPr>
+            <a:r>
+              <a:rPr lang="en-US" sz="1250" b="1" dirty="0">
+                <a:solidFill>
+                  <a:srgbClr val="977024"/>
+                </a:solidFill>
+                <a:latin typeface="Pretendard" pitchFamily="34" charset="0"/>
+                <a:ea typeface="Pretendard" pitchFamily="34" charset="-122"/>
+                <a:cs typeface="Pretendard" pitchFamily="34" charset="-120"/>
+              </a:rPr>
+              <a:t>3대 핵심 투자 포인트 (Investment Highlights)</a:t>
+            </a:r>
+            <a:endParaRPr lang="en-US" sz="1250" dirty="0"/>
+          </a:p>
+        </p:txBody>
+      </p:sp>
+      <p:sp>
+        <p:nvSpPr>
+          <p:cNvPr id="33" name="Shape 31"/>
+          <p:cNvSpPr/>
+          <p:nvPr/>
+        </p:nvSpPr>
+        <p:spPr>
+          <a:xfrm>
+            <a:off x="566928" y="4636008"/>
+            <a:ext cx="11057839" cy="396240"/>
+          </a:xfrm>
+          <a:prstGeom prst="roundRect">
+            <a:avLst>
+              <a:gd name="adj" fmla="val 11538"/>
             </a:avLst>
           </a:prstGeom>
           <a:solidFill>
@@ -7410,18 +6648,18 @@
       </p:sp>
       <p:sp>
         <p:nvSpPr>
-          <p:cNvPr id="22" name="Shape 20"/>
-          <p:cNvSpPr/>
-          <p:nvPr/>
-        </p:nvSpPr>
-        <p:spPr>
-          <a:xfrm>
-            <a:off x="676656" y="3941064"/>
-            <a:ext cx="411480" cy="365760"/>
+          <p:cNvPr id="34" name="Shape 32"/>
+          <p:cNvSpPr/>
+          <p:nvPr/>
+        </p:nvSpPr>
+        <p:spPr>
+          <a:xfrm>
+            <a:off x="676656" y="4709160"/>
+            <a:ext cx="411480" cy="249936"/>
           </a:xfrm>
           <a:prstGeom prst="roundRect">
             <a:avLst>
-              <a:gd name="adj" fmla="val 10000"/>
+              <a:gd name="adj" fmla="val 14634"/>
             </a:avLst>
           </a:prstGeom>
           <a:solidFill>
@@ -7437,14 +6675,14 @@
       </p:sp>
       <p:sp>
         <p:nvSpPr>
-          <p:cNvPr id="23" name="Text 21"/>
-          <p:cNvSpPr/>
-          <p:nvPr/>
-        </p:nvSpPr>
-        <p:spPr>
-          <a:xfrm>
-            <a:off x="676656" y="3941064"/>
-            <a:ext cx="411480" cy="365760"/>
+          <p:cNvPr id="35" name="Text 33"/>
+          <p:cNvSpPr/>
+          <p:nvPr/>
+        </p:nvSpPr>
+        <p:spPr>
+          <a:xfrm>
+            <a:off x="676656" y="4709160"/>
+            <a:ext cx="411480" cy="249936"/>
           </a:xfrm>
           <a:prstGeom prst="rect">
             <a:avLst/>
@@ -7476,14 +6714,14 @@
       </p:sp>
       <p:sp>
         <p:nvSpPr>
-          <p:cNvPr id="24" name="Text 22"/>
-          <p:cNvSpPr/>
-          <p:nvPr/>
-        </p:nvSpPr>
-        <p:spPr>
-          <a:xfrm>
-            <a:off x="1207008" y="3904488"/>
-            <a:ext cx="10280599" cy="438912"/>
+          <p:cNvPr id="36" name="Text 34"/>
+          <p:cNvSpPr/>
+          <p:nvPr/>
+        </p:nvSpPr>
+        <p:spPr>
+          <a:xfrm>
+            <a:off x="1207008" y="4672584"/>
+            <a:ext cx="10280599" cy="323088"/>
           </a:xfrm>
           <a:prstGeom prst="rect">
             <a:avLst/>
@@ -7499,7 +6737,7 @@
               <a:buNone/>
             </a:pPr>
             <a:r>
-              <a:rPr lang="en-US" sz="1150" dirty="0">
+              <a:rPr lang="en-US" sz="1000" dirty="0">
                 <a:solidFill>
                   <a:srgbClr val="10161F"/>
                 </a:solidFill>
@@ -7507,26 +6745,26 @@
                 <a:ea typeface="Pretendard" pitchFamily="34" charset="-122"/>
                 <a:cs typeface="Pretendard" pitchFamily="34" charset="-120"/>
               </a:rPr>
-              <a:t>입지 분석: 핵심권역 소재 자산의 입지 특성 및 대지 지분 가치 확인 필요</a:t>
-            </a:r>
-            <a:endParaRPr lang="en-US" sz="1150" dirty="0"/>
-          </a:p>
-        </p:txBody>
-      </p:sp>
-      <p:sp>
-        <p:nvSpPr>
-          <p:cNvPr id="25" name="Shape 23"/>
-          <p:cNvSpPr/>
-          <p:nvPr/>
-        </p:nvSpPr>
-        <p:spPr>
-          <a:xfrm>
-            <a:off x="566928" y="4526280"/>
-            <a:ext cx="11057839" cy="585216"/>
+              <a:t>입지 가치: 대중교통 역세권 입지, 해당 권역 업무·상업 중심지 배후 수요 확보</a:t>
+            </a:r>
+            <a:endParaRPr lang="en-US" sz="1000" dirty="0"/>
+          </a:p>
+        </p:txBody>
+      </p:sp>
+      <p:sp>
+        <p:nvSpPr>
+          <p:cNvPr id="37" name="Shape 35"/>
+          <p:cNvSpPr/>
+          <p:nvPr/>
+        </p:nvSpPr>
+        <p:spPr>
+          <a:xfrm>
+            <a:off x="566928" y="5114544"/>
+            <a:ext cx="11057839" cy="396240"/>
           </a:xfrm>
           <a:prstGeom prst="roundRect">
             <a:avLst>
-              <a:gd name="adj" fmla="val 7813"/>
+              <a:gd name="adj" fmla="val 11538"/>
             </a:avLst>
           </a:prstGeom>
           <a:solidFill>
@@ -7542,18 +6780,18 @@
       </p:sp>
       <p:sp>
         <p:nvSpPr>
-          <p:cNvPr id="26" name="Shape 24"/>
-          <p:cNvSpPr/>
-          <p:nvPr/>
-        </p:nvSpPr>
-        <p:spPr>
-          <a:xfrm>
-            <a:off x="676656" y="4636008"/>
-            <a:ext cx="411480" cy="365760"/>
+          <p:cNvPr id="38" name="Shape 36"/>
+          <p:cNvSpPr/>
+          <p:nvPr/>
+        </p:nvSpPr>
+        <p:spPr>
+          <a:xfrm>
+            <a:off x="676656" y="5187696"/>
+            <a:ext cx="411480" cy="249936"/>
           </a:xfrm>
           <a:prstGeom prst="roundRect">
             <a:avLst>
-              <a:gd name="adj" fmla="val 10000"/>
+              <a:gd name="adj" fmla="val 14634"/>
             </a:avLst>
           </a:prstGeom>
           <a:solidFill>
@@ -7569,14 +6807,14 @@
       </p:sp>
       <p:sp>
         <p:nvSpPr>
-          <p:cNvPr id="27" name="Text 25"/>
-          <p:cNvSpPr/>
-          <p:nvPr/>
-        </p:nvSpPr>
-        <p:spPr>
-          <a:xfrm>
-            <a:off x="676656" y="4636008"/>
-            <a:ext cx="411480" cy="365760"/>
+          <p:cNvPr id="39" name="Text 37"/>
+          <p:cNvSpPr/>
+          <p:nvPr/>
+        </p:nvSpPr>
+        <p:spPr>
+          <a:xfrm>
+            <a:off x="676656" y="5187696"/>
+            <a:ext cx="411480" cy="249936"/>
           </a:xfrm>
           <a:prstGeom prst="rect">
             <a:avLst/>
@@ -7608,14 +6846,14 @@
       </p:sp>
       <p:sp>
         <p:nvSpPr>
-          <p:cNvPr id="28" name="Text 26"/>
-          <p:cNvSpPr/>
-          <p:nvPr/>
-        </p:nvSpPr>
-        <p:spPr>
-          <a:xfrm>
-            <a:off x="1207008" y="4599432"/>
-            <a:ext cx="10280599" cy="438912"/>
+          <p:cNvPr id="40" name="Text 38"/>
+          <p:cNvSpPr/>
+          <p:nvPr/>
+        </p:nvSpPr>
+        <p:spPr>
+          <a:xfrm>
+            <a:off x="1207008" y="5151120"/>
+            <a:ext cx="10280599" cy="323088"/>
           </a:xfrm>
           <a:prstGeom prst="rect">
             <a:avLst/>
@@ -7631,7 +6869,7 @@
               <a:buNone/>
             </a:pPr>
             <a:r>
-              <a:rPr lang="en-US" sz="1150" dirty="0">
+              <a:rPr lang="en-US" sz="1000" dirty="0">
                 <a:solidFill>
                   <a:srgbClr val="10161F"/>
                 </a:solidFill>
@@ -7639,26 +6877,26 @@
                 <a:ea typeface="Pretendard" pitchFamily="34" charset="-122"/>
                 <a:cs typeface="Pretendard" pitchFamily="34" charset="-120"/>
               </a:rPr>
-              <a:t>수익 구조: 매매 시장 적정가 수준 대비 임대수익 현황 분석 필요</a:t>
-            </a:r>
-            <a:endParaRPr lang="en-US" sz="1150" dirty="0"/>
-          </a:p>
-        </p:txBody>
-      </p:sp>
-      <p:sp>
-        <p:nvSpPr>
-          <p:cNvPr id="29" name="Shape 27"/>
-          <p:cNvSpPr/>
-          <p:nvPr/>
-        </p:nvSpPr>
-        <p:spPr>
-          <a:xfrm>
-            <a:off x="566928" y="5221224"/>
-            <a:ext cx="11057839" cy="585216"/>
+              <a:t>자산 규모: 해당 권역 소재 단독 빌딩 매입 기회</a:t>
+            </a:r>
+            <a:endParaRPr lang="en-US" sz="1000" dirty="0"/>
+          </a:p>
+        </p:txBody>
+      </p:sp>
+      <p:sp>
+        <p:nvSpPr>
+          <p:cNvPr id="41" name="Shape 39"/>
+          <p:cNvSpPr/>
+          <p:nvPr/>
+        </p:nvSpPr>
+        <p:spPr>
+          <a:xfrm>
+            <a:off x="566928" y="5593080"/>
+            <a:ext cx="11057839" cy="396240"/>
           </a:xfrm>
           <a:prstGeom prst="roundRect">
             <a:avLst>
-              <a:gd name="adj" fmla="val 7813"/>
+              <a:gd name="adj" fmla="val 11538"/>
             </a:avLst>
           </a:prstGeom>
           <a:solidFill>
@@ -7674,18 +6912,18 @@
       </p:sp>
       <p:sp>
         <p:nvSpPr>
-          <p:cNvPr id="30" name="Shape 28"/>
-          <p:cNvSpPr/>
-          <p:nvPr/>
-        </p:nvSpPr>
-        <p:spPr>
-          <a:xfrm>
-            <a:off x="676656" y="5330952"/>
-            <a:ext cx="411480" cy="365760"/>
+          <p:cNvPr id="42" name="Shape 40"/>
+          <p:cNvSpPr/>
+          <p:nvPr/>
+        </p:nvSpPr>
+        <p:spPr>
+          <a:xfrm>
+            <a:off x="676656" y="5666232"/>
+            <a:ext cx="411480" cy="249936"/>
           </a:xfrm>
           <a:prstGeom prst="roundRect">
             <a:avLst>
-              <a:gd name="adj" fmla="val 10000"/>
+              <a:gd name="adj" fmla="val 14634"/>
             </a:avLst>
           </a:prstGeom>
           <a:solidFill>
@@ -7701,14 +6939,14 @@
       </p:sp>
       <p:sp>
         <p:nvSpPr>
-          <p:cNvPr id="31" name="Text 29"/>
-          <p:cNvSpPr/>
-          <p:nvPr/>
-        </p:nvSpPr>
-        <p:spPr>
-          <a:xfrm>
-            <a:off x="676656" y="5330952"/>
-            <a:ext cx="411480" cy="365760"/>
+          <p:cNvPr id="43" name="Text 41"/>
+          <p:cNvSpPr/>
+          <p:nvPr/>
+        </p:nvSpPr>
+        <p:spPr>
+          <a:xfrm>
+            <a:off x="676656" y="5666232"/>
+            <a:ext cx="411480" cy="249936"/>
           </a:xfrm>
           <a:prstGeom prst="rect">
             <a:avLst/>
@@ -7740,14 +6978,14 @@
       </p:sp>
       <p:sp>
         <p:nvSpPr>
-          <p:cNvPr id="32" name="Text 30"/>
-          <p:cNvSpPr/>
-          <p:nvPr/>
-        </p:nvSpPr>
-        <p:spPr>
-          <a:xfrm>
-            <a:off x="1207008" y="5294376"/>
-            <a:ext cx="10280599" cy="438912"/>
+          <p:cNvPr id="44" name="Text 42"/>
+          <p:cNvSpPr/>
+          <p:nvPr/>
+        </p:nvSpPr>
+        <p:spPr>
+          <a:xfrm>
+            <a:off x="1207008" y="5629656"/>
+            <a:ext cx="10280599" cy="323088"/>
           </a:xfrm>
           <a:prstGeom prst="rect">
             <a:avLst/>
@@ -7763,7 +7001,7 @@
               <a:buNone/>
             </a:pPr>
             <a:r>
-              <a:rPr lang="en-US" sz="1150" dirty="0">
+              <a:rPr lang="en-US" sz="1000" dirty="0">
                 <a:solidFill>
                   <a:srgbClr val="10161F"/>
                 </a:solidFill>
@@ -7771,15 +7009,15 @@
                 <a:ea typeface="Pretendard" pitchFamily="34" charset="-122"/>
                 <a:cs typeface="Pretendard" pitchFamily="34" charset="-120"/>
               </a:rPr>
-              <a:t>향후 검토: 권역 개발 동향 및 공법상 변경 가능성 확인 필요</a:t>
-            </a:r>
-            <a:endParaRPr lang="en-US" sz="1150" dirty="0"/>
-          </a:p>
-        </p:txBody>
-      </p:sp>
-      <p:sp>
-        <p:nvSpPr>
-          <p:cNvPr id="33" name="Text 31"/>
+              <a:t>수익 안정성: 안정적 임대수익 기반 투자 매물</a:t>
+            </a:r>
+            <a:endParaRPr lang="en-US" sz="1000" dirty="0"/>
+          </a:p>
+        </p:txBody>
+      </p:sp>
+      <p:sp>
+        <p:nvSpPr>
+          <p:cNvPr id="45" name="Text 43"/>
           <p:cNvSpPr/>
           <p:nvPr/>
         </p:nvSpPr>
@@ -7818,7 +7056,7 @@
       </p:sp>
       <p:sp>
         <p:nvSpPr>
-          <p:cNvPr id="34" name="Text 32"/>
+          <p:cNvPr id="46" name="Text 44"/>
           <p:cNvSpPr/>
           <p:nvPr/>
         </p:nvSpPr>
@@ -7979,7 +7217,7 @@
                 <a:ea typeface="Arial" pitchFamily="34" charset="-122"/>
                 <a:cs typeface="Arial" pitchFamily="34" charset="-120"/>
               </a:rPr>
-              <a:t>Location</a:t>
+              <a:t>Land</a:t>
             </a:r>
             <a:endParaRPr lang="en-US" sz="950" dirty="0"/>
           </a:p>
@@ -8018,7 +7256,7 @@
                 <a:ea typeface="Pretendard" pitchFamily="34" charset="-122"/>
                 <a:cs typeface="Pretendard" pitchFamily="34" charset="-120"/>
               </a:rPr>
-              <a:t>입지 및 교통</a:t>
+              <a:t>토지 현황</a:t>
             </a:r>
             <a:endParaRPr lang="en-US" sz="2300" dirty="0"/>
           </a:p>
@@ -8027,6 +7265,591 @@
       <p:sp>
         <p:nvSpPr>
           <p:cNvPr id="6" name="Text 4"/>
+          <p:cNvSpPr/>
+          <p:nvPr/>
+        </p:nvSpPr>
+        <p:spPr>
+          <a:xfrm>
+            <a:off x="566928" y="1371600"/>
+            <a:ext cx="6858000" cy="237744"/>
+          </a:xfrm>
+          <a:prstGeom prst="rect">
+            <a:avLst/>
+          </a:prstGeom>
+          <a:noFill/>
+          <a:ln/>
+        </p:spPr>
+        <p:txBody>
+          <a:bodyPr wrap="square" lIns="0" tIns="0" rIns="0" bIns="0" rtlCol="0" anchor="ctr"/>
+          <a:lstStyle/>
+          <a:p>
+            <a:pPr indent="0" marL="0">
+              <a:buNone/>
+            </a:pPr>
+            <a:r>
+              <a:rPr lang="en-US" sz="1100" b="1" dirty="0">
+                <a:solidFill>
+                  <a:srgbClr val="10161F"/>
+                </a:solidFill>
+                <a:latin typeface="Pretendard" pitchFamily="34" charset="0"/>
+                <a:ea typeface="Pretendard" pitchFamily="34" charset="-122"/>
+                <a:cs typeface="Pretendard" pitchFamily="34" charset="-120"/>
+              </a:rPr>
+              <a:t>토지 현황</a:t>
+            </a:r>
+            <a:endParaRPr lang="en-US" sz="1100" dirty="0"/>
+          </a:p>
+        </p:txBody>
+      </p:sp>
+      <p:sp>
+        <p:nvSpPr>
+          <p:cNvPr id="7" name="Text 5"/>
+          <p:cNvSpPr/>
+          <p:nvPr/>
+        </p:nvSpPr>
+        <p:spPr>
+          <a:xfrm>
+            <a:off x="566928" y="1645920"/>
+            <a:ext cx="2606040" cy="438912"/>
+          </a:xfrm>
+          <a:prstGeom prst="rect">
+            <a:avLst/>
+          </a:prstGeom>
+          <a:noFill/>
+          <a:ln/>
+        </p:spPr>
+        <p:txBody>
+          <a:bodyPr wrap="square" lIns="0" tIns="0" rIns="0" bIns="0" rtlCol="0" anchor="ctr"/>
+          <a:lstStyle/>
+          <a:p>
+            <a:pPr indent="0" marL="0">
+              <a:lnSpc>
+                <a:spcPct val="120000"/>
+              </a:lnSpc>
+              <a:buNone/>
+            </a:pPr>
+            <a:r>
+              <a:rPr lang="en-US" sz="1350" dirty="0">
+                <a:solidFill>
+                  <a:srgbClr val="718096"/>
+                </a:solidFill>
+                <a:latin typeface="Pretendard" pitchFamily="34" charset="0"/>
+                <a:ea typeface="Pretendard" pitchFamily="34" charset="-122"/>
+                <a:cs typeface="Pretendard" pitchFamily="34" charset="-120"/>
+              </a:rPr>
+              <a:t>대지면적</a:t>
+            </a:r>
+            <a:endParaRPr lang="en-US" sz="1350" dirty="0"/>
+          </a:p>
+        </p:txBody>
+      </p:sp>
+      <p:sp>
+        <p:nvSpPr>
+          <p:cNvPr id="8" name="Text 6"/>
+          <p:cNvSpPr/>
+          <p:nvPr/>
+        </p:nvSpPr>
+        <p:spPr>
+          <a:xfrm>
+            <a:off x="3172968" y="1645920"/>
+            <a:ext cx="4251960" cy="438912"/>
+          </a:xfrm>
+          <a:prstGeom prst="rect">
+            <a:avLst/>
+          </a:prstGeom>
+          <a:noFill/>
+          <a:ln/>
+        </p:spPr>
+        <p:txBody>
+          <a:bodyPr wrap="square" lIns="0" tIns="0" rIns="0" bIns="0" rtlCol="0" anchor="ctr"/>
+          <a:lstStyle/>
+          <a:p>
+            <a:pPr indent="0" marL="0">
+              <a:lnSpc>
+                <a:spcPct val="120000"/>
+              </a:lnSpc>
+              <a:buNone/>
+            </a:pPr>
+            <a:r>
+              <a:rPr lang="en-US" sz="1350" b="1" dirty="0">
+                <a:solidFill>
+                  <a:srgbClr val="10161F"/>
+                </a:solidFill>
+                <a:latin typeface="Pretendard" pitchFamily="34" charset="0"/>
+                <a:ea typeface="Pretendard" pitchFamily="34" charset="-122"/>
+                <a:cs typeface="Pretendard" pitchFamily="34" charset="-120"/>
+              </a:rPr>
+              <a:t>142.5평</a:t>
+            </a:r>
+            <a:endParaRPr lang="en-US" sz="1350" dirty="0"/>
+          </a:p>
+        </p:txBody>
+      </p:sp>
+      <p:sp>
+        <p:nvSpPr>
+          <p:cNvPr id="9" name="Shape 7"/>
+          <p:cNvSpPr/>
+          <p:nvPr/>
+        </p:nvSpPr>
+        <p:spPr>
+          <a:xfrm>
+            <a:off x="566928" y="2084832"/>
+            <a:ext cx="6858000" cy="0"/>
+          </a:xfrm>
+          <a:prstGeom prst="line">
+            <a:avLst/>
+          </a:prstGeom>
+          <a:noFill/>
+          <a:ln w="3810">
+            <a:solidFill>
+              <a:srgbClr val="CBD5E0"/>
+            </a:solidFill>
+            <a:prstDash val="solid"/>
+          </a:ln>
+        </p:spPr>
+      </p:sp>
+      <p:sp>
+        <p:nvSpPr>
+          <p:cNvPr id="10" name="Text 8"/>
+          <p:cNvSpPr/>
+          <p:nvPr/>
+        </p:nvSpPr>
+        <p:spPr>
+          <a:xfrm>
+            <a:off x="566928" y="2084832"/>
+            <a:ext cx="2606040" cy="438912"/>
+          </a:xfrm>
+          <a:prstGeom prst="rect">
+            <a:avLst/>
+          </a:prstGeom>
+          <a:noFill/>
+          <a:ln/>
+        </p:spPr>
+        <p:txBody>
+          <a:bodyPr wrap="square" lIns="0" tIns="0" rIns="0" bIns="0" rtlCol="0" anchor="ctr"/>
+          <a:lstStyle/>
+          <a:p>
+            <a:pPr indent="0" marL="0">
+              <a:lnSpc>
+                <a:spcPct val="120000"/>
+              </a:lnSpc>
+              <a:buNone/>
+            </a:pPr>
+            <a:r>
+              <a:rPr lang="en-US" sz="1350" dirty="0">
+                <a:solidFill>
+                  <a:srgbClr val="718096"/>
+                </a:solidFill>
+                <a:latin typeface="Pretendard" pitchFamily="34" charset="0"/>
+                <a:ea typeface="Pretendard" pitchFamily="34" charset="-122"/>
+                <a:cs typeface="Pretendard" pitchFamily="34" charset="-120"/>
+              </a:rPr>
+              <a:t>연면적</a:t>
+            </a:r>
+            <a:endParaRPr lang="en-US" sz="1350" dirty="0"/>
+          </a:p>
+        </p:txBody>
+      </p:sp>
+      <p:sp>
+        <p:nvSpPr>
+          <p:cNvPr id="11" name="Text 9"/>
+          <p:cNvSpPr/>
+          <p:nvPr/>
+        </p:nvSpPr>
+        <p:spPr>
+          <a:xfrm>
+            <a:off x="3172968" y="2084832"/>
+            <a:ext cx="4251960" cy="438912"/>
+          </a:xfrm>
+          <a:prstGeom prst="rect">
+            <a:avLst/>
+          </a:prstGeom>
+          <a:noFill/>
+          <a:ln/>
+        </p:spPr>
+        <p:txBody>
+          <a:bodyPr wrap="square" lIns="0" tIns="0" rIns="0" bIns="0" rtlCol="0" anchor="ctr"/>
+          <a:lstStyle/>
+          <a:p>
+            <a:pPr indent="0" marL="0">
+              <a:lnSpc>
+                <a:spcPct val="120000"/>
+              </a:lnSpc>
+              <a:buNone/>
+            </a:pPr>
+            <a:r>
+              <a:rPr lang="en-US" sz="1350" b="1" dirty="0">
+                <a:solidFill>
+                  <a:srgbClr val="10161F"/>
+                </a:solidFill>
+                <a:latin typeface="Pretendard" pitchFamily="34" charset="0"/>
+                <a:ea typeface="Pretendard" pitchFamily="34" charset="-122"/>
+                <a:cs typeface="Pretendard" pitchFamily="34" charset="-120"/>
+              </a:rPr>
+              <a:t>620.8평</a:t>
+            </a:r>
+            <a:endParaRPr lang="en-US" sz="1350" dirty="0"/>
+          </a:p>
+        </p:txBody>
+      </p:sp>
+      <p:sp>
+        <p:nvSpPr>
+          <p:cNvPr id="12" name="Shape 10"/>
+          <p:cNvSpPr/>
+          <p:nvPr/>
+        </p:nvSpPr>
+        <p:spPr>
+          <a:xfrm>
+            <a:off x="7604608" y="1371600"/>
+            <a:ext cx="0" cy="4754880"/>
+          </a:xfrm>
+          <a:prstGeom prst="line">
+            <a:avLst/>
+          </a:prstGeom>
+          <a:noFill/>
+          <a:ln w="8890">
+            <a:solidFill>
+              <a:srgbClr val="B98A2E"/>
+            </a:solidFill>
+            <a:prstDash val="solid"/>
+          </a:ln>
+        </p:spPr>
+      </p:sp>
+      <p:sp>
+        <p:nvSpPr>
+          <p:cNvPr id="13" name="Shape 11"/>
+          <p:cNvSpPr/>
+          <p:nvPr/>
+        </p:nvSpPr>
+        <p:spPr>
+          <a:xfrm>
+            <a:off x="7784287" y="1645920"/>
+            <a:ext cx="3840480" cy="2103120"/>
+          </a:xfrm>
+          <a:prstGeom prst="roundRect">
+            <a:avLst>
+              <a:gd name="adj" fmla="val 2609"/>
+            </a:avLst>
+          </a:prstGeom>
+          <a:solidFill>
+            <a:srgbClr val="BEE3F8"/>
+          </a:solidFill>
+          <a:ln/>
+        </p:spPr>
+      </p:sp>
+      <p:sp>
+        <p:nvSpPr>
+          <p:cNvPr id="14" name="Shape 12"/>
+          <p:cNvSpPr/>
+          <p:nvPr/>
+        </p:nvSpPr>
+        <p:spPr>
+          <a:xfrm>
+            <a:off x="7784287" y="1700784"/>
+            <a:ext cx="36576" cy="1993392"/>
+          </a:xfrm>
+          <a:prstGeom prst="rect">
+            <a:avLst/>
+          </a:prstGeom>
+          <a:solidFill>
+            <a:srgbClr val="2B6CB0"/>
+          </a:solidFill>
+          <a:ln/>
+        </p:spPr>
+      </p:sp>
+      <p:sp>
+        <p:nvSpPr>
+          <p:cNvPr id="15" name="Text 13"/>
+          <p:cNvSpPr/>
+          <p:nvPr/>
+        </p:nvSpPr>
+        <p:spPr>
+          <a:xfrm>
+            <a:off x="7967167" y="1755648"/>
+            <a:ext cx="3511296" cy="201168"/>
+          </a:xfrm>
+          <a:prstGeom prst="rect">
+            <a:avLst/>
+          </a:prstGeom>
+          <a:noFill/>
+          <a:ln/>
+        </p:spPr>
+        <p:txBody>
+          <a:bodyPr wrap="square" lIns="0" tIns="0" rIns="0" bIns="0" rtlCol="0" anchor="ctr"/>
+          <a:lstStyle/>
+          <a:p>
+            <a:pPr indent="0" marL="0">
+              <a:buNone/>
+            </a:pPr>
+            <a:r>
+              <a:rPr lang="en-US" sz="1050" b="1" dirty="0">
+                <a:solidFill>
+                  <a:srgbClr val="2B6CB0"/>
+                </a:solidFill>
+                <a:latin typeface="Pretendard" pitchFamily="34" charset="0"/>
+                <a:ea typeface="Pretendard" pitchFamily="34" charset="-122"/>
+                <a:cs typeface="Pretendard" pitchFamily="34" charset="-120"/>
+              </a:rPr>
+              <a:t>토지 및 건축 규제 포인트</a:t>
+            </a:r>
+            <a:endParaRPr lang="en-US" sz="1050" dirty="0"/>
+          </a:p>
+        </p:txBody>
+      </p:sp>
+      <p:sp>
+        <p:nvSpPr>
+          <p:cNvPr id="16" name="Text 14"/>
+          <p:cNvSpPr/>
+          <p:nvPr/>
+        </p:nvSpPr>
+        <p:spPr>
+          <a:xfrm>
+            <a:off x="7967167" y="1975104"/>
+            <a:ext cx="3511296" cy="1700784"/>
+          </a:xfrm>
+          <a:prstGeom prst="rect">
+            <a:avLst/>
+          </a:prstGeom>
+          <a:noFill/>
+          <a:ln/>
+        </p:spPr>
+        <p:txBody>
+          <a:bodyPr wrap="square" lIns="0" tIns="0" rIns="0" bIns="0" rtlCol="0" anchor="t"/>
+          <a:lstStyle/>
+          <a:p>
+            <a:pPr marL="342900" indent="-342900">
+              <a:lnSpc>
+                <a:spcPct val="120000"/>
+              </a:lnSpc>
+              <a:buSzPct val="100000"/>
+              <a:buChar char="•"/>
+            </a:pPr>
+            <a:r>
+              <a:rPr lang="en-US" sz="930" dirty="0">
+                <a:solidFill>
+                  <a:srgbClr val="10161F"/>
+                </a:solidFill>
+                <a:latin typeface="Pretendard" pitchFamily="34" charset="0"/>
+                <a:ea typeface="Pretendard" pitchFamily="34" charset="-122"/>
+                <a:cs typeface="Pretendard" pitchFamily="34" charset="-120"/>
+              </a:rPr>
+              <a:t>용도지역·용도지구 기준 건폐율/용적률 상한 확인</a:t>
+            </a:r>
+            <a:endParaRPr lang="en-US" sz="930" dirty="0"/>
+          </a:p>
+          <a:p>
+            <a:pPr marL="342900" indent="-342900">
+              <a:lnSpc>
+                <a:spcPct val="120000"/>
+              </a:lnSpc>
+              <a:buSzPct val="100000"/>
+              <a:buChar char="•"/>
+            </a:pPr>
+            <a:r>
+              <a:rPr lang="en-US" sz="930" dirty="0">
+                <a:solidFill>
+                  <a:srgbClr val="10161F"/>
+                </a:solidFill>
+                <a:latin typeface="Pretendard" pitchFamily="34" charset="0"/>
+                <a:ea typeface="Pretendard" pitchFamily="34" charset="-122"/>
+                <a:cs typeface="Pretendard" pitchFamily="34" charset="-120"/>
+              </a:rPr>
+              <a:t>필지 형상 및 접도 조건에 따른 건축 가능 면적 검토</a:t>
+            </a:r>
+            <a:endParaRPr lang="en-US" sz="930" dirty="0"/>
+          </a:p>
+          <a:p>
+            <a:pPr marL="342900" indent="-342900">
+              <a:lnSpc>
+                <a:spcPct val="120000"/>
+              </a:lnSpc>
+              <a:buSzPct val="100000"/>
+              <a:buChar char="•"/>
+            </a:pPr>
+            <a:r>
+              <a:rPr lang="en-US" sz="930" dirty="0">
+                <a:solidFill>
+                  <a:srgbClr val="10161F"/>
+                </a:solidFill>
+                <a:latin typeface="Pretendard" pitchFamily="34" charset="0"/>
+                <a:ea typeface="Pretendard" pitchFamily="34" charset="-122"/>
+                <a:cs typeface="Pretendard" pitchFamily="34" charset="-120"/>
+              </a:rPr>
+              <a:t>토지이용계획 열람 및 개발행위허가 제한 여부 확인</a:t>
+            </a:r>
+            <a:endParaRPr lang="en-US" sz="930" dirty="0"/>
+          </a:p>
+        </p:txBody>
+      </p:sp>
+      <p:sp>
+        <p:nvSpPr>
+          <p:cNvPr id="17" name="Shape 15"/>
+          <p:cNvSpPr/>
+          <p:nvPr/>
+        </p:nvSpPr>
+        <p:spPr>
+          <a:xfrm>
+            <a:off x="7784287" y="3977640"/>
+            <a:ext cx="3840480" cy="2148840"/>
+          </a:xfrm>
+          <a:prstGeom prst="roundRect">
+            <a:avLst>
+              <a:gd name="adj" fmla="val 2553"/>
+            </a:avLst>
+          </a:prstGeom>
+          <a:solidFill>
+            <a:srgbClr val="BEE3F8"/>
+          </a:solidFill>
+          <a:ln/>
+        </p:spPr>
+      </p:sp>
+      <p:sp>
+        <p:nvSpPr>
+          <p:cNvPr id="18" name="Shape 16"/>
+          <p:cNvSpPr/>
+          <p:nvPr/>
+        </p:nvSpPr>
+        <p:spPr>
+          <a:xfrm>
+            <a:off x="7784287" y="4032504"/>
+            <a:ext cx="36576" cy="2039112"/>
+          </a:xfrm>
+          <a:prstGeom prst="rect">
+            <a:avLst/>
+          </a:prstGeom>
+          <a:solidFill>
+            <a:srgbClr val="2B6CB0"/>
+          </a:solidFill>
+          <a:ln/>
+        </p:spPr>
+      </p:sp>
+      <p:sp>
+        <p:nvSpPr>
+          <p:cNvPr id="19" name="Text 17"/>
+          <p:cNvSpPr/>
+          <p:nvPr/>
+        </p:nvSpPr>
+        <p:spPr>
+          <a:xfrm>
+            <a:off x="7967167" y="4087368"/>
+            <a:ext cx="3511296" cy="201168"/>
+          </a:xfrm>
+          <a:prstGeom prst="rect">
+            <a:avLst/>
+          </a:prstGeom>
+          <a:noFill/>
+          <a:ln/>
+        </p:spPr>
+        <p:txBody>
+          <a:bodyPr wrap="square" lIns="0" tIns="0" rIns="0" bIns="0" rtlCol="0" anchor="ctr"/>
+          <a:lstStyle/>
+          <a:p>
+            <a:pPr indent="0" marL="0">
+              <a:buNone/>
+            </a:pPr>
+            <a:r>
+              <a:rPr lang="en-US" sz="1050" b="1" dirty="0">
+                <a:solidFill>
+                  <a:srgbClr val="2B6CB0"/>
+                </a:solidFill>
+                <a:latin typeface="Pretendard" pitchFamily="34" charset="0"/>
+                <a:ea typeface="Pretendard" pitchFamily="34" charset="-122"/>
+                <a:cs typeface="Pretendard" pitchFamily="34" charset="-120"/>
+              </a:rPr>
+              <a:t>권리관계 및 공적장부</a:t>
+            </a:r>
+            <a:endParaRPr lang="en-US" sz="1050" dirty="0"/>
+          </a:p>
+        </p:txBody>
+      </p:sp>
+      <p:sp>
+        <p:nvSpPr>
+          <p:cNvPr id="20" name="Text 18"/>
+          <p:cNvSpPr/>
+          <p:nvPr/>
+        </p:nvSpPr>
+        <p:spPr>
+          <a:xfrm>
+            <a:off x="7967167" y="4306824"/>
+            <a:ext cx="3511296" cy="1746504"/>
+          </a:xfrm>
+          <a:prstGeom prst="rect">
+            <a:avLst/>
+          </a:prstGeom>
+          <a:noFill/>
+          <a:ln/>
+        </p:spPr>
+        <p:txBody>
+          <a:bodyPr wrap="square" lIns="0" tIns="0" rIns="0" bIns="0" rtlCol="0" anchor="t"/>
+          <a:lstStyle/>
+          <a:p>
+            <a:pPr marL="342900" indent="-342900">
+              <a:lnSpc>
+                <a:spcPct val="120000"/>
+              </a:lnSpc>
+              <a:buSzPct val="100000"/>
+              <a:buChar char="•"/>
+            </a:pPr>
+            <a:r>
+              <a:rPr lang="en-US" sz="930" dirty="0">
+                <a:solidFill>
+                  <a:srgbClr val="10161F"/>
+                </a:solidFill>
+                <a:latin typeface="Pretendard" pitchFamily="34" charset="0"/>
+                <a:ea typeface="Pretendard" pitchFamily="34" charset="-122"/>
+                <a:cs typeface="Pretendard" pitchFamily="34" charset="-120"/>
+              </a:rPr>
+              <a:t>등기부등본 갑구 소유권 및 을구 근저당·가압류 확인</a:t>
+            </a:r>
+            <a:endParaRPr lang="en-US" sz="930" dirty="0"/>
+          </a:p>
+          <a:p>
+            <a:pPr marL="342900" indent="-342900">
+              <a:lnSpc>
+                <a:spcPct val="120000"/>
+              </a:lnSpc>
+              <a:buSzPct val="100000"/>
+              <a:buChar char="•"/>
+            </a:pPr>
+            <a:r>
+              <a:rPr lang="en-US" sz="930" dirty="0">
+                <a:solidFill>
+                  <a:srgbClr val="10161F"/>
+                </a:solidFill>
+                <a:latin typeface="Pretendard" pitchFamily="34" charset="0"/>
+                <a:ea typeface="Pretendard" pitchFamily="34" charset="-122"/>
+                <a:cs typeface="Pretendard" pitchFamily="34" charset="-120"/>
+              </a:rPr>
+              <a:t>건축물대장 기재 사항과 실물 현황 대조 점검</a:t>
+            </a:r>
+            <a:endParaRPr lang="en-US" sz="930" dirty="0"/>
+          </a:p>
+          <a:p>
+            <a:pPr marL="342900" indent="-342900">
+              <a:lnSpc>
+                <a:spcPct val="120000"/>
+              </a:lnSpc>
+              <a:buSzPct val="100000"/>
+              <a:buChar char="•"/>
+            </a:pPr>
+            <a:r>
+              <a:rPr lang="en-US" sz="930" dirty="0">
+                <a:solidFill>
+                  <a:srgbClr val="10161F"/>
+                </a:solidFill>
+                <a:latin typeface="Pretendard" pitchFamily="34" charset="0"/>
+                <a:ea typeface="Pretendard" pitchFamily="34" charset="-122"/>
+                <a:cs typeface="Pretendard" pitchFamily="34" charset="-120"/>
+              </a:rPr>
+              <a:t>개별공시지가 및 실거래가 비교 분석</a:t>
+            </a:r>
+            <a:endParaRPr lang="en-US" sz="930" dirty="0"/>
+          </a:p>
+        </p:txBody>
+      </p:sp>
+      <p:sp>
+        <p:nvSpPr>
+          <p:cNvPr id="21" name="Text 19"/>
           <p:cNvSpPr/>
           <p:nvPr/>
         </p:nvSpPr>
@@ -8065,7 +7888,7 @@
       </p:sp>
       <p:sp>
         <p:nvSpPr>
-          <p:cNvPr id="7" name="Text 5"/>
+          <p:cNvPr id="22" name="Text 20"/>
           <p:cNvSpPr/>
           <p:nvPr/>
         </p:nvSpPr>
@@ -8187,7 +8010,7 @@
                 <a:ea typeface="Arial" pitchFamily="34" charset="-122"/>
                 <a:cs typeface="Arial" pitchFamily="34" charset="-120"/>
               </a:rPr>
-              <a:t>03</a:t>
+              <a:t>04</a:t>
             </a:r>
             <a:endParaRPr lang="en-US" sz="1300" dirty="0"/>
           </a:p>
@@ -8226,7 +8049,7 @@
                 <a:ea typeface="Arial" pitchFamily="34" charset="-122"/>
                 <a:cs typeface="Arial" pitchFamily="34" charset="-120"/>
               </a:rPr>
-              <a:t>Land</a:t>
+              <a:t>Building</a:t>
             </a:r>
             <a:endParaRPr lang="en-US" sz="950" dirty="0"/>
           </a:p>
@@ -8265,7 +8088,7 @@
                 <a:ea typeface="Pretendard" pitchFamily="34" charset="-122"/>
                 <a:cs typeface="Pretendard" pitchFamily="34" charset="-120"/>
               </a:rPr>
-              <a:t>토지</a:t>
+              <a:t>건물 개요</a:t>
             </a:r>
             <a:endParaRPr lang="en-US" sz="2300" dirty="0"/>
           </a:p>
@@ -8304,7 +8127,7 @@
                 <a:ea typeface="Pretendard" pitchFamily="34" charset="-122"/>
                 <a:cs typeface="Pretendard" pitchFamily="34" charset="-120"/>
               </a:rPr>
-              <a:t>토지 현황</a:t>
+              <a:t>건축물 개요 및 물리 스펙</a:t>
             </a:r>
             <a:endParaRPr lang="en-US" sz="1100" dirty="0"/>
           </a:p>
@@ -8509,6 +8332,113 @@
         </p:nvSpPr>
         <p:spPr>
           <a:xfrm>
+            <a:off x="566928" y="2523744"/>
+            <a:ext cx="6858000" cy="0"/>
+          </a:xfrm>
+          <a:prstGeom prst="line">
+            <a:avLst/>
+          </a:prstGeom>
+          <a:noFill/>
+          <a:ln w="3810">
+            <a:solidFill>
+              <a:srgbClr val="CBD5E0"/>
+            </a:solidFill>
+            <a:prstDash val="solid"/>
+          </a:ln>
+        </p:spPr>
+      </p:sp>
+      <p:sp>
+        <p:nvSpPr>
+          <p:cNvPr id="13" name="Text 11"/>
+          <p:cNvSpPr/>
+          <p:nvPr/>
+        </p:nvSpPr>
+        <p:spPr>
+          <a:xfrm>
+            <a:off x="566928" y="2523744"/>
+            <a:ext cx="2606040" cy="438912"/>
+          </a:xfrm>
+          <a:prstGeom prst="rect">
+            <a:avLst/>
+          </a:prstGeom>
+          <a:noFill/>
+          <a:ln/>
+        </p:spPr>
+        <p:txBody>
+          <a:bodyPr wrap="square" lIns="0" tIns="0" rIns="0" bIns="0" rtlCol="0" anchor="ctr"/>
+          <a:lstStyle/>
+          <a:p>
+            <a:pPr indent="0" marL="0">
+              <a:lnSpc>
+                <a:spcPct val="120000"/>
+              </a:lnSpc>
+              <a:buNone/>
+            </a:pPr>
+            <a:r>
+              <a:rPr lang="en-US" sz="1350" dirty="0">
+                <a:solidFill>
+                  <a:srgbClr val="718096"/>
+                </a:solidFill>
+                <a:latin typeface="Pretendard" pitchFamily="34" charset="0"/>
+                <a:ea typeface="Pretendard" pitchFamily="34" charset="-122"/>
+                <a:cs typeface="Pretendard" pitchFamily="34" charset="-120"/>
+              </a:rPr>
+              <a:t>준공</a:t>
+            </a:r>
+            <a:endParaRPr lang="en-US" sz="1350" dirty="0"/>
+          </a:p>
+        </p:txBody>
+      </p:sp>
+      <p:sp>
+        <p:nvSpPr>
+          <p:cNvPr id="14" name="Text 12"/>
+          <p:cNvSpPr/>
+          <p:nvPr/>
+        </p:nvSpPr>
+        <p:spPr>
+          <a:xfrm>
+            <a:off x="3172968" y="2523744"/>
+            <a:ext cx="4251960" cy="438912"/>
+          </a:xfrm>
+          <a:prstGeom prst="rect">
+            <a:avLst/>
+          </a:prstGeom>
+          <a:noFill/>
+          <a:ln/>
+        </p:spPr>
+        <p:txBody>
+          <a:bodyPr wrap="square" lIns="0" tIns="0" rIns="0" bIns="0" rtlCol="0" anchor="ctr"/>
+          <a:lstStyle/>
+          <a:p>
+            <a:pPr indent="0" marL="0">
+              <a:lnSpc>
+                <a:spcPct val="120000"/>
+              </a:lnSpc>
+              <a:buNone/>
+            </a:pPr>
+            <a:r>
+              <a:rPr lang="en-US" sz="1350" b="1" dirty="0">
+                <a:solidFill>
+                  <a:srgbClr val="10161F"/>
+                </a:solidFill>
+                <a:latin typeface="Pretendard" pitchFamily="34" charset="0"/>
+                <a:ea typeface="Pretendard" pitchFamily="34" charset="-122"/>
+                <a:cs typeface="Pretendard" pitchFamily="34" charset="-120"/>
+              </a:rPr>
+              <a:t>2017년</a:t>
+            </a:r>
+            <a:endParaRPr lang="en-US" sz="1350" dirty="0"/>
+          </a:p>
+        </p:txBody>
+      </p:sp>
+      <p:sp>
+        <p:nvSpPr>
+          <p:cNvPr id="15" name="Shape 13"/>
+          <p:cNvSpPr/>
+          <p:nvPr/>
+        </p:nvSpPr>
+        <p:spPr>
+          <a:xfrm>
             <a:off x="7604608" y="1371600"/>
             <a:ext cx="0" cy="4754880"/>
           </a:xfrm>
@@ -8526,49 +8456,49 @@
       </p:sp>
       <p:sp>
         <p:nvSpPr>
-          <p:cNvPr id="13" name="Shape 11"/>
+          <p:cNvPr id="16" name="Shape 14"/>
           <p:cNvSpPr/>
           <p:nvPr/>
         </p:nvSpPr>
         <p:spPr>
           <a:xfrm>
             <a:off x="7784287" y="1645920"/>
-            <a:ext cx="3840480" cy="2103120"/>
+            <a:ext cx="3840480" cy="1645920"/>
           </a:xfrm>
           <a:prstGeom prst="roundRect">
             <a:avLst>
-              <a:gd name="adj" fmla="val 2609"/>
+              <a:gd name="adj" fmla="val 3333"/>
             </a:avLst>
           </a:prstGeom>
           <a:solidFill>
-            <a:srgbClr val="BEE3F8"/>
+            <a:srgbClr val="F3EBDA"/>
           </a:solidFill>
           <a:ln/>
         </p:spPr>
       </p:sp>
       <p:sp>
         <p:nvSpPr>
-          <p:cNvPr id="14" name="Shape 12"/>
+          <p:cNvPr id="17" name="Shape 15"/>
           <p:cNvSpPr/>
           <p:nvPr/>
         </p:nvSpPr>
         <p:spPr>
           <a:xfrm>
             <a:off x="7784287" y="1700784"/>
-            <a:ext cx="36576" cy="1993392"/>
+            <a:ext cx="36576" cy="1536192"/>
           </a:xfrm>
           <a:prstGeom prst="rect">
             <a:avLst/>
           </a:prstGeom>
           <a:solidFill>
-            <a:srgbClr val="2B6CB0"/>
+            <a:srgbClr val="977024"/>
           </a:solidFill>
           <a:ln/>
         </p:spPr>
       </p:sp>
       <p:sp>
         <p:nvSpPr>
-          <p:cNvPr id="15" name="Text 13"/>
+          <p:cNvPr id="18" name="Text 16"/>
           <p:cNvSpPr/>
           <p:nvPr/>
         </p:nvSpPr>
@@ -8590,31 +8520,20 @@
             <a:pPr indent="0" marL="0">
               <a:buNone/>
             </a:pPr>
-            <a:r>
-              <a:rPr lang="en-US" sz="1050" b="1" dirty="0">
-                <a:solidFill>
-                  <a:srgbClr val="2B6CB0"/>
-                </a:solidFill>
-                <a:latin typeface="Pretendard" pitchFamily="34" charset="0"/>
-                <a:ea typeface="Pretendard" pitchFamily="34" charset="-122"/>
-                <a:cs typeface="Pretendard" pitchFamily="34" charset="-120"/>
-              </a:rPr>
-              <a:t>입지 및 권리관계 실사 포인트</a:t>
-            </a:r>
             <a:endParaRPr lang="en-US" sz="1050" dirty="0"/>
           </a:p>
         </p:txBody>
       </p:sp>
       <p:sp>
         <p:nvSpPr>
-          <p:cNvPr id="16" name="Text 14"/>
+          <p:cNvPr id="19" name="Text 17"/>
           <p:cNvSpPr/>
           <p:nvPr/>
         </p:nvSpPr>
         <p:spPr>
           <a:xfrm>
             <a:off x="7967167" y="1975104"/>
-            <a:ext cx="3511296" cy="1700784"/>
+            <a:ext cx="3511296" cy="1243584"/>
           </a:xfrm>
           <a:prstGeom prst="rect">
             <a:avLst/>
@@ -8626,12 +8545,11 @@
           <a:bodyPr wrap="square" lIns="0" tIns="0" rIns="0" bIns="0" rtlCol="0" anchor="t"/>
           <a:lstStyle/>
           <a:p>
-            <a:pPr marL="342900" indent="-342900">
+            <a:pPr indent="0" marL="0">
               <a:lnSpc>
                 <a:spcPct val="120000"/>
               </a:lnSpc>
-              <a:buSzPct val="100000"/>
-              <a:buChar char="•"/>
+              <a:buNone/>
             </a:pPr>
             <a:r>
               <a:rPr lang="en-US" sz="930" dirty="0">
@@ -8642,223 +8560,15 @@
                 <a:ea typeface="Pretendard" pitchFamily="34" charset="-122"/>
                 <a:cs typeface="Pretendard" pitchFamily="34" charset="-120"/>
               </a:rPr>
-              <a:t>물건 접면 도로 폭 및 진출입 여건은 현장 실사 확인 사항입니다</a:t>
+              <a:t>서초 메디컬 빌딩은 지하2층~지상7층 규모의 올근생 빌딩입니다.</a:t>
             </a:r>
             <a:endParaRPr lang="en-US" sz="930" dirty="0"/>
           </a:p>
-          <a:p>
-            <a:pPr marL="342900" indent="-342900">
-              <a:lnSpc>
-                <a:spcPct val="120000"/>
-              </a:lnSpc>
-              <a:buSzPct val="100000"/>
-              <a:buChar char="•"/>
-            </a:pPr>
-            <a:r>
-              <a:rPr lang="en-US" sz="930" dirty="0">
-                <a:solidFill>
-                  <a:srgbClr val="10161F"/>
-                </a:solidFill>
-                <a:latin typeface="Pretendard" pitchFamily="34" charset="0"/>
-                <a:ea typeface="Pretendard" pitchFamily="34" charset="-122"/>
-                <a:cs typeface="Pretendard" pitchFamily="34" charset="-120"/>
-              </a:rPr>
-              <a:t>등기부등본상 권리관계 및 제한물권 설정 여부를 확인하였습니다</a:t>
-            </a:r>
-            <a:endParaRPr lang="en-US" sz="930" dirty="0"/>
-          </a:p>
-          <a:p>
-            <a:pPr marL="342900" indent="-342900">
-              <a:lnSpc>
-                <a:spcPct val="120000"/>
-              </a:lnSpc>
-              <a:buSzPct val="100000"/>
-              <a:buChar char="•"/>
-            </a:pPr>
-            <a:r>
-              <a:rPr lang="en-US" sz="930" dirty="0">
-                <a:solidFill>
-                  <a:srgbClr val="10161F"/>
-                </a:solidFill>
-                <a:latin typeface="Pretendard" pitchFamily="34" charset="0"/>
-                <a:ea typeface="Pretendard" pitchFamily="34" charset="-122"/>
-                <a:cs typeface="Pretendard" pitchFamily="34" charset="-120"/>
-              </a:rPr>
-              <a:t>지구단위계획 및 토지이용계획상 허용 용도를 검토하였습니다</a:t>
-            </a:r>
-            <a:endParaRPr lang="en-US" sz="930" dirty="0"/>
-          </a:p>
-        </p:txBody>
-      </p:sp>
-      <p:sp>
-        <p:nvSpPr>
-          <p:cNvPr id="17" name="Shape 15"/>
-          <p:cNvSpPr/>
-          <p:nvPr/>
-        </p:nvSpPr>
-        <p:spPr>
-          <a:xfrm>
-            <a:off x="7784287" y="3977640"/>
-            <a:ext cx="3840480" cy="2148840"/>
-          </a:xfrm>
-          <a:prstGeom prst="roundRect">
-            <a:avLst>
-              <a:gd name="adj" fmla="val 2553"/>
-            </a:avLst>
-          </a:prstGeom>
-          <a:solidFill>
-            <a:srgbClr val="BEE3F8"/>
-          </a:solidFill>
-          <a:ln/>
-        </p:spPr>
-      </p:sp>
-      <p:sp>
-        <p:nvSpPr>
-          <p:cNvPr id="18" name="Shape 16"/>
-          <p:cNvSpPr/>
-          <p:nvPr/>
-        </p:nvSpPr>
-        <p:spPr>
-          <a:xfrm>
-            <a:off x="7784287" y="4032504"/>
-            <a:ext cx="36576" cy="2039112"/>
-          </a:xfrm>
-          <a:prstGeom prst="rect">
-            <a:avLst/>
-          </a:prstGeom>
-          <a:solidFill>
-            <a:srgbClr val="2B6CB0"/>
-          </a:solidFill>
-          <a:ln/>
-        </p:spPr>
-      </p:sp>
-      <p:sp>
-        <p:nvSpPr>
-          <p:cNvPr id="19" name="Text 17"/>
-          <p:cNvSpPr/>
-          <p:nvPr/>
-        </p:nvSpPr>
-        <p:spPr>
-          <a:xfrm>
-            <a:off x="7967167" y="4087368"/>
-            <a:ext cx="3511296" cy="201168"/>
-          </a:xfrm>
-          <a:prstGeom prst="rect">
-            <a:avLst/>
-          </a:prstGeom>
-          <a:noFill/>
-          <a:ln/>
-        </p:spPr>
-        <p:txBody>
-          <a:bodyPr wrap="square" lIns="0" tIns="0" rIns="0" bIns="0" rtlCol="0" anchor="ctr"/>
-          <a:lstStyle/>
-          <a:p>
-            <a:pPr indent="0" marL="0">
-              <a:buNone/>
-            </a:pPr>
-            <a:r>
-              <a:rPr lang="en-US" sz="1050" b="1" dirty="0">
-                <a:solidFill>
-                  <a:srgbClr val="2B6CB0"/>
-                </a:solidFill>
-                <a:latin typeface="Pretendard" pitchFamily="34" charset="0"/>
-                <a:ea typeface="Pretendard" pitchFamily="34" charset="-122"/>
-                <a:cs typeface="Pretendard" pitchFamily="34" charset="-120"/>
-              </a:rPr>
-              <a:t>임대차 및 운용 관리 상태</a:t>
-            </a:r>
-            <a:endParaRPr lang="en-US" sz="1050" dirty="0"/>
-          </a:p>
         </p:txBody>
       </p:sp>
       <p:sp>
         <p:nvSpPr>
           <p:cNvPr id="20" name="Text 18"/>
-          <p:cNvSpPr/>
-          <p:nvPr/>
-        </p:nvSpPr>
-        <p:spPr>
-          <a:xfrm>
-            <a:off x="7967167" y="4306824"/>
-            <a:ext cx="3511296" cy="1746504"/>
-          </a:xfrm>
-          <a:prstGeom prst="rect">
-            <a:avLst/>
-          </a:prstGeom>
-          <a:noFill/>
-          <a:ln/>
-        </p:spPr>
-        <p:txBody>
-          <a:bodyPr wrap="square" lIns="0" tIns="0" rIns="0" bIns="0" rtlCol="0" anchor="t"/>
-          <a:lstStyle/>
-          <a:p>
-            <a:pPr marL="342900" indent="-342900">
-              <a:lnSpc>
-                <a:spcPct val="120000"/>
-              </a:lnSpc>
-              <a:buSzPct val="100000"/>
-              <a:buChar char="•"/>
-            </a:pPr>
-            <a:r>
-              <a:rPr lang="en-US" sz="930" dirty="0">
-                <a:solidFill>
-                  <a:srgbClr val="10161F"/>
-                </a:solidFill>
-                <a:latin typeface="Pretendard" pitchFamily="34" charset="0"/>
-                <a:ea typeface="Pretendard" pitchFamily="34" charset="-122"/>
-                <a:cs typeface="Pretendard" pitchFamily="34" charset="-120"/>
-              </a:rPr>
-              <a:t>주요 임차인별 계약 만기 분산 및 렌트롤 실사가 필요합니다</a:t>
-            </a:r>
-            <a:endParaRPr lang="en-US" sz="930" dirty="0"/>
-          </a:p>
-          <a:p>
-            <a:pPr marL="342900" indent="-342900">
-              <a:lnSpc>
-                <a:spcPct val="120000"/>
-              </a:lnSpc>
-              <a:buSzPct val="100000"/>
-              <a:buChar char="•"/>
-            </a:pPr>
-            <a:r>
-              <a:rPr lang="en-US" sz="930" dirty="0">
-                <a:solidFill>
-                  <a:srgbClr val="10161F"/>
-                </a:solidFill>
-                <a:latin typeface="Pretendard" pitchFamily="34" charset="0"/>
-                <a:ea typeface="Pretendard" pitchFamily="34" charset="-122"/>
-                <a:cs typeface="Pretendard" pitchFamily="34" charset="-120"/>
-              </a:rPr>
-              <a:t>관리비 정산 내역 및 수선유지비 집행 이력을 점검하였습니다</a:t>
-            </a:r>
-            <a:endParaRPr lang="en-US" sz="930" dirty="0"/>
-          </a:p>
-          <a:p>
-            <a:pPr marL="342900" indent="-342900">
-              <a:lnSpc>
-                <a:spcPct val="120000"/>
-              </a:lnSpc>
-              <a:buSzPct val="100000"/>
-              <a:buChar char="•"/>
-            </a:pPr>
-            <a:r>
-              <a:rPr lang="en-US" sz="930" dirty="0">
-                <a:solidFill>
-                  <a:srgbClr val="10161F"/>
-                </a:solidFill>
-                <a:latin typeface="Pretendard" pitchFamily="34" charset="0"/>
-                <a:ea typeface="Pretendard" pitchFamily="34" charset="-122"/>
-                <a:cs typeface="Pretendard" pitchFamily="34" charset="-120"/>
-              </a:rPr>
-              <a:t>취득세 감면 및 대출 조달 구조는 금융·세무 자문 후 확정됩니다</a:t>
-            </a:r>
-            <a:endParaRPr lang="en-US" sz="930" dirty="0"/>
-          </a:p>
-        </p:txBody>
-      </p:sp>
-      <p:sp>
-        <p:nvSpPr>
-          <p:cNvPr id="21" name="Text 19"/>
           <p:cNvSpPr/>
           <p:nvPr/>
         </p:nvSpPr>
@@ -8897,7 +8607,7 @@
       </p:sp>
       <p:sp>
         <p:nvSpPr>
-          <p:cNvPr id="22" name="Text 20"/>
+          <p:cNvPr id="21" name="Text 19"/>
           <p:cNvSpPr/>
           <p:nvPr/>
         </p:nvSpPr>
@@ -8928,7 +8638,7 @@
                 <a:ea typeface="Arial" pitchFamily="34" charset="-122"/>
                 <a:cs typeface="Arial" pitchFamily="34" charset="-120"/>
               </a:rPr>
-              <a:t>3</a:t>
+              <a:t>4</a:t>
             </a:r>
             <a:endParaRPr lang="en-US" sz="900" dirty="0"/>
           </a:p>
@@ -9019,7 +8729,7 @@
                 <a:ea typeface="Arial" pitchFamily="34" charset="-122"/>
                 <a:cs typeface="Arial" pitchFamily="34" charset="-120"/>
               </a:rPr>
-              <a:t>04</a:t>
+              <a:t>05</a:t>
             </a:r>
             <a:endParaRPr lang="en-US" sz="1300" dirty="0"/>
           </a:p>
@@ -9058,7 +8768,7 @@
                 <a:ea typeface="Arial" pitchFamily="34" charset="-122"/>
                 <a:cs typeface="Arial" pitchFamily="34" charset="-120"/>
               </a:rPr>
-              <a:t>Building</a:t>
+              <a:t>Rent Roll</a:t>
             </a:r>
             <a:endParaRPr lang="en-US" sz="950" dirty="0"/>
           </a:p>
@@ -9097,726 +8807,7 @@
                 <a:ea typeface="Pretendard" pitchFamily="34" charset="-122"/>
                 <a:cs typeface="Pretendard" pitchFamily="34" charset="-120"/>
               </a:rPr>
-              <a:t>물건 개요</a:t>
-            </a:r>
-            <a:endParaRPr lang="en-US" sz="2300" dirty="0"/>
-          </a:p>
-        </p:txBody>
-      </p:sp>
-      <p:sp>
-        <p:nvSpPr>
-          <p:cNvPr id="6" name="Text 4"/>
-          <p:cNvSpPr/>
-          <p:nvPr/>
-        </p:nvSpPr>
-        <p:spPr>
-          <a:xfrm>
-            <a:off x="566928" y="1371600"/>
-            <a:ext cx="6858000" cy="237744"/>
-          </a:xfrm>
-          <a:prstGeom prst="rect">
-            <a:avLst/>
-          </a:prstGeom>
-          <a:noFill/>
-          <a:ln/>
-        </p:spPr>
-        <p:txBody>
-          <a:bodyPr wrap="square" lIns="0" tIns="0" rIns="0" bIns="0" rtlCol="0" anchor="ctr"/>
-          <a:lstStyle/>
-          <a:p>
-            <a:pPr indent="0" marL="0">
-              <a:buNone/>
-            </a:pPr>
-            <a:r>
-              <a:rPr lang="en-US" sz="1100" b="1" dirty="0">
-                <a:solidFill>
-                  <a:srgbClr val="10161F"/>
-                </a:solidFill>
-                <a:latin typeface="Pretendard" pitchFamily="34" charset="0"/>
-                <a:ea typeface="Pretendard" pitchFamily="34" charset="-122"/>
-                <a:cs typeface="Pretendard" pitchFamily="34" charset="-120"/>
-              </a:rPr>
-              <a:t>건축물 개요 및 물리 스펙</a:t>
-            </a:r>
-            <a:endParaRPr lang="en-US" sz="1100" dirty="0"/>
-          </a:p>
-        </p:txBody>
-      </p:sp>
-      <p:sp>
-        <p:nvSpPr>
-          <p:cNvPr id="7" name="Text 5"/>
-          <p:cNvSpPr/>
-          <p:nvPr/>
-        </p:nvSpPr>
-        <p:spPr>
-          <a:xfrm>
-            <a:off x="566928" y="1645920"/>
-            <a:ext cx="2606040" cy="438912"/>
-          </a:xfrm>
-          <a:prstGeom prst="rect">
-            <a:avLst/>
-          </a:prstGeom>
-          <a:noFill/>
-          <a:ln/>
-        </p:spPr>
-        <p:txBody>
-          <a:bodyPr wrap="square" lIns="0" tIns="0" rIns="0" bIns="0" rtlCol="0" anchor="ctr"/>
-          <a:lstStyle/>
-          <a:p>
-            <a:pPr indent="0" marL="0">
-              <a:lnSpc>
-                <a:spcPct val="120000"/>
-              </a:lnSpc>
-              <a:buNone/>
-            </a:pPr>
-            <a:r>
-              <a:rPr lang="en-US" sz="1350" dirty="0">
-                <a:solidFill>
-                  <a:srgbClr val="718096"/>
-                </a:solidFill>
-                <a:latin typeface="Pretendard" pitchFamily="34" charset="0"/>
-                <a:ea typeface="Pretendard" pitchFamily="34" charset="-122"/>
-                <a:cs typeface="Pretendard" pitchFamily="34" charset="-120"/>
-              </a:rPr>
-              <a:t>대지면적</a:t>
-            </a:r>
-            <a:endParaRPr lang="en-US" sz="1350" dirty="0"/>
-          </a:p>
-        </p:txBody>
-      </p:sp>
-      <p:sp>
-        <p:nvSpPr>
-          <p:cNvPr id="8" name="Text 6"/>
-          <p:cNvSpPr/>
-          <p:nvPr/>
-        </p:nvSpPr>
-        <p:spPr>
-          <a:xfrm>
-            <a:off x="3172968" y="1645920"/>
-            <a:ext cx="4251960" cy="438912"/>
-          </a:xfrm>
-          <a:prstGeom prst="rect">
-            <a:avLst/>
-          </a:prstGeom>
-          <a:noFill/>
-          <a:ln/>
-        </p:spPr>
-        <p:txBody>
-          <a:bodyPr wrap="square" lIns="0" tIns="0" rIns="0" bIns="0" rtlCol="0" anchor="ctr"/>
-          <a:lstStyle/>
-          <a:p>
-            <a:pPr indent="0" marL="0">
-              <a:lnSpc>
-                <a:spcPct val="120000"/>
-              </a:lnSpc>
-              <a:buNone/>
-            </a:pPr>
-            <a:r>
-              <a:rPr lang="en-US" sz="1350" b="1" dirty="0">
-                <a:solidFill>
-                  <a:srgbClr val="10161F"/>
-                </a:solidFill>
-                <a:latin typeface="Pretendard" pitchFamily="34" charset="0"/>
-                <a:ea typeface="Pretendard" pitchFamily="34" charset="-122"/>
-                <a:cs typeface="Pretendard" pitchFamily="34" charset="-120"/>
-              </a:rPr>
-              <a:t>142.5평</a:t>
-            </a:r>
-            <a:endParaRPr lang="en-US" sz="1350" dirty="0"/>
-          </a:p>
-        </p:txBody>
-      </p:sp>
-      <p:sp>
-        <p:nvSpPr>
-          <p:cNvPr id="9" name="Shape 7"/>
-          <p:cNvSpPr/>
-          <p:nvPr/>
-        </p:nvSpPr>
-        <p:spPr>
-          <a:xfrm>
-            <a:off x="566928" y="2084832"/>
-            <a:ext cx="6858000" cy="0"/>
-          </a:xfrm>
-          <a:prstGeom prst="line">
-            <a:avLst/>
-          </a:prstGeom>
-          <a:noFill/>
-          <a:ln w="3810">
-            <a:solidFill>
-              <a:srgbClr val="CBD5E0"/>
-            </a:solidFill>
-            <a:prstDash val="solid"/>
-          </a:ln>
-        </p:spPr>
-      </p:sp>
-      <p:sp>
-        <p:nvSpPr>
-          <p:cNvPr id="10" name="Text 8"/>
-          <p:cNvSpPr/>
-          <p:nvPr/>
-        </p:nvSpPr>
-        <p:spPr>
-          <a:xfrm>
-            <a:off x="566928" y="2084832"/>
-            <a:ext cx="2606040" cy="438912"/>
-          </a:xfrm>
-          <a:prstGeom prst="rect">
-            <a:avLst/>
-          </a:prstGeom>
-          <a:noFill/>
-          <a:ln/>
-        </p:spPr>
-        <p:txBody>
-          <a:bodyPr wrap="square" lIns="0" tIns="0" rIns="0" bIns="0" rtlCol="0" anchor="ctr"/>
-          <a:lstStyle/>
-          <a:p>
-            <a:pPr indent="0" marL="0">
-              <a:lnSpc>
-                <a:spcPct val="120000"/>
-              </a:lnSpc>
-              <a:buNone/>
-            </a:pPr>
-            <a:r>
-              <a:rPr lang="en-US" sz="1350" dirty="0">
-                <a:solidFill>
-                  <a:srgbClr val="718096"/>
-                </a:solidFill>
-                <a:latin typeface="Pretendard" pitchFamily="34" charset="0"/>
-                <a:ea typeface="Pretendard" pitchFamily="34" charset="-122"/>
-                <a:cs typeface="Pretendard" pitchFamily="34" charset="-120"/>
-              </a:rPr>
-              <a:t>연면적</a:t>
-            </a:r>
-            <a:endParaRPr lang="en-US" sz="1350" dirty="0"/>
-          </a:p>
-        </p:txBody>
-      </p:sp>
-      <p:sp>
-        <p:nvSpPr>
-          <p:cNvPr id="11" name="Text 9"/>
-          <p:cNvSpPr/>
-          <p:nvPr/>
-        </p:nvSpPr>
-        <p:spPr>
-          <a:xfrm>
-            <a:off x="3172968" y="2084832"/>
-            <a:ext cx="4251960" cy="438912"/>
-          </a:xfrm>
-          <a:prstGeom prst="rect">
-            <a:avLst/>
-          </a:prstGeom>
-          <a:noFill/>
-          <a:ln/>
-        </p:spPr>
-        <p:txBody>
-          <a:bodyPr wrap="square" lIns="0" tIns="0" rIns="0" bIns="0" rtlCol="0" anchor="ctr"/>
-          <a:lstStyle/>
-          <a:p>
-            <a:pPr indent="0" marL="0">
-              <a:lnSpc>
-                <a:spcPct val="120000"/>
-              </a:lnSpc>
-              <a:buNone/>
-            </a:pPr>
-            <a:r>
-              <a:rPr lang="en-US" sz="1350" b="1" dirty="0">
-                <a:solidFill>
-                  <a:srgbClr val="10161F"/>
-                </a:solidFill>
-                <a:latin typeface="Pretendard" pitchFamily="34" charset="0"/>
-                <a:ea typeface="Pretendard" pitchFamily="34" charset="-122"/>
-                <a:cs typeface="Pretendard" pitchFamily="34" charset="-120"/>
-              </a:rPr>
-              <a:t>620.8평</a:t>
-            </a:r>
-            <a:endParaRPr lang="en-US" sz="1350" dirty="0"/>
-          </a:p>
-        </p:txBody>
-      </p:sp>
-      <p:sp>
-        <p:nvSpPr>
-          <p:cNvPr id="12" name="Shape 10"/>
-          <p:cNvSpPr/>
-          <p:nvPr/>
-        </p:nvSpPr>
-        <p:spPr>
-          <a:xfrm>
-            <a:off x="566928" y="2523744"/>
-            <a:ext cx="6858000" cy="0"/>
-          </a:xfrm>
-          <a:prstGeom prst="line">
-            <a:avLst/>
-          </a:prstGeom>
-          <a:noFill/>
-          <a:ln w="3810">
-            <a:solidFill>
-              <a:srgbClr val="CBD5E0"/>
-            </a:solidFill>
-            <a:prstDash val="solid"/>
-          </a:ln>
-        </p:spPr>
-      </p:sp>
-      <p:sp>
-        <p:nvSpPr>
-          <p:cNvPr id="13" name="Text 11"/>
-          <p:cNvSpPr/>
-          <p:nvPr/>
-        </p:nvSpPr>
-        <p:spPr>
-          <a:xfrm>
-            <a:off x="566928" y="2523744"/>
-            <a:ext cx="2606040" cy="438912"/>
-          </a:xfrm>
-          <a:prstGeom prst="rect">
-            <a:avLst/>
-          </a:prstGeom>
-          <a:noFill/>
-          <a:ln/>
-        </p:spPr>
-        <p:txBody>
-          <a:bodyPr wrap="square" lIns="0" tIns="0" rIns="0" bIns="0" rtlCol="0" anchor="ctr"/>
-          <a:lstStyle/>
-          <a:p>
-            <a:pPr indent="0" marL="0">
-              <a:lnSpc>
-                <a:spcPct val="120000"/>
-              </a:lnSpc>
-              <a:buNone/>
-            </a:pPr>
-            <a:r>
-              <a:rPr lang="en-US" sz="1350" dirty="0">
-                <a:solidFill>
-                  <a:srgbClr val="718096"/>
-                </a:solidFill>
-                <a:latin typeface="Pretendard" pitchFamily="34" charset="0"/>
-                <a:ea typeface="Pretendard" pitchFamily="34" charset="-122"/>
-                <a:cs typeface="Pretendard" pitchFamily="34" charset="-120"/>
-              </a:rPr>
-              <a:t>준공</a:t>
-            </a:r>
-            <a:endParaRPr lang="en-US" sz="1350" dirty="0"/>
-          </a:p>
-        </p:txBody>
-      </p:sp>
-      <p:sp>
-        <p:nvSpPr>
-          <p:cNvPr id="14" name="Text 12"/>
-          <p:cNvSpPr/>
-          <p:nvPr/>
-        </p:nvSpPr>
-        <p:spPr>
-          <a:xfrm>
-            <a:off x="3172968" y="2523744"/>
-            <a:ext cx="4251960" cy="438912"/>
-          </a:xfrm>
-          <a:prstGeom prst="rect">
-            <a:avLst/>
-          </a:prstGeom>
-          <a:noFill/>
-          <a:ln/>
-        </p:spPr>
-        <p:txBody>
-          <a:bodyPr wrap="square" lIns="0" tIns="0" rIns="0" bIns="0" rtlCol="0" anchor="ctr"/>
-          <a:lstStyle/>
-          <a:p>
-            <a:pPr indent="0" marL="0">
-              <a:lnSpc>
-                <a:spcPct val="120000"/>
-              </a:lnSpc>
-              <a:buNone/>
-            </a:pPr>
-            <a:r>
-              <a:rPr lang="en-US" sz="1350" b="1" dirty="0">
-                <a:solidFill>
-                  <a:srgbClr val="10161F"/>
-                </a:solidFill>
-                <a:latin typeface="Pretendard" pitchFamily="34" charset="0"/>
-                <a:ea typeface="Pretendard" pitchFamily="34" charset="-122"/>
-                <a:cs typeface="Pretendard" pitchFamily="34" charset="-120"/>
-              </a:rPr>
-              <a:t>2017년</a:t>
-            </a:r>
-            <a:endParaRPr lang="en-US" sz="1350" dirty="0"/>
-          </a:p>
-        </p:txBody>
-      </p:sp>
-      <p:sp>
-        <p:nvSpPr>
-          <p:cNvPr id="15" name="Shape 13"/>
-          <p:cNvSpPr/>
-          <p:nvPr/>
-        </p:nvSpPr>
-        <p:spPr>
-          <a:xfrm>
-            <a:off x="7604608" y="1371600"/>
-            <a:ext cx="0" cy="4754880"/>
-          </a:xfrm>
-          <a:prstGeom prst="line">
-            <a:avLst/>
-          </a:prstGeom>
-          <a:noFill/>
-          <a:ln w="8890">
-            <a:solidFill>
-              <a:srgbClr val="B98A2E"/>
-            </a:solidFill>
-            <a:prstDash val="solid"/>
-          </a:ln>
-        </p:spPr>
-      </p:sp>
-      <p:sp>
-        <p:nvSpPr>
-          <p:cNvPr id="16" name="Shape 14"/>
-          <p:cNvSpPr/>
-          <p:nvPr/>
-        </p:nvSpPr>
-        <p:spPr>
-          <a:xfrm>
-            <a:off x="7784287" y="1645920"/>
-            <a:ext cx="3840480" cy="1645920"/>
-          </a:xfrm>
-          <a:prstGeom prst="roundRect">
-            <a:avLst>
-              <a:gd name="adj" fmla="val 3333"/>
-            </a:avLst>
-          </a:prstGeom>
-          <a:solidFill>
-            <a:srgbClr val="F3EBDA"/>
-          </a:solidFill>
-          <a:ln/>
-        </p:spPr>
-      </p:sp>
-      <p:sp>
-        <p:nvSpPr>
-          <p:cNvPr id="17" name="Shape 15"/>
-          <p:cNvSpPr/>
-          <p:nvPr/>
-        </p:nvSpPr>
-        <p:spPr>
-          <a:xfrm>
-            <a:off x="7784287" y="1700784"/>
-            <a:ext cx="36576" cy="1536192"/>
-          </a:xfrm>
-          <a:prstGeom prst="rect">
-            <a:avLst/>
-          </a:prstGeom>
-          <a:solidFill>
-            <a:srgbClr val="977024"/>
-          </a:solidFill>
-          <a:ln/>
-        </p:spPr>
-      </p:sp>
-      <p:sp>
-        <p:nvSpPr>
-          <p:cNvPr id="18" name="Text 16"/>
-          <p:cNvSpPr/>
-          <p:nvPr/>
-        </p:nvSpPr>
-        <p:spPr>
-          <a:xfrm>
-            <a:off x="7967167" y="1755648"/>
-            <a:ext cx="3511296" cy="201168"/>
-          </a:xfrm>
-          <a:prstGeom prst="rect">
-            <a:avLst/>
-          </a:prstGeom>
-          <a:noFill/>
-          <a:ln/>
-        </p:spPr>
-        <p:txBody>
-          <a:bodyPr wrap="square" lIns="0" tIns="0" rIns="0" bIns="0" rtlCol="0" anchor="ctr"/>
-          <a:lstStyle/>
-          <a:p>
-            <a:pPr indent="0" marL="0">
-              <a:buNone/>
-            </a:pPr>
-            <a:endParaRPr lang="en-US" sz="1050" dirty="0"/>
-          </a:p>
-        </p:txBody>
-      </p:sp>
-      <p:sp>
-        <p:nvSpPr>
-          <p:cNvPr id="19" name="Text 17"/>
-          <p:cNvSpPr/>
-          <p:nvPr/>
-        </p:nvSpPr>
-        <p:spPr>
-          <a:xfrm>
-            <a:off x="7967167" y="1975104"/>
-            <a:ext cx="3511296" cy="1243584"/>
-          </a:xfrm>
-          <a:prstGeom prst="rect">
-            <a:avLst/>
-          </a:prstGeom>
-          <a:noFill/>
-          <a:ln/>
-        </p:spPr>
-        <p:txBody>
-          <a:bodyPr wrap="square" lIns="0" tIns="0" rIns="0" bIns="0" rtlCol="0" anchor="t"/>
-          <a:lstStyle/>
-          <a:p>
-            <a:pPr indent="0" marL="0">
-              <a:lnSpc>
-                <a:spcPct val="120000"/>
-              </a:lnSpc>
-              <a:buNone/>
-            </a:pPr>
-            <a:r>
-              <a:rPr lang="en-US" sz="930" dirty="0">
-                <a:solidFill>
-                  <a:srgbClr val="10161F"/>
-                </a:solidFill>
-                <a:latin typeface="Pretendard" pitchFamily="34" charset="0"/>
-                <a:ea typeface="Pretendard" pitchFamily="34" charset="-122"/>
-                <a:cs typeface="Pretendard" pitchFamily="34" charset="-120"/>
-              </a:rPr>
-              <a:t>서초 메디컬 빌딩은 지하2층~지상7층 규모의 올근생 빌딩입니다.</a:t>
-            </a:r>
-            <a:endParaRPr lang="en-US" sz="930" dirty="0"/>
-          </a:p>
-        </p:txBody>
-      </p:sp>
-      <p:sp>
-        <p:nvSpPr>
-          <p:cNvPr id="20" name="Text 18"/>
-          <p:cNvSpPr/>
-          <p:nvPr/>
-        </p:nvSpPr>
-        <p:spPr>
-          <a:xfrm>
-            <a:off x="566928" y="6382512"/>
-            <a:ext cx="7315200" cy="219456"/>
-          </a:xfrm>
-          <a:prstGeom prst="rect">
-            <a:avLst/>
-          </a:prstGeom>
-          <a:noFill/>
-          <a:ln/>
-        </p:spPr>
-        <p:txBody>
-          <a:bodyPr wrap="square" lIns="0" tIns="0" rIns="0" bIns="0" rtlCol="0" anchor="ctr"/>
-          <a:lstStyle/>
-          <a:p>
-            <a:pPr indent="0" marL="0">
-              <a:buNone/>
-            </a:pPr>
-            <a:r>
-              <a:rPr lang="en-US" sz="800" dirty="0">
-                <a:solidFill>
-                  <a:srgbClr val="718096"/>
-                </a:solidFill>
-                <a:latin typeface="Pretendard" pitchFamily="34" charset="0"/>
-                <a:ea typeface="Pretendard" pitchFamily="34" charset="-122"/>
-                <a:cs typeface="Pretendard" pitchFamily="34" charset="-120"/>
-              </a:rPr>
-              <a:t>크리딜   |   </a:t>
-            </a:r>
-            <a:endParaRPr lang="en-US" sz="800" dirty="0"/>
-          </a:p>
-        </p:txBody>
-      </p:sp>
-      <p:sp>
-        <p:nvSpPr>
-          <p:cNvPr id="21" name="Text 19"/>
-          <p:cNvSpPr/>
-          <p:nvPr/>
-        </p:nvSpPr>
-        <p:spPr>
-          <a:xfrm>
-            <a:off x="10710367" y="6382512"/>
-            <a:ext cx="914400" cy="219456"/>
-          </a:xfrm>
-          <a:prstGeom prst="rect">
-            <a:avLst/>
-          </a:prstGeom>
-          <a:noFill/>
-          <a:ln/>
-        </p:spPr>
-        <p:txBody>
-          <a:bodyPr wrap="square" lIns="0" tIns="0" rIns="0" bIns="0" rtlCol="0" anchor="ctr"/>
-          <a:lstStyle/>
-          <a:p>
-            <a:pPr algn="r" indent="0" marL="0">
-              <a:buNone/>
-            </a:pPr>
-            <a:r>
-              <a:rPr lang="en-US" sz="900" b="1" dirty="0">
-                <a:solidFill>
-                  <a:srgbClr val="B98A2E"/>
-                </a:solidFill>
-                <a:latin typeface="Arial" pitchFamily="34" charset="0"/>
-                <a:ea typeface="Arial" pitchFamily="34" charset="-122"/>
-                <a:cs typeface="Arial" pitchFamily="34" charset="-120"/>
-              </a:rPr>
-              <a:t>4</a:t>
-            </a:r>
-            <a:endParaRPr lang="en-US" sz="900" dirty="0"/>
-          </a:p>
-        </p:txBody>
-      </p:sp>
-    </p:spTree>
-  </p:cSld>
-  <p:clrMapOvr>
-    <a:masterClrMapping/>
-  </p:clrMapOvr>
-</p:sld>
-</file>
-
-<file path=ppt/slides/slide6.xml><?xml version="1.0" encoding="utf-8"?>
-<p:sld xmlns:a="http://schemas.openxmlformats.org/drawingml/2006/main" xmlns:r="http://schemas.openxmlformats.org/officeDocument/2006/relationships" xmlns:p="http://schemas.openxmlformats.org/presentationml/2006/main">
-  <p:cSld name="Slide 6">
-    <p:bg>
-      <p:bgPr>
-        <a:solidFill>
-          <a:srgbClr val="FFFFFF"/>
-        </a:solidFill>
-      </p:bgPr>
-    </p:bg>
-    <p:spTree>
-      <p:nvGrpSpPr>
-        <p:cNvPr id="1" name=""/>
-        <p:cNvGrpSpPr/>
-        <p:nvPr/>
-      </p:nvGrpSpPr>
-      <p:grpSpPr>
-        <a:xfrm>
-          <a:off x="0" y="0"/>
-          <a:ext cx="0" cy="0"/>
-          <a:chOff x="0" y="0"/>
-          <a:chExt cx="0" cy="0"/>
-        </a:xfrm>
-      </p:grpSpPr>
-      <p:sp>
-        <p:nvSpPr>
-          <p:cNvPr id="2" name="Shape 0"/>
-          <p:cNvSpPr/>
-          <p:nvPr/>
-        </p:nvSpPr>
-        <p:spPr>
-          <a:xfrm>
-            <a:off x="566928" y="457200"/>
-            <a:ext cx="384048" cy="384048"/>
-          </a:xfrm>
-          <a:prstGeom prst="ellipse">
-            <a:avLst/>
-          </a:prstGeom>
-          <a:solidFill>
-            <a:srgbClr val="B98A2E"/>
-          </a:solidFill>
-          <a:ln/>
-        </p:spPr>
-      </p:sp>
-      <p:sp>
-        <p:nvSpPr>
-          <p:cNvPr id="3" name="Text 1"/>
-          <p:cNvSpPr/>
-          <p:nvPr/>
-        </p:nvSpPr>
-        <p:spPr>
-          <a:xfrm>
-            <a:off x="566928" y="457200"/>
-            <a:ext cx="384048" cy="384048"/>
-          </a:xfrm>
-          <a:prstGeom prst="rect">
-            <a:avLst/>
-          </a:prstGeom>
-          <a:noFill/>
-          <a:ln/>
-        </p:spPr>
-        <p:txBody>
-          <a:bodyPr wrap="square" lIns="0" tIns="0" rIns="0" bIns="0" rtlCol="0" anchor="ctr"/>
-          <a:lstStyle/>
-          <a:p>
-            <a:pPr algn="ctr" indent="0" marL="0">
-              <a:buNone/>
-            </a:pPr>
-            <a:r>
-              <a:rPr lang="en-US" sz="1300" b="1" dirty="0">
-                <a:solidFill>
-                  <a:srgbClr val="FFFFFF"/>
-                </a:solidFill>
-                <a:latin typeface="Arial" pitchFamily="34" charset="0"/>
-                <a:ea typeface="Arial" pitchFamily="34" charset="-122"/>
-                <a:cs typeface="Arial" pitchFamily="34" charset="-120"/>
-              </a:rPr>
-              <a:t>05</a:t>
-            </a:r>
-            <a:endParaRPr lang="en-US" sz="1300" dirty="0"/>
-          </a:p>
-        </p:txBody>
-      </p:sp>
-      <p:sp>
-        <p:nvSpPr>
-          <p:cNvPr id="4" name="Text 2"/>
-          <p:cNvSpPr/>
-          <p:nvPr/>
-        </p:nvSpPr>
-        <p:spPr>
-          <a:xfrm>
-            <a:off x="1133856" y="457200"/>
-            <a:ext cx="10490911" cy="182880"/>
-          </a:xfrm>
-          <a:prstGeom prst="rect">
-            <a:avLst/>
-          </a:prstGeom>
-          <a:noFill/>
-          <a:ln/>
-        </p:spPr>
-        <p:txBody>
-          <a:bodyPr wrap="square" lIns="0" tIns="0" rIns="0" bIns="0" rtlCol="0" anchor="ctr"/>
-          <a:lstStyle/>
-          <a:p>
-            <a:pPr indent="0" marL="0">
-              <a:buNone/>
-            </a:pPr>
-            <a:r>
-              <a:rPr lang="en-US" sz="950" b="1" spc="200" kern="0" dirty="0">
-                <a:solidFill>
-                  <a:srgbClr val="B98A2E"/>
-                </a:solidFill>
-                <a:latin typeface="Arial" pitchFamily="34" charset="0"/>
-                <a:ea typeface="Arial" pitchFamily="34" charset="-122"/>
-                <a:cs typeface="Arial" pitchFamily="34" charset="-120"/>
-              </a:rPr>
-              <a:t>Rent Roll</a:t>
-            </a:r>
-            <a:endParaRPr lang="en-US" sz="950" dirty="0"/>
-          </a:p>
-        </p:txBody>
-      </p:sp>
-      <p:sp>
-        <p:nvSpPr>
-          <p:cNvPr id="5" name="Text 3"/>
-          <p:cNvSpPr/>
-          <p:nvPr/>
-        </p:nvSpPr>
-        <p:spPr>
-          <a:xfrm>
-            <a:off x="1133856" y="640080"/>
-            <a:ext cx="10490911" cy="365760"/>
-          </a:xfrm>
-          <a:prstGeom prst="rect">
-            <a:avLst/>
-          </a:prstGeom>
-          <a:noFill/>
-          <a:ln/>
-        </p:spPr>
-        <p:txBody>
-          <a:bodyPr wrap="square" lIns="0" tIns="0" rIns="0" bIns="0" rtlCol="0" anchor="ctr"/>
-          <a:lstStyle/>
-          <a:p>
-            <a:pPr indent="0" marL="0">
-              <a:buNone/>
-            </a:pPr>
-            <a:r>
-              <a:rPr lang="en-US" sz="2300" b="1" dirty="0">
-                <a:solidFill>
-                  <a:srgbClr val="10161F"/>
-                </a:solidFill>
-                <a:latin typeface="Pretendard" pitchFamily="34" charset="0"/>
-                <a:ea typeface="Pretendard" pitchFamily="34" charset="-122"/>
-                <a:cs typeface="Pretendard" pitchFamily="34" charset="-120"/>
-              </a:rPr>
-              <a:t>임대차 현황</a:t>
+              <a:t>렌트롤</a:t>
             </a:r>
             <a:endParaRPr lang="en-US" sz="2300" dirty="0"/>
           </a:p>
@@ -9824,7 +8815,7 @@
       </p:sp>
       <p:graphicFrame>
         <p:nvGraphicFramePr>
-          <p:cNvPr id="7" name="Table 0"/>
+          <p:cNvPr id="6" name="Table 0"/>
           <p:cNvGraphicFramePr>
             <a:graphicFrameLocks noGrp="1"/>
           </p:cNvGraphicFramePr>
@@ -10762,6 +9753,618 @@
 </p:sld>
 </file>
 
+<file path=ppt/slides/slide6.xml><?xml version="1.0" encoding="utf-8"?>
+<p:sld xmlns:a="http://schemas.openxmlformats.org/drawingml/2006/main" xmlns:r="http://schemas.openxmlformats.org/officeDocument/2006/relationships" xmlns:p="http://schemas.openxmlformats.org/presentationml/2006/main">
+  <p:cSld name="Slide 6">
+    <p:bg>
+      <p:bgPr>
+        <a:solidFill>
+          <a:srgbClr val="FFFFFF"/>
+        </a:solidFill>
+      </p:bgPr>
+    </p:bg>
+    <p:spTree>
+      <p:nvGrpSpPr>
+        <p:cNvPr id="1" name=""/>
+        <p:cNvGrpSpPr/>
+        <p:nvPr/>
+      </p:nvGrpSpPr>
+      <p:grpSpPr>
+        <a:xfrm>
+          <a:off x="0" y="0"/>
+          <a:ext cx="0" cy="0"/>
+          <a:chOff x="0" y="0"/>
+          <a:chExt cx="0" cy="0"/>
+        </a:xfrm>
+      </p:grpSpPr>
+      <p:sp>
+        <p:nvSpPr>
+          <p:cNvPr id="2" name="Shape 0"/>
+          <p:cNvSpPr/>
+          <p:nvPr/>
+        </p:nvSpPr>
+        <p:spPr>
+          <a:xfrm>
+            <a:off x="566928" y="457200"/>
+            <a:ext cx="384048" cy="384048"/>
+          </a:xfrm>
+          <a:prstGeom prst="ellipse">
+            <a:avLst/>
+          </a:prstGeom>
+          <a:solidFill>
+            <a:srgbClr val="B98A2E"/>
+          </a:solidFill>
+          <a:ln/>
+        </p:spPr>
+      </p:sp>
+      <p:sp>
+        <p:nvSpPr>
+          <p:cNvPr id="3" name="Text 1"/>
+          <p:cNvSpPr/>
+          <p:nvPr/>
+        </p:nvSpPr>
+        <p:spPr>
+          <a:xfrm>
+            <a:off x="566928" y="457200"/>
+            <a:ext cx="384048" cy="384048"/>
+          </a:xfrm>
+          <a:prstGeom prst="rect">
+            <a:avLst/>
+          </a:prstGeom>
+          <a:noFill/>
+          <a:ln/>
+        </p:spPr>
+        <p:txBody>
+          <a:bodyPr wrap="square" lIns="0" tIns="0" rIns="0" bIns="0" rtlCol="0" anchor="ctr"/>
+          <a:lstStyle/>
+          <a:p>
+            <a:pPr algn="ctr" indent="0" marL="0">
+              <a:buNone/>
+            </a:pPr>
+            <a:r>
+              <a:rPr lang="en-US" sz="1300" b="1" dirty="0">
+                <a:solidFill>
+                  <a:srgbClr val="FFFFFF"/>
+                </a:solidFill>
+                <a:latin typeface="Arial" pitchFamily="34" charset="0"/>
+                <a:ea typeface="Arial" pitchFamily="34" charset="-122"/>
+                <a:cs typeface="Arial" pitchFamily="34" charset="-120"/>
+              </a:rPr>
+              <a:t>06</a:t>
+            </a:r>
+            <a:endParaRPr lang="en-US" sz="1300" dirty="0"/>
+          </a:p>
+        </p:txBody>
+      </p:sp>
+      <p:sp>
+        <p:nvSpPr>
+          <p:cNvPr id="4" name="Text 2"/>
+          <p:cNvSpPr/>
+          <p:nvPr/>
+        </p:nvSpPr>
+        <p:spPr>
+          <a:xfrm>
+            <a:off x="1133856" y="457200"/>
+            <a:ext cx="10490911" cy="182880"/>
+          </a:xfrm>
+          <a:prstGeom prst="rect">
+            <a:avLst/>
+          </a:prstGeom>
+          <a:noFill/>
+          <a:ln/>
+        </p:spPr>
+        <p:txBody>
+          <a:bodyPr wrap="square" lIns="0" tIns="0" rIns="0" bIns="0" rtlCol="0" anchor="ctr"/>
+          <a:lstStyle/>
+          <a:p>
+            <a:pPr indent="0" marL="0">
+              <a:buNone/>
+            </a:pPr>
+            <a:r>
+              <a:rPr lang="en-US" sz="950" b="1" spc="200" kern="0" dirty="0">
+                <a:solidFill>
+                  <a:srgbClr val="B98A2E"/>
+                </a:solidFill>
+                <a:latin typeface="Arial" pitchFamily="34" charset="0"/>
+                <a:ea typeface="Arial" pitchFamily="34" charset="-122"/>
+                <a:cs typeface="Arial" pitchFamily="34" charset="-120"/>
+              </a:rPr>
+              <a:t>Stability</a:t>
+            </a:r>
+            <a:endParaRPr lang="en-US" sz="950" dirty="0"/>
+          </a:p>
+        </p:txBody>
+      </p:sp>
+      <p:sp>
+        <p:nvSpPr>
+          <p:cNvPr id="5" name="Text 3"/>
+          <p:cNvSpPr/>
+          <p:nvPr/>
+        </p:nvSpPr>
+        <p:spPr>
+          <a:xfrm>
+            <a:off x="1133856" y="640080"/>
+            <a:ext cx="10490911" cy="365760"/>
+          </a:xfrm>
+          <a:prstGeom prst="rect">
+            <a:avLst/>
+          </a:prstGeom>
+          <a:noFill/>
+          <a:ln/>
+        </p:spPr>
+        <p:txBody>
+          <a:bodyPr wrap="square" lIns="0" tIns="0" rIns="0" bIns="0" rtlCol="0" anchor="ctr"/>
+          <a:lstStyle/>
+          <a:p>
+            <a:pPr indent="0" marL="0">
+              <a:buNone/>
+            </a:pPr>
+            <a:r>
+              <a:rPr lang="en-US" sz="2300" b="1" dirty="0">
+                <a:solidFill>
+                  <a:srgbClr val="10161F"/>
+                </a:solidFill>
+                <a:latin typeface="Pretendard" pitchFamily="34" charset="0"/>
+                <a:ea typeface="Pretendard" pitchFamily="34" charset="-122"/>
+                <a:cs typeface="Pretendard" pitchFamily="34" charset="-120"/>
+              </a:rPr>
+              <a:t>임대안정성</a:t>
+            </a:r>
+            <a:endParaRPr lang="en-US" sz="2300" dirty="0"/>
+          </a:p>
+        </p:txBody>
+      </p:sp>
+      <p:sp>
+        <p:nvSpPr>
+          <p:cNvPr id="6" name="Text 4"/>
+          <p:cNvSpPr/>
+          <p:nvPr/>
+        </p:nvSpPr>
+        <p:spPr>
+          <a:xfrm>
+            <a:off x="566928" y="1371600"/>
+            <a:ext cx="6858000" cy="237744"/>
+          </a:xfrm>
+          <a:prstGeom prst="rect">
+            <a:avLst/>
+          </a:prstGeom>
+          <a:noFill/>
+          <a:ln/>
+        </p:spPr>
+        <p:txBody>
+          <a:bodyPr wrap="square" lIns="0" tIns="0" rIns="0" bIns="0" rtlCol="0" anchor="ctr"/>
+          <a:lstStyle/>
+          <a:p>
+            <a:pPr indent="0" marL="0">
+              <a:buNone/>
+            </a:pPr>
+            <a:r>
+              <a:rPr lang="en-US" sz="1100" b="1" dirty="0">
+                <a:solidFill>
+                  <a:srgbClr val="10161F"/>
+                </a:solidFill>
+                <a:latin typeface="Pretendard" pitchFamily="34" charset="0"/>
+                <a:ea typeface="Pretendard" pitchFamily="34" charset="-122"/>
+                <a:cs typeface="Pretendard" pitchFamily="34" charset="-120"/>
+              </a:rPr>
+              <a:t>건축물 개요 및 물리 스펙</a:t>
+            </a:r>
+            <a:endParaRPr lang="en-US" sz="1100" dirty="0"/>
+          </a:p>
+        </p:txBody>
+      </p:sp>
+      <p:sp>
+        <p:nvSpPr>
+          <p:cNvPr id="7" name="Text 5"/>
+          <p:cNvSpPr/>
+          <p:nvPr/>
+        </p:nvSpPr>
+        <p:spPr>
+          <a:xfrm>
+            <a:off x="566928" y="1645920"/>
+            <a:ext cx="2606040" cy="438912"/>
+          </a:xfrm>
+          <a:prstGeom prst="rect">
+            <a:avLst/>
+          </a:prstGeom>
+          <a:noFill/>
+          <a:ln/>
+        </p:spPr>
+        <p:txBody>
+          <a:bodyPr wrap="square" lIns="0" tIns="0" rIns="0" bIns="0" rtlCol="0" anchor="ctr"/>
+          <a:lstStyle/>
+          <a:p>
+            <a:pPr indent="0" marL="0">
+              <a:lnSpc>
+                <a:spcPct val="120000"/>
+              </a:lnSpc>
+              <a:buNone/>
+            </a:pPr>
+            <a:r>
+              <a:rPr lang="en-US" sz="1350" dirty="0">
+                <a:solidFill>
+                  <a:srgbClr val="718096"/>
+                </a:solidFill>
+                <a:latin typeface="Pretendard" pitchFamily="34" charset="0"/>
+                <a:ea typeface="Pretendard" pitchFamily="34" charset="-122"/>
+                <a:cs typeface="Pretendard" pitchFamily="34" charset="-120"/>
+              </a:rPr>
+              <a:t>1F</a:t>
+            </a:r>
+            <a:endParaRPr lang="en-US" sz="1350" dirty="0"/>
+          </a:p>
+        </p:txBody>
+      </p:sp>
+      <p:sp>
+        <p:nvSpPr>
+          <p:cNvPr id="8" name="Text 6"/>
+          <p:cNvSpPr/>
+          <p:nvPr/>
+        </p:nvSpPr>
+        <p:spPr>
+          <a:xfrm>
+            <a:off x="3172968" y="1645920"/>
+            <a:ext cx="4251960" cy="438912"/>
+          </a:xfrm>
+          <a:prstGeom prst="rect">
+            <a:avLst/>
+          </a:prstGeom>
+          <a:noFill/>
+          <a:ln/>
+        </p:spPr>
+        <p:txBody>
+          <a:bodyPr wrap="square" lIns="0" tIns="0" rIns="0" bIns="0" rtlCol="0" anchor="ctr"/>
+          <a:lstStyle/>
+          <a:p>
+            <a:pPr indent="0" marL="0">
+              <a:lnSpc>
+                <a:spcPct val="120000"/>
+              </a:lnSpc>
+              <a:buNone/>
+            </a:pPr>
+            <a:r>
+              <a:rPr lang="en-US" sz="1350" b="1" dirty="0">
+                <a:solidFill>
+                  <a:srgbClr val="10161F"/>
+                </a:solidFill>
+                <a:latin typeface="Pretendard" pitchFamily="34" charset="0"/>
+                <a:ea typeface="Pretendard" pitchFamily="34" charset="-122"/>
+                <a:cs typeface="Pretendard" pitchFamily="34" charset="-120"/>
+              </a:rPr>
+              <a:t>약국 (3억)</a:t>
+            </a:r>
+            <a:endParaRPr lang="en-US" sz="1350" dirty="0"/>
+          </a:p>
+        </p:txBody>
+      </p:sp>
+      <p:sp>
+        <p:nvSpPr>
+          <p:cNvPr id="9" name="Shape 7"/>
+          <p:cNvSpPr/>
+          <p:nvPr/>
+        </p:nvSpPr>
+        <p:spPr>
+          <a:xfrm>
+            <a:off x="566928" y="2084832"/>
+            <a:ext cx="6858000" cy="0"/>
+          </a:xfrm>
+          <a:prstGeom prst="line">
+            <a:avLst/>
+          </a:prstGeom>
+          <a:noFill/>
+          <a:ln w="3810">
+            <a:solidFill>
+              <a:srgbClr val="CBD5E0"/>
+            </a:solidFill>
+            <a:prstDash val="solid"/>
+          </a:ln>
+        </p:spPr>
+      </p:sp>
+      <p:sp>
+        <p:nvSpPr>
+          <p:cNvPr id="10" name="Text 8"/>
+          <p:cNvSpPr/>
+          <p:nvPr/>
+        </p:nvSpPr>
+        <p:spPr>
+          <a:xfrm>
+            <a:off x="566928" y="2084832"/>
+            <a:ext cx="2606040" cy="438912"/>
+          </a:xfrm>
+          <a:prstGeom prst="rect">
+            <a:avLst/>
+          </a:prstGeom>
+          <a:noFill/>
+          <a:ln/>
+        </p:spPr>
+        <p:txBody>
+          <a:bodyPr wrap="square" lIns="0" tIns="0" rIns="0" bIns="0" rtlCol="0" anchor="ctr"/>
+          <a:lstStyle/>
+          <a:p>
+            <a:pPr indent="0" marL="0">
+              <a:lnSpc>
+                <a:spcPct val="120000"/>
+              </a:lnSpc>
+              <a:buNone/>
+            </a:pPr>
+            <a:r>
+              <a:rPr lang="en-US" sz="1350" dirty="0">
+                <a:solidFill>
+                  <a:srgbClr val="718096"/>
+                </a:solidFill>
+                <a:latin typeface="Pretendard" pitchFamily="34" charset="0"/>
+                <a:ea typeface="Pretendard" pitchFamily="34" charset="-122"/>
+                <a:cs typeface="Pretendard" pitchFamily="34" charset="-120"/>
+              </a:rPr>
+              <a:t>2F</a:t>
+            </a:r>
+            <a:endParaRPr lang="en-US" sz="1350" dirty="0"/>
+          </a:p>
+        </p:txBody>
+      </p:sp>
+      <p:sp>
+        <p:nvSpPr>
+          <p:cNvPr id="11" name="Text 9"/>
+          <p:cNvSpPr/>
+          <p:nvPr/>
+        </p:nvSpPr>
+        <p:spPr>
+          <a:xfrm>
+            <a:off x="3172968" y="2084832"/>
+            <a:ext cx="4251960" cy="438912"/>
+          </a:xfrm>
+          <a:prstGeom prst="rect">
+            <a:avLst/>
+          </a:prstGeom>
+          <a:noFill/>
+          <a:ln/>
+        </p:spPr>
+        <p:txBody>
+          <a:bodyPr wrap="square" lIns="0" tIns="0" rIns="0" bIns="0" rtlCol="0" anchor="ctr"/>
+          <a:lstStyle/>
+          <a:p>
+            <a:pPr indent="0" marL="0">
+              <a:lnSpc>
+                <a:spcPct val="120000"/>
+              </a:lnSpc>
+              <a:buNone/>
+            </a:pPr>
+            <a:r>
+              <a:rPr lang="en-US" sz="1350" b="1" dirty="0">
+                <a:solidFill>
+                  <a:srgbClr val="10161F"/>
+                </a:solidFill>
+                <a:latin typeface="Pretendard" pitchFamily="34" charset="0"/>
+                <a:ea typeface="Pretendard" pitchFamily="34" charset="-122"/>
+                <a:cs typeface="Pretendard" pitchFamily="34" charset="-120"/>
+              </a:rPr>
+              <a:t>안과 (2억)</a:t>
+            </a:r>
+            <a:endParaRPr lang="en-US" sz="1350" dirty="0"/>
+          </a:p>
+        </p:txBody>
+      </p:sp>
+      <p:sp>
+        <p:nvSpPr>
+          <p:cNvPr id="12" name="Shape 10"/>
+          <p:cNvSpPr/>
+          <p:nvPr/>
+        </p:nvSpPr>
+        <p:spPr>
+          <a:xfrm>
+            <a:off x="7604608" y="1371600"/>
+            <a:ext cx="0" cy="4754880"/>
+          </a:xfrm>
+          <a:prstGeom prst="line">
+            <a:avLst/>
+          </a:prstGeom>
+          <a:noFill/>
+          <a:ln w="8890">
+            <a:solidFill>
+              <a:srgbClr val="B98A2E"/>
+            </a:solidFill>
+            <a:prstDash val="solid"/>
+          </a:ln>
+        </p:spPr>
+      </p:sp>
+      <p:sp>
+        <p:nvSpPr>
+          <p:cNvPr id="13" name="Shape 11"/>
+          <p:cNvSpPr/>
+          <p:nvPr/>
+        </p:nvSpPr>
+        <p:spPr>
+          <a:xfrm>
+            <a:off x="7784287" y="1645920"/>
+            <a:ext cx="3840480" cy="1645920"/>
+          </a:xfrm>
+          <a:prstGeom prst="roundRect">
+            <a:avLst>
+              <a:gd name="adj" fmla="val 3333"/>
+            </a:avLst>
+          </a:prstGeom>
+          <a:solidFill>
+            <a:srgbClr val="F3EBDA"/>
+          </a:solidFill>
+          <a:ln/>
+        </p:spPr>
+      </p:sp>
+      <p:sp>
+        <p:nvSpPr>
+          <p:cNvPr id="14" name="Shape 12"/>
+          <p:cNvSpPr/>
+          <p:nvPr/>
+        </p:nvSpPr>
+        <p:spPr>
+          <a:xfrm>
+            <a:off x="7784287" y="1700784"/>
+            <a:ext cx="36576" cy="1536192"/>
+          </a:xfrm>
+          <a:prstGeom prst="rect">
+            <a:avLst/>
+          </a:prstGeom>
+          <a:solidFill>
+            <a:srgbClr val="977024"/>
+          </a:solidFill>
+          <a:ln/>
+        </p:spPr>
+      </p:sp>
+      <p:sp>
+        <p:nvSpPr>
+          <p:cNvPr id="15" name="Text 13"/>
+          <p:cNvSpPr/>
+          <p:nvPr/>
+        </p:nvSpPr>
+        <p:spPr>
+          <a:xfrm>
+            <a:off x="7967167" y="1755648"/>
+            <a:ext cx="3511296" cy="201168"/>
+          </a:xfrm>
+          <a:prstGeom prst="rect">
+            <a:avLst/>
+          </a:prstGeom>
+          <a:noFill/>
+          <a:ln/>
+        </p:spPr>
+        <p:txBody>
+          <a:bodyPr wrap="square" lIns="0" tIns="0" rIns="0" bIns="0" rtlCol="0" anchor="ctr"/>
+          <a:lstStyle/>
+          <a:p>
+            <a:pPr indent="0" marL="0">
+              <a:buNone/>
+            </a:pPr>
+            <a:endParaRPr lang="en-US" sz="1050" dirty="0"/>
+          </a:p>
+        </p:txBody>
+      </p:sp>
+      <p:sp>
+        <p:nvSpPr>
+          <p:cNvPr id="16" name="Text 14"/>
+          <p:cNvSpPr/>
+          <p:nvPr/>
+        </p:nvSpPr>
+        <p:spPr>
+          <a:xfrm>
+            <a:off x="7967167" y="1975104"/>
+            <a:ext cx="3511296" cy="1243584"/>
+          </a:xfrm>
+          <a:prstGeom prst="rect">
+            <a:avLst/>
+          </a:prstGeom>
+          <a:noFill/>
+          <a:ln/>
+        </p:spPr>
+        <p:txBody>
+          <a:bodyPr wrap="square" lIns="0" tIns="0" rIns="0" bIns="0" rtlCol="0" anchor="t"/>
+          <a:lstStyle/>
+          <a:p>
+            <a:pPr indent="0" marL="0">
+              <a:lnSpc>
+                <a:spcPct val="120000"/>
+              </a:lnSpc>
+              <a:buNone/>
+            </a:pPr>
+            <a:r>
+              <a:rPr lang="en-US" sz="930" dirty="0">
+                <a:solidFill>
+                  <a:srgbClr val="10161F"/>
+                </a:solidFill>
+                <a:latin typeface="Pretendard" pitchFamily="34" charset="0"/>
+                <a:ea typeface="Pretendard" pitchFamily="34" charset="-122"/>
+                <a:cs typeface="Pretendard" pitchFamily="34" charset="-120"/>
+              </a:rPr>
+              <a:t>전층 메디컬 만실 운영 중이며 WALE 평균 3.5년입니다.</a:t>
+            </a:r>
+            <a:endParaRPr lang="en-US" sz="930" dirty="0"/>
+          </a:p>
+        </p:txBody>
+      </p:sp>
+      <p:sp>
+        <p:nvSpPr>
+          <p:cNvPr id="17" name="Text 15"/>
+          <p:cNvSpPr/>
+          <p:nvPr/>
+        </p:nvSpPr>
+        <p:spPr>
+          <a:xfrm>
+            <a:off x="566928" y="6382512"/>
+            <a:ext cx="7315200" cy="219456"/>
+          </a:xfrm>
+          <a:prstGeom prst="rect">
+            <a:avLst/>
+          </a:prstGeom>
+          <a:noFill/>
+          <a:ln/>
+        </p:spPr>
+        <p:txBody>
+          <a:bodyPr wrap="square" lIns="0" tIns="0" rIns="0" bIns="0" rtlCol="0" anchor="ctr"/>
+          <a:lstStyle/>
+          <a:p>
+            <a:pPr indent="0" marL="0">
+              <a:buNone/>
+            </a:pPr>
+            <a:r>
+              <a:rPr lang="en-US" sz="800" dirty="0">
+                <a:solidFill>
+                  <a:srgbClr val="718096"/>
+                </a:solidFill>
+                <a:latin typeface="Pretendard" pitchFamily="34" charset="0"/>
+                <a:ea typeface="Pretendard" pitchFamily="34" charset="-122"/>
+                <a:cs typeface="Pretendard" pitchFamily="34" charset="-120"/>
+              </a:rPr>
+              <a:t>크리딜   |   </a:t>
+            </a:r>
+            <a:endParaRPr lang="en-US" sz="800" dirty="0"/>
+          </a:p>
+        </p:txBody>
+      </p:sp>
+      <p:sp>
+        <p:nvSpPr>
+          <p:cNvPr id="18" name="Text 16"/>
+          <p:cNvSpPr/>
+          <p:nvPr/>
+        </p:nvSpPr>
+        <p:spPr>
+          <a:xfrm>
+            <a:off x="10710367" y="6382512"/>
+            <a:ext cx="914400" cy="219456"/>
+          </a:xfrm>
+          <a:prstGeom prst="rect">
+            <a:avLst/>
+          </a:prstGeom>
+          <a:noFill/>
+          <a:ln/>
+        </p:spPr>
+        <p:txBody>
+          <a:bodyPr wrap="square" lIns="0" tIns="0" rIns="0" bIns="0" rtlCol="0" anchor="ctr"/>
+          <a:lstStyle/>
+          <a:p>
+            <a:pPr algn="r" indent="0" marL="0">
+              <a:buNone/>
+            </a:pPr>
+            <a:r>
+              <a:rPr lang="en-US" sz="900" b="1" dirty="0">
+                <a:solidFill>
+                  <a:srgbClr val="B98A2E"/>
+                </a:solidFill>
+                <a:latin typeface="Arial" pitchFamily="34" charset="0"/>
+                <a:ea typeface="Arial" pitchFamily="34" charset="-122"/>
+                <a:cs typeface="Arial" pitchFamily="34" charset="-120"/>
+              </a:rPr>
+              <a:t>6</a:t>
+            </a:r>
+            <a:endParaRPr lang="en-US" sz="900" dirty="0"/>
+          </a:p>
+        </p:txBody>
+      </p:sp>
+    </p:spTree>
+  </p:cSld>
+  <p:clrMapOvr>
+    <a:masterClrMapping/>
+  </p:clrMapOvr>
+</p:sld>
+</file>
+
 <file path=ppt/slides/slide7.xml><?xml version="1.0" encoding="utf-8"?>
 <p:sld xmlns:a="http://schemas.openxmlformats.org/drawingml/2006/main" xmlns:r="http://schemas.openxmlformats.org/officeDocument/2006/relationships" xmlns:p="http://schemas.openxmlformats.org/presentationml/2006/main">
   <p:cSld name="Slide 7">
@@ -10839,7 +10442,7 @@
                 <a:ea typeface="Arial" pitchFamily="34" charset="-122"/>
                 <a:cs typeface="Arial" pitchFamily="34" charset="-120"/>
               </a:rPr>
-              <a:t>06</a:t>
+              <a:t>07</a:t>
             </a:r>
             <a:endParaRPr lang="en-US" sz="1300" dirty="0"/>
           </a:p>
@@ -10878,7 +10481,7 @@
                 <a:ea typeface="Arial" pitchFamily="34" charset="-122"/>
                 <a:cs typeface="Arial" pitchFamily="34" charset="-120"/>
               </a:rPr>
-              <a:t>Stability</a:t>
+              <a:t>Profit</a:t>
             </a:r>
             <a:endParaRPr lang="en-US" sz="950" dirty="0"/>
           </a:p>
@@ -10917,7 +10520,7 @@
                 <a:ea typeface="Pretendard" pitchFamily="34" charset="-122"/>
                 <a:cs typeface="Pretendard" pitchFamily="34" charset="-120"/>
               </a:rPr>
-              <a:t>임대안정성</a:t>
+              <a:t>수익구조</a:t>
             </a:r>
             <a:endParaRPr lang="en-US" sz="2300" dirty="0"/>
           </a:p>
@@ -10925,143 +10528,47 @@
       </p:sp>
       <p:sp>
         <p:nvSpPr>
-          <p:cNvPr id="6" name="Text 4"/>
-          <p:cNvSpPr/>
-          <p:nvPr/>
-        </p:nvSpPr>
-        <p:spPr>
-          <a:xfrm>
-            <a:off x="566928" y="1371600"/>
-            <a:ext cx="6858000" cy="237744"/>
-          </a:xfrm>
-          <a:prstGeom prst="rect">
-            <a:avLst/>
-          </a:prstGeom>
-          <a:noFill/>
-          <a:ln/>
-        </p:spPr>
-        <p:txBody>
-          <a:bodyPr wrap="square" lIns="0" tIns="0" rIns="0" bIns="0" rtlCol="0" anchor="ctr"/>
-          <a:lstStyle/>
-          <a:p>
-            <a:pPr indent="0" marL="0">
-              <a:buNone/>
-            </a:pPr>
-            <a:r>
-              <a:rPr lang="en-US" sz="1100" b="1" dirty="0">
-                <a:solidFill>
-                  <a:srgbClr val="10161F"/>
-                </a:solidFill>
-                <a:latin typeface="Pretendard" pitchFamily="34" charset="0"/>
-                <a:ea typeface="Pretendard" pitchFamily="34" charset="-122"/>
-                <a:cs typeface="Pretendard" pitchFamily="34" charset="-120"/>
-              </a:rPr>
-              <a:t>건축물 개요 및 물리 스펙</a:t>
-            </a:r>
-            <a:endParaRPr lang="en-US" sz="1100" dirty="0"/>
-          </a:p>
-        </p:txBody>
-      </p:sp>
-      <p:sp>
-        <p:nvSpPr>
-          <p:cNvPr id="7" name="Text 5"/>
-          <p:cNvSpPr/>
-          <p:nvPr/>
-        </p:nvSpPr>
-        <p:spPr>
-          <a:xfrm>
-            <a:off x="566928" y="1645920"/>
-            <a:ext cx="2606040" cy="438912"/>
-          </a:xfrm>
-          <a:prstGeom prst="rect">
-            <a:avLst/>
-          </a:prstGeom>
-          <a:noFill/>
-          <a:ln/>
-        </p:spPr>
-        <p:txBody>
-          <a:bodyPr wrap="square" lIns="0" tIns="0" rIns="0" bIns="0" rtlCol="0" anchor="ctr"/>
-          <a:lstStyle/>
-          <a:p>
-            <a:pPr indent="0" marL="0">
-              <a:lnSpc>
-                <a:spcPct val="120000"/>
-              </a:lnSpc>
-              <a:buNone/>
-            </a:pPr>
-            <a:r>
-              <a:rPr lang="en-US" sz="1350" dirty="0">
-                <a:solidFill>
-                  <a:srgbClr val="718096"/>
-                </a:solidFill>
-                <a:latin typeface="Pretendard" pitchFamily="34" charset="0"/>
-                <a:ea typeface="Pretendard" pitchFamily="34" charset="-122"/>
-                <a:cs typeface="Pretendard" pitchFamily="34" charset="-120"/>
-              </a:rPr>
-              <a:t>1F</a:t>
-            </a:r>
-            <a:endParaRPr lang="en-US" sz="1350" dirty="0"/>
-          </a:p>
-        </p:txBody>
-      </p:sp>
-      <p:sp>
-        <p:nvSpPr>
-          <p:cNvPr id="8" name="Text 6"/>
-          <p:cNvSpPr/>
-          <p:nvPr/>
-        </p:nvSpPr>
-        <p:spPr>
-          <a:xfrm>
-            <a:off x="3172968" y="1645920"/>
-            <a:ext cx="4251960" cy="438912"/>
-          </a:xfrm>
-          <a:prstGeom prst="rect">
-            <a:avLst/>
-          </a:prstGeom>
-          <a:noFill/>
-          <a:ln/>
-        </p:spPr>
-        <p:txBody>
-          <a:bodyPr wrap="square" lIns="0" tIns="0" rIns="0" bIns="0" rtlCol="0" anchor="ctr"/>
-          <a:lstStyle/>
-          <a:p>
-            <a:pPr indent="0" marL="0">
-              <a:lnSpc>
-                <a:spcPct val="120000"/>
-              </a:lnSpc>
-              <a:buNone/>
-            </a:pPr>
-            <a:r>
-              <a:rPr lang="en-US" sz="1350" b="1" dirty="0">
-                <a:solidFill>
-                  <a:srgbClr val="10161F"/>
-                </a:solidFill>
-                <a:latin typeface="Pretendard" pitchFamily="34" charset="0"/>
-                <a:ea typeface="Pretendard" pitchFamily="34" charset="-122"/>
-                <a:cs typeface="Pretendard" pitchFamily="34" charset="-120"/>
-              </a:rPr>
-              <a:t>약국 (3억)</a:t>
-            </a:r>
-            <a:endParaRPr lang="en-US" sz="1350" dirty="0"/>
-          </a:p>
-        </p:txBody>
-      </p:sp>
-      <p:sp>
-        <p:nvSpPr>
-          <p:cNvPr id="9" name="Shape 7"/>
-          <p:cNvSpPr/>
-          <p:nvPr/>
-        </p:nvSpPr>
-        <p:spPr>
-          <a:xfrm>
-            <a:off x="566928" y="2084832"/>
-            <a:ext cx="6858000" cy="0"/>
+          <p:cNvPr id="6" name="Shape 4"/>
+          <p:cNvSpPr/>
+          <p:nvPr/>
+        </p:nvSpPr>
+        <p:spPr>
+          <a:xfrm>
+            <a:off x="566928" y="1325880"/>
+            <a:ext cx="11057839" cy="0"/>
           </a:xfrm>
           <a:prstGeom prst="line">
             <a:avLst/>
           </a:prstGeom>
           <a:noFill/>
-          <a:ln w="3810">
+          <a:ln w="19050">
+            <a:solidFill>
+              <a:srgbClr val="B98A2E"/>
+            </a:solidFill>
+            <a:prstDash val="solid"/>
+          </a:ln>
+        </p:spPr>
+      </p:sp>
+      <p:sp>
+        <p:nvSpPr>
+          <p:cNvPr id="7" name="Shape 5"/>
+          <p:cNvSpPr/>
+          <p:nvPr/>
+        </p:nvSpPr>
+        <p:spPr>
+          <a:xfrm>
+            <a:off x="566928" y="1554480"/>
+            <a:ext cx="3576218" cy="1188720"/>
+          </a:xfrm>
+          <a:prstGeom prst="roundRect">
+            <a:avLst>
+              <a:gd name="adj" fmla="val 4615"/>
+            </a:avLst>
+          </a:prstGeom>
+          <a:solidFill>
+            <a:srgbClr val="F7FAFC"/>
+          </a:solidFill>
+          <a:ln w="6350">
             <a:solidFill>
               <a:srgbClr val="CBD5E0"/>
             </a:solidFill>
@@ -11071,23 +10578,398 @@
       </p:sp>
       <p:sp>
         <p:nvSpPr>
-          <p:cNvPr id="10" name="Text 8"/>
-          <p:cNvSpPr/>
-          <p:nvPr/>
-        </p:nvSpPr>
-        <p:spPr>
-          <a:xfrm>
-            <a:off x="566928" y="2084832"/>
-            <a:ext cx="2606040" cy="438912"/>
-          </a:xfrm>
-          <a:prstGeom prst="rect">
-            <a:avLst/>
-          </a:prstGeom>
-          <a:noFill/>
-          <a:ln/>
-        </p:spPr>
-        <p:txBody>
-          <a:bodyPr wrap="square" lIns="0" tIns="0" rIns="0" bIns="0" rtlCol="0" anchor="ctr"/>
+          <p:cNvPr id="8" name="Text 6"/>
+          <p:cNvSpPr/>
+          <p:nvPr/>
+        </p:nvSpPr>
+        <p:spPr>
+          <a:xfrm>
+            <a:off x="731520" y="1682496"/>
+            <a:ext cx="3247034" cy="201168"/>
+          </a:xfrm>
+          <a:prstGeom prst="rect">
+            <a:avLst/>
+          </a:prstGeom>
+          <a:noFill/>
+          <a:ln/>
+        </p:spPr>
+        <p:txBody>
+          <a:bodyPr wrap="square" lIns="0" tIns="0" rIns="0" bIns="0" rtlCol="0" anchor="ctr"/>
+          <a:lstStyle/>
+          <a:p>
+            <a:pPr indent="0" marL="0">
+              <a:buNone/>
+            </a:pPr>
+            <a:r>
+              <a:rPr lang="en-US" sz="950" dirty="0">
+                <a:solidFill>
+                  <a:srgbClr val="718096"/>
+                </a:solidFill>
+                <a:latin typeface="Pretendard" pitchFamily="34" charset="0"/>
+                <a:ea typeface="Pretendard" pitchFamily="34" charset="-122"/>
+                <a:cs typeface="Pretendard" pitchFamily="34" charset="-120"/>
+              </a:rPr>
+              <a:t>실투자금</a:t>
+            </a:r>
+            <a:endParaRPr lang="en-US" sz="950" dirty="0"/>
+          </a:p>
+        </p:txBody>
+      </p:sp>
+      <p:sp>
+        <p:nvSpPr>
+          <p:cNvPr id="9" name="Text 7"/>
+          <p:cNvSpPr/>
+          <p:nvPr/>
+        </p:nvSpPr>
+        <p:spPr>
+          <a:xfrm>
+            <a:off x="731520" y="1901952"/>
+            <a:ext cx="3247034" cy="402336"/>
+          </a:xfrm>
+          <a:prstGeom prst="rect">
+            <a:avLst/>
+          </a:prstGeom>
+          <a:noFill/>
+          <a:ln/>
+        </p:spPr>
+        <p:txBody>
+          <a:bodyPr wrap="square" lIns="0" tIns="0" rIns="0" bIns="0" rtlCol="0" anchor="ctr">
+            <a:normAutofit/>
+          </a:bodyPr>
+          <a:lstStyle/>
+          <a:p>
+            <a:pPr indent="0" marL="0">
+              <a:buNone/>
+            </a:pPr>
+            <a:r>
+              <a:rPr lang="en-US" sz="2200" b="1" dirty="0">
+                <a:solidFill>
+                  <a:srgbClr val="10161F"/>
+                </a:solidFill>
+                <a:latin typeface="Pretendard" pitchFamily="34" charset="0"/>
+                <a:ea typeface="Pretendard" pitchFamily="34" charset="-122"/>
+                <a:cs typeface="Pretendard" pitchFamily="34" charset="-120"/>
+              </a:rPr>
+              <a:t>약 69억 원</a:t>
+            </a:r>
+            <a:endParaRPr lang="en-US" sz="2200" dirty="0"/>
+          </a:p>
+        </p:txBody>
+      </p:sp>
+      <p:sp>
+        <p:nvSpPr>
+          <p:cNvPr id="10" name="Shape 8"/>
+          <p:cNvSpPr/>
+          <p:nvPr/>
+        </p:nvSpPr>
+        <p:spPr>
+          <a:xfrm>
+            <a:off x="4307738" y="1554480"/>
+            <a:ext cx="3576218" cy="1188720"/>
+          </a:xfrm>
+          <a:prstGeom prst="roundRect">
+            <a:avLst>
+              <a:gd name="adj" fmla="val 4615"/>
+            </a:avLst>
+          </a:prstGeom>
+          <a:solidFill>
+            <a:srgbClr val="F7FAFC"/>
+          </a:solidFill>
+          <a:ln w="6350">
+            <a:solidFill>
+              <a:srgbClr val="CBD5E0"/>
+            </a:solidFill>
+            <a:prstDash val="solid"/>
+          </a:ln>
+        </p:spPr>
+      </p:sp>
+      <p:sp>
+        <p:nvSpPr>
+          <p:cNvPr id="11" name="Text 9"/>
+          <p:cNvSpPr/>
+          <p:nvPr/>
+        </p:nvSpPr>
+        <p:spPr>
+          <a:xfrm>
+            <a:off x="4472330" y="1682496"/>
+            <a:ext cx="3247034" cy="201168"/>
+          </a:xfrm>
+          <a:prstGeom prst="rect">
+            <a:avLst/>
+          </a:prstGeom>
+          <a:noFill/>
+          <a:ln/>
+        </p:spPr>
+        <p:txBody>
+          <a:bodyPr wrap="square" lIns="0" tIns="0" rIns="0" bIns="0" rtlCol="0" anchor="ctr"/>
+          <a:lstStyle/>
+          <a:p>
+            <a:pPr indent="0" marL="0">
+              <a:buNone/>
+            </a:pPr>
+            <a:r>
+              <a:rPr lang="en-US" sz="950" dirty="0">
+                <a:solidFill>
+                  <a:srgbClr val="718096"/>
+                </a:solidFill>
+                <a:latin typeface="Pretendard" pitchFamily="34" charset="0"/>
+                <a:ea typeface="Pretendard" pitchFamily="34" charset="-122"/>
+                <a:cs typeface="Pretendard" pitchFamily="34" charset="-120"/>
+              </a:rPr>
+              <a:t>순수익(매월)</a:t>
+            </a:r>
+            <a:endParaRPr lang="en-US" sz="950" dirty="0"/>
+          </a:p>
+        </p:txBody>
+      </p:sp>
+      <p:sp>
+        <p:nvSpPr>
+          <p:cNvPr id="12" name="Text 10"/>
+          <p:cNvSpPr/>
+          <p:nvPr/>
+        </p:nvSpPr>
+        <p:spPr>
+          <a:xfrm>
+            <a:off x="4472330" y="1901952"/>
+            <a:ext cx="3247034" cy="402336"/>
+          </a:xfrm>
+          <a:prstGeom prst="rect">
+            <a:avLst/>
+          </a:prstGeom>
+          <a:noFill/>
+          <a:ln/>
+        </p:spPr>
+        <p:txBody>
+          <a:bodyPr wrap="square" lIns="0" tIns="0" rIns="0" bIns="0" rtlCol="0" anchor="ctr">
+            <a:normAutofit/>
+          </a:bodyPr>
+          <a:lstStyle/>
+          <a:p>
+            <a:pPr indent="0" marL="0">
+              <a:buNone/>
+            </a:pPr>
+            <a:r>
+              <a:rPr lang="en-US" sz="2200" b="1" dirty="0">
+                <a:solidFill>
+                  <a:srgbClr val="10161F"/>
+                </a:solidFill>
+                <a:latin typeface="Pretendard" pitchFamily="34" charset="0"/>
+                <a:ea typeface="Pretendard" pitchFamily="34" charset="-122"/>
+                <a:cs typeface="Pretendard" pitchFamily="34" charset="-120"/>
+              </a:rPr>
+              <a:t>약 3,650만 원</a:t>
+            </a:r>
+            <a:endParaRPr lang="en-US" sz="2200" dirty="0"/>
+          </a:p>
+        </p:txBody>
+      </p:sp>
+      <p:sp>
+        <p:nvSpPr>
+          <p:cNvPr id="13" name="Shape 11"/>
+          <p:cNvSpPr/>
+          <p:nvPr/>
+        </p:nvSpPr>
+        <p:spPr>
+          <a:xfrm>
+            <a:off x="8048549" y="1554480"/>
+            <a:ext cx="3576218" cy="1188720"/>
+          </a:xfrm>
+          <a:prstGeom prst="roundRect">
+            <a:avLst>
+              <a:gd name="adj" fmla="val 4615"/>
+            </a:avLst>
+          </a:prstGeom>
+          <a:solidFill>
+            <a:srgbClr val="F7FAFC"/>
+          </a:solidFill>
+          <a:ln w="6350">
+            <a:solidFill>
+              <a:srgbClr val="CBD5E0"/>
+            </a:solidFill>
+            <a:prstDash val="solid"/>
+          </a:ln>
+        </p:spPr>
+      </p:sp>
+      <p:sp>
+        <p:nvSpPr>
+          <p:cNvPr id="14" name="Text 12"/>
+          <p:cNvSpPr/>
+          <p:nvPr/>
+        </p:nvSpPr>
+        <p:spPr>
+          <a:xfrm>
+            <a:off x="8213141" y="1682496"/>
+            <a:ext cx="3247034" cy="201168"/>
+          </a:xfrm>
+          <a:prstGeom prst="rect">
+            <a:avLst/>
+          </a:prstGeom>
+          <a:noFill/>
+          <a:ln/>
+        </p:spPr>
+        <p:txBody>
+          <a:bodyPr wrap="square" lIns="0" tIns="0" rIns="0" bIns="0" rtlCol="0" anchor="ctr"/>
+          <a:lstStyle/>
+          <a:p>
+            <a:pPr indent="0" marL="0">
+              <a:buNone/>
+            </a:pPr>
+            <a:r>
+              <a:rPr lang="en-US" sz="950" dirty="0">
+                <a:solidFill>
+                  <a:srgbClr val="718096"/>
+                </a:solidFill>
+                <a:latin typeface="Pretendard" pitchFamily="34" charset="0"/>
+                <a:ea typeface="Pretendard" pitchFamily="34" charset="-122"/>
+                <a:cs typeface="Pretendard" pitchFamily="34" charset="-120"/>
+              </a:rPr>
+              <a:t>레버리지 수익률</a:t>
+            </a:r>
+            <a:endParaRPr lang="en-US" sz="950" dirty="0"/>
+          </a:p>
+        </p:txBody>
+      </p:sp>
+      <p:sp>
+        <p:nvSpPr>
+          <p:cNvPr id="15" name="Text 13"/>
+          <p:cNvSpPr/>
+          <p:nvPr/>
+        </p:nvSpPr>
+        <p:spPr>
+          <a:xfrm>
+            <a:off x="8213141" y="1901952"/>
+            <a:ext cx="3247034" cy="402336"/>
+          </a:xfrm>
+          <a:prstGeom prst="rect">
+            <a:avLst/>
+          </a:prstGeom>
+          <a:noFill/>
+          <a:ln/>
+        </p:spPr>
+        <p:txBody>
+          <a:bodyPr wrap="square" lIns="0" tIns="0" rIns="0" bIns="0" rtlCol="0" anchor="ctr">
+            <a:normAutofit/>
+          </a:bodyPr>
+          <a:lstStyle/>
+          <a:p>
+            <a:pPr indent="0" marL="0">
+              <a:buNone/>
+            </a:pPr>
+            <a:r>
+              <a:rPr lang="en-US" sz="2200" b="1" dirty="0">
+                <a:solidFill>
+                  <a:srgbClr val="10161F"/>
+                </a:solidFill>
+                <a:latin typeface="Pretendard" pitchFamily="34" charset="0"/>
+                <a:ea typeface="Pretendard" pitchFamily="34" charset="-122"/>
+                <a:cs typeface="Pretendard" pitchFamily="34" charset="-120"/>
+              </a:rPr>
+              <a:t>약 5.8%</a:t>
+            </a:r>
+            <a:endParaRPr lang="en-US" sz="2200" dirty="0"/>
+          </a:p>
+        </p:txBody>
+      </p:sp>
+      <p:sp>
+        <p:nvSpPr>
+          <p:cNvPr id="16" name="Shape 14"/>
+          <p:cNvSpPr/>
+          <p:nvPr/>
+        </p:nvSpPr>
+        <p:spPr>
+          <a:xfrm>
+            <a:off x="566928" y="2999232"/>
+            <a:ext cx="11057839" cy="1280160"/>
+          </a:xfrm>
+          <a:prstGeom prst="roundRect">
+            <a:avLst>
+              <a:gd name="adj" fmla="val 4286"/>
+            </a:avLst>
+          </a:prstGeom>
+          <a:solidFill>
+            <a:srgbClr val="BEE3F8"/>
+          </a:solidFill>
+          <a:ln/>
+        </p:spPr>
+      </p:sp>
+      <p:sp>
+        <p:nvSpPr>
+          <p:cNvPr id="17" name="Shape 15"/>
+          <p:cNvSpPr/>
+          <p:nvPr/>
+        </p:nvSpPr>
+        <p:spPr>
+          <a:xfrm>
+            <a:off x="566928" y="3054096"/>
+            <a:ext cx="36576" cy="1170432"/>
+          </a:xfrm>
+          <a:prstGeom prst="rect">
+            <a:avLst/>
+          </a:prstGeom>
+          <a:solidFill>
+            <a:srgbClr val="2B6CB0"/>
+          </a:solidFill>
+          <a:ln/>
+        </p:spPr>
+      </p:sp>
+      <p:sp>
+        <p:nvSpPr>
+          <p:cNvPr id="18" name="Text 16"/>
+          <p:cNvSpPr/>
+          <p:nvPr/>
+        </p:nvSpPr>
+        <p:spPr>
+          <a:xfrm>
+            <a:off x="749808" y="3108960"/>
+            <a:ext cx="10728655" cy="201168"/>
+          </a:xfrm>
+          <a:prstGeom prst="rect">
+            <a:avLst/>
+          </a:prstGeom>
+          <a:noFill/>
+          <a:ln/>
+        </p:spPr>
+        <p:txBody>
+          <a:bodyPr wrap="square" lIns="0" tIns="0" rIns="0" bIns="0" rtlCol="0" anchor="ctr"/>
+          <a:lstStyle/>
+          <a:p>
+            <a:pPr indent="0" marL="0">
+              <a:buNone/>
+            </a:pPr>
+            <a:r>
+              <a:rPr lang="en-US" sz="1050" b="1" dirty="0">
+                <a:solidFill>
+                  <a:srgbClr val="2B6CB0"/>
+                </a:solidFill>
+                <a:latin typeface="Pretendard" pitchFamily="34" charset="0"/>
+                <a:ea typeface="Pretendard" pitchFamily="34" charset="-122"/>
+                <a:cs typeface="Pretendard" pitchFamily="34" charset="-120"/>
+              </a:rPr>
+              <a:t>투자 가치 제안</a:t>
+            </a:r>
+            <a:endParaRPr lang="en-US" sz="1050" dirty="0"/>
+          </a:p>
+        </p:txBody>
+      </p:sp>
+      <p:sp>
+        <p:nvSpPr>
+          <p:cNvPr id="19" name="Text 17"/>
+          <p:cNvSpPr/>
+          <p:nvPr/>
+        </p:nvSpPr>
+        <p:spPr>
+          <a:xfrm>
+            <a:off x="749808" y="3328416"/>
+            <a:ext cx="10728655" cy="877824"/>
+          </a:xfrm>
+          <a:prstGeom prst="rect">
+            <a:avLst/>
+          </a:prstGeom>
+          <a:noFill/>
+          <a:ln/>
+        </p:spPr>
+        <p:txBody>
+          <a:bodyPr wrap="square" lIns="0" tIns="0" rIns="0" bIns="0" rtlCol="0" anchor="t"/>
           <a:lstStyle/>
           <a:p>
             <a:pPr indent="0" marL="0">
@@ -11097,49 +10979,7 @@
               <a:buNone/>
             </a:pPr>
             <a:r>
-              <a:rPr lang="en-US" sz="1350" dirty="0">
-                <a:solidFill>
-                  <a:srgbClr val="718096"/>
-                </a:solidFill>
-                <a:latin typeface="Pretendard" pitchFamily="34" charset="0"/>
-                <a:ea typeface="Pretendard" pitchFamily="34" charset="-122"/>
-                <a:cs typeface="Pretendard" pitchFamily="34" charset="-120"/>
-              </a:rPr>
-              <a:t>2F</a:t>
-            </a:r>
-            <a:endParaRPr lang="en-US" sz="1350" dirty="0"/>
-          </a:p>
-        </p:txBody>
-      </p:sp>
-      <p:sp>
-        <p:nvSpPr>
-          <p:cNvPr id="11" name="Text 9"/>
-          <p:cNvSpPr/>
-          <p:nvPr/>
-        </p:nvSpPr>
-        <p:spPr>
-          <a:xfrm>
-            <a:off x="3172968" y="2084832"/>
-            <a:ext cx="4251960" cy="438912"/>
-          </a:xfrm>
-          <a:prstGeom prst="rect">
-            <a:avLst/>
-          </a:prstGeom>
-          <a:noFill/>
-          <a:ln/>
-        </p:spPr>
-        <p:txBody>
-          <a:bodyPr wrap="square" lIns="0" tIns="0" rIns="0" bIns="0" rtlCol="0" anchor="ctr"/>
-          <a:lstStyle/>
-          <a:p>
-            <a:pPr indent="0" marL="0">
-              <a:lnSpc>
-                <a:spcPct val="120000"/>
-              </a:lnSpc>
-              <a:buNone/>
-            </a:pPr>
-            <a:r>
-              <a:rPr lang="en-US" sz="1350" b="1" dirty="0">
+              <a:rPr lang="en-US" sz="930" dirty="0">
                 <a:solidFill>
                   <a:srgbClr val="10161F"/>
                 </a:solidFill>
@@ -11147,142 +10987,7 @@
                 <a:ea typeface="Pretendard" pitchFamily="34" charset="-122"/>
                 <a:cs typeface="Pretendard" pitchFamily="34" charset="-120"/>
               </a:rPr>
-              <a:t>안과 (2억)</a:t>
-            </a:r>
-            <a:endParaRPr lang="en-US" sz="1350" dirty="0"/>
-          </a:p>
-        </p:txBody>
-      </p:sp>
-      <p:sp>
-        <p:nvSpPr>
-          <p:cNvPr id="12" name="Shape 10"/>
-          <p:cNvSpPr/>
-          <p:nvPr/>
-        </p:nvSpPr>
-        <p:spPr>
-          <a:xfrm>
-            <a:off x="7604608" y="1371600"/>
-            <a:ext cx="0" cy="4754880"/>
-          </a:xfrm>
-          <a:prstGeom prst="line">
-            <a:avLst/>
-          </a:prstGeom>
-          <a:noFill/>
-          <a:ln w="8890">
-            <a:solidFill>
-              <a:srgbClr val="B98A2E"/>
-            </a:solidFill>
-            <a:prstDash val="solid"/>
-          </a:ln>
-        </p:spPr>
-      </p:sp>
-      <p:sp>
-        <p:nvSpPr>
-          <p:cNvPr id="13" name="Shape 11"/>
-          <p:cNvSpPr/>
-          <p:nvPr/>
-        </p:nvSpPr>
-        <p:spPr>
-          <a:xfrm>
-            <a:off x="7784287" y="1645920"/>
-            <a:ext cx="3840480" cy="1645920"/>
-          </a:xfrm>
-          <a:prstGeom prst="roundRect">
-            <a:avLst>
-              <a:gd name="adj" fmla="val 3333"/>
-            </a:avLst>
-          </a:prstGeom>
-          <a:solidFill>
-            <a:srgbClr val="F3EBDA"/>
-          </a:solidFill>
-          <a:ln/>
-        </p:spPr>
-      </p:sp>
-      <p:sp>
-        <p:nvSpPr>
-          <p:cNvPr id="14" name="Shape 12"/>
-          <p:cNvSpPr/>
-          <p:nvPr/>
-        </p:nvSpPr>
-        <p:spPr>
-          <a:xfrm>
-            <a:off x="7784287" y="1700784"/>
-            <a:ext cx="36576" cy="1536192"/>
-          </a:xfrm>
-          <a:prstGeom prst="rect">
-            <a:avLst/>
-          </a:prstGeom>
-          <a:solidFill>
-            <a:srgbClr val="977024"/>
-          </a:solidFill>
-          <a:ln/>
-        </p:spPr>
-      </p:sp>
-      <p:sp>
-        <p:nvSpPr>
-          <p:cNvPr id="15" name="Text 13"/>
-          <p:cNvSpPr/>
-          <p:nvPr/>
-        </p:nvSpPr>
-        <p:spPr>
-          <a:xfrm>
-            <a:off x="7967167" y="1755648"/>
-            <a:ext cx="3511296" cy="201168"/>
-          </a:xfrm>
-          <a:prstGeom prst="rect">
-            <a:avLst/>
-          </a:prstGeom>
-          <a:noFill/>
-          <a:ln/>
-        </p:spPr>
-        <p:txBody>
-          <a:bodyPr wrap="square" lIns="0" tIns="0" rIns="0" bIns="0" rtlCol="0" anchor="ctr"/>
-          <a:lstStyle/>
-          <a:p>
-            <a:pPr indent="0" marL="0">
-              <a:buNone/>
-            </a:pPr>
-            <a:endParaRPr lang="en-US" sz="1050" dirty="0"/>
-          </a:p>
-        </p:txBody>
-      </p:sp>
-      <p:sp>
-        <p:nvSpPr>
-          <p:cNvPr id="16" name="Text 14"/>
-          <p:cNvSpPr/>
-          <p:nvPr/>
-        </p:nvSpPr>
-        <p:spPr>
-          <a:xfrm>
-            <a:off x="7967167" y="1975104"/>
-            <a:ext cx="3511296" cy="1243584"/>
-          </a:xfrm>
-          <a:prstGeom prst="rect">
-            <a:avLst/>
-          </a:prstGeom>
-          <a:noFill/>
-          <a:ln/>
-        </p:spPr>
-        <p:txBody>
-          <a:bodyPr wrap="square" lIns="0" tIns="0" rIns="0" bIns="0" rtlCol="0" anchor="t"/>
-          <a:lstStyle/>
-          <a:p>
-            <a:pPr indent="0" marL="0">
-              <a:lnSpc>
-                <a:spcPct val="120000"/>
-              </a:lnSpc>
-              <a:buNone/>
-            </a:pPr>
-            <a:r>
-              <a:rPr lang="en-US" sz="930" dirty="0">
-                <a:solidFill>
-                  <a:srgbClr val="10161F"/>
-                </a:solidFill>
-                <a:latin typeface="Pretendard" pitchFamily="34" charset="0"/>
-                <a:ea typeface="Pretendard" pitchFamily="34" charset="-122"/>
-                <a:cs typeface="Pretendard" pitchFamily="34" charset="-120"/>
-              </a:rPr>
-              <a:t>전층 메디컬 만실 운영 중이며 WALE 평균 3.5년입니다.</a:t>
+              <a:t>연 순영업소득(NOI) 약 7.14억 원, 매입 Cap Rate 4.62%입니다.</a:t>
             </a:r>
             <a:endParaRPr lang="en-US" sz="930" dirty="0"/>
           </a:p>
@@ -11290,7 +10995,7 @@
       </p:sp>
       <p:sp>
         <p:nvSpPr>
-          <p:cNvPr id="17" name="Text 15"/>
+          <p:cNvPr id="20" name="Text 18"/>
           <p:cNvSpPr/>
           <p:nvPr/>
         </p:nvSpPr>
@@ -11329,7 +11034,7 @@
       </p:sp>
       <p:sp>
         <p:nvSpPr>
-          <p:cNvPr id="18" name="Text 16"/>
+          <p:cNvPr id="21" name="Text 19"/>
           <p:cNvSpPr/>
           <p:nvPr/>
         </p:nvSpPr>
@@ -11360,7 +11065,7 @@
                 <a:ea typeface="Arial" pitchFamily="34" charset="-122"/>
                 <a:cs typeface="Arial" pitchFamily="34" charset="-120"/>
               </a:rPr>
-              <a:t>6</a:t>
+              <a:t>7</a:t>
             </a:r>
             <a:endParaRPr lang="en-US" sz="900" dirty="0"/>
           </a:p>
@@ -11451,7 +11156,7 @@
                 <a:ea typeface="Arial" pitchFamily="34" charset="-122"/>
                 <a:cs typeface="Arial" pitchFamily="34" charset="-120"/>
               </a:rPr>
-              <a:t>07</a:t>
+              <a:t>08</a:t>
             </a:r>
             <a:endParaRPr lang="en-US" sz="1300" dirty="0"/>
           </a:p>
@@ -11490,7 +11195,7 @@
                 <a:ea typeface="Arial" pitchFamily="34" charset="-122"/>
                 <a:cs typeface="Arial" pitchFamily="34" charset="-120"/>
               </a:rPr>
-              <a:t>Profit</a:t>
+              <a:t>Thesis</a:t>
             </a:r>
             <a:endParaRPr lang="en-US" sz="950" dirty="0"/>
           </a:p>
@@ -11529,7 +11234,7 @@
                 <a:ea typeface="Pretendard" pitchFamily="34" charset="-122"/>
                 <a:cs typeface="Pretendard" pitchFamily="34" charset="-120"/>
               </a:rPr>
-              <a:t>수익성 분석</a:t>
+              <a:t>투자 논거</a:t>
             </a:r>
             <a:endParaRPr lang="en-US" sz="2300" dirty="0"/>
           </a:p>
@@ -11543,16 +11248,20 @@
         </p:nvSpPr>
         <p:spPr>
           <a:xfrm>
-            <a:off x="566928" y="1325880"/>
-            <a:ext cx="11057839" cy="0"/>
-          </a:xfrm>
-          <a:prstGeom prst="line">
-            <a:avLst/>
-          </a:prstGeom>
-          <a:noFill/>
-          <a:ln w="19050">
+            <a:off x="566928" y="4983480"/>
+            <a:ext cx="11057839" cy="804672"/>
+          </a:xfrm>
+          <a:prstGeom prst="roundRect">
+            <a:avLst>
+              <a:gd name="adj" fmla="val 6818"/>
+            </a:avLst>
+          </a:prstGeom>
+          <a:solidFill>
+            <a:srgbClr val="F3EBDA"/>
+          </a:solidFill>
+          <a:ln w="10160">
             <a:solidFill>
-              <a:srgbClr val="B98A2E"/>
+              <a:srgbClr val="D9B668"/>
             </a:solidFill>
             <a:prstDash val="solid"/>
           </a:ln>
@@ -11560,30 +11269,42 @@
       </p:sp>
       <p:sp>
         <p:nvSpPr>
-          <p:cNvPr id="7" name="Shape 5"/>
-          <p:cNvSpPr/>
-          <p:nvPr/>
-        </p:nvSpPr>
-        <p:spPr>
-          <a:xfrm>
-            <a:off x="566928" y="1554480"/>
-            <a:ext cx="3576218" cy="1188720"/>
-          </a:xfrm>
-          <a:prstGeom prst="roundRect">
-            <a:avLst>
-              <a:gd name="adj" fmla="val 4615"/>
-            </a:avLst>
-          </a:prstGeom>
-          <a:solidFill>
-            <a:srgbClr val="F7FAFC"/>
-          </a:solidFill>
-          <a:ln w="6350">
-            <a:solidFill>
-              <a:srgbClr val="CBD5E0"/>
-            </a:solidFill>
-            <a:prstDash val="solid"/>
-          </a:ln>
-        </p:spPr>
+          <p:cNvPr id="7" name="Text 5"/>
+          <p:cNvSpPr/>
+          <p:nvPr/>
+        </p:nvSpPr>
+        <p:spPr>
+          <a:xfrm>
+            <a:off x="749808" y="5093208"/>
+            <a:ext cx="1691640" cy="256032"/>
+          </a:xfrm>
+          <a:prstGeom prst="rect">
+            <a:avLst/>
+          </a:prstGeom>
+          <a:noFill/>
+          <a:ln/>
+        </p:spPr>
+        <p:txBody>
+          <a:bodyPr wrap="square" lIns="0" tIns="0" rIns="0" bIns="0" rtlCol="0" anchor="ctr"/>
+          <a:lstStyle/>
+          <a:p>
+            <a:pPr indent="0" marL="0">
+              <a:buNone/>
+            </a:pPr>
+            <a:r>
+              <a:rPr lang="en-US" sz="1050" b="1" dirty="0">
+                <a:solidFill>
+                  <a:srgbClr val="977024"/>
+                </a:solidFill>
+                <a:latin typeface="Pretendard" pitchFamily="34" charset="0"/>
+                <a:ea typeface="Pretendard" pitchFamily="34" charset="-122"/>
+                <a:cs typeface="Pretendard" pitchFamily="34" charset="-120"/>
+              </a:rPr>
+              <a:t>종합 가치 제안</a:t>
+            </a:r>
+            <a:endParaRPr lang="en-US" sz="1050" dirty="0"/>
+          </a:p>
+        </p:txBody>
       </p:sp>
       <p:sp>
         <p:nvSpPr>
@@ -11593,402 +11314,27 @@
         </p:nvSpPr>
         <p:spPr>
           <a:xfrm>
-            <a:off x="731520" y="1682496"/>
-            <a:ext cx="3247034" cy="201168"/>
-          </a:xfrm>
-          <a:prstGeom prst="rect">
-            <a:avLst/>
-          </a:prstGeom>
-          <a:noFill/>
-          <a:ln/>
-        </p:spPr>
-        <p:txBody>
-          <a:bodyPr wrap="square" lIns="0" tIns="0" rIns="0" bIns="0" rtlCol="0" anchor="ctr"/>
-          <a:lstStyle/>
-          <a:p>
-            <a:pPr indent="0" marL="0">
-              <a:buNone/>
-            </a:pPr>
-            <a:r>
-              <a:rPr lang="en-US" sz="950" dirty="0">
-                <a:solidFill>
-                  <a:srgbClr val="718096"/>
-                </a:solidFill>
-                <a:latin typeface="Pretendard" pitchFamily="34" charset="0"/>
-                <a:ea typeface="Pretendard" pitchFamily="34" charset="-122"/>
-                <a:cs typeface="Pretendard" pitchFamily="34" charset="-120"/>
-              </a:rPr>
-              <a:t>실투자금</a:t>
-            </a:r>
-            <a:endParaRPr lang="en-US" sz="950" dirty="0"/>
-          </a:p>
-        </p:txBody>
-      </p:sp>
-      <p:sp>
-        <p:nvSpPr>
-          <p:cNvPr id="9" name="Text 7"/>
-          <p:cNvSpPr/>
-          <p:nvPr/>
-        </p:nvSpPr>
-        <p:spPr>
-          <a:xfrm>
-            <a:off x="731520" y="1901952"/>
-            <a:ext cx="3247034" cy="402336"/>
-          </a:xfrm>
-          <a:prstGeom prst="rect">
-            <a:avLst/>
-          </a:prstGeom>
-          <a:noFill/>
-          <a:ln/>
-        </p:spPr>
-        <p:txBody>
-          <a:bodyPr wrap="square" lIns="0" tIns="0" rIns="0" bIns="0" rtlCol="0" anchor="ctr">
-            <a:normAutofit/>
-          </a:bodyPr>
-          <a:lstStyle/>
-          <a:p>
-            <a:pPr indent="0" marL="0">
-              <a:buNone/>
-            </a:pPr>
-            <a:r>
-              <a:rPr lang="en-US" sz="2200" b="1" dirty="0">
-                <a:solidFill>
-                  <a:srgbClr val="10161F"/>
-                </a:solidFill>
-                <a:latin typeface="Pretendard" pitchFamily="34" charset="0"/>
-                <a:ea typeface="Pretendard" pitchFamily="34" charset="-122"/>
-                <a:cs typeface="Pretendard" pitchFamily="34" charset="-120"/>
-              </a:rPr>
-              <a:t>약 69억 원</a:t>
-            </a:r>
-            <a:endParaRPr lang="en-US" sz="2200" dirty="0"/>
-          </a:p>
-        </p:txBody>
-      </p:sp>
-      <p:sp>
-        <p:nvSpPr>
-          <p:cNvPr id="10" name="Shape 8"/>
-          <p:cNvSpPr/>
-          <p:nvPr/>
-        </p:nvSpPr>
-        <p:spPr>
-          <a:xfrm>
-            <a:off x="4307738" y="1554480"/>
-            <a:ext cx="3576218" cy="1188720"/>
-          </a:xfrm>
-          <a:prstGeom prst="roundRect">
-            <a:avLst>
-              <a:gd name="adj" fmla="val 4615"/>
-            </a:avLst>
-          </a:prstGeom>
-          <a:solidFill>
-            <a:srgbClr val="F7FAFC"/>
-          </a:solidFill>
-          <a:ln w="6350">
-            <a:solidFill>
-              <a:srgbClr val="CBD5E0"/>
-            </a:solidFill>
-            <a:prstDash val="solid"/>
-          </a:ln>
-        </p:spPr>
-      </p:sp>
-      <p:sp>
-        <p:nvSpPr>
-          <p:cNvPr id="11" name="Text 9"/>
-          <p:cNvSpPr/>
-          <p:nvPr/>
-        </p:nvSpPr>
-        <p:spPr>
-          <a:xfrm>
-            <a:off x="4472330" y="1682496"/>
-            <a:ext cx="3247034" cy="201168"/>
-          </a:xfrm>
-          <a:prstGeom prst="rect">
-            <a:avLst/>
-          </a:prstGeom>
-          <a:noFill/>
-          <a:ln/>
-        </p:spPr>
-        <p:txBody>
-          <a:bodyPr wrap="square" lIns="0" tIns="0" rIns="0" bIns="0" rtlCol="0" anchor="ctr"/>
-          <a:lstStyle/>
-          <a:p>
-            <a:pPr indent="0" marL="0">
-              <a:buNone/>
-            </a:pPr>
-            <a:r>
-              <a:rPr lang="en-US" sz="950" dirty="0">
-                <a:solidFill>
-                  <a:srgbClr val="718096"/>
-                </a:solidFill>
-                <a:latin typeface="Pretendard" pitchFamily="34" charset="0"/>
-                <a:ea typeface="Pretendard" pitchFamily="34" charset="-122"/>
-                <a:cs typeface="Pretendard" pitchFamily="34" charset="-120"/>
-              </a:rPr>
-              <a:t>순수익(매월)</a:t>
-            </a:r>
-            <a:endParaRPr lang="en-US" sz="950" dirty="0"/>
-          </a:p>
-        </p:txBody>
-      </p:sp>
-      <p:sp>
-        <p:nvSpPr>
-          <p:cNvPr id="12" name="Text 10"/>
-          <p:cNvSpPr/>
-          <p:nvPr/>
-        </p:nvSpPr>
-        <p:spPr>
-          <a:xfrm>
-            <a:off x="4472330" y="1901952"/>
-            <a:ext cx="3247034" cy="402336"/>
-          </a:xfrm>
-          <a:prstGeom prst="rect">
-            <a:avLst/>
-          </a:prstGeom>
-          <a:noFill/>
-          <a:ln/>
-        </p:spPr>
-        <p:txBody>
-          <a:bodyPr wrap="square" lIns="0" tIns="0" rIns="0" bIns="0" rtlCol="0" anchor="ctr">
-            <a:normAutofit/>
-          </a:bodyPr>
-          <a:lstStyle/>
-          <a:p>
-            <a:pPr indent="0" marL="0">
-              <a:buNone/>
-            </a:pPr>
-            <a:r>
-              <a:rPr lang="en-US" sz="2200" b="1" dirty="0">
-                <a:solidFill>
-                  <a:srgbClr val="10161F"/>
-                </a:solidFill>
-                <a:latin typeface="Pretendard" pitchFamily="34" charset="0"/>
-                <a:ea typeface="Pretendard" pitchFamily="34" charset="-122"/>
-                <a:cs typeface="Pretendard" pitchFamily="34" charset="-120"/>
-              </a:rPr>
-              <a:t>약 3,650만 원</a:t>
-            </a:r>
-            <a:endParaRPr lang="en-US" sz="2200" dirty="0"/>
-          </a:p>
-        </p:txBody>
-      </p:sp>
-      <p:sp>
-        <p:nvSpPr>
-          <p:cNvPr id="13" name="Shape 11"/>
-          <p:cNvSpPr/>
-          <p:nvPr/>
-        </p:nvSpPr>
-        <p:spPr>
-          <a:xfrm>
-            <a:off x="8048549" y="1554480"/>
-            <a:ext cx="3576218" cy="1188720"/>
-          </a:xfrm>
-          <a:prstGeom prst="roundRect">
-            <a:avLst>
-              <a:gd name="adj" fmla="val 4615"/>
-            </a:avLst>
-          </a:prstGeom>
-          <a:solidFill>
-            <a:srgbClr val="F7FAFC"/>
-          </a:solidFill>
-          <a:ln w="6350">
-            <a:solidFill>
-              <a:srgbClr val="CBD5E0"/>
-            </a:solidFill>
-            <a:prstDash val="solid"/>
-          </a:ln>
-        </p:spPr>
-      </p:sp>
-      <p:sp>
-        <p:nvSpPr>
-          <p:cNvPr id="14" name="Text 12"/>
-          <p:cNvSpPr/>
-          <p:nvPr/>
-        </p:nvSpPr>
-        <p:spPr>
-          <a:xfrm>
-            <a:off x="8213141" y="1682496"/>
-            <a:ext cx="3247034" cy="201168"/>
-          </a:xfrm>
-          <a:prstGeom prst="rect">
-            <a:avLst/>
-          </a:prstGeom>
-          <a:noFill/>
-          <a:ln/>
-        </p:spPr>
-        <p:txBody>
-          <a:bodyPr wrap="square" lIns="0" tIns="0" rIns="0" bIns="0" rtlCol="0" anchor="ctr"/>
-          <a:lstStyle/>
-          <a:p>
-            <a:pPr indent="0" marL="0">
-              <a:buNone/>
-            </a:pPr>
-            <a:r>
-              <a:rPr lang="en-US" sz="950" dirty="0">
-                <a:solidFill>
-                  <a:srgbClr val="718096"/>
-                </a:solidFill>
-                <a:latin typeface="Pretendard" pitchFamily="34" charset="0"/>
-                <a:ea typeface="Pretendard" pitchFamily="34" charset="-122"/>
-                <a:cs typeface="Pretendard" pitchFamily="34" charset="-120"/>
-              </a:rPr>
-              <a:t>레버리지 수익률</a:t>
-            </a:r>
-            <a:endParaRPr lang="en-US" sz="950" dirty="0"/>
-          </a:p>
-        </p:txBody>
-      </p:sp>
-      <p:sp>
-        <p:nvSpPr>
-          <p:cNvPr id="15" name="Text 13"/>
-          <p:cNvSpPr/>
-          <p:nvPr/>
-        </p:nvSpPr>
-        <p:spPr>
-          <a:xfrm>
-            <a:off x="8213141" y="1901952"/>
-            <a:ext cx="3247034" cy="402336"/>
-          </a:xfrm>
-          <a:prstGeom prst="rect">
-            <a:avLst/>
-          </a:prstGeom>
-          <a:noFill/>
-          <a:ln/>
-        </p:spPr>
-        <p:txBody>
-          <a:bodyPr wrap="square" lIns="0" tIns="0" rIns="0" bIns="0" rtlCol="0" anchor="ctr">
-            <a:normAutofit/>
-          </a:bodyPr>
-          <a:lstStyle/>
-          <a:p>
-            <a:pPr indent="0" marL="0">
-              <a:buNone/>
-            </a:pPr>
-            <a:r>
-              <a:rPr lang="en-US" sz="2200" b="1" dirty="0">
-                <a:solidFill>
-                  <a:srgbClr val="10161F"/>
-                </a:solidFill>
-                <a:latin typeface="Pretendard" pitchFamily="34" charset="0"/>
-                <a:ea typeface="Pretendard" pitchFamily="34" charset="-122"/>
-                <a:cs typeface="Pretendard" pitchFamily="34" charset="-120"/>
-              </a:rPr>
-              <a:t>약 5.8%</a:t>
-            </a:r>
-            <a:endParaRPr lang="en-US" sz="2200" dirty="0"/>
-          </a:p>
-        </p:txBody>
-      </p:sp>
-      <p:sp>
-        <p:nvSpPr>
-          <p:cNvPr id="16" name="Shape 14"/>
-          <p:cNvSpPr/>
-          <p:nvPr/>
-        </p:nvSpPr>
-        <p:spPr>
-          <a:xfrm>
-            <a:off x="566928" y="2999232"/>
-            <a:ext cx="11057839" cy="1280160"/>
-          </a:xfrm>
-          <a:prstGeom prst="roundRect">
-            <a:avLst>
-              <a:gd name="adj" fmla="val 4286"/>
-            </a:avLst>
-          </a:prstGeom>
-          <a:solidFill>
-            <a:srgbClr val="BEE3F8"/>
-          </a:solidFill>
-          <a:ln/>
-        </p:spPr>
-      </p:sp>
-      <p:sp>
-        <p:nvSpPr>
-          <p:cNvPr id="17" name="Shape 15"/>
-          <p:cNvSpPr/>
-          <p:nvPr/>
-        </p:nvSpPr>
-        <p:spPr>
-          <a:xfrm>
-            <a:off x="566928" y="3054096"/>
-            <a:ext cx="36576" cy="1170432"/>
-          </a:xfrm>
-          <a:prstGeom prst="rect">
-            <a:avLst/>
-          </a:prstGeom>
-          <a:solidFill>
-            <a:srgbClr val="2B6CB0"/>
-          </a:solidFill>
-          <a:ln/>
-        </p:spPr>
-      </p:sp>
-      <p:sp>
-        <p:nvSpPr>
-          <p:cNvPr id="18" name="Text 16"/>
-          <p:cNvSpPr/>
-          <p:nvPr/>
-        </p:nvSpPr>
-        <p:spPr>
-          <a:xfrm>
-            <a:off x="749808" y="3108960"/>
-            <a:ext cx="10728655" cy="201168"/>
-          </a:xfrm>
-          <a:prstGeom prst="rect">
-            <a:avLst/>
-          </a:prstGeom>
-          <a:noFill/>
-          <a:ln/>
-        </p:spPr>
-        <p:txBody>
-          <a:bodyPr wrap="square" lIns="0" tIns="0" rIns="0" bIns="0" rtlCol="0" anchor="ctr"/>
-          <a:lstStyle/>
-          <a:p>
-            <a:pPr indent="0" marL="0">
-              <a:buNone/>
-            </a:pPr>
-            <a:r>
-              <a:rPr lang="en-US" sz="1050" b="1" dirty="0">
-                <a:solidFill>
-                  <a:srgbClr val="2B6CB0"/>
-                </a:solidFill>
-                <a:latin typeface="Pretendard" pitchFamily="34" charset="0"/>
-                <a:ea typeface="Pretendard" pitchFamily="34" charset="-122"/>
-                <a:cs typeface="Pretendard" pitchFamily="34" charset="-120"/>
-              </a:rPr>
-              <a:t>투자 가치 제안</a:t>
-            </a:r>
-            <a:endParaRPr lang="en-US" sz="1050" dirty="0"/>
-          </a:p>
-        </p:txBody>
-      </p:sp>
-      <p:sp>
-        <p:nvSpPr>
-          <p:cNvPr id="19" name="Text 17"/>
-          <p:cNvSpPr/>
-          <p:nvPr/>
-        </p:nvSpPr>
-        <p:spPr>
-          <a:xfrm>
-            <a:off x="749808" y="3328416"/>
-            <a:ext cx="10728655" cy="877824"/>
-          </a:xfrm>
-          <a:prstGeom prst="rect">
-            <a:avLst/>
-          </a:prstGeom>
-          <a:noFill/>
-          <a:ln/>
-        </p:spPr>
-        <p:txBody>
-          <a:bodyPr wrap="square" lIns="0" tIns="0" rIns="0" bIns="0" rtlCol="0" anchor="t"/>
+            <a:off x="2487168" y="5056632"/>
+            <a:ext cx="8954719" cy="658368"/>
+          </a:xfrm>
+          <a:prstGeom prst="rect">
+            <a:avLst/>
+          </a:prstGeom>
+          <a:noFill/>
+          <a:ln/>
+        </p:spPr>
+        <p:txBody>
+          <a:bodyPr wrap="square" lIns="0" tIns="0" rIns="0" bIns="0" rtlCol="0" anchor="ctr"/>
           <a:lstStyle/>
           <a:p>
             <a:pPr indent="0" marL="0">
               <a:lnSpc>
-                <a:spcPct val="120000"/>
+                <a:spcPct val="125000"/>
               </a:lnSpc>
               <a:buNone/>
             </a:pPr>
             <a:r>
-              <a:rPr lang="en-US" sz="930" dirty="0">
+              <a:rPr lang="en-US" sz="1100" dirty="0">
                 <a:solidFill>
                   <a:srgbClr val="10161F"/>
                 </a:solidFill>
@@ -11996,15 +11342,15 @@
                 <a:ea typeface="Pretendard" pitchFamily="34" charset="-122"/>
                 <a:cs typeface="Pretendard" pitchFamily="34" charset="-120"/>
               </a:rPr>
-              <a:t>연 순영업소득(NOI) 약 7.14억 원, 매입 Cap Rate 4.62%입니다.</a:t>
-            </a:r>
-            <a:endParaRPr lang="en-US" sz="930" dirty="0"/>
-          </a:p>
-        </p:txBody>
-      </p:sp>
-      <p:sp>
-        <p:nvSpPr>
-          <p:cNvPr id="20" name="Text 18"/>
+              <a:t>관점에서 안정적 월 임대수익과 우량 메디컬 테넌트를 보유한 핵심 투자 자산입니다.</a:t>
+            </a:r>
+            <a:endParaRPr lang="en-US" sz="1100" dirty="0"/>
+          </a:p>
+        </p:txBody>
+      </p:sp>
+      <p:sp>
+        <p:nvSpPr>
+          <p:cNvPr id="9" name="Text 7"/>
           <p:cNvSpPr/>
           <p:nvPr/>
         </p:nvSpPr>
@@ -12043,7 +11389,7 @@
       </p:sp>
       <p:sp>
         <p:nvSpPr>
-          <p:cNvPr id="21" name="Text 19"/>
+          <p:cNvPr id="10" name="Text 8"/>
           <p:cNvSpPr/>
           <p:nvPr/>
         </p:nvSpPr>
@@ -12074,7 +11420,7 @@
                 <a:ea typeface="Arial" pitchFamily="34" charset="-122"/>
                 <a:cs typeface="Arial" pitchFamily="34" charset="-120"/>
               </a:rPr>
-              <a:t>7</a:t>
+              <a:t>8</a:t>
             </a:r>
             <a:endParaRPr lang="en-US" sz="900" dirty="0"/>
           </a:p>
@@ -12165,7 +11511,7 @@
                 <a:ea typeface="Arial" pitchFamily="34" charset="-122"/>
                 <a:cs typeface="Arial" pitchFamily="34" charset="-120"/>
               </a:rPr>
-              <a:t>08</a:t>
+              <a:t>09</a:t>
             </a:r>
             <a:endParaRPr lang="en-US" sz="1300" dirty="0"/>
           </a:p>
@@ -12204,7 +11550,7 @@
                 <a:ea typeface="Arial" pitchFamily="34" charset="-122"/>
                 <a:cs typeface="Arial" pitchFamily="34" charset="-120"/>
               </a:rPr>
-              <a:t>Comps</a:t>
+              <a:t>Risk</a:t>
             </a:r>
             <a:endParaRPr lang="en-US" sz="950" dirty="0"/>
           </a:p>
@@ -12243,7 +11589,7 @@
                 <a:ea typeface="Pretendard" pitchFamily="34" charset="-122"/>
                 <a:cs typeface="Pretendard" pitchFamily="34" charset="-120"/>
               </a:rPr>
-              <a:t>비교사례</a:t>
+              <a:t>리스크</a:t>
             </a:r>
             <a:endParaRPr lang="en-US" sz="2300" dirty="0"/>
           </a:p>
@@ -12251,104 +11597,24 @@
       </p:sp>
       <p:sp>
         <p:nvSpPr>
-          <p:cNvPr id="6" name="Text 4"/>
-          <p:cNvSpPr/>
-          <p:nvPr/>
-        </p:nvSpPr>
-        <p:spPr>
-          <a:xfrm>
-            <a:off x="566928" y="1645920"/>
-            <a:ext cx="4201979" cy="402336"/>
-          </a:xfrm>
-          <a:prstGeom prst="rect">
-            <a:avLst/>
-          </a:prstGeom>
-          <a:noFill/>
-          <a:ln/>
-        </p:spPr>
-        <p:txBody>
-          <a:bodyPr wrap="square" lIns="0" tIns="0" rIns="0" bIns="0" rtlCol="0" anchor="ctr"/>
-          <a:lstStyle/>
-          <a:p>
-            <a:pPr indent="0" marL="0">
-              <a:lnSpc>
-                <a:spcPct val="120000"/>
-              </a:lnSpc>
-              <a:buNone/>
-            </a:pPr>
-            <a:r>
-              <a:rPr lang="en-US" sz="1400" dirty="0">
-                <a:solidFill>
-                  <a:srgbClr val="718096"/>
-                </a:solidFill>
-                <a:latin typeface="Pretendard" pitchFamily="34" charset="0"/>
-                <a:ea typeface="Pretendard" pitchFamily="34" charset="-122"/>
-                <a:cs typeface="Pretendard" pitchFamily="34" charset="-120"/>
-              </a:rPr>
-              <a:t>- 실투자금</a:t>
-            </a:r>
-            <a:endParaRPr lang="en-US" sz="1400" dirty="0"/>
-          </a:p>
-        </p:txBody>
-      </p:sp>
-      <p:sp>
-        <p:nvSpPr>
-          <p:cNvPr id="7" name="Text 5"/>
-          <p:cNvSpPr/>
-          <p:nvPr/>
-        </p:nvSpPr>
-        <p:spPr>
-          <a:xfrm>
-            <a:off x="4768907" y="1645920"/>
-            <a:ext cx="6855860" cy="402336"/>
-          </a:xfrm>
-          <a:prstGeom prst="rect">
-            <a:avLst/>
-          </a:prstGeom>
-          <a:noFill/>
-          <a:ln/>
-        </p:spPr>
-        <p:txBody>
-          <a:bodyPr wrap="square" lIns="0" tIns="0" rIns="0" bIns="0" rtlCol="0" anchor="ctr"/>
-          <a:lstStyle/>
-          <a:p>
-            <a:pPr indent="0" marL="0">
-              <a:lnSpc>
-                <a:spcPct val="120000"/>
-              </a:lnSpc>
-              <a:buNone/>
-            </a:pPr>
-            <a:r>
-              <a:rPr lang="en-US" sz="1400" b="1" dirty="0">
-                <a:solidFill>
-                  <a:srgbClr val="10161F"/>
-                </a:solidFill>
-                <a:latin typeface="Pretendard" pitchFamily="34" charset="0"/>
-                <a:ea typeface="Pretendard" pitchFamily="34" charset="-122"/>
-                <a:cs typeface="Pretendard" pitchFamily="34" charset="-120"/>
-              </a:rPr>
-              <a:t>약 69억 원</a:t>
-            </a:r>
-            <a:endParaRPr lang="en-US" sz="1400" dirty="0"/>
-          </a:p>
-        </p:txBody>
-      </p:sp>
-      <p:sp>
-        <p:nvSpPr>
-          <p:cNvPr id="8" name="Shape 6"/>
-          <p:cNvSpPr/>
-          <p:nvPr/>
-        </p:nvSpPr>
-        <p:spPr>
-          <a:xfrm>
-            <a:off x="566928" y="2048256"/>
-            <a:ext cx="11057839" cy="0"/>
-          </a:xfrm>
-          <a:prstGeom prst="line">
-            <a:avLst/>
-          </a:prstGeom>
-          <a:noFill/>
-          <a:ln w="3810">
+          <p:cNvPr id="6" name="Shape 4"/>
+          <p:cNvSpPr/>
+          <p:nvPr/>
+        </p:nvSpPr>
+        <p:spPr>
+          <a:xfrm>
+            <a:off x="566928" y="1417320"/>
+            <a:ext cx="5400904" cy="3657600"/>
+          </a:xfrm>
+          <a:prstGeom prst="roundRect">
+            <a:avLst>
+              <a:gd name="adj" fmla="val 1500"/>
+            </a:avLst>
+          </a:prstGeom>
+          <a:solidFill>
+            <a:srgbClr val="F7FAFC"/>
+          </a:solidFill>
+          <a:ln w="6350">
             <a:solidFill>
               <a:srgbClr val="CBD5E0"/>
             </a:solidFill>
@@ -12358,75 +11624,136 @@
       </p:sp>
       <p:sp>
         <p:nvSpPr>
+          <p:cNvPr id="7" name="Shape 5"/>
+          <p:cNvSpPr/>
+          <p:nvPr/>
+        </p:nvSpPr>
+        <p:spPr>
+          <a:xfrm>
+            <a:off x="566928" y="1417320"/>
+            <a:ext cx="5400904" cy="45720"/>
+          </a:xfrm>
+          <a:prstGeom prst="rect">
+            <a:avLst/>
+          </a:prstGeom>
+          <a:solidFill>
+            <a:srgbClr val="B98A2E"/>
+          </a:solidFill>
+          <a:ln/>
+        </p:spPr>
+      </p:sp>
+      <p:sp>
+        <p:nvSpPr>
+          <p:cNvPr id="8" name="Text 6"/>
+          <p:cNvSpPr/>
+          <p:nvPr/>
+        </p:nvSpPr>
+        <p:spPr>
+          <a:xfrm>
+            <a:off x="795528" y="1618488"/>
+            <a:ext cx="4943704" cy="292608"/>
+          </a:xfrm>
+          <a:prstGeom prst="rect">
+            <a:avLst/>
+          </a:prstGeom>
+          <a:noFill/>
+          <a:ln/>
+        </p:spPr>
+        <p:txBody>
+          <a:bodyPr wrap="square" lIns="0" tIns="0" rIns="0" bIns="0" rtlCol="0" anchor="ctr"/>
+          <a:lstStyle/>
+          <a:p>
+            <a:pPr indent="0" marL="0">
+              <a:buNone/>
+            </a:pPr>
+            <a:r>
+              <a:rPr lang="en-US" sz="1350" b="1" dirty="0">
+                <a:solidFill>
+                  <a:srgbClr val="977024"/>
+                </a:solidFill>
+                <a:latin typeface="Pretendard" pitchFamily="34" charset="0"/>
+                <a:ea typeface="Pretendard" pitchFamily="34" charset="-122"/>
+                <a:cs typeface="Pretendard" pitchFamily="34" charset="-120"/>
+              </a:rPr>
+              <a:t>메디컬 단일업종 집중</a:t>
+            </a:r>
+            <a:endParaRPr lang="en-US" sz="1350" dirty="0"/>
+          </a:p>
+        </p:txBody>
+      </p:sp>
+      <p:sp>
+        <p:nvSpPr>
           <p:cNvPr id="9" name="Text 7"/>
           <p:cNvSpPr/>
           <p:nvPr/>
         </p:nvSpPr>
         <p:spPr>
           <a:xfrm>
-            <a:off x="566928" y="2048256"/>
-            <a:ext cx="4201979" cy="402336"/>
-          </a:xfrm>
-          <a:prstGeom prst="rect">
-            <a:avLst/>
-          </a:prstGeom>
-          <a:noFill/>
-          <a:ln/>
-        </p:spPr>
-        <p:txBody>
-          <a:bodyPr wrap="square" lIns="0" tIns="0" rIns="0" bIns="0" rtlCol="0" anchor="ctr"/>
+            <a:off x="795528" y="1947672"/>
+            <a:ext cx="4943704" cy="365760"/>
+          </a:xfrm>
+          <a:prstGeom prst="rect">
+            <a:avLst/>
+          </a:prstGeom>
+          <a:noFill/>
+          <a:ln/>
+        </p:spPr>
+        <p:txBody>
+          <a:bodyPr wrap="square" lIns="0" tIns="0" rIns="0" bIns="0" rtlCol="0" anchor="ctr">
+            <a:normAutofit/>
+          </a:bodyPr>
           <a:lstStyle/>
           <a:p>
             <a:pPr indent="0" marL="0">
+              <a:buNone/>
+            </a:pPr>
+            <a:r>
+              <a:rPr lang="en-US" sz="1250" b="1" dirty="0">
+                <a:solidFill>
+                  <a:srgbClr val="10161F"/>
+                </a:solidFill>
+                <a:latin typeface="Pretendard" pitchFamily="34" charset="0"/>
+                <a:ea typeface="Pretendard" pitchFamily="34" charset="-122"/>
+                <a:cs typeface="Pretendard" pitchFamily="34" charset="-120"/>
+              </a:rPr>
+              <a:t>전층 의료</a:t>
+            </a:r>
+            <a:endParaRPr lang="en-US" sz="1250" dirty="0"/>
+          </a:p>
+        </p:txBody>
+      </p:sp>
+      <p:sp>
+        <p:nvSpPr>
+          <p:cNvPr id="10" name="Text 8"/>
+          <p:cNvSpPr/>
+          <p:nvPr/>
+        </p:nvSpPr>
+        <p:spPr>
+          <a:xfrm>
+            <a:off x="795528" y="2377440"/>
+            <a:ext cx="4943704" cy="2606040"/>
+          </a:xfrm>
+          <a:prstGeom prst="rect">
+            <a:avLst/>
+          </a:prstGeom>
+          <a:noFill/>
+          <a:ln/>
+        </p:spPr>
+        <p:txBody>
+          <a:bodyPr wrap="square" lIns="0" tIns="0" rIns="0" bIns="0" rtlCol="0" anchor="t">
+            <a:normAutofit/>
+          </a:bodyPr>
+          <a:lstStyle/>
+          <a:p>
+            <a:pPr marL="342900" indent="-342900">
               <a:lnSpc>
-                <a:spcPct val="120000"/>
+                <a:spcPct val="125000"/>
               </a:lnSpc>
-              <a:buNone/>
-            </a:pPr>
-            <a:r>
-              <a:rPr lang="en-US" sz="1400" dirty="0">
-                <a:solidFill>
-                  <a:srgbClr val="718096"/>
-                </a:solidFill>
-                <a:latin typeface="Pretendard" pitchFamily="34" charset="0"/>
-                <a:ea typeface="Pretendard" pitchFamily="34" charset="-122"/>
-                <a:cs typeface="Pretendard" pitchFamily="34" charset="-120"/>
-              </a:rPr>
-              <a:t>- 순수익(매월)</a:t>
-            </a:r>
-            <a:endParaRPr lang="en-US" sz="1400" dirty="0"/>
-          </a:p>
-        </p:txBody>
-      </p:sp>
-      <p:sp>
-        <p:nvSpPr>
-          <p:cNvPr id="10" name="Text 8"/>
-          <p:cNvSpPr/>
-          <p:nvPr/>
-        </p:nvSpPr>
-        <p:spPr>
-          <a:xfrm>
-            <a:off x="4768907" y="2048256"/>
-            <a:ext cx="6855860" cy="402336"/>
-          </a:xfrm>
-          <a:prstGeom prst="rect">
-            <a:avLst/>
-          </a:prstGeom>
-          <a:noFill/>
-          <a:ln/>
-        </p:spPr>
-        <p:txBody>
-          <a:bodyPr wrap="square" lIns="0" tIns="0" rIns="0" bIns="0" rtlCol="0" anchor="ctr"/>
-          <a:lstStyle/>
-          <a:p>
-            <a:pPr indent="0" marL="0">
-              <a:lnSpc>
-                <a:spcPct val="120000"/>
-              </a:lnSpc>
-              <a:buNone/>
-            </a:pPr>
-            <a:r>
-              <a:rPr lang="en-US" sz="1400" b="1" dirty="0">
+              <a:buSzPct val="100000"/>
+              <a:buChar char="•"/>
+            </a:pPr>
+            <a:r>
+              <a:rPr lang="en-US" sz="1100" dirty="0">
                 <a:solidFill>
                   <a:srgbClr val="10161F"/>
                 </a:solidFill>
@@ -12434,9 +11761,9 @@
                 <a:ea typeface="Pretendard" pitchFamily="34" charset="-122"/>
                 <a:cs typeface="Pretendard" pitchFamily="34" charset="-120"/>
               </a:rPr>
-              <a:t>약 3,650만 원</a:t>
-            </a:r>
-            <a:endParaRPr lang="en-US" sz="1400" dirty="0"/>
+              <a:t>업종 다각화 검토</a:t>
+            </a:r>
+            <a:endParaRPr lang="en-US" sz="1100" dirty="0"/>
           </a:p>
         </p:txBody>
       </p:sp>
@@ -12448,14 +11775,18 @@
         </p:nvSpPr>
         <p:spPr>
           <a:xfrm>
-            <a:off x="566928" y="2450592"/>
-            <a:ext cx="11057839" cy="0"/>
-          </a:xfrm>
-          <a:prstGeom prst="line">
-            <a:avLst/>
-          </a:prstGeom>
-          <a:noFill/>
-          <a:ln w="3810">
+            <a:off x="6223864" y="1417320"/>
+            <a:ext cx="5400904" cy="3657600"/>
+          </a:xfrm>
+          <a:prstGeom prst="roundRect">
+            <a:avLst>
+              <a:gd name="adj" fmla="val 1500"/>
+            </a:avLst>
+          </a:prstGeom>
+          <a:solidFill>
+            <a:srgbClr val="F7FAFC"/>
+          </a:solidFill>
+          <a:ln w="6350">
             <a:solidFill>
               <a:srgbClr val="CBD5E0"/>
             </a:solidFill>
@@ -12465,14 +11796,34 @@
       </p:sp>
       <p:sp>
         <p:nvSpPr>
-          <p:cNvPr id="12" name="Text 10"/>
-          <p:cNvSpPr/>
-          <p:nvPr/>
-        </p:nvSpPr>
-        <p:spPr>
-          <a:xfrm>
-            <a:off x="566928" y="2450592"/>
-            <a:ext cx="4201979" cy="402336"/>
+          <p:cNvPr id="12" name="Shape 10"/>
+          <p:cNvSpPr/>
+          <p:nvPr/>
+        </p:nvSpPr>
+        <p:spPr>
+          <a:xfrm>
+            <a:off x="6223864" y="1417320"/>
+            <a:ext cx="5400904" cy="45720"/>
+          </a:xfrm>
+          <a:prstGeom prst="rect">
+            <a:avLst/>
+          </a:prstGeom>
+          <a:solidFill>
+            <a:srgbClr val="B98A2E"/>
+          </a:solidFill>
+          <a:ln/>
+        </p:spPr>
+      </p:sp>
+      <p:sp>
+        <p:nvSpPr>
+          <p:cNvPr id="13" name="Text 11"/>
+          <p:cNvSpPr/>
+          <p:nvPr/>
+        </p:nvSpPr>
+        <p:spPr>
+          <a:xfrm>
+            <a:off x="6452464" y="1618488"/>
+            <a:ext cx="4943704" cy="292608"/>
           </a:xfrm>
           <a:prstGeom prst="rect">
             <a:avLst/>
@@ -12485,36 +11836,146 @@
           <a:lstStyle/>
           <a:p>
             <a:pPr indent="0" marL="0">
+              <a:buNone/>
+            </a:pPr>
+            <a:r>
+              <a:rPr lang="en-US" sz="1350" b="1" dirty="0">
+                <a:solidFill>
+                  <a:srgbClr val="977024"/>
+                </a:solidFill>
+                <a:latin typeface="Pretendard" pitchFamily="34" charset="0"/>
+                <a:ea typeface="Pretendard" pitchFamily="34" charset="-122"/>
+                <a:cs typeface="Pretendard" pitchFamily="34" charset="-120"/>
+              </a:rPr>
+              <a:t>금리 변동</a:t>
+            </a:r>
+            <a:endParaRPr lang="en-US" sz="1350" dirty="0"/>
+          </a:p>
+        </p:txBody>
+      </p:sp>
+      <p:sp>
+        <p:nvSpPr>
+          <p:cNvPr id="14" name="Text 12"/>
+          <p:cNvSpPr/>
+          <p:nvPr/>
+        </p:nvSpPr>
+        <p:spPr>
+          <a:xfrm>
+            <a:off x="6452464" y="1947672"/>
+            <a:ext cx="4943704" cy="365760"/>
+          </a:xfrm>
+          <a:prstGeom prst="rect">
+            <a:avLst/>
+          </a:prstGeom>
+          <a:noFill/>
+          <a:ln/>
+        </p:spPr>
+        <p:txBody>
+          <a:bodyPr wrap="square" lIns="0" tIns="0" rIns="0" bIns="0" rtlCol="0" anchor="ctr">
+            <a:normAutofit/>
+          </a:bodyPr>
+          <a:lstStyle/>
+          <a:p>
+            <a:pPr indent="0" marL="0">
+              <a:buNone/>
+            </a:pPr>
+            <a:r>
+              <a:rPr lang="en-US" sz="1250" b="1" dirty="0">
+                <a:solidFill>
+                  <a:srgbClr val="10161F"/>
+                </a:solidFill>
+                <a:latin typeface="Pretendard" pitchFamily="34" charset="0"/>
+                <a:ea typeface="Pretendard" pitchFamily="34" charset="-122"/>
+                <a:cs typeface="Pretendard" pitchFamily="34" charset="-120"/>
+              </a:rPr>
+              <a:t>4.1% 고정</a:t>
+            </a:r>
+            <a:endParaRPr lang="en-US" sz="1250" dirty="0"/>
+          </a:p>
+        </p:txBody>
+      </p:sp>
+      <p:sp>
+        <p:nvSpPr>
+          <p:cNvPr id="15" name="Text 13"/>
+          <p:cNvSpPr/>
+          <p:nvPr/>
+        </p:nvSpPr>
+        <p:spPr>
+          <a:xfrm>
+            <a:off x="6452464" y="2377440"/>
+            <a:ext cx="4943704" cy="2606040"/>
+          </a:xfrm>
+          <a:prstGeom prst="rect">
+            <a:avLst/>
+          </a:prstGeom>
+          <a:noFill/>
+          <a:ln/>
+        </p:spPr>
+        <p:txBody>
+          <a:bodyPr wrap="square" lIns="0" tIns="0" rIns="0" bIns="0" rtlCol="0" anchor="t">
+            <a:normAutofit/>
+          </a:bodyPr>
+          <a:lstStyle/>
+          <a:p>
+            <a:pPr marL="342900" indent="-342900">
               <a:lnSpc>
-                <a:spcPct val="120000"/>
+                <a:spcPct val="125000"/>
               </a:lnSpc>
-              <a:buNone/>
-            </a:pPr>
-            <a:r>
-              <a:rPr lang="en-US" sz="1400" dirty="0">
-                <a:solidFill>
-                  <a:srgbClr val="718096"/>
-                </a:solidFill>
-                <a:latin typeface="Pretendard" pitchFamily="34" charset="0"/>
-                <a:ea typeface="Pretendard" pitchFamily="34" charset="-122"/>
-                <a:cs typeface="Pretendard" pitchFamily="34" charset="-120"/>
-              </a:rPr>
-              <a:t>- 레버리지 수익률</a:t>
-            </a:r>
-            <a:endParaRPr lang="en-US" sz="1400" dirty="0"/>
-          </a:p>
-        </p:txBody>
-      </p:sp>
-      <p:sp>
-        <p:nvSpPr>
-          <p:cNvPr id="13" name="Text 11"/>
-          <p:cNvSpPr/>
-          <p:nvPr/>
-        </p:nvSpPr>
-        <p:spPr>
-          <a:xfrm>
-            <a:off x="4768907" y="2450592"/>
-            <a:ext cx="6855860" cy="402336"/>
+              <a:buSzPct val="100000"/>
+              <a:buChar char="•"/>
+            </a:pPr>
+            <a:r>
+              <a:rPr lang="en-US" sz="1100" dirty="0">
+                <a:solidFill>
+                  <a:srgbClr val="10161F"/>
+                </a:solidFill>
+                <a:latin typeface="Pretendard" pitchFamily="34" charset="0"/>
+                <a:ea typeface="Pretendard" pitchFamily="34" charset="-122"/>
+                <a:cs typeface="Pretendard" pitchFamily="34" charset="-120"/>
+              </a:rPr>
+              <a:t>승계 대출 활용</a:t>
+            </a:r>
+            <a:endParaRPr lang="en-US" sz="1100" dirty="0"/>
+          </a:p>
+        </p:txBody>
+      </p:sp>
+      <p:sp>
+        <p:nvSpPr>
+          <p:cNvPr id="16" name="Shape 14"/>
+          <p:cNvSpPr/>
+          <p:nvPr/>
+        </p:nvSpPr>
+        <p:spPr>
+          <a:xfrm>
+            <a:off x="566928" y="5193792"/>
+            <a:ext cx="11057839" cy="621792"/>
+          </a:xfrm>
+          <a:prstGeom prst="roundRect">
+            <a:avLst>
+              <a:gd name="adj" fmla="val 8824"/>
+            </a:avLst>
+          </a:prstGeom>
+          <a:solidFill>
+            <a:srgbClr val="F7FAFC"/>
+          </a:solidFill>
+          <a:ln w="6350">
+            <a:solidFill>
+              <a:srgbClr val="CBD5E0"/>
+            </a:solidFill>
+            <a:prstDash val="solid"/>
+          </a:ln>
+        </p:spPr>
+      </p:sp>
+      <p:sp>
+        <p:nvSpPr>
+          <p:cNvPr id="17" name="Text 15"/>
+          <p:cNvSpPr/>
+          <p:nvPr/>
+        </p:nvSpPr>
+        <p:spPr>
+          <a:xfrm>
+            <a:off x="795528" y="5193792"/>
+            <a:ext cx="10600639" cy="621792"/>
           </a:xfrm>
           <a:prstGeom prst="rect">
             <a:avLst/>
@@ -12527,13 +11988,10 @@
           <a:lstStyle/>
           <a:p>
             <a:pPr indent="0" marL="0">
-              <a:lnSpc>
-                <a:spcPct val="120000"/>
-              </a:lnSpc>
-              <a:buNone/>
-            </a:pPr>
-            <a:r>
-              <a:rPr lang="en-US" sz="1400" b="1" dirty="0">
+              <a:buNone/>
+            </a:pPr>
+            <a:r>
+              <a:rPr lang="en-US" sz="1100" dirty="0">
                 <a:solidFill>
                   <a:srgbClr val="10161F"/>
                 </a:solidFill>
@@ -12541,15 +11999,15 @@
                 <a:ea typeface="Pretendard" pitchFamily="34" charset="-122"/>
                 <a:cs typeface="Pretendard" pitchFamily="34" charset="-120"/>
               </a:rPr>
-              <a:t>약 5.8%</a:t>
-            </a:r>
-            <a:endParaRPr lang="en-US" sz="1400" dirty="0"/>
-          </a:p>
-        </p:txBody>
-      </p:sp>
-      <p:sp>
-        <p:nvSpPr>
-          <p:cNvPr id="14" name="Text 12"/>
+              <a:t>※ 본 리스크 체크는 공부 및 브로커 확인 기반이며, 매수 전 전문 실사팀(변호사/건축사)을 통한 정밀 실사가 필요합니다.</a:t>
+            </a:r>
+            <a:endParaRPr lang="en-US" sz="1100" dirty="0"/>
+          </a:p>
+        </p:txBody>
+      </p:sp>
+      <p:sp>
+        <p:nvSpPr>
+          <p:cNvPr id="18" name="Text 16"/>
           <p:cNvSpPr/>
           <p:nvPr/>
         </p:nvSpPr>
@@ -12588,7 +12046,7 @@
       </p:sp>
       <p:sp>
         <p:nvSpPr>
-          <p:cNvPr id="15" name="Text 13"/>
+          <p:cNvPr id="19" name="Text 17"/>
           <p:cNvSpPr/>
           <p:nvPr/>
         </p:nvSpPr>
@@ -12619,7 +12077,7 @@
                 <a:ea typeface="Arial" pitchFamily="34" charset="-122"/>
                 <a:cs typeface="Arial" pitchFamily="34" charset="-120"/>
               </a:rPr>
-              <a:t>8</a:t>
+              <a:t>9</a:t>
             </a:r>
             <a:endParaRPr lang="en-US" sz="900" dirty="0"/>
           </a:p>

--- a/docs/test/stress/e2e-outputs/income_pro_gradeC_pr07.pptx
+++ b/docs/test/stress/e2e-outputs/income_pro_gradeC_pr07.pptx
@@ -17,9 +17,10 @@
     <p:sldId id="265" r:id="rId11"/>
     <p:sldId id="266" r:id="rId12"/>
     <p:sldId id="267" r:id="rId13"/>
+    <p:sldId id="268" r:id="rId14"/>
   </p:sldIdLst>
   <p:notesMasterIdLst>
-    <p:notesMasterId r:id="rId14"/>
+    <p:notesMasterId r:id="rId15"/>
   </p:notesMasterIdLst>
   <p:sldSz cx="12192000" cy="6858000"/>
   <p:notesSz cx="6858000" cy="12192000"/>
@@ -801,6 +802,94 @@
             <a:fld id="{F7021451-1387-4CA6-816F-3879F97B5CBC}" type="slidenum">
               <a:rPr lang="en-US"/>
               <a:t>12</a:t>
+            </a:fld>
+            <a:endParaRPr lang="en-US"/>
+          </a:p>
+        </p:txBody>
+      </p:sp>
+    </p:spTree>
+    <p:extLst>
+      <p:ext uri="{BB962C8B-B14F-4D97-AF65-F5344CB8AC3E}">
+        <p14:creationId xmlns:p14="http://schemas.microsoft.com/office/powerpoint/2010/main" val="1024086991"/>
+      </p:ext>
+    </p:extLst>
+  </p:cSld>
+  <p:clrMapOvr>
+    <a:masterClrMapping/>
+  </p:clrMapOvr>
+</p:notes>
+</file>
+
+<file path=ppt/notesSlides/notesSlide13.xml><?xml version="1.0" encoding="utf-8"?>
+<p:notes xmlns:a="http://schemas.openxmlformats.org/drawingml/2006/main" xmlns:r="http://schemas.openxmlformats.org/officeDocument/2006/relationships" xmlns:p="http://schemas.openxmlformats.org/presentationml/2006/main">
+  <p:cSld>
+    <p:spTree>
+      <p:nvGrpSpPr>
+        <p:cNvPr id="1" name=""/>
+        <p:cNvGrpSpPr/>
+        <p:nvPr/>
+      </p:nvGrpSpPr>
+      <p:grpSpPr>
+        <a:xfrm>
+          <a:off x="0" y="0"/>
+          <a:ext cx="0" cy="0"/>
+          <a:chOff x="0" y="0"/>
+          <a:chExt cx="0" cy="0"/>
+        </a:xfrm>
+      </p:grpSpPr>
+      <p:sp>
+        <p:nvSpPr>
+          <p:cNvPr id="2" name="Slide Image Placeholder 1"/>
+          <p:cNvSpPr>
+            <a:spLocks noGrp="1" noRot="1" noChangeAspect="1"/>
+          </p:cNvSpPr>
+          <p:nvPr>
+            <p:ph type="sldImg"/>
+          </p:nvPr>
+        </p:nvSpPr>
+        <p:spPr/>
+      </p:sp>
+      <p:sp>
+        <p:nvSpPr>
+          <p:cNvPr id="3" name="Notes Placeholder 2"/>
+          <p:cNvSpPr>
+            <a:spLocks noGrp="1"/>
+          </p:cNvSpPr>
+          <p:nvPr>
+            <p:ph type="body" idx="1"/>
+          </p:nvPr>
+        </p:nvSpPr>
+        <p:spPr/>
+        <p:txBody>
+          <a:bodyPr/>
+          <a:lstStyle/>
+          <a:p>
+            <a:r>
+              <a:rPr lang="en-US" dirty="0"/>
+              <a:t/>
+            </a:r>
+            <a:endParaRPr lang="en-US" dirty="0"/>
+          </a:p>
+        </p:txBody>
+      </p:sp>
+      <p:sp>
+        <p:nvSpPr>
+          <p:cNvPr id="4" name="Slide Number Placeholder 3"/>
+          <p:cNvSpPr>
+            <a:spLocks noGrp="1"/>
+          </p:cNvSpPr>
+          <p:nvPr>
+            <p:ph type="sldNum" sz="quarter" idx="10"/>
+          </p:nvPr>
+        </p:nvSpPr>
+        <p:spPr/>
+        <p:txBody>
+          <a:bodyPr/>
+          <a:lstStyle/>
+          <a:p>
+            <a:fld id="{F7021451-1387-4CA6-816F-3879F97B5CBC}" type="slidenum">
+              <a:rPr lang="en-US"/>
+              <a:t>13</a:t>
             </a:fld>
             <a:endParaRPr lang="en-US"/>
           </a:p>
@@ -1869,7 +1958,7 @@
             <a:avLst/>
           </a:prstGeom>
           <a:solidFill>
-            <a:srgbClr val="2A2118"/>
+            <a:srgbClr val="0D2233"/>
           </a:solidFill>
           <a:ln/>
         </p:spPr>
@@ -1889,7 +1978,7 @@
             <a:avLst/>
           </a:prstGeom>
           <a:solidFill>
-            <a:srgbClr val="3D2E1A"/>
+            <a:srgbClr val="1A3A4A"/>
           </a:solidFill>
           <a:ln/>
         </p:spPr>
@@ -1909,7 +1998,7 @@
             <a:avLst/>
           </a:prstGeom>
           <a:solidFill>
-            <a:srgbClr val="33271A"/>
+            <a:srgbClr val="132A3A"/>
           </a:solidFill>
           <a:ln/>
         </p:spPr>
@@ -2005,7 +2094,7 @@
         </p:nvSpPr>
         <p:spPr>
           <a:xfrm>
-            <a:off x="566928" y="475488"/>
+            <a:off x="502920" y="475488"/>
             <a:ext cx="2743200" cy="365760"/>
           </a:xfrm>
           <a:prstGeom prst="rect">
@@ -2058,7 +2147,7 @@
         </p:nvSpPr>
         <p:spPr>
           <a:xfrm>
-            <a:off x="566928" y="2029968"/>
+            <a:off x="502920" y="2029968"/>
             <a:ext cx="7315200" cy="274320"/>
           </a:xfrm>
           <a:prstGeom prst="rect">
@@ -2097,7 +2186,7 @@
         </p:nvSpPr>
         <p:spPr>
           <a:xfrm>
-            <a:off x="566928" y="2304288"/>
+            <a:off x="502920" y="2304288"/>
             <a:ext cx="7315200" cy="731520"/>
           </a:xfrm>
           <a:prstGeom prst="rect">
@@ -2136,7 +2225,7 @@
         </p:nvSpPr>
         <p:spPr>
           <a:xfrm>
-            <a:off x="566928" y="3090672"/>
+            <a:off x="502920" y="3090672"/>
             <a:ext cx="7315200" cy="365760"/>
           </a:xfrm>
           <a:prstGeom prst="rect">
@@ -2175,7 +2264,7 @@
         </p:nvSpPr>
         <p:spPr>
           <a:xfrm>
-            <a:off x="566928" y="3685032"/>
+            <a:off x="502920" y="3685032"/>
             <a:ext cx="1097280" cy="292608"/>
           </a:xfrm>
           <a:prstGeom prst="roundRect">
@@ -2197,7 +2286,7 @@
         </p:nvSpPr>
         <p:spPr>
           <a:xfrm>
-            <a:off x="566928" y="3685032"/>
+            <a:off x="502920" y="3685032"/>
             <a:ext cx="1097280" cy="292608"/>
           </a:xfrm>
           <a:prstGeom prst="rect">
@@ -2236,7 +2325,7 @@
         </p:nvSpPr>
         <p:spPr>
           <a:xfrm>
-            <a:off x="1755648" y="3685032"/>
+            <a:off x="1691640" y="3685032"/>
             <a:ext cx="1005840" cy="292608"/>
           </a:xfrm>
           <a:prstGeom prst="roundRect">
@@ -2258,7 +2347,7 @@
         </p:nvSpPr>
         <p:spPr>
           <a:xfrm>
-            <a:off x="1755648" y="3685032"/>
+            <a:off x="1691640" y="3685032"/>
             <a:ext cx="1005840" cy="292608"/>
           </a:xfrm>
           <a:prstGeom prst="rect">
@@ -2297,7 +2386,7 @@
         </p:nvSpPr>
         <p:spPr>
           <a:xfrm>
-            <a:off x="566928" y="4187952"/>
+            <a:off x="502920" y="4187952"/>
             <a:ext cx="6858000" cy="1051560"/>
           </a:xfrm>
           <a:prstGeom prst="roundRect">
@@ -2324,7 +2413,7 @@
         </p:nvSpPr>
         <p:spPr>
           <a:xfrm>
-            <a:off x="822960" y="4297680"/>
+            <a:off x="758952" y="4297680"/>
             <a:ext cx="6345936" cy="832104"/>
           </a:xfrm>
           <a:prstGeom prst="rect">
@@ -2363,7 +2452,7 @@
         </p:nvSpPr>
         <p:spPr>
           <a:xfrm>
-            <a:off x="566928" y="6035040"/>
+            <a:off x="502920" y="6035040"/>
             <a:ext cx="11057839" cy="274320"/>
           </a:xfrm>
           <a:prstGeom prst="rect">
@@ -2391,7 +2480,7 @@
         </p:nvSpPr>
         <p:spPr>
           <a:xfrm>
-            <a:off x="566928" y="6382512"/>
+            <a:off x="502920" y="6382512"/>
             <a:ext cx="7315200" cy="219456"/>
           </a:xfrm>
           <a:prstGeom prst="rect">
@@ -2430,7 +2519,7 @@
         </p:nvSpPr>
         <p:spPr>
           <a:xfrm>
-            <a:off x="10710367" y="6382512"/>
+            <a:off x="10774375" y="6382512"/>
             <a:ext cx="914400" cy="219456"/>
           </a:xfrm>
           <a:prstGeom prst="rect">
@@ -2501,7 +2590,7 @@
         </p:nvSpPr>
         <p:spPr>
           <a:xfrm>
-            <a:off x="566928" y="457200"/>
+            <a:off x="502920" y="457200"/>
             <a:ext cx="384048" cy="384048"/>
           </a:xfrm>
           <a:prstGeom prst="ellipse">
@@ -2521,7 +2610,7 @@
         </p:nvSpPr>
         <p:spPr>
           <a:xfrm>
-            <a:off x="566928" y="457200"/>
+            <a:off x="502920" y="457200"/>
             <a:ext cx="384048" cy="384048"/>
           </a:xfrm>
           <a:prstGeom prst="rect">
@@ -2560,7 +2649,7 @@
         </p:nvSpPr>
         <p:spPr>
           <a:xfrm>
-            <a:off x="1133856" y="457200"/>
+            <a:off x="1069848" y="457200"/>
             <a:ext cx="10490911" cy="182880"/>
           </a:xfrm>
           <a:prstGeom prst="rect">
@@ -2585,7 +2674,7 @@
                 <a:ea typeface="Arial" pitchFamily="34" charset="-122"/>
                 <a:cs typeface="Arial" pitchFamily="34" charset="-120"/>
               </a:rPr>
-              <a:t>Checklist</a:t>
+              <a:t>Risk</a:t>
             </a:r>
             <a:endParaRPr lang="en-US" sz="950" dirty="0"/>
           </a:p>
@@ -2599,7 +2688,7 @@
         </p:nvSpPr>
         <p:spPr>
           <a:xfrm>
-            <a:off x="1133856" y="640080"/>
+            <a:off x="1069848" y="640080"/>
             <a:ext cx="10490911" cy="365760"/>
           </a:xfrm>
           <a:prstGeom prst="rect">
@@ -2624,7 +2713,7 @@
                 <a:ea typeface="Pretendard" pitchFamily="34" charset="-122"/>
                 <a:cs typeface="Pretendard" pitchFamily="34" charset="-120"/>
               </a:rPr>
-              <a:t>실사 체크리스트</a:t>
+              <a:t>리스크</a:t>
             </a:r>
             <a:endParaRPr lang="en-US" sz="2300" dirty="0"/>
           </a:p>
@@ -2632,63 +2721,26 @@
       </p:sp>
       <p:sp>
         <p:nvSpPr>
-          <p:cNvPr id="6" name="Text 4"/>
-          <p:cNvSpPr/>
-          <p:nvPr/>
-        </p:nvSpPr>
-        <p:spPr>
-          <a:xfrm>
-            <a:off x="566928" y="1371600"/>
-            <a:ext cx="11057839" cy="237744"/>
-          </a:xfrm>
-          <a:prstGeom prst="rect">
-            <a:avLst/>
-          </a:prstGeom>
-          <a:noFill/>
-          <a:ln/>
-        </p:spPr>
-        <p:txBody>
-          <a:bodyPr wrap="square" lIns="0" tIns="0" rIns="0" bIns="0" rtlCol="0" anchor="ctr"/>
-          <a:lstStyle/>
-          <a:p>
-            <a:pPr indent="0" marL="0">
-              <a:buNone/>
-            </a:pPr>
-            <a:r>
-              <a:rPr lang="en-US" sz="1100" b="1" dirty="0">
-                <a:solidFill>
-                  <a:srgbClr val="10161F"/>
-                </a:solidFill>
-                <a:latin typeface="Pretendard" pitchFamily="34" charset="0"/>
-                <a:ea typeface="Pretendard" pitchFamily="34" charset="-122"/>
-                <a:cs typeface="Pretendard" pitchFamily="34" charset="-120"/>
-              </a:rPr>
-              <a:t>거래 안정성 확보를 위한 필수 법률·물리·임대차 실사 점검 항목 (총 6건)</a:t>
-            </a:r>
-            <a:endParaRPr lang="en-US" sz="1100" dirty="0"/>
-          </a:p>
-        </p:txBody>
-      </p:sp>
-      <p:sp>
-        <p:nvSpPr>
-          <p:cNvPr id="7" name="Shape 5"/>
-          <p:cNvSpPr/>
-          <p:nvPr/>
-        </p:nvSpPr>
-        <p:spPr>
-          <a:xfrm>
-            <a:off x="566928" y="1719072"/>
-            <a:ext cx="5368900" cy="868680"/>
-          </a:xfrm>
-          <a:prstGeom prst="rect">
-            <a:avLst/>
+          <p:cNvPr id="6" name="Shape 4"/>
+          <p:cNvSpPr/>
+          <p:nvPr/>
+        </p:nvSpPr>
+        <p:spPr>
+          <a:xfrm>
+            <a:off x="502920" y="1417320"/>
+            <a:ext cx="5400904" cy="3657600"/>
+          </a:xfrm>
+          <a:prstGeom prst="roundRect">
+            <a:avLst>
+              <a:gd name="adj" fmla="val 1500"/>
+            </a:avLst>
           </a:prstGeom>
           <a:solidFill>
             <a:srgbClr val="F7FAFC"/>
           </a:solidFill>
           <a:ln w="6350">
             <a:solidFill>
-              <a:srgbClr val="D9B668"/>
+              <a:srgbClr val="CBD5E0"/>
             </a:solidFill>
             <a:prstDash val="solid"/>
           </a:ln>
@@ -2696,58 +2748,144 @@
       </p:sp>
       <p:sp>
         <p:nvSpPr>
-          <p:cNvPr id="8" name="Shape 6"/>
-          <p:cNvSpPr/>
-          <p:nvPr/>
-        </p:nvSpPr>
-        <p:spPr>
-          <a:xfrm>
-            <a:off x="704088" y="1883664"/>
-            <a:ext cx="320040" cy="320040"/>
+          <p:cNvPr id="7" name="Shape 5"/>
+          <p:cNvSpPr/>
+          <p:nvPr/>
+        </p:nvSpPr>
+        <p:spPr>
+          <a:xfrm>
+            <a:off x="502920" y="1417320"/>
+            <a:ext cx="5400904" cy="45720"/>
           </a:xfrm>
           <a:prstGeom prst="rect">
             <a:avLst/>
           </a:prstGeom>
           <a:solidFill>
-            <a:srgbClr val="977024"/>
+            <a:srgbClr val="B98A2E"/>
           </a:solidFill>
           <a:ln/>
         </p:spPr>
       </p:sp>
       <p:sp>
         <p:nvSpPr>
+          <p:cNvPr id="8" name="Text 6"/>
+          <p:cNvSpPr/>
+          <p:nvPr/>
+        </p:nvSpPr>
+        <p:spPr>
+          <a:xfrm>
+            <a:off x="731520" y="1618488"/>
+            <a:ext cx="4943704" cy="292608"/>
+          </a:xfrm>
+          <a:prstGeom prst="rect">
+            <a:avLst/>
+          </a:prstGeom>
+          <a:noFill/>
+          <a:ln/>
+        </p:spPr>
+        <p:txBody>
+          <a:bodyPr wrap="square" lIns="0" tIns="0" rIns="0" bIns="0" rtlCol="0" anchor="ctr"/>
+          <a:lstStyle/>
+          <a:p>
+            <a:pPr indent="0" marL="0">
+              <a:buNone/>
+            </a:pPr>
+            <a:r>
+              <a:rPr lang="en-US" sz="1350" b="1" dirty="0">
+                <a:solidFill>
+                  <a:srgbClr val="977024"/>
+                </a:solidFill>
+                <a:latin typeface="Pretendard" pitchFamily="34" charset="0"/>
+                <a:ea typeface="Pretendard" pitchFamily="34" charset="-122"/>
+                <a:cs typeface="Pretendard" pitchFamily="34" charset="-120"/>
+              </a:rPr>
+              <a:t>메디컬 단일업종 집중</a:t>
+            </a:r>
+            <a:endParaRPr lang="en-US" sz="1350" dirty="0"/>
+          </a:p>
+        </p:txBody>
+      </p:sp>
+      <p:sp>
+        <p:nvSpPr>
           <p:cNvPr id="9" name="Text 7"/>
           <p:cNvSpPr/>
           <p:nvPr/>
         </p:nvSpPr>
         <p:spPr>
           <a:xfrm>
-            <a:off x="704088" y="1883664"/>
-            <a:ext cx="320040" cy="320040"/>
-          </a:xfrm>
-          <a:prstGeom prst="rect">
-            <a:avLst/>
-          </a:prstGeom>
-          <a:noFill/>
-          <a:ln/>
-        </p:spPr>
-        <p:txBody>
-          <a:bodyPr wrap="square" rtlCol="0" anchor="ctr"/>
-          <a:lstStyle/>
-          <a:p>
-            <a:pPr algn="ctr" indent="0" marL="0">
-              <a:buNone/>
-            </a:pPr>
-            <a:r>
-              <a:rPr lang="en-US" sz="1100" b="1" dirty="0">
-                <a:solidFill>
-                  <a:srgbClr val="000000"/>
-                </a:solidFill>
-                <a:latin typeface="Pretendard" pitchFamily="34" charset="0"/>
-                <a:ea typeface="Pretendard" pitchFamily="34" charset="-122"/>
-                <a:cs typeface="Pretendard" pitchFamily="34" charset="-120"/>
-              </a:rPr>
-              <a:t>✓</a:t>
+            <a:off x="731520" y="1947672"/>
+            <a:ext cx="4943704" cy="365760"/>
+          </a:xfrm>
+          <a:prstGeom prst="rect">
+            <a:avLst/>
+          </a:prstGeom>
+          <a:noFill/>
+          <a:ln/>
+        </p:spPr>
+        <p:txBody>
+          <a:bodyPr wrap="square" lIns="0" tIns="0" rIns="0" bIns="0" rtlCol="0" anchor="ctr">
+            <a:normAutofit/>
+          </a:bodyPr>
+          <a:lstStyle/>
+          <a:p>
+            <a:pPr indent="0" marL="0">
+              <a:buNone/>
+            </a:pPr>
+            <a:r>
+              <a:rPr lang="en-US" sz="1250" b="1" dirty="0">
+                <a:solidFill>
+                  <a:srgbClr val="10161F"/>
+                </a:solidFill>
+                <a:latin typeface="Pretendard" pitchFamily="34" charset="0"/>
+                <a:ea typeface="Pretendard" pitchFamily="34" charset="-122"/>
+                <a:cs typeface="Pretendard" pitchFamily="34" charset="-120"/>
+              </a:rPr>
+              <a:t>전층 의료</a:t>
+            </a:r>
+            <a:endParaRPr lang="en-US" sz="1250" dirty="0"/>
+          </a:p>
+        </p:txBody>
+      </p:sp>
+      <p:sp>
+        <p:nvSpPr>
+          <p:cNvPr id="10" name="Text 8"/>
+          <p:cNvSpPr/>
+          <p:nvPr/>
+        </p:nvSpPr>
+        <p:spPr>
+          <a:xfrm>
+            <a:off x="731520" y="2377440"/>
+            <a:ext cx="4943704" cy="2606040"/>
+          </a:xfrm>
+          <a:prstGeom prst="rect">
+            <a:avLst/>
+          </a:prstGeom>
+          <a:noFill/>
+          <a:ln/>
+        </p:spPr>
+        <p:txBody>
+          <a:bodyPr wrap="square" lIns="0" tIns="0" rIns="0" bIns="0" rtlCol="0" anchor="t">
+            <a:normAutofit/>
+          </a:bodyPr>
+          <a:lstStyle/>
+          <a:p>
+            <a:pPr marL="342900" indent="-342900">
+              <a:lnSpc>
+                <a:spcPct val="115000"/>
+              </a:lnSpc>
+              <a:buSzPct val="100000"/>
+              <a:buChar char="•"/>
+            </a:pPr>
+            <a:r>
+              <a:rPr lang="en-US" sz="1100" dirty="0">
+                <a:solidFill>
+                  <a:srgbClr val="10161F"/>
+                </a:solidFill>
+                <a:latin typeface="Pretendard" pitchFamily="34" charset="0"/>
+                <a:ea typeface="Pretendard" pitchFamily="34" charset="-122"/>
+                <a:cs typeface="Pretendard" pitchFamily="34" charset="-120"/>
+              </a:rPr>
+              <a:t>업종 다각화 검토</a:t>
             </a:r>
             <a:endParaRPr lang="en-US" sz="1100" dirty="0"/>
           </a:p>
@@ -2755,66 +2893,26 @@
       </p:sp>
       <p:sp>
         <p:nvSpPr>
-          <p:cNvPr id="10" name="Text 8"/>
-          <p:cNvSpPr/>
-          <p:nvPr/>
-        </p:nvSpPr>
-        <p:spPr>
-          <a:xfrm>
-            <a:off x="1115568" y="1810512"/>
-            <a:ext cx="4683100" cy="722376"/>
-          </a:xfrm>
-          <a:prstGeom prst="rect">
-            <a:avLst/>
-          </a:prstGeom>
-          <a:noFill/>
-          <a:ln/>
-        </p:spPr>
-        <p:txBody>
-          <a:bodyPr wrap="square" rtlCol="0" anchor="ctr"/>
-          <a:lstStyle/>
-          <a:p>
-            <a:pPr indent="0" marL="0">
-              <a:lnSpc>
-                <a:spcPct val="110000"/>
-              </a:lnSpc>
-              <a:buNone/>
-            </a:pPr>
-            <a:r>
-              <a:rPr lang="en-US" sz="950" dirty="0">
-                <a:solidFill>
-                  <a:srgbClr val="10161F"/>
-                </a:solidFill>
-                <a:latin typeface="Pretendard" pitchFamily="34" charset="0"/>
-                <a:ea typeface="Pretendard" pitchFamily="34" charset="-122"/>
-                <a:cs typeface="Pretendard" pitchFamily="34" charset="-120"/>
-              </a:rPr>
-              <a:t>등기부등본 갑구/을구 권리관계 및 근저당 채권최고액 전액 말소 조건 원본 대조</a:t>
-            </a:r>
-            <a:endParaRPr lang="en-US" sz="950" dirty="0"/>
-          </a:p>
-        </p:txBody>
-      </p:sp>
-      <p:sp>
-        <p:nvSpPr>
           <p:cNvPr id="11" name="Shape 9"/>
           <p:cNvSpPr/>
           <p:nvPr/>
         </p:nvSpPr>
         <p:spPr>
           <a:xfrm>
-            <a:off x="566928" y="2715768"/>
-            <a:ext cx="5368900" cy="868680"/>
-          </a:xfrm>
-          <a:prstGeom prst="rect">
-            <a:avLst/>
+            <a:off x="6159856" y="1417320"/>
+            <a:ext cx="5400904" cy="3657600"/>
+          </a:xfrm>
+          <a:prstGeom prst="roundRect">
+            <a:avLst>
+              <a:gd name="adj" fmla="val 1500"/>
+            </a:avLst>
           </a:prstGeom>
           <a:solidFill>
             <a:srgbClr val="F7FAFC"/>
           </a:solidFill>
           <a:ln w="6350">
             <a:solidFill>
-              <a:srgbClr val="D9B668"/>
+              <a:srgbClr val="CBD5E0"/>
             </a:solidFill>
             <a:prstDash val="solid"/>
           </a:ln>
@@ -2828,14 +2926,14 @@
         </p:nvSpPr>
         <p:spPr>
           <a:xfrm>
-            <a:off x="704088" y="2880360"/>
-            <a:ext cx="320040" cy="320040"/>
+            <a:off x="6159856" y="1417320"/>
+            <a:ext cx="5400904" cy="45720"/>
           </a:xfrm>
           <a:prstGeom prst="rect">
             <a:avLst/>
           </a:prstGeom>
           <a:solidFill>
-            <a:srgbClr val="977024"/>
+            <a:srgbClr val="B98A2E"/>
           </a:solidFill>
           <a:ln/>
         </p:spPr>
@@ -2848,32 +2946,118 @@
         </p:nvSpPr>
         <p:spPr>
           <a:xfrm>
-            <a:off x="704088" y="2880360"/>
-            <a:ext cx="320040" cy="320040"/>
-          </a:xfrm>
-          <a:prstGeom prst="rect">
-            <a:avLst/>
-          </a:prstGeom>
-          <a:noFill/>
-          <a:ln/>
-        </p:spPr>
-        <p:txBody>
-          <a:bodyPr wrap="square" rtlCol="0" anchor="ctr"/>
-          <a:lstStyle/>
-          <a:p>
-            <a:pPr algn="ctr" indent="0" marL="0">
-              <a:buNone/>
-            </a:pPr>
-            <a:r>
-              <a:rPr lang="en-US" sz="1100" b="1" dirty="0">
-                <a:solidFill>
-                  <a:srgbClr val="000000"/>
-                </a:solidFill>
-                <a:latin typeface="Pretendard" pitchFamily="34" charset="0"/>
-                <a:ea typeface="Pretendard" pitchFamily="34" charset="-122"/>
-                <a:cs typeface="Pretendard" pitchFamily="34" charset="-120"/>
-              </a:rPr>
-              <a:t>✓</a:t>
+            <a:off x="6388456" y="1618488"/>
+            <a:ext cx="4943704" cy="292608"/>
+          </a:xfrm>
+          <a:prstGeom prst="rect">
+            <a:avLst/>
+          </a:prstGeom>
+          <a:noFill/>
+          <a:ln/>
+        </p:spPr>
+        <p:txBody>
+          <a:bodyPr wrap="square" lIns="0" tIns="0" rIns="0" bIns="0" rtlCol="0" anchor="ctr"/>
+          <a:lstStyle/>
+          <a:p>
+            <a:pPr indent="0" marL="0">
+              <a:buNone/>
+            </a:pPr>
+            <a:r>
+              <a:rPr lang="en-US" sz="1350" b="1" dirty="0">
+                <a:solidFill>
+                  <a:srgbClr val="977024"/>
+                </a:solidFill>
+                <a:latin typeface="Pretendard" pitchFamily="34" charset="0"/>
+                <a:ea typeface="Pretendard" pitchFamily="34" charset="-122"/>
+                <a:cs typeface="Pretendard" pitchFamily="34" charset="-120"/>
+              </a:rPr>
+              <a:t>금리 변동</a:t>
+            </a:r>
+            <a:endParaRPr lang="en-US" sz="1350" dirty="0"/>
+          </a:p>
+        </p:txBody>
+      </p:sp>
+      <p:sp>
+        <p:nvSpPr>
+          <p:cNvPr id="14" name="Text 12"/>
+          <p:cNvSpPr/>
+          <p:nvPr/>
+        </p:nvSpPr>
+        <p:spPr>
+          <a:xfrm>
+            <a:off x="6388456" y="1947672"/>
+            <a:ext cx="4943704" cy="365760"/>
+          </a:xfrm>
+          <a:prstGeom prst="rect">
+            <a:avLst/>
+          </a:prstGeom>
+          <a:noFill/>
+          <a:ln/>
+        </p:spPr>
+        <p:txBody>
+          <a:bodyPr wrap="square" lIns="0" tIns="0" rIns="0" bIns="0" rtlCol="0" anchor="ctr">
+            <a:normAutofit/>
+          </a:bodyPr>
+          <a:lstStyle/>
+          <a:p>
+            <a:pPr indent="0" marL="0">
+              <a:buNone/>
+            </a:pPr>
+            <a:r>
+              <a:rPr lang="en-US" sz="1250" b="1" dirty="0">
+                <a:solidFill>
+                  <a:srgbClr val="10161F"/>
+                </a:solidFill>
+                <a:latin typeface="Pretendard" pitchFamily="34" charset="0"/>
+                <a:ea typeface="Pretendard" pitchFamily="34" charset="-122"/>
+                <a:cs typeface="Pretendard" pitchFamily="34" charset="-120"/>
+              </a:rPr>
+              <a:t>4.1% 고정</a:t>
+            </a:r>
+            <a:endParaRPr lang="en-US" sz="1250" dirty="0"/>
+          </a:p>
+        </p:txBody>
+      </p:sp>
+      <p:sp>
+        <p:nvSpPr>
+          <p:cNvPr id="15" name="Text 13"/>
+          <p:cNvSpPr/>
+          <p:nvPr/>
+        </p:nvSpPr>
+        <p:spPr>
+          <a:xfrm>
+            <a:off x="6388456" y="2377440"/>
+            <a:ext cx="4943704" cy="2606040"/>
+          </a:xfrm>
+          <a:prstGeom prst="rect">
+            <a:avLst/>
+          </a:prstGeom>
+          <a:noFill/>
+          <a:ln/>
+        </p:spPr>
+        <p:txBody>
+          <a:bodyPr wrap="square" lIns="0" tIns="0" rIns="0" bIns="0" rtlCol="0" anchor="t">
+            <a:normAutofit/>
+          </a:bodyPr>
+          <a:lstStyle/>
+          <a:p>
+            <a:pPr marL="342900" indent="-342900">
+              <a:lnSpc>
+                <a:spcPct val="115000"/>
+              </a:lnSpc>
+              <a:buSzPct val="100000"/>
+              <a:buChar char="•"/>
+            </a:pPr>
+            <a:r>
+              <a:rPr lang="en-US" sz="1100" dirty="0">
+                <a:solidFill>
+                  <a:srgbClr val="10161F"/>
+                </a:solidFill>
+                <a:latin typeface="Pretendard" pitchFamily="34" charset="0"/>
+                <a:ea typeface="Pretendard" pitchFamily="34" charset="-122"/>
+                <a:cs typeface="Pretendard" pitchFamily="34" charset="-120"/>
+              </a:rPr>
+              <a:t>승계 대출 활용</a:t>
             </a:r>
             <a:endParaRPr lang="en-US" sz="1100" dirty="0"/>
           </a:p>
@@ -2881,66 +3065,26 @@
       </p:sp>
       <p:sp>
         <p:nvSpPr>
-          <p:cNvPr id="14" name="Text 12"/>
-          <p:cNvSpPr/>
-          <p:nvPr/>
-        </p:nvSpPr>
-        <p:spPr>
-          <a:xfrm>
-            <a:off x="1115568" y="2807208"/>
-            <a:ext cx="4683100" cy="722376"/>
-          </a:xfrm>
-          <a:prstGeom prst="rect">
-            <a:avLst/>
-          </a:prstGeom>
-          <a:noFill/>
-          <a:ln/>
-        </p:spPr>
-        <p:txBody>
-          <a:bodyPr wrap="square" rtlCol="0" anchor="ctr"/>
-          <a:lstStyle/>
-          <a:p>
-            <a:pPr indent="0" marL="0">
-              <a:lnSpc>
-                <a:spcPct val="110000"/>
-              </a:lnSpc>
-              <a:buNone/>
-            </a:pPr>
-            <a:r>
-              <a:rPr lang="en-US" sz="950" dirty="0">
-                <a:solidFill>
-                  <a:srgbClr val="10161F"/>
-                </a:solidFill>
-                <a:latin typeface="Pretendard" pitchFamily="34" charset="0"/>
-                <a:ea typeface="Pretendard" pitchFamily="34" charset="-122"/>
-                <a:cs typeface="Pretendard" pitchFamily="34" charset="-120"/>
-              </a:rPr>
-              <a:t>임대차 원본 계약서 대조 (보증금, 월임대료, 관리비 실입금 내역 및 제소전화해조서)</a:t>
-            </a:r>
-            <a:endParaRPr lang="en-US" sz="950" dirty="0"/>
-          </a:p>
-        </p:txBody>
-      </p:sp>
-      <p:sp>
-        <p:nvSpPr>
-          <p:cNvPr id="15" name="Shape 13"/>
-          <p:cNvSpPr/>
-          <p:nvPr/>
-        </p:nvSpPr>
-        <p:spPr>
-          <a:xfrm>
-            <a:off x="566928" y="3712464"/>
-            <a:ext cx="5368900" cy="868680"/>
-          </a:xfrm>
-          <a:prstGeom prst="rect">
-            <a:avLst/>
+          <p:cNvPr id="16" name="Shape 14"/>
+          <p:cNvSpPr/>
+          <p:nvPr/>
+        </p:nvSpPr>
+        <p:spPr>
+          <a:xfrm>
+            <a:off x="502920" y="5193792"/>
+            <a:ext cx="11057839" cy="621792"/>
+          </a:xfrm>
+          <a:prstGeom prst="roundRect">
+            <a:avLst>
+              <a:gd name="adj" fmla="val 8824"/>
+            </a:avLst>
           </a:prstGeom>
           <a:solidFill>
             <a:srgbClr val="F7FAFC"/>
           </a:solidFill>
           <a:ln w="6350">
             <a:solidFill>
-              <a:srgbClr val="D9B668"/>
+              <a:srgbClr val="CBD5E0"/>
             </a:solidFill>
             <a:prstDash val="solid"/>
           </a:ln>
@@ -2948,58 +3092,38 @@
       </p:sp>
       <p:sp>
         <p:nvSpPr>
-          <p:cNvPr id="16" name="Shape 14"/>
-          <p:cNvSpPr/>
-          <p:nvPr/>
-        </p:nvSpPr>
-        <p:spPr>
-          <a:xfrm>
-            <a:off x="704088" y="3877056"/>
-            <a:ext cx="320040" cy="320040"/>
-          </a:xfrm>
-          <a:prstGeom prst="rect">
-            <a:avLst/>
-          </a:prstGeom>
-          <a:solidFill>
-            <a:srgbClr val="977024"/>
-          </a:solidFill>
-          <a:ln/>
-        </p:spPr>
-      </p:sp>
-      <p:sp>
-        <p:nvSpPr>
           <p:cNvPr id="17" name="Text 15"/>
           <p:cNvSpPr/>
           <p:nvPr/>
         </p:nvSpPr>
         <p:spPr>
           <a:xfrm>
-            <a:off x="704088" y="3877056"/>
-            <a:ext cx="320040" cy="320040"/>
-          </a:xfrm>
-          <a:prstGeom prst="rect">
-            <a:avLst/>
-          </a:prstGeom>
-          <a:noFill/>
-          <a:ln/>
-        </p:spPr>
-        <p:txBody>
-          <a:bodyPr wrap="square" rtlCol="0" anchor="ctr"/>
-          <a:lstStyle/>
-          <a:p>
-            <a:pPr algn="ctr" indent="0" marL="0">
-              <a:buNone/>
-            </a:pPr>
-            <a:r>
-              <a:rPr lang="en-US" sz="1100" b="1" dirty="0">
-                <a:solidFill>
-                  <a:srgbClr val="000000"/>
-                </a:solidFill>
-                <a:latin typeface="Pretendard" pitchFamily="34" charset="0"/>
-                <a:ea typeface="Pretendard" pitchFamily="34" charset="-122"/>
-                <a:cs typeface="Pretendard" pitchFamily="34" charset="-120"/>
-              </a:rPr>
-              <a:t>✓</a:t>
+            <a:off x="731520" y="5193792"/>
+            <a:ext cx="10600639" cy="621792"/>
+          </a:xfrm>
+          <a:prstGeom prst="rect">
+            <a:avLst/>
+          </a:prstGeom>
+          <a:noFill/>
+          <a:ln/>
+        </p:spPr>
+        <p:txBody>
+          <a:bodyPr wrap="square" lIns="0" tIns="0" rIns="0" bIns="0" rtlCol="0" anchor="ctr"/>
+          <a:lstStyle/>
+          <a:p>
+            <a:pPr indent="0" marL="0">
+              <a:buNone/>
+            </a:pPr>
+            <a:r>
+              <a:rPr lang="en-US" sz="1100" dirty="0">
+                <a:solidFill>
+                  <a:srgbClr val="10161F"/>
+                </a:solidFill>
+                <a:latin typeface="Pretendard" pitchFamily="34" charset="0"/>
+                <a:ea typeface="Pretendard" pitchFamily="34" charset="-122"/>
+                <a:cs typeface="Pretendard" pitchFamily="34" charset="-120"/>
+              </a:rPr>
+              <a:t>※ 본 리스크 체크는 공부 및 브로커 확인 기반이며, 매수 전 전문 실사팀(변호사/건축사)을 통한 정밀 실사가 필요합니다.</a:t>
             </a:r>
             <a:endParaRPr lang="en-US" sz="1100" dirty="0"/>
           </a:p>
@@ -3013,499 +3137,20 @@
         </p:nvSpPr>
         <p:spPr>
           <a:xfrm>
-            <a:off x="1115568" y="3803904"/>
-            <a:ext cx="4683100" cy="722376"/>
-          </a:xfrm>
-          <a:prstGeom prst="rect">
-            <a:avLst/>
-          </a:prstGeom>
-          <a:noFill/>
-          <a:ln/>
-        </p:spPr>
-        <p:txBody>
-          <a:bodyPr wrap="square" rtlCol="0" anchor="ctr"/>
+            <a:off x="502920" y="6382512"/>
+            <a:ext cx="7315200" cy="219456"/>
+          </a:xfrm>
+          <a:prstGeom prst="rect">
+            <a:avLst/>
+          </a:prstGeom>
+          <a:noFill/>
+          <a:ln/>
+        </p:spPr>
+        <p:txBody>
+          <a:bodyPr wrap="square" lIns="0" tIns="0" rIns="0" bIns="0" rtlCol="0" anchor="ctr"/>
           <a:lstStyle/>
           <a:p>
             <a:pPr indent="0" marL="0">
-              <a:lnSpc>
-                <a:spcPct val="110000"/>
-              </a:lnSpc>
-              <a:buNone/>
-            </a:pPr>
-            <a:r>
-              <a:rPr lang="en-US" sz="950" dirty="0">
-                <a:solidFill>
-                  <a:srgbClr val="10161F"/>
-                </a:solidFill>
-                <a:latin typeface="Pretendard" pitchFamily="34" charset="0"/>
-                <a:ea typeface="Pretendard" pitchFamily="34" charset="-122"/>
-                <a:cs typeface="Pretendard" pitchFamily="34" charset="-120"/>
-              </a:rPr>
-              <a:t>건축물대장상 위반건축물 등재 여부 및 불법 증축·용도변경 이행강제금 납부 이력 점검</a:t>
-            </a:r>
-            <a:endParaRPr lang="en-US" sz="950" dirty="0"/>
-          </a:p>
-        </p:txBody>
-      </p:sp>
-      <p:sp>
-        <p:nvSpPr>
-          <p:cNvPr id="19" name="Shape 17"/>
-          <p:cNvSpPr/>
-          <p:nvPr/>
-        </p:nvSpPr>
-        <p:spPr>
-          <a:xfrm>
-            <a:off x="6255868" y="1719072"/>
-            <a:ext cx="5368900" cy="868680"/>
-          </a:xfrm>
-          <a:prstGeom prst="rect">
-            <a:avLst/>
-          </a:prstGeom>
-          <a:solidFill>
-            <a:srgbClr val="F7FAFC"/>
-          </a:solidFill>
-          <a:ln w="6350">
-            <a:solidFill>
-              <a:srgbClr val="D9B668"/>
-            </a:solidFill>
-            <a:prstDash val="solid"/>
-          </a:ln>
-        </p:spPr>
-      </p:sp>
-      <p:sp>
-        <p:nvSpPr>
-          <p:cNvPr id="20" name="Shape 18"/>
-          <p:cNvSpPr/>
-          <p:nvPr/>
-        </p:nvSpPr>
-        <p:spPr>
-          <a:xfrm>
-            <a:off x="6393028" y="1883664"/>
-            <a:ext cx="320040" cy="320040"/>
-          </a:xfrm>
-          <a:prstGeom prst="rect">
-            <a:avLst/>
-          </a:prstGeom>
-          <a:solidFill>
-            <a:srgbClr val="977024"/>
-          </a:solidFill>
-          <a:ln/>
-        </p:spPr>
-      </p:sp>
-      <p:sp>
-        <p:nvSpPr>
-          <p:cNvPr id="21" name="Text 19"/>
-          <p:cNvSpPr/>
-          <p:nvPr/>
-        </p:nvSpPr>
-        <p:spPr>
-          <a:xfrm>
-            <a:off x="6393028" y="1883664"/>
-            <a:ext cx="320040" cy="320040"/>
-          </a:xfrm>
-          <a:prstGeom prst="rect">
-            <a:avLst/>
-          </a:prstGeom>
-          <a:noFill/>
-          <a:ln/>
-        </p:spPr>
-        <p:txBody>
-          <a:bodyPr wrap="square" rtlCol="0" anchor="ctr"/>
-          <a:lstStyle/>
-          <a:p>
-            <a:pPr algn="ctr" indent="0" marL="0">
-              <a:buNone/>
-            </a:pPr>
-            <a:r>
-              <a:rPr lang="en-US" sz="1100" b="1" dirty="0">
-                <a:solidFill>
-                  <a:srgbClr val="000000"/>
-                </a:solidFill>
-                <a:latin typeface="Pretendard" pitchFamily="34" charset="0"/>
-                <a:ea typeface="Pretendard" pitchFamily="34" charset="-122"/>
-                <a:cs typeface="Pretendard" pitchFamily="34" charset="-120"/>
-              </a:rPr>
-              <a:t>✓</a:t>
-            </a:r>
-            <a:endParaRPr lang="en-US" sz="1100" dirty="0"/>
-          </a:p>
-        </p:txBody>
-      </p:sp>
-      <p:sp>
-        <p:nvSpPr>
-          <p:cNvPr id="22" name="Text 20"/>
-          <p:cNvSpPr/>
-          <p:nvPr/>
-        </p:nvSpPr>
-        <p:spPr>
-          <a:xfrm>
-            <a:off x="6804508" y="1810512"/>
-            <a:ext cx="4683100" cy="722376"/>
-          </a:xfrm>
-          <a:prstGeom prst="rect">
-            <a:avLst/>
-          </a:prstGeom>
-          <a:noFill/>
-          <a:ln/>
-        </p:spPr>
-        <p:txBody>
-          <a:bodyPr wrap="square" rtlCol="0" anchor="ctr"/>
-          <a:lstStyle/>
-          <a:p>
-            <a:pPr indent="0" marL="0">
-              <a:lnSpc>
-                <a:spcPct val="110000"/>
-              </a:lnSpc>
-              <a:buNone/>
-            </a:pPr>
-            <a:r>
-              <a:rPr lang="en-US" sz="950" dirty="0">
-                <a:solidFill>
-                  <a:srgbClr val="10161F"/>
-                </a:solidFill>
-                <a:latin typeface="Pretendard" pitchFamily="34" charset="0"/>
-                <a:ea typeface="Pretendard" pitchFamily="34" charset="-122"/>
-                <a:cs typeface="Pretendard" pitchFamily="34" charset="-120"/>
-              </a:rPr>
-              <a:t>토지이용계획확인원상 도시계획시설 저촉, 건축선 후퇴, 지구단위계획 특별계획구역 확인</a:t>
-            </a:r>
-            <a:endParaRPr lang="en-US" sz="950" dirty="0"/>
-          </a:p>
-        </p:txBody>
-      </p:sp>
-      <p:sp>
-        <p:nvSpPr>
-          <p:cNvPr id="23" name="Shape 21"/>
-          <p:cNvSpPr/>
-          <p:nvPr/>
-        </p:nvSpPr>
-        <p:spPr>
-          <a:xfrm>
-            <a:off x="6255868" y="2715768"/>
-            <a:ext cx="5368900" cy="868680"/>
-          </a:xfrm>
-          <a:prstGeom prst="rect">
-            <a:avLst/>
-          </a:prstGeom>
-          <a:solidFill>
-            <a:srgbClr val="F7FAFC"/>
-          </a:solidFill>
-          <a:ln w="6350">
-            <a:solidFill>
-              <a:srgbClr val="D9B668"/>
-            </a:solidFill>
-            <a:prstDash val="solid"/>
-          </a:ln>
-        </p:spPr>
-      </p:sp>
-      <p:sp>
-        <p:nvSpPr>
-          <p:cNvPr id="24" name="Shape 22"/>
-          <p:cNvSpPr/>
-          <p:nvPr/>
-        </p:nvSpPr>
-        <p:spPr>
-          <a:xfrm>
-            <a:off x="6393028" y="2880360"/>
-            <a:ext cx="320040" cy="320040"/>
-          </a:xfrm>
-          <a:prstGeom prst="rect">
-            <a:avLst/>
-          </a:prstGeom>
-          <a:solidFill>
-            <a:srgbClr val="977024"/>
-          </a:solidFill>
-          <a:ln/>
-        </p:spPr>
-      </p:sp>
-      <p:sp>
-        <p:nvSpPr>
-          <p:cNvPr id="25" name="Text 23"/>
-          <p:cNvSpPr/>
-          <p:nvPr/>
-        </p:nvSpPr>
-        <p:spPr>
-          <a:xfrm>
-            <a:off x="6393028" y="2880360"/>
-            <a:ext cx="320040" cy="320040"/>
-          </a:xfrm>
-          <a:prstGeom prst="rect">
-            <a:avLst/>
-          </a:prstGeom>
-          <a:noFill/>
-          <a:ln/>
-        </p:spPr>
-        <p:txBody>
-          <a:bodyPr wrap="square" rtlCol="0" anchor="ctr"/>
-          <a:lstStyle/>
-          <a:p>
-            <a:pPr algn="ctr" indent="0" marL="0">
-              <a:buNone/>
-            </a:pPr>
-            <a:r>
-              <a:rPr lang="en-US" sz="1100" b="1" dirty="0">
-                <a:solidFill>
-                  <a:srgbClr val="000000"/>
-                </a:solidFill>
-                <a:latin typeface="Pretendard" pitchFamily="34" charset="0"/>
-                <a:ea typeface="Pretendard" pitchFamily="34" charset="-122"/>
-                <a:cs typeface="Pretendard" pitchFamily="34" charset="-120"/>
-              </a:rPr>
-              <a:t>✓</a:t>
-            </a:r>
-            <a:endParaRPr lang="en-US" sz="1100" dirty="0"/>
-          </a:p>
-        </p:txBody>
-      </p:sp>
-      <p:sp>
-        <p:nvSpPr>
-          <p:cNvPr id="26" name="Text 24"/>
-          <p:cNvSpPr/>
-          <p:nvPr/>
-        </p:nvSpPr>
-        <p:spPr>
-          <a:xfrm>
-            <a:off x="6804508" y="2807208"/>
-            <a:ext cx="4683100" cy="722376"/>
-          </a:xfrm>
-          <a:prstGeom prst="rect">
-            <a:avLst/>
-          </a:prstGeom>
-          <a:noFill/>
-          <a:ln/>
-        </p:spPr>
-        <p:txBody>
-          <a:bodyPr wrap="square" rtlCol="0" anchor="ctr"/>
-          <a:lstStyle/>
-          <a:p>
-            <a:pPr indent="0" marL="0">
-              <a:lnSpc>
-                <a:spcPct val="110000"/>
-              </a:lnSpc>
-              <a:buNone/>
-            </a:pPr>
-            <a:r>
-              <a:rPr lang="en-US" sz="950" dirty="0">
-                <a:solidFill>
-                  <a:srgbClr val="10161F"/>
-                </a:solidFill>
-                <a:latin typeface="Pretendard" pitchFamily="34" charset="0"/>
-                <a:ea typeface="Pretendard" pitchFamily="34" charset="-122"/>
-                <a:cs typeface="Pretendard" pitchFamily="34" charset="-120"/>
-              </a:rPr>
-              <a:t>기계식 주차기 정기 안전점검 합격증, 승강기 검사필증, 소방 완비증명서 실물 실사</a:t>
-            </a:r>
-            <a:endParaRPr lang="en-US" sz="950" dirty="0"/>
-          </a:p>
-        </p:txBody>
-      </p:sp>
-      <p:sp>
-        <p:nvSpPr>
-          <p:cNvPr id="27" name="Shape 25"/>
-          <p:cNvSpPr/>
-          <p:nvPr/>
-        </p:nvSpPr>
-        <p:spPr>
-          <a:xfrm>
-            <a:off x="6255868" y="3712464"/>
-            <a:ext cx="5368900" cy="868680"/>
-          </a:xfrm>
-          <a:prstGeom prst="rect">
-            <a:avLst/>
-          </a:prstGeom>
-          <a:solidFill>
-            <a:srgbClr val="F7FAFC"/>
-          </a:solidFill>
-          <a:ln w="6350">
-            <a:solidFill>
-              <a:srgbClr val="D9B668"/>
-            </a:solidFill>
-            <a:prstDash val="solid"/>
-          </a:ln>
-        </p:spPr>
-      </p:sp>
-      <p:sp>
-        <p:nvSpPr>
-          <p:cNvPr id="28" name="Shape 26"/>
-          <p:cNvSpPr/>
-          <p:nvPr/>
-        </p:nvSpPr>
-        <p:spPr>
-          <a:xfrm>
-            <a:off x="6393028" y="3877056"/>
-            <a:ext cx="320040" cy="320040"/>
-          </a:xfrm>
-          <a:prstGeom prst="rect">
-            <a:avLst/>
-          </a:prstGeom>
-          <a:solidFill>
-            <a:srgbClr val="977024"/>
-          </a:solidFill>
-          <a:ln/>
-        </p:spPr>
-      </p:sp>
-      <p:sp>
-        <p:nvSpPr>
-          <p:cNvPr id="29" name="Text 27"/>
-          <p:cNvSpPr/>
-          <p:nvPr/>
-        </p:nvSpPr>
-        <p:spPr>
-          <a:xfrm>
-            <a:off x="6393028" y="3877056"/>
-            <a:ext cx="320040" cy="320040"/>
-          </a:xfrm>
-          <a:prstGeom prst="rect">
-            <a:avLst/>
-          </a:prstGeom>
-          <a:noFill/>
-          <a:ln/>
-        </p:spPr>
-        <p:txBody>
-          <a:bodyPr wrap="square" rtlCol="0" anchor="ctr"/>
-          <a:lstStyle/>
-          <a:p>
-            <a:pPr algn="ctr" indent="0" marL="0">
-              <a:buNone/>
-            </a:pPr>
-            <a:r>
-              <a:rPr lang="en-US" sz="1100" b="1" dirty="0">
-                <a:solidFill>
-                  <a:srgbClr val="000000"/>
-                </a:solidFill>
-                <a:latin typeface="Pretendard" pitchFamily="34" charset="0"/>
-                <a:ea typeface="Pretendard" pitchFamily="34" charset="-122"/>
-                <a:cs typeface="Pretendard" pitchFamily="34" charset="-120"/>
-              </a:rPr>
-              <a:t>✓</a:t>
-            </a:r>
-            <a:endParaRPr lang="en-US" sz="1100" dirty="0"/>
-          </a:p>
-        </p:txBody>
-      </p:sp>
-      <p:sp>
-        <p:nvSpPr>
-          <p:cNvPr id="30" name="Text 28"/>
-          <p:cNvSpPr/>
-          <p:nvPr/>
-        </p:nvSpPr>
-        <p:spPr>
-          <a:xfrm>
-            <a:off x="6804508" y="3803904"/>
-            <a:ext cx="4683100" cy="722376"/>
-          </a:xfrm>
-          <a:prstGeom prst="rect">
-            <a:avLst/>
-          </a:prstGeom>
-          <a:noFill/>
-          <a:ln/>
-        </p:spPr>
-        <p:txBody>
-          <a:bodyPr wrap="square" rtlCol="0" anchor="ctr"/>
-          <a:lstStyle/>
-          <a:p>
-            <a:pPr indent="0" marL="0">
-              <a:lnSpc>
-                <a:spcPct val="110000"/>
-              </a:lnSpc>
-              <a:buNone/>
-            </a:pPr>
-            <a:r>
-              <a:rPr lang="en-US" sz="950" dirty="0">
-                <a:solidFill>
-                  <a:srgbClr val="10161F"/>
-                </a:solidFill>
-                <a:latin typeface="Pretendard" pitchFamily="34" charset="0"/>
-                <a:ea typeface="Pretendard" pitchFamily="34" charset="-122"/>
-                <a:cs typeface="Pretendard" pitchFamily="34" charset="-120"/>
-              </a:rPr>
-              <a:t>정화조 용량 대비 현 업종 적합성 및 하수도 원인자부담금 추가 부과 대상 여부 확인</a:t>
-            </a:r>
-            <a:endParaRPr lang="en-US" sz="950" dirty="0"/>
-          </a:p>
-        </p:txBody>
-      </p:sp>
-      <p:sp>
-        <p:nvSpPr>
-          <p:cNvPr id="31" name="Shape 29"/>
-          <p:cNvSpPr/>
-          <p:nvPr/>
-        </p:nvSpPr>
-        <p:spPr>
-          <a:xfrm>
-            <a:off x="566928" y="5760720"/>
-            <a:ext cx="11057839" cy="594360"/>
-          </a:xfrm>
-          <a:prstGeom prst="rect">
-            <a:avLst/>
-          </a:prstGeom>
-          <a:solidFill>
-            <a:srgbClr val="D9B668"/>
-          </a:solidFill>
-          <a:ln/>
-        </p:spPr>
-      </p:sp>
-      <p:sp>
-        <p:nvSpPr>
-          <p:cNvPr id="32" name="Text 30"/>
-          <p:cNvSpPr/>
-          <p:nvPr/>
-        </p:nvSpPr>
-        <p:spPr>
-          <a:xfrm>
-            <a:off x="749808" y="5833872"/>
-            <a:ext cx="10692079" cy="448056"/>
-          </a:xfrm>
-          <a:prstGeom prst="rect">
-            <a:avLst/>
-          </a:prstGeom>
-          <a:noFill/>
-          <a:ln/>
-        </p:spPr>
-        <p:txBody>
-          <a:bodyPr wrap="square" rtlCol="0" anchor="ctr"/>
-          <a:lstStyle/>
-          <a:p>
-            <a:pPr indent="0" marL="0">
-              <a:buNone/>
-            </a:pPr>
-            <a:r>
-              <a:rPr lang="en-US" sz="950" b="1" dirty="0">
-                <a:solidFill>
-                  <a:srgbClr val="977024"/>
-                </a:solidFill>
-                <a:latin typeface="Pretendard" pitchFamily="34" charset="0"/>
-                <a:ea typeface="Pretendard" pitchFamily="34" charset="-122"/>
-                <a:cs typeface="Pretendard" pitchFamily="34" charset="-120"/>
-              </a:rPr>
-              <a:t>※ 본 체크리스트는 계약 전 매수인의 안전한 자산 인수를 위한 필수 확인 사항이며, 실사(Due Diligence) 결과에 따라 매매 조건 및 잔금 일정이 조정될 수 있습니다.</a:t>
-            </a:r>
-            <a:endParaRPr lang="en-US" sz="950" dirty="0"/>
-          </a:p>
-        </p:txBody>
-      </p:sp>
-      <p:sp>
-        <p:nvSpPr>
-          <p:cNvPr id="33" name="Text 31"/>
-          <p:cNvSpPr/>
-          <p:nvPr/>
-        </p:nvSpPr>
-        <p:spPr>
-          <a:xfrm>
-            <a:off x="566928" y="6382512"/>
-            <a:ext cx="7315200" cy="219456"/>
-          </a:xfrm>
-          <a:prstGeom prst="rect">
-            <a:avLst/>
-          </a:prstGeom>
-          <a:noFill/>
-          <a:ln/>
-        </p:spPr>
-        <p:txBody>
-          <a:bodyPr wrap="square" lIns="0" tIns="0" rIns="0" bIns="0" rtlCol="0" anchor="ctr"/>
-          <a:lstStyle/>
-          <a:p>
-            <a:pPr indent="0" marL="0">
               <a:buNone/>
             </a:pPr>
             <a:r>
@@ -3525,13 +3170,13 @@
       </p:sp>
       <p:sp>
         <p:nvSpPr>
-          <p:cNvPr id="34" name="Text 32"/>
-          <p:cNvSpPr/>
-          <p:nvPr/>
-        </p:nvSpPr>
-        <p:spPr>
-          <a:xfrm>
-            <a:off x="10710367" y="6382512"/>
+          <p:cNvPr id="19" name="Text 17"/>
+          <p:cNvSpPr/>
+          <p:nvPr/>
+        </p:nvSpPr>
+        <p:spPr>
+          <a:xfrm>
+            <a:off x="10774375" y="6382512"/>
             <a:ext cx="914400" cy="219456"/>
           </a:xfrm>
           <a:prstGeom prst="rect">
@@ -3602,7 +3247,7 @@
         </p:nvSpPr>
         <p:spPr>
           <a:xfrm>
-            <a:off x="566928" y="457200"/>
+            <a:off x="502920" y="457200"/>
             <a:ext cx="384048" cy="384048"/>
           </a:xfrm>
           <a:prstGeom prst="ellipse">
@@ -3622,7 +3267,7 @@
         </p:nvSpPr>
         <p:spPr>
           <a:xfrm>
-            <a:off x="566928" y="457200"/>
+            <a:off x="502920" y="457200"/>
             <a:ext cx="384048" cy="384048"/>
           </a:xfrm>
           <a:prstGeom prst="rect">
@@ -3661,7 +3306,7 @@
         </p:nvSpPr>
         <p:spPr>
           <a:xfrm>
-            <a:off x="1133856" y="457200"/>
+            <a:off x="1069848" y="457200"/>
             <a:ext cx="10490911" cy="182880"/>
           </a:xfrm>
           <a:prstGeom prst="rect">
@@ -3686,7 +3331,7 @@
                 <a:ea typeface="Arial" pitchFamily="34" charset="-122"/>
                 <a:cs typeface="Arial" pitchFamily="34" charset="-120"/>
               </a:rPr>
-              <a:t>Process</a:t>
+              <a:t>Checklist</a:t>
             </a:r>
             <a:endParaRPr lang="en-US" sz="950" dirty="0"/>
           </a:p>
@@ -3700,7 +3345,7 @@
         </p:nvSpPr>
         <p:spPr>
           <a:xfrm>
-            <a:off x="1133856" y="640080"/>
+            <a:off x="1069848" y="640080"/>
             <a:ext cx="10490911" cy="365760"/>
           </a:xfrm>
           <a:prstGeom prst="rect">
@@ -3725,7 +3370,7 @@
                 <a:ea typeface="Pretendard" pitchFamily="34" charset="-122"/>
                 <a:cs typeface="Pretendard" pitchFamily="34" charset="-120"/>
               </a:rPr>
-              <a:t>진행 절차</a:t>
+              <a:t>실사 체크리스트</a:t>
             </a:r>
             <a:endParaRPr lang="en-US" sz="2300" dirty="0"/>
           </a:p>
@@ -3733,26 +3378,63 @@
       </p:sp>
       <p:sp>
         <p:nvSpPr>
-          <p:cNvPr id="6" name="Shape 4"/>
-          <p:cNvSpPr/>
-          <p:nvPr/>
-        </p:nvSpPr>
-        <p:spPr>
-          <a:xfrm>
-            <a:off x="566928" y="1572768"/>
-            <a:ext cx="11057839" cy="3200400"/>
-          </a:xfrm>
-          <a:prstGeom prst="roundRect">
-            <a:avLst>
-              <a:gd name="adj" fmla="val 1714"/>
-            </a:avLst>
+          <p:cNvPr id="6" name="Text 4"/>
+          <p:cNvSpPr/>
+          <p:nvPr/>
+        </p:nvSpPr>
+        <p:spPr>
+          <a:xfrm>
+            <a:off x="502920" y="1371600"/>
+            <a:ext cx="11057839" cy="237744"/>
+          </a:xfrm>
+          <a:prstGeom prst="rect">
+            <a:avLst/>
+          </a:prstGeom>
+          <a:noFill/>
+          <a:ln/>
+        </p:spPr>
+        <p:txBody>
+          <a:bodyPr wrap="square" lIns="0" tIns="0" rIns="0" bIns="0" rtlCol="0" anchor="ctr"/>
+          <a:lstStyle/>
+          <a:p>
+            <a:pPr indent="0" marL="0">
+              <a:buNone/>
+            </a:pPr>
+            <a:r>
+              <a:rPr lang="en-US" sz="1100" b="1" dirty="0">
+                <a:solidFill>
+                  <a:srgbClr val="10161F"/>
+                </a:solidFill>
+                <a:latin typeface="Pretendard" pitchFamily="34" charset="0"/>
+                <a:ea typeface="Pretendard" pitchFamily="34" charset="-122"/>
+                <a:cs typeface="Pretendard" pitchFamily="34" charset="-120"/>
+              </a:rPr>
+              <a:t>거래 안정성 확보를 위한 필수 법률·물리·임대차 실사 점검 항목 (총 6건)</a:t>
+            </a:r>
+            <a:endParaRPr lang="en-US" sz="1100" dirty="0"/>
+          </a:p>
+        </p:txBody>
+      </p:sp>
+      <p:sp>
+        <p:nvSpPr>
+          <p:cNvPr id="7" name="Shape 5"/>
+          <p:cNvSpPr/>
+          <p:nvPr/>
+        </p:nvSpPr>
+        <p:spPr>
+          <a:xfrm>
+            <a:off x="502920" y="1719072"/>
+            <a:ext cx="5368900" cy="868680"/>
+          </a:xfrm>
+          <a:prstGeom prst="rect">
+            <a:avLst/>
           </a:prstGeom>
           <a:solidFill>
             <a:srgbClr val="F7FAFC"/>
           </a:solidFill>
           <a:ln w="6350">
             <a:solidFill>
-              <a:srgbClr val="CBD5E0"/>
+              <a:srgbClr val="D9B668"/>
             </a:solidFill>
             <a:prstDash val="solid"/>
           </a:ln>
@@ -3760,73 +3442,73 @@
       </p:sp>
       <p:sp>
         <p:nvSpPr>
-          <p:cNvPr id="7" name="Shape 5"/>
-          <p:cNvSpPr/>
-          <p:nvPr/>
-        </p:nvSpPr>
-        <p:spPr>
-          <a:xfrm>
-            <a:off x="786384" y="1792224"/>
-            <a:ext cx="438912" cy="438912"/>
-          </a:xfrm>
-          <a:prstGeom prst="ellipse">
+          <p:cNvPr id="8" name="Shape 6"/>
+          <p:cNvSpPr/>
+          <p:nvPr/>
+        </p:nvSpPr>
+        <p:spPr>
+          <a:xfrm>
+            <a:off x="640080" y="1883664"/>
+            <a:ext cx="320040" cy="320040"/>
+          </a:xfrm>
+          <a:prstGeom prst="rect">
             <a:avLst/>
           </a:prstGeom>
           <a:solidFill>
-            <a:srgbClr val="B98A2E"/>
+            <a:srgbClr val="977024"/>
           </a:solidFill>
           <a:ln/>
         </p:spPr>
       </p:sp>
       <p:sp>
         <p:nvSpPr>
-          <p:cNvPr id="8" name="Text 6"/>
-          <p:cNvSpPr/>
-          <p:nvPr/>
-        </p:nvSpPr>
-        <p:spPr>
-          <a:xfrm>
-            <a:off x="786384" y="1792224"/>
-            <a:ext cx="438912" cy="438912"/>
-          </a:xfrm>
-          <a:prstGeom prst="rect">
-            <a:avLst/>
-          </a:prstGeom>
-          <a:noFill/>
-          <a:ln/>
-        </p:spPr>
-        <p:txBody>
-          <a:bodyPr wrap="square" lIns="0" tIns="0" rIns="0" bIns="0" rtlCol="0" anchor="ctr"/>
+          <p:cNvPr id="9" name="Text 7"/>
+          <p:cNvSpPr/>
+          <p:nvPr/>
+        </p:nvSpPr>
+        <p:spPr>
+          <a:xfrm>
+            <a:off x="640080" y="1883664"/>
+            <a:ext cx="320040" cy="320040"/>
+          </a:xfrm>
+          <a:prstGeom prst="rect">
+            <a:avLst/>
+          </a:prstGeom>
+          <a:noFill/>
+          <a:ln/>
+        </p:spPr>
+        <p:txBody>
+          <a:bodyPr wrap="square" rtlCol="0" anchor="ctr"/>
           <a:lstStyle/>
           <a:p>
             <a:pPr algn="ctr" indent="0" marL="0">
               <a:buNone/>
             </a:pPr>
             <a:r>
-              <a:rPr lang="en-US" sz="1400" b="1" dirty="0">
+              <a:rPr lang="en-US" sz="1100" b="1" dirty="0">
                 <a:solidFill>
                   <a:srgbClr val="FFFFFF"/>
                 </a:solidFill>
-                <a:latin typeface="Arial" pitchFamily="34" charset="0"/>
-                <a:ea typeface="Arial" pitchFamily="34" charset="-122"/>
-                <a:cs typeface="Arial" pitchFamily="34" charset="-120"/>
-              </a:rPr>
-              <a:t>01</a:t>
-            </a:r>
-            <a:endParaRPr lang="en-US" sz="1400" dirty="0"/>
-          </a:p>
-        </p:txBody>
-      </p:sp>
-      <p:sp>
-        <p:nvSpPr>
-          <p:cNvPr id="9" name="Text 7"/>
-          <p:cNvSpPr/>
-          <p:nvPr/>
-        </p:nvSpPr>
-        <p:spPr>
-          <a:xfrm>
-            <a:off x="786384" y="2304288"/>
-            <a:ext cx="10618927" cy="365760"/>
+                <a:latin typeface="Pretendard" pitchFamily="34" charset="0"/>
+                <a:ea typeface="Pretendard" pitchFamily="34" charset="-122"/>
+                <a:cs typeface="Pretendard" pitchFamily="34" charset="-120"/>
+              </a:rPr>
+              <a:t>✓</a:t>
+            </a:r>
+            <a:endParaRPr lang="en-US" sz="1100" dirty="0"/>
+          </a:p>
+        </p:txBody>
+      </p:sp>
+      <p:sp>
+        <p:nvSpPr>
+          <p:cNvPr id="10" name="Text 8"/>
+          <p:cNvSpPr/>
+          <p:nvPr/>
+        </p:nvSpPr>
+        <p:spPr>
+          <a:xfrm>
+            <a:off x="1051560" y="1810512"/>
+            <a:ext cx="4683100" cy="722376"/>
           </a:xfrm>
           <a:prstGeom prst="rect">
             <a:avLst/>
@@ -3839,10 +3521,13 @@
           <a:lstStyle/>
           <a:p>
             <a:pPr indent="0" marL="0">
-              <a:buNone/>
-            </a:pPr>
-            <a:r>
-              <a:rPr lang="en-US" sz="1600" b="1" dirty="0">
+              <a:lnSpc>
+                <a:spcPct val="110000"/>
+              </a:lnSpc>
+              <a:buNone/>
+            </a:pPr>
+            <a:r>
+              <a:rPr lang="en-US" sz="950" dirty="0">
                 <a:solidFill>
                   <a:srgbClr val="10161F"/>
                 </a:solidFill>
@@ -3850,38 +3535,125 @@
                 <a:ea typeface="Pretendard" pitchFamily="34" charset="-122"/>
                 <a:cs typeface="Pretendard" pitchFamily="34" charset="-120"/>
               </a:rPr>
-              <a:t>1단계</a:t>
-            </a:r>
-            <a:endParaRPr lang="en-US" sz="1600" dirty="0"/>
-          </a:p>
-        </p:txBody>
-      </p:sp>
-      <p:sp>
-        <p:nvSpPr>
-          <p:cNvPr id="10" name="Text 8"/>
-          <p:cNvSpPr/>
-          <p:nvPr/>
-        </p:nvSpPr>
-        <p:spPr>
-          <a:xfrm>
-            <a:off x="786384" y="2761488"/>
-            <a:ext cx="10618927" cy="1828800"/>
-          </a:xfrm>
-          <a:prstGeom prst="rect">
-            <a:avLst/>
-          </a:prstGeom>
-          <a:noFill/>
-          <a:ln/>
-        </p:spPr>
-        <p:txBody>
-          <a:bodyPr wrap="square" rtlCol="0" anchor="t"/>
+              <a:t>등기부등본 갑구/을구 권리관계 및 근저당 채권최고액 전액 말소 조건 원본 대조</a:t>
+            </a:r>
+            <a:endParaRPr lang="en-US" sz="950" dirty="0"/>
+          </a:p>
+        </p:txBody>
+      </p:sp>
+      <p:sp>
+        <p:nvSpPr>
+          <p:cNvPr id="11" name="Shape 9"/>
+          <p:cNvSpPr/>
+          <p:nvPr/>
+        </p:nvSpPr>
+        <p:spPr>
+          <a:xfrm>
+            <a:off x="502920" y="2715768"/>
+            <a:ext cx="5368900" cy="868680"/>
+          </a:xfrm>
+          <a:prstGeom prst="rect">
+            <a:avLst/>
+          </a:prstGeom>
+          <a:solidFill>
+            <a:srgbClr val="F7FAFC"/>
+          </a:solidFill>
+          <a:ln w="6350">
+            <a:solidFill>
+              <a:srgbClr val="D9B668"/>
+            </a:solidFill>
+            <a:prstDash val="solid"/>
+          </a:ln>
+        </p:spPr>
+      </p:sp>
+      <p:sp>
+        <p:nvSpPr>
+          <p:cNvPr id="12" name="Shape 10"/>
+          <p:cNvSpPr/>
+          <p:nvPr/>
+        </p:nvSpPr>
+        <p:spPr>
+          <a:xfrm>
+            <a:off x="640080" y="2880360"/>
+            <a:ext cx="320040" cy="320040"/>
+          </a:xfrm>
+          <a:prstGeom prst="rect">
+            <a:avLst/>
+          </a:prstGeom>
+          <a:solidFill>
+            <a:srgbClr val="977024"/>
+          </a:solidFill>
+          <a:ln/>
+        </p:spPr>
+      </p:sp>
+      <p:sp>
+        <p:nvSpPr>
+          <p:cNvPr id="13" name="Text 11"/>
+          <p:cNvSpPr/>
+          <p:nvPr/>
+        </p:nvSpPr>
+        <p:spPr>
+          <a:xfrm>
+            <a:off x="640080" y="2880360"/>
+            <a:ext cx="320040" cy="320040"/>
+          </a:xfrm>
+          <a:prstGeom prst="rect">
+            <a:avLst/>
+          </a:prstGeom>
+          <a:noFill/>
+          <a:ln/>
+        </p:spPr>
+        <p:txBody>
+          <a:bodyPr wrap="square" rtlCol="0" anchor="ctr"/>
+          <a:lstStyle/>
+          <a:p>
+            <a:pPr algn="ctr" indent="0" marL="0">
+              <a:buNone/>
+            </a:pPr>
+            <a:r>
+              <a:rPr lang="en-US" sz="1100" b="1" dirty="0">
+                <a:solidFill>
+                  <a:srgbClr val="FFFFFF"/>
+                </a:solidFill>
+                <a:latin typeface="Pretendard" pitchFamily="34" charset="0"/>
+                <a:ea typeface="Pretendard" pitchFamily="34" charset="-122"/>
+                <a:cs typeface="Pretendard" pitchFamily="34" charset="-120"/>
+              </a:rPr>
+              <a:t>✓</a:t>
+            </a:r>
+            <a:endParaRPr lang="en-US" sz="1100" dirty="0"/>
+          </a:p>
+        </p:txBody>
+      </p:sp>
+      <p:sp>
+        <p:nvSpPr>
+          <p:cNvPr id="14" name="Text 12"/>
+          <p:cNvSpPr/>
+          <p:nvPr/>
+        </p:nvSpPr>
+        <p:spPr>
+          <a:xfrm>
+            <a:off x="1051560" y="2807208"/>
+            <a:ext cx="4683100" cy="722376"/>
+          </a:xfrm>
+          <a:prstGeom prst="rect">
+            <a:avLst/>
+          </a:prstGeom>
+          <a:noFill/>
+          <a:ln/>
+        </p:spPr>
+        <p:txBody>
+          <a:bodyPr wrap="square" rtlCol="0" anchor="ctr"/>
           <a:lstStyle/>
           <a:p>
             <a:pPr indent="0" marL="0">
-              <a:buNone/>
-            </a:pPr>
-            <a:r>
-              <a:rPr lang="en-US" sz="1100" dirty="0">
+              <a:lnSpc>
+                <a:spcPct val="110000"/>
+              </a:lnSpc>
+              <a:buNone/>
+            </a:pPr>
+            <a:r>
+              <a:rPr lang="en-US" sz="950" dirty="0">
                 <a:solidFill>
                   <a:srgbClr val="10161F"/>
                 </a:solidFill>
@@ -3889,16 +3661,125 @@
                 <a:ea typeface="Pretendard" pitchFamily="34" charset="-122"/>
                 <a:cs typeface="Pretendard" pitchFamily="34" charset="-120"/>
               </a:rPr>
-              <a:t>현장 실사 및 임대차계약서 원본 확인을 권장합니다.</a:t>
+              <a:t>임대차 원본 계약서 대조 (보증금, 월임대료, 관리비 실입금 내역 및 제소전화해조서)</a:t>
+            </a:r>
+            <a:endParaRPr lang="en-US" sz="950" dirty="0"/>
+          </a:p>
+        </p:txBody>
+      </p:sp>
+      <p:sp>
+        <p:nvSpPr>
+          <p:cNvPr id="15" name="Shape 13"/>
+          <p:cNvSpPr/>
+          <p:nvPr/>
+        </p:nvSpPr>
+        <p:spPr>
+          <a:xfrm>
+            <a:off x="502920" y="3712464"/>
+            <a:ext cx="5368900" cy="868680"/>
+          </a:xfrm>
+          <a:prstGeom prst="rect">
+            <a:avLst/>
+          </a:prstGeom>
+          <a:solidFill>
+            <a:srgbClr val="F7FAFC"/>
+          </a:solidFill>
+          <a:ln w="6350">
+            <a:solidFill>
+              <a:srgbClr val="D9B668"/>
+            </a:solidFill>
+            <a:prstDash val="solid"/>
+          </a:ln>
+        </p:spPr>
+      </p:sp>
+      <p:sp>
+        <p:nvSpPr>
+          <p:cNvPr id="16" name="Shape 14"/>
+          <p:cNvSpPr/>
+          <p:nvPr/>
+        </p:nvSpPr>
+        <p:spPr>
+          <a:xfrm>
+            <a:off x="640080" y="3877056"/>
+            <a:ext cx="320040" cy="320040"/>
+          </a:xfrm>
+          <a:prstGeom prst="rect">
+            <a:avLst/>
+          </a:prstGeom>
+          <a:solidFill>
+            <a:srgbClr val="977024"/>
+          </a:solidFill>
+          <a:ln/>
+        </p:spPr>
+      </p:sp>
+      <p:sp>
+        <p:nvSpPr>
+          <p:cNvPr id="17" name="Text 15"/>
+          <p:cNvSpPr/>
+          <p:nvPr/>
+        </p:nvSpPr>
+        <p:spPr>
+          <a:xfrm>
+            <a:off x="640080" y="3877056"/>
+            <a:ext cx="320040" cy="320040"/>
+          </a:xfrm>
+          <a:prstGeom prst="rect">
+            <a:avLst/>
+          </a:prstGeom>
+          <a:noFill/>
+          <a:ln/>
+        </p:spPr>
+        <p:txBody>
+          <a:bodyPr wrap="square" rtlCol="0" anchor="ctr"/>
+          <a:lstStyle/>
+          <a:p>
+            <a:pPr algn="ctr" indent="0" marL="0">
+              <a:buNone/>
+            </a:pPr>
+            <a:r>
+              <a:rPr lang="en-US" sz="1100" b="1" dirty="0">
+                <a:solidFill>
+                  <a:srgbClr val="FFFFFF"/>
+                </a:solidFill>
+                <a:latin typeface="Pretendard" pitchFamily="34" charset="0"/>
+                <a:ea typeface="Pretendard" pitchFamily="34" charset="-122"/>
+                <a:cs typeface="Pretendard" pitchFamily="34" charset="-120"/>
+              </a:rPr>
+              <a:t>✓</a:t>
             </a:r>
             <a:endParaRPr lang="en-US" sz="1100" dirty="0"/>
           </a:p>
+        </p:txBody>
+      </p:sp>
+      <p:sp>
+        <p:nvSpPr>
+          <p:cNvPr id="18" name="Text 16"/>
+          <p:cNvSpPr/>
+          <p:nvPr/>
+        </p:nvSpPr>
+        <p:spPr>
+          <a:xfrm>
+            <a:off x="1051560" y="3803904"/>
+            <a:ext cx="4683100" cy="722376"/>
+          </a:xfrm>
+          <a:prstGeom prst="rect">
+            <a:avLst/>
+          </a:prstGeom>
+          <a:noFill/>
+          <a:ln/>
+        </p:spPr>
+        <p:txBody>
+          <a:bodyPr wrap="square" rtlCol="0" anchor="ctr"/>
+          <a:lstStyle/>
           <a:p>
             <a:pPr indent="0" marL="0">
-              <a:buNone/>
-            </a:pPr>
-            <a:r>
-              <a:rPr lang="en-US" sz="1100" dirty="0">
+              <a:lnSpc>
+                <a:spcPct val="110000"/>
+              </a:lnSpc>
+              <a:buNone/>
+            </a:pPr>
+            <a:r>
+              <a:rPr lang="en-US" sz="950" dirty="0">
                 <a:solidFill>
                   <a:srgbClr val="10161F"/>
                 </a:solidFill>
@@ -3906,7 +3787,91 @@
                 <a:ea typeface="Pretendard" pitchFamily="34" charset="-122"/>
                 <a:cs typeface="Pretendard" pitchFamily="34" charset="-120"/>
               </a:rPr>
-              <a:t>현장 실사 및 임대차계약서 원본 확인을 권장합니다.</a:t>
+              <a:t>건축물대장상 위반건축물 등재 여부 및 불법 증축·용도변경 이행강제금 납부 이력 점검</a:t>
+            </a:r>
+            <a:endParaRPr lang="en-US" sz="950" dirty="0"/>
+          </a:p>
+        </p:txBody>
+      </p:sp>
+      <p:sp>
+        <p:nvSpPr>
+          <p:cNvPr id="19" name="Shape 17"/>
+          <p:cNvSpPr/>
+          <p:nvPr/>
+        </p:nvSpPr>
+        <p:spPr>
+          <a:xfrm>
+            <a:off x="6191860" y="1719072"/>
+            <a:ext cx="5368900" cy="868680"/>
+          </a:xfrm>
+          <a:prstGeom prst="rect">
+            <a:avLst/>
+          </a:prstGeom>
+          <a:solidFill>
+            <a:srgbClr val="F7FAFC"/>
+          </a:solidFill>
+          <a:ln w="6350">
+            <a:solidFill>
+              <a:srgbClr val="D9B668"/>
+            </a:solidFill>
+            <a:prstDash val="solid"/>
+          </a:ln>
+        </p:spPr>
+      </p:sp>
+      <p:sp>
+        <p:nvSpPr>
+          <p:cNvPr id="20" name="Shape 18"/>
+          <p:cNvSpPr/>
+          <p:nvPr/>
+        </p:nvSpPr>
+        <p:spPr>
+          <a:xfrm>
+            <a:off x="6329020" y="1883664"/>
+            <a:ext cx="320040" cy="320040"/>
+          </a:xfrm>
+          <a:prstGeom prst="rect">
+            <a:avLst/>
+          </a:prstGeom>
+          <a:solidFill>
+            <a:srgbClr val="977024"/>
+          </a:solidFill>
+          <a:ln/>
+        </p:spPr>
+      </p:sp>
+      <p:sp>
+        <p:nvSpPr>
+          <p:cNvPr id="21" name="Text 19"/>
+          <p:cNvSpPr/>
+          <p:nvPr/>
+        </p:nvSpPr>
+        <p:spPr>
+          <a:xfrm>
+            <a:off x="6329020" y="1883664"/>
+            <a:ext cx="320040" cy="320040"/>
+          </a:xfrm>
+          <a:prstGeom prst="rect">
+            <a:avLst/>
+          </a:prstGeom>
+          <a:noFill/>
+          <a:ln/>
+        </p:spPr>
+        <p:txBody>
+          <a:bodyPr wrap="square" rtlCol="0" anchor="ctr"/>
+          <a:lstStyle/>
+          <a:p>
+            <a:pPr algn="ctr" indent="0" marL="0">
+              <a:buNone/>
+            </a:pPr>
+            <a:r>
+              <a:rPr lang="en-US" sz="1100" b="1" dirty="0">
+                <a:solidFill>
+                  <a:srgbClr val="FFFFFF"/>
+                </a:solidFill>
+                <a:latin typeface="Pretendard" pitchFamily="34" charset="0"/>
+                <a:ea typeface="Pretendard" pitchFamily="34" charset="-122"/>
+                <a:cs typeface="Pretendard" pitchFamily="34" charset="-120"/>
+              </a:rPr>
+              <a:t>✓</a:t>
             </a:r>
             <a:endParaRPr lang="en-US" sz="1100" dirty="0"/>
           </a:p>
@@ -3914,13 +3879,366 @@
       </p:sp>
       <p:sp>
         <p:nvSpPr>
-          <p:cNvPr id="11" name="Text 9"/>
-          <p:cNvSpPr/>
-          <p:nvPr/>
-        </p:nvSpPr>
-        <p:spPr>
-          <a:xfrm>
-            <a:off x="566928" y="6382512"/>
+          <p:cNvPr id="22" name="Text 20"/>
+          <p:cNvSpPr/>
+          <p:nvPr/>
+        </p:nvSpPr>
+        <p:spPr>
+          <a:xfrm>
+            <a:off x="6740500" y="1810512"/>
+            <a:ext cx="4683100" cy="722376"/>
+          </a:xfrm>
+          <a:prstGeom prst="rect">
+            <a:avLst/>
+          </a:prstGeom>
+          <a:noFill/>
+          <a:ln/>
+        </p:spPr>
+        <p:txBody>
+          <a:bodyPr wrap="square" rtlCol="0" anchor="ctr"/>
+          <a:lstStyle/>
+          <a:p>
+            <a:pPr indent="0" marL="0">
+              <a:lnSpc>
+                <a:spcPct val="110000"/>
+              </a:lnSpc>
+              <a:buNone/>
+            </a:pPr>
+            <a:r>
+              <a:rPr lang="en-US" sz="950" dirty="0">
+                <a:solidFill>
+                  <a:srgbClr val="10161F"/>
+                </a:solidFill>
+                <a:latin typeface="Pretendard" pitchFamily="34" charset="0"/>
+                <a:ea typeface="Pretendard" pitchFamily="34" charset="-122"/>
+                <a:cs typeface="Pretendard" pitchFamily="34" charset="-120"/>
+              </a:rPr>
+              <a:t>토지이용계획확인원상 도시계획시설 저촉, 건축선 후퇴, 지구단위계획 특별계획구역 확인</a:t>
+            </a:r>
+            <a:endParaRPr lang="en-US" sz="950" dirty="0"/>
+          </a:p>
+        </p:txBody>
+      </p:sp>
+      <p:sp>
+        <p:nvSpPr>
+          <p:cNvPr id="23" name="Shape 21"/>
+          <p:cNvSpPr/>
+          <p:nvPr/>
+        </p:nvSpPr>
+        <p:spPr>
+          <a:xfrm>
+            <a:off x="6191860" y="2715768"/>
+            <a:ext cx="5368900" cy="868680"/>
+          </a:xfrm>
+          <a:prstGeom prst="rect">
+            <a:avLst/>
+          </a:prstGeom>
+          <a:solidFill>
+            <a:srgbClr val="F7FAFC"/>
+          </a:solidFill>
+          <a:ln w="6350">
+            <a:solidFill>
+              <a:srgbClr val="D9B668"/>
+            </a:solidFill>
+            <a:prstDash val="solid"/>
+          </a:ln>
+        </p:spPr>
+      </p:sp>
+      <p:sp>
+        <p:nvSpPr>
+          <p:cNvPr id="24" name="Shape 22"/>
+          <p:cNvSpPr/>
+          <p:nvPr/>
+        </p:nvSpPr>
+        <p:spPr>
+          <a:xfrm>
+            <a:off x="6329020" y="2880360"/>
+            <a:ext cx="320040" cy="320040"/>
+          </a:xfrm>
+          <a:prstGeom prst="rect">
+            <a:avLst/>
+          </a:prstGeom>
+          <a:solidFill>
+            <a:srgbClr val="977024"/>
+          </a:solidFill>
+          <a:ln/>
+        </p:spPr>
+      </p:sp>
+      <p:sp>
+        <p:nvSpPr>
+          <p:cNvPr id="25" name="Text 23"/>
+          <p:cNvSpPr/>
+          <p:nvPr/>
+        </p:nvSpPr>
+        <p:spPr>
+          <a:xfrm>
+            <a:off x="6329020" y="2880360"/>
+            <a:ext cx="320040" cy="320040"/>
+          </a:xfrm>
+          <a:prstGeom prst="rect">
+            <a:avLst/>
+          </a:prstGeom>
+          <a:noFill/>
+          <a:ln/>
+        </p:spPr>
+        <p:txBody>
+          <a:bodyPr wrap="square" rtlCol="0" anchor="ctr"/>
+          <a:lstStyle/>
+          <a:p>
+            <a:pPr algn="ctr" indent="0" marL="0">
+              <a:buNone/>
+            </a:pPr>
+            <a:r>
+              <a:rPr lang="en-US" sz="1100" b="1" dirty="0">
+                <a:solidFill>
+                  <a:srgbClr val="FFFFFF"/>
+                </a:solidFill>
+                <a:latin typeface="Pretendard" pitchFamily="34" charset="0"/>
+                <a:ea typeface="Pretendard" pitchFamily="34" charset="-122"/>
+                <a:cs typeface="Pretendard" pitchFamily="34" charset="-120"/>
+              </a:rPr>
+              <a:t>✓</a:t>
+            </a:r>
+            <a:endParaRPr lang="en-US" sz="1100" dirty="0"/>
+          </a:p>
+        </p:txBody>
+      </p:sp>
+      <p:sp>
+        <p:nvSpPr>
+          <p:cNvPr id="26" name="Text 24"/>
+          <p:cNvSpPr/>
+          <p:nvPr/>
+        </p:nvSpPr>
+        <p:spPr>
+          <a:xfrm>
+            <a:off x="6740500" y="2807208"/>
+            <a:ext cx="4683100" cy="722376"/>
+          </a:xfrm>
+          <a:prstGeom prst="rect">
+            <a:avLst/>
+          </a:prstGeom>
+          <a:noFill/>
+          <a:ln/>
+        </p:spPr>
+        <p:txBody>
+          <a:bodyPr wrap="square" rtlCol="0" anchor="ctr"/>
+          <a:lstStyle/>
+          <a:p>
+            <a:pPr indent="0" marL="0">
+              <a:lnSpc>
+                <a:spcPct val="110000"/>
+              </a:lnSpc>
+              <a:buNone/>
+            </a:pPr>
+            <a:r>
+              <a:rPr lang="en-US" sz="950" dirty="0">
+                <a:solidFill>
+                  <a:srgbClr val="10161F"/>
+                </a:solidFill>
+                <a:latin typeface="Pretendard" pitchFamily="34" charset="0"/>
+                <a:ea typeface="Pretendard" pitchFamily="34" charset="-122"/>
+                <a:cs typeface="Pretendard" pitchFamily="34" charset="-120"/>
+              </a:rPr>
+              <a:t>기계식 주차기 정기 안전점검 합격증, 승강기 검사필증, 소방 완비증명서 실물 실사</a:t>
+            </a:r>
+            <a:endParaRPr lang="en-US" sz="950" dirty="0"/>
+          </a:p>
+        </p:txBody>
+      </p:sp>
+      <p:sp>
+        <p:nvSpPr>
+          <p:cNvPr id="27" name="Shape 25"/>
+          <p:cNvSpPr/>
+          <p:nvPr/>
+        </p:nvSpPr>
+        <p:spPr>
+          <a:xfrm>
+            <a:off x="6191860" y="3712464"/>
+            <a:ext cx="5368900" cy="868680"/>
+          </a:xfrm>
+          <a:prstGeom prst="rect">
+            <a:avLst/>
+          </a:prstGeom>
+          <a:solidFill>
+            <a:srgbClr val="F7FAFC"/>
+          </a:solidFill>
+          <a:ln w="6350">
+            <a:solidFill>
+              <a:srgbClr val="D9B668"/>
+            </a:solidFill>
+            <a:prstDash val="solid"/>
+          </a:ln>
+        </p:spPr>
+      </p:sp>
+      <p:sp>
+        <p:nvSpPr>
+          <p:cNvPr id="28" name="Shape 26"/>
+          <p:cNvSpPr/>
+          <p:nvPr/>
+        </p:nvSpPr>
+        <p:spPr>
+          <a:xfrm>
+            <a:off x="6329020" y="3877056"/>
+            <a:ext cx="320040" cy="320040"/>
+          </a:xfrm>
+          <a:prstGeom prst="rect">
+            <a:avLst/>
+          </a:prstGeom>
+          <a:solidFill>
+            <a:srgbClr val="977024"/>
+          </a:solidFill>
+          <a:ln/>
+        </p:spPr>
+      </p:sp>
+      <p:sp>
+        <p:nvSpPr>
+          <p:cNvPr id="29" name="Text 27"/>
+          <p:cNvSpPr/>
+          <p:nvPr/>
+        </p:nvSpPr>
+        <p:spPr>
+          <a:xfrm>
+            <a:off x="6329020" y="3877056"/>
+            <a:ext cx="320040" cy="320040"/>
+          </a:xfrm>
+          <a:prstGeom prst="rect">
+            <a:avLst/>
+          </a:prstGeom>
+          <a:noFill/>
+          <a:ln/>
+        </p:spPr>
+        <p:txBody>
+          <a:bodyPr wrap="square" rtlCol="0" anchor="ctr"/>
+          <a:lstStyle/>
+          <a:p>
+            <a:pPr algn="ctr" indent="0" marL="0">
+              <a:buNone/>
+            </a:pPr>
+            <a:r>
+              <a:rPr lang="en-US" sz="1100" b="1" dirty="0">
+                <a:solidFill>
+                  <a:srgbClr val="FFFFFF"/>
+                </a:solidFill>
+                <a:latin typeface="Pretendard" pitchFamily="34" charset="0"/>
+                <a:ea typeface="Pretendard" pitchFamily="34" charset="-122"/>
+                <a:cs typeface="Pretendard" pitchFamily="34" charset="-120"/>
+              </a:rPr>
+              <a:t>✓</a:t>
+            </a:r>
+            <a:endParaRPr lang="en-US" sz="1100" dirty="0"/>
+          </a:p>
+        </p:txBody>
+      </p:sp>
+      <p:sp>
+        <p:nvSpPr>
+          <p:cNvPr id="30" name="Text 28"/>
+          <p:cNvSpPr/>
+          <p:nvPr/>
+        </p:nvSpPr>
+        <p:spPr>
+          <a:xfrm>
+            <a:off x="6740500" y="3803904"/>
+            <a:ext cx="4683100" cy="722376"/>
+          </a:xfrm>
+          <a:prstGeom prst="rect">
+            <a:avLst/>
+          </a:prstGeom>
+          <a:noFill/>
+          <a:ln/>
+        </p:spPr>
+        <p:txBody>
+          <a:bodyPr wrap="square" rtlCol="0" anchor="ctr"/>
+          <a:lstStyle/>
+          <a:p>
+            <a:pPr indent="0" marL="0">
+              <a:lnSpc>
+                <a:spcPct val="110000"/>
+              </a:lnSpc>
+              <a:buNone/>
+            </a:pPr>
+            <a:r>
+              <a:rPr lang="en-US" sz="950" dirty="0">
+                <a:solidFill>
+                  <a:srgbClr val="10161F"/>
+                </a:solidFill>
+                <a:latin typeface="Pretendard" pitchFamily="34" charset="0"/>
+                <a:ea typeface="Pretendard" pitchFamily="34" charset="-122"/>
+                <a:cs typeface="Pretendard" pitchFamily="34" charset="-120"/>
+              </a:rPr>
+              <a:t>정화조 용량 대비 현 업종 적합성 및 하수도 원인자부담금 추가 부과 대상 여부 확인</a:t>
+            </a:r>
+            <a:endParaRPr lang="en-US" sz="950" dirty="0"/>
+          </a:p>
+        </p:txBody>
+      </p:sp>
+      <p:sp>
+        <p:nvSpPr>
+          <p:cNvPr id="31" name="Shape 29"/>
+          <p:cNvSpPr/>
+          <p:nvPr/>
+        </p:nvSpPr>
+        <p:spPr>
+          <a:xfrm>
+            <a:off x="502920" y="5349240"/>
+            <a:ext cx="11057839" cy="457200"/>
+          </a:xfrm>
+          <a:prstGeom prst="rect">
+            <a:avLst/>
+          </a:prstGeom>
+          <a:solidFill>
+            <a:srgbClr val="D9B668"/>
+          </a:solidFill>
+          <a:ln/>
+        </p:spPr>
+      </p:sp>
+      <p:sp>
+        <p:nvSpPr>
+          <p:cNvPr id="32" name="Text 30"/>
+          <p:cNvSpPr/>
+          <p:nvPr/>
+        </p:nvSpPr>
+        <p:spPr>
+          <a:xfrm>
+            <a:off x="685800" y="5422392"/>
+            <a:ext cx="10692079" cy="310896"/>
+          </a:xfrm>
+          <a:prstGeom prst="rect">
+            <a:avLst/>
+          </a:prstGeom>
+          <a:noFill/>
+          <a:ln/>
+        </p:spPr>
+        <p:txBody>
+          <a:bodyPr wrap="square" rtlCol="0" anchor="ctr"/>
+          <a:lstStyle/>
+          <a:p>
+            <a:pPr indent="0" marL="0">
+              <a:buNone/>
+            </a:pPr>
+            <a:r>
+              <a:rPr lang="en-US" sz="950" b="1" dirty="0">
+                <a:solidFill>
+                  <a:srgbClr val="977024"/>
+                </a:solidFill>
+                <a:latin typeface="Pretendard" pitchFamily="34" charset="0"/>
+                <a:ea typeface="Pretendard" pitchFamily="34" charset="-122"/>
+                <a:cs typeface="Pretendard" pitchFamily="34" charset="-120"/>
+              </a:rPr>
+              <a:t>※ 본 체크리스트는 계약 전 매수인의 안전한 자산 인수를 위한 필수 확인 사항이며, 실사(Due Diligence) 결과에 따라 매매 조건 및 잔금 일정이 조정될 수 있습니다.</a:t>
+            </a:r>
+            <a:endParaRPr lang="en-US" sz="950" dirty="0"/>
+          </a:p>
+        </p:txBody>
+      </p:sp>
+      <p:sp>
+        <p:nvSpPr>
+          <p:cNvPr id="33" name="Text 31"/>
+          <p:cNvSpPr/>
+          <p:nvPr/>
+        </p:nvSpPr>
+        <p:spPr>
+          <a:xfrm>
+            <a:off x="502920" y="6382512"/>
             <a:ext cx="7315200" cy="219456"/>
           </a:xfrm>
           <a:prstGeom prst="rect">
@@ -3953,13 +4271,13 @@
       </p:sp>
       <p:sp>
         <p:nvSpPr>
-          <p:cNvPr id="12" name="Text 10"/>
-          <p:cNvSpPr/>
-          <p:nvPr/>
-        </p:nvSpPr>
-        <p:spPr>
-          <a:xfrm>
-            <a:off x="10710367" y="6382512"/>
+          <p:cNvPr id="34" name="Text 32"/>
+          <p:cNvSpPr/>
+          <p:nvPr/>
+        </p:nvSpPr>
+        <p:spPr>
+          <a:xfrm>
+            <a:off x="10774375" y="6382512"/>
             <a:ext cx="914400" cy="219456"/>
           </a:xfrm>
           <a:prstGeom prst="rect">
@@ -4001,6 +4319,434 @@
 <file path=ppt/slides/slide12.xml><?xml version="1.0" encoding="utf-8"?>
 <p:sld xmlns:a="http://schemas.openxmlformats.org/drawingml/2006/main" xmlns:r="http://schemas.openxmlformats.org/officeDocument/2006/relationships" xmlns:p="http://schemas.openxmlformats.org/presentationml/2006/main">
   <p:cSld name="Slide 12">
+    <p:bg>
+      <p:bgPr>
+        <a:solidFill>
+          <a:srgbClr val="FFFFFF"/>
+        </a:solidFill>
+      </p:bgPr>
+    </p:bg>
+    <p:spTree>
+      <p:nvGrpSpPr>
+        <p:cNvPr id="1" name=""/>
+        <p:cNvGrpSpPr/>
+        <p:nvPr/>
+      </p:nvGrpSpPr>
+      <p:grpSpPr>
+        <a:xfrm>
+          <a:off x="0" y="0"/>
+          <a:ext cx="0" cy="0"/>
+          <a:chOff x="0" y="0"/>
+          <a:chExt cx="0" cy="0"/>
+        </a:xfrm>
+      </p:grpSpPr>
+      <p:sp>
+        <p:nvSpPr>
+          <p:cNvPr id="2" name="Shape 0"/>
+          <p:cNvSpPr/>
+          <p:nvPr/>
+        </p:nvSpPr>
+        <p:spPr>
+          <a:xfrm>
+            <a:off x="502920" y="457200"/>
+            <a:ext cx="384048" cy="384048"/>
+          </a:xfrm>
+          <a:prstGeom prst="ellipse">
+            <a:avLst/>
+          </a:prstGeom>
+          <a:solidFill>
+            <a:srgbClr val="B98A2E"/>
+          </a:solidFill>
+          <a:ln/>
+        </p:spPr>
+      </p:sp>
+      <p:sp>
+        <p:nvSpPr>
+          <p:cNvPr id="3" name="Text 1"/>
+          <p:cNvSpPr/>
+          <p:nvPr/>
+        </p:nvSpPr>
+        <p:spPr>
+          <a:xfrm>
+            <a:off x="502920" y="457200"/>
+            <a:ext cx="384048" cy="384048"/>
+          </a:xfrm>
+          <a:prstGeom prst="rect">
+            <a:avLst/>
+          </a:prstGeom>
+          <a:noFill/>
+          <a:ln/>
+        </p:spPr>
+        <p:txBody>
+          <a:bodyPr wrap="square" lIns="0" tIns="0" rIns="0" bIns="0" rtlCol="0" anchor="ctr"/>
+          <a:lstStyle/>
+          <a:p>
+            <a:pPr algn="ctr" indent="0" marL="0">
+              <a:buNone/>
+            </a:pPr>
+            <a:r>
+              <a:rPr lang="en-US" sz="1300" b="1" dirty="0">
+                <a:solidFill>
+                  <a:srgbClr val="FFFFFF"/>
+                </a:solidFill>
+                <a:latin typeface="Arial" pitchFamily="34" charset="0"/>
+                <a:ea typeface="Arial" pitchFamily="34" charset="-122"/>
+                <a:cs typeface="Arial" pitchFamily="34" charset="-120"/>
+              </a:rPr>
+              <a:t>12</a:t>
+            </a:r>
+            <a:endParaRPr lang="en-US" sz="1300" dirty="0"/>
+          </a:p>
+        </p:txBody>
+      </p:sp>
+      <p:sp>
+        <p:nvSpPr>
+          <p:cNvPr id="4" name="Text 2"/>
+          <p:cNvSpPr/>
+          <p:nvPr/>
+        </p:nvSpPr>
+        <p:spPr>
+          <a:xfrm>
+            <a:off x="1069848" y="457200"/>
+            <a:ext cx="10490911" cy="182880"/>
+          </a:xfrm>
+          <a:prstGeom prst="rect">
+            <a:avLst/>
+          </a:prstGeom>
+          <a:noFill/>
+          <a:ln/>
+        </p:spPr>
+        <p:txBody>
+          <a:bodyPr wrap="square" lIns="0" tIns="0" rIns="0" bIns="0" rtlCol="0" anchor="ctr"/>
+          <a:lstStyle/>
+          <a:p>
+            <a:pPr indent="0" marL="0">
+              <a:buNone/>
+            </a:pPr>
+            <a:r>
+              <a:rPr lang="en-US" sz="950" b="1" spc="200" kern="0" dirty="0">
+                <a:solidFill>
+                  <a:srgbClr val="B98A2E"/>
+                </a:solidFill>
+                <a:latin typeface="Arial" pitchFamily="34" charset="0"/>
+                <a:ea typeface="Arial" pitchFamily="34" charset="-122"/>
+                <a:cs typeface="Arial" pitchFamily="34" charset="-120"/>
+              </a:rPr>
+              <a:t>Process</a:t>
+            </a:r>
+            <a:endParaRPr lang="en-US" sz="950" dirty="0"/>
+          </a:p>
+        </p:txBody>
+      </p:sp>
+      <p:sp>
+        <p:nvSpPr>
+          <p:cNvPr id="5" name="Text 3"/>
+          <p:cNvSpPr/>
+          <p:nvPr/>
+        </p:nvSpPr>
+        <p:spPr>
+          <a:xfrm>
+            <a:off x="1069848" y="640080"/>
+            <a:ext cx="10490911" cy="365760"/>
+          </a:xfrm>
+          <a:prstGeom prst="rect">
+            <a:avLst/>
+          </a:prstGeom>
+          <a:noFill/>
+          <a:ln/>
+        </p:spPr>
+        <p:txBody>
+          <a:bodyPr wrap="square" lIns="0" tIns="0" rIns="0" bIns="0" rtlCol="0" anchor="ctr"/>
+          <a:lstStyle/>
+          <a:p>
+            <a:pPr indent="0" marL="0">
+              <a:buNone/>
+            </a:pPr>
+            <a:r>
+              <a:rPr lang="en-US" sz="2300" b="1" dirty="0">
+                <a:solidFill>
+                  <a:srgbClr val="10161F"/>
+                </a:solidFill>
+                <a:latin typeface="Pretendard" pitchFamily="34" charset="0"/>
+                <a:ea typeface="Pretendard" pitchFamily="34" charset="-122"/>
+                <a:cs typeface="Pretendard" pitchFamily="34" charset="-120"/>
+              </a:rPr>
+              <a:t>진행 절차</a:t>
+            </a:r>
+            <a:endParaRPr lang="en-US" sz="2300" dirty="0"/>
+          </a:p>
+        </p:txBody>
+      </p:sp>
+      <p:sp>
+        <p:nvSpPr>
+          <p:cNvPr id="6" name="Shape 4"/>
+          <p:cNvSpPr/>
+          <p:nvPr/>
+        </p:nvSpPr>
+        <p:spPr>
+          <a:xfrm>
+            <a:off x="502920" y="1572768"/>
+            <a:ext cx="11057839" cy="3200400"/>
+          </a:xfrm>
+          <a:prstGeom prst="roundRect">
+            <a:avLst>
+              <a:gd name="adj" fmla="val 1714"/>
+            </a:avLst>
+          </a:prstGeom>
+          <a:solidFill>
+            <a:srgbClr val="F7FAFC"/>
+          </a:solidFill>
+          <a:ln w="6350">
+            <a:solidFill>
+              <a:srgbClr val="CBD5E0"/>
+            </a:solidFill>
+            <a:prstDash val="solid"/>
+          </a:ln>
+        </p:spPr>
+      </p:sp>
+      <p:sp>
+        <p:nvSpPr>
+          <p:cNvPr id="7" name="Shape 5"/>
+          <p:cNvSpPr/>
+          <p:nvPr/>
+        </p:nvSpPr>
+        <p:spPr>
+          <a:xfrm>
+            <a:off x="722376" y="1792224"/>
+            <a:ext cx="438912" cy="438912"/>
+          </a:xfrm>
+          <a:prstGeom prst="ellipse">
+            <a:avLst/>
+          </a:prstGeom>
+          <a:solidFill>
+            <a:srgbClr val="B98A2E"/>
+          </a:solidFill>
+          <a:ln/>
+        </p:spPr>
+      </p:sp>
+      <p:sp>
+        <p:nvSpPr>
+          <p:cNvPr id="8" name="Text 6"/>
+          <p:cNvSpPr/>
+          <p:nvPr/>
+        </p:nvSpPr>
+        <p:spPr>
+          <a:xfrm>
+            <a:off x="722376" y="1792224"/>
+            <a:ext cx="438912" cy="438912"/>
+          </a:xfrm>
+          <a:prstGeom prst="rect">
+            <a:avLst/>
+          </a:prstGeom>
+          <a:noFill/>
+          <a:ln/>
+        </p:spPr>
+        <p:txBody>
+          <a:bodyPr wrap="square" lIns="0" tIns="0" rIns="0" bIns="0" rtlCol="0" anchor="ctr"/>
+          <a:lstStyle/>
+          <a:p>
+            <a:pPr algn="ctr" indent="0" marL="0">
+              <a:buNone/>
+            </a:pPr>
+            <a:r>
+              <a:rPr lang="en-US" sz="1400" b="1" dirty="0">
+                <a:solidFill>
+                  <a:srgbClr val="FFFFFF"/>
+                </a:solidFill>
+                <a:latin typeface="Arial" pitchFamily="34" charset="0"/>
+                <a:ea typeface="Arial" pitchFamily="34" charset="-122"/>
+                <a:cs typeface="Arial" pitchFamily="34" charset="-120"/>
+              </a:rPr>
+              <a:t>01</a:t>
+            </a:r>
+            <a:endParaRPr lang="en-US" sz="1400" dirty="0"/>
+          </a:p>
+        </p:txBody>
+      </p:sp>
+      <p:sp>
+        <p:nvSpPr>
+          <p:cNvPr id="9" name="Text 7"/>
+          <p:cNvSpPr/>
+          <p:nvPr/>
+        </p:nvSpPr>
+        <p:spPr>
+          <a:xfrm>
+            <a:off x="722376" y="2304288"/>
+            <a:ext cx="10618927" cy="365760"/>
+          </a:xfrm>
+          <a:prstGeom prst="rect">
+            <a:avLst/>
+          </a:prstGeom>
+          <a:noFill/>
+          <a:ln/>
+        </p:spPr>
+        <p:txBody>
+          <a:bodyPr wrap="square" rtlCol="0" anchor="ctr"/>
+          <a:lstStyle/>
+          <a:p>
+            <a:pPr indent="0" marL="0">
+              <a:buNone/>
+            </a:pPr>
+            <a:r>
+              <a:rPr lang="en-US" sz="1600" b="1" dirty="0">
+                <a:solidFill>
+                  <a:srgbClr val="10161F"/>
+                </a:solidFill>
+                <a:latin typeface="Pretendard" pitchFamily="34" charset="0"/>
+                <a:ea typeface="Pretendard" pitchFamily="34" charset="-122"/>
+                <a:cs typeface="Pretendard" pitchFamily="34" charset="-120"/>
+              </a:rPr>
+              <a:t>1단계</a:t>
+            </a:r>
+            <a:endParaRPr lang="en-US" sz="1600" dirty="0"/>
+          </a:p>
+        </p:txBody>
+      </p:sp>
+      <p:sp>
+        <p:nvSpPr>
+          <p:cNvPr id="10" name="Text 8"/>
+          <p:cNvSpPr/>
+          <p:nvPr/>
+        </p:nvSpPr>
+        <p:spPr>
+          <a:xfrm>
+            <a:off x="722376" y="2761488"/>
+            <a:ext cx="10618927" cy="1828800"/>
+          </a:xfrm>
+          <a:prstGeom prst="rect">
+            <a:avLst/>
+          </a:prstGeom>
+          <a:noFill/>
+          <a:ln/>
+        </p:spPr>
+        <p:txBody>
+          <a:bodyPr wrap="square" rtlCol="0" anchor="t"/>
+          <a:lstStyle/>
+          <a:p>
+            <a:pPr indent="0" marL="0">
+              <a:buNone/>
+            </a:pPr>
+            <a:r>
+              <a:rPr lang="en-US" sz="1100" dirty="0">
+                <a:solidFill>
+                  <a:srgbClr val="10161F"/>
+                </a:solidFill>
+                <a:latin typeface="Pretendard" pitchFamily="34" charset="0"/>
+                <a:ea typeface="Pretendard" pitchFamily="34" charset="-122"/>
+                <a:cs typeface="Pretendard" pitchFamily="34" charset="-120"/>
+              </a:rPr>
+              <a:t>현장 실사 및 임대차계약서 원본 확인을 권장합니다.</a:t>
+            </a:r>
+            <a:endParaRPr lang="en-US" sz="1100" dirty="0"/>
+          </a:p>
+          <a:p>
+            <a:pPr indent="0" marL="0">
+              <a:buNone/>
+            </a:pPr>
+            <a:r>
+              <a:rPr lang="en-US" sz="1100" dirty="0">
+                <a:solidFill>
+                  <a:srgbClr val="10161F"/>
+                </a:solidFill>
+                <a:latin typeface="Pretendard" pitchFamily="34" charset="0"/>
+                <a:ea typeface="Pretendard" pitchFamily="34" charset="-122"/>
+                <a:cs typeface="Pretendard" pitchFamily="34" charset="-120"/>
+              </a:rPr>
+              <a:t>현장 실사 및 임대차계약서 원본 확인을 권장합니다.</a:t>
+            </a:r>
+            <a:endParaRPr lang="en-US" sz="1100" dirty="0"/>
+          </a:p>
+        </p:txBody>
+      </p:sp>
+      <p:sp>
+        <p:nvSpPr>
+          <p:cNvPr id="11" name="Text 9"/>
+          <p:cNvSpPr/>
+          <p:nvPr/>
+        </p:nvSpPr>
+        <p:spPr>
+          <a:xfrm>
+            <a:off x="502920" y="6382512"/>
+            <a:ext cx="7315200" cy="219456"/>
+          </a:xfrm>
+          <a:prstGeom prst="rect">
+            <a:avLst/>
+          </a:prstGeom>
+          <a:noFill/>
+          <a:ln/>
+        </p:spPr>
+        <p:txBody>
+          <a:bodyPr wrap="square" lIns="0" tIns="0" rIns="0" bIns="0" rtlCol="0" anchor="ctr"/>
+          <a:lstStyle/>
+          <a:p>
+            <a:pPr indent="0" marL="0">
+              <a:buNone/>
+            </a:pPr>
+            <a:r>
+              <a:rPr lang="en-US" sz="800" dirty="0">
+                <a:solidFill>
+                  <a:srgbClr val="718096"/>
+                </a:solidFill>
+                <a:latin typeface="Pretendard" pitchFamily="34" charset="0"/>
+                <a:ea typeface="Pretendard" pitchFamily="34" charset="-122"/>
+                <a:cs typeface="Pretendard" pitchFamily="34" charset="-120"/>
+              </a:rPr>
+              <a:t>크리딜   |   </a:t>
+            </a:r>
+            <a:endParaRPr lang="en-US" sz="800" dirty="0"/>
+          </a:p>
+        </p:txBody>
+      </p:sp>
+      <p:sp>
+        <p:nvSpPr>
+          <p:cNvPr id="12" name="Text 10"/>
+          <p:cNvSpPr/>
+          <p:nvPr/>
+        </p:nvSpPr>
+        <p:spPr>
+          <a:xfrm>
+            <a:off x="10774375" y="6382512"/>
+            <a:ext cx="914400" cy="219456"/>
+          </a:xfrm>
+          <a:prstGeom prst="rect">
+            <a:avLst/>
+          </a:prstGeom>
+          <a:noFill/>
+          <a:ln/>
+        </p:spPr>
+        <p:txBody>
+          <a:bodyPr wrap="square" lIns="0" tIns="0" rIns="0" bIns="0" rtlCol="0" anchor="ctr"/>
+          <a:lstStyle/>
+          <a:p>
+            <a:pPr algn="r" indent="0" marL="0">
+              <a:buNone/>
+            </a:pPr>
+            <a:r>
+              <a:rPr lang="en-US" sz="900" b="1" dirty="0">
+                <a:solidFill>
+                  <a:srgbClr val="B98A2E"/>
+                </a:solidFill>
+                <a:latin typeface="Arial" pitchFamily="34" charset="0"/>
+                <a:ea typeface="Arial" pitchFamily="34" charset="-122"/>
+                <a:cs typeface="Arial" pitchFamily="34" charset="-120"/>
+              </a:rPr>
+              <a:t>12</a:t>
+            </a:r>
+            <a:endParaRPr lang="en-US" sz="900" dirty="0"/>
+          </a:p>
+        </p:txBody>
+      </p:sp>
+    </p:spTree>
+  </p:cSld>
+  <p:clrMapOvr>
+    <a:masterClrMapping/>
+  </p:clrMapOvr>
+</p:sld>
+</file>
+
+<file path=ppt/slides/slide13.xml><?xml version="1.0" encoding="utf-8"?>
+<p:sld xmlns:a="http://schemas.openxmlformats.org/drawingml/2006/main" xmlns:r="http://schemas.openxmlformats.org/officeDocument/2006/relationships" xmlns:p="http://schemas.openxmlformats.org/presentationml/2006/main">
+  <p:cSld name="Slide 13">
     <p:bg>
       <p:bgPr>
         <a:solidFill>
@@ -4030,7 +4776,7 @@
         </p:nvSpPr>
         <p:spPr>
           <a:xfrm>
-            <a:off x="566928" y="457200"/>
+            <a:off x="502920" y="457200"/>
             <a:ext cx="384048" cy="384048"/>
           </a:xfrm>
           <a:prstGeom prst="ellipse">
@@ -4050,7 +4796,7 @@
         </p:nvSpPr>
         <p:spPr>
           <a:xfrm>
-            <a:off x="566928" y="457200"/>
+            <a:off x="502920" y="457200"/>
             <a:ext cx="384048" cy="384048"/>
           </a:xfrm>
           <a:prstGeom prst="rect">
@@ -4075,7 +4821,7 @@
                 <a:ea typeface="Arial" pitchFamily="34" charset="-122"/>
                 <a:cs typeface="Arial" pitchFamily="34" charset="-120"/>
               </a:rPr>
-              <a:t>12</a:t>
+              <a:t>13</a:t>
             </a:r>
             <a:endParaRPr lang="en-US" sz="1300" dirty="0"/>
           </a:p>
@@ -4089,7 +4835,7 @@
         </p:nvSpPr>
         <p:spPr>
           <a:xfrm>
-            <a:off x="1133856" y="457200"/>
+            <a:off x="1069848" y="457200"/>
             <a:ext cx="10490911" cy="182880"/>
           </a:xfrm>
           <a:prstGeom prst="rect">
@@ -4128,7 +4874,7 @@
         </p:nvSpPr>
         <p:spPr>
           <a:xfrm>
-            <a:off x="1133856" y="658368"/>
+            <a:off x="1069848" y="658368"/>
             <a:ext cx="10490911" cy="420624"/>
           </a:xfrm>
           <a:prstGeom prst="rect">
@@ -4167,7 +4913,7 @@
         </p:nvSpPr>
         <p:spPr>
           <a:xfrm>
-            <a:off x="566928" y="1463040"/>
+            <a:off x="502920" y="1463040"/>
             <a:ext cx="3588410" cy="658368"/>
           </a:xfrm>
           <a:prstGeom prst="roundRect">
@@ -4189,7 +4935,7 @@
         </p:nvSpPr>
         <p:spPr>
           <a:xfrm>
-            <a:off x="676656" y="1572768"/>
+            <a:off x="612648" y="1572768"/>
             <a:ext cx="438912" cy="438912"/>
           </a:xfrm>
           <a:prstGeom prst="ellipse">
@@ -4209,7 +4955,7 @@
         </p:nvSpPr>
         <p:spPr>
           <a:xfrm>
-            <a:off x="676656" y="1572768"/>
+            <a:off x="612648" y="1572768"/>
             <a:ext cx="438912" cy="438912"/>
           </a:xfrm>
           <a:prstGeom prst="rect">
@@ -4248,7 +4994,7 @@
         </p:nvSpPr>
         <p:spPr>
           <a:xfrm>
-            <a:off x="1225296" y="1554480"/>
+            <a:off x="1161288" y="1554480"/>
             <a:ext cx="2820314" cy="237744"/>
           </a:xfrm>
           <a:prstGeom prst="rect">
@@ -4287,7 +5033,7 @@
         </p:nvSpPr>
         <p:spPr>
           <a:xfrm>
-            <a:off x="1225296" y="1792224"/>
+            <a:off x="1161288" y="1792224"/>
             <a:ext cx="2820314" cy="256032"/>
           </a:xfrm>
           <a:prstGeom prst="rect">
@@ -4326,7 +5072,7 @@
         </p:nvSpPr>
         <p:spPr>
           <a:xfrm>
-            <a:off x="4155338" y="1600200"/>
+            <a:off x="4091330" y="1600200"/>
             <a:ext cx="146304" cy="384048"/>
           </a:xfrm>
           <a:prstGeom prst="rect">
@@ -4365,7 +5111,7 @@
         </p:nvSpPr>
         <p:spPr>
           <a:xfrm>
-            <a:off x="4301642" y="1463040"/>
+            <a:off x="4237634" y="1463040"/>
             <a:ext cx="3588410" cy="658368"/>
           </a:xfrm>
           <a:prstGeom prst="roundRect">
@@ -4387,7 +5133,7 @@
         </p:nvSpPr>
         <p:spPr>
           <a:xfrm>
-            <a:off x="4411370" y="1572768"/>
+            <a:off x="4347362" y="1572768"/>
             <a:ext cx="438912" cy="438912"/>
           </a:xfrm>
           <a:prstGeom prst="ellipse">
@@ -4407,7 +5153,7 @@
         </p:nvSpPr>
         <p:spPr>
           <a:xfrm>
-            <a:off x="4411370" y="1572768"/>
+            <a:off x="4347362" y="1572768"/>
             <a:ext cx="438912" cy="438912"/>
           </a:xfrm>
           <a:prstGeom prst="rect">
@@ -4446,7 +5192,7 @@
         </p:nvSpPr>
         <p:spPr>
           <a:xfrm>
-            <a:off x="4960010" y="1554480"/>
+            <a:off x="4896002" y="1554480"/>
             <a:ext cx="2820314" cy="237744"/>
           </a:xfrm>
           <a:prstGeom prst="rect">
@@ -4485,7 +5231,7 @@
         </p:nvSpPr>
         <p:spPr>
           <a:xfrm>
-            <a:off x="4960010" y="1792224"/>
+            <a:off x="4896002" y="1792224"/>
             <a:ext cx="2820314" cy="256032"/>
           </a:xfrm>
           <a:prstGeom prst="rect">
@@ -4524,7 +5270,7 @@
         </p:nvSpPr>
         <p:spPr>
           <a:xfrm>
-            <a:off x="7890053" y="1600200"/>
+            <a:off x="7826045" y="1600200"/>
             <a:ext cx="146304" cy="384048"/>
           </a:xfrm>
           <a:prstGeom prst="rect">
@@ -4563,7 +5309,7 @@
         </p:nvSpPr>
         <p:spPr>
           <a:xfrm>
-            <a:off x="8036357" y="1463040"/>
+            <a:off x="7972349" y="1463040"/>
             <a:ext cx="3588410" cy="658368"/>
           </a:xfrm>
           <a:prstGeom prst="roundRect">
@@ -4585,7 +5331,7 @@
         </p:nvSpPr>
         <p:spPr>
           <a:xfrm>
-            <a:off x="8146085" y="1572768"/>
+            <a:off x="8082077" y="1572768"/>
             <a:ext cx="438912" cy="438912"/>
           </a:xfrm>
           <a:prstGeom prst="ellipse">
@@ -4605,7 +5351,7 @@
         </p:nvSpPr>
         <p:spPr>
           <a:xfrm>
-            <a:off x="8146085" y="1572768"/>
+            <a:off x="8082077" y="1572768"/>
             <a:ext cx="438912" cy="438912"/>
           </a:xfrm>
           <a:prstGeom prst="rect">
@@ -4644,7 +5390,7 @@
         </p:nvSpPr>
         <p:spPr>
           <a:xfrm>
-            <a:off x="8694725" y="1554480"/>
+            <a:off x="8630717" y="1554480"/>
             <a:ext cx="2820314" cy="237744"/>
           </a:xfrm>
           <a:prstGeom prst="rect">
@@ -4683,7 +5429,7 @@
         </p:nvSpPr>
         <p:spPr>
           <a:xfrm>
-            <a:off x="8694725" y="1792224"/>
+            <a:off x="8630717" y="1792224"/>
             <a:ext cx="2820314" cy="256032"/>
           </a:xfrm>
           <a:prstGeom prst="rect">
@@ -4722,7 +5468,7 @@
         </p:nvSpPr>
         <p:spPr>
           <a:xfrm>
-            <a:off x="566928" y="2395728"/>
+            <a:off x="502920" y="2395728"/>
             <a:ext cx="5486400" cy="237744"/>
           </a:xfrm>
           <a:prstGeom prst="rect">
@@ -4761,7 +5507,7 @@
         </p:nvSpPr>
         <p:spPr>
           <a:xfrm>
-            <a:off x="566928" y="2724912"/>
+            <a:off x="502920" y="2724912"/>
             <a:ext cx="1280160" cy="292608"/>
           </a:xfrm>
           <a:prstGeom prst="roundRect">
@@ -4783,7 +5529,7 @@
         </p:nvSpPr>
         <p:spPr>
           <a:xfrm>
-            <a:off x="566928" y="2724912"/>
+            <a:off x="502920" y="2724912"/>
             <a:ext cx="1280160" cy="292608"/>
           </a:xfrm>
           <a:prstGeom prst="rect">
@@ -4822,7 +5568,7 @@
         </p:nvSpPr>
         <p:spPr>
           <a:xfrm>
-            <a:off x="1993392" y="2706624"/>
+            <a:off x="1929384" y="2706624"/>
             <a:ext cx="3840480" cy="329184"/>
           </a:xfrm>
           <a:prstGeom prst="rect">
@@ -4861,7 +5607,7 @@
         </p:nvSpPr>
         <p:spPr>
           <a:xfrm>
-            <a:off x="566928" y="3200400"/>
+            <a:off x="502920" y="3127248"/>
             <a:ext cx="1280160" cy="292608"/>
           </a:xfrm>
           <a:prstGeom prst="roundRect">
@@ -4883,7 +5629,7 @@
         </p:nvSpPr>
         <p:spPr>
           <a:xfrm>
-            <a:off x="566928" y="3200400"/>
+            <a:off x="502920" y="3127248"/>
             <a:ext cx="1280160" cy="292608"/>
           </a:xfrm>
           <a:prstGeom prst="rect">
@@ -4922,7 +5668,7 @@
         </p:nvSpPr>
         <p:spPr>
           <a:xfrm>
-            <a:off x="1993392" y="3182112"/>
+            <a:off x="1929384" y="3108960"/>
             <a:ext cx="3840480" cy="329184"/>
           </a:xfrm>
           <a:prstGeom prst="rect">
@@ -4961,7 +5707,7 @@
         </p:nvSpPr>
         <p:spPr>
           <a:xfrm>
-            <a:off x="566928" y="3675888"/>
+            <a:off x="502920" y="3529584"/>
             <a:ext cx="1280160" cy="292608"/>
           </a:xfrm>
           <a:prstGeom prst="roundRect">
@@ -4983,7 +5729,7 @@
         </p:nvSpPr>
         <p:spPr>
           <a:xfrm>
-            <a:off x="566928" y="3675888"/>
+            <a:off x="502920" y="3529584"/>
             <a:ext cx="1280160" cy="292608"/>
           </a:xfrm>
           <a:prstGeom prst="rect">
@@ -5022,7 +5768,7 @@
         </p:nvSpPr>
         <p:spPr>
           <a:xfrm>
-            <a:off x="1993392" y="3657600"/>
+            <a:off x="1929384" y="3511296"/>
             <a:ext cx="3840480" cy="329184"/>
           </a:xfrm>
           <a:prstGeom prst="rect">
@@ -5061,7 +5807,7 @@
         </p:nvSpPr>
         <p:spPr>
           <a:xfrm>
-            <a:off x="566928" y="4151376"/>
+            <a:off x="502920" y="3931920"/>
             <a:ext cx="1280160" cy="292608"/>
           </a:xfrm>
           <a:prstGeom prst="roundRect">
@@ -5083,7 +5829,7 @@
         </p:nvSpPr>
         <p:spPr>
           <a:xfrm>
-            <a:off x="566928" y="4151376"/>
+            <a:off x="502920" y="3931920"/>
             <a:ext cx="1280160" cy="292608"/>
           </a:xfrm>
           <a:prstGeom prst="rect">
@@ -5122,7 +5868,7 @@
         </p:nvSpPr>
         <p:spPr>
           <a:xfrm>
-            <a:off x="1993392" y="4133088"/>
+            <a:off x="1929384" y="3913632"/>
             <a:ext cx="3840480" cy="329184"/>
           </a:xfrm>
           <a:prstGeom prst="rect">
@@ -5161,7 +5907,7 @@
         </p:nvSpPr>
         <p:spPr>
           <a:xfrm>
-            <a:off x="566928" y="4626864"/>
+            <a:off x="502920" y="4334256"/>
             <a:ext cx="1280160" cy="292608"/>
           </a:xfrm>
           <a:prstGeom prst="roundRect">
@@ -5183,7 +5929,7 @@
         </p:nvSpPr>
         <p:spPr>
           <a:xfrm>
-            <a:off x="566928" y="4626864"/>
+            <a:off x="502920" y="4334256"/>
             <a:ext cx="1280160" cy="292608"/>
           </a:xfrm>
           <a:prstGeom prst="rect">
@@ -5222,7 +5968,7 @@
         </p:nvSpPr>
         <p:spPr>
           <a:xfrm>
-            <a:off x="1993392" y="4608576"/>
+            <a:off x="1929384" y="4315968"/>
             <a:ext cx="3840480" cy="329184"/>
           </a:xfrm>
           <a:prstGeom prst="rect">
@@ -5364,7 +6110,7 @@
         </p:nvSpPr>
         <p:spPr>
           <a:xfrm>
-            <a:off x="566928" y="5760720"/>
+            <a:off x="502920" y="5760720"/>
             <a:ext cx="11057839" cy="457200"/>
           </a:xfrm>
           <a:prstGeom prst="rect">
@@ -5384,7 +6130,7 @@
         </p:nvSpPr>
         <p:spPr>
           <a:xfrm>
-            <a:off x="749808" y="5806440"/>
+            <a:off x="685800" y="5806440"/>
             <a:ext cx="10692079" cy="365760"/>
           </a:xfrm>
           <a:prstGeom prst="rect">
@@ -5423,7 +6169,7 @@
         </p:nvSpPr>
         <p:spPr>
           <a:xfrm>
-            <a:off x="566928" y="6382512"/>
+            <a:off x="502920" y="6382512"/>
             <a:ext cx="7315200" cy="219456"/>
           </a:xfrm>
           <a:prstGeom prst="rect">
@@ -5462,7 +6208,7 @@
         </p:nvSpPr>
         <p:spPr>
           <a:xfrm>
-            <a:off x="10710367" y="6382512"/>
+            <a:off x="10774375" y="6382512"/>
             <a:ext cx="914400" cy="219456"/>
           </a:xfrm>
           <a:prstGeom prst="rect">
@@ -5487,7 +6233,7 @@
                 <a:ea typeface="Arial" pitchFamily="34" charset="-122"/>
                 <a:cs typeface="Arial" pitchFamily="34" charset="-120"/>
               </a:rPr>
-              <a:t>12</a:t>
+              <a:t>13</a:t>
             </a:r>
             <a:endParaRPr lang="en-US" sz="900" dirty="0"/>
           </a:p>
@@ -5533,7 +6279,7 @@
         </p:nvSpPr>
         <p:spPr>
           <a:xfrm>
-            <a:off x="566928" y="457200"/>
+            <a:off x="502920" y="457200"/>
             <a:ext cx="384048" cy="384048"/>
           </a:xfrm>
           <a:prstGeom prst="ellipse">
@@ -5553,7 +6299,7 @@
         </p:nvSpPr>
         <p:spPr>
           <a:xfrm>
-            <a:off x="566928" y="457200"/>
+            <a:off x="502920" y="457200"/>
             <a:ext cx="384048" cy="384048"/>
           </a:xfrm>
           <a:prstGeom prst="rect">
@@ -5592,7 +6338,7 @@
         </p:nvSpPr>
         <p:spPr>
           <a:xfrm>
-            <a:off x="1133856" y="457200"/>
+            <a:off x="1069848" y="457200"/>
             <a:ext cx="10490911" cy="182880"/>
           </a:xfrm>
           <a:prstGeom prst="rect">
@@ -5631,7 +6377,7 @@
         </p:nvSpPr>
         <p:spPr>
           <a:xfrm>
-            <a:off x="1133856" y="640080"/>
+            <a:off x="1069848" y="640080"/>
             <a:ext cx="10490911" cy="365760"/>
           </a:xfrm>
           <a:prstGeom prst="rect">
@@ -5670,7 +6416,7 @@
         </p:nvSpPr>
         <p:spPr>
           <a:xfrm>
-            <a:off x="566928" y="1188720"/>
+            <a:off x="502920" y="1188720"/>
             <a:ext cx="11057839" cy="457200"/>
           </a:xfrm>
           <a:prstGeom prst="rect">
@@ -5709,7 +6455,7 @@
         </p:nvSpPr>
         <p:spPr>
           <a:xfrm>
-            <a:off x="566928" y="1691640"/>
+            <a:off x="502920" y="1691640"/>
             <a:ext cx="11057839" cy="0"/>
           </a:xfrm>
           <a:prstGeom prst="line">
@@ -5732,7 +6478,7 @@
         </p:nvSpPr>
         <p:spPr>
           <a:xfrm>
-            <a:off x="566928" y="1965960"/>
+            <a:off x="502920" y="1965960"/>
             <a:ext cx="2641016" cy="960120"/>
           </a:xfrm>
           <a:prstGeom prst="roundRect">
@@ -5759,7 +6505,7 @@
         </p:nvSpPr>
         <p:spPr>
           <a:xfrm>
-            <a:off x="731520" y="2093976"/>
+            <a:off x="667512" y="2093976"/>
             <a:ext cx="2311832" cy="201168"/>
           </a:xfrm>
           <a:prstGeom prst="rect">
@@ -5798,7 +6544,7 @@
         </p:nvSpPr>
         <p:spPr>
           <a:xfrm>
-            <a:off x="731520" y="2313432"/>
+            <a:off x="667512" y="2313432"/>
             <a:ext cx="2311832" cy="274320"/>
           </a:xfrm>
           <a:prstGeom prst="rect">
@@ -5839,7 +6585,7 @@
         </p:nvSpPr>
         <p:spPr>
           <a:xfrm>
-            <a:off x="3372536" y="1965960"/>
+            <a:off x="3308528" y="1965960"/>
             <a:ext cx="2641016" cy="960120"/>
           </a:xfrm>
           <a:prstGeom prst="roundRect">
@@ -5866,7 +6612,7 @@
         </p:nvSpPr>
         <p:spPr>
           <a:xfrm>
-            <a:off x="3537128" y="2093976"/>
+            <a:off x="3473120" y="2093976"/>
             <a:ext cx="2311832" cy="201168"/>
           </a:xfrm>
           <a:prstGeom prst="rect">
@@ -5905,7 +6651,7 @@
         </p:nvSpPr>
         <p:spPr>
           <a:xfrm>
-            <a:off x="3537128" y="2313432"/>
+            <a:off x="3473120" y="2313432"/>
             <a:ext cx="2311832" cy="274320"/>
           </a:xfrm>
           <a:prstGeom prst="rect">
@@ -5946,7 +6692,7 @@
         </p:nvSpPr>
         <p:spPr>
           <a:xfrm>
-            <a:off x="6178144" y="1965960"/>
+            <a:off x="6114136" y="1965960"/>
             <a:ext cx="2641016" cy="960120"/>
           </a:xfrm>
           <a:prstGeom prst="roundRect">
@@ -5973,7 +6719,7 @@
         </p:nvSpPr>
         <p:spPr>
           <a:xfrm>
-            <a:off x="6342736" y="2093976"/>
+            <a:off x="6278728" y="2093976"/>
             <a:ext cx="2311832" cy="201168"/>
           </a:xfrm>
           <a:prstGeom prst="rect">
@@ -6012,7 +6758,7 @@
         </p:nvSpPr>
         <p:spPr>
           <a:xfrm>
-            <a:off x="6342736" y="2313432"/>
+            <a:off x="6278728" y="2313432"/>
             <a:ext cx="2311832" cy="274320"/>
           </a:xfrm>
           <a:prstGeom prst="rect">
@@ -6053,7 +6799,7 @@
         </p:nvSpPr>
         <p:spPr>
           <a:xfrm>
-            <a:off x="8983751" y="1965960"/>
+            <a:off x="8919743" y="1965960"/>
             <a:ext cx="2641016" cy="960120"/>
           </a:xfrm>
           <a:prstGeom prst="roundRect">
@@ -6080,7 +6826,7 @@
         </p:nvSpPr>
         <p:spPr>
           <a:xfrm>
-            <a:off x="9148343" y="2093976"/>
+            <a:off x="9084335" y="2093976"/>
             <a:ext cx="2311832" cy="201168"/>
           </a:xfrm>
           <a:prstGeom prst="rect">
@@ -6119,7 +6865,7 @@
         </p:nvSpPr>
         <p:spPr>
           <a:xfrm>
-            <a:off x="9148343" y="2313432"/>
+            <a:off x="9084335" y="2313432"/>
             <a:ext cx="2311832" cy="274320"/>
           </a:xfrm>
           <a:prstGeom prst="rect">
@@ -6160,7 +6906,7 @@
         </p:nvSpPr>
         <p:spPr>
           <a:xfrm>
-            <a:off x="566928" y="3090672"/>
+            <a:off x="502920" y="3090672"/>
             <a:ext cx="2641016" cy="960120"/>
           </a:xfrm>
           <a:prstGeom prst="roundRect">
@@ -6187,7 +6933,7 @@
         </p:nvSpPr>
         <p:spPr>
           <a:xfrm>
-            <a:off x="731520" y="3218688"/>
+            <a:off x="667512" y="3218688"/>
             <a:ext cx="2311832" cy="201168"/>
           </a:xfrm>
           <a:prstGeom prst="rect">
@@ -6226,7 +6972,7 @@
         </p:nvSpPr>
         <p:spPr>
           <a:xfrm>
-            <a:off x="731520" y="3438144"/>
+            <a:off x="667512" y="3438144"/>
             <a:ext cx="2311832" cy="274320"/>
           </a:xfrm>
           <a:prstGeom prst="rect">
@@ -6267,7 +7013,7 @@
         </p:nvSpPr>
         <p:spPr>
           <a:xfrm>
-            <a:off x="3372536" y="3090672"/>
+            <a:off x="3308528" y="3090672"/>
             <a:ext cx="2641016" cy="960120"/>
           </a:xfrm>
           <a:prstGeom prst="roundRect">
@@ -6294,7 +7040,7 @@
         </p:nvSpPr>
         <p:spPr>
           <a:xfrm>
-            <a:off x="3537128" y="3218688"/>
+            <a:off x="3473120" y="3218688"/>
             <a:ext cx="2311832" cy="201168"/>
           </a:xfrm>
           <a:prstGeom prst="rect">
@@ -6333,7 +7079,7 @@
         </p:nvSpPr>
         <p:spPr>
           <a:xfrm>
-            <a:off x="3537128" y="3438144"/>
+            <a:off x="3473120" y="3438144"/>
             <a:ext cx="2311832" cy="274320"/>
           </a:xfrm>
           <a:prstGeom prst="rect">
@@ -6374,7 +7120,7 @@
         </p:nvSpPr>
         <p:spPr>
           <a:xfrm>
-            <a:off x="6178144" y="3090672"/>
+            <a:off x="6114136" y="3090672"/>
             <a:ext cx="2641016" cy="960120"/>
           </a:xfrm>
           <a:prstGeom prst="roundRect">
@@ -6401,7 +7147,7 @@
         </p:nvSpPr>
         <p:spPr>
           <a:xfrm>
-            <a:off x="6342736" y="3218688"/>
+            <a:off x="6278728" y="3218688"/>
             <a:ext cx="2311832" cy="201168"/>
           </a:xfrm>
           <a:prstGeom prst="rect">
@@ -6440,7 +7186,7 @@
         </p:nvSpPr>
         <p:spPr>
           <a:xfrm>
-            <a:off x="6342736" y="3438144"/>
+            <a:off x="6278728" y="3438144"/>
             <a:ext cx="2311832" cy="274320"/>
           </a:xfrm>
           <a:prstGeom prst="rect">
@@ -6481,7 +7227,7 @@
         </p:nvSpPr>
         <p:spPr>
           <a:xfrm>
-            <a:off x="8983751" y="3090672"/>
+            <a:off x="8919743" y="3090672"/>
             <a:ext cx="2641016" cy="960120"/>
           </a:xfrm>
           <a:prstGeom prst="roundRect">
@@ -6508,7 +7254,7 @@
         </p:nvSpPr>
         <p:spPr>
           <a:xfrm>
-            <a:off x="9148343" y="3218688"/>
+            <a:off x="9084335" y="3218688"/>
             <a:ext cx="2311832" cy="201168"/>
           </a:xfrm>
           <a:prstGeom prst="rect">
@@ -6547,7 +7293,7 @@
         </p:nvSpPr>
         <p:spPr>
           <a:xfrm>
-            <a:off x="9148343" y="3438144"/>
+            <a:off x="9084335" y="3438144"/>
             <a:ext cx="2311832" cy="274320"/>
           </a:xfrm>
           <a:prstGeom prst="rect">
@@ -6588,7 +7334,7 @@
         </p:nvSpPr>
         <p:spPr>
           <a:xfrm>
-            <a:off x="566928" y="4306824"/>
+            <a:off x="502920" y="4306824"/>
             <a:ext cx="11057839" cy="274320"/>
           </a:xfrm>
           <a:prstGeom prst="rect">
@@ -6627,7 +7373,7 @@
         </p:nvSpPr>
         <p:spPr>
           <a:xfrm>
-            <a:off x="566928" y="4636008"/>
+            <a:off x="502920" y="4636008"/>
             <a:ext cx="11057839" cy="396240"/>
           </a:xfrm>
           <a:prstGeom prst="roundRect">
@@ -6654,7 +7400,7 @@
         </p:nvSpPr>
         <p:spPr>
           <a:xfrm>
-            <a:off x="676656" y="4709160"/>
+            <a:off x="612648" y="4709160"/>
             <a:ext cx="411480" cy="249936"/>
           </a:xfrm>
           <a:prstGeom prst="roundRect">
@@ -6681,7 +7427,7 @@
         </p:nvSpPr>
         <p:spPr>
           <a:xfrm>
-            <a:off x="676656" y="4709160"/>
+            <a:off x="612648" y="4709160"/>
             <a:ext cx="411480" cy="249936"/>
           </a:xfrm>
           <a:prstGeom prst="rect">
@@ -6720,7 +7466,7 @@
         </p:nvSpPr>
         <p:spPr>
           <a:xfrm>
-            <a:off x="1207008" y="4672584"/>
+            <a:off x="1143000" y="4672584"/>
             <a:ext cx="10280599" cy="323088"/>
           </a:xfrm>
           <a:prstGeom prst="rect">
@@ -6759,7 +7505,7 @@
         </p:nvSpPr>
         <p:spPr>
           <a:xfrm>
-            <a:off x="566928" y="5114544"/>
+            <a:off x="502920" y="5114544"/>
             <a:ext cx="11057839" cy="396240"/>
           </a:xfrm>
           <a:prstGeom prst="roundRect">
@@ -6786,7 +7532,7 @@
         </p:nvSpPr>
         <p:spPr>
           <a:xfrm>
-            <a:off x="676656" y="5187696"/>
+            <a:off x="612648" y="5187696"/>
             <a:ext cx="411480" cy="249936"/>
           </a:xfrm>
           <a:prstGeom prst="roundRect">
@@ -6813,7 +7559,7 @@
         </p:nvSpPr>
         <p:spPr>
           <a:xfrm>
-            <a:off x="676656" y="5187696"/>
+            <a:off x="612648" y="5187696"/>
             <a:ext cx="411480" cy="249936"/>
           </a:xfrm>
           <a:prstGeom prst="rect">
@@ -6852,7 +7598,7 @@
         </p:nvSpPr>
         <p:spPr>
           <a:xfrm>
-            <a:off x="1207008" y="5151120"/>
+            <a:off x="1143000" y="5151120"/>
             <a:ext cx="10280599" cy="323088"/>
           </a:xfrm>
           <a:prstGeom prst="rect">
@@ -6891,7 +7637,7 @@
         </p:nvSpPr>
         <p:spPr>
           <a:xfrm>
-            <a:off x="566928" y="5593080"/>
+            <a:off x="502920" y="5593080"/>
             <a:ext cx="11057839" cy="396240"/>
           </a:xfrm>
           <a:prstGeom prst="roundRect">
@@ -6918,7 +7664,7 @@
         </p:nvSpPr>
         <p:spPr>
           <a:xfrm>
-            <a:off x="676656" y="5666232"/>
+            <a:off x="612648" y="5666232"/>
             <a:ext cx="411480" cy="249936"/>
           </a:xfrm>
           <a:prstGeom prst="roundRect">
@@ -6945,7 +7691,7 @@
         </p:nvSpPr>
         <p:spPr>
           <a:xfrm>
-            <a:off x="676656" y="5666232"/>
+            <a:off x="612648" y="5666232"/>
             <a:ext cx="411480" cy="249936"/>
           </a:xfrm>
           <a:prstGeom prst="rect">
@@ -6984,7 +7730,7 @@
         </p:nvSpPr>
         <p:spPr>
           <a:xfrm>
-            <a:off x="1207008" y="5629656"/>
+            <a:off x="1143000" y="5629656"/>
             <a:ext cx="10280599" cy="323088"/>
           </a:xfrm>
           <a:prstGeom prst="rect">
@@ -7023,7 +7769,7 @@
         </p:nvSpPr>
         <p:spPr>
           <a:xfrm>
-            <a:off x="566928" y="6382512"/>
+            <a:off x="502920" y="6382512"/>
             <a:ext cx="7315200" cy="219456"/>
           </a:xfrm>
           <a:prstGeom prst="rect">
@@ -7062,7 +7808,7 @@
         </p:nvSpPr>
         <p:spPr>
           <a:xfrm>
-            <a:off x="10710367" y="6382512"/>
+            <a:off x="10774375" y="6382512"/>
             <a:ext cx="914400" cy="219456"/>
           </a:xfrm>
           <a:prstGeom prst="rect">
@@ -7133,7 +7879,7 @@
         </p:nvSpPr>
         <p:spPr>
           <a:xfrm>
-            <a:off x="566928" y="457200"/>
+            <a:off x="502920" y="457200"/>
             <a:ext cx="384048" cy="384048"/>
           </a:xfrm>
           <a:prstGeom prst="ellipse">
@@ -7153,7 +7899,7 @@
         </p:nvSpPr>
         <p:spPr>
           <a:xfrm>
-            <a:off x="566928" y="457200"/>
+            <a:off x="502920" y="457200"/>
             <a:ext cx="384048" cy="384048"/>
           </a:xfrm>
           <a:prstGeom prst="rect">
@@ -7192,7 +7938,7 @@
         </p:nvSpPr>
         <p:spPr>
           <a:xfrm>
-            <a:off x="1133856" y="457200"/>
+            <a:off x="1069848" y="457200"/>
             <a:ext cx="10490911" cy="182880"/>
           </a:xfrm>
           <a:prstGeom prst="rect">
@@ -7217,7 +7963,7 @@
                 <a:ea typeface="Arial" pitchFamily="34" charset="-122"/>
                 <a:cs typeface="Arial" pitchFamily="34" charset="-120"/>
               </a:rPr>
-              <a:t>Land</a:t>
+              <a:t>Location</a:t>
             </a:r>
             <a:endParaRPr lang="en-US" sz="950" dirty="0"/>
           </a:p>
@@ -7231,7 +7977,7 @@
         </p:nvSpPr>
         <p:spPr>
           <a:xfrm>
-            <a:off x="1133856" y="640080"/>
+            <a:off x="1069848" y="640080"/>
             <a:ext cx="10490911" cy="365760"/>
           </a:xfrm>
           <a:prstGeom prst="rect">
@@ -7256,61 +8002,46 @@
                 <a:ea typeface="Pretendard" pitchFamily="34" charset="-122"/>
                 <a:cs typeface="Pretendard" pitchFamily="34" charset="-120"/>
               </a:rPr>
-              <a:t>토지 현황</a:t>
+              <a:t>입지 분석</a:t>
             </a:r>
             <a:endParaRPr lang="en-US" sz="2300" dirty="0"/>
           </a:p>
         </p:txBody>
       </p:sp>
-      <p:sp>
-        <p:nvSpPr>
-          <p:cNvPr id="6" name="Text 4"/>
-          <p:cNvSpPr/>
-          <p:nvPr/>
-        </p:nvSpPr>
-        <p:spPr>
-          <a:xfrm>
-            <a:off x="566928" y="1371600"/>
-            <a:ext cx="6858000" cy="237744"/>
-          </a:xfrm>
-          <a:prstGeom prst="rect">
-            <a:avLst/>
-          </a:prstGeom>
-          <a:noFill/>
-          <a:ln/>
-        </p:spPr>
-        <p:txBody>
-          <a:bodyPr wrap="square" lIns="0" tIns="0" rIns="0" bIns="0" rtlCol="0" anchor="ctr"/>
-          <a:lstStyle/>
-          <a:p>
-            <a:pPr indent="0" marL="0">
-              <a:buNone/>
-            </a:pPr>
-            <a:r>
-              <a:rPr lang="en-US" sz="1100" b="1" dirty="0">
-                <a:solidFill>
-                  <a:srgbClr val="10161F"/>
-                </a:solidFill>
-                <a:latin typeface="Pretendard" pitchFamily="34" charset="0"/>
-                <a:ea typeface="Pretendard" pitchFamily="34" charset="-122"/>
-                <a:cs typeface="Pretendard" pitchFamily="34" charset="-120"/>
-              </a:rPr>
-              <a:t>토지 현황</a:t>
-            </a:r>
-            <a:endParaRPr lang="en-US" sz="1100" dirty="0"/>
-          </a:p>
-        </p:txBody>
-      </p:sp>
-      <p:sp>
-        <p:nvSpPr>
-          <p:cNvPr id="7" name="Text 5"/>
-          <p:cNvSpPr/>
-          <p:nvPr/>
-        </p:nvSpPr>
-        <p:spPr>
-          <a:xfrm>
-            <a:off x="566928" y="1645920"/>
-            <a:ext cx="2606040" cy="438912"/>
+      <p:pic>
+        <p:nvPicPr>
+          <p:cNvPr id="6" name="Image 0" descr="preencoded.png">    </p:cNvPr>
+          <p:cNvPicPr>
+            <a:picLocks noChangeAspect="1"/>
+          </p:cNvPicPr>
+          <p:nvPr/>
+        </p:nvPicPr>
+        <p:blipFill>
+          <a:blip r:embed="rId1"/>
+          <a:stretch>
+            <a:fillRect/>
+          </a:stretch>
+        </p:blipFill>
+        <p:spPr>
+          <a:xfrm>
+            <a:off x="502920" y="1481328"/>
+            <a:ext cx="5120640" cy="4114800"/>
+          </a:xfrm>
+          <a:prstGeom prst="rect">
+            <a:avLst/>
+          </a:prstGeom>
+        </p:spPr>
+      </p:pic>
+      <p:sp>
+        <p:nvSpPr>
+          <p:cNvPr id="7" name="Text 4"/>
+          <p:cNvSpPr/>
+          <p:nvPr/>
+        </p:nvSpPr>
+        <p:spPr>
+          <a:xfrm>
+            <a:off x="5989320" y="1481328"/>
+            <a:ext cx="1560003" cy="493776"/>
           </a:xfrm>
           <a:prstGeom prst="rect">
             <a:avLst/>
@@ -7324,12 +8055,12 @@
           <a:p>
             <a:pPr indent="0" marL="0">
               <a:lnSpc>
-                <a:spcPct val="120000"/>
+                <a:spcPct val="115000"/>
               </a:lnSpc>
               <a:buNone/>
             </a:pPr>
             <a:r>
-              <a:rPr lang="en-US" sz="1350" dirty="0">
+              <a:rPr lang="en-US" sz="1300" dirty="0">
                 <a:solidFill>
                   <a:srgbClr val="718096"/>
                 </a:solidFill>
@@ -7337,22 +8068,22 @@
                 <a:ea typeface="Pretendard" pitchFamily="34" charset="-122"/>
                 <a:cs typeface="Pretendard" pitchFamily="34" charset="-120"/>
               </a:rPr>
-              <a:t>대지면적</a:t>
-            </a:r>
-            <a:endParaRPr lang="en-US" sz="1350" dirty="0"/>
-          </a:p>
-        </p:txBody>
-      </p:sp>
-      <p:sp>
-        <p:nvSpPr>
-          <p:cNvPr id="8" name="Text 6"/>
-          <p:cNvSpPr/>
-          <p:nvPr/>
-        </p:nvSpPr>
-        <p:spPr>
-          <a:xfrm>
-            <a:off x="3172968" y="1645920"/>
-            <a:ext cx="4251960" cy="438912"/>
+              <a:t>대중교통</a:t>
+            </a:r>
+            <a:endParaRPr lang="en-US" sz="1300" dirty="0"/>
+          </a:p>
+        </p:txBody>
+      </p:sp>
+      <p:sp>
+        <p:nvSpPr>
+          <p:cNvPr id="8" name="Text 5"/>
+          <p:cNvSpPr/>
+          <p:nvPr/>
+        </p:nvSpPr>
+        <p:spPr>
+          <a:xfrm>
+            <a:off x="7549323" y="1481328"/>
+            <a:ext cx="4011436" cy="493776"/>
           </a:xfrm>
           <a:prstGeom prst="rect">
             <a:avLst/>
@@ -7366,12 +8097,12 @@
           <a:p>
             <a:pPr indent="0" marL="0">
               <a:lnSpc>
-                <a:spcPct val="120000"/>
+                <a:spcPct val="115000"/>
               </a:lnSpc>
               <a:buNone/>
             </a:pPr>
             <a:r>
-              <a:rPr lang="en-US" sz="1350" b="1" dirty="0">
+              <a:rPr lang="en-US" sz="1300" b="1" dirty="0">
                 <a:solidFill>
                   <a:srgbClr val="10161F"/>
                 </a:solidFill>
@@ -7379,22 +8110,22 @@
                 <a:ea typeface="Pretendard" pitchFamily="34" charset="-122"/>
                 <a:cs typeface="Pretendard" pitchFamily="34" charset="-120"/>
               </a:rPr>
-              <a:t>142.5평</a:t>
-            </a:r>
-            <a:endParaRPr lang="en-US" sz="1350" dirty="0"/>
-          </a:p>
-        </p:txBody>
-      </p:sp>
-      <p:sp>
-        <p:nvSpPr>
-          <p:cNvPr id="9" name="Shape 7"/>
-          <p:cNvSpPr/>
-          <p:nvPr/>
-        </p:nvSpPr>
-        <p:spPr>
-          <a:xfrm>
-            <a:off x="566928" y="2084832"/>
-            <a:ext cx="6858000" cy="0"/>
+              <a:t>인접 지하철역 역세권 (상세 확인 필요)</a:t>
+            </a:r>
+            <a:endParaRPr lang="en-US" sz="1300" dirty="0"/>
+          </a:p>
+        </p:txBody>
+      </p:sp>
+      <p:sp>
+        <p:nvSpPr>
+          <p:cNvPr id="9" name="Shape 6"/>
+          <p:cNvSpPr/>
+          <p:nvPr/>
+        </p:nvSpPr>
+        <p:spPr>
+          <a:xfrm>
+            <a:off x="5989320" y="1975104"/>
+            <a:ext cx="5571439" cy="0"/>
           </a:xfrm>
           <a:prstGeom prst="line">
             <a:avLst/>
@@ -7410,14 +8141,14 @@
       </p:sp>
       <p:sp>
         <p:nvSpPr>
-          <p:cNvPr id="10" name="Text 8"/>
-          <p:cNvSpPr/>
-          <p:nvPr/>
-        </p:nvSpPr>
-        <p:spPr>
-          <a:xfrm>
-            <a:off x="566928" y="2084832"/>
-            <a:ext cx="2606040" cy="438912"/>
+          <p:cNvPr id="10" name="Text 7"/>
+          <p:cNvSpPr/>
+          <p:nvPr/>
+        </p:nvSpPr>
+        <p:spPr>
+          <a:xfrm>
+            <a:off x="5989320" y="1975104"/>
+            <a:ext cx="1560003" cy="493776"/>
           </a:xfrm>
           <a:prstGeom prst="rect">
             <a:avLst/>
@@ -7431,12 +8162,12 @@
           <a:p>
             <a:pPr indent="0" marL="0">
               <a:lnSpc>
-                <a:spcPct val="120000"/>
+                <a:spcPct val="115000"/>
               </a:lnSpc>
               <a:buNone/>
             </a:pPr>
             <a:r>
-              <a:rPr lang="en-US" sz="1350" dirty="0">
+              <a:rPr lang="en-US" sz="1300" dirty="0">
                 <a:solidFill>
                   <a:srgbClr val="718096"/>
                 </a:solidFill>
@@ -7444,22 +8175,22 @@
                 <a:ea typeface="Pretendard" pitchFamily="34" charset="-122"/>
                 <a:cs typeface="Pretendard" pitchFamily="34" charset="-120"/>
               </a:rPr>
-              <a:t>연면적</a:t>
-            </a:r>
-            <a:endParaRPr lang="en-US" sz="1350" dirty="0"/>
-          </a:p>
-        </p:txBody>
-      </p:sp>
-      <p:sp>
-        <p:nvSpPr>
-          <p:cNvPr id="11" name="Text 9"/>
-          <p:cNvSpPr/>
-          <p:nvPr/>
-        </p:nvSpPr>
-        <p:spPr>
-          <a:xfrm>
-            <a:off x="3172968" y="2084832"/>
-            <a:ext cx="4251960" cy="438912"/>
+              <a:t>상권권역</a:t>
+            </a:r>
+            <a:endParaRPr lang="en-US" sz="1300" dirty="0"/>
+          </a:p>
+        </p:txBody>
+      </p:sp>
+      <p:sp>
+        <p:nvSpPr>
+          <p:cNvPr id="11" name="Text 8"/>
+          <p:cNvSpPr/>
+          <p:nvPr/>
+        </p:nvSpPr>
+        <p:spPr>
+          <a:xfrm>
+            <a:off x="7549323" y="1975104"/>
+            <a:ext cx="4011436" cy="493776"/>
           </a:xfrm>
           <a:prstGeom prst="rect">
             <a:avLst/>
@@ -7473,12 +8204,12 @@
           <a:p>
             <a:pPr indent="0" marL="0">
               <a:lnSpc>
-                <a:spcPct val="120000"/>
+                <a:spcPct val="115000"/>
               </a:lnSpc>
               <a:buNone/>
             </a:pPr>
             <a:r>
-              <a:rPr lang="en-US" sz="1350" b="1" dirty="0">
+              <a:rPr lang="en-US" sz="1300" b="1" dirty="0">
                 <a:solidFill>
                   <a:srgbClr val="10161F"/>
                 </a:solidFill>
@@ -7486,49 +8217,26 @@
                 <a:ea typeface="Pretendard" pitchFamily="34" charset="-122"/>
                 <a:cs typeface="Pretendard" pitchFamily="34" charset="-120"/>
               </a:rPr>
-              <a:t>620.8평</a:t>
-            </a:r>
-            <a:endParaRPr lang="en-US" sz="1350" dirty="0"/>
-          </a:p>
-        </p:txBody>
-      </p:sp>
-      <p:sp>
-        <p:nvSpPr>
-          <p:cNvPr id="12" name="Shape 10"/>
-          <p:cNvSpPr/>
-          <p:nvPr/>
-        </p:nvSpPr>
-        <p:spPr>
-          <a:xfrm>
-            <a:off x="7604608" y="1371600"/>
-            <a:ext cx="0" cy="4754880"/>
-          </a:xfrm>
-          <a:prstGeom prst="line">
-            <a:avLst/>
-          </a:prstGeom>
-          <a:noFill/>
-          <a:ln w="8890">
-            <a:solidFill>
-              <a:srgbClr val="B98A2E"/>
-            </a:solidFill>
-            <a:prstDash val="solid"/>
-          </a:ln>
-        </p:spPr>
-      </p:sp>
-      <p:sp>
-        <p:nvSpPr>
-          <p:cNvPr id="13" name="Shape 11"/>
-          <p:cNvSpPr/>
-          <p:nvPr/>
-        </p:nvSpPr>
-        <p:spPr>
-          <a:xfrm>
-            <a:off x="7784287" y="1645920"/>
-            <a:ext cx="3840480" cy="2103120"/>
+              <a:t>서초권역 주요 상업·업무 권역</a:t>
+            </a:r>
+            <a:endParaRPr lang="en-US" sz="1300" dirty="0"/>
+          </a:p>
+        </p:txBody>
+      </p:sp>
+      <p:sp>
+        <p:nvSpPr>
+          <p:cNvPr id="12" name="Shape 9"/>
+          <p:cNvSpPr/>
+          <p:nvPr/>
+        </p:nvSpPr>
+        <p:spPr>
+          <a:xfrm>
+            <a:off x="5989320" y="2606040"/>
+            <a:ext cx="5571439" cy="658368"/>
           </a:xfrm>
           <a:prstGeom prst="roundRect">
             <a:avLst>
-              <a:gd name="adj" fmla="val 2609"/>
+              <a:gd name="adj" fmla="val 8333"/>
             </a:avLst>
           </a:prstGeom>
           <a:solidFill>
@@ -7539,14 +8247,14 @@
       </p:sp>
       <p:sp>
         <p:nvSpPr>
-          <p:cNvPr id="14" name="Shape 12"/>
-          <p:cNvSpPr/>
-          <p:nvPr/>
-        </p:nvSpPr>
-        <p:spPr>
-          <a:xfrm>
-            <a:off x="7784287" y="1700784"/>
-            <a:ext cx="36576" cy="1993392"/>
+          <p:cNvPr id="13" name="Shape 10"/>
+          <p:cNvSpPr/>
+          <p:nvPr/>
+        </p:nvSpPr>
+        <p:spPr>
+          <a:xfrm>
+            <a:off x="5989320" y="2660904"/>
+            <a:ext cx="36576" cy="548640"/>
           </a:xfrm>
           <a:prstGeom prst="rect">
             <a:avLst/>
@@ -7559,14 +8267,14 @@
       </p:sp>
       <p:sp>
         <p:nvSpPr>
-          <p:cNvPr id="15" name="Text 13"/>
-          <p:cNvSpPr/>
-          <p:nvPr/>
-        </p:nvSpPr>
-        <p:spPr>
-          <a:xfrm>
-            <a:off x="7967167" y="1755648"/>
-            <a:ext cx="3511296" cy="201168"/>
+          <p:cNvPr id="14" name="Text 11"/>
+          <p:cNvSpPr/>
+          <p:nvPr/>
+        </p:nvSpPr>
+        <p:spPr>
+          <a:xfrm>
+            <a:off x="6135624" y="2697480"/>
+            <a:ext cx="5315407" cy="201168"/>
           </a:xfrm>
           <a:prstGeom prst="rect">
             <a:avLst/>
@@ -7590,7 +8298,7 @@
                 <a:ea typeface="Pretendard" pitchFamily="34" charset="-122"/>
                 <a:cs typeface="Pretendard" pitchFamily="34" charset="-120"/>
               </a:rPr>
-              <a:t>토지 및 건축 규제 포인트</a:t>
+              <a:t>입지 종합 분석</a:t>
             </a:r>
             <a:endParaRPr lang="en-US" sz="1050" dirty="0"/>
           </a:p>
@@ -7598,14 +8306,14 @@
       </p:sp>
       <p:sp>
         <p:nvSpPr>
-          <p:cNvPr id="16" name="Text 14"/>
-          <p:cNvSpPr/>
-          <p:nvPr/>
-        </p:nvSpPr>
-        <p:spPr>
-          <a:xfrm>
-            <a:off x="7967167" y="1975104"/>
-            <a:ext cx="3511296" cy="1700784"/>
+          <p:cNvPr id="15" name="Text 12"/>
+          <p:cNvSpPr/>
+          <p:nvPr/>
+        </p:nvSpPr>
+        <p:spPr>
+          <a:xfrm>
+            <a:off x="6135624" y="2898648"/>
+            <a:ext cx="5315407" cy="329184"/>
           </a:xfrm>
           <a:prstGeom prst="rect">
             <a:avLst/>
@@ -7619,13 +8327,13 @@
           <a:p>
             <a:pPr marL="342900" indent="-342900">
               <a:lnSpc>
-                <a:spcPct val="120000"/>
+                <a:spcPct val="108000"/>
               </a:lnSpc>
               <a:buSzPct val="100000"/>
               <a:buChar char="•"/>
             </a:pPr>
             <a:r>
-              <a:rPr lang="en-US" sz="930" dirty="0">
+              <a:rPr lang="en-US" sz="980" dirty="0">
                 <a:solidFill>
                   <a:srgbClr val="10161F"/>
                 </a:solidFill>
@@ -7633,106 +8341,22 @@
                 <a:ea typeface="Pretendard" pitchFamily="34" charset="-122"/>
                 <a:cs typeface="Pretendard" pitchFamily="34" charset="-120"/>
               </a:rPr>
-              <a:t>용도지역·용도지구 기준 건폐율/용적률 상한 확인</a:t>
-            </a:r>
-            <a:endParaRPr lang="en-US" sz="930" dirty="0"/>
-          </a:p>
-          <a:p>
-            <a:pPr marL="342900" indent="-342900">
-              <a:lnSpc>
-                <a:spcPct val="120000"/>
-              </a:lnSpc>
-              <a:buSzPct val="100000"/>
-              <a:buChar char="•"/>
-            </a:pPr>
-            <a:r>
-              <a:rPr lang="en-US" sz="930" dirty="0">
-                <a:solidFill>
-                  <a:srgbClr val="10161F"/>
-                </a:solidFill>
-                <a:latin typeface="Pretendard" pitchFamily="34" charset="0"/>
-                <a:ea typeface="Pretendard" pitchFamily="34" charset="-122"/>
-                <a:cs typeface="Pretendard" pitchFamily="34" charset="-120"/>
-              </a:rPr>
-              <a:t>필지 형상 및 접도 조건에 따른 건축 가능 면적 검토</a:t>
-            </a:r>
-            <a:endParaRPr lang="en-US" sz="930" dirty="0"/>
-          </a:p>
-          <a:p>
-            <a:pPr marL="342900" indent="-342900">
-              <a:lnSpc>
-                <a:spcPct val="120000"/>
-              </a:lnSpc>
-              <a:buSzPct val="100000"/>
-              <a:buChar char="•"/>
-            </a:pPr>
-            <a:r>
-              <a:rPr lang="en-US" sz="930" dirty="0">
-                <a:solidFill>
-                  <a:srgbClr val="10161F"/>
-                </a:solidFill>
-                <a:latin typeface="Pretendard" pitchFamily="34" charset="0"/>
-                <a:ea typeface="Pretendard" pitchFamily="34" charset="-122"/>
-                <a:cs typeface="Pretendard" pitchFamily="34" charset="-120"/>
-              </a:rPr>
-              <a:t>토지이용계획 열람 및 개발행위허가 제한 여부 확인</a:t>
-            </a:r>
-            <a:endParaRPr lang="en-US" sz="930" dirty="0"/>
-          </a:p>
-        </p:txBody>
-      </p:sp>
-      <p:sp>
-        <p:nvSpPr>
-          <p:cNvPr id="17" name="Shape 15"/>
-          <p:cNvSpPr/>
-          <p:nvPr/>
-        </p:nvSpPr>
-        <p:spPr>
-          <a:xfrm>
-            <a:off x="7784287" y="3977640"/>
-            <a:ext cx="3840480" cy="2148840"/>
-          </a:xfrm>
-          <a:prstGeom prst="roundRect">
-            <a:avLst>
-              <a:gd name="adj" fmla="val 2553"/>
-            </a:avLst>
-          </a:prstGeom>
-          <a:solidFill>
-            <a:srgbClr val="BEE3F8"/>
-          </a:solidFill>
-          <a:ln/>
-        </p:spPr>
-      </p:sp>
-      <p:sp>
-        <p:nvSpPr>
-          <p:cNvPr id="18" name="Shape 16"/>
-          <p:cNvSpPr/>
-          <p:nvPr/>
-        </p:nvSpPr>
-        <p:spPr>
-          <a:xfrm>
-            <a:off x="7784287" y="4032504"/>
-            <a:ext cx="36576" cy="2039112"/>
-          </a:xfrm>
-          <a:prstGeom prst="rect">
-            <a:avLst/>
-          </a:prstGeom>
-          <a:solidFill>
-            <a:srgbClr val="2B6CB0"/>
-          </a:solidFill>
-          <a:ln/>
-        </p:spPr>
-      </p:sp>
-      <p:sp>
-        <p:nvSpPr>
-          <p:cNvPr id="19" name="Text 17"/>
-          <p:cNvSpPr/>
-          <p:nvPr/>
-        </p:nvSpPr>
-        <p:spPr>
-          <a:xfrm>
-            <a:off x="7967167" y="4087368"/>
-            <a:ext cx="3511296" cy="201168"/>
+              <a:t>서초권역 배후 상권 기반 안정적 임대 수요</a:t>
+            </a:r>
+            <a:endParaRPr lang="en-US" sz="980" dirty="0"/>
+          </a:p>
+        </p:txBody>
+      </p:sp>
+      <p:sp>
+        <p:nvSpPr>
+          <p:cNvPr id="16" name="Text 13"/>
+          <p:cNvSpPr/>
+          <p:nvPr/>
+        </p:nvSpPr>
+        <p:spPr>
+          <a:xfrm>
+            <a:off x="502920" y="6382512"/>
+            <a:ext cx="7315200" cy="219456"/>
           </a:xfrm>
           <a:prstGeom prst="rect">
             <a:avLst/>
@@ -7748,130 +8372,6 @@
               <a:buNone/>
             </a:pPr>
             <a:r>
-              <a:rPr lang="en-US" sz="1050" b="1" dirty="0">
-                <a:solidFill>
-                  <a:srgbClr val="2B6CB0"/>
-                </a:solidFill>
-                <a:latin typeface="Pretendard" pitchFamily="34" charset="0"/>
-                <a:ea typeface="Pretendard" pitchFamily="34" charset="-122"/>
-                <a:cs typeface="Pretendard" pitchFamily="34" charset="-120"/>
-              </a:rPr>
-              <a:t>권리관계 및 공적장부</a:t>
-            </a:r>
-            <a:endParaRPr lang="en-US" sz="1050" dirty="0"/>
-          </a:p>
-        </p:txBody>
-      </p:sp>
-      <p:sp>
-        <p:nvSpPr>
-          <p:cNvPr id="20" name="Text 18"/>
-          <p:cNvSpPr/>
-          <p:nvPr/>
-        </p:nvSpPr>
-        <p:spPr>
-          <a:xfrm>
-            <a:off x="7967167" y="4306824"/>
-            <a:ext cx="3511296" cy="1746504"/>
-          </a:xfrm>
-          <a:prstGeom prst="rect">
-            <a:avLst/>
-          </a:prstGeom>
-          <a:noFill/>
-          <a:ln/>
-        </p:spPr>
-        <p:txBody>
-          <a:bodyPr wrap="square" lIns="0" tIns="0" rIns="0" bIns="0" rtlCol="0" anchor="t"/>
-          <a:lstStyle/>
-          <a:p>
-            <a:pPr marL="342900" indent="-342900">
-              <a:lnSpc>
-                <a:spcPct val="120000"/>
-              </a:lnSpc>
-              <a:buSzPct val="100000"/>
-              <a:buChar char="•"/>
-            </a:pPr>
-            <a:r>
-              <a:rPr lang="en-US" sz="930" dirty="0">
-                <a:solidFill>
-                  <a:srgbClr val="10161F"/>
-                </a:solidFill>
-                <a:latin typeface="Pretendard" pitchFamily="34" charset="0"/>
-                <a:ea typeface="Pretendard" pitchFamily="34" charset="-122"/>
-                <a:cs typeface="Pretendard" pitchFamily="34" charset="-120"/>
-              </a:rPr>
-              <a:t>등기부등본 갑구 소유권 및 을구 근저당·가압류 확인</a:t>
-            </a:r>
-            <a:endParaRPr lang="en-US" sz="930" dirty="0"/>
-          </a:p>
-          <a:p>
-            <a:pPr marL="342900" indent="-342900">
-              <a:lnSpc>
-                <a:spcPct val="120000"/>
-              </a:lnSpc>
-              <a:buSzPct val="100000"/>
-              <a:buChar char="•"/>
-            </a:pPr>
-            <a:r>
-              <a:rPr lang="en-US" sz="930" dirty="0">
-                <a:solidFill>
-                  <a:srgbClr val="10161F"/>
-                </a:solidFill>
-                <a:latin typeface="Pretendard" pitchFamily="34" charset="0"/>
-                <a:ea typeface="Pretendard" pitchFamily="34" charset="-122"/>
-                <a:cs typeface="Pretendard" pitchFamily="34" charset="-120"/>
-              </a:rPr>
-              <a:t>건축물대장 기재 사항과 실물 현황 대조 점검</a:t>
-            </a:r>
-            <a:endParaRPr lang="en-US" sz="930" dirty="0"/>
-          </a:p>
-          <a:p>
-            <a:pPr marL="342900" indent="-342900">
-              <a:lnSpc>
-                <a:spcPct val="120000"/>
-              </a:lnSpc>
-              <a:buSzPct val="100000"/>
-              <a:buChar char="•"/>
-            </a:pPr>
-            <a:r>
-              <a:rPr lang="en-US" sz="930" dirty="0">
-                <a:solidFill>
-                  <a:srgbClr val="10161F"/>
-                </a:solidFill>
-                <a:latin typeface="Pretendard" pitchFamily="34" charset="0"/>
-                <a:ea typeface="Pretendard" pitchFamily="34" charset="-122"/>
-                <a:cs typeface="Pretendard" pitchFamily="34" charset="-120"/>
-              </a:rPr>
-              <a:t>개별공시지가 및 실거래가 비교 분석</a:t>
-            </a:r>
-            <a:endParaRPr lang="en-US" sz="930" dirty="0"/>
-          </a:p>
-        </p:txBody>
-      </p:sp>
-      <p:sp>
-        <p:nvSpPr>
-          <p:cNvPr id="21" name="Text 19"/>
-          <p:cNvSpPr/>
-          <p:nvPr/>
-        </p:nvSpPr>
-        <p:spPr>
-          <a:xfrm>
-            <a:off x="566928" y="6382512"/>
-            <a:ext cx="7315200" cy="219456"/>
-          </a:xfrm>
-          <a:prstGeom prst="rect">
-            <a:avLst/>
-          </a:prstGeom>
-          <a:noFill/>
-          <a:ln/>
-        </p:spPr>
-        <p:txBody>
-          <a:bodyPr wrap="square" lIns="0" tIns="0" rIns="0" bIns="0" rtlCol="0" anchor="ctr"/>
-          <a:lstStyle/>
-          <a:p>
-            <a:pPr indent="0" marL="0">
-              <a:buNone/>
-            </a:pPr>
-            <a:r>
               <a:rPr lang="en-US" sz="800" dirty="0">
                 <a:solidFill>
                   <a:srgbClr val="718096"/>
@@ -7888,13 +8388,13 @@
       </p:sp>
       <p:sp>
         <p:nvSpPr>
-          <p:cNvPr id="22" name="Text 20"/>
-          <p:cNvSpPr/>
-          <p:nvPr/>
-        </p:nvSpPr>
-        <p:spPr>
-          <a:xfrm>
-            <a:off x="10710367" y="6382512"/>
+          <p:cNvPr id="17" name="Text 14"/>
+          <p:cNvSpPr/>
+          <p:nvPr/>
+        </p:nvSpPr>
+        <p:spPr>
+          <a:xfrm>
+            <a:off x="10774375" y="6382512"/>
             <a:ext cx="914400" cy="219456"/>
           </a:xfrm>
           <a:prstGeom prst="rect">
@@ -7965,7 +8465,7 @@
         </p:nvSpPr>
         <p:spPr>
           <a:xfrm>
-            <a:off x="566928" y="457200"/>
+            <a:off x="502920" y="457200"/>
             <a:ext cx="384048" cy="384048"/>
           </a:xfrm>
           <a:prstGeom prst="ellipse">
@@ -7985,7 +8485,7 @@
         </p:nvSpPr>
         <p:spPr>
           <a:xfrm>
-            <a:off x="566928" y="457200"/>
+            <a:off x="502920" y="457200"/>
             <a:ext cx="384048" cy="384048"/>
           </a:xfrm>
           <a:prstGeom prst="rect">
@@ -8024,7 +8524,7 @@
         </p:nvSpPr>
         <p:spPr>
           <a:xfrm>
-            <a:off x="1133856" y="457200"/>
+            <a:off x="1069848" y="457200"/>
             <a:ext cx="10490911" cy="182880"/>
           </a:xfrm>
           <a:prstGeom prst="rect">
@@ -8049,7 +8549,7 @@
                 <a:ea typeface="Arial" pitchFamily="34" charset="-122"/>
                 <a:cs typeface="Arial" pitchFamily="34" charset="-120"/>
               </a:rPr>
-              <a:t>Building</a:t>
+              <a:t>Land</a:t>
             </a:r>
             <a:endParaRPr lang="en-US" sz="950" dirty="0"/>
           </a:p>
@@ -8063,7 +8563,7 @@
         </p:nvSpPr>
         <p:spPr>
           <a:xfrm>
-            <a:off x="1133856" y="640080"/>
+            <a:off x="1069848" y="640080"/>
             <a:ext cx="10490911" cy="365760"/>
           </a:xfrm>
           <a:prstGeom prst="rect">
@@ -8088,7 +8588,7 @@
                 <a:ea typeface="Pretendard" pitchFamily="34" charset="-122"/>
                 <a:cs typeface="Pretendard" pitchFamily="34" charset="-120"/>
               </a:rPr>
-              <a:t>건물 개요</a:t>
+              <a:t>토지 현황</a:t>
             </a:r>
             <a:endParaRPr lang="en-US" sz="2300" dirty="0"/>
           </a:p>
@@ -8102,7 +8602,7 @@
         </p:nvSpPr>
         <p:spPr>
           <a:xfrm>
-            <a:off x="566928" y="1371600"/>
+            <a:off x="502920" y="1371600"/>
             <a:ext cx="6858000" cy="237744"/>
           </a:xfrm>
           <a:prstGeom prst="rect">
@@ -8127,7 +8627,7 @@
                 <a:ea typeface="Pretendard" pitchFamily="34" charset="-122"/>
                 <a:cs typeface="Pretendard" pitchFamily="34" charset="-120"/>
               </a:rPr>
-              <a:t>건축물 개요 및 물리 스펙</a:t>
+              <a:t>토지 현황</a:t>
             </a:r>
             <a:endParaRPr lang="en-US" sz="1100" dirty="0"/>
           </a:p>
@@ -8141,8 +8641,8 @@
         </p:nvSpPr>
         <p:spPr>
           <a:xfrm>
-            <a:off x="566928" y="1645920"/>
-            <a:ext cx="2606040" cy="438912"/>
+            <a:off x="502920" y="1645920"/>
+            <a:ext cx="1920240" cy="420624"/>
           </a:xfrm>
           <a:prstGeom prst="rect">
             <a:avLst/>
@@ -8156,7 +8656,7 @@
           <a:p>
             <a:pPr indent="0" marL="0">
               <a:lnSpc>
-                <a:spcPct val="120000"/>
+                <a:spcPct val="115000"/>
               </a:lnSpc>
               <a:buNone/>
             </a:pPr>
@@ -8183,8 +8683,8 @@
         </p:nvSpPr>
         <p:spPr>
           <a:xfrm>
-            <a:off x="3172968" y="1645920"/>
-            <a:ext cx="4251960" cy="438912"/>
+            <a:off x="2423160" y="1645920"/>
+            <a:ext cx="4937760" cy="420624"/>
           </a:xfrm>
           <a:prstGeom prst="rect">
             <a:avLst/>
@@ -8198,7 +8698,7 @@
           <a:p>
             <a:pPr indent="0" marL="0">
               <a:lnSpc>
-                <a:spcPct val="120000"/>
+                <a:spcPct val="115000"/>
               </a:lnSpc>
               <a:buNone/>
             </a:pPr>
@@ -8225,7 +8725,7 @@
         </p:nvSpPr>
         <p:spPr>
           <a:xfrm>
-            <a:off x="566928" y="2084832"/>
+            <a:off x="502920" y="2066544"/>
             <a:ext cx="6858000" cy="0"/>
           </a:xfrm>
           <a:prstGeom prst="line">
@@ -8248,8 +8748,8 @@
         </p:nvSpPr>
         <p:spPr>
           <a:xfrm>
-            <a:off x="566928" y="2084832"/>
-            <a:ext cx="2606040" cy="438912"/>
+            <a:off x="502920" y="2066544"/>
+            <a:ext cx="1920240" cy="420624"/>
           </a:xfrm>
           <a:prstGeom prst="rect">
             <a:avLst/>
@@ -8263,7 +8763,7 @@
           <a:p>
             <a:pPr indent="0" marL="0">
               <a:lnSpc>
-                <a:spcPct val="120000"/>
+                <a:spcPct val="115000"/>
               </a:lnSpc>
               <a:buNone/>
             </a:pPr>
@@ -8290,8 +8790,8 @@
         </p:nvSpPr>
         <p:spPr>
           <a:xfrm>
-            <a:off x="3172968" y="2084832"/>
-            <a:ext cx="4251960" cy="438912"/>
+            <a:off x="2423160" y="2066544"/>
+            <a:ext cx="4937760" cy="420624"/>
           </a:xfrm>
           <a:prstGeom prst="rect">
             <a:avLst/>
@@ -8305,7 +8805,7 @@
           <a:p>
             <a:pPr indent="0" marL="0">
               <a:lnSpc>
-                <a:spcPct val="120000"/>
+                <a:spcPct val="115000"/>
               </a:lnSpc>
               <a:buNone/>
             </a:pPr>
@@ -8332,114 +8832,7 @@
         </p:nvSpPr>
         <p:spPr>
           <a:xfrm>
-            <a:off x="566928" y="2523744"/>
-            <a:ext cx="6858000" cy="0"/>
-          </a:xfrm>
-          <a:prstGeom prst="line">
-            <a:avLst/>
-          </a:prstGeom>
-          <a:noFill/>
-          <a:ln w="3810">
-            <a:solidFill>
-              <a:srgbClr val="CBD5E0"/>
-            </a:solidFill>
-            <a:prstDash val="solid"/>
-          </a:ln>
-        </p:spPr>
-      </p:sp>
-      <p:sp>
-        <p:nvSpPr>
-          <p:cNvPr id="13" name="Text 11"/>
-          <p:cNvSpPr/>
-          <p:nvPr/>
-        </p:nvSpPr>
-        <p:spPr>
-          <a:xfrm>
-            <a:off x="566928" y="2523744"/>
-            <a:ext cx="2606040" cy="438912"/>
-          </a:xfrm>
-          <a:prstGeom prst="rect">
-            <a:avLst/>
-          </a:prstGeom>
-          <a:noFill/>
-          <a:ln/>
-        </p:spPr>
-        <p:txBody>
-          <a:bodyPr wrap="square" lIns="0" tIns="0" rIns="0" bIns="0" rtlCol="0" anchor="ctr"/>
-          <a:lstStyle/>
-          <a:p>
-            <a:pPr indent="0" marL="0">
-              <a:lnSpc>
-                <a:spcPct val="120000"/>
-              </a:lnSpc>
-              <a:buNone/>
-            </a:pPr>
-            <a:r>
-              <a:rPr lang="en-US" sz="1350" dirty="0">
-                <a:solidFill>
-                  <a:srgbClr val="718096"/>
-                </a:solidFill>
-                <a:latin typeface="Pretendard" pitchFamily="34" charset="0"/>
-                <a:ea typeface="Pretendard" pitchFamily="34" charset="-122"/>
-                <a:cs typeface="Pretendard" pitchFamily="34" charset="-120"/>
-              </a:rPr>
-              <a:t>준공</a:t>
-            </a:r>
-            <a:endParaRPr lang="en-US" sz="1350" dirty="0"/>
-          </a:p>
-        </p:txBody>
-      </p:sp>
-      <p:sp>
-        <p:nvSpPr>
-          <p:cNvPr id="14" name="Text 12"/>
-          <p:cNvSpPr/>
-          <p:nvPr/>
-        </p:nvSpPr>
-        <p:spPr>
-          <a:xfrm>
-            <a:off x="3172968" y="2523744"/>
-            <a:ext cx="4251960" cy="438912"/>
-          </a:xfrm>
-          <a:prstGeom prst="rect">
-            <a:avLst/>
-          </a:prstGeom>
-          <a:noFill/>
-          <a:ln/>
-        </p:spPr>
-        <p:txBody>
-          <a:bodyPr wrap="square" lIns="0" tIns="0" rIns="0" bIns="0" rtlCol="0" anchor="ctr"/>
-          <a:lstStyle/>
-          <a:p>
-            <a:pPr indent="0" marL="0">
-              <a:lnSpc>
-                <a:spcPct val="120000"/>
-              </a:lnSpc>
-              <a:buNone/>
-            </a:pPr>
-            <a:r>
-              <a:rPr lang="en-US" sz="1350" b="1" dirty="0">
-                <a:solidFill>
-                  <a:srgbClr val="10161F"/>
-                </a:solidFill>
-                <a:latin typeface="Pretendard" pitchFamily="34" charset="0"/>
-                <a:ea typeface="Pretendard" pitchFamily="34" charset="-122"/>
-                <a:cs typeface="Pretendard" pitchFamily="34" charset="-120"/>
-              </a:rPr>
-              <a:t>2017년</a:t>
-            </a:r>
-            <a:endParaRPr lang="en-US" sz="1350" dirty="0"/>
-          </a:p>
-        </p:txBody>
-      </p:sp>
-      <p:sp>
-        <p:nvSpPr>
-          <p:cNvPr id="15" name="Shape 13"/>
-          <p:cNvSpPr/>
-          <p:nvPr/>
-        </p:nvSpPr>
-        <p:spPr>
-          <a:xfrm>
-            <a:off x="7604608" y="1371600"/>
+            <a:off x="7540600" y="1371600"/>
             <a:ext cx="0" cy="4754880"/>
           </a:xfrm>
           <a:prstGeom prst="line">
@@ -8456,56 +8849,228 @@
       </p:sp>
       <p:sp>
         <p:nvSpPr>
-          <p:cNvPr id="16" name="Shape 14"/>
-          <p:cNvSpPr/>
-          <p:nvPr/>
-        </p:nvSpPr>
-        <p:spPr>
-          <a:xfrm>
-            <a:off x="7784287" y="1645920"/>
-            <a:ext cx="3840480" cy="1645920"/>
+          <p:cNvPr id="13" name="Shape 11"/>
+          <p:cNvSpPr/>
+          <p:nvPr/>
+        </p:nvSpPr>
+        <p:spPr>
+          <a:xfrm>
+            <a:off x="7720279" y="1645920"/>
+            <a:ext cx="3840480" cy="2103120"/>
           </a:xfrm>
           <a:prstGeom prst="roundRect">
             <a:avLst>
-              <a:gd name="adj" fmla="val 3333"/>
+              <a:gd name="adj" fmla="val 2609"/>
             </a:avLst>
           </a:prstGeom>
           <a:solidFill>
-            <a:srgbClr val="F3EBDA"/>
+            <a:srgbClr val="BEE3F8"/>
           </a:solidFill>
           <a:ln/>
         </p:spPr>
       </p:sp>
       <p:sp>
         <p:nvSpPr>
+          <p:cNvPr id="14" name="Shape 12"/>
+          <p:cNvSpPr/>
+          <p:nvPr/>
+        </p:nvSpPr>
+        <p:spPr>
+          <a:xfrm>
+            <a:off x="7720279" y="1700784"/>
+            <a:ext cx="36576" cy="1993392"/>
+          </a:xfrm>
+          <a:prstGeom prst="rect">
+            <a:avLst/>
+          </a:prstGeom>
+          <a:solidFill>
+            <a:srgbClr val="2B6CB0"/>
+          </a:solidFill>
+          <a:ln/>
+        </p:spPr>
+      </p:sp>
+      <p:sp>
+        <p:nvSpPr>
+          <p:cNvPr id="15" name="Text 13"/>
+          <p:cNvSpPr/>
+          <p:nvPr/>
+        </p:nvSpPr>
+        <p:spPr>
+          <a:xfrm>
+            <a:off x="7866583" y="1737360"/>
+            <a:ext cx="3584448" cy="201168"/>
+          </a:xfrm>
+          <a:prstGeom prst="rect">
+            <a:avLst/>
+          </a:prstGeom>
+          <a:noFill/>
+          <a:ln/>
+        </p:spPr>
+        <p:txBody>
+          <a:bodyPr wrap="square" lIns="0" tIns="0" rIns="0" bIns="0" rtlCol="0" anchor="ctr"/>
+          <a:lstStyle/>
+          <a:p>
+            <a:pPr indent="0" marL="0">
+              <a:buNone/>
+            </a:pPr>
+            <a:r>
+              <a:rPr lang="en-US" sz="1050" b="1" dirty="0">
+                <a:solidFill>
+                  <a:srgbClr val="2B6CB0"/>
+                </a:solidFill>
+                <a:latin typeface="Pretendard" pitchFamily="34" charset="0"/>
+                <a:ea typeface="Pretendard" pitchFamily="34" charset="-122"/>
+                <a:cs typeface="Pretendard" pitchFamily="34" charset="-120"/>
+              </a:rPr>
+              <a:t>토지 및 건축 규제 포인트</a:t>
+            </a:r>
+            <a:endParaRPr lang="en-US" sz="1050" dirty="0"/>
+          </a:p>
+        </p:txBody>
+      </p:sp>
+      <p:sp>
+        <p:nvSpPr>
+          <p:cNvPr id="16" name="Text 14"/>
+          <p:cNvSpPr/>
+          <p:nvPr/>
+        </p:nvSpPr>
+        <p:spPr>
+          <a:xfrm>
+            <a:off x="7866583" y="1938528"/>
+            <a:ext cx="3584448" cy="1773936"/>
+          </a:xfrm>
+          <a:prstGeom prst="rect">
+            <a:avLst/>
+          </a:prstGeom>
+          <a:noFill/>
+          <a:ln/>
+        </p:spPr>
+        <p:txBody>
+          <a:bodyPr wrap="square" lIns="0" tIns="0" rIns="0" bIns="0" rtlCol="0" anchor="t"/>
+          <a:lstStyle/>
+          <a:p>
+            <a:pPr marL="342900" indent="-342900">
+              <a:lnSpc>
+                <a:spcPct val="108000"/>
+              </a:lnSpc>
+              <a:buSzPct val="100000"/>
+              <a:buChar char="•"/>
+            </a:pPr>
+            <a:r>
+              <a:rPr lang="en-US" sz="980" dirty="0">
+                <a:solidFill>
+                  <a:srgbClr val="10161F"/>
+                </a:solidFill>
+                <a:latin typeface="Pretendard" pitchFamily="34" charset="0"/>
+                <a:ea typeface="Pretendard" pitchFamily="34" charset="-122"/>
+                <a:cs typeface="Pretendard" pitchFamily="34" charset="-120"/>
+              </a:rPr>
+              <a:t>용도지역·용도지구 기준 건폐율/용적률 상한 확인</a:t>
+            </a:r>
+            <a:endParaRPr lang="en-US" sz="980" dirty="0"/>
+          </a:p>
+          <a:p>
+            <a:pPr marL="342900" indent="-342900">
+              <a:lnSpc>
+                <a:spcPct val="108000"/>
+              </a:lnSpc>
+              <a:spcBef>
+                <a:spcPts val="300"/>
+              </a:spcBef>
+              <a:buSzPct val="100000"/>
+              <a:buChar char="•"/>
+            </a:pPr>
+            <a:r>
+              <a:rPr lang="en-US" sz="980" dirty="0">
+                <a:solidFill>
+                  <a:srgbClr val="10161F"/>
+                </a:solidFill>
+                <a:latin typeface="Pretendard" pitchFamily="34" charset="0"/>
+                <a:ea typeface="Pretendard" pitchFamily="34" charset="-122"/>
+                <a:cs typeface="Pretendard" pitchFamily="34" charset="-120"/>
+              </a:rPr>
+              <a:t>필지 형상 및 접도 조건에 따른 건축 가능 면적 검토</a:t>
+            </a:r>
+            <a:endParaRPr lang="en-US" sz="980" dirty="0"/>
+          </a:p>
+          <a:p>
+            <a:pPr marL="342900" indent="-342900">
+              <a:lnSpc>
+                <a:spcPct val="108000"/>
+              </a:lnSpc>
+              <a:spcBef>
+                <a:spcPts val="300"/>
+              </a:spcBef>
+              <a:buSzPct val="100000"/>
+              <a:buChar char="•"/>
+            </a:pPr>
+            <a:r>
+              <a:rPr lang="en-US" sz="980" dirty="0">
+                <a:solidFill>
+                  <a:srgbClr val="10161F"/>
+                </a:solidFill>
+                <a:latin typeface="Pretendard" pitchFamily="34" charset="0"/>
+                <a:ea typeface="Pretendard" pitchFamily="34" charset="-122"/>
+                <a:cs typeface="Pretendard" pitchFamily="34" charset="-120"/>
+              </a:rPr>
+              <a:t>토지이용계획 열람 및 개발행위허가 제한 여부 확인</a:t>
+            </a:r>
+            <a:endParaRPr lang="en-US" sz="980" dirty="0"/>
+          </a:p>
+        </p:txBody>
+      </p:sp>
+      <p:sp>
+        <p:nvSpPr>
           <p:cNvPr id="17" name="Shape 15"/>
           <p:cNvSpPr/>
           <p:nvPr/>
         </p:nvSpPr>
         <p:spPr>
           <a:xfrm>
-            <a:off x="7784287" y="1700784"/>
-            <a:ext cx="36576" cy="1536192"/>
-          </a:xfrm>
-          <a:prstGeom prst="rect">
-            <a:avLst/>
+            <a:off x="7720279" y="3977640"/>
+            <a:ext cx="3840480" cy="2148840"/>
+          </a:xfrm>
+          <a:prstGeom prst="roundRect">
+            <a:avLst>
+              <a:gd name="adj" fmla="val 2553"/>
+            </a:avLst>
           </a:prstGeom>
           <a:solidFill>
-            <a:srgbClr val="977024"/>
+            <a:srgbClr val="BEE3F8"/>
           </a:solidFill>
           <a:ln/>
         </p:spPr>
       </p:sp>
       <p:sp>
         <p:nvSpPr>
-          <p:cNvPr id="18" name="Text 16"/>
-          <p:cNvSpPr/>
-          <p:nvPr/>
-        </p:nvSpPr>
-        <p:spPr>
-          <a:xfrm>
-            <a:off x="7967167" y="1755648"/>
-            <a:ext cx="3511296" cy="201168"/>
+          <p:cNvPr id="18" name="Shape 16"/>
+          <p:cNvSpPr/>
+          <p:nvPr/>
+        </p:nvSpPr>
+        <p:spPr>
+          <a:xfrm>
+            <a:off x="7720279" y="4032504"/>
+            <a:ext cx="36576" cy="2039112"/>
+          </a:xfrm>
+          <a:prstGeom prst="rect">
+            <a:avLst/>
+          </a:prstGeom>
+          <a:solidFill>
+            <a:srgbClr val="2B6CB0"/>
+          </a:solidFill>
+          <a:ln/>
+        </p:spPr>
+      </p:sp>
+      <p:sp>
+        <p:nvSpPr>
+          <p:cNvPr id="19" name="Text 17"/>
+          <p:cNvSpPr/>
+          <p:nvPr/>
+        </p:nvSpPr>
+        <p:spPr>
+          <a:xfrm>
+            <a:off x="7866583" y="4069080"/>
+            <a:ext cx="3584448" cy="201168"/>
           </a:xfrm>
           <a:prstGeom prst="rect">
             <a:avLst/>
@@ -8520,20 +9085,31 @@
             <a:pPr indent="0" marL="0">
               <a:buNone/>
             </a:pPr>
+            <a:r>
+              <a:rPr lang="en-US" sz="1050" b="1" dirty="0">
+                <a:solidFill>
+                  <a:srgbClr val="2B6CB0"/>
+                </a:solidFill>
+                <a:latin typeface="Pretendard" pitchFamily="34" charset="0"/>
+                <a:ea typeface="Pretendard" pitchFamily="34" charset="-122"/>
+                <a:cs typeface="Pretendard" pitchFamily="34" charset="-120"/>
+              </a:rPr>
+              <a:t>권리관계 및 공적장부</a:t>
+            </a:r>
             <a:endParaRPr lang="en-US" sz="1050" dirty="0"/>
           </a:p>
         </p:txBody>
       </p:sp>
       <p:sp>
         <p:nvSpPr>
-          <p:cNvPr id="19" name="Text 17"/>
-          <p:cNvSpPr/>
-          <p:nvPr/>
-        </p:nvSpPr>
-        <p:spPr>
-          <a:xfrm>
-            <a:off x="7967167" y="1975104"/>
-            <a:ext cx="3511296" cy="1243584"/>
+          <p:cNvPr id="20" name="Text 18"/>
+          <p:cNvSpPr/>
+          <p:nvPr/>
+        </p:nvSpPr>
+        <p:spPr>
+          <a:xfrm>
+            <a:off x="7866583" y="4270248"/>
+            <a:ext cx="3584448" cy="1819656"/>
           </a:xfrm>
           <a:prstGeom prst="rect">
             <a:avLst/>
@@ -8545,49 +9121,98 @@
           <a:bodyPr wrap="square" lIns="0" tIns="0" rIns="0" bIns="0" rtlCol="0" anchor="t"/>
           <a:lstStyle/>
           <a:p>
+            <a:pPr marL="342900" indent="-342900">
+              <a:lnSpc>
+                <a:spcPct val="108000"/>
+              </a:lnSpc>
+              <a:buSzPct val="100000"/>
+              <a:buChar char="•"/>
+            </a:pPr>
+            <a:r>
+              <a:rPr lang="en-US" sz="980" dirty="0">
+                <a:solidFill>
+                  <a:srgbClr val="10161F"/>
+                </a:solidFill>
+                <a:latin typeface="Pretendard" pitchFamily="34" charset="0"/>
+                <a:ea typeface="Pretendard" pitchFamily="34" charset="-122"/>
+                <a:cs typeface="Pretendard" pitchFamily="34" charset="-120"/>
+              </a:rPr>
+              <a:t>등기부등본 갑구 소유권 및 을구 근저당·가압류 확인</a:t>
+            </a:r>
+            <a:endParaRPr lang="en-US" sz="980" dirty="0"/>
+          </a:p>
+          <a:p>
+            <a:pPr marL="342900" indent="-342900">
+              <a:lnSpc>
+                <a:spcPct val="108000"/>
+              </a:lnSpc>
+              <a:spcBef>
+                <a:spcPts val="300"/>
+              </a:spcBef>
+              <a:buSzPct val="100000"/>
+              <a:buChar char="•"/>
+            </a:pPr>
+            <a:r>
+              <a:rPr lang="en-US" sz="980" dirty="0">
+                <a:solidFill>
+                  <a:srgbClr val="10161F"/>
+                </a:solidFill>
+                <a:latin typeface="Pretendard" pitchFamily="34" charset="0"/>
+                <a:ea typeface="Pretendard" pitchFamily="34" charset="-122"/>
+                <a:cs typeface="Pretendard" pitchFamily="34" charset="-120"/>
+              </a:rPr>
+              <a:t>건축물대장 기재 사항과 실물 현황 대조 점검</a:t>
+            </a:r>
+            <a:endParaRPr lang="en-US" sz="980" dirty="0"/>
+          </a:p>
+          <a:p>
+            <a:pPr marL="342900" indent="-342900">
+              <a:lnSpc>
+                <a:spcPct val="108000"/>
+              </a:lnSpc>
+              <a:spcBef>
+                <a:spcPts val="300"/>
+              </a:spcBef>
+              <a:buSzPct val="100000"/>
+              <a:buChar char="•"/>
+            </a:pPr>
+            <a:r>
+              <a:rPr lang="en-US" sz="980" dirty="0">
+                <a:solidFill>
+                  <a:srgbClr val="10161F"/>
+                </a:solidFill>
+                <a:latin typeface="Pretendard" pitchFamily="34" charset="0"/>
+                <a:ea typeface="Pretendard" pitchFamily="34" charset="-122"/>
+                <a:cs typeface="Pretendard" pitchFamily="34" charset="-120"/>
+              </a:rPr>
+              <a:t>개별공시지가 및 실거래가 비교 분석</a:t>
+            </a:r>
+            <a:endParaRPr lang="en-US" sz="980" dirty="0"/>
+          </a:p>
+        </p:txBody>
+      </p:sp>
+      <p:sp>
+        <p:nvSpPr>
+          <p:cNvPr id="21" name="Text 19"/>
+          <p:cNvSpPr/>
+          <p:nvPr/>
+        </p:nvSpPr>
+        <p:spPr>
+          <a:xfrm>
+            <a:off x="502920" y="6382512"/>
+            <a:ext cx="7315200" cy="219456"/>
+          </a:xfrm>
+          <a:prstGeom prst="rect">
+            <a:avLst/>
+          </a:prstGeom>
+          <a:noFill/>
+          <a:ln/>
+        </p:spPr>
+        <p:txBody>
+          <a:bodyPr wrap="square" lIns="0" tIns="0" rIns="0" bIns="0" rtlCol="0" anchor="ctr"/>
+          <a:lstStyle/>
+          <a:p>
             <a:pPr indent="0" marL="0">
-              <a:lnSpc>
-                <a:spcPct val="120000"/>
-              </a:lnSpc>
-              <a:buNone/>
-            </a:pPr>
-            <a:r>
-              <a:rPr lang="en-US" sz="930" dirty="0">
-                <a:solidFill>
-                  <a:srgbClr val="10161F"/>
-                </a:solidFill>
-                <a:latin typeface="Pretendard" pitchFamily="34" charset="0"/>
-                <a:ea typeface="Pretendard" pitchFamily="34" charset="-122"/>
-                <a:cs typeface="Pretendard" pitchFamily="34" charset="-120"/>
-              </a:rPr>
-              <a:t>서초 메디컬 빌딩은 지하2층~지상7층 규모의 올근생 빌딩입니다.</a:t>
-            </a:r>
-            <a:endParaRPr lang="en-US" sz="930" dirty="0"/>
-          </a:p>
-        </p:txBody>
-      </p:sp>
-      <p:sp>
-        <p:nvSpPr>
-          <p:cNvPr id="20" name="Text 18"/>
-          <p:cNvSpPr/>
-          <p:nvPr/>
-        </p:nvSpPr>
-        <p:spPr>
-          <a:xfrm>
-            <a:off x="566928" y="6382512"/>
-            <a:ext cx="7315200" cy="219456"/>
-          </a:xfrm>
-          <a:prstGeom prst="rect">
-            <a:avLst/>
-          </a:prstGeom>
-          <a:noFill/>
-          <a:ln/>
-        </p:spPr>
-        <p:txBody>
-          <a:bodyPr wrap="square" lIns="0" tIns="0" rIns="0" bIns="0" rtlCol="0" anchor="ctr"/>
-          <a:lstStyle/>
-          <a:p>
-            <a:pPr indent="0" marL="0">
               <a:buNone/>
             </a:pPr>
             <a:r>
@@ -8607,13 +9232,13 @@
       </p:sp>
       <p:sp>
         <p:nvSpPr>
-          <p:cNvPr id="21" name="Text 19"/>
-          <p:cNvSpPr/>
-          <p:nvPr/>
-        </p:nvSpPr>
-        <p:spPr>
-          <a:xfrm>
-            <a:off x="10710367" y="6382512"/>
+          <p:cNvPr id="22" name="Text 20"/>
+          <p:cNvSpPr/>
+          <p:nvPr/>
+        </p:nvSpPr>
+        <p:spPr>
+          <a:xfrm>
+            <a:off x="10774375" y="6382512"/>
             <a:ext cx="914400" cy="219456"/>
           </a:xfrm>
           <a:prstGeom prst="rect">
@@ -8684,7 +9309,7 @@
         </p:nvSpPr>
         <p:spPr>
           <a:xfrm>
-            <a:off x="566928" y="457200"/>
+            <a:off x="502920" y="457200"/>
             <a:ext cx="384048" cy="384048"/>
           </a:xfrm>
           <a:prstGeom prst="ellipse">
@@ -8704,7 +9329,7 @@
         </p:nvSpPr>
         <p:spPr>
           <a:xfrm>
-            <a:off x="566928" y="457200"/>
+            <a:off x="502920" y="457200"/>
             <a:ext cx="384048" cy="384048"/>
           </a:xfrm>
           <a:prstGeom prst="rect">
@@ -8743,7 +9368,7 @@
         </p:nvSpPr>
         <p:spPr>
           <a:xfrm>
-            <a:off x="1133856" y="457200"/>
+            <a:off x="1069848" y="457200"/>
             <a:ext cx="10490911" cy="182880"/>
           </a:xfrm>
           <a:prstGeom prst="rect">
@@ -8768,6 +9393,725 @@
                 <a:ea typeface="Arial" pitchFamily="34" charset="-122"/>
                 <a:cs typeface="Arial" pitchFamily="34" charset="-120"/>
               </a:rPr>
+              <a:t>Building</a:t>
+            </a:r>
+            <a:endParaRPr lang="en-US" sz="950" dirty="0"/>
+          </a:p>
+        </p:txBody>
+      </p:sp>
+      <p:sp>
+        <p:nvSpPr>
+          <p:cNvPr id="5" name="Text 3"/>
+          <p:cNvSpPr/>
+          <p:nvPr/>
+        </p:nvSpPr>
+        <p:spPr>
+          <a:xfrm>
+            <a:off x="1069848" y="640080"/>
+            <a:ext cx="10490911" cy="365760"/>
+          </a:xfrm>
+          <a:prstGeom prst="rect">
+            <a:avLst/>
+          </a:prstGeom>
+          <a:noFill/>
+          <a:ln/>
+        </p:spPr>
+        <p:txBody>
+          <a:bodyPr wrap="square" lIns="0" tIns="0" rIns="0" bIns="0" rtlCol="0" anchor="ctr"/>
+          <a:lstStyle/>
+          <a:p>
+            <a:pPr indent="0" marL="0">
+              <a:buNone/>
+            </a:pPr>
+            <a:r>
+              <a:rPr lang="en-US" sz="2300" b="1" dirty="0">
+                <a:solidFill>
+                  <a:srgbClr val="10161F"/>
+                </a:solidFill>
+                <a:latin typeface="Pretendard" pitchFamily="34" charset="0"/>
+                <a:ea typeface="Pretendard" pitchFamily="34" charset="-122"/>
+                <a:cs typeface="Pretendard" pitchFamily="34" charset="-120"/>
+              </a:rPr>
+              <a:t>건물 개요</a:t>
+            </a:r>
+            <a:endParaRPr lang="en-US" sz="2300" dirty="0"/>
+          </a:p>
+        </p:txBody>
+      </p:sp>
+      <p:sp>
+        <p:nvSpPr>
+          <p:cNvPr id="6" name="Text 4"/>
+          <p:cNvSpPr/>
+          <p:nvPr/>
+        </p:nvSpPr>
+        <p:spPr>
+          <a:xfrm>
+            <a:off x="502920" y="1371600"/>
+            <a:ext cx="6858000" cy="237744"/>
+          </a:xfrm>
+          <a:prstGeom prst="rect">
+            <a:avLst/>
+          </a:prstGeom>
+          <a:noFill/>
+          <a:ln/>
+        </p:spPr>
+        <p:txBody>
+          <a:bodyPr wrap="square" lIns="0" tIns="0" rIns="0" bIns="0" rtlCol="0" anchor="ctr"/>
+          <a:lstStyle/>
+          <a:p>
+            <a:pPr indent="0" marL="0">
+              <a:buNone/>
+            </a:pPr>
+            <a:r>
+              <a:rPr lang="en-US" sz="1100" b="1" dirty="0">
+                <a:solidFill>
+                  <a:srgbClr val="10161F"/>
+                </a:solidFill>
+                <a:latin typeface="Pretendard" pitchFamily="34" charset="0"/>
+                <a:ea typeface="Pretendard" pitchFamily="34" charset="-122"/>
+                <a:cs typeface="Pretendard" pitchFamily="34" charset="-120"/>
+              </a:rPr>
+              <a:t>건축물 개요 및 물리 스펙</a:t>
+            </a:r>
+            <a:endParaRPr lang="en-US" sz="1100" dirty="0"/>
+          </a:p>
+        </p:txBody>
+      </p:sp>
+      <p:sp>
+        <p:nvSpPr>
+          <p:cNvPr id="7" name="Text 5"/>
+          <p:cNvSpPr/>
+          <p:nvPr/>
+        </p:nvSpPr>
+        <p:spPr>
+          <a:xfrm>
+            <a:off x="502920" y="1645920"/>
+            <a:ext cx="1920240" cy="420624"/>
+          </a:xfrm>
+          <a:prstGeom prst="rect">
+            <a:avLst/>
+          </a:prstGeom>
+          <a:noFill/>
+          <a:ln/>
+        </p:spPr>
+        <p:txBody>
+          <a:bodyPr wrap="square" lIns="0" tIns="0" rIns="0" bIns="0" rtlCol="0" anchor="ctr"/>
+          <a:lstStyle/>
+          <a:p>
+            <a:pPr indent="0" marL="0">
+              <a:lnSpc>
+                <a:spcPct val="115000"/>
+              </a:lnSpc>
+              <a:buNone/>
+            </a:pPr>
+            <a:r>
+              <a:rPr lang="en-US" sz="1350" dirty="0">
+                <a:solidFill>
+                  <a:srgbClr val="718096"/>
+                </a:solidFill>
+                <a:latin typeface="Pretendard" pitchFamily="34" charset="0"/>
+                <a:ea typeface="Pretendard" pitchFamily="34" charset="-122"/>
+                <a:cs typeface="Pretendard" pitchFamily="34" charset="-120"/>
+              </a:rPr>
+              <a:t>대지면적</a:t>
+            </a:r>
+            <a:endParaRPr lang="en-US" sz="1350" dirty="0"/>
+          </a:p>
+        </p:txBody>
+      </p:sp>
+      <p:sp>
+        <p:nvSpPr>
+          <p:cNvPr id="8" name="Text 6"/>
+          <p:cNvSpPr/>
+          <p:nvPr/>
+        </p:nvSpPr>
+        <p:spPr>
+          <a:xfrm>
+            <a:off x="2423160" y="1645920"/>
+            <a:ext cx="4937760" cy="420624"/>
+          </a:xfrm>
+          <a:prstGeom prst="rect">
+            <a:avLst/>
+          </a:prstGeom>
+          <a:noFill/>
+          <a:ln/>
+        </p:spPr>
+        <p:txBody>
+          <a:bodyPr wrap="square" lIns="0" tIns="0" rIns="0" bIns="0" rtlCol="0" anchor="ctr"/>
+          <a:lstStyle/>
+          <a:p>
+            <a:pPr indent="0" marL="0">
+              <a:lnSpc>
+                <a:spcPct val="115000"/>
+              </a:lnSpc>
+              <a:buNone/>
+            </a:pPr>
+            <a:r>
+              <a:rPr lang="en-US" sz="1350" b="1" dirty="0">
+                <a:solidFill>
+                  <a:srgbClr val="10161F"/>
+                </a:solidFill>
+                <a:latin typeface="Pretendard" pitchFamily="34" charset="0"/>
+                <a:ea typeface="Pretendard" pitchFamily="34" charset="-122"/>
+                <a:cs typeface="Pretendard" pitchFamily="34" charset="-120"/>
+              </a:rPr>
+              <a:t>142.5평</a:t>
+            </a:r>
+            <a:endParaRPr lang="en-US" sz="1350" dirty="0"/>
+          </a:p>
+        </p:txBody>
+      </p:sp>
+      <p:sp>
+        <p:nvSpPr>
+          <p:cNvPr id="9" name="Shape 7"/>
+          <p:cNvSpPr/>
+          <p:nvPr/>
+        </p:nvSpPr>
+        <p:spPr>
+          <a:xfrm>
+            <a:off x="502920" y="2066544"/>
+            <a:ext cx="6858000" cy="0"/>
+          </a:xfrm>
+          <a:prstGeom prst="line">
+            <a:avLst/>
+          </a:prstGeom>
+          <a:noFill/>
+          <a:ln w="3810">
+            <a:solidFill>
+              <a:srgbClr val="CBD5E0"/>
+            </a:solidFill>
+            <a:prstDash val="solid"/>
+          </a:ln>
+        </p:spPr>
+      </p:sp>
+      <p:sp>
+        <p:nvSpPr>
+          <p:cNvPr id="10" name="Text 8"/>
+          <p:cNvSpPr/>
+          <p:nvPr/>
+        </p:nvSpPr>
+        <p:spPr>
+          <a:xfrm>
+            <a:off x="502920" y="2066544"/>
+            <a:ext cx="1920240" cy="420624"/>
+          </a:xfrm>
+          <a:prstGeom prst="rect">
+            <a:avLst/>
+          </a:prstGeom>
+          <a:noFill/>
+          <a:ln/>
+        </p:spPr>
+        <p:txBody>
+          <a:bodyPr wrap="square" lIns="0" tIns="0" rIns="0" bIns="0" rtlCol="0" anchor="ctr"/>
+          <a:lstStyle/>
+          <a:p>
+            <a:pPr indent="0" marL="0">
+              <a:lnSpc>
+                <a:spcPct val="115000"/>
+              </a:lnSpc>
+              <a:buNone/>
+            </a:pPr>
+            <a:r>
+              <a:rPr lang="en-US" sz="1350" dirty="0">
+                <a:solidFill>
+                  <a:srgbClr val="718096"/>
+                </a:solidFill>
+                <a:latin typeface="Pretendard" pitchFamily="34" charset="0"/>
+                <a:ea typeface="Pretendard" pitchFamily="34" charset="-122"/>
+                <a:cs typeface="Pretendard" pitchFamily="34" charset="-120"/>
+              </a:rPr>
+              <a:t>연면적</a:t>
+            </a:r>
+            <a:endParaRPr lang="en-US" sz="1350" dirty="0"/>
+          </a:p>
+        </p:txBody>
+      </p:sp>
+      <p:sp>
+        <p:nvSpPr>
+          <p:cNvPr id="11" name="Text 9"/>
+          <p:cNvSpPr/>
+          <p:nvPr/>
+        </p:nvSpPr>
+        <p:spPr>
+          <a:xfrm>
+            <a:off x="2423160" y="2066544"/>
+            <a:ext cx="4937760" cy="420624"/>
+          </a:xfrm>
+          <a:prstGeom prst="rect">
+            <a:avLst/>
+          </a:prstGeom>
+          <a:noFill/>
+          <a:ln/>
+        </p:spPr>
+        <p:txBody>
+          <a:bodyPr wrap="square" lIns="0" tIns="0" rIns="0" bIns="0" rtlCol="0" anchor="ctr"/>
+          <a:lstStyle/>
+          <a:p>
+            <a:pPr indent="0" marL="0">
+              <a:lnSpc>
+                <a:spcPct val="115000"/>
+              </a:lnSpc>
+              <a:buNone/>
+            </a:pPr>
+            <a:r>
+              <a:rPr lang="en-US" sz="1350" b="1" dirty="0">
+                <a:solidFill>
+                  <a:srgbClr val="10161F"/>
+                </a:solidFill>
+                <a:latin typeface="Pretendard" pitchFamily="34" charset="0"/>
+                <a:ea typeface="Pretendard" pitchFamily="34" charset="-122"/>
+                <a:cs typeface="Pretendard" pitchFamily="34" charset="-120"/>
+              </a:rPr>
+              <a:t>620.8평</a:t>
+            </a:r>
+            <a:endParaRPr lang="en-US" sz="1350" dirty="0"/>
+          </a:p>
+        </p:txBody>
+      </p:sp>
+      <p:sp>
+        <p:nvSpPr>
+          <p:cNvPr id="12" name="Shape 10"/>
+          <p:cNvSpPr/>
+          <p:nvPr/>
+        </p:nvSpPr>
+        <p:spPr>
+          <a:xfrm>
+            <a:off x="502920" y="2487168"/>
+            <a:ext cx="6858000" cy="0"/>
+          </a:xfrm>
+          <a:prstGeom prst="line">
+            <a:avLst/>
+          </a:prstGeom>
+          <a:noFill/>
+          <a:ln w="3810">
+            <a:solidFill>
+              <a:srgbClr val="CBD5E0"/>
+            </a:solidFill>
+            <a:prstDash val="solid"/>
+          </a:ln>
+        </p:spPr>
+      </p:sp>
+      <p:sp>
+        <p:nvSpPr>
+          <p:cNvPr id="13" name="Text 11"/>
+          <p:cNvSpPr/>
+          <p:nvPr/>
+        </p:nvSpPr>
+        <p:spPr>
+          <a:xfrm>
+            <a:off x="502920" y="2487168"/>
+            <a:ext cx="1920240" cy="420624"/>
+          </a:xfrm>
+          <a:prstGeom prst="rect">
+            <a:avLst/>
+          </a:prstGeom>
+          <a:noFill/>
+          <a:ln/>
+        </p:spPr>
+        <p:txBody>
+          <a:bodyPr wrap="square" lIns="0" tIns="0" rIns="0" bIns="0" rtlCol="0" anchor="ctr"/>
+          <a:lstStyle/>
+          <a:p>
+            <a:pPr indent="0" marL="0">
+              <a:lnSpc>
+                <a:spcPct val="115000"/>
+              </a:lnSpc>
+              <a:buNone/>
+            </a:pPr>
+            <a:r>
+              <a:rPr lang="en-US" sz="1350" dirty="0">
+                <a:solidFill>
+                  <a:srgbClr val="718096"/>
+                </a:solidFill>
+                <a:latin typeface="Pretendard" pitchFamily="34" charset="0"/>
+                <a:ea typeface="Pretendard" pitchFamily="34" charset="-122"/>
+                <a:cs typeface="Pretendard" pitchFamily="34" charset="-120"/>
+              </a:rPr>
+              <a:t>준공</a:t>
+            </a:r>
+            <a:endParaRPr lang="en-US" sz="1350" dirty="0"/>
+          </a:p>
+        </p:txBody>
+      </p:sp>
+      <p:sp>
+        <p:nvSpPr>
+          <p:cNvPr id="14" name="Text 12"/>
+          <p:cNvSpPr/>
+          <p:nvPr/>
+        </p:nvSpPr>
+        <p:spPr>
+          <a:xfrm>
+            <a:off x="2423160" y="2487168"/>
+            <a:ext cx="4937760" cy="420624"/>
+          </a:xfrm>
+          <a:prstGeom prst="rect">
+            <a:avLst/>
+          </a:prstGeom>
+          <a:noFill/>
+          <a:ln/>
+        </p:spPr>
+        <p:txBody>
+          <a:bodyPr wrap="square" lIns="0" tIns="0" rIns="0" bIns="0" rtlCol="0" anchor="ctr"/>
+          <a:lstStyle/>
+          <a:p>
+            <a:pPr indent="0" marL="0">
+              <a:lnSpc>
+                <a:spcPct val="115000"/>
+              </a:lnSpc>
+              <a:buNone/>
+            </a:pPr>
+            <a:r>
+              <a:rPr lang="en-US" sz="1350" b="1" dirty="0">
+                <a:solidFill>
+                  <a:srgbClr val="10161F"/>
+                </a:solidFill>
+                <a:latin typeface="Pretendard" pitchFamily="34" charset="0"/>
+                <a:ea typeface="Pretendard" pitchFamily="34" charset="-122"/>
+                <a:cs typeface="Pretendard" pitchFamily="34" charset="-120"/>
+              </a:rPr>
+              <a:t>2017년</a:t>
+            </a:r>
+            <a:endParaRPr lang="en-US" sz="1350" dirty="0"/>
+          </a:p>
+        </p:txBody>
+      </p:sp>
+      <p:sp>
+        <p:nvSpPr>
+          <p:cNvPr id="15" name="Shape 13"/>
+          <p:cNvSpPr/>
+          <p:nvPr/>
+        </p:nvSpPr>
+        <p:spPr>
+          <a:xfrm>
+            <a:off x="7540600" y="1371600"/>
+            <a:ext cx="0" cy="4754880"/>
+          </a:xfrm>
+          <a:prstGeom prst="line">
+            <a:avLst/>
+          </a:prstGeom>
+          <a:noFill/>
+          <a:ln w="8890">
+            <a:solidFill>
+              <a:srgbClr val="B98A2E"/>
+            </a:solidFill>
+            <a:prstDash val="solid"/>
+          </a:ln>
+        </p:spPr>
+      </p:sp>
+      <p:sp>
+        <p:nvSpPr>
+          <p:cNvPr id="16" name="Shape 14"/>
+          <p:cNvSpPr/>
+          <p:nvPr/>
+        </p:nvSpPr>
+        <p:spPr>
+          <a:xfrm>
+            <a:off x="7720279" y="1645920"/>
+            <a:ext cx="3840480" cy="1645920"/>
+          </a:xfrm>
+          <a:prstGeom prst="roundRect">
+            <a:avLst>
+              <a:gd name="adj" fmla="val 3333"/>
+            </a:avLst>
+          </a:prstGeom>
+          <a:solidFill>
+            <a:srgbClr val="F3EBDA"/>
+          </a:solidFill>
+          <a:ln/>
+        </p:spPr>
+      </p:sp>
+      <p:sp>
+        <p:nvSpPr>
+          <p:cNvPr id="17" name="Shape 15"/>
+          <p:cNvSpPr/>
+          <p:nvPr/>
+        </p:nvSpPr>
+        <p:spPr>
+          <a:xfrm>
+            <a:off x="7720279" y="1700784"/>
+            <a:ext cx="36576" cy="1536192"/>
+          </a:xfrm>
+          <a:prstGeom prst="rect">
+            <a:avLst/>
+          </a:prstGeom>
+          <a:solidFill>
+            <a:srgbClr val="977024"/>
+          </a:solidFill>
+          <a:ln/>
+        </p:spPr>
+      </p:sp>
+      <p:sp>
+        <p:nvSpPr>
+          <p:cNvPr id="18" name="Text 16"/>
+          <p:cNvSpPr/>
+          <p:nvPr/>
+        </p:nvSpPr>
+        <p:spPr>
+          <a:xfrm>
+            <a:off x="7866583" y="1737360"/>
+            <a:ext cx="3584448" cy="201168"/>
+          </a:xfrm>
+          <a:prstGeom prst="rect">
+            <a:avLst/>
+          </a:prstGeom>
+          <a:noFill/>
+          <a:ln/>
+        </p:spPr>
+        <p:txBody>
+          <a:bodyPr wrap="square" lIns="0" tIns="0" rIns="0" bIns="0" rtlCol="0" anchor="ctr"/>
+          <a:lstStyle/>
+          <a:p>
+            <a:pPr indent="0" marL="0">
+              <a:buNone/>
+            </a:pPr>
+            <a:endParaRPr lang="en-US" sz="1050" dirty="0"/>
+          </a:p>
+        </p:txBody>
+      </p:sp>
+      <p:sp>
+        <p:nvSpPr>
+          <p:cNvPr id="19" name="Text 17"/>
+          <p:cNvSpPr/>
+          <p:nvPr/>
+        </p:nvSpPr>
+        <p:spPr>
+          <a:xfrm>
+            <a:off x="7866583" y="1938528"/>
+            <a:ext cx="3584448" cy="1316736"/>
+          </a:xfrm>
+          <a:prstGeom prst="rect">
+            <a:avLst/>
+          </a:prstGeom>
+          <a:noFill/>
+          <a:ln/>
+        </p:spPr>
+        <p:txBody>
+          <a:bodyPr wrap="square" lIns="0" tIns="0" rIns="0" bIns="0" rtlCol="0" anchor="t"/>
+          <a:lstStyle/>
+          <a:p>
+            <a:pPr indent="0" marL="0">
+              <a:lnSpc>
+                <a:spcPct val="108000"/>
+              </a:lnSpc>
+              <a:buNone/>
+            </a:pPr>
+            <a:r>
+              <a:rPr lang="en-US" sz="980" dirty="0">
+                <a:solidFill>
+                  <a:srgbClr val="10161F"/>
+                </a:solidFill>
+                <a:latin typeface="Pretendard" pitchFamily="34" charset="0"/>
+                <a:ea typeface="Pretendard" pitchFamily="34" charset="-122"/>
+                <a:cs typeface="Pretendard" pitchFamily="34" charset="-120"/>
+              </a:rPr>
+              <a:t>서초 메디컬 빌딩은 지하2층~지상7층 규모의 올근생 빌딩입니다.</a:t>
+            </a:r>
+            <a:endParaRPr lang="en-US" sz="980" dirty="0"/>
+          </a:p>
+        </p:txBody>
+      </p:sp>
+      <p:sp>
+        <p:nvSpPr>
+          <p:cNvPr id="20" name="Text 18"/>
+          <p:cNvSpPr/>
+          <p:nvPr/>
+        </p:nvSpPr>
+        <p:spPr>
+          <a:xfrm>
+            <a:off x="502920" y="6382512"/>
+            <a:ext cx="7315200" cy="219456"/>
+          </a:xfrm>
+          <a:prstGeom prst="rect">
+            <a:avLst/>
+          </a:prstGeom>
+          <a:noFill/>
+          <a:ln/>
+        </p:spPr>
+        <p:txBody>
+          <a:bodyPr wrap="square" lIns="0" tIns="0" rIns="0" bIns="0" rtlCol="0" anchor="ctr"/>
+          <a:lstStyle/>
+          <a:p>
+            <a:pPr indent="0" marL="0">
+              <a:buNone/>
+            </a:pPr>
+            <a:r>
+              <a:rPr lang="en-US" sz="800" dirty="0">
+                <a:solidFill>
+                  <a:srgbClr val="718096"/>
+                </a:solidFill>
+                <a:latin typeface="Pretendard" pitchFamily="34" charset="0"/>
+                <a:ea typeface="Pretendard" pitchFamily="34" charset="-122"/>
+                <a:cs typeface="Pretendard" pitchFamily="34" charset="-120"/>
+              </a:rPr>
+              <a:t>크리딜   |   </a:t>
+            </a:r>
+            <a:endParaRPr lang="en-US" sz="800" dirty="0"/>
+          </a:p>
+        </p:txBody>
+      </p:sp>
+      <p:sp>
+        <p:nvSpPr>
+          <p:cNvPr id="21" name="Text 19"/>
+          <p:cNvSpPr/>
+          <p:nvPr/>
+        </p:nvSpPr>
+        <p:spPr>
+          <a:xfrm>
+            <a:off x="10774375" y="6382512"/>
+            <a:ext cx="914400" cy="219456"/>
+          </a:xfrm>
+          <a:prstGeom prst="rect">
+            <a:avLst/>
+          </a:prstGeom>
+          <a:noFill/>
+          <a:ln/>
+        </p:spPr>
+        <p:txBody>
+          <a:bodyPr wrap="square" lIns="0" tIns="0" rIns="0" bIns="0" rtlCol="0" anchor="ctr"/>
+          <a:lstStyle/>
+          <a:p>
+            <a:pPr algn="r" indent="0" marL="0">
+              <a:buNone/>
+            </a:pPr>
+            <a:r>
+              <a:rPr lang="en-US" sz="900" b="1" dirty="0">
+                <a:solidFill>
+                  <a:srgbClr val="B98A2E"/>
+                </a:solidFill>
+                <a:latin typeface="Arial" pitchFamily="34" charset="0"/>
+                <a:ea typeface="Arial" pitchFamily="34" charset="-122"/>
+                <a:cs typeface="Arial" pitchFamily="34" charset="-120"/>
+              </a:rPr>
+              <a:t>5</a:t>
+            </a:r>
+            <a:endParaRPr lang="en-US" sz="900" dirty="0"/>
+          </a:p>
+        </p:txBody>
+      </p:sp>
+    </p:spTree>
+  </p:cSld>
+  <p:clrMapOvr>
+    <a:masterClrMapping/>
+  </p:clrMapOvr>
+</p:sld>
+</file>
+
+<file path=ppt/slides/slide6.xml><?xml version="1.0" encoding="utf-8"?>
+<p:sld xmlns:a="http://schemas.openxmlformats.org/drawingml/2006/main" xmlns:r="http://schemas.openxmlformats.org/officeDocument/2006/relationships" xmlns:p="http://schemas.openxmlformats.org/presentationml/2006/main">
+  <p:cSld name="Slide 6">
+    <p:bg>
+      <p:bgPr>
+        <a:solidFill>
+          <a:srgbClr val="FFFFFF"/>
+        </a:solidFill>
+      </p:bgPr>
+    </p:bg>
+    <p:spTree>
+      <p:nvGrpSpPr>
+        <p:cNvPr id="1" name=""/>
+        <p:cNvGrpSpPr/>
+        <p:nvPr/>
+      </p:nvGrpSpPr>
+      <p:grpSpPr>
+        <a:xfrm>
+          <a:off x="0" y="0"/>
+          <a:ext cx="0" cy="0"/>
+          <a:chOff x="0" y="0"/>
+          <a:chExt cx="0" cy="0"/>
+        </a:xfrm>
+      </p:grpSpPr>
+      <p:sp>
+        <p:nvSpPr>
+          <p:cNvPr id="2" name="Shape 0"/>
+          <p:cNvSpPr/>
+          <p:nvPr/>
+        </p:nvSpPr>
+        <p:spPr>
+          <a:xfrm>
+            <a:off x="502920" y="457200"/>
+            <a:ext cx="384048" cy="384048"/>
+          </a:xfrm>
+          <a:prstGeom prst="ellipse">
+            <a:avLst/>
+          </a:prstGeom>
+          <a:solidFill>
+            <a:srgbClr val="B98A2E"/>
+          </a:solidFill>
+          <a:ln/>
+        </p:spPr>
+      </p:sp>
+      <p:sp>
+        <p:nvSpPr>
+          <p:cNvPr id="3" name="Text 1"/>
+          <p:cNvSpPr/>
+          <p:nvPr/>
+        </p:nvSpPr>
+        <p:spPr>
+          <a:xfrm>
+            <a:off x="502920" y="457200"/>
+            <a:ext cx="384048" cy="384048"/>
+          </a:xfrm>
+          <a:prstGeom prst="rect">
+            <a:avLst/>
+          </a:prstGeom>
+          <a:noFill/>
+          <a:ln/>
+        </p:spPr>
+        <p:txBody>
+          <a:bodyPr wrap="square" lIns="0" tIns="0" rIns="0" bIns="0" rtlCol="0" anchor="ctr"/>
+          <a:lstStyle/>
+          <a:p>
+            <a:pPr algn="ctr" indent="0" marL="0">
+              <a:buNone/>
+            </a:pPr>
+            <a:r>
+              <a:rPr lang="en-US" sz="1300" b="1" dirty="0">
+                <a:solidFill>
+                  <a:srgbClr val="FFFFFF"/>
+                </a:solidFill>
+                <a:latin typeface="Arial" pitchFamily="34" charset="0"/>
+                <a:ea typeface="Arial" pitchFamily="34" charset="-122"/>
+                <a:cs typeface="Arial" pitchFamily="34" charset="-120"/>
+              </a:rPr>
+              <a:t>06</a:t>
+            </a:r>
+            <a:endParaRPr lang="en-US" sz="1300" dirty="0"/>
+          </a:p>
+        </p:txBody>
+      </p:sp>
+      <p:sp>
+        <p:nvSpPr>
+          <p:cNvPr id="4" name="Text 2"/>
+          <p:cNvSpPr/>
+          <p:nvPr/>
+        </p:nvSpPr>
+        <p:spPr>
+          <a:xfrm>
+            <a:off x="1069848" y="457200"/>
+            <a:ext cx="10490911" cy="182880"/>
+          </a:xfrm>
+          <a:prstGeom prst="rect">
+            <a:avLst/>
+          </a:prstGeom>
+          <a:noFill/>
+          <a:ln/>
+        </p:spPr>
+        <p:txBody>
+          <a:bodyPr wrap="square" lIns="0" tIns="0" rIns="0" bIns="0" rtlCol="0" anchor="ctr"/>
+          <a:lstStyle/>
+          <a:p>
+            <a:pPr indent="0" marL="0">
+              <a:buNone/>
+            </a:pPr>
+            <a:r>
+              <a:rPr lang="en-US" sz="950" b="1" spc="200" kern="0" dirty="0">
+                <a:solidFill>
+                  <a:srgbClr val="B98A2E"/>
+                </a:solidFill>
+                <a:latin typeface="Arial" pitchFamily="34" charset="0"/>
+                <a:ea typeface="Arial" pitchFamily="34" charset="-122"/>
+                <a:cs typeface="Arial" pitchFamily="34" charset="-120"/>
+              </a:rPr>
               <a:t>Rent Roll</a:t>
             </a:r>
             <a:endParaRPr lang="en-US" sz="950" dirty="0"/>
@@ -8782,7 +10126,7 @@
         </p:nvSpPr>
         <p:spPr>
           <a:xfrm>
-            <a:off x="1133856" y="640080"/>
+            <a:off x="1069848" y="640080"/>
             <a:ext cx="10490911" cy="365760"/>
           </a:xfrm>
           <a:prstGeom prst="rect">
@@ -8815,7 +10159,7 @@
       </p:sp>
       <p:graphicFrame>
         <p:nvGraphicFramePr>
-          <p:cNvPr id="6" name="Table 0"/>
+          <p:cNvPr id="7" name="Table 0"/>
           <p:cNvGraphicFramePr>
             <a:graphicFrameLocks noGrp="1"/>
           </p:cNvGraphicFramePr>
@@ -8828,7 +10172,7 @@
           </p:nvPr>
         </p:nvGraphicFramePr>
         <p:xfrm>
-          <a:off x="566928" y="1645920"/>
+          <a:off x="502920" y="1645920"/>
           <a:ext cx="11057839" cy="914400"/>
         </p:xfrm>
         <a:graphic>
@@ -8853,7 +10197,7 @@
                       <a:r>
                         <a:rPr lang="en-US" sz="1300" b="1" dirty="0">
                           <a:solidFill>
-                            <a:srgbClr val="718096"/>
+                            <a:srgbClr val="FFFFFF"/>
                           </a:solidFill>
                           <a:latin typeface="Pretendard" pitchFamily="34" charset="0"/>
                           <a:ea typeface="Pretendard" pitchFamily="34" charset="-122"/>
@@ -8906,7 +10250,7 @@
                       <a:tailEnd type="none" w="med" len="med"/>
                     </a:lnB>
                     <a:solidFill>
-                      <a:srgbClr val="F7FAFC"/>
+                      <a:srgbClr val="10161F"/>
                     </a:solidFill>
                   </a:tcPr>
                 </a:tc>
@@ -8921,7 +10265,7 @@
                       <a:r>
                         <a:rPr lang="en-US" sz="1300" b="1" dirty="0">
                           <a:solidFill>
-                            <a:srgbClr val="718096"/>
+                            <a:srgbClr val="FFFFFF"/>
                           </a:solidFill>
                           <a:latin typeface="Pretendard" pitchFamily="34" charset="0"/>
                           <a:ea typeface="Pretendard" pitchFamily="34" charset="-122"/>
@@ -8974,7 +10318,7 @@
                       <a:tailEnd type="none" w="med" len="med"/>
                     </a:lnB>
                     <a:solidFill>
-                      <a:srgbClr val="F7FAFC"/>
+                      <a:srgbClr val="10161F"/>
                     </a:solidFill>
                   </a:tcPr>
                 </a:tc>
@@ -8989,7 +10333,7 @@
                       <a:r>
                         <a:rPr lang="en-US" sz="1300" b="1" dirty="0">
                           <a:solidFill>
-                            <a:srgbClr val="718096"/>
+                            <a:srgbClr val="FFFFFF"/>
                           </a:solidFill>
                           <a:latin typeface="Pretendard" pitchFamily="34" charset="0"/>
                           <a:ea typeface="Pretendard" pitchFamily="34" charset="-122"/>
@@ -9042,7 +10386,7 @@
                       <a:tailEnd type="none" w="med" len="med"/>
                     </a:lnB>
                     <a:solidFill>
-                      <a:srgbClr val="F7FAFC"/>
+                      <a:srgbClr val="10161F"/>
                     </a:solidFill>
                   </a:tcPr>
                 </a:tc>
@@ -9057,7 +10401,7 @@
                       <a:r>
                         <a:rPr lang="en-US" sz="1300" b="1" dirty="0">
                           <a:solidFill>
-                            <a:srgbClr val="718096"/>
+                            <a:srgbClr val="FFFFFF"/>
                           </a:solidFill>
                           <a:latin typeface="Pretendard" pitchFamily="34" charset="0"/>
                           <a:ea typeface="Pretendard" pitchFamily="34" charset="-122"/>
@@ -9110,7 +10454,7 @@
                       <a:tailEnd type="none" w="med" len="med"/>
                     </a:lnB>
                     <a:solidFill>
-                      <a:srgbClr val="F7FAFC"/>
+                      <a:srgbClr val="10161F"/>
                     </a:solidFill>
                   </a:tcPr>
                 </a:tc>
@@ -9675,7 +11019,7 @@
         </p:nvSpPr>
         <p:spPr>
           <a:xfrm>
-            <a:off x="566928" y="6382512"/>
+            <a:off x="502920" y="6382512"/>
             <a:ext cx="7315200" cy="219456"/>
           </a:xfrm>
           <a:prstGeom prst="rect">
@@ -9714,619 +11058,7 @@
         </p:nvSpPr>
         <p:spPr>
           <a:xfrm>
-            <a:off x="10710367" y="6382512"/>
-            <a:ext cx="914400" cy="219456"/>
-          </a:xfrm>
-          <a:prstGeom prst="rect">
-            <a:avLst/>
-          </a:prstGeom>
-          <a:noFill/>
-          <a:ln/>
-        </p:spPr>
-        <p:txBody>
-          <a:bodyPr wrap="square" lIns="0" tIns="0" rIns="0" bIns="0" rtlCol="0" anchor="ctr"/>
-          <a:lstStyle/>
-          <a:p>
-            <a:pPr algn="r" indent="0" marL="0">
-              <a:buNone/>
-            </a:pPr>
-            <a:r>
-              <a:rPr lang="en-US" sz="900" b="1" dirty="0">
-                <a:solidFill>
-                  <a:srgbClr val="B98A2E"/>
-                </a:solidFill>
-                <a:latin typeface="Arial" pitchFamily="34" charset="0"/>
-                <a:ea typeface="Arial" pitchFamily="34" charset="-122"/>
-                <a:cs typeface="Arial" pitchFamily="34" charset="-120"/>
-              </a:rPr>
-              <a:t>5</a:t>
-            </a:r>
-            <a:endParaRPr lang="en-US" sz="900" dirty="0"/>
-          </a:p>
-        </p:txBody>
-      </p:sp>
-    </p:spTree>
-  </p:cSld>
-  <p:clrMapOvr>
-    <a:masterClrMapping/>
-  </p:clrMapOvr>
-</p:sld>
-</file>
-
-<file path=ppt/slides/slide6.xml><?xml version="1.0" encoding="utf-8"?>
-<p:sld xmlns:a="http://schemas.openxmlformats.org/drawingml/2006/main" xmlns:r="http://schemas.openxmlformats.org/officeDocument/2006/relationships" xmlns:p="http://schemas.openxmlformats.org/presentationml/2006/main">
-  <p:cSld name="Slide 6">
-    <p:bg>
-      <p:bgPr>
-        <a:solidFill>
-          <a:srgbClr val="FFFFFF"/>
-        </a:solidFill>
-      </p:bgPr>
-    </p:bg>
-    <p:spTree>
-      <p:nvGrpSpPr>
-        <p:cNvPr id="1" name=""/>
-        <p:cNvGrpSpPr/>
-        <p:nvPr/>
-      </p:nvGrpSpPr>
-      <p:grpSpPr>
-        <a:xfrm>
-          <a:off x="0" y="0"/>
-          <a:ext cx="0" cy="0"/>
-          <a:chOff x="0" y="0"/>
-          <a:chExt cx="0" cy="0"/>
-        </a:xfrm>
-      </p:grpSpPr>
-      <p:sp>
-        <p:nvSpPr>
-          <p:cNvPr id="2" name="Shape 0"/>
-          <p:cNvSpPr/>
-          <p:nvPr/>
-        </p:nvSpPr>
-        <p:spPr>
-          <a:xfrm>
-            <a:off x="566928" y="457200"/>
-            <a:ext cx="384048" cy="384048"/>
-          </a:xfrm>
-          <a:prstGeom prst="ellipse">
-            <a:avLst/>
-          </a:prstGeom>
-          <a:solidFill>
-            <a:srgbClr val="B98A2E"/>
-          </a:solidFill>
-          <a:ln/>
-        </p:spPr>
-      </p:sp>
-      <p:sp>
-        <p:nvSpPr>
-          <p:cNvPr id="3" name="Text 1"/>
-          <p:cNvSpPr/>
-          <p:nvPr/>
-        </p:nvSpPr>
-        <p:spPr>
-          <a:xfrm>
-            <a:off x="566928" y="457200"/>
-            <a:ext cx="384048" cy="384048"/>
-          </a:xfrm>
-          <a:prstGeom prst="rect">
-            <a:avLst/>
-          </a:prstGeom>
-          <a:noFill/>
-          <a:ln/>
-        </p:spPr>
-        <p:txBody>
-          <a:bodyPr wrap="square" lIns="0" tIns="0" rIns="0" bIns="0" rtlCol="0" anchor="ctr"/>
-          <a:lstStyle/>
-          <a:p>
-            <a:pPr algn="ctr" indent="0" marL="0">
-              <a:buNone/>
-            </a:pPr>
-            <a:r>
-              <a:rPr lang="en-US" sz="1300" b="1" dirty="0">
-                <a:solidFill>
-                  <a:srgbClr val="FFFFFF"/>
-                </a:solidFill>
-                <a:latin typeface="Arial" pitchFamily="34" charset="0"/>
-                <a:ea typeface="Arial" pitchFamily="34" charset="-122"/>
-                <a:cs typeface="Arial" pitchFamily="34" charset="-120"/>
-              </a:rPr>
-              <a:t>06</a:t>
-            </a:r>
-            <a:endParaRPr lang="en-US" sz="1300" dirty="0"/>
-          </a:p>
-        </p:txBody>
-      </p:sp>
-      <p:sp>
-        <p:nvSpPr>
-          <p:cNvPr id="4" name="Text 2"/>
-          <p:cNvSpPr/>
-          <p:nvPr/>
-        </p:nvSpPr>
-        <p:spPr>
-          <a:xfrm>
-            <a:off x="1133856" y="457200"/>
-            <a:ext cx="10490911" cy="182880"/>
-          </a:xfrm>
-          <a:prstGeom prst="rect">
-            <a:avLst/>
-          </a:prstGeom>
-          <a:noFill/>
-          <a:ln/>
-        </p:spPr>
-        <p:txBody>
-          <a:bodyPr wrap="square" lIns="0" tIns="0" rIns="0" bIns="0" rtlCol="0" anchor="ctr"/>
-          <a:lstStyle/>
-          <a:p>
-            <a:pPr indent="0" marL="0">
-              <a:buNone/>
-            </a:pPr>
-            <a:r>
-              <a:rPr lang="en-US" sz="950" b="1" spc="200" kern="0" dirty="0">
-                <a:solidFill>
-                  <a:srgbClr val="B98A2E"/>
-                </a:solidFill>
-                <a:latin typeface="Arial" pitchFamily="34" charset="0"/>
-                <a:ea typeface="Arial" pitchFamily="34" charset="-122"/>
-                <a:cs typeface="Arial" pitchFamily="34" charset="-120"/>
-              </a:rPr>
-              <a:t>Stability</a:t>
-            </a:r>
-            <a:endParaRPr lang="en-US" sz="950" dirty="0"/>
-          </a:p>
-        </p:txBody>
-      </p:sp>
-      <p:sp>
-        <p:nvSpPr>
-          <p:cNvPr id="5" name="Text 3"/>
-          <p:cNvSpPr/>
-          <p:nvPr/>
-        </p:nvSpPr>
-        <p:spPr>
-          <a:xfrm>
-            <a:off x="1133856" y="640080"/>
-            <a:ext cx="10490911" cy="365760"/>
-          </a:xfrm>
-          <a:prstGeom prst="rect">
-            <a:avLst/>
-          </a:prstGeom>
-          <a:noFill/>
-          <a:ln/>
-        </p:spPr>
-        <p:txBody>
-          <a:bodyPr wrap="square" lIns="0" tIns="0" rIns="0" bIns="0" rtlCol="0" anchor="ctr"/>
-          <a:lstStyle/>
-          <a:p>
-            <a:pPr indent="0" marL="0">
-              <a:buNone/>
-            </a:pPr>
-            <a:r>
-              <a:rPr lang="en-US" sz="2300" b="1" dirty="0">
-                <a:solidFill>
-                  <a:srgbClr val="10161F"/>
-                </a:solidFill>
-                <a:latin typeface="Pretendard" pitchFamily="34" charset="0"/>
-                <a:ea typeface="Pretendard" pitchFamily="34" charset="-122"/>
-                <a:cs typeface="Pretendard" pitchFamily="34" charset="-120"/>
-              </a:rPr>
-              <a:t>임대안정성</a:t>
-            </a:r>
-            <a:endParaRPr lang="en-US" sz="2300" dirty="0"/>
-          </a:p>
-        </p:txBody>
-      </p:sp>
-      <p:sp>
-        <p:nvSpPr>
-          <p:cNvPr id="6" name="Text 4"/>
-          <p:cNvSpPr/>
-          <p:nvPr/>
-        </p:nvSpPr>
-        <p:spPr>
-          <a:xfrm>
-            <a:off x="566928" y="1371600"/>
-            <a:ext cx="6858000" cy="237744"/>
-          </a:xfrm>
-          <a:prstGeom prst="rect">
-            <a:avLst/>
-          </a:prstGeom>
-          <a:noFill/>
-          <a:ln/>
-        </p:spPr>
-        <p:txBody>
-          <a:bodyPr wrap="square" lIns="0" tIns="0" rIns="0" bIns="0" rtlCol="0" anchor="ctr"/>
-          <a:lstStyle/>
-          <a:p>
-            <a:pPr indent="0" marL="0">
-              <a:buNone/>
-            </a:pPr>
-            <a:r>
-              <a:rPr lang="en-US" sz="1100" b="1" dirty="0">
-                <a:solidFill>
-                  <a:srgbClr val="10161F"/>
-                </a:solidFill>
-                <a:latin typeface="Pretendard" pitchFamily="34" charset="0"/>
-                <a:ea typeface="Pretendard" pitchFamily="34" charset="-122"/>
-                <a:cs typeface="Pretendard" pitchFamily="34" charset="-120"/>
-              </a:rPr>
-              <a:t>건축물 개요 및 물리 스펙</a:t>
-            </a:r>
-            <a:endParaRPr lang="en-US" sz="1100" dirty="0"/>
-          </a:p>
-        </p:txBody>
-      </p:sp>
-      <p:sp>
-        <p:nvSpPr>
-          <p:cNvPr id="7" name="Text 5"/>
-          <p:cNvSpPr/>
-          <p:nvPr/>
-        </p:nvSpPr>
-        <p:spPr>
-          <a:xfrm>
-            <a:off x="566928" y="1645920"/>
-            <a:ext cx="2606040" cy="438912"/>
-          </a:xfrm>
-          <a:prstGeom prst="rect">
-            <a:avLst/>
-          </a:prstGeom>
-          <a:noFill/>
-          <a:ln/>
-        </p:spPr>
-        <p:txBody>
-          <a:bodyPr wrap="square" lIns="0" tIns="0" rIns="0" bIns="0" rtlCol="0" anchor="ctr"/>
-          <a:lstStyle/>
-          <a:p>
-            <a:pPr indent="0" marL="0">
-              <a:lnSpc>
-                <a:spcPct val="120000"/>
-              </a:lnSpc>
-              <a:buNone/>
-            </a:pPr>
-            <a:r>
-              <a:rPr lang="en-US" sz="1350" dirty="0">
-                <a:solidFill>
-                  <a:srgbClr val="718096"/>
-                </a:solidFill>
-                <a:latin typeface="Pretendard" pitchFamily="34" charset="0"/>
-                <a:ea typeface="Pretendard" pitchFamily="34" charset="-122"/>
-                <a:cs typeface="Pretendard" pitchFamily="34" charset="-120"/>
-              </a:rPr>
-              <a:t>1F</a:t>
-            </a:r>
-            <a:endParaRPr lang="en-US" sz="1350" dirty="0"/>
-          </a:p>
-        </p:txBody>
-      </p:sp>
-      <p:sp>
-        <p:nvSpPr>
-          <p:cNvPr id="8" name="Text 6"/>
-          <p:cNvSpPr/>
-          <p:nvPr/>
-        </p:nvSpPr>
-        <p:spPr>
-          <a:xfrm>
-            <a:off x="3172968" y="1645920"/>
-            <a:ext cx="4251960" cy="438912"/>
-          </a:xfrm>
-          <a:prstGeom prst="rect">
-            <a:avLst/>
-          </a:prstGeom>
-          <a:noFill/>
-          <a:ln/>
-        </p:spPr>
-        <p:txBody>
-          <a:bodyPr wrap="square" lIns="0" tIns="0" rIns="0" bIns="0" rtlCol="0" anchor="ctr"/>
-          <a:lstStyle/>
-          <a:p>
-            <a:pPr indent="0" marL="0">
-              <a:lnSpc>
-                <a:spcPct val="120000"/>
-              </a:lnSpc>
-              <a:buNone/>
-            </a:pPr>
-            <a:r>
-              <a:rPr lang="en-US" sz="1350" b="1" dirty="0">
-                <a:solidFill>
-                  <a:srgbClr val="10161F"/>
-                </a:solidFill>
-                <a:latin typeface="Pretendard" pitchFamily="34" charset="0"/>
-                <a:ea typeface="Pretendard" pitchFamily="34" charset="-122"/>
-                <a:cs typeface="Pretendard" pitchFamily="34" charset="-120"/>
-              </a:rPr>
-              <a:t>약국 (3억)</a:t>
-            </a:r>
-            <a:endParaRPr lang="en-US" sz="1350" dirty="0"/>
-          </a:p>
-        </p:txBody>
-      </p:sp>
-      <p:sp>
-        <p:nvSpPr>
-          <p:cNvPr id="9" name="Shape 7"/>
-          <p:cNvSpPr/>
-          <p:nvPr/>
-        </p:nvSpPr>
-        <p:spPr>
-          <a:xfrm>
-            <a:off x="566928" y="2084832"/>
-            <a:ext cx="6858000" cy="0"/>
-          </a:xfrm>
-          <a:prstGeom prst="line">
-            <a:avLst/>
-          </a:prstGeom>
-          <a:noFill/>
-          <a:ln w="3810">
-            <a:solidFill>
-              <a:srgbClr val="CBD5E0"/>
-            </a:solidFill>
-            <a:prstDash val="solid"/>
-          </a:ln>
-        </p:spPr>
-      </p:sp>
-      <p:sp>
-        <p:nvSpPr>
-          <p:cNvPr id="10" name="Text 8"/>
-          <p:cNvSpPr/>
-          <p:nvPr/>
-        </p:nvSpPr>
-        <p:spPr>
-          <a:xfrm>
-            <a:off x="566928" y="2084832"/>
-            <a:ext cx="2606040" cy="438912"/>
-          </a:xfrm>
-          <a:prstGeom prst="rect">
-            <a:avLst/>
-          </a:prstGeom>
-          <a:noFill/>
-          <a:ln/>
-        </p:spPr>
-        <p:txBody>
-          <a:bodyPr wrap="square" lIns="0" tIns="0" rIns="0" bIns="0" rtlCol="0" anchor="ctr"/>
-          <a:lstStyle/>
-          <a:p>
-            <a:pPr indent="0" marL="0">
-              <a:lnSpc>
-                <a:spcPct val="120000"/>
-              </a:lnSpc>
-              <a:buNone/>
-            </a:pPr>
-            <a:r>
-              <a:rPr lang="en-US" sz="1350" dirty="0">
-                <a:solidFill>
-                  <a:srgbClr val="718096"/>
-                </a:solidFill>
-                <a:latin typeface="Pretendard" pitchFamily="34" charset="0"/>
-                <a:ea typeface="Pretendard" pitchFamily="34" charset="-122"/>
-                <a:cs typeface="Pretendard" pitchFamily="34" charset="-120"/>
-              </a:rPr>
-              <a:t>2F</a:t>
-            </a:r>
-            <a:endParaRPr lang="en-US" sz="1350" dirty="0"/>
-          </a:p>
-        </p:txBody>
-      </p:sp>
-      <p:sp>
-        <p:nvSpPr>
-          <p:cNvPr id="11" name="Text 9"/>
-          <p:cNvSpPr/>
-          <p:nvPr/>
-        </p:nvSpPr>
-        <p:spPr>
-          <a:xfrm>
-            <a:off x="3172968" y="2084832"/>
-            <a:ext cx="4251960" cy="438912"/>
-          </a:xfrm>
-          <a:prstGeom prst="rect">
-            <a:avLst/>
-          </a:prstGeom>
-          <a:noFill/>
-          <a:ln/>
-        </p:spPr>
-        <p:txBody>
-          <a:bodyPr wrap="square" lIns="0" tIns="0" rIns="0" bIns="0" rtlCol="0" anchor="ctr"/>
-          <a:lstStyle/>
-          <a:p>
-            <a:pPr indent="0" marL="0">
-              <a:lnSpc>
-                <a:spcPct val="120000"/>
-              </a:lnSpc>
-              <a:buNone/>
-            </a:pPr>
-            <a:r>
-              <a:rPr lang="en-US" sz="1350" b="1" dirty="0">
-                <a:solidFill>
-                  <a:srgbClr val="10161F"/>
-                </a:solidFill>
-                <a:latin typeface="Pretendard" pitchFamily="34" charset="0"/>
-                <a:ea typeface="Pretendard" pitchFamily="34" charset="-122"/>
-                <a:cs typeface="Pretendard" pitchFamily="34" charset="-120"/>
-              </a:rPr>
-              <a:t>안과 (2억)</a:t>
-            </a:r>
-            <a:endParaRPr lang="en-US" sz="1350" dirty="0"/>
-          </a:p>
-        </p:txBody>
-      </p:sp>
-      <p:sp>
-        <p:nvSpPr>
-          <p:cNvPr id="12" name="Shape 10"/>
-          <p:cNvSpPr/>
-          <p:nvPr/>
-        </p:nvSpPr>
-        <p:spPr>
-          <a:xfrm>
-            <a:off x="7604608" y="1371600"/>
-            <a:ext cx="0" cy="4754880"/>
-          </a:xfrm>
-          <a:prstGeom prst="line">
-            <a:avLst/>
-          </a:prstGeom>
-          <a:noFill/>
-          <a:ln w="8890">
-            <a:solidFill>
-              <a:srgbClr val="B98A2E"/>
-            </a:solidFill>
-            <a:prstDash val="solid"/>
-          </a:ln>
-        </p:spPr>
-      </p:sp>
-      <p:sp>
-        <p:nvSpPr>
-          <p:cNvPr id="13" name="Shape 11"/>
-          <p:cNvSpPr/>
-          <p:nvPr/>
-        </p:nvSpPr>
-        <p:spPr>
-          <a:xfrm>
-            <a:off x="7784287" y="1645920"/>
-            <a:ext cx="3840480" cy="1645920"/>
-          </a:xfrm>
-          <a:prstGeom prst="roundRect">
-            <a:avLst>
-              <a:gd name="adj" fmla="val 3333"/>
-            </a:avLst>
-          </a:prstGeom>
-          <a:solidFill>
-            <a:srgbClr val="F3EBDA"/>
-          </a:solidFill>
-          <a:ln/>
-        </p:spPr>
-      </p:sp>
-      <p:sp>
-        <p:nvSpPr>
-          <p:cNvPr id="14" name="Shape 12"/>
-          <p:cNvSpPr/>
-          <p:nvPr/>
-        </p:nvSpPr>
-        <p:spPr>
-          <a:xfrm>
-            <a:off x="7784287" y="1700784"/>
-            <a:ext cx="36576" cy="1536192"/>
-          </a:xfrm>
-          <a:prstGeom prst="rect">
-            <a:avLst/>
-          </a:prstGeom>
-          <a:solidFill>
-            <a:srgbClr val="977024"/>
-          </a:solidFill>
-          <a:ln/>
-        </p:spPr>
-      </p:sp>
-      <p:sp>
-        <p:nvSpPr>
-          <p:cNvPr id="15" name="Text 13"/>
-          <p:cNvSpPr/>
-          <p:nvPr/>
-        </p:nvSpPr>
-        <p:spPr>
-          <a:xfrm>
-            <a:off x="7967167" y="1755648"/>
-            <a:ext cx="3511296" cy="201168"/>
-          </a:xfrm>
-          <a:prstGeom prst="rect">
-            <a:avLst/>
-          </a:prstGeom>
-          <a:noFill/>
-          <a:ln/>
-        </p:spPr>
-        <p:txBody>
-          <a:bodyPr wrap="square" lIns="0" tIns="0" rIns="0" bIns="0" rtlCol="0" anchor="ctr"/>
-          <a:lstStyle/>
-          <a:p>
-            <a:pPr indent="0" marL="0">
-              <a:buNone/>
-            </a:pPr>
-            <a:endParaRPr lang="en-US" sz="1050" dirty="0"/>
-          </a:p>
-        </p:txBody>
-      </p:sp>
-      <p:sp>
-        <p:nvSpPr>
-          <p:cNvPr id="16" name="Text 14"/>
-          <p:cNvSpPr/>
-          <p:nvPr/>
-        </p:nvSpPr>
-        <p:spPr>
-          <a:xfrm>
-            <a:off x="7967167" y="1975104"/>
-            <a:ext cx="3511296" cy="1243584"/>
-          </a:xfrm>
-          <a:prstGeom prst="rect">
-            <a:avLst/>
-          </a:prstGeom>
-          <a:noFill/>
-          <a:ln/>
-        </p:spPr>
-        <p:txBody>
-          <a:bodyPr wrap="square" lIns="0" tIns="0" rIns="0" bIns="0" rtlCol="0" anchor="t"/>
-          <a:lstStyle/>
-          <a:p>
-            <a:pPr indent="0" marL="0">
-              <a:lnSpc>
-                <a:spcPct val="120000"/>
-              </a:lnSpc>
-              <a:buNone/>
-            </a:pPr>
-            <a:r>
-              <a:rPr lang="en-US" sz="930" dirty="0">
-                <a:solidFill>
-                  <a:srgbClr val="10161F"/>
-                </a:solidFill>
-                <a:latin typeface="Pretendard" pitchFamily="34" charset="0"/>
-                <a:ea typeface="Pretendard" pitchFamily="34" charset="-122"/>
-                <a:cs typeface="Pretendard" pitchFamily="34" charset="-120"/>
-              </a:rPr>
-              <a:t>전층 메디컬 만실 운영 중이며 WALE 평균 3.5년입니다.</a:t>
-            </a:r>
-            <a:endParaRPr lang="en-US" sz="930" dirty="0"/>
-          </a:p>
-        </p:txBody>
-      </p:sp>
-      <p:sp>
-        <p:nvSpPr>
-          <p:cNvPr id="17" name="Text 15"/>
-          <p:cNvSpPr/>
-          <p:nvPr/>
-        </p:nvSpPr>
-        <p:spPr>
-          <a:xfrm>
-            <a:off x="566928" y="6382512"/>
-            <a:ext cx="7315200" cy="219456"/>
-          </a:xfrm>
-          <a:prstGeom prst="rect">
-            <a:avLst/>
-          </a:prstGeom>
-          <a:noFill/>
-          <a:ln/>
-        </p:spPr>
-        <p:txBody>
-          <a:bodyPr wrap="square" lIns="0" tIns="0" rIns="0" bIns="0" rtlCol="0" anchor="ctr"/>
-          <a:lstStyle/>
-          <a:p>
-            <a:pPr indent="0" marL="0">
-              <a:buNone/>
-            </a:pPr>
-            <a:r>
-              <a:rPr lang="en-US" sz="800" dirty="0">
-                <a:solidFill>
-                  <a:srgbClr val="718096"/>
-                </a:solidFill>
-                <a:latin typeface="Pretendard" pitchFamily="34" charset="0"/>
-                <a:ea typeface="Pretendard" pitchFamily="34" charset="-122"/>
-                <a:cs typeface="Pretendard" pitchFamily="34" charset="-120"/>
-              </a:rPr>
-              <a:t>크리딜   |   </a:t>
-            </a:r>
-            <a:endParaRPr lang="en-US" sz="800" dirty="0"/>
-          </a:p>
-        </p:txBody>
-      </p:sp>
-      <p:sp>
-        <p:nvSpPr>
-          <p:cNvPr id="18" name="Text 16"/>
-          <p:cNvSpPr/>
-          <p:nvPr/>
-        </p:nvSpPr>
-        <p:spPr>
-          <a:xfrm>
-            <a:off x="10710367" y="6382512"/>
+            <a:off x="10774375" y="6382512"/>
             <a:ext cx="914400" cy="219456"/>
           </a:xfrm>
           <a:prstGeom prst="rect">
@@ -10397,7 +11129,7 @@
         </p:nvSpPr>
         <p:spPr>
           <a:xfrm>
-            <a:off x="566928" y="457200"/>
+            <a:off x="502920" y="457200"/>
             <a:ext cx="384048" cy="384048"/>
           </a:xfrm>
           <a:prstGeom prst="ellipse">
@@ -10417,7 +11149,7 @@
         </p:nvSpPr>
         <p:spPr>
           <a:xfrm>
-            <a:off x="566928" y="457200"/>
+            <a:off x="502920" y="457200"/>
             <a:ext cx="384048" cy="384048"/>
           </a:xfrm>
           <a:prstGeom prst="rect">
@@ -10456,7 +11188,7 @@
         </p:nvSpPr>
         <p:spPr>
           <a:xfrm>
-            <a:off x="1133856" y="457200"/>
+            <a:off x="1069848" y="457200"/>
             <a:ext cx="10490911" cy="182880"/>
           </a:xfrm>
           <a:prstGeom prst="rect">
@@ -10481,7 +11213,7 @@
                 <a:ea typeface="Arial" pitchFamily="34" charset="-122"/>
                 <a:cs typeface="Arial" pitchFamily="34" charset="-120"/>
               </a:rPr>
-              <a:t>Profit</a:t>
+              <a:t>Stability</a:t>
             </a:r>
             <a:endParaRPr lang="en-US" sz="950" dirty="0"/>
           </a:p>
@@ -10495,7 +11227,7 @@
         </p:nvSpPr>
         <p:spPr>
           <a:xfrm>
-            <a:off x="1133856" y="640080"/>
+            <a:off x="1069848" y="640080"/>
             <a:ext cx="10490911" cy="365760"/>
           </a:xfrm>
           <a:prstGeom prst="rect">
@@ -10520,7 +11252,7 @@
                 <a:ea typeface="Pretendard" pitchFamily="34" charset="-122"/>
                 <a:cs typeface="Pretendard" pitchFamily="34" charset="-120"/>
               </a:rPr>
-              <a:t>수익구조</a:t>
+              <a:t>임대안정성</a:t>
             </a:r>
             <a:endParaRPr lang="en-US" sz="2300" dirty="0"/>
           </a:p>
@@ -10528,20 +11260,250 @@
       </p:sp>
       <p:sp>
         <p:nvSpPr>
-          <p:cNvPr id="6" name="Shape 4"/>
-          <p:cNvSpPr/>
-          <p:nvPr/>
-        </p:nvSpPr>
-        <p:spPr>
-          <a:xfrm>
-            <a:off x="566928" y="1325880"/>
-            <a:ext cx="11057839" cy="0"/>
+          <p:cNvPr id="6" name="Text 4"/>
+          <p:cNvSpPr/>
+          <p:nvPr/>
+        </p:nvSpPr>
+        <p:spPr>
+          <a:xfrm>
+            <a:off x="502920" y="1371600"/>
+            <a:ext cx="6858000" cy="237744"/>
+          </a:xfrm>
+          <a:prstGeom prst="rect">
+            <a:avLst/>
+          </a:prstGeom>
+          <a:noFill/>
+          <a:ln/>
+        </p:spPr>
+        <p:txBody>
+          <a:bodyPr wrap="square" lIns="0" tIns="0" rIns="0" bIns="0" rtlCol="0" anchor="ctr"/>
+          <a:lstStyle/>
+          <a:p>
+            <a:pPr indent="0" marL="0">
+              <a:buNone/>
+            </a:pPr>
+            <a:r>
+              <a:rPr lang="en-US" sz="1100" b="1" dirty="0">
+                <a:solidFill>
+                  <a:srgbClr val="10161F"/>
+                </a:solidFill>
+                <a:latin typeface="Pretendard" pitchFamily="34" charset="0"/>
+                <a:ea typeface="Pretendard" pitchFamily="34" charset="-122"/>
+                <a:cs typeface="Pretendard" pitchFamily="34" charset="-120"/>
+              </a:rPr>
+              <a:t>건축물 개요 및 물리 스펙</a:t>
+            </a:r>
+            <a:endParaRPr lang="en-US" sz="1100" dirty="0"/>
+          </a:p>
+        </p:txBody>
+      </p:sp>
+      <p:sp>
+        <p:nvSpPr>
+          <p:cNvPr id="7" name="Text 5"/>
+          <p:cNvSpPr/>
+          <p:nvPr/>
+        </p:nvSpPr>
+        <p:spPr>
+          <a:xfrm>
+            <a:off x="502920" y="1645920"/>
+            <a:ext cx="1920240" cy="420624"/>
+          </a:xfrm>
+          <a:prstGeom prst="rect">
+            <a:avLst/>
+          </a:prstGeom>
+          <a:noFill/>
+          <a:ln/>
+        </p:spPr>
+        <p:txBody>
+          <a:bodyPr wrap="square" lIns="0" tIns="0" rIns="0" bIns="0" rtlCol="0" anchor="ctr"/>
+          <a:lstStyle/>
+          <a:p>
+            <a:pPr indent="0" marL="0">
+              <a:lnSpc>
+                <a:spcPct val="115000"/>
+              </a:lnSpc>
+              <a:buNone/>
+            </a:pPr>
+            <a:r>
+              <a:rPr lang="en-US" sz="1350" dirty="0">
+                <a:solidFill>
+                  <a:srgbClr val="718096"/>
+                </a:solidFill>
+                <a:latin typeface="Pretendard" pitchFamily="34" charset="0"/>
+                <a:ea typeface="Pretendard" pitchFamily="34" charset="-122"/>
+                <a:cs typeface="Pretendard" pitchFamily="34" charset="-120"/>
+              </a:rPr>
+              <a:t>1F</a:t>
+            </a:r>
+            <a:endParaRPr lang="en-US" sz="1350" dirty="0"/>
+          </a:p>
+        </p:txBody>
+      </p:sp>
+      <p:sp>
+        <p:nvSpPr>
+          <p:cNvPr id="8" name="Text 6"/>
+          <p:cNvSpPr/>
+          <p:nvPr/>
+        </p:nvSpPr>
+        <p:spPr>
+          <a:xfrm>
+            <a:off x="2423160" y="1645920"/>
+            <a:ext cx="4937760" cy="420624"/>
+          </a:xfrm>
+          <a:prstGeom prst="rect">
+            <a:avLst/>
+          </a:prstGeom>
+          <a:noFill/>
+          <a:ln/>
+        </p:spPr>
+        <p:txBody>
+          <a:bodyPr wrap="square" lIns="0" tIns="0" rIns="0" bIns="0" rtlCol="0" anchor="ctr"/>
+          <a:lstStyle/>
+          <a:p>
+            <a:pPr indent="0" marL="0">
+              <a:lnSpc>
+                <a:spcPct val="115000"/>
+              </a:lnSpc>
+              <a:buNone/>
+            </a:pPr>
+            <a:r>
+              <a:rPr lang="en-US" sz="1350" b="1" dirty="0">
+                <a:solidFill>
+                  <a:srgbClr val="10161F"/>
+                </a:solidFill>
+                <a:latin typeface="Pretendard" pitchFamily="34" charset="0"/>
+                <a:ea typeface="Pretendard" pitchFamily="34" charset="-122"/>
+                <a:cs typeface="Pretendard" pitchFamily="34" charset="-120"/>
+              </a:rPr>
+              <a:t>약국 (3억)</a:t>
+            </a:r>
+            <a:endParaRPr lang="en-US" sz="1350" dirty="0"/>
+          </a:p>
+        </p:txBody>
+      </p:sp>
+      <p:sp>
+        <p:nvSpPr>
+          <p:cNvPr id="9" name="Shape 7"/>
+          <p:cNvSpPr/>
+          <p:nvPr/>
+        </p:nvSpPr>
+        <p:spPr>
+          <a:xfrm>
+            <a:off x="502920" y="2066544"/>
+            <a:ext cx="6858000" cy="0"/>
           </a:xfrm>
           <a:prstGeom prst="line">
             <a:avLst/>
           </a:prstGeom>
           <a:noFill/>
-          <a:ln w="19050">
+          <a:ln w="3810">
+            <a:solidFill>
+              <a:srgbClr val="CBD5E0"/>
+            </a:solidFill>
+            <a:prstDash val="solid"/>
+          </a:ln>
+        </p:spPr>
+      </p:sp>
+      <p:sp>
+        <p:nvSpPr>
+          <p:cNvPr id="10" name="Text 8"/>
+          <p:cNvSpPr/>
+          <p:nvPr/>
+        </p:nvSpPr>
+        <p:spPr>
+          <a:xfrm>
+            <a:off x="502920" y="2066544"/>
+            <a:ext cx="1920240" cy="420624"/>
+          </a:xfrm>
+          <a:prstGeom prst="rect">
+            <a:avLst/>
+          </a:prstGeom>
+          <a:noFill/>
+          <a:ln/>
+        </p:spPr>
+        <p:txBody>
+          <a:bodyPr wrap="square" lIns="0" tIns="0" rIns="0" bIns="0" rtlCol="0" anchor="ctr"/>
+          <a:lstStyle/>
+          <a:p>
+            <a:pPr indent="0" marL="0">
+              <a:lnSpc>
+                <a:spcPct val="115000"/>
+              </a:lnSpc>
+              <a:buNone/>
+            </a:pPr>
+            <a:r>
+              <a:rPr lang="en-US" sz="1350" dirty="0">
+                <a:solidFill>
+                  <a:srgbClr val="718096"/>
+                </a:solidFill>
+                <a:latin typeface="Pretendard" pitchFamily="34" charset="0"/>
+                <a:ea typeface="Pretendard" pitchFamily="34" charset="-122"/>
+                <a:cs typeface="Pretendard" pitchFamily="34" charset="-120"/>
+              </a:rPr>
+              <a:t>2F</a:t>
+            </a:r>
+            <a:endParaRPr lang="en-US" sz="1350" dirty="0"/>
+          </a:p>
+        </p:txBody>
+      </p:sp>
+      <p:sp>
+        <p:nvSpPr>
+          <p:cNvPr id="11" name="Text 9"/>
+          <p:cNvSpPr/>
+          <p:nvPr/>
+        </p:nvSpPr>
+        <p:spPr>
+          <a:xfrm>
+            <a:off x="2423160" y="2066544"/>
+            <a:ext cx="4937760" cy="420624"/>
+          </a:xfrm>
+          <a:prstGeom prst="rect">
+            <a:avLst/>
+          </a:prstGeom>
+          <a:noFill/>
+          <a:ln/>
+        </p:spPr>
+        <p:txBody>
+          <a:bodyPr wrap="square" lIns="0" tIns="0" rIns="0" bIns="0" rtlCol="0" anchor="ctr"/>
+          <a:lstStyle/>
+          <a:p>
+            <a:pPr indent="0" marL="0">
+              <a:lnSpc>
+                <a:spcPct val="115000"/>
+              </a:lnSpc>
+              <a:buNone/>
+            </a:pPr>
+            <a:r>
+              <a:rPr lang="en-US" sz="1350" b="1" dirty="0">
+                <a:solidFill>
+                  <a:srgbClr val="10161F"/>
+                </a:solidFill>
+                <a:latin typeface="Pretendard" pitchFamily="34" charset="0"/>
+                <a:ea typeface="Pretendard" pitchFamily="34" charset="-122"/>
+                <a:cs typeface="Pretendard" pitchFamily="34" charset="-120"/>
+              </a:rPr>
+              <a:t>안과 (2억)</a:t>
+            </a:r>
+            <a:endParaRPr lang="en-US" sz="1350" dirty="0"/>
+          </a:p>
+        </p:txBody>
+      </p:sp>
+      <p:sp>
+        <p:nvSpPr>
+          <p:cNvPr id="12" name="Shape 10"/>
+          <p:cNvSpPr/>
+          <p:nvPr/>
+        </p:nvSpPr>
+        <p:spPr>
+          <a:xfrm>
+            <a:off x="7540600" y="1371600"/>
+            <a:ext cx="0" cy="4754880"/>
+          </a:xfrm>
+          <a:prstGeom prst="line">
+            <a:avLst/>
+          </a:prstGeom>
+          <a:noFill/>
+          <a:ln w="8890">
             <a:solidFill>
               <a:srgbClr val="B98A2E"/>
             </a:solidFill>
@@ -10551,41 +11513,56 @@
       </p:sp>
       <p:sp>
         <p:nvSpPr>
-          <p:cNvPr id="7" name="Shape 5"/>
-          <p:cNvSpPr/>
-          <p:nvPr/>
-        </p:nvSpPr>
-        <p:spPr>
-          <a:xfrm>
-            <a:off x="566928" y="1554480"/>
-            <a:ext cx="3576218" cy="1188720"/>
+          <p:cNvPr id="13" name="Shape 11"/>
+          <p:cNvSpPr/>
+          <p:nvPr/>
+        </p:nvSpPr>
+        <p:spPr>
+          <a:xfrm>
+            <a:off x="7720279" y="1645920"/>
+            <a:ext cx="3840480" cy="1645920"/>
           </a:xfrm>
           <a:prstGeom prst="roundRect">
             <a:avLst>
-              <a:gd name="adj" fmla="val 4615"/>
+              <a:gd name="adj" fmla="val 3333"/>
             </a:avLst>
           </a:prstGeom>
           <a:solidFill>
-            <a:srgbClr val="F7FAFC"/>
+            <a:srgbClr val="F3EBDA"/>
           </a:solidFill>
-          <a:ln w="6350">
-            <a:solidFill>
-              <a:srgbClr val="CBD5E0"/>
-            </a:solidFill>
-            <a:prstDash val="solid"/>
-          </a:ln>
-        </p:spPr>
-      </p:sp>
-      <p:sp>
-        <p:nvSpPr>
-          <p:cNvPr id="8" name="Text 6"/>
-          <p:cNvSpPr/>
-          <p:nvPr/>
-        </p:nvSpPr>
-        <p:spPr>
-          <a:xfrm>
-            <a:off x="731520" y="1682496"/>
-            <a:ext cx="3247034" cy="201168"/>
+          <a:ln/>
+        </p:spPr>
+      </p:sp>
+      <p:sp>
+        <p:nvSpPr>
+          <p:cNvPr id="14" name="Shape 12"/>
+          <p:cNvSpPr/>
+          <p:nvPr/>
+        </p:nvSpPr>
+        <p:spPr>
+          <a:xfrm>
+            <a:off x="7720279" y="1700784"/>
+            <a:ext cx="36576" cy="1536192"/>
+          </a:xfrm>
+          <a:prstGeom prst="rect">
+            <a:avLst/>
+          </a:prstGeom>
+          <a:solidFill>
+            <a:srgbClr val="977024"/>
+          </a:solidFill>
+          <a:ln/>
+        </p:spPr>
+      </p:sp>
+      <p:sp>
+        <p:nvSpPr>
+          <p:cNvPr id="15" name="Text 13"/>
+          <p:cNvSpPr/>
+          <p:nvPr/>
+        </p:nvSpPr>
+        <p:spPr>
+          <a:xfrm>
+            <a:off x="7866583" y="1737360"/>
+            <a:ext cx="3584448" cy="201168"/>
           </a:xfrm>
           <a:prstGeom prst="rect">
             <a:avLst/>
@@ -10600,367 +11577,20 @@
             <a:pPr indent="0" marL="0">
               <a:buNone/>
             </a:pPr>
-            <a:r>
-              <a:rPr lang="en-US" sz="950" dirty="0">
-                <a:solidFill>
-                  <a:srgbClr val="718096"/>
-                </a:solidFill>
-                <a:latin typeface="Pretendard" pitchFamily="34" charset="0"/>
-                <a:ea typeface="Pretendard" pitchFamily="34" charset="-122"/>
-                <a:cs typeface="Pretendard" pitchFamily="34" charset="-120"/>
-              </a:rPr>
-              <a:t>실투자금</a:t>
-            </a:r>
-            <a:endParaRPr lang="en-US" sz="950" dirty="0"/>
-          </a:p>
-        </p:txBody>
-      </p:sp>
-      <p:sp>
-        <p:nvSpPr>
-          <p:cNvPr id="9" name="Text 7"/>
-          <p:cNvSpPr/>
-          <p:nvPr/>
-        </p:nvSpPr>
-        <p:spPr>
-          <a:xfrm>
-            <a:off x="731520" y="1901952"/>
-            <a:ext cx="3247034" cy="402336"/>
-          </a:xfrm>
-          <a:prstGeom prst="rect">
-            <a:avLst/>
-          </a:prstGeom>
-          <a:noFill/>
-          <a:ln/>
-        </p:spPr>
-        <p:txBody>
-          <a:bodyPr wrap="square" lIns="0" tIns="0" rIns="0" bIns="0" rtlCol="0" anchor="ctr">
-            <a:normAutofit/>
-          </a:bodyPr>
-          <a:lstStyle/>
-          <a:p>
-            <a:pPr indent="0" marL="0">
-              <a:buNone/>
-            </a:pPr>
-            <a:r>
-              <a:rPr lang="en-US" sz="2200" b="1" dirty="0">
-                <a:solidFill>
-                  <a:srgbClr val="10161F"/>
-                </a:solidFill>
-                <a:latin typeface="Pretendard" pitchFamily="34" charset="0"/>
-                <a:ea typeface="Pretendard" pitchFamily="34" charset="-122"/>
-                <a:cs typeface="Pretendard" pitchFamily="34" charset="-120"/>
-              </a:rPr>
-              <a:t>약 69억 원</a:t>
-            </a:r>
-            <a:endParaRPr lang="en-US" sz="2200" dirty="0"/>
-          </a:p>
-        </p:txBody>
-      </p:sp>
-      <p:sp>
-        <p:nvSpPr>
-          <p:cNvPr id="10" name="Shape 8"/>
-          <p:cNvSpPr/>
-          <p:nvPr/>
-        </p:nvSpPr>
-        <p:spPr>
-          <a:xfrm>
-            <a:off x="4307738" y="1554480"/>
-            <a:ext cx="3576218" cy="1188720"/>
-          </a:xfrm>
-          <a:prstGeom prst="roundRect">
-            <a:avLst>
-              <a:gd name="adj" fmla="val 4615"/>
-            </a:avLst>
-          </a:prstGeom>
-          <a:solidFill>
-            <a:srgbClr val="F7FAFC"/>
-          </a:solidFill>
-          <a:ln w="6350">
-            <a:solidFill>
-              <a:srgbClr val="CBD5E0"/>
-            </a:solidFill>
-            <a:prstDash val="solid"/>
-          </a:ln>
-        </p:spPr>
-      </p:sp>
-      <p:sp>
-        <p:nvSpPr>
-          <p:cNvPr id="11" name="Text 9"/>
-          <p:cNvSpPr/>
-          <p:nvPr/>
-        </p:nvSpPr>
-        <p:spPr>
-          <a:xfrm>
-            <a:off x="4472330" y="1682496"/>
-            <a:ext cx="3247034" cy="201168"/>
-          </a:xfrm>
-          <a:prstGeom prst="rect">
-            <a:avLst/>
-          </a:prstGeom>
-          <a:noFill/>
-          <a:ln/>
-        </p:spPr>
-        <p:txBody>
-          <a:bodyPr wrap="square" lIns="0" tIns="0" rIns="0" bIns="0" rtlCol="0" anchor="ctr"/>
-          <a:lstStyle/>
-          <a:p>
-            <a:pPr indent="0" marL="0">
-              <a:buNone/>
-            </a:pPr>
-            <a:r>
-              <a:rPr lang="en-US" sz="950" dirty="0">
-                <a:solidFill>
-                  <a:srgbClr val="718096"/>
-                </a:solidFill>
-                <a:latin typeface="Pretendard" pitchFamily="34" charset="0"/>
-                <a:ea typeface="Pretendard" pitchFamily="34" charset="-122"/>
-                <a:cs typeface="Pretendard" pitchFamily="34" charset="-120"/>
-              </a:rPr>
-              <a:t>순수익(매월)</a:t>
-            </a:r>
-            <a:endParaRPr lang="en-US" sz="950" dirty="0"/>
-          </a:p>
-        </p:txBody>
-      </p:sp>
-      <p:sp>
-        <p:nvSpPr>
-          <p:cNvPr id="12" name="Text 10"/>
-          <p:cNvSpPr/>
-          <p:nvPr/>
-        </p:nvSpPr>
-        <p:spPr>
-          <a:xfrm>
-            <a:off x="4472330" y="1901952"/>
-            <a:ext cx="3247034" cy="402336"/>
-          </a:xfrm>
-          <a:prstGeom prst="rect">
-            <a:avLst/>
-          </a:prstGeom>
-          <a:noFill/>
-          <a:ln/>
-        </p:spPr>
-        <p:txBody>
-          <a:bodyPr wrap="square" lIns="0" tIns="0" rIns="0" bIns="0" rtlCol="0" anchor="ctr">
-            <a:normAutofit/>
-          </a:bodyPr>
-          <a:lstStyle/>
-          <a:p>
-            <a:pPr indent="0" marL="0">
-              <a:buNone/>
-            </a:pPr>
-            <a:r>
-              <a:rPr lang="en-US" sz="2200" b="1" dirty="0">
-                <a:solidFill>
-                  <a:srgbClr val="10161F"/>
-                </a:solidFill>
-                <a:latin typeface="Pretendard" pitchFamily="34" charset="0"/>
-                <a:ea typeface="Pretendard" pitchFamily="34" charset="-122"/>
-                <a:cs typeface="Pretendard" pitchFamily="34" charset="-120"/>
-              </a:rPr>
-              <a:t>약 3,650만 원</a:t>
-            </a:r>
-            <a:endParaRPr lang="en-US" sz="2200" dirty="0"/>
-          </a:p>
-        </p:txBody>
-      </p:sp>
-      <p:sp>
-        <p:nvSpPr>
-          <p:cNvPr id="13" name="Shape 11"/>
-          <p:cNvSpPr/>
-          <p:nvPr/>
-        </p:nvSpPr>
-        <p:spPr>
-          <a:xfrm>
-            <a:off x="8048549" y="1554480"/>
-            <a:ext cx="3576218" cy="1188720"/>
-          </a:xfrm>
-          <a:prstGeom prst="roundRect">
-            <a:avLst>
-              <a:gd name="adj" fmla="val 4615"/>
-            </a:avLst>
-          </a:prstGeom>
-          <a:solidFill>
-            <a:srgbClr val="F7FAFC"/>
-          </a:solidFill>
-          <a:ln w="6350">
-            <a:solidFill>
-              <a:srgbClr val="CBD5E0"/>
-            </a:solidFill>
-            <a:prstDash val="solid"/>
-          </a:ln>
-        </p:spPr>
-      </p:sp>
-      <p:sp>
-        <p:nvSpPr>
-          <p:cNvPr id="14" name="Text 12"/>
-          <p:cNvSpPr/>
-          <p:nvPr/>
-        </p:nvSpPr>
-        <p:spPr>
-          <a:xfrm>
-            <a:off x="8213141" y="1682496"/>
-            <a:ext cx="3247034" cy="201168"/>
-          </a:xfrm>
-          <a:prstGeom prst="rect">
-            <a:avLst/>
-          </a:prstGeom>
-          <a:noFill/>
-          <a:ln/>
-        </p:spPr>
-        <p:txBody>
-          <a:bodyPr wrap="square" lIns="0" tIns="0" rIns="0" bIns="0" rtlCol="0" anchor="ctr"/>
-          <a:lstStyle/>
-          <a:p>
-            <a:pPr indent="0" marL="0">
-              <a:buNone/>
-            </a:pPr>
-            <a:r>
-              <a:rPr lang="en-US" sz="950" dirty="0">
-                <a:solidFill>
-                  <a:srgbClr val="718096"/>
-                </a:solidFill>
-                <a:latin typeface="Pretendard" pitchFamily="34" charset="0"/>
-                <a:ea typeface="Pretendard" pitchFamily="34" charset="-122"/>
-                <a:cs typeface="Pretendard" pitchFamily="34" charset="-120"/>
-              </a:rPr>
-              <a:t>레버리지 수익률</a:t>
-            </a:r>
-            <a:endParaRPr lang="en-US" sz="950" dirty="0"/>
-          </a:p>
-        </p:txBody>
-      </p:sp>
-      <p:sp>
-        <p:nvSpPr>
-          <p:cNvPr id="15" name="Text 13"/>
-          <p:cNvSpPr/>
-          <p:nvPr/>
-        </p:nvSpPr>
-        <p:spPr>
-          <a:xfrm>
-            <a:off x="8213141" y="1901952"/>
-            <a:ext cx="3247034" cy="402336"/>
-          </a:xfrm>
-          <a:prstGeom prst="rect">
-            <a:avLst/>
-          </a:prstGeom>
-          <a:noFill/>
-          <a:ln/>
-        </p:spPr>
-        <p:txBody>
-          <a:bodyPr wrap="square" lIns="0" tIns="0" rIns="0" bIns="0" rtlCol="0" anchor="ctr">
-            <a:normAutofit/>
-          </a:bodyPr>
-          <a:lstStyle/>
-          <a:p>
-            <a:pPr indent="0" marL="0">
-              <a:buNone/>
-            </a:pPr>
-            <a:r>
-              <a:rPr lang="en-US" sz="2200" b="1" dirty="0">
-                <a:solidFill>
-                  <a:srgbClr val="10161F"/>
-                </a:solidFill>
-                <a:latin typeface="Pretendard" pitchFamily="34" charset="0"/>
-                <a:ea typeface="Pretendard" pitchFamily="34" charset="-122"/>
-                <a:cs typeface="Pretendard" pitchFamily="34" charset="-120"/>
-              </a:rPr>
-              <a:t>약 5.8%</a:t>
-            </a:r>
-            <a:endParaRPr lang="en-US" sz="2200" dirty="0"/>
-          </a:p>
-        </p:txBody>
-      </p:sp>
-      <p:sp>
-        <p:nvSpPr>
-          <p:cNvPr id="16" name="Shape 14"/>
-          <p:cNvSpPr/>
-          <p:nvPr/>
-        </p:nvSpPr>
-        <p:spPr>
-          <a:xfrm>
-            <a:off x="566928" y="2999232"/>
-            <a:ext cx="11057839" cy="1280160"/>
-          </a:xfrm>
-          <a:prstGeom prst="roundRect">
-            <a:avLst>
-              <a:gd name="adj" fmla="val 4286"/>
-            </a:avLst>
-          </a:prstGeom>
-          <a:solidFill>
-            <a:srgbClr val="BEE3F8"/>
-          </a:solidFill>
-          <a:ln/>
-        </p:spPr>
-      </p:sp>
-      <p:sp>
-        <p:nvSpPr>
-          <p:cNvPr id="17" name="Shape 15"/>
-          <p:cNvSpPr/>
-          <p:nvPr/>
-        </p:nvSpPr>
-        <p:spPr>
-          <a:xfrm>
-            <a:off x="566928" y="3054096"/>
-            <a:ext cx="36576" cy="1170432"/>
-          </a:xfrm>
-          <a:prstGeom prst="rect">
-            <a:avLst/>
-          </a:prstGeom>
-          <a:solidFill>
-            <a:srgbClr val="2B6CB0"/>
-          </a:solidFill>
-          <a:ln/>
-        </p:spPr>
-      </p:sp>
-      <p:sp>
-        <p:nvSpPr>
-          <p:cNvPr id="18" name="Text 16"/>
-          <p:cNvSpPr/>
-          <p:nvPr/>
-        </p:nvSpPr>
-        <p:spPr>
-          <a:xfrm>
-            <a:off x="749808" y="3108960"/>
-            <a:ext cx="10728655" cy="201168"/>
-          </a:xfrm>
-          <a:prstGeom prst="rect">
-            <a:avLst/>
-          </a:prstGeom>
-          <a:noFill/>
-          <a:ln/>
-        </p:spPr>
-        <p:txBody>
-          <a:bodyPr wrap="square" lIns="0" tIns="0" rIns="0" bIns="0" rtlCol="0" anchor="ctr"/>
-          <a:lstStyle/>
-          <a:p>
-            <a:pPr indent="0" marL="0">
-              <a:buNone/>
-            </a:pPr>
-            <a:r>
-              <a:rPr lang="en-US" sz="1050" b="1" dirty="0">
-                <a:solidFill>
-                  <a:srgbClr val="2B6CB0"/>
-                </a:solidFill>
-                <a:latin typeface="Pretendard" pitchFamily="34" charset="0"/>
-                <a:ea typeface="Pretendard" pitchFamily="34" charset="-122"/>
-                <a:cs typeface="Pretendard" pitchFamily="34" charset="-120"/>
-              </a:rPr>
-              <a:t>투자 가치 제안</a:t>
-            </a:r>
             <a:endParaRPr lang="en-US" sz="1050" dirty="0"/>
           </a:p>
         </p:txBody>
       </p:sp>
       <p:sp>
         <p:nvSpPr>
-          <p:cNvPr id="19" name="Text 17"/>
-          <p:cNvSpPr/>
-          <p:nvPr/>
-        </p:nvSpPr>
-        <p:spPr>
-          <a:xfrm>
-            <a:off x="749808" y="3328416"/>
-            <a:ext cx="10728655" cy="877824"/>
+          <p:cNvPr id="16" name="Text 14"/>
+          <p:cNvSpPr/>
+          <p:nvPr/>
+        </p:nvSpPr>
+        <p:spPr>
+          <a:xfrm>
+            <a:off x="7866583" y="1938528"/>
+            <a:ext cx="3584448" cy="1316736"/>
           </a:xfrm>
           <a:prstGeom prst="rect">
             <a:avLst/>
@@ -10974,12 +11604,12 @@
           <a:p>
             <a:pPr indent="0" marL="0">
               <a:lnSpc>
-                <a:spcPct val="120000"/>
+                <a:spcPct val="108000"/>
               </a:lnSpc>
               <a:buNone/>
             </a:pPr>
             <a:r>
-              <a:rPr lang="en-US" sz="930" dirty="0">
+              <a:rPr lang="en-US" sz="980" dirty="0">
                 <a:solidFill>
                   <a:srgbClr val="10161F"/>
                 </a:solidFill>
@@ -10987,21 +11617,21 @@
                 <a:ea typeface="Pretendard" pitchFamily="34" charset="-122"/>
                 <a:cs typeface="Pretendard" pitchFamily="34" charset="-120"/>
               </a:rPr>
-              <a:t>연 순영업소득(NOI) 약 7.14억 원, 매입 Cap Rate 4.62%입니다.</a:t>
-            </a:r>
-            <a:endParaRPr lang="en-US" sz="930" dirty="0"/>
-          </a:p>
-        </p:txBody>
-      </p:sp>
-      <p:sp>
-        <p:nvSpPr>
-          <p:cNvPr id="20" name="Text 18"/>
-          <p:cNvSpPr/>
-          <p:nvPr/>
-        </p:nvSpPr>
-        <p:spPr>
-          <a:xfrm>
-            <a:off x="566928" y="6382512"/>
+              <a:t>전층 메디컬 만실 운영 중이며 WALE 평균 3.5년입니다.</a:t>
+            </a:r>
+            <a:endParaRPr lang="en-US" sz="980" dirty="0"/>
+          </a:p>
+        </p:txBody>
+      </p:sp>
+      <p:sp>
+        <p:nvSpPr>
+          <p:cNvPr id="17" name="Text 15"/>
+          <p:cNvSpPr/>
+          <p:nvPr/>
+        </p:nvSpPr>
+        <p:spPr>
+          <a:xfrm>
+            <a:off x="502920" y="6382512"/>
             <a:ext cx="7315200" cy="219456"/>
           </a:xfrm>
           <a:prstGeom prst="rect">
@@ -11034,13 +11664,13 @@
       </p:sp>
       <p:sp>
         <p:nvSpPr>
-          <p:cNvPr id="21" name="Text 19"/>
-          <p:cNvSpPr/>
-          <p:nvPr/>
-        </p:nvSpPr>
-        <p:spPr>
-          <a:xfrm>
-            <a:off x="10710367" y="6382512"/>
+          <p:cNvPr id="18" name="Text 16"/>
+          <p:cNvSpPr/>
+          <p:nvPr/>
+        </p:nvSpPr>
+        <p:spPr>
+          <a:xfrm>
+            <a:off x="10774375" y="6382512"/>
             <a:ext cx="914400" cy="219456"/>
           </a:xfrm>
           <a:prstGeom prst="rect">
@@ -11111,7 +11741,7 @@
         </p:nvSpPr>
         <p:spPr>
           <a:xfrm>
-            <a:off x="566928" y="457200"/>
+            <a:off x="502920" y="457200"/>
             <a:ext cx="384048" cy="384048"/>
           </a:xfrm>
           <a:prstGeom prst="ellipse">
@@ -11131,7 +11761,7 @@
         </p:nvSpPr>
         <p:spPr>
           <a:xfrm>
-            <a:off x="566928" y="457200"/>
+            <a:off x="502920" y="457200"/>
             <a:ext cx="384048" cy="384048"/>
           </a:xfrm>
           <a:prstGeom prst="rect">
@@ -11170,7 +11800,7 @@
         </p:nvSpPr>
         <p:spPr>
           <a:xfrm>
-            <a:off x="1133856" y="457200"/>
+            <a:off x="1069848" y="457200"/>
             <a:ext cx="10490911" cy="182880"/>
           </a:xfrm>
           <a:prstGeom prst="rect">
@@ -11195,7 +11825,7 @@
                 <a:ea typeface="Arial" pitchFamily="34" charset="-122"/>
                 <a:cs typeface="Arial" pitchFamily="34" charset="-120"/>
               </a:rPr>
-              <a:t>Thesis</a:t>
+              <a:t>Profit</a:t>
             </a:r>
             <a:endParaRPr lang="en-US" sz="950" dirty="0"/>
           </a:p>
@@ -11209,7 +11839,7 @@
         </p:nvSpPr>
         <p:spPr>
           <a:xfrm>
-            <a:off x="1133856" y="640080"/>
+            <a:off x="1069848" y="640080"/>
             <a:ext cx="10490911" cy="365760"/>
           </a:xfrm>
           <a:prstGeom prst="rect">
@@ -11234,7 +11864,7 @@
                 <a:ea typeface="Pretendard" pitchFamily="34" charset="-122"/>
                 <a:cs typeface="Pretendard" pitchFamily="34" charset="-120"/>
               </a:rPr>
-              <a:t>투자 논거</a:t>
+              <a:t>수익구조</a:t>
             </a:r>
             <a:endParaRPr lang="en-US" sz="2300" dirty="0"/>
           </a:p>
@@ -11248,20 +11878,16 @@
         </p:nvSpPr>
         <p:spPr>
           <a:xfrm>
-            <a:off x="566928" y="4983480"/>
-            <a:ext cx="11057839" cy="804672"/>
-          </a:xfrm>
-          <a:prstGeom prst="roundRect">
-            <a:avLst>
-              <a:gd name="adj" fmla="val 6818"/>
-            </a:avLst>
-          </a:prstGeom>
-          <a:solidFill>
-            <a:srgbClr val="F3EBDA"/>
-          </a:solidFill>
-          <a:ln w="10160">
+            <a:off x="502920" y="1325880"/>
+            <a:ext cx="11057839" cy="0"/>
+          </a:xfrm>
+          <a:prstGeom prst="line">
+            <a:avLst/>
+          </a:prstGeom>
+          <a:noFill/>
+          <a:ln w="19050">
             <a:solidFill>
-              <a:srgbClr val="D9B668"/>
+              <a:srgbClr val="B98A2E"/>
             </a:solidFill>
             <a:prstDash val="solid"/>
           </a:ln>
@@ -11269,14 +11895,41 @@
       </p:sp>
       <p:sp>
         <p:nvSpPr>
-          <p:cNvPr id="7" name="Text 5"/>
-          <p:cNvSpPr/>
-          <p:nvPr/>
-        </p:nvSpPr>
-        <p:spPr>
-          <a:xfrm>
-            <a:off x="749808" y="5093208"/>
-            <a:ext cx="1691640" cy="256032"/>
+          <p:cNvPr id="7" name="Shape 5"/>
+          <p:cNvSpPr/>
+          <p:nvPr/>
+        </p:nvSpPr>
+        <p:spPr>
+          <a:xfrm>
+            <a:off x="502920" y="1554480"/>
+            <a:ext cx="3576218" cy="1188720"/>
+          </a:xfrm>
+          <a:prstGeom prst="roundRect">
+            <a:avLst>
+              <a:gd name="adj" fmla="val 4615"/>
+            </a:avLst>
+          </a:prstGeom>
+          <a:solidFill>
+            <a:srgbClr val="F7FAFC"/>
+          </a:solidFill>
+          <a:ln w="6350">
+            <a:solidFill>
+              <a:srgbClr val="CBD5E0"/>
+            </a:solidFill>
+            <a:prstDash val="solid"/>
+          </a:ln>
+        </p:spPr>
+      </p:sp>
+      <p:sp>
+        <p:nvSpPr>
+          <p:cNvPr id="8" name="Text 6"/>
+          <p:cNvSpPr/>
+          <p:nvPr/>
+        </p:nvSpPr>
+        <p:spPr>
+          <a:xfrm>
+            <a:off x="667512" y="1682496"/>
+            <a:ext cx="3247034" cy="201168"/>
           </a:xfrm>
           <a:prstGeom prst="rect">
             <a:avLst/>
@@ -11292,15 +11945,351 @@
               <a:buNone/>
             </a:pPr>
             <a:r>
+              <a:rPr lang="en-US" sz="950" dirty="0">
+                <a:solidFill>
+                  <a:srgbClr val="718096"/>
+                </a:solidFill>
+                <a:latin typeface="Pretendard" pitchFamily="34" charset="0"/>
+                <a:ea typeface="Pretendard" pitchFamily="34" charset="-122"/>
+                <a:cs typeface="Pretendard" pitchFamily="34" charset="-120"/>
+              </a:rPr>
+              <a:t>실투자금</a:t>
+            </a:r>
+            <a:endParaRPr lang="en-US" sz="950" dirty="0"/>
+          </a:p>
+        </p:txBody>
+      </p:sp>
+      <p:sp>
+        <p:nvSpPr>
+          <p:cNvPr id="9" name="Text 7"/>
+          <p:cNvSpPr/>
+          <p:nvPr/>
+        </p:nvSpPr>
+        <p:spPr>
+          <a:xfrm>
+            <a:off x="667512" y="1901952"/>
+            <a:ext cx="3247034" cy="402336"/>
+          </a:xfrm>
+          <a:prstGeom prst="rect">
+            <a:avLst/>
+          </a:prstGeom>
+          <a:noFill/>
+          <a:ln/>
+        </p:spPr>
+        <p:txBody>
+          <a:bodyPr wrap="square" lIns="0" tIns="0" rIns="0" bIns="0" rtlCol="0" anchor="ctr">
+            <a:normAutofit/>
+          </a:bodyPr>
+          <a:lstStyle/>
+          <a:p>
+            <a:pPr indent="0" marL="0">
+              <a:buNone/>
+            </a:pPr>
+            <a:r>
+              <a:rPr lang="en-US" sz="2200" b="1" dirty="0">
+                <a:solidFill>
+                  <a:srgbClr val="10161F"/>
+                </a:solidFill>
+                <a:latin typeface="Pretendard" pitchFamily="34" charset="0"/>
+                <a:ea typeface="Pretendard" pitchFamily="34" charset="-122"/>
+                <a:cs typeface="Pretendard" pitchFamily="34" charset="-120"/>
+              </a:rPr>
+              <a:t>약 69억 원</a:t>
+            </a:r>
+            <a:endParaRPr lang="en-US" sz="2200" dirty="0"/>
+          </a:p>
+        </p:txBody>
+      </p:sp>
+      <p:sp>
+        <p:nvSpPr>
+          <p:cNvPr id="10" name="Shape 8"/>
+          <p:cNvSpPr/>
+          <p:nvPr/>
+        </p:nvSpPr>
+        <p:spPr>
+          <a:xfrm>
+            <a:off x="4243730" y="1554480"/>
+            <a:ext cx="3576218" cy="1188720"/>
+          </a:xfrm>
+          <a:prstGeom prst="roundRect">
+            <a:avLst>
+              <a:gd name="adj" fmla="val 4615"/>
+            </a:avLst>
+          </a:prstGeom>
+          <a:solidFill>
+            <a:srgbClr val="F7FAFC"/>
+          </a:solidFill>
+          <a:ln w="6350">
+            <a:solidFill>
+              <a:srgbClr val="CBD5E0"/>
+            </a:solidFill>
+            <a:prstDash val="solid"/>
+          </a:ln>
+        </p:spPr>
+      </p:sp>
+      <p:sp>
+        <p:nvSpPr>
+          <p:cNvPr id="11" name="Text 9"/>
+          <p:cNvSpPr/>
+          <p:nvPr/>
+        </p:nvSpPr>
+        <p:spPr>
+          <a:xfrm>
+            <a:off x="4408322" y="1682496"/>
+            <a:ext cx="3247034" cy="201168"/>
+          </a:xfrm>
+          <a:prstGeom prst="rect">
+            <a:avLst/>
+          </a:prstGeom>
+          <a:noFill/>
+          <a:ln/>
+        </p:spPr>
+        <p:txBody>
+          <a:bodyPr wrap="square" lIns="0" tIns="0" rIns="0" bIns="0" rtlCol="0" anchor="ctr"/>
+          <a:lstStyle/>
+          <a:p>
+            <a:pPr indent="0" marL="0">
+              <a:buNone/>
+            </a:pPr>
+            <a:r>
+              <a:rPr lang="en-US" sz="950" dirty="0">
+                <a:solidFill>
+                  <a:srgbClr val="718096"/>
+                </a:solidFill>
+                <a:latin typeface="Pretendard" pitchFamily="34" charset="0"/>
+                <a:ea typeface="Pretendard" pitchFamily="34" charset="-122"/>
+                <a:cs typeface="Pretendard" pitchFamily="34" charset="-120"/>
+              </a:rPr>
+              <a:t>순수익(매월)</a:t>
+            </a:r>
+            <a:endParaRPr lang="en-US" sz="950" dirty="0"/>
+          </a:p>
+        </p:txBody>
+      </p:sp>
+      <p:sp>
+        <p:nvSpPr>
+          <p:cNvPr id="12" name="Text 10"/>
+          <p:cNvSpPr/>
+          <p:nvPr/>
+        </p:nvSpPr>
+        <p:spPr>
+          <a:xfrm>
+            <a:off x="4408322" y="1901952"/>
+            <a:ext cx="3247034" cy="402336"/>
+          </a:xfrm>
+          <a:prstGeom prst="rect">
+            <a:avLst/>
+          </a:prstGeom>
+          <a:noFill/>
+          <a:ln/>
+        </p:spPr>
+        <p:txBody>
+          <a:bodyPr wrap="square" lIns="0" tIns="0" rIns="0" bIns="0" rtlCol="0" anchor="ctr">
+            <a:normAutofit/>
+          </a:bodyPr>
+          <a:lstStyle/>
+          <a:p>
+            <a:pPr indent="0" marL="0">
+              <a:buNone/>
+            </a:pPr>
+            <a:r>
+              <a:rPr lang="en-US" sz="2200" b="1" dirty="0">
+                <a:solidFill>
+                  <a:srgbClr val="10161F"/>
+                </a:solidFill>
+                <a:latin typeface="Pretendard" pitchFamily="34" charset="0"/>
+                <a:ea typeface="Pretendard" pitchFamily="34" charset="-122"/>
+                <a:cs typeface="Pretendard" pitchFamily="34" charset="-120"/>
+              </a:rPr>
+              <a:t>약 3,650만 원</a:t>
+            </a:r>
+            <a:endParaRPr lang="en-US" sz="2200" dirty="0"/>
+          </a:p>
+        </p:txBody>
+      </p:sp>
+      <p:sp>
+        <p:nvSpPr>
+          <p:cNvPr id="13" name="Shape 11"/>
+          <p:cNvSpPr/>
+          <p:nvPr/>
+        </p:nvSpPr>
+        <p:spPr>
+          <a:xfrm>
+            <a:off x="7984541" y="1554480"/>
+            <a:ext cx="3576218" cy="1188720"/>
+          </a:xfrm>
+          <a:prstGeom prst="roundRect">
+            <a:avLst>
+              <a:gd name="adj" fmla="val 4615"/>
+            </a:avLst>
+          </a:prstGeom>
+          <a:solidFill>
+            <a:srgbClr val="F7FAFC"/>
+          </a:solidFill>
+          <a:ln w="6350">
+            <a:solidFill>
+              <a:srgbClr val="CBD5E0"/>
+            </a:solidFill>
+            <a:prstDash val="solid"/>
+          </a:ln>
+        </p:spPr>
+      </p:sp>
+      <p:sp>
+        <p:nvSpPr>
+          <p:cNvPr id="14" name="Text 12"/>
+          <p:cNvSpPr/>
+          <p:nvPr/>
+        </p:nvSpPr>
+        <p:spPr>
+          <a:xfrm>
+            <a:off x="8149133" y="1682496"/>
+            <a:ext cx="3247034" cy="201168"/>
+          </a:xfrm>
+          <a:prstGeom prst="rect">
+            <a:avLst/>
+          </a:prstGeom>
+          <a:noFill/>
+          <a:ln/>
+        </p:spPr>
+        <p:txBody>
+          <a:bodyPr wrap="square" lIns="0" tIns="0" rIns="0" bIns="0" rtlCol="0" anchor="ctr"/>
+          <a:lstStyle/>
+          <a:p>
+            <a:pPr indent="0" marL="0">
+              <a:buNone/>
+            </a:pPr>
+            <a:r>
+              <a:rPr lang="en-US" sz="950" dirty="0">
+                <a:solidFill>
+                  <a:srgbClr val="718096"/>
+                </a:solidFill>
+                <a:latin typeface="Pretendard" pitchFamily="34" charset="0"/>
+                <a:ea typeface="Pretendard" pitchFamily="34" charset="-122"/>
+                <a:cs typeface="Pretendard" pitchFamily="34" charset="-120"/>
+              </a:rPr>
+              <a:t>레버리지 수익률</a:t>
+            </a:r>
+            <a:endParaRPr lang="en-US" sz="950" dirty="0"/>
+          </a:p>
+        </p:txBody>
+      </p:sp>
+      <p:sp>
+        <p:nvSpPr>
+          <p:cNvPr id="15" name="Text 13"/>
+          <p:cNvSpPr/>
+          <p:nvPr/>
+        </p:nvSpPr>
+        <p:spPr>
+          <a:xfrm>
+            <a:off x="8149133" y="1901952"/>
+            <a:ext cx="3247034" cy="402336"/>
+          </a:xfrm>
+          <a:prstGeom prst="rect">
+            <a:avLst/>
+          </a:prstGeom>
+          <a:noFill/>
+          <a:ln/>
+        </p:spPr>
+        <p:txBody>
+          <a:bodyPr wrap="square" lIns="0" tIns="0" rIns="0" bIns="0" rtlCol="0" anchor="ctr">
+            <a:normAutofit/>
+          </a:bodyPr>
+          <a:lstStyle/>
+          <a:p>
+            <a:pPr indent="0" marL="0">
+              <a:buNone/>
+            </a:pPr>
+            <a:r>
+              <a:rPr lang="en-US" sz="2200" b="1" dirty="0">
+                <a:solidFill>
+                  <a:srgbClr val="10161F"/>
+                </a:solidFill>
+                <a:latin typeface="Pretendard" pitchFamily="34" charset="0"/>
+                <a:ea typeface="Pretendard" pitchFamily="34" charset="-122"/>
+                <a:cs typeface="Pretendard" pitchFamily="34" charset="-120"/>
+              </a:rPr>
+              <a:t>약 5.8%</a:t>
+            </a:r>
+            <a:endParaRPr lang="en-US" sz="2200" dirty="0"/>
+          </a:p>
+        </p:txBody>
+      </p:sp>
+      <p:sp>
+        <p:nvSpPr>
+          <p:cNvPr id="16" name="Shape 14"/>
+          <p:cNvSpPr/>
+          <p:nvPr/>
+        </p:nvSpPr>
+        <p:spPr>
+          <a:xfrm>
+            <a:off x="502920" y="2999232"/>
+            <a:ext cx="11057839" cy="1280160"/>
+          </a:xfrm>
+          <a:prstGeom prst="roundRect">
+            <a:avLst>
+              <a:gd name="adj" fmla="val 4286"/>
+            </a:avLst>
+          </a:prstGeom>
+          <a:solidFill>
+            <a:srgbClr val="BEE3F8"/>
+          </a:solidFill>
+          <a:ln/>
+        </p:spPr>
+      </p:sp>
+      <p:sp>
+        <p:nvSpPr>
+          <p:cNvPr id="17" name="Shape 15"/>
+          <p:cNvSpPr/>
+          <p:nvPr/>
+        </p:nvSpPr>
+        <p:spPr>
+          <a:xfrm>
+            <a:off x="502920" y="3054096"/>
+            <a:ext cx="36576" cy="1170432"/>
+          </a:xfrm>
+          <a:prstGeom prst="rect">
+            <a:avLst/>
+          </a:prstGeom>
+          <a:solidFill>
+            <a:srgbClr val="2B6CB0"/>
+          </a:solidFill>
+          <a:ln/>
+        </p:spPr>
+      </p:sp>
+      <p:sp>
+        <p:nvSpPr>
+          <p:cNvPr id="18" name="Text 16"/>
+          <p:cNvSpPr/>
+          <p:nvPr/>
+        </p:nvSpPr>
+        <p:spPr>
+          <a:xfrm>
+            <a:off x="649224" y="3090672"/>
+            <a:ext cx="10801807" cy="201168"/>
+          </a:xfrm>
+          <a:prstGeom prst="rect">
+            <a:avLst/>
+          </a:prstGeom>
+          <a:noFill/>
+          <a:ln/>
+        </p:spPr>
+        <p:txBody>
+          <a:bodyPr wrap="square" lIns="0" tIns="0" rIns="0" bIns="0" rtlCol="0" anchor="ctr"/>
+          <a:lstStyle/>
+          <a:p>
+            <a:pPr indent="0" marL="0">
+              <a:buNone/>
+            </a:pPr>
+            <a:r>
               <a:rPr lang="en-US" sz="1050" b="1" dirty="0">
                 <a:solidFill>
-                  <a:srgbClr val="977024"/>
-                </a:solidFill>
-                <a:latin typeface="Pretendard" pitchFamily="34" charset="0"/>
-                <a:ea typeface="Pretendard" pitchFamily="34" charset="-122"/>
-                <a:cs typeface="Pretendard" pitchFamily="34" charset="-120"/>
-              </a:rPr>
-              <a:t>종합 가치 제안</a:t>
+                  <a:srgbClr val="2B6CB0"/>
+                </a:solidFill>
+                <a:latin typeface="Pretendard" pitchFamily="34" charset="0"/>
+                <a:ea typeface="Pretendard" pitchFamily="34" charset="-122"/>
+                <a:cs typeface="Pretendard" pitchFamily="34" charset="-120"/>
+              </a:rPr>
+              <a:t>투자 가치 제안</a:t>
             </a:r>
             <a:endParaRPr lang="en-US" sz="1050" dirty="0"/>
           </a:p>
@@ -11308,33 +12297,33 @@
       </p:sp>
       <p:sp>
         <p:nvSpPr>
-          <p:cNvPr id="8" name="Text 6"/>
-          <p:cNvSpPr/>
-          <p:nvPr/>
-        </p:nvSpPr>
-        <p:spPr>
-          <a:xfrm>
-            <a:off x="2487168" y="5056632"/>
-            <a:ext cx="8954719" cy="658368"/>
-          </a:xfrm>
-          <a:prstGeom prst="rect">
-            <a:avLst/>
-          </a:prstGeom>
-          <a:noFill/>
-          <a:ln/>
-        </p:spPr>
-        <p:txBody>
-          <a:bodyPr wrap="square" lIns="0" tIns="0" rIns="0" bIns="0" rtlCol="0" anchor="ctr"/>
+          <p:cNvPr id="19" name="Text 17"/>
+          <p:cNvSpPr/>
+          <p:nvPr/>
+        </p:nvSpPr>
+        <p:spPr>
+          <a:xfrm>
+            <a:off x="649224" y="3291840"/>
+            <a:ext cx="10801807" cy="950976"/>
+          </a:xfrm>
+          <a:prstGeom prst="rect">
+            <a:avLst/>
+          </a:prstGeom>
+          <a:noFill/>
+          <a:ln/>
+        </p:spPr>
+        <p:txBody>
+          <a:bodyPr wrap="square" lIns="0" tIns="0" rIns="0" bIns="0" rtlCol="0" anchor="t"/>
           <a:lstStyle/>
           <a:p>
             <a:pPr indent="0" marL="0">
               <a:lnSpc>
-                <a:spcPct val="125000"/>
+                <a:spcPct val="108000"/>
               </a:lnSpc>
               <a:buNone/>
             </a:pPr>
             <a:r>
-              <a:rPr lang="en-US" sz="1100" dirty="0">
+              <a:rPr lang="en-US" sz="980" dirty="0">
                 <a:solidFill>
                   <a:srgbClr val="10161F"/>
                 </a:solidFill>
@@ -11342,21 +12331,21 @@
                 <a:ea typeface="Pretendard" pitchFamily="34" charset="-122"/>
                 <a:cs typeface="Pretendard" pitchFamily="34" charset="-120"/>
               </a:rPr>
-              <a:t>관점에서 안정적 월 임대수익과 우량 메디컬 테넌트를 보유한 핵심 투자 자산입니다.</a:t>
-            </a:r>
-            <a:endParaRPr lang="en-US" sz="1100" dirty="0"/>
-          </a:p>
-        </p:txBody>
-      </p:sp>
-      <p:sp>
-        <p:nvSpPr>
-          <p:cNvPr id="9" name="Text 7"/>
-          <p:cNvSpPr/>
-          <p:nvPr/>
-        </p:nvSpPr>
-        <p:spPr>
-          <a:xfrm>
-            <a:off x="566928" y="6382512"/>
+              <a:t>연 순영업소득(NOI) 약 7.14억 원, 매입 Cap Rate 4.62%입니다.</a:t>
+            </a:r>
+            <a:endParaRPr lang="en-US" sz="980" dirty="0"/>
+          </a:p>
+        </p:txBody>
+      </p:sp>
+      <p:sp>
+        <p:nvSpPr>
+          <p:cNvPr id="20" name="Text 18"/>
+          <p:cNvSpPr/>
+          <p:nvPr/>
+        </p:nvSpPr>
+        <p:spPr>
+          <a:xfrm>
+            <a:off x="502920" y="6382512"/>
             <a:ext cx="7315200" cy="219456"/>
           </a:xfrm>
           <a:prstGeom prst="rect">
@@ -11389,13 +12378,13 @@
       </p:sp>
       <p:sp>
         <p:nvSpPr>
-          <p:cNvPr id="10" name="Text 8"/>
-          <p:cNvSpPr/>
-          <p:nvPr/>
-        </p:nvSpPr>
-        <p:spPr>
-          <a:xfrm>
-            <a:off x="10710367" y="6382512"/>
+          <p:cNvPr id="21" name="Text 19"/>
+          <p:cNvSpPr/>
+          <p:nvPr/>
+        </p:nvSpPr>
+        <p:spPr>
+          <a:xfrm>
+            <a:off x="10774375" y="6382512"/>
             <a:ext cx="914400" cy="219456"/>
           </a:xfrm>
           <a:prstGeom prst="rect">
@@ -11466,7 +12455,7 @@
         </p:nvSpPr>
         <p:spPr>
           <a:xfrm>
-            <a:off x="566928" y="457200"/>
+            <a:off x="502920" y="457200"/>
             <a:ext cx="384048" cy="384048"/>
           </a:xfrm>
           <a:prstGeom prst="ellipse">
@@ -11486,7 +12475,7 @@
         </p:nvSpPr>
         <p:spPr>
           <a:xfrm>
-            <a:off x="566928" y="457200"/>
+            <a:off x="502920" y="457200"/>
             <a:ext cx="384048" cy="384048"/>
           </a:xfrm>
           <a:prstGeom prst="rect">
@@ -11525,7 +12514,7 @@
         </p:nvSpPr>
         <p:spPr>
           <a:xfrm>
-            <a:off x="1133856" y="457200"/>
+            <a:off x="1069848" y="457200"/>
             <a:ext cx="10490911" cy="182880"/>
           </a:xfrm>
           <a:prstGeom prst="rect">
@@ -11550,7 +12539,7 @@
                 <a:ea typeface="Arial" pitchFamily="34" charset="-122"/>
                 <a:cs typeface="Arial" pitchFamily="34" charset="-120"/>
               </a:rPr>
-              <a:t>Risk</a:t>
+              <a:t>Thesis</a:t>
             </a:r>
             <a:endParaRPr lang="en-US" sz="950" dirty="0"/>
           </a:p>
@@ -11564,7 +12553,7 @@
         </p:nvSpPr>
         <p:spPr>
           <a:xfrm>
-            <a:off x="1133856" y="640080"/>
+            <a:off x="1069848" y="640080"/>
             <a:ext cx="10490911" cy="365760"/>
           </a:xfrm>
           <a:prstGeom prst="rect">
@@ -11589,7 +12578,7 @@
                 <a:ea typeface="Pretendard" pitchFamily="34" charset="-122"/>
                 <a:cs typeface="Pretendard" pitchFamily="34" charset="-120"/>
               </a:rPr>
-              <a:t>리스크</a:t>
+              <a:t>투자 논거</a:t>
             </a:r>
             <a:endParaRPr lang="en-US" sz="2300" dirty="0"/>
           </a:p>
@@ -11603,20 +12592,20 @@
         </p:nvSpPr>
         <p:spPr>
           <a:xfrm>
-            <a:off x="566928" y="1417320"/>
-            <a:ext cx="5400904" cy="3657600"/>
+            <a:off x="502920" y="4937760"/>
+            <a:ext cx="11057839" cy="804672"/>
           </a:xfrm>
           <a:prstGeom prst="roundRect">
             <a:avLst>
-              <a:gd name="adj" fmla="val 1500"/>
+              <a:gd name="adj" fmla="val 6818"/>
             </a:avLst>
           </a:prstGeom>
           <a:solidFill>
-            <a:srgbClr val="F7FAFC"/>
+            <a:srgbClr val="F3EBDA"/>
           </a:solidFill>
-          <a:ln w="6350">
+          <a:ln w="10160">
             <a:solidFill>
-              <a:srgbClr val="CBD5E0"/>
+              <a:srgbClr val="D9B668"/>
             </a:solidFill>
             <a:prstDash val="solid"/>
           </a:ln>
@@ -11624,23 +12613,42 @@
       </p:sp>
       <p:sp>
         <p:nvSpPr>
-          <p:cNvPr id="7" name="Shape 5"/>
-          <p:cNvSpPr/>
-          <p:nvPr/>
-        </p:nvSpPr>
-        <p:spPr>
-          <a:xfrm>
-            <a:off x="566928" y="1417320"/>
-            <a:ext cx="5400904" cy="45720"/>
-          </a:xfrm>
-          <a:prstGeom prst="rect">
-            <a:avLst/>
-          </a:prstGeom>
-          <a:solidFill>
-            <a:srgbClr val="B98A2E"/>
-          </a:solidFill>
-          <a:ln/>
-        </p:spPr>
+          <p:cNvPr id="7" name="Text 5"/>
+          <p:cNvSpPr/>
+          <p:nvPr/>
+        </p:nvSpPr>
+        <p:spPr>
+          <a:xfrm>
+            <a:off x="685800" y="5047488"/>
+            <a:ext cx="1691640" cy="256032"/>
+          </a:xfrm>
+          <a:prstGeom prst="rect">
+            <a:avLst/>
+          </a:prstGeom>
+          <a:noFill/>
+          <a:ln/>
+        </p:spPr>
+        <p:txBody>
+          <a:bodyPr wrap="square" lIns="0" tIns="0" rIns="0" bIns="0" rtlCol="0" anchor="ctr"/>
+          <a:lstStyle/>
+          <a:p>
+            <a:pPr indent="0" marL="0">
+              <a:buNone/>
+            </a:pPr>
+            <a:r>
+              <a:rPr lang="en-US" sz="1050" b="1" dirty="0">
+                <a:solidFill>
+                  <a:srgbClr val="977024"/>
+                </a:solidFill>
+                <a:latin typeface="Pretendard" pitchFamily="34" charset="0"/>
+                <a:ea typeface="Pretendard" pitchFamily="34" charset="-122"/>
+                <a:cs typeface="Pretendard" pitchFamily="34" charset="-120"/>
+              </a:rPr>
+              <a:t>종합 가치 제안</a:t>
+            </a:r>
+            <a:endParaRPr lang="en-US" sz="1050" dirty="0"/>
+          </a:p>
+        </p:txBody>
       </p:sp>
       <p:sp>
         <p:nvSpPr>
@@ -11650,8 +12658,8 @@
         </p:nvSpPr>
         <p:spPr>
           <a:xfrm>
-            <a:off x="795528" y="1618488"/>
-            <a:ext cx="4943704" cy="292608"/>
+            <a:off x="2423160" y="5010912"/>
+            <a:ext cx="8954719" cy="658368"/>
           </a:xfrm>
           <a:prstGeom prst="rect">
             <a:avLst/>
@@ -11664,93 +12672,10 @@
           <a:lstStyle/>
           <a:p>
             <a:pPr indent="0" marL="0">
-              <a:buNone/>
-            </a:pPr>
-            <a:r>
-              <a:rPr lang="en-US" sz="1350" b="1" dirty="0">
-                <a:solidFill>
-                  <a:srgbClr val="977024"/>
-                </a:solidFill>
-                <a:latin typeface="Pretendard" pitchFamily="34" charset="0"/>
-                <a:ea typeface="Pretendard" pitchFamily="34" charset="-122"/>
-                <a:cs typeface="Pretendard" pitchFamily="34" charset="-120"/>
-              </a:rPr>
-              <a:t>메디컬 단일업종 집중</a:t>
-            </a:r>
-            <a:endParaRPr lang="en-US" sz="1350" dirty="0"/>
-          </a:p>
-        </p:txBody>
-      </p:sp>
-      <p:sp>
-        <p:nvSpPr>
-          <p:cNvPr id="9" name="Text 7"/>
-          <p:cNvSpPr/>
-          <p:nvPr/>
-        </p:nvSpPr>
-        <p:spPr>
-          <a:xfrm>
-            <a:off x="795528" y="1947672"/>
-            <a:ext cx="4943704" cy="365760"/>
-          </a:xfrm>
-          <a:prstGeom prst="rect">
-            <a:avLst/>
-          </a:prstGeom>
-          <a:noFill/>
-          <a:ln/>
-        </p:spPr>
-        <p:txBody>
-          <a:bodyPr wrap="square" lIns="0" tIns="0" rIns="0" bIns="0" rtlCol="0" anchor="ctr">
-            <a:normAutofit/>
-          </a:bodyPr>
-          <a:lstStyle/>
-          <a:p>
-            <a:pPr indent="0" marL="0">
-              <a:buNone/>
-            </a:pPr>
-            <a:r>
-              <a:rPr lang="en-US" sz="1250" b="1" dirty="0">
-                <a:solidFill>
-                  <a:srgbClr val="10161F"/>
-                </a:solidFill>
-                <a:latin typeface="Pretendard" pitchFamily="34" charset="0"/>
-                <a:ea typeface="Pretendard" pitchFamily="34" charset="-122"/>
-                <a:cs typeface="Pretendard" pitchFamily="34" charset="-120"/>
-              </a:rPr>
-              <a:t>전층 의료</a:t>
-            </a:r>
-            <a:endParaRPr lang="en-US" sz="1250" dirty="0"/>
-          </a:p>
-        </p:txBody>
-      </p:sp>
-      <p:sp>
-        <p:nvSpPr>
-          <p:cNvPr id="10" name="Text 8"/>
-          <p:cNvSpPr/>
-          <p:nvPr/>
-        </p:nvSpPr>
-        <p:spPr>
-          <a:xfrm>
-            <a:off x="795528" y="2377440"/>
-            <a:ext cx="4943704" cy="2606040"/>
-          </a:xfrm>
-          <a:prstGeom prst="rect">
-            <a:avLst/>
-          </a:prstGeom>
-          <a:noFill/>
-          <a:ln/>
-        </p:spPr>
-        <p:txBody>
-          <a:bodyPr wrap="square" lIns="0" tIns="0" rIns="0" bIns="0" rtlCol="0" anchor="t">
-            <a:normAutofit/>
-          </a:bodyPr>
-          <a:lstStyle/>
-          <a:p>
-            <a:pPr marL="342900" indent="-342900">
               <a:lnSpc>
                 <a:spcPct val="125000"/>
               </a:lnSpc>
-              <a:buSzPct val="100000"/>
-              <a:buChar char="•"/>
+              <a:buNone/>
             </a:pPr>
             <a:r>
               <a:rPr lang="en-US" sz="1100" dirty="0">
@@ -11761,7 +12686,7 @@
                 <a:ea typeface="Pretendard" pitchFamily="34" charset="-122"/>
                 <a:cs typeface="Pretendard" pitchFamily="34" charset="-120"/>
               </a:rPr>
-              <a:t>업종 다각화 검토</a:t>
+              <a:t>관점에서 안정적 월 임대수익과 우량 메디컬 테넌트를 보유한 핵심 투자 자산입니다.</a:t>
             </a:r>
             <a:endParaRPr lang="en-US" sz="1100" dirty="0"/>
           </a:p>
@@ -11769,61 +12694,14 @@
       </p:sp>
       <p:sp>
         <p:nvSpPr>
-          <p:cNvPr id="11" name="Shape 9"/>
-          <p:cNvSpPr/>
-          <p:nvPr/>
-        </p:nvSpPr>
-        <p:spPr>
-          <a:xfrm>
-            <a:off x="6223864" y="1417320"/>
-            <a:ext cx="5400904" cy="3657600"/>
-          </a:xfrm>
-          <a:prstGeom prst="roundRect">
-            <a:avLst>
-              <a:gd name="adj" fmla="val 1500"/>
-            </a:avLst>
-          </a:prstGeom>
-          <a:solidFill>
-            <a:srgbClr val="F7FAFC"/>
-          </a:solidFill>
-          <a:ln w="6350">
-            <a:solidFill>
-              <a:srgbClr val="CBD5E0"/>
-            </a:solidFill>
-            <a:prstDash val="solid"/>
-          </a:ln>
-        </p:spPr>
-      </p:sp>
-      <p:sp>
-        <p:nvSpPr>
-          <p:cNvPr id="12" name="Shape 10"/>
-          <p:cNvSpPr/>
-          <p:nvPr/>
-        </p:nvSpPr>
-        <p:spPr>
-          <a:xfrm>
-            <a:off x="6223864" y="1417320"/>
-            <a:ext cx="5400904" cy="45720"/>
-          </a:xfrm>
-          <a:prstGeom prst="rect">
-            <a:avLst/>
-          </a:prstGeom>
-          <a:solidFill>
-            <a:srgbClr val="B98A2E"/>
-          </a:solidFill>
-          <a:ln/>
-        </p:spPr>
-      </p:sp>
-      <p:sp>
-        <p:nvSpPr>
-          <p:cNvPr id="13" name="Text 11"/>
-          <p:cNvSpPr/>
-          <p:nvPr/>
-        </p:nvSpPr>
-        <p:spPr>
-          <a:xfrm>
-            <a:off x="6452464" y="1618488"/>
-            <a:ext cx="4943704" cy="292608"/>
+          <p:cNvPr id="9" name="Text 7"/>
+          <p:cNvSpPr/>
+          <p:nvPr/>
+        </p:nvSpPr>
+        <p:spPr>
+          <a:xfrm>
+            <a:off x="502920" y="6382512"/>
+            <a:ext cx="7315200" cy="219456"/>
           </a:xfrm>
           <a:prstGeom prst="rect">
             <a:avLst/>
@@ -11839,197 +12717,6 @@
               <a:buNone/>
             </a:pPr>
             <a:r>
-              <a:rPr lang="en-US" sz="1350" b="1" dirty="0">
-                <a:solidFill>
-                  <a:srgbClr val="977024"/>
-                </a:solidFill>
-                <a:latin typeface="Pretendard" pitchFamily="34" charset="0"/>
-                <a:ea typeface="Pretendard" pitchFamily="34" charset="-122"/>
-                <a:cs typeface="Pretendard" pitchFamily="34" charset="-120"/>
-              </a:rPr>
-              <a:t>금리 변동</a:t>
-            </a:r>
-            <a:endParaRPr lang="en-US" sz="1350" dirty="0"/>
-          </a:p>
-        </p:txBody>
-      </p:sp>
-      <p:sp>
-        <p:nvSpPr>
-          <p:cNvPr id="14" name="Text 12"/>
-          <p:cNvSpPr/>
-          <p:nvPr/>
-        </p:nvSpPr>
-        <p:spPr>
-          <a:xfrm>
-            <a:off x="6452464" y="1947672"/>
-            <a:ext cx="4943704" cy="365760"/>
-          </a:xfrm>
-          <a:prstGeom prst="rect">
-            <a:avLst/>
-          </a:prstGeom>
-          <a:noFill/>
-          <a:ln/>
-        </p:spPr>
-        <p:txBody>
-          <a:bodyPr wrap="square" lIns="0" tIns="0" rIns="0" bIns="0" rtlCol="0" anchor="ctr">
-            <a:normAutofit/>
-          </a:bodyPr>
-          <a:lstStyle/>
-          <a:p>
-            <a:pPr indent="0" marL="0">
-              <a:buNone/>
-            </a:pPr>
-            <a:r>
-              <a:rPr lang="en-US" sz="1250" b="1" dirty="0">
-                <a:solidFill>
-                  <a:srgbClr val="10161F"/>
-                </a:solidFill>
-                <a:latin typeface="Pretendard" pitchFamily="34" charset="0"/>
-                <a:ea typeface="Pretendard" pitchFamily="34" charset="-122"/>
-                <a:cs typeface="Pretendard" pitchFamily="34" charset="-120"/>
-              </a:rPr>
-              <a:t>4.1% 고정</a:t>
-            </a:r>
-            <a:endParaRPr lang="en-US" sz="1250" dirty="0"/>
-          </a:p>
-        </p:txBody>
-      </p:sp>
-      <p:sp>
-        <p:nvSpPr>
-          <p:cNvPr id="15" name="Text 13"/>
-          <p:cNvSpPr/>
-          <p:nvPr/>
-        </p:nvSpPr>
-        <p:spPr>
-          <a:xfrm>
-            <a:off x="6452464" y="2377440"/>
-            <a:ext cx="4943704" cy="2606040"/>
-          </a:xfrm>
-          <a:prstGeom prst="rect">
-            <a:avLst/>
-          </a:prstGeom>
-          <a:noFill/>
-          <a:ln/>
-        </p:spPr>
-        <p:txBody>
-          <a:bodyPr wrap="square" lIns="0" tIns="0" rIns="0" bIns="0" rtlCol="0" anchor="t">
-            <a:normAutofit/>
-          </a:bodyPr>
-          <a:lstStyle/>
-          <a:p>
-            <a:pPr marL="342900" indent="-342900">
-              <a:lnSpc>
-                <a:spcPct val="125000"/>
-              </a:lnSpc>
-              <a:buSzPct val="100000"/>
-              <a:buChar char="•"/>
-            </a:pPr>
-            <a:r>
-              <a:rPr lang="en-US" sz="1100" dirty="0">
-                <a:solidFill>
-                  <a:srgbClr val="10161F"/>
-                </a:solidFill>
-                <a:latin typeface="Pretendard" pitchFamily="34" charset="0"/>
-                <a:ea typeface="Pretendard" pitchFamily="34" charset="-122"/>
-                <a:cs typeface="Pretendard" pitchFamily="34" charset="-120"/>
-              </a:rPr>
-              <a:t>승계 대출 활용</a:t>
-            </a:r>
-            <a:endParaRPr lang="en-US" sz="1100" dirty="0"/>
-          </a:p>
-        </p:txBody>
-      </p:sp>
-      <p:sp>
-        <p:nvSpPr>
-          <p:cNvPr id="16" name="Shape 14"/>
-          <p:cNvSpPr/>
-          <p:nvPr/>
-        </p:nvSpPr>
-        <p:spPr>
-          <a:xfrm>
-            <a:off x="566928" y="5193792"/>
-            <a:ext cx="11057839" cy="621792"/>
-          </a:xfrm>
-          <a:prstGeom prst="roundRect">
-            <a:avLst>
-              <a:gd name="adj" fmla="val 8824"/>
-            </a:avLst>
-          </a:prstGeom>
-          <a:solidFill>
-            <a:srgbClr val="F7FAFC"/>
-          </a:solidFill>
-          <a:ln w="6350">
-            <a:solidFill>
-              <a:srgbClr val="CBD5E0"/>
-            </a:solidFill>
-            <a:prstDash val="solid"/>
-          </a:ln>
-        </p:spPr>
-      </p:sp>
-      <p:sp>
-        <p:nvSpPr>
-          <p:cNvPr id="17" name="Text 15"/>
-          <p:cNvSpPr/>
-          <p:nvPr/>
-        </p:nvSpPr>
-        <p:spPr>
-          <a:xfrm>
-            <a:off x="795528" y="5193792"/>
-            <a:ext cx="10600639" cy="621792"/>
-          </a:xfrm>
-          <a:prstGeom prst="rect">
-            <a:avLst/>
-          </a:prstGeom>
-          <a:noFill/>
-          <a:ln/>
-        </p:spPr>
-        <p:txBody>
-          <a:bodyPr wrap="square" lIns="0" tIns="0" rIns="0" bIns="0" rtlCol="0" anchor="ctr"/>
-          <a:lstStyle/>
-          <a:p>
-            <a:pPr indent="0" marL="0">
-              <a:buNone/>
-            </a:pPr>
-            <a:r>
-              <a:rPr lang="en-US" sz="1100" dirty="0">
-                <a:solidFill>
-                  <a:srgbClr val="10161F"/>
-                </a:solidFill>
-                <a:latin typeface="Pretendard" pitchFamily="34" charset="0"/>
-                <a:ea typeface="Pretendard" pitchFamily="34" charset="-122"/>
-                <a:cs typeface="Pretendard" pitchFamily="34" charset="-120"/>
-              </a:rPr>
-              <a:t>※ 본 리스크 체크는 공부 및 브로커 확인 기반이며, 매수 전 전문 실사팀(변호사/건축사)을 통한 정밀 실사가 필요합니다.</a:t>
-            </a:r>
-            <a:endParaRPr lang="en-US" sz="1100" dirty="0"/>
-          </a:p>
-        </p:txBody>
-      </p:sp>
-      <p:sp>
-        <p:nvSpPr>
-          <p:cNvPr id="18" name="Text 16"/>
-          <p:cNvSpPr/>
-          <p:nvPr/>
-        </p:nvSpPr>
-        <p:spPr>
-          <a:xfrm>
-            <a:off x="566928" y="6382512"/>
-            <a:ext cx="7315200" cy="219456"/>
-          </a:xfrm>
-          <a:prstGeom prst="rect">
-            <a:avLst/>
-          </a:prstGeom>
-          <a:noFill/>
-          <a:ln/>
-        </p:spPr>
-        <p:txBody>
-          <a:bodyPr wrap="square" lIns="0" tIns="0" rIns="0" bIns="0" rtlCol="0" anchor="ctr"/>
-          <a:lstStyle/>
-          <a:p>
-            <a:pPr indent="0" marL="0">
-              <a:buNone/>
-            </a:pPr>
-            <a:r>
               <a:rPr lang="en-US" sz="800" dirty="0">
                 <a:solidFill>
                   <a:srgbClr val="718096"/>
@@ -12046,13 +12733,13 @@
       </p:sp>
       <p:sp>
         <p:nvSpPr>
-          <p:cNvPr id="19" name="Text 17"/>
-          <p:cNvSpPr/>
-          <p:nvPr/>
-        </p:nvSpPr>
-        <p:spPr>
-          <a:xfrm>
-            <a:off x="10710367" y="6382512"/>
+          <p:cNvPr id="10" name="Text 8"/>
+          <p:cNvSpPr/>
+          <p:nvPr/>
+        </p:nvSpPr>
+        <p:spPr>
+          <a:xfrm>
+            <a:off x="10774375" y="6382512"/>
             <a:ext cx="914400" cy="219456"/>
           </a:xfrm>
           <a:prstGeom prst="rect">

--- a/docs/test/stress/e2e-outputs/income_pro_gradeC_pr07.pptx
+++ b/docs/test/stress/e2e-outputs/income_pro_gradeC_pr07.pptx
@@ -2226,7 +2226,7 @@
         <p:spPr>
           <a:xfrm>
             <a:off x="502920" y="3090672"/>
-            <a:ext cx="7315200" cy="365760"/>
+            <a:ext cx="7315200" cy="329184"/>
           </a:xfrm>
           <a:prstGeom prst="rect">
             <a:avLst/>
@@ -2264,7 +2264,7 @@
         </p:nvSpPr>
         <p:spPr>
           <a:xfrm>
-            <a:off x="502920" y="3685032"/>
+            <a:off x="502920" y="3639312"/>
             <a:ext cx="1097280" cy="292608"/>
           </a:xfrm>
           <a:prstGeom prst="roundRect">
@@ -2286,7 +2286,7 @@
         </p:nvSpPr>
         <p:spPr>
           <a:xfrm>
-            <a:off x="502920" y="3685032"/>
+            <a:off x="502920" y="3639312"/>
             <a:ext cx="1097280" cy="292608"/>
           </a:xfrm>
           <a:prstGeom prst="rect">
@@ -2325,7 +2325,7 @@
         </p:nvSpPr>
         <p:spPr>
           <a:xfrm>
-            <a:off x="1691640" y="3685032"/>
+            <a:off x="1691640" y="3639312"/>
             <a:ext cx="1005840" cy="292608"/>
           </a:xfrm>
           <a:prstGeom prst="roundRect">
@@ -2347,7 +2347,7 @@
         </p:nvSpPr>
         <p:spPr>
           <a:xfrm>
-            <a:off x="1691640" y="3685032"/>
+            <a:off x="1691640" y="3639312"/>
             <a:ext cx="1005840" cy="292608"/>
           </a:xfrm>
           <a:prstGeom prst="rect">
@@ -2386,7 +2386,7 @@
         </p:nvSpPr>
         <p:spPr>
           <a:xfrm>
-            <a:off x="502920" y="4187952"/>
+            <a:off x="502920" y="4078224"/>
             <a:ext cx="6858000" cy="1051560"/>
           </a:xfrm>
           <a:prstGeom prst="roundRect">
@@ -2413,7 +2413,7 @@
         </p:nvSpPr>
         <p:spPr>
           <a:xfrm>
-            <a:off x="758952" y="4297680"/>
+            <a:off x="758952" y="4187952"/>
             <a:ext cx="6345936" cy="832104"/>
           </a:xfrm>
           <a:prstGeom prst="rect">
@@ -2505,7 +2505,7 @@
                 <a:ea typeface="Pretendard" pitchFamily="34" charset="-122"/>
                 <a:cs typeface="Pretendard" pitchFamily="34" charset="-120"/>
               </a:rPr>
-              <a:t>크리딜   |   </a:t>
+              <a:t>크리딜</a:t>
             </a:r>
             <a:endParaRPr lang="en-US" sz="800" dirty="0"/>
           </a:p>
@@ -3162,7 +3162,7 @@
                 <a:ea typeface="Pretendard" pitchFamily="34" charset="-122"/>
                 <a:cs typeface="Pretendard" pitchFamily="34" charset="-120"/>
               </a:rPr>
-              <a:t>크리딜   |   </a:t>
+              <a:t>크리딜</a:t>
             </a:r>
             <a:endParaRPr lang="en-US" sz="800" dirty="0"/>
           </a:p>
@@ -3424,7 +3424,7 @@
         <p:spPr>
           <a:xfrm>
             <a:off x="502920" y="1719072"/>
-            <a:ext cx="5368900" cy="868680"/>
+            <a:ext cx="5368900" cy="749808"/>
           </a:xfrm>
           <a:prstGeom prst="rect">
             <a:avLst/>
@@ -3448,8 +3448,8 @@
         </p:nvSpPr>
         <p:spPr>
           <a:xfrm>
-            <a:off x="640080" y="1883664"/>
-            <a:ext cx="320040" cy="320040"/>
+            <a:off x="640080" y="1947672"/>
+            <a:ext cx="292608" cy="292608"/>
           </a:xfrm>
           <a:prstGeom prst="rect">
             <a:avLst/>
@@ -3468,8 +3468,8 @@
         </p:nvSpPr>
         <p:spPr>
           <a:xfrm>
-            <a:off x="640080" y="1883664"/>
-            <a:ext cx="320040" cy="320040"/>
+            <a:off x="640080" y="1947672"/>
+            <a:ext cx="292608" cy="292608"/>
           </a:xfrm>
           <a:prstGeom prst="rect">
             <a:avLst/>
@@ -3485,7 +3485,7 @@
               <a:buNone/>
             </a:pPr>
             <a:r>
-              <a:rPr lang="en-US" sz="1100" b="1" dirty="0">
+              <a:rPr lang="en-US" sz="1050" b="1" dirty="0">
                 <a:solidFill>
                   <a:srgbClr val="FFFFFF"/>
                 </a:solidFill>
@@ -3495,7 +3495,7 @@
               </a:rPr>
               <a:t>✓</a:t>
             </a:r>
-            <a:endParaRPr lang="en-US" sz="1100" dirty="0"/>
+            <a:endParaRPr lang="en-US" sz="1050" dirty="0"/>
           </a:p>
         </p:txBody>
       </p:sp>
@@ -3507,8 +3507,8 @@
         </p:nvSpPr>
         <p:spPr>
           <a:xfrm>
-            <a:off x="1051560" y="1810512"/>
-            <a:ext cx="4683100" cy="722376"/>
+            <a:off x="1033272" y="1792224"/>
+            <a:ext cx="4710532" cy="603504"/>
           </a:xfrm>
           <a:prstGeom prst="rect">
             <a:avLst/>
@@ -3549,8 +3549,8 @@
         </p:nvSpPr>
         <p:spPr>
           <a:xfrm>
-            <a:off x="502920" y="2715768"/>
-            <a:ext cx="5368900" cy="868680"/>
+            <a:off x="502920" y="2542032"/>
+            <a:ext cx="5368900" cy="749808"/>
           </a:xfrm>
           <a:prstGeom prst="rect">
             <a:avLst/>
@@ -3574,8 +3574,8 @@
         </p:nvSpPr>
         <p:spPr>
           <a:xfrm>
-            <a:off x="640080" y="2880360"/>
-            <a:ext cx="320040" cy="320040"/>
+            <a:off x="640080" y="2770632"/>
+            <a:ext cx="292608" cy="292608"/>
           </a:xfrm>
           <a:prstGeom prst="rect">
             <a:avLst/>
@@ -3594,8 +3594,8 @@
         </p:nvSpPr>
         <p:spPr>
           <a:xfrm>
-            <a:off x="640080" y="2880360"/>
-            <a:ext cx="320040" cy="320040"/>
+            <a:off x="640080" y="2770632"/>
+            <a:ext cx="292608" cy="292608"/>
           </a:xfrm>
           <a:prstGeom prst="rect">
             <a:avLst/>
@@ -3611,7 +3611,7 @@
               <a:buNone/>
             </a:pPr>
             <a:r>
-              <a:rPr lang="en-US" sz="1100" b="1" dirty="0">
+              <a:rPr lang="en-US" sz="1050" b="1" dirty="0">
                 <a:solidFill>
                   <a:srgbClr val="FFFFFF"/>
                 </a:solidFill>
@@ -3621,7 +3621,7 @@
               </a:rPr>
               <a:t>✓</a:t>
             </a:r>
-            <a:endParaRPr lang="en-US" sz="1100" dirty="0"/>
+            <a:endParaRPr lang="en-US" sz="1050" dirty="0"/>
           </a:p>
         </p:txBody>
       </p:sp>
@@ -3633,8 +3633,8 @@
         </p:nvSpPr>
         <p:spPr>
           <a:xfrm>
-            <a:off x="1051560" y="2807208"/>
-            <a:ext cx="4683100" cy="722376"/>
+            <a:off x="1033272" y="2615184"/>
+            <a:ext cx="4710532" cy="603504"/>
           </a:xfrm>
           <a:prstGeom prst="rect">
             <a:avLst/>
@@ -3675,8 +3675,8 @@
         </p:nvSpPr>
         <p:spPr>
           <a:xfrm>
-            <a:off x="502920" y="3712464"/>
-            <a:ext cx="5368900" cy="868680"/>
+            <a:off x="502920" y="3364992"/>
+            <a:ext cx="5368900" cy="749808"/>
           </a:xfrm>
           <a:prstGeom prst="rect">
             <a:avLst/>
@@ -3700,8 +3700,8 @@
         </p:nvSpPr>
         <p:spPr>
           <a:xfrm>
-            <a:off x="640080" y="3877056"/>
-            <a:ext cx="320040" cy="320040"/>
+            <a:off x="640080" y="3593592"/>
+            <a:ext cx="292608" cy="292608"/>
           </a:xfrm>
           <a:prstGeom prst="rect">
             <a:avLst/>
@@ -3720,8 +3720,8 @@
         </p:nvSpPr>
         <p:spPr>
           <a:xfrm>
-            <a:off x="640080" y="3877056"/>
-            <a:ext cx="320040" cy="320040"/>
+            <a:off x="640080" y="3593592"/>
+            <a:ext cx="292608" cy="292608"/>
           </a:xfrm>
           <a:prstGeom prst="rect">
             <a:avLst/>
@@ -3737,7 +3737,7 @@
               <a:buNone/>
             </a:pPr>
             <a:r>
-              <a:rPr lang="en-US" sz="1100" b="1" dirty="0">
+              <a:rPr lang="en-US" sz="1050" b="1" dirty="0">
                 <a:solidFill>
                   <a:srgbClr val="FFFFFF"/>
                 </a:solidFill>
@@ -3747,7 +3747,7 @@
               </a:rPr>
               <a:t>✓</a:t>
             </a:r>
-            <a:endParaRPr lang="en-US" sz="1100" dirty="0"/>
+            <a:endParaRPr lang="en-US" sz="1050" dirty="0"/>
           </a:p>
         </p:txBody>
       </p:sp>
@@ -3759,8 +3759,8 @@
         </p:nvSpPr>
         <p:spPr>
           <a:xfrm>
-            <a:off x="1051560" y="3803904"/>
-            <a:ext cx="4683100" cy="722376"/>
+            <a:off x="1033272" y="3438144"/>
+            <a:ext cx="4710532" cy="603504"/>
           </a:xfrm>
           <a:prstGeom prst="rect">
             <a:avLst/>
@@ -3802,7 +3802,7 @@
         <p:spPr>
           <a:xfrm>
             <a:off x="6191860" y="1719072"/>
-            <a:ext cx="5368900" cy="868680"/>
+            <a:ext cx="5368900" cy="749808"/>
           </a:xfrm>
           <a:prstGeom prst="rect">
             <a:avLst/>
@@ -3826,8 +3826,8 @@
         </p:nvSpPr>
         <p:spPr>
           <a:xfrm>
-            <a:off x="6329020" y="1883664"/>
-            <a:ext cx="320040" cy="320040"/>
+            <a:off x="6329020" y="1947672"/>
+            <a:ext cx="292608" cy="292608"/>
           </a:xfrm>
           <a:prstGeom prst="rect">
             <a:avLst/>
@@ -3846,8 +3846,8 @@
         </p:nvSpPr>
         <p:spPr>
           <a:xfrm>
-            <a:off x="6329020" y="1883664"/>
-            <a:ext cx="320040" cy="320040"/>
+            <a:off x="6329020" y="1947672"/>
+            <a:ext cx="292608" cy="292608"/>
           </a:xfrm>
           <a:prstGeom prst="rect">
             <a:avLst/>
@@ -3863,7 +3863,7 @@
               <a:buNone/>
             </a:pPr>
             <a:r>
-              <a:rPr lang="en-US" sz="1100" b="1" dirty="0">
+              <a:rPr lang="en-US" sz="1050" b="1" dirty="0">
                 <a:solidFill>
                   <a:srgbClr val="FFFFFF"/>
                 </a:solidFill>
@@ -3873,7 +3873,7 @@
               </a:rPr>
               <a:t>✓</a:t>
             </a:r>
-            <a:endParaRPr lang="en-US" sz="1100" dirty="0"/>
+            <a:endParaRPr lang="en-US" sz="1050" dirty="0"/>
           </a:p>
         </p:txBody>
       </p:sp>
@@ -3885,8 +3885,8 @@
         </p:nvSpPr>
         <p:spPr>
           <a:xfrm>
-            <a:off x="6740500" y="1810512"/>
-            <a:ext cx="4683100" cy="722376"/>
+            <a:off x="6722212" y="1792224"/>
+            <a:ext cx="4710532" cy="603504"/>
           </a:xfrm>
           <a:prstGeom prst="rect">
             <a:avLst/>
@@ -3927,8 +3927,8 @@
         </p:nvSpPr>
         <p:spPr>
           <a:xfrm>
-            <a:off x="6191860" y="2715768"/>
-            <a:ext cx="5368900" cy="868680"/>
+            <a:off x="6191860" y="2542032"/>
+            <a:ext cx="5368900" cy="749808"/>
           </a:xfrm>
           <a:prstGeom prst="rect">
             <a:avLst/>
@@ -3952,8 +3952,8 @@
         </p:nvSpPr>
         <p:spPr>
           <a:xfrm>
-            <a:off x="6329020" y="2880360"/>
-            <a:ext cx="320040" cy="320040"/>
+            <a:off x="6329020" y="2770632"/>
+            <a:ext cx="292608" cy="292608"/>
           </a:xfrm>
           <a:prstGeom prst="rect">
             <a:avLst/>
@@ -3972,8 +3972,8 @@
         </p:nvSpPr>
         <p:spPr>
           <a:xfrm>
-            <a:off x="6329020" y="2880360"/>
-            <a:ext cx="320040" cy="320040"/>
+            <a:off x="6329020" y="2770632"/>
+            <a:ext cx="292608" cy="292608"/>
           </a:xfrm>
           <a:prstGeom prst="rect">
             <a:avLst/>
@@ -3989,7 +3989,7 @@
               <a:buNone/>
             </a:pPr>
             <a:r>
-              <a:rPr lang="en-US" sz="1100" b="1" dirty="0">
+              <a:rPr lang="en-US" sz="1050" b="1" dirty="0">
                 <a:solidFill>
                   <a:srgbClr val="FFFFFF"/>
                 </a:solidFill>
@@ -3999,7 +3999,7 @@
               </a:rPr>
               <a:t>✓</a:t>
             </a:r>
-            <a:endParaRPr lang="en-US" sz="1100" dirty="0"/>
+            <a:endParaRPr lang="en-US" sz="1050" dirty="0"/>
           </a:p>
         </p:txBody>
       </p:sp>
@@ -4011,8 +4011,8 @@
         </p:nvSpPr>
         <p:spPr>
           <a:xfrm>
-            <a:off x="6740500" y="2807208"/>
-            <a:ext cx="4683100" cy="722376"/>
+            <a:off x="6722212" y="2615184"/>
+            <a:ext cx="4710532" cy="603504"/>
           </a:xfrm>
           <a:prstGeom prst="rect">
             <a:avLst/>
@@ -4053,8 +4053,8 @@
         </p:nvSpPr>
         <p:spPr>
           <a:xfrm>
-            <a:off x="6191860" y="3712464"/>
-            <a:ext cx="5368900" cy="868680"/>
+            <a:off x="6191860" y="3364992"/>
+            <a:ext cx="5368900" cy="749808"/>
           </a:xfrm>
           <a:prstGeom prst="rect">
             <a:avLst/>
@@ -4078,8 +4078,8 @@
         </p:nvSpPr>
         <p:spPr>
           <a:xfrm>
-            <a:off x="6329020" y="3877056"/>
-            <a:ext cx="320040" cy="320040"/>
+            <a:off x="6329020" y="3593592"/>
+            <a:ext cx="292608" cy="292608"/>
           </a:xfrm>
           <a:prstGeom prst="rect">
             <a:avLst/>
@@ -4098,8 +4098,8 @@
         </p:nvSpPr>
         <p:spPr>
           <a:xfrm>
-            <a:off x="6329020" y="3877056"/>
-            <a:ext cx="320040" cy="320040"/>
+            <a:off x="6329020" y="3593592"/>
+            <a:ext cx="292608" cy="292608"/>
           </a:xfrm>
           <a:prstGeom prst="rect">
             <a:avLst/>
@@ -4115,7 +4115,7 @@
               <a:buNone/>
             </a:pPr>
             <a:r>
-              <a:rPr lang="en-US" sz="1100" b="1" dirty="0">
+              <a:rPr lang="en-US" sz="1050" b="1" dirty="0">
                 <a:solidFill>
                   <a:srgbClr val="FFFFFF"/>
                 </a:solidFill>
@@ -4125,7 +4125,7 @@
               </a:rPr>
               <a:t>✓</a:t>
             </a:r>
-            <a:endParaRPr lang="en-US" sz="1100" dirty="0"/>
+            <a:endParaRPr lang="en-US" sz="1050" dirty="0"/>
           </a:p>
         </p:txBody>
       </p:sp>
@@ -4137,8 +4137,8 @@
         </p:nvSpPr>
         <p:spPr>
           <a:xfrm>
-            <a:off x="6740500" y="3803904"/>
-            <a:ext cx="4683100" cy="722376"/>
+            <a:off x="6722212" y="3438144"/>
+            <a:ext cx="4710532" cy="603504"/>
           </a:xfrm>
           <a:prstGeom prst="rect">
             <a:avLst/>
@@ -4263,7 +4263,7 @@
                 <a:ea typeface="Pretendard" pitchFamily="34" charset="-122"/>
                 <a:cs typeface="Pretendard" pitchFamily="34" charset="-120"/>
               </a:rPr>
-              <a:t>크리딜   |   </a:t>
+              <a:t>크리딜</a:t>
             </a:r>
             <a:endParaRPr lang="en-US" sz="800" dirty="0"/>
           </a:p>
@@ -4691,7 +4691,7 @@
                 <a:ea typeface="Pretendard" pitchFamily="34" charset="-122"/>
                 <a:cs typeface="Pretendard" pitchFamily="34" charset="-120"/>
               </a:rPr>
-              <a:t>크리딜   |   </a:t>
+              <a:t>크리딜</a:t>
             </a:r>
             <a:endParaRPr lang="en-US" sz="800" dirty="0"/>
           </a:p>
@@ -6194,7 +6194,7 @@
                 <a:ea typeface="Pretendard" pitchFamily="34" charset="-122"/>
                 <a:cs typeface="Pretendard" pitchFamily="34" charset="-120"/>
               </a:rPr>
-              <a:t>크리딜   |   </a:t>
+              <a:t>크리딜</a:t>
             </a:r>
             <a:endParaRPr lang="en-US" sz="800" dirty="0"/>
           </a:p>
@@ -6560,10 +6560,13 @@
           <a:lstStyle/>
           <a:p>
             <a:pPr indent="0" marL="0">
-              <a:buNone/>
-            </a:pPr>
-            <a:r>
-              <a:rPr lang="en-US" sz="1700" b="1" dirty="0">
+              <a:lnSpc>
+                <a:spcPct val="100000"/>
+              </a:lnSpc>
+              <a:buNone/>
+            </a:pPr>
+            <a:r>
+              <a:rPr lang="en-US" sz="2200" b="1" dirty="0">
                 <a:solidFill>
                   <a:srgbClr val="10161F"/>
                 </a:solidFill>
@@ -6573,7 +6576,7 @@
               </a:rPr>
               <a:t>-</a:t>
             </a:r>
-            <a:endParaRPr lang="en-US" sz="1700" dirty="0"/>
+            <a:endParaRPr lang="en-US" sz="2200" dirty="0"/>
           </a:p>
         </p:txBody>
       </p:sp>
@@ -6667,10 +6670,13 @@
           <a:lstStyle/>
           <a:p>
             <a:pPr indent="0" marL="0">
-              <a:buNone/>
-            </a:pPr>
-            <a:r>
-              <a:rPr lang="en-US" sz="1700" b="1" dirty="0">
+              <a:lnSpc>
+                <a:spcPct val="100000"/>
+              </a:lnSpc>
+              <a:buNone/>
+            </a:pPr>
+            <a:r>
+              <a:rPr lang="en-US" sz="2200" b="1" dirty="0">
                 <a:solidFill>
                   <a:srgbClr val="10161F"/>
                 </a:solidFill>
@@ -6680,7 +6686,7 @@
               </a:rPr>
               <a:t>142.5평</a:t>
             </a:r>
-            <a:endParaRPr lang="en-US" sz="1700" dirty="0"/>
+            <a:endParaRPr lang="en-US" sz="2200" dirty="0"/>
           </a:p>
         </p:txBody>
       </p:sp>
@@ -6774,10 +6780,13 @@
           <a:lstStyle/>
           <a:p>
             <a:pPr indent="0" marL="0">
-              <a:buNone/>
-            </a:pPr>
-            <a:r>
-              <a:rPr lang="en-US" sz="1700" b="1" dirty="0">
+              <a:lnSpc>
+                <a:spcPct val="100000"/>
+              </a:lnSpc>
+              <a:buNone/>
+            </a:pPr>
+            <a:r>
+              <a:rPr lang="en-US" sz="2200" b="1" dirty="0">
                 <a:solidFill>
                   <a:srgbClr val="10161F"/>
                 </a:solidFill>
@@ -6787,7 +6796,7 @@
               </a:rPr>
               <a:t>620.8평</a:t>
             </a:r>
-            <a:endParaRPr lang="en-US" sz="1700" dirty="0"/>
+            <a:endParaRPr lang="en-US" sz="2200" dirty="0"/>
           </a:p>
         </p:txBody>
       </p:sp>
@@ -6881,10 +6890,13 @@
           <a:lstStyle/>
           <a:p>
             <a:pPr indent="0" marL="0">
-              <a:buNone/>
-            </a:pPr>
-            <a:r>
-              <a:rPr lang="en-US" sz="1700" b="1" dirty="0">
+              <a:lnSpc>
+                <a:spcPct val="100000"/>
+              </a:lnSpc>
+              <a:buNone/>
+            </a:pPr>
+            <a:r>
+              <a:rPr lang="en-US" sz="2200" b="1" dirty="0">
                 <a:solidFill>
                   <a:srgbClr val="10161F"/>
                 </a:solidFill>
@@ -6894,7 +6906,7 @@
               </a:rPr>
               <a:t>2017년</a:t>
             </a:r>
-            <a:endParaRPr lang="en-US" sz="1700" dirty="0"/>
+            <a:endParaRPr lang="en-US" sz="2200" dirty="0"/>
           </a:p>
         </p:txBody>
       </p:sp>
@@ -6950,7 +6962,7 @@
               <a:buNone/>
             </a:pPr>
             <a:r>
-              <a:rPr lang="en-US" sz="950" dirty="0">
+              <a:rPr lang="en-US" sz="850" dirty="0">
                 <a:solidFill>
                   <a:srgbClr val="718096"/>
                 </a:solidFill>
@@ -6960,7 +6972,7 @@
               </a:rPr>
               <a:t>서초 메디컬 빌딩은 지하2</a:t>
             </a:r>
-            <a:endParaRPr lang="en-US" sz="950" dirty="0"/>
+            <a:endParaRPr lang="en-US" sz="850" dirty="0"/>
           </a:p>
         </p:txBody>
       </p:sp>
@@ -6988,10 +7000,13 @@
           <a:lstStyle/>
           <a:p>
             <a:pPr indent="0" marL="0">
-              <a:buNone/>
-            </a:pPr>
-            <a:r>
-              <a:rPr lang="en-US" sz="1700" b="1" dirty="0">
+              <a:lnSpc>
+                <a:spcPct val="100000"/>
+              </a:lnSpc>
+              <a:buNone/>
+            </a:pPr>
+            <a:r>
+              <a:rPr lang="en-US" sz="2200" b="1" dirty="0">
                 <a:solidFill>
                   <a:srgbClr val="10161F"/>
                 </a:solidFill>
@@ -7001,7 +7016,7 @@
               </a:rPr>
               <a:t>2층</a:t>
             </a:r>
-            <a:endParaRPr lang="en-US" sz="1700" dirty="0"/>
+            <a:endParaRPr lang="en-US" sz="2200" dirty="0"/>
           </a:p>
         </p:txBody>
       </p:sp>
@@ -7057,7 +7072,7 @@
               <a:buNone/>
             </a:pPr>
             <a:r>
-              <a:rPr lang="en-US" sz="950" dirty="0">
+              <a:rPr lang="en-US" sz="850" dirty="0">
                 <a:solidFill>
                   <a:srgbClr val="718096"/>
                 </a:solidFill>
@@ -7067,7 +7082,7 @@
               </a:rPr>
               <a:t>연 수익률(Cap Rate)</a:t>
             </a:r>
-            <a:endParaRPr lang="en-US" sz="950" dirty="0"/>
+            <a:endParaRPr lang="en-US" sz="850" dirty="0"/>
           </a:p>
         </p:txBody>
       </p:sp>
@@ -7095,10 +7110,13 @@
           <a:lstStyle/>
           <a:p>
             <a:pPr indent="0" marL="0">
-              <a:buNone/>
-            </a:pPr>
-            <a:r>
-              <a:rPr lang="en-US" sz="1700" b="1" dirty="0">
+              <a:lnSpc>
+                <a:spcPct val="100000"/>
+              </a:lnSpc>
+              <a:buNone/>
+            </a:pPr>
+            <a:r>
+              <a:rPr lang="en-US" sz="2200" b="1" dirty="0">
                 <a:solidFill>
                   <a:srgbClr val="10161F"/>
                 </a:solidFill>
@@ -7108,7 +7126,7 @@
               </a:rPr>
               <a:t>-</a:t>
             </a:r>
-            <a:endParaRPr lang="en-US" sz="1700" dirty="0"/>
+            <a:endParaRPr lang="en-US" sz="2200" dirty="0"/>
           </a:p>
         </p:txBody>
       </p:sp>
@@ -7202,10 +7220,13 @@
           <a:lstStyle/>
           <a:p>
             <a:pPr indent="0" marL="0">
-              <a:buNone/>
-            </a:pPr>
-            <a:r>
-              <a:rPr lang="en-US" sz="1700" b="1" dirty="0">
+              <a:lnSpc>
+                <a:spcPct val="100000"/>
+              </a:lnSpc>
+              <a:buNone/>
+            </a:pPr>
+            <a:r>
+              <a:rPr lang="en-US" sz="2200" b="1" dirty="0">
                 <a:solidFill>
                   <a:srgbClr val="10161F"/>
                 </a:solidFill>
@@ -7215,7 +7236,7 @@
               </a:rPr>
               <a:t>-</a:t>
             </a:r>
-            <a:endParaRPr lang="en-US" sz="1700" dirty="0"/>
+            <a:endParaRPr lang="en-US" sz="2200" dirty="0"/>
           </a:p>
         </p:txBody>
       </p:sp>
@@ -7309,10 +7330,13 @@
           <a:lstStyle/>
           <a:p>
             <a:pPr indent="0" marL="0">
-              <a:buNone/>
-            </a:pPr>
-            <a:r>
-              <a:rPr lang="en-US" sz="1700" b="1" dirty="0">
+              <a:lnSpc>
+                <a:spcPct val="100000"/>
+              </a:lnSpc>
+              <a:buNone/>
+            </a:pPr>
+            <a:r>
+              <a:rPr lang="en-US" sz="2200" b="1" dirty="0">
                 <a:solidFill>
                   <a:srgbClr val="10161F"/>
                 </a:solidFill>
@@ -7322,7 +7346,7 @@
               </a:rPr>
               <a:t>확인 중</a:t>
             </a:r>
-            <a:endParaRPr lang="en-US" sz="1700" dirty="0"/>
+            <a:endParaRPr lang="en-US" sz="2200" dirty="0"/>
           </a:p>
         </p:txBody>
       </p:sp>
@@ -7794,7 +7818,7 @@
                 <a:ea typeface="Pretendard" pitchFamily="34" charset="-122"/>
                 <a:cs typeface="Pretendard" pitchFamily="34" charset="-120"/>
               </a:rPr>
-              <a:t>크리딜   |   </a:t>
+              <a:t>크리딜</a:t>
             </a:r>
             <a:endParaRPr lang="en-US" sz="800" dirty="0"/>
           </a:p>
@@ -8041,7 +8065,7 @@
         <p:spPr>
           <a:xfrm>
             <a:off x="5989320" y="1481328"/>
-            <a:ext cx="1560003" cy="493776"/>
+            <a:ext cx="1560003" cy="457200"/>
           </a:xfrm>
           <a:prstGeom prst="rect">
             <a:avLst/>
@@ -8060,7 +8084,7 @@
               <a:buNone/>
             </a:pPr>
             <a:r>
-              <a:rPr lang="en-US" sz="1300" dirty="0">
+              <a:rPr lang="en-US" sz="1250" dirty="0">
                 <a:solidFill>
                   <a:srgbClr val="718096"/>
                 </a:solidFill>
@@ -8070,7 +8094,7 @@
               </a:rPr>
               <a:t>대중교통</a:t>
             </a:r>
-            <a:endParaRPr lang="en-US" sz="1300" dirty="0"/>
+            <a:endParaRPr lang="en-US" sz="1250" dirty="0"/>
           </a:p>
         </p:txBody>
       </p:sp>
@@ -8083,7 +8107,7 @@
         <p:spPr>
           <a:xfrm>
             <a:off x="7549323" y="1481328"/>
-            <a:ext cx="4011436" cy="493776"/>
+            <a:ext cx="4011436" cy="457200"/>
           </a:xfrm>
           <a:prstGeom prst="rect">
             <a:avLst/>
@@ -8102,7 +8126,7 @@
               <a:buNone/>
             </a:pPr>
             <a:r>
-              <a:rPr lang="en-US" sz="1300" b="1" dirty="0">
+              <a:rPr lang="en-US" sz="1250" b="1" dirty="0">
                 <a:solidFill>
                   <a:srgbClr val="10161F"/>
                 </a:solidFill>
@@ -8110,9 +8134,9 @@
                 <a:ea typeface="Pretendard" pitchFamily="34" charset="-122"/>
                 <a:cs typeface="Pretendard" pitchFamily="34" charset="-120"/>
               </a:rPr>
-              <a:t>인접 지하철역 역세권 (상세 확인 필요)</a:t>
-            </a:r>
-            <a:endParaRPr lang="en-US" sz="1300" dirty="0"/>
+              <a:t>지하철 및 간선버스 인접</a:t>
+            </a:r>
+            <a:endParaRPr lang="en-US" sz="1250" dirty="0"/>
           </a:p>
         </p:txBody>
       </p:sp>
@@ -8124,7 +8148,7 @@
         </p:nvSpPr>
         <p:spPr>
           <a:xfrm>
-            <a:off x="5989320" y="1975104"/>
+            <a:off x="5989320" y="1938528"/>
             <a:ext cx="5571439" cy="0"/>
           </a:xfrm>
           <a:prstGeom prst="line">
@@ -8147,8 +8171,8 @@
         </p:nvSpPr>
         <p:spPr>
           <a:xfrm>
-            <a:off x="5989320" y="1975104"/>
-            <a:ext cx="1560003" cy="493776"/>
+            <a:off x="5989320" y="1938528"/>
+            <a:ext cx="1560003" cy="457200"/>
           </a:xfrm>
           <a:prstGeom prst="rect">
             <a:avLst/>
@@ -8167,7 +8191,7 @@
               <a:buNone/>
             </a:pPr>
             <a:r>
-              <a:rPr lang="en-US" sz="1300" dirty="0">
+              <a:rPr lang="en-US" sz="1250" dirty="0">
                 <a:solidFill>
                   <a:srgbClr val="718096"/>
                 </a:solidFill>
@@ -8177,7 +8201,7 @@
               </a:rPr>
               <a:t>상권권역</a:t>
             </a:r>
-            <a:endParaRPr lang="en-US" sz="1300" dirty="0"/>
+            <a:endParaRPr lang="en-US" sz="1250" dirty="0"/>
           </a:p>
         </p:txBody>
       </p:sp>
@@ -8189,8 +8213,8 @@
         </p:nvSpPr>
         <p:spPr>
           <a:xfrm>
-            <a:off x="7549323" y="1975104"/>
-            <a:ext cx="4011436" cy="493776"/>
+            <a:off x="7549323" y="1938528"/>
+            <a:ext cx="4011436" cy="457200"/>
           </a:xfrm>
           <a:prstGeom prst="rect">
             <a:avLst/>
@@ -8209,7 +8233,7 @@
               <a:buNone/>
             </a:pPr>
             <a:r>
-              <a:rPr lang="en-US" sz="1300" b="1" dirty="0">
+              <a:rPr lang="en-US" sz="1250" b="1" dirty="0">
                 <a:solidFill>
                   <a:srgbClr val="10161F"/>
                 </a:solidFill>
@@ -8219,7 +8243,7 @@
               </a:rPr>
               <a:t>서초권역 주요 상업·업무 권역</a:t>
             </a:r>
-            <a:endParaRPr lang="en-US" sz="1300" dirty="0"/>
+            <a:endParaRPr lang="en-US" sz="1250" dirty="0"/>
           </a:p>
         </p:txBody>
       </p:sp>
@@ -8231,7 +8255,7 @@
         </p:nvSpPr>
         <p:spPr>
           <a:xfrm>
-            <a:off x="5989320" y="2606040"/>
+            <a:off x="5989320" y="2505456"/>
             <a:ext cx="5571439" cy="658368"/>
           </a:xfrm>
           <a:prstGeom prst="roundRect">
@@ -8253,7 +8277,7 @@
         </p:nvSpPr>
         <p:spPr>
           <a:xfrm>
-            <a:off x="5989320" y="2660904"/>
+            <a:off x="5989320" y="2560320"/>
             <a:ext cx="36576" cy="548640"/>
           </a:xfrm>
           <a:prstGeom prst="rect">
@@ -8273,7 +8297,7 @@
         </p:nvSpPr>
         <p:spPr>
           <a:xfrm>
-            <a:off x="6135624" y="2697480"/>
+            <a:off x="6135624" y="2596896"/>
             <a:ext cx="5315407" cy="201168"/>
           </a:xfrm>
           <a:prstGeom prst="rect">
@@ -8312,7 +8336,7 @@
         </p:nvSpPr>
         <p:spPr>
           <a:xfrm>
-            <a:off x="6135624" y="2898648"/>
+            <a:off x="6135624" y="2798064"/>
             <a:ext cx="5315407" cy="329184"/>
           </a:xfrm>
           <a:prstGeom prst="rect">
@@ -8380,7 +8404,7 @@
                 <a:ea typeface="Pretendard" pitchFamily="34" charset="-122"/>
                 <a:cs typeface="Pretendard" pitchFamily="34" charset="-120"/>
               </a:rPr>
-              <a:t>크리딜   |   </a:t>
+              <a:t>크리딜</a:t>
             </a:r>
             <a:endParaRPr lang="en-US" sz="800" dirty="0"/>
           </a:p>
@@ -8642,7 +8666,7 @@
         <p:spPr>
           <a:xfrm>
             <a:off x="502920" y="1645920"/>
-            <a:ext cx="1920240" cy="420624"/>
+            <a:ext cx="1920240" cy="402336"/>
           </a:xfrm>
           <a:prstGeom prst="rect">
             <a:avLst/>
@@ -8684,7 +8708,7 @@
         <p:spPr>
           <a:xfrm>
             <a:off x="2423160" y="1645920"/>
-            <a:ext cx="4937760" cy="420624"/>
+            <a:ext cx="4937760" cy="402336"/>
           </a:xfrm>
           <a:prstGeom prst="rect">
             <a:avLst/>
@@ -8725,7 +8749,7 @@
         </p:nvSpPr>
         <p:spPr>
           <a:xfrm>
-            <a:off x="502920" y="2066544"/>
+            <a:off x="502920" y="2048256"/>
             <a:ext cx="6858000" cy="0"/>
           </a:xfrm>
           <a:prstGeom prst="line">
@@ -8748,8 +8772,8 @@
         </p:nvSpPr>
         <p:spPr>
           <a:xfrm>
-            <a:off x="502920" y="2066544"/>
-            <a:ext cx="1920240" cy="420624"/>
+            <a:off x="502920" y="2048256"/>
+            <a:ext cx="1920240" cy="402336"/>
           </a:xfrm>
           <a:prstGeom prst="rect">
             <a:avLst/>
@@ -8790,8 +8814,8 @@
         </p:nvSpPr>
         <p:spPr>
           <a:xfrm>
-            <a:off x="2423160" y="2066544"/>
-            <a:ext cx="4937760" cy="420624"/>
+            <a:off x="2423160" y="2048256"/>
+            <a:ext cx="4937760" cy="402336"/>
           </a:xfrm>
           <a:prstGeom prst="rect">
             <a:avLst/>
@@ -8922,7 +8946,7 @@
                 <a:ea typeface="Pretendard" pitchFamily="34" charset="-122"/>
                 <a:cs typeface="Pretendard" pitchFamily="34" charset="-120"/>
               </a:rPr>
-              <a:t>토지 및 건축 규제 포인트</a:t>
+              <a:t>토지 및 건축 규제</a:t>
             </a:r>
             <a:endParaRPr lang="en-US" sz="1050" dirty="0"/>
           </a:p>
@@ -8965,7 +8989,131 @@
                 <a:ea typeface="Pretendard" pitchFamily="34" charset="-122"/>
                 <a:cs typeface="Pretendard" pitchFamily="34" charset="-120"/>
               </a:rPr>
-              <a:t>용도지역·용도지구 기준 건폐율/용적률 상한 확인</a:t>
+              <a:t>토지이용계획 열람 및 건축 규제 확인 필요</a:t>
+            </a:r>
+            <a:endParaRPr lang="en-US" sz="980" dirty="0"/>
+          </a:p>
+        </p:txBody>
+      </p:sp>
+      <p:sp>
+        <p:nvSpPr>
+          <p:cNvPr id="17" name="Shape 15"/>
+          <p:cNvSpPr/>
+          <p:nvPr/>
+        </p:nvSpPr>
+        <p:spPr>
+          <a:xfrm>
+            <a:off x="7720279" y="3977640"/>
+            <a:ext cx="3840480" cy="2148840"/>
+          </a:xfrm>
+          <a:prstGeom prst="roundRect">
+            <a:avLst>
+              <a:gd name="adj" fmla="val 2553"/>
+            </a:avLst>
+          </a:prstGeom>
+          <a:solidFill>
+            <a:srgbClr val="BEE3F8"/>
+          </a:solidFill>
+          <a:ln/>
+        </p:spPr>
+      </p:sp>
+      <p:sp>
+        <p:nvSpPr>
+          <p:cNvPr id="18" name="Shape 16"/>
+          <p:cNvSpPr/>
+          <p:nvPr/>
+        </p:nvSpPr>
+        <p:spPr>
+          <a:xfrm>
+            <a:off x="7720279" y="4032504"/>
+            <a:ext cx="36576" cy="2039112"/>
+          </a:xfrm>
+          <a:prstGeom prst="rect">
+            <a:avLst/>
+          </a:prstGeom>
+          <a:solidFill>
+            <a:srgbClr val="2B6CB0"/>
+          </a:solidFill>
+          <a:ln/>
+        </p:spPr>
+      </p:sp>
+      <p:sp>
+        <p:nvSpPr>
+          <p:cNvPr id="19" name="Text 17"/>
+          <p:cNvSpPr/>
+          <p:nvPr/>
+        </p:nvSpPr>
+        <p:spPr>
+          <a:xfrm>
+            <a:off x="7866583" y="4069080"/>
+            <a:ext cx="3584448" cy="201168"/>
+          </a:xfrm>
+          <a:prstGeom prst="rect">
+            <a:avLst/>
+          </a:prstGeom>
+          <a:noFill/>
+          <a:ln/>
+        </p:spPr>
+        <p:txBody>
+          <a:bodyPr wrap="square" lIns="0" tIns="0" rIns="0" bIns="0" rtlCol="0" anchor="ctr"/>
+          <a:lstStyle/>
+          <a:p>
+            <a:pPr indent="0" marL="0">
+              <a:buNone/>
+            </a:pPr>
+            <a:r>
+              <a:rPr lang="en-US" sz="1050" b="1" dirty="0">
+                <a:solidFill>
+                  <a:srgbClr val="2B6CB0"/>
+                </a:solidFill>
+                <a:latin typeface="Pretendard" pitchFamily="34" charset="0"/>
+                <a:ea typeface="Pretendard" pitchFamily="34" charset="-122"/>
+                <a:cs typeface="Pretendard" pitchFamily="34" charset="-120"/>
+              </a:rPr>
+              <a:t>권리관계 및 공적장부</a:t>
+            </a:r>
+            <a:endParaRPr lang="en-US" sz="1050" dirty="0"/>
+          </a:p>
+        </p:txBody>
+      </p:sp>
+      <p:sp>
+        <p:nvSpPr>
+          <p:cNvPr id="20" name="Text 18"/>
+          <p:cNvSpPr/>
+          <p:nvPr/>
+        </p:nvSpPr>
+        <p:spPr>
+          <a:xfrm>
+            <a:off x="7866583" y="4270248"/>
+            <a:ext cx="3584448" cy="1819656"/>
+          </a:xfrm>
+          <a:prstGeom prst="rect">
+            <a:avLst/>
+          </a:prstGeom>
+          <a:noFill/>
+          <a:ln/>
+        </p:spPr>
+        <p:txBody>
+          <a:bodyPr wrap="square" lIns="0" tIns="0" rIns="0" bIns="0" rtlCol="0" anchor="t"/>
+          <a:lstStyle/>
+          <a:p>
+            <a:pPr marL="342900" indent="-342900">
+              <a:lnSpc>
+                <a:spcPct val="108000"/>
+              </a:lnSpc>
+              <a:buSzPct val="100000"/>
+              <a:buChar char="•"/>
+            </a:pPr>
+            <a:r>
+              <a:rPr lang="en-US" sz="980" dirty="0">
+                <a:solidFill>
+                  <a:srgbClr val="10161F"/>
+                </a:solidFill>
+                <a:latin typeface="Pretendard" pitchFamily="34" charset="0"/>
+                <a:ea typeface="Pretendard" pitchFamily="34" charset="-122"/>
+                <a:cs typeface="Pretendard" pitchFamily="34" charset="-120"/>
+              </a:rPr>
+              <a:t>등기부등본 갑구 소유권 확인</a:t>
             </a:r>
             <a:endParaRPr lang="en-US" sz="980" dirty="0"/>
           </a:p>
@@ -8989,7 +9137,7 @@
                 <a:ea typeface="Pretendard" pitchFamily="34" charset="-122"/>
                 <a:cs typeface="Pretendard" pitchFamily="34" charset="-120"/>
               </a:rPr>
-              <a:t>필지 형상 및 접도 조건에 따른 건축 가능 면적 검토</a:t>
+              <a:t>건축물대장 기재 사항 실물 대조</a:t>
             </a:r>
             <a:endParaRPr lang="en-US" sz="980" dirty="0"/>
           </a:p>
@@ -9013,179 +9161,7 @@
                 <a:ea typeface="Pretendard" pitchFamily="34" charset="-122"/>
                 <a:cs typeface="Pretendard" pitchFamily="34" charset="-120"/>
               </a:rPr>
-              <a:t>토지이용계획 열람 및 개발행위허가 제한 여부 확인</a:t>
-            </a:r>
-            <a:endParaRPr lang="en-US" sz="980" dirty="0"/>
-          </a:p>
-        </p:txBody>
-      </p:sp>
-      <p:sp>
-        <p:nvSpPr>
-          <p:cNvPr id="17" name="Shape 15"/>
-          <p:cNvSpPr/>
-          <p:nvPr/>
-        </p:nvSpPr>
-        <p:spPr>
-          <a:xfrm>
-            <a:off x="7720279" y="3977640"/>
-            <a:ext cx="3840480" cy="2148840"/>
-          </a:xfrm>
-          <a:prstGeom prst="roundRect">
-            <a:avLst>
-              <a:gd name="adj" fmla="val 2553"/>
-            </a:avLst>
-          </a:prstGeom>
-          <a:solidFill>
-            <a:srgbClr val="BEE3F8"/>
-          </a:solidFill>
-          <a:ln/>
-        </p:spPr>
-      </p:sp>
-      <p:sp>
-        <p:nvSpPr>
-          <p:cNvPr id="18" name="Shape 16"/>
-          <p:cNvSpPr/>
-          <p:nvPr/>
-        </p:nvSpPr>
-        <p:spPr>
-          <a:xfrm>
-            <a:off x="7720279" y="4032504"/>
-            <a:ext cx="36576" cy="2039112"/>
-          </a:xfrm>
-          <a:prstGeom prst="rect">
-            <a:avLst/>
-          </a:prstGeom>
-          <a:solidFill>
-            <a:srgbClr val="2B6CB0"/>
-          </a:solidFill>
-          <a:ln/>
-        </p:spPr>
-      </p:sp>
-      <p:sp>
-        <p:nvSpPr>
-          <p:cNvPr id="19" name="Text 17"/>
-          <p:cNvSpPr/>
-          <p:nvPr/>
-        </p:nvSpPr>
-        <p:spPr>
-          <a:xfrm>
-            <a:off x="7866583" y="4069080"/>
-            <a:ext cx="3584448" cy="201168"/>
-          </a:xfrm>
-          <a:prstGeom prst="rect">
-            <a:avLst/>
-          </a:prstGeom>
-          <a:noFill/>
-          <a:ln/>
-        </p:spPr>
-        <p:txBody>
-          <a:bodyPr wrap="square" lIns="0" tIns="0" rIns="0" bIns="0" rtlCol="0" anchor="ctr"/>
-          <a:lstStyle/>
-          <a:p>
-            <a:pPr indent="0" marL="0">
-              <a:buNone/>
-            </a:pPr>
-            <a:r>
-              <a:rPr lang="en-US" sz="1050" b="1" dirty="0">
-                <a:solidFill>
-                  <a:srgbClr val="2B6CB0"/>
-                </a:solidFill>
-                <a:latin typeface="Pretendard" pitchFamily="34" charset="0"/>
-                <a:ea typeface="Pretendard" pitchFamily="34" charset="-122"/>
-                <a:cs typeface="Pretendard" pitchFamily="34" charset="-120"/>
-              </a:rPr>
-              <a:t>권리관계 및 공적장부</a:t>
-            </a:r>
-            <a:endParaRPr lang="en-US" sz="1050" dirty="0"/>
-          </a:p>
-        </p:txBody>
-      </p:sp>
-      <p:sp>
-        <p:nvSpPr>
-          <p:cNvPr id="20" name="Text 18"/>
-          <p:cNvSpPr/>
-          <p:nvPr/>
-        </p:nvSpPr>
-        <p:spPr>
-          <a:xfrm>
-            <a:off x="7866583" y="4270248"/>
-            <a:ext cx="3584448" cy="1819656"/>
-          </a:xfrm>
-          <a:prstGeom prst="rect">
-            <a:avLst/>
-          </a:prstGeom>
-          <a:noFill/>
-          <a:ln/>
-        </p:spPr>
-        <p:txBody>
-          <a:bodyPr wrap="square" lIns="0" tIns="0" rIns="0" bIns="0" rtlCol="0" anchor="t"/>
-          <a:lstStyle/>
-          <a:p>
-            <a:pPr marL="342900" indent="-342900">
-              <a:lnSpc>
-                <a:spcPct val="108000"/>
-              </a:lnSpc>
-              <a:buSzPct val="100000"/>
-              <a:buChar char="•"/>
-            </a:pPr>
-            <a:r>
-              <a:rPr lang="en-US" sz="980" dirty="0">
-                <a:solidFill>
-                  <a:srgbClr val="10161F"/>
-                </a:solidFill>
-                <a:latin typeface="Pretendard" pitchFamily="34" charset="0"/>
-                <a:ea typeface="Pretendard" pitchFamily="34" charset="-122"/>
-                <a:cs typeface="Pretendard" pitchFamily="34" charset="-120"/>
-              </a:rPr>
-              <a:t>등기부등본 갑구 소유권 및 을구 근저당·가압류 확인</a:t>
-            </a:r>
-            <a:endParaRPr lang="en-US" sz="980" dirty="0"/>
-          </a:p>
-          <a:p>
-            <a:pPr marL="342900" indent="-342900">
-              <a:lnSpc>
-                <a:spcPct val="108000"/>
-              </a:lnSpc>
-              <a:spcBef>
-                <a:spcPts val="300"/>
-              </a:spcBef>
-              <a:buSzPct val="100000"/>
-              <a:buChar char="•"/>
-            </a:pPr>
-            <a:r>
-              <a:rPr lang="en-US" sz="980" dirty="0">
-                <a:solidFill>
-                  <a:srgbClr val="10161F"/>
-                </a:solidFill>
-                <a:latin typeface="Pretendard" pitchFamily="34" charset="0"/>
-                <a:ea typeface="Pretendard" pitchFamily="34" charset="-122"/>
-                <a:cs typeface="Pretendard" pitchFamily="34" charset="-120"/>
-              </a:rPr>
-              <a:t>건축물대장 기재 사항과 실물 현황 대조 점검</a:t>
-            </a:r>
-            <a:endParaRPr lang="en-US" sz="980" dirty="0"/>
-          </a:p>
-          <a:p>
-            <a:pPr marL="342900" indent="-342900">
-              <a:lnSpc>
-                <a:spcPct val="108000"/>
-              </a:lnSpc>
-              <a:spcBef>
-                <a:spcPts val="300"/>
-              </a:spcBef>
-              <a:buSzPct val="100000"/>
-              <a:buChar char="•"/>
-            </a:pPr>
-            <a:r>
-              <a:rPr lang="en-US" sz="980" dirty="0">
-                <a:solidFill>
-                  <a:srgbClr val="10161F"/>
-                </a:solidFill>
-                <a:latin typeface="Pretendard" pitchFamily="34" charset="0"/>
-                <a:ea typeface="Pretendard" pitchFamily="34" charset="-122"/>
-                <a:cs typeface="Pretendard" pitchFamily="34" charset="-120"/>
-              </a:rPr>
-              <a:t>개별공시지가 및 실거래가 비교 분석</a:t>
+              <a:t>개별공시지가 및 실거래가 비교</a:t>
             </a:r>
             <a:endParaRPr lang="en-US" sz="980" dirty="0"/>
           </a:p>
@@ -9224,7 +9200,7 @@
                 <a:ea typeface="Pretendard" pitchFamily="34" charset="-122"/>
                 <a:cs typeface="Pretendard" pitchFamily="34" charset="-120"/>
               </a:rPr>
-              <a:t>크리딜   |   </a:t>
+              <a:t>크리딜</a:t>
             </a:r>
             <a:endParaRPr lang="en-US" sz="800" dirty="0"/>
           </a:p>
@@ -9486,7 +9462,7 @@
         <p:spPr>
           <a:xfrm>
             <a:off x="502920" y="1645920"/>
-            <a:ext cx="1920240" cy="420624"/>
+            <a:ext cx="1920240" cy="402336"/>
           </a:xfrm>
           <a:prstGeom prst="rect">
             <a:avLst/>
@@ -9528,7 +9504,7 @@
         <p:spPr>
           <a:xfrm>
             <a:off x="2423160" y="1645920"/>
-            <a:ext cx="4937760" cy="420624"/>
+            <a:ext cx="4937760" cy="402336"/>
           </a:xfrm>
           <a:prstGeom prst="rect">
             <a:avLst/>
@@ -9569,7 +9545,7 @@
         </p:nvSpPr>
         <p:spPr>
           <a:xfrm>
-            <a:off x="502920" y="2066544"/>
+            <a:off x="502920" y="2048256"/>
             <a:ext cx="6858000" cy="0"/>
           </a:xfrm>
           <a:prstGeom prst="line">
@@ -9592,8 +9568,8 @@
         </p:nvSpPr>
         <p:spPr>
           <a:xfrm>
-            <a:off x="502920" y="2066544"/>
-            <a:ext cx="1920240" cy="420624"/>
+            <a:off x="502920" y="2048256"/>
+            <a:ext cx="1920240" cy="402336"/>
           </a:xfrm>
           <a:prstGeom prst="rect">
             <a:avLst/>
@@ -9634,8 +9610,8 @@
         </p:nvSpPr>
         <p:spPr>
           <a:xfrm>
-            <a:off x="2423160" y="2066544"/>
-            <a:ext cx="4937760" cy="420624"/>
+            <a:off x="2423160" y="2048256"/>
+            <a:ext cx="4937760" cy="402336"/>
           </a:xfrm>
           <a:prstGeom prst="rect">
             <a:avLst/>
@@ -9676,7 +9652,7 @@
         </p:nvSpPr>
         <p:spPr>
           <a:xfrm>
-            <a:off x="502920" y="2487168"/>
+            <a:off x="502920" y="2450592"/>
             <a:ext cx="6858000" cy="0"/>
           </a:xfrm>
           <a:prstGeom prst="line">
@@ -9699,8 +9675,8 @@
         </p:nvSpPr>
         <p:spPr>
           <a:xfrm>
-            <a:off x="502920" y="2487168"/>
-            <a:ext cx="1920240" cy="420624"/>
+            <a:off x="502920" y="2450592"/>
+            <a:ext cx="1920240" cy="402336"/>
           </a:xfrm>
           <a:prstGeom prst="rect">
             <a:avLst/>
@@ -9741,8 +9717,8 @@
         </p:nvSpPr>
         <p:spPr>
           <a:xfrm>
-            <a:off x="2423160" y="2487168"/>
-            <a:ext cx="4937760" cy="420624"/>
+            <a:off x="2423160" y="2450592"/>
+            <a:ext cx="4937760" cy="402336"/>
           </a:xfrm>
           <a:prstGeom prst="rect">
             <a:avLst/>
@@ -9943,7 +9919,7 @@
                 <a:ea typeface="Pretendard" pitchFamily="34" charset="-122"/>
                 <a:cs typeface="Pretendard" pitchFamily="34" charset="-120"/>
               </a:rPr>
-              <a:t>크리딜   |   </a:t>
+              <a:t>크리딜</a:t>
             </a:r>
             <a:endParaRPr lang="en-US" sz="800" dirty="0"/>
           </a:p>
@@ -11044,7 +11020,7 @@
                 <a:ea typeface="Pretendard" pitchFamily="34" charset="-122"/>
                 <a:cs typeface="Pretendard" pitchFamily="34" charset="-120"/>
               </a:rPr>
-              <a:t>크리딜   |   </a:t>
+              <a:t>크리딜</a:t>
             </a:r>
             <a:endParaRPr lang="en-US" sz="800" dirty="0"/>
           </a:p>
@@ -11306,7 +11282,7 @@
         <p:spPr>
           <a:xfrm>
             <a:off x="502920" y="1645920"/>
-            <a:ext cx="1920240" cy="420624"/>
+            <a:ext cx="1920240" cy="402336"/>
           </a:xfrm>
           <a:prstGeom prst="rect">
             <a:avLst/>
@@ -11348,7 +11324,7 @@
         <p:spPr>
           <a:xfrm>
             <a:off x="2423160" y="1645920"/>
-            <a:ext cx="4937760" cy="420624"/>
+            <a:ext cx="4937760" cy="402336"/>
           </a:xfrm>
           <a:prstGeom prst="rect">
             <a:avLst/>
@@ -11389,7 +11365,7 @@
         </p:nvSpPr>
         <p:spPr>
           <a:xfrm>
-            <a:off x="502920" y="2066544"/>
+            <a:off x="502920" y="2048256"/>
             <a:ext cx="6858000" cy="0"/>
           </a:xfrm>
           <a:prstGeom prst="line">
@@ -11412,8 +11388,8 @@
         </p:nvSpPr>
         <p:spPr>
           <a:xfrm>
-            <a:off x="502920" y="2066544"/>
-            <a:ext cx="1920240" cy="420624"/>
+            <a:off x="502920" y="2048256"/>
+            <a:ext cx="1920240" cy="402336"/>
           </a:xfrm>
           <a:prstGeom prst="rect">
             <a:avLst/>
@@ -11454,8 +11430,8 @@
         </p:nvSpPr>
         <p:spPr>
           <a:xfrm>
-            <a:off x="2423160" y="2066544"/>
-            <a:ext cx="4937760" cy="420624"/>
+            <a:off x="2423160" y="2048256"/>
+            <a:ext cx="4937760" cy="402336"/>
           </a:xfrm>
           <a:prstGeom prst="rect">
             <a:avLst/>
@@ -11656,7 +11632,7 @@
                 <a:ea typeface="Pretendard" pitchFamily="34" charset="-122"/>
                 <a:cs typeface="Pretendard" pitchFamily="34" charset="-120"/>
               </a:rPr>
-              <a:t>크리딜   |   </a:t>
+              <a:t>크리딜</a:t>
             </a:r>
             <a:endParaRPr lang="en-US" sz="800" dirty="0"/>
           </a:p>
@@ -11983,6 +11959,9 @@
           <a:lstStyle/>
           <a:p>
             <a:pPr indent="0" marL="0">
+              <a:lnSpc>
+                <a:spcPct val="100000"/>
+              </a:lnSpc>
               <a:buNone/>
             </a:pPr>
             <a:r>
@@ -12090,6 +12069,9 @@
           <a:lstStyle/>
           <a:p>
             <a:pPr indent="0" marL="0">
+              <a:lnSpc>
+                <a:spcPct val="100000"/>
+              </a:lnSpc>
               <a:buNone/>
             </a:pPr>
             <a:r>
@@ -12197,6 +12179,9 @@
           <a:lstStyle/>
           <a:p>
             <a:pPr indent="0" marL="0">
+              <a:lnSpc>
+                <a:spcPct val="100000"/>
+              </a:lnSpc>
               <a:buNone/>
             </a:pPr>
             <a:r>
@@ -12370,7 +12355,7 @@
                 <a:ea typeface="Pretendard" pitchFamily="34" charset="-122"/>
                 <a:cs typeface="Pretendard" pitchFamily="34" charset="-120"/>
               </a:rPr>
-              <a:t>크리딜   |   </a:t>
+              <a:t>크리딜</a:t>
             </a:r>
             <a:endParaRPr lang="en-US" sz="800" dirty="0"/>
           </a:p>
@@ -12725,7 +12710,7 @@
                 <a:ea typeface="Pretendard" pitchFamily="34" charset="-122"/>
                 <a:cs typeface="Pretendard" pitchFamily="34" charset="-120"/>
               </a:rPr>
-              <a:t>크리딜   |   </a:t>
+              <a:t>크리딜</a:t>
             </a:r>
             <a:endParaRPr lang="en-US" sz="800" dirty="0"/>
           </a:p>

--- a/docs/test/stress/e2e-outputs/income_pro_gradeC_pr07.pptx
+++ b/docs/test/stress/e2e-outputs/income_pro_gradeC_pr07.pptx
@@ -3661,7 +3661,7 @@
                 <a:ea typeface="Pretendard" pitchFamily="34" charset="-122"/>
                 <a:cs typeface="Pretendard" pitchFamily="34" charset="-120"/>
               </a:rPr>
-              <a:t>임대차 원본 계약서 대조 (보증금, 월임대료, 관리비 실입금 내역 및 제소전화해조서)</a:t>
+              <a:t>임대차 원본 계약서 검토 (보증금, 월임대료, 관리비 실입금 내역 및 제소전화해조서)</a:t>
             </a:r>
             <a:endParaRPr lang="en-US" sz="950" dirty="0"/>
           </a:p>

--- a/docs/test/stress/e2e-outputs/income_pro_gradeC_pr07.pptx
+++ b/docs/test/stress/e2e-outputs/income_pro_gradeC_pr07.pptx
@@ -2094,7 +2094,7 @@
         </p:nvSpPr>
         <p:spPr>
           <a:xfrm>
-            <a:off x="502920" y="475488"/>
+            <a:off x="566928" y="475488"/>
             <a:ext cx="2743200" cy="365760"/>
           </a:xfrm>
           <a:prstGeom prst="rect">
@@ -2147,7 +2147,7 @@
         </p:nvSpPr>
         <p:spPr>
           <a:xfrm>
-            <a:off x="502920" y="2029968"/>
+            <a:off x="566928" y="2029968"/>
             <a:ext cx="7315200" cy="274320"/>
           </a:xfrm>
           <a:prstGeom prst="rect">
@@ -2186,8 +2186,8 @@
         </p:nvSpPr>
         <p:spPr>
           <a:xfrm>
-            <a:off x="502920" y="2304288"/>
-            <a:ext cx="7315200" cy="731520"/>
+            <a:off x="566928" y="2304288"/>
+            <a:ext cx="7315200" cy="1051560"/>
           </a:xfrm>
           <a:prstGeom prst="rect">
             <a:avLst/>
@@ -2203,7 +2203,7 @@
               <a:buNone/>
             </a:pPr>
             <a:r>
-              <a:rPr lang="en-US" sz="4000" b="1" dirty="0">
+              <a:rPr lang="en-US" sz="3000" b="1" dirty="0">
                 <a:solidFill>
                   <a:srgbClr val="FFFFFF"/>
                 </a:solidFill>
@@ -2213,7 +2213,7 @@
               </a:rPr>
               <a:t>income 포스처 테스트 문서</a:t>
             </a:r>
-            <a:endParaRPr lang="en-US" sz="4000" dirty="0"/>
+            <a:endParaRPr lang="en-US" sz="3000" dirty="0"/>
           </a:p>
         </p:txBody>
       </p:sp>
@@ -2225,7 +2225,7 @@
         </p:nvSpPr>
         <p:spPr>
           <a:xfrm>
-            <a:off x="502920" y="3090672"/>
+            <a:off x="566928" y="3410712"/>
             <a:ext cx="7315200" cy="329184"/>
           </a:xfrm>
           <a:prstGeom prst="rect">
@@ -2264,7 +2264,7 @@
         </p:nvSpPr>
         <p:spPr>
           <a:xfrm>
-            <a:off x="502920" y="3639312"/>
+            <a:off x="566928" y="3959352"/>
             <a:ext cx="1097280" cy="292608"/>
           </a:xfrm>
           <a:prstGeom prst="roundRect">
@@ -2286,7 +2286,7 @@
         </p:nvSpPr>
         <p:spPr>
           <a:xfrm>
-            <a:off x="502920" y="3639312"/>
+            <a:off x="566928" y="3959352"/>
             <a:ext cx="1097280" cy="292608"/>
           </a:xfrm>
           <a:prstGeom prst="rect">
@@ -2325,7 +2325,7 @@
         </p:nvSpPr>
         <p:spPr>
           <a:xfrm>
-            <a:off x="1691640" y="3639312"/>
+            <a:off x="1755648" y="3959352"/>
             <a:ext cx="1005840" cy="292608"/>
           </a:xfrm>
           <a:prstGeom prst="roundRect">
@@ -2347,7 +2347,7 @@
         </p:nvSpPr>
         <p:spPr>
           <a:xfrm>
-            <a:off x="1691640" y="3639312"/>
+            <a:off x="1755648" y="3959352"/>
             <a:ext cx="1005840" cy="292608"/>
           </a:xfrm>
           <a:prstGeom prst="rect">
@@ -2386,7 +2386,7 @@
         </p:nvSpPr>
         <p:spPr>
           <a:xfrm>
-            <a:off x="502920" y="4078224"/>
+            <a:off x="566928" y="4398264"/>
             <a:ext cx="6858000" cy="1051560"/>
           </a:xfrm>
           <a:prstGeom prst="roundRect">
@@ -2413,7 +2413,7 @@
         </p:nvSpPr>
         <p:spPr>
           <a:xfrm>
-            <a:off x="758952" y="4187952"/>
+            <a:off x="822960" y="4507992"/>
             <a:ext cx="6345936" cy="832104"/>
           </a:xfrm>
           <a:prstGeom prst="rect">
@@ -2452,8 +2452,8 @@
         </p:nvSpPr>
         <p:spPr>
           <a:xfrm>
-            <a:off x="502920" y="6035040"/>
-            <a:ext cx="11057839" cy="274320"/>
+            <a:off x="566928" y="5943600"/>
+            <a:ext cx="11057839" cy="201168"/>
           </a:xfrm>
           <a:prstGeom prst="rect">
             <a:avLst/>
@@ -2480,7 +2480,7 @@
         </p:nvSpPr>
         <p:spPr>
           <a:xfrm>
-            <a:off x="502920" y="6382512"/>
+            <a:off x="566928" y="6382512"/>
             <a:ext cx="7315200" cy="219456"/>
           </a:xfrm>
           <a:prstGeom prst="rect">
@@ -2519,7 +2519,7 @@
         </p:nvSpPr>
         <p:spPr>
           <a:xfrm>
-            <a:off x="10774375" y="6382512"/>
+            <a:off x="10710367" y="6382512"/>
             <a:ext cx="914400" cy="219456"/>
           </a:xfrm>
           <a:prstGeom prst="rect">
@@ -2590,7 +2590,7 @@
         </p:nvSpPr>
         <p:spPr>
           <a:xfrm>
-            <a:off x="502920" y="457200"/>
+            <a:off x="566928" y="457200"/>
             <a:ext cx="384048" cy="384048"/>
           </a:xfrm>
           <a:prstGeom prst="ellipse">
@@ -2610,7 +2610,7 @@
         </p:nvSpPr>
         <p:spPr>
           <a:xfrm>
-            <a:off x="502920" y="457200"/>
+            <a:off x="566928" y="457200"/>
             <a:ext cx="384048" cy="384048"/>
           </a:xfrm>
           <a:prstGeom prst="rect">
@@ -2649,7 +2649,7 @@
         </p:nvSpPr>
         <p:spPr>
           <a:xfrm>
-            <a:off x="1069848" y="457200"/>
+            <a:off x="1133856" y="457200"/>
             <a:ext cx="10490911" cy="182880"/>
           </a:xfrm>
           <a:prstGeom prst="rect">
@@ -2688,7 +2688,7 @@
         </p:nvSpPr>
         <p:spPr>
           <a:xfrm>
-            <a:off x="1069848" y="640080"/>
+            <a:off x="1133856" y="640080"/>
             <a:ext cx="10490911" cy="365760"/>
           </a:xfrm>
           <a:prstGeom prst="rect">
@@ -2698,7 +2698,9 @@
           <a:ln/>
         </p:spPr>
         <p:txBody>
-          <a:bodyPr wrap="square" lIns="0" tIns="0" rIns="0" bIns="0" rtlCol="0" anchor="ctr"/>
+          <a:bodyPr wrap="square" lIns="0" tIns="0" rIns="0" bIns="0" rtlCol="0" anchor="ctr">
+            <a:normAutofit/>
+          </a:bodyPr>
           <a:lstStyle/>
           <a:p>
             <a:pPr indent="0" marL="0">
@@ -2727,7 +2729,7 @@
         </p:nvSpPr>
         <p:spPr>
           <a:xfrm>
-            <a:off x="502920" y="1417320"/>
+            <a:off x="566928" y="1417320"/>
             <a:ext cx="5400904" cy="3657600"/>
           </a:xfrm>
           <a:prstGeom prst="roundRect">
@@ -2754,7 +2756,7 @@
         </p:nvSpPr>
         <p:spPr>
           <a:xfrm>
-            <a:off x="502920" y="1417320"/>
+            <a:off x="566928" y="1417320"/>
             <a:ext cx="5400904" cy="45720"/>
           </a:xfrm>
           <a:prstGeom prst="rect">
@@ -2774,7 +2776,7 @@
         </p:nvSpPr>
         <p:spPr>
           <a:xfrm>
-            <a:off x="731520" y="1618488"/>
+            <a:off x="795528" y="1618488"/>
             <a:ext cx="4943704" cy="292608"/>
           </a:xfrm>
           <a:prstGeom prst="rect">
@@ -2813,7 +2815,7 @@
         </p:nvSpPr>
         <p:spPr>
           <a:xfrm>
-            <a:off x="731520" y="1947672"/>
+            <a:off x="795528" y="1947672"/>
             <a:ext cx="4943704" cy="365760"/>
           </a:xfrm>
           <a:prstGeom prst="rect">
@@ -2854,7 +2856,7 @@
         </p:nvSpPr>
         <p:spPr>
           <a:xfrm>
-            <a:off x="731520" y="2377440"/>
+            <a:off x="795528" y="2377440"/>
             <a:ext cx="4943704" cy="2606040"/>
           </a:xfrm>
           <a:prstGeom prst="rect">
@@ -2899,7 +2901,7 @@
         </p:nvSpPr>
         <p:spPr>
           <a:xfrm>
-            <a:off x="6159856" y="1417320"/>
+            <a:off x="6223864" y="1417320"/>
             <a:ext cx="5400904" cy="3657600"/>
           </a:xfrm>
           <a:prstGeom prst="roundRect">
@@ -2926,7 +2928,7 @@
         </p:nvSpPr>
         <p:spPr>
           <a:xfrm>
-            <a:off x="6159856" y="1417320"/>
+            <a:off x="6223864" y="1417320"/>
             <a:ext cx="5400904" cy="45720"/>
           </a:xfrm>
           <a:prstGeom prst="rect">
@@ -2946,7 +2948,7 @@
         </p:nvSpPr>
         <p:spPr>
           <a:xfrm>
-            <a:off x="6388456" y="1618488"/>
+            <a:off x="6452464" y="1618488"/>
             <a:ext cx="4943704" cy="292608"/>
           </a:xfrm>
           <a:prstGeom prst="rect">
@@ -2985,7 +2987,7 @@
         </p:nvSpPr>
         <p:spPr>
           <a:xfrm>
-            <a:off x="6388456" y="1947672"/>
+            <a:off x="6452464" y="1947672"/>
             <a:ext cx="4943704" cy="365760"/>
           </a:xfrm>
           <a:prstGeom prst="rect">
@@ -3026,7 +3028,7 @@
         </p:nvSpPr>
         <p:spPr>
           <a:xfrm>
-            <a:off x="6388456" y="2377440"/>
+            <a:off x="6452464" y="2377440"/>
             <a:ext cx="4943704" cy="2606040"/>
           </a:xfrm>
           <a:prstGeom prst="rect">
@@ -3071,7 +3073,7 @@
         </p:nvSpPr>
         <p:spPr>
           <a:xfrm>
-            <a:off x="502920" y="5193792"/>
+            <a:off x="566928" y="5193792"/>
             <a:ext cx="11057839" cy="621792"/>
           </a:xfrm>
           <a:prstGeom prst="roundRect">
@@ -3098,7 +3100,7 @@
         </p:nvSpPr>
         <p:spPr>
           <a:xfrm>
-            <a:off x="731520" y="5193792"/>
+            <a:off x="795528" y="5193792"/>
             <a:ext cx="10600639" cy="621792"/>
           </a:xfrm>
           <a:prstGeom prst="rect">
@@ -3137,7 +3139,7 @@
         </p:nvSpPr>
         <p:spPr>
           <a:xfrm>
-            <a:off x="502920" y="6382512"/>
+            <a:off x="566928" y="6382512"/>
             <a:ext cx="7315200" cy="219456"/>
           </a:xfrm>
           <a:prstGeom prst="rect">
@@ -3176,7 +3178,7 @@
         </p:nvSpPr>
         <p:spPr>
           <a:xfrm>
-            <a:off x="10774375" y="6382512"/>
+            <a:off x="10710367" y="6382512"/>
             <a:ext cx="914400" cy="219456"/>
           </a:xfrm>
           <a:prstGeom prst="rect">
@@ -3247,7 +3249,7 @@
         </p:nvSpPr>
         <p:spPr>
           <a:xfrm>
-            <a:off x="502920" y="457200"/>
+            <a:off x="566928" y="457200"/>
             <a:ext cx="384048" cy="384048"/>
           </a:xfrm>
           <a:prstGeom prst="ellipse">
@@ -3267,7 +3269,7 @@
         </p:nvSpPr>
         <p:spPr>
           <a:xfrm>
-            <a:off x="502920" y="457200"/>
+            <a:off x="566928" y="457200"/>
             <a:ext cx="384048" cy="384048"/>
           </a:xfrm>
           <a:prstGeom prst="rect">
@@ -3306,7 +3308,7 @@
         </p:nvSpPr>
         <p:spPr>
           <a:xfrm>
-            <a:off x="1069848" y="457200"/>
+            <a:off x="1133856" y="457200"/>
             <a:ext cx="10490911" cy="182880"/>
           </a:xfrm>
           <a:prstGeom prst="rect">
@@ -3345,7 +3347,7 @@
         </p:nvSpPr>
         <p:spPr>
           <a:xfrm>
-            <a:off x="1069848" y="640080"/>
+            <a:off x="1133856" y="640080"/>
             <a:ext cx="10490911" cy="365760"/>
           </a:xfrm>
           <a:prstGeom prst="rect">
@@ -3355,6 +3357,47 @@
           <a:ln/>
         </p:spPr>
         <p:txBody>
+          <a:bodyPr wrap="square" lIns="0" tIns="0" rIns="0" bIns="0" rtlCol="0" anchor="ctr">
+            <a:normAutofit/>
+          </a:bodyPr>
+          <a:lstStyle/>
+          <a:p>
+            <a:pPr indent="0" marL="0">
+              <a:buNone/>
+            </a:pPr>
+            <a:r>
+              <a:rPr lang="en-US" sz="2300" b="1" dirty="0">
+                <a:solidFill>
+                  <a:srgbClr val="10161F"/>
+                </a:solidFill>
+                <a:latin typeface="Pretendard" pitchFamily="34" charset="0"/>
+                <a:ea typeface="Pretendard" pitchFamily="34" charset="-122"/>
+                <a:cs typeface="Pretendard" pitchFamily="34" charset="-120"/>
+              </a:rPr>
+              <a:t>실사 체크리스트</a:t>
+            </a:r>
+            <a:endParaRPr lang="en-US" sz="2300" dirty="0"/>
+          </a:p>
+        </p:txBody>
+      </p:sp>
+      <p:sp>
+        <p:nvSpPr>
+          <p:cNvPr id="6" name="Text 4"/>
+          <p:cNvSpPr/>
+          <p:nvPr/>
+        </p:nvSpPr>
+        <p:spPr>
+          <a:xfrm>
+            <a:off x="566928" y="1371600"/>
+            <a:ext cx="11057839" cy="237744"/>
+          </a:xfrm>
+          <a:prstGeom prst="rect">
+            <a:avLst/>
+          </a:prstGeom>
+          <a:noFill/>
+          <a:ln/>
+        </p:spPr>
+        <p:txBody>
           <a:bodyPr wrap="square" lIns="0" tIns="0" rIns="0" bIns="0" rtlCol="0" anchor="ctr"/>
           <a:lstStyle/>
           <a:p>
@@ -3362,7 +3405,7 @@
               <a:buNone/>
             </a:pPr>
             <a:r>
-              <a:rPr lang="en-US" sz="2300" b="1" dirty="0">
+              <a:rPr lang="en-US" sz="1100" b="1" dirty="0">
                 <a:solidFill>
                   <a:srgbClr val="10161F"/>
                 </a:solidFill>
@@ -3370,45 +3413,6 @@
                 <a:ea typeface="Pretendard" pitchFamily="34" charset="-122"/>
                 <a:cs typeface="Pretendard" pitchFamily="34" charset="-120"/>
               </a:rPr>
-              <a:t>실사 체크리스트</a:t>
-            </a:r>
-            <a:endParaRPr lang="en-US" sz="2300" dirty="0"/>
-          </a:p>
-        </p:txBody>
-      </p:sp>
-      <p:sp>
-        <p:nvSpPr>
-          <p:cNvPr id="6" name="Text 4"/>
-          <p:cNvSpPr/>
-          <p:nvPr/>
-        </p:nvSpPr>
-        <p:spPr>
-          <a:xfrm>
-            <a:off x="502920" y="1371600"/>
-            <a:ext cx="11057839" cy="237744"/>
-          </a:xfrm>
-          <a:prstGeom prst="rect">
-            <a:avLst/>
-          </a:prstGeom>
-          <a:noFill/>
-          <a:ln/>
-        </p:spPr>
-        <p:txBody>
-          <a:bodyPr wrap="square" lIns="0" tIns="0" rIns="0" bIns="0" rtlCol="0" anchor="ctr"/>
-          <a:lstStyle/>
-          <a:p>
-            <a:pPr indent="0" marL="0">
-              <a:buNone/>
-            </a:pPr>
-            <a:r>
-              <a:rPr lang="en-US" sz="1100" b="1" dirty="0">
-                <a:solidFill>
-                  <a:srgbClr val="10161F"/>
-                </a:solidFill>
-                <a:latin typeface="Pretendard" pitchFamily="34" charset="0"/>
-                <a:ea typeface="Pretendard" pitchFamily="34" charset="-122"/>
-                <a:cs typeface="Pretendard" pitchFamily="34" charset="-120"/>
-              </a:rPr>
               <a:t>거래 안정성 확보를 위한 필수 법률·물리·임대차 실사 점검 항목 (총 6건)</a:t>
             </a:r>
             <a:endParaRPr lang="en-US" sz="1100" dirty="0"/>
@@ -3423,7 +3427,7 @@
         </p:nvSpPr>
         <p:spPr>
           <a:xfrm>
-            <a:off x="502920" y="1719072"/>
+            <a:off x="566928" y="1719072"/>
             <a:ext cx="5368900" cy="749808"/>
           </a:xfrm>
           <a:prstGeom prst="rect">
@@ -3448,7 +3452,7 @@
         </p:nvSpPr>
         <p:spPr>
           <a:xfrm>
-            <a:off x="640080" y="1947672"/>
+            <a:off x="704088" y="1947672"/>
             <a:ext cx="292608" cy="292608"/>
           </a:xfrm>
           <a:prstGeom prst="rect">
@@ -3468,7 +3472,7 @@
         </p:nvSpPr>
         <p:spPr>
           <a:xfrm>
-            <a:off x="640080" y="1947672"/>
+            <a:off x="704088" y="1947672"/>
             <a:ext cx="292608" cy="292608"/>
           </a:xfrm>
           <a:prstGeom prst="rect">
@@ -3507,7 +3511,7 @@
         </p:nvSpPr>
         <p:spPr>
           <a:xfrm>
-            <a:off x="1033272" y="1792224"/>
+            <a:off x="1097280" y="1792224"/>
             <a:ext cx="4710532" cy="603504"/>
           </a:xfrm>
           <a:prstGeom prst="rect">
@@ -3549,7 +3553,7 @@
         </p:nvSpPr>
         <p:spPr>
           <a:xfrm>
-            <a:off x="502920" y="2542032"/>
+            <a:off x="566928" y="2542032"/>
             <a:ext cx="5368900" cy="749808"/>
           </a:xfrm>
           <a:prstGeom prst="rect">
@@ -3574,7 +3578,7 @@
         </p:nvSpPr>
         <p:spPr>
           <a:xfrm>
-            <a:off x="640080" y="2770632"/>
+            <a:off x="704088" y="2770632"/>
             <a:ext cx="292608" cy="292608"/>
           </a:xfrm>
           <a:prstGeom prst="rect">
@@ -3594,7 +3598,7 @@
         </p:nvSpPr>
         <p:spPr>
           <a:xfrm>
-            <a:off x="640080" y="2770632"/>
+            <a:off x="704088" y="2770632"/>
             <a:ext cx="292608" cy="292608"/>
           </a:xfrm>
           <a:prstGeom prst="rect">
@@ -3633,7 +3637,7 @@
         </p:nvSpPr>
         <p:spPr>
           <a:xfrm>
-            <a:off x="1033272" y="2615184"/>
+            <a:off x="1097280" y="2615184"/>
             <a:ext cx="4710532" cy="603504"/>
           </a:xfrm>
           <a:prstGeom prst="rect">
@@ -3675,7 +3679,7 @@
         </p:nvSpPr>
         <p:spPr>
           <a:xfrm>
-            <a:off x="502920" y="3364992"/>
+            <a:off x="566928" y="3364992"/>
             <a:ext cx="5368900" cy="749808"/>
           </a:xfrm>
           <a:prstGeom prst="rect">
@@ -3700,7 +3704,7 @@
         </p:nvSpPr>
         <p:spPr>
           <a:xfrm>
-            <a:off x="640080" y="3593592"/>
+            <a:off x="704088" y="3593592"/>
             <a:ext cx="292608" cy="292608"/>
           </a:xfrm>
           <a:prstGeom prst="rect">
@@ -3720,7 +3724,7 @@
         </p:nvSpPr>
         <p:spPr>
           <a:xfrm>
-            <a:off x="640080" y="3593592"/>
+            <a:off x="704088" y="3593592"/>
             <a:ext cx="292608" cy="292608"/>
           </a:xfrm>
           <a:prstGeom prst="rect">
@@ -3759,7 +3763,7 @@
         </p:nvSpPr>
         <p:spPr>
           <a:xfrm>
-            <a:off x="1033272" y="3438144"/>
+            <a:off x="1097280" y="3438144"/>
             <a:ext cx="4710532" cy="603504"/>
           </a:xfrm>
           <a:prstGeom prst="rect">
@@ -3801,7 +3805,7 @@
         </p:nvSpPr>
         <p:spPr>
           <a:xfrm>
-            <a:off x="6191860" y="1719072"/>
+            <a:off x="6255868" y="1719072"/>
             <a:ext cx="5368900" cy="749808"/>
           </a:xfrm>
           <a:prstGeom prst="rect">
@@ -3826,7 +3830,7 @@
         </p:nvSpPr>
         <p:spPr>
           <a:xfrm>
-            <a:off x="6329020" y="1947672"/>
+            <a:off x="6393028" y="1947672"/>
             <a:ext cx="292608" cy="292608"/>
           </a:xfrm>
           <a:prstGeom prst="rect">
@@ -3846,7 +3850,7 @@
         </p:nvSpPr>
         <p:spPr>
           <a:xfrm>
-            <a:off x="6329020" y="1947672"/>
+            <a:off x="6393028" y="1947672"/>
             <a:ext cx="292608" cy="292608"/>
           </a:xfrm>
           <a:prstGeom prst="rect">
@@ -3885,7 +3889,7 @@
         </p:nvSpPr>
         <p:spPr>
           <a:xfrm>
-            <a:off x="6722212" y="1792224"/>
+            <a:off x="6786220" y="1792224"/>
             <a:ext cx="4710532" cy="603504"/>
           </a:xfrm>
           <a:prstGeom prst="rect">
@@ -3927,7 +3931,7 @@
         </p:nvSpPr>
         <p:spPr>
           <a:xfrm>
-            <a:off x="6191860" y="2542032"/>
+            <a:off x="6255868" y="2542032"/>
             <a:ext cx="5368900" cy="749808"/>
           </a:xfrm>
           <a:prstGeom prst="rect">
@@ -3952,7 +3956,7 @@
         </p:nvSpPr>
         <p:spPr>
           <a:xfrm>
-            <a:off x="6329020" y="2770632"/>
+            <a:off x="6393028" y="2770632"/>
             <a:ext cx="292608" cy="292608"/>
           </a:xfrm>
           <a:prstGeom prst="rect">
@@ -3972,7 +3976,7 @@
         </p:nvSpPr>
         <p:spPr>
           <a:xfrm>
-            <a:off x="6329020" y="2770632"/>
+            <a:off x="6393028" y="2770632"/>
             <a:ext cx="292608" cy="292608"/>
           </a:xfrm>
           <a:prstGeom prst="rect">
@@ -4011,7 +4015,7 @@
         </p:nvSpPr>
         <p:spPr>
           <a:xfrm>
-            <a:off x="6722212" y="2615184"/>
+            <a:off x="6786220" y="2615184"/>
             <a:ext cx="4710532" cy="603504"/>
           </a:xfrm>
           <a:prstGeom prst="rect">
@@ -4053,7 +4057,7 @@
         </p:nvSpPr>
         <p:spPr>
           <a:xfrm>
-            <a:off x="6191860" y="3364992"/>
+            <a:off x="6255868" y="3364992"/>
             <a:ext cx="5368900" cy="749808"/>
           </a:xfrm>
           <a:prstGeom prst="rect">
@@ -4078,7 +4082,7 @@
         </p:nvSpPr>
         <p:spPr>
           <a:xfrm>
-            <a:off x="6329020" y="3593592"/>
+            <a:off x="6393028" y="3593592"/>
             <a:ext cx="292608" cy="292608"/>
           </a:xfrm>
           <a:prstGeom prst="rect">
@@ -4098,7 +4102,7 @@
         </p:nvSpPr>
         <p:spPr>
           <a:xfrm>
-            <a:off x="6329020" y="3593592"/>
+            <a:off x="6393028" y="3593592"/>
             <a:ext cx="292608" cy="292608"/>
           </a:xfrm>
           <a:prstGeom prst="rect">
@@ -4137,7 +4141,7 @@
         </p:nvSpPr>
         <p:spPr>
           <a:xfrm>
-            <a:off x="6722212" y="3438144"/>
+            <a:off x="6786220" y="3438144"/>
             <a:ext cx="4710532" cy="603504"/>
           </a:xfrm>
           <a:prstGeom prst="rect">
@@ -4179,7 +4183,7 @@
         </p:nvSpPr>
         <p:spPr>
           <a:xfrm>
-            <a:off x="502920" y="5349240"/>
+            <a:off x="566928" y="5349240"/>
             <a:ext cx="11057839" cy="457200"/>
           </a:xfrm>
           <a:prstGeom prst="rect">
@@ -4199,7 +4203,7 @@
         </p:nvSpPr>
         <p:spPr>
           <a:xfrm>
-            <a:off x="685800" y="5422392"/>
+            <a:off x="749808" y="5422392"/>
             <a:ext cx="10692079" cy="310896"/>
           </a:xfrm>
           <a:prstGeom prst="rect">
@@ -4238,7 +4242,7 @@
         </p:nvSpPr>
         <p:spPr>
           <a:xfrm>
-            <a:off x="502920" y="6382512"/>
+            <a:off x="566928" y="6382512"/>
             <a:ext cx="7315200" cy="219456"/>
           </a:xfrm>
           <a:prstGeom prst="rect">
@@ -4277,7 +4281,7 @@
         </p:nvSpPr>
         <p:spPr>
           <a:xfrm>
-            <a:off x="10774375" y="6382512"/>
+            <a:off x="10710367" y="6382512"/>
             <a:ext cx="914400" cy="219456"/>
           </a:xfrm>
           <a:prstGeom prst="rect">
@@ -4348,7 +4352,7 @@
         </p:nvSpPr>
         <p:spPr>
           <a:xfrm>
-            <a:off x="502920" y="457200"/>
+            <a:off x="566928" y="457200"/>
             <a:ext cx="384048" cy="384048"/>
           </a:xfrm>
           <a:prstGeom prst="ellipse">
@@ -4368,7 +4372,7 @@
         </p:nvSpPr>
         <p:spPr>
           <a:xfrm>
-            <a:off x="502920" y="457200"/>
+            <a:off x="566928" y="457200"/>
             <a:ext cx="384048" cy="384048"/>
           </a:xfrm>
           <a:prstGeom prst="rect">
@@ -4407,7 +4411,7 @@
         </p:nvSpPr>
         <p:spPr>
           <a:xfrm>
-            <a:off x="1069848" y="457200"/>
+            <a:off x="1133856" y="457200"/>
             <a:ext cx="10490911" cy="182880"/>
           </a:xfrm>
           <a:prstGeom prst="rect">
@@ -4446,7 +4450,7 @@
         </p:nvSpPr>
         <p:spPr>
           <a:xfrm>
-            <a:off x="1069848" y="640080"/>
+            <a:off x="1133856" y="640080"/>
             <a:ext cx="10490911" cy="365760"/>
           </a:xfrm>
           <a:prstGeom prst="rect">
@@ -4456,7 +4460,9 @@
           <a:ln/>
         </p:spPr>
         <p:txBody>
-          <a:bodyPr wrap="square" lIns="0" tIns="0" rIns="0" bIns="0" rtlCol="0" anchor="ctr"/>
+          <a:bodyPr wrap="square" lIns="0" tIns="0" rIns="0" bIns="0" rtlCol="0" anchor="ctr">
+            <a:normAutofit/>
+          </a:bodyPr>
           <a:lstStyle/>
           <a:p>
             <a:pPr indent="0" marL="0">
@@ -4485,7 +4491,7 @@
         </p:nvSpPr>
         <p:spPr>
           <a:xfrm>
-            <a:off x="502920" y="1572768"/>
+            <a:off x="566928" y="1572768"/>
             <a:ext cx="11057839" cy="3200400"/>
           </a:xfrm>
           <a:prstGeom prst="roundRect">
@@ -4512,7 +4518,7 @@
         </p:nvSpPr>
         <p:spPr>
           <a:xfrm>
-            <a:off x="722376" y="1792224"/>
+            <a:off x="786384" y="1792224"/>
             <a:ext cx="438912" cy="438912"/>
           </a:xfrm>
           <a:prstGeom prst="ellipse">
@@ -4532,7 +4538,7 @@
         </p:nvSpPr>
         <p:spPr>
           <a:xfrm>
-            <a:off x="722376" y="1792224"/>
+            <a:off x="786384" y="1792224"/>
             <a:ext cx="438912" cy="438912"/>
           </a:xfrm>
           <a:prstGeom prst="rect">
@@ -4571,7 +4577,7 @@
         </p:nvSpPr>
         <p:spPr>
           <a:xfrm>
-            <a:off x="722376" y="2304288"/>
+            <a:off x="786384" y="2304288"/>
             <a:ext cx="10618927" cy="365760"/>
           </a:xfrm>
           <a:prstGeom prst="rect">
@@ -4610,7 +4616,7 @@
         </p:nvSpPr>
         <p:spPr>
           <a:xfrm>
-            <a:off x="722376" y="2761488"/>
+            <a:off x="786384" y="2761488"/>
             <a:ext cx="10618927" cy="1828800"/>
           </a:xfrm>
           <a:prstGeom prst="rect">
@@ -4666,7 +4672,7 @@
         </p:nvSpPr>
         <p:spPr>
           <a:xfrm>
-            <a:off x="502920" y="6382512"/>
+            <a:off x="566928" y="6382512"/>
             <a:ext cx="7315200" cy="219456"/>
           </a:xfrm>
           <a:prstGeom prst="rect">
@@ -4705,7 +4711,7 @@
         </p:nvSpPr>
         <p:spPr>
           <a:xfrm>
-            <a:off x="10774375" y="6382512"/>
+            <a:off x="10710367" y="6382512"/>
             <a:ext cx="914400" cy="219456"/>
           </a:xfrm>
           <a:prstGeom prst="rect">
@@ -4776,7 +4782,7 @@
         </p:nvSpPr>
         <p:spPr>
           <a:xfrm>
-            <a:off x="502920" y="457200"/>
+            <a:off x="566928" y="457200"/>
             <a:ext cx="384048" cy="384048"/>
           </a:xfrm>
           <a:prstGeom prst="ellipse">
@@ -4796,7 +4802,7 @@
         </p:nvSpPr>
         <p:spPr>
           <a:xfrm>
-            <a:off x="502920" y="457200"/>
+            <a:off x="566928" y="457200"/>
             <a:ext cx="384048" cy="384048"/>
           </a:xfrm>
           <a:prstGeom prst="rect">
@@ -4835,7 +4841,7 @@
         </p:nvSpPr>
         <p:spPr>
           <a:xfrm>
-            <a:off x="1069848" y="457200"/>
+            <a:off x="1133856" y="457200"/>
             <a:ext cx="10490911" cy="182880"/>
           </a:xfrm>
           <a:prstGeom prst="rect">
@@ -4874,7 +4880,7 @@
         </p:nvSpPr>
         <p:spPr>
           <a:xfrm>
-            <a:off x="1069848" y="658368"/>
+            <a:off x="1133856" y="658368"/>
             <a:ext cx="10490911" cy="420624"/>
           </a:xfrm>
           <a:prstGeom prst="rect">
@@ -4884,7 +4890,9 @@
           <a:ln/>
         </p:spPr>
         <p:txBody>
-          <a:bodyPr wrap="square" lIns="0" tIns="0" rIns="0" bIns="0" rtlCol="0" anchor="ctr"/>
+          <a:bodyPr wrap="square" lIns="0" tIns="0" rIns="0" bIns="0" rtlCol="0" anchor="ctr">
+            <a:normAutofit/>
+          </a:bodyPr>
           <a:lstStyle/>
           <a:p>
             <a:pPr indent="0" marL="0">
@@ -4913,7 +4921,7 @@
         </p:nvSpPr>
         <p:spPr>
           <a:xfrm>
-            <a:off x="502920" y="1463040"/>
+            <a:off x="566928" y="1463040"/>
             <a:ext cx="3588410" cy="658368"/>
           </a:xfrm>
           <a:prstGeom prst="roundRect">
@@ -4935,7 +4943,7 @@
         </p:nvSpPr>
         <p:spPr>
           <a:xfrm>
-            <a:off x="612648" y="1572768"/>
+            <a:off x="676656" y="1572768"/>
             <a:ext cx="438912" cy="438912"/>
           </a:xfrm>
           <a:prstGeom prst="ellipse">
@@ -4955,7 +4963,7 @@
         </p:nvSpPr>
         <p:spPr>
           <a:xfrm>
-            <a:off x="612648" y="1572768"/>
+            <a:off x="676656" y="1572768"/>
             <a:ext cx="438912" cy="438912"/>
           </a:xfrm>
           <a:prstGeom prst="rect">
@@ -4994,7 +5002,7 @@
         </p:nvSpPr>
         <p:spPr>
           <a:xfrm>
-            <a:off x="1161288" y="1554480"/>
+            <a:off x="1225296" y="1554480"/>
             <a:ext cx="2820314" cy="237744"/>
           </a:xfrm>
           <a:prstGeom prst="rect">
@@ -5033,7 +5041,7 @@
         </p:nvSpPr>
         <p:spPr>
           <a:xfrm>
-            <a:off x="1161288" y="1792224"/>
+            <a:off x="1225296" y="1792224"/>
             <a:ext cx="2820314" cy="256032"/>
           </a:xfrm>
           <a:prstGeom prst="rect">
@@ -5072,7 +5080,7 @@
         </p:nvSpPr>
         <p:spPr>
           <a:xfrm>
-            <a:off x="4091330" y="1600200"/>
+            <a:off x="4155338" y="1600200"/>
             <a:ext cx="146304" cy="384048"/>
           </a:xfrm>
           <a:prstGeom prst="rect">
@@ -5111,7 +5119,7 @@
         </p:nvSpPr>
         <p:spPr>
           <a:xfrm>
-            <a:off x="4237634" y="1463040"/>
+            <a:off x="4301642" y="1463040"/>
             <a:ext cx="3588410" cy="658368"/>
           </a:xfrm>
           <a:prstGeom prst="roundRect">
@@ -5133,7 +5141,7 @@
         </p:nvSpPr>
         <p:spPr>
           <a:xfrm>
-            <a:off x="4347362" y="1572768"/>
+            <a:off x="4411370" y="1572768"/>
             <a:ext cx="438912" cy="438912"/>
           </a:xfrm>
           <a:prstGeom prst="ellipse">
@@ -5153,7 +5161,7 @@
         </p:nvSpPr>
         <p:spPr>
           <a:xfrm>
-            <a:off x="4347362" y="1572768"/>
+            <a:off x="4411370" y="1572768"/>
             <a:ext cx="438912" cy="438912"/>
           </a:xfrm>
           <a:prstGeom prst="rect">
@@ -5192,7 +5200,7 @@
         </p:nvSpPr>
         <p:spPr>
           <a:xfrm>
-            <a:off x="4896002" y="1554480"/>
+            <a:off x="4960010" y="1554480"/>
             <a:ext cx="2820314" cy="237744"/>
           </a:xfrm>
           <a:prstGeom prst="rect">
@@ -5231,7 +5239,7 @@
         </p:nvSpPr>
         <p:spPr>
           <a:xfrm>
-            <a:off x="4896002" y="1792224"/>
+            <a:off x="4960010" y="1792224"/>
             <a:ext cx="2820314" cy="256032"/>
           </a:xfrm>
           <a:prstGeom prst="rect">
@@ -5270,7 +5278,7 @@
         </p:nvSpPr>
         <p:spPr>
           <a:xfrm>
-            <a:off x="7826045" y="1600200"/>
+            <a:off x="7890053" y="1600200"/>
             <a:ext cx="146304" cy="384048"/>
           </a:xfrm>
           <a:prstGeom prst="rect">
@@ -5309,7 +5317,7 @@
         </p:nvSpPr>
         <p:spPr>
           <a:xfrm>
-            <a:off x="7972349" y="1463040"/>
+            <a:off x="8036357" y="1463040"/>
             <a:ext cx="3588410" cy="658368"/>
           </a:xfrm>
           <a:prstGeom prst="roundRect">
@@ -5331,7 +5339,7 @@
         </p:nvSpPr>
         <p:spPr>
           <a:xfrm>
-            <a:off x="8082077" y="1572768"/>
+            <a:off x="8146085" y="1572768"/>
             <a:ext cx="438912" cy="438912"/>
           </a:xfrm>
           <a:prstGeom prst="ellipse">
@@ -5351,7 +5359,7 @@
         </p:nvSpPr>
         <p:spPr>
           <a:xfrm>
-            <a:off x="8082077" y="1572768"/>
+            <a:off x="8146085" y="1572768"/>
             <a:ext cx="438912" cy="438912"/>
           </a:xfrm>
           <a:prstGeom prst="rect">
@@ -5390,7 +5398,7 @@
         </p:nvSpPr>
         <p:spPr>
           <a:xfrm>
-            <a:off x="8630717" y="1554480"/>
+            <a:off x="8694725" y="1554480"/>
             <a:ext cx="2820314" cy="237744"/>
           </a:xfrm>
           <a:prstGeom prst="rect">
@@ -5429,7 +5437,7 @@
         </p:nvSpPr>
         <p:spPr>
           <a:xfrm>
-            <a:off x="8630717" y="1792224"/>
+            <a:off x="8694725" y="1792224"/>
             <a:ext cx="2820314" cy="256032"/>
           </a:xfrm>
           <a:prstGeom prst="rect">
@@ -5468,7 +5476,7 @@
         </p:nvSpPr>
         <p:spPr>
           <a:xfrm>
-            <a:off x="502920" y="2395728"/>
+            <a:off x="566928" y="2395728"/>
             <a:ext cx="5486400" cy="237744"/>
           </a:xfrm>
           <a:prstGeom prst="rect">
@@ -5507,7 +5515,7 @@
         </p:nvSpPr>
         <p:spPr>
           <a:xfrm>
-            <a:off x="502920" y="2724912"/>
+            <a:off x="566928" y="2724912"/>
             <a:ext cx="1280160" cy="292608"/>
           </a:xfrm>
           <a:prstGeom prst="roundRect">
@@ -5529,7 +5537,7 @@
         </p:nvSpPr>
         <p:spPr>
           <a:xfrm>
-            <a:off x="502920" y="2724912"/>
+            <a:off x="566928" y="2724912"/>
             <a:ext cx="1280160" cy="292608"/>
           </a:xfrm>
           <a:prstGeom prst="rect">
@@ -5568,7 +5576,7 @@
         </p:nvSpPr>
         <p:spPr>
           <a:xfrm>
-            <a:off x="1929384" y="2706624"/>
+            <a:off x="1993392" y="2706624"/>
             <a:ext cx="3840480" cy="329184"/>
           </a:xfrm>
           <a:prstGeom prst="rect">
@@ -5607,7 +5615,7 @@
         </p:nvSpPr>
         <p:spPr>
           <a:xfrm>
-            <a:off x="502920" y="3127248"/>
+            <a:off x="566928" y="3127248"/>
             <a:ext cx="1280160" cy="292608"/>
           </a:xfrm>
           <a:prstGeom prst="roundRect">
@@ -5629,7 +5637,7 @@
         </p:nvSpPr>
         <p:spPr>
           <a:xfrm>
-            <a:off x="502920" y="3127248"/>
+            <a:off x="566928" y="3127248"/>
             <a:ext cx="1280160" cy="292608"/>
           </a:xfrm>
           <a:prstGeom prst="rect">
@@ -5668,7 +5676,7 @@
         </p:nvSpPr>
         <p:spPr>
           <a:xfrm>
-            <a:off x="1929384" y="3108960"/>
+            <a:off x="1993392" y="3108960"/>
             <a:ext cx="3840480" cy="329184"/>
           </a:xfrm>
           <a:prstGeom prst="rect">
@@ -5707,7 +5715,7 @@
         </p:nvSpPr>
         <p:spPr>
           <a:xfrm>
-            <a:off x="502920" y="3529584"/>
+            <a:off x="566928" y="3529584"/>
             <a:ext cx="1280160" cy="292608"/>
           </a:xfrm>
           <a:prstGeom prst="roundRect">
@@ -5729,7 +5737,7 @@
         </p:nvSpPr>
         <p:spPr>
           <a:xfrm>
-            <a:off x="502920" y="3529584"/>
+            <a:off x="566928" y="3529584"/>
             <a:ext cx="1280160" cy="292608"/>
           </a:xfrm>
           <a:prstGeom prst="rect">
@@ -5768,7 +5776,7 @@
         </p:nvSpPr>
         <p:spPr>
           <a:xfrm>
-            <a:off x="1929384" y="3511296"/>
+            <a:off x="1993392" y="3511296"/>
             <a:ext cx="3840480" cy="329184"/>
           </a:xfrm>
           <a:prstGeom prst="rect">
@@ -5807,7 +5815,7 @@
         </p:nvSpPr>
         <p:spPr>
           <a:xfrm>
-            <a:off x="502920" y="3931920"/>
+            <a:off x="566928" y="3931920"/>
             <a:ext cx="1280160" cy="292608"/>
           </a:xfrm>
           <a:prstGeom prst="roundRect">
@@ -5829,7 +5837,7 @@
         </p:nvSpPr>
         <p:spPr>
           <a:xfrm>
-            <a:off x="502920" y="3931920"/>
+            <a:off x="566928" y="3931920"/>
             <a:ext cx="1280160" cy="292608"/>
           </a:xfrm>
           <a:prstGeom prst="rect">
@@ -5868,7 +5876,7 @@
         </p:nvSpPr>
         <p:spPr>
           <a:xfrm>
-            <a:off x="1929384" y="3913632"/>
+            <a:off x="1993392" y="3913632"/>
             <a:ext cx="3840480" cy="329184"/>
           </a:xfrm>
           <a:prstGeom prst="rect">
@@ -5907,7 +5915,7 @@
         </p:nvSpPr>
         <p:spPr>
           <a:xfrm>
-            <a:off x="502920" y="4334256"/>
+            <a:off x="566928" y="4334256"/>
             <a:ext cx="1280160" cy="292608"/>
           </a:xfrm>
           <a:prstGeom prst="roundRect">
@@ -5929,7 +5937,7 @@
         </p:nvSpPr>
         <p:spPr>
           <a:xfrm>
-            <a:off x="502920" y="4334256"/>
+            <a:off x="566928" y="4334256"/>
             <a:ext cx="1280160" cy="292608"/>
           </a:xfrm>
           <a:prstGeom prst="rect">
@@ -5968,7 +5976,7 @@
         </p:nvSpPr>
         <p:spPr>
           <a:xfrm>
-            <a:off x="1929384" y="4315968"/>
+            <a:off x="1993392" y="4315968"/>
             <a:ext cx="3840480" cy="329184"/>
           </a:xfrm>
           <a:prstGeom prst="rect">
@@ -6110,7 +6118,7 @@
         </p:nvSpPr>
         <p:spPr>
           <a:xfrm>
-            <a:off x="502920" y="5760720"/>
+            <a:off x="566928" y="5760720"/>
             <a:ext cx="11057839" cy="457200"/>
           </a:xfrm>
           <a:prstGeom prst="rect">
@@ -6130,7 +6138,7 @@
         </p:nvSpPr>
         <p:spPr>
           <a:xfrm>
-            <a:off x="685800" y="5806440"/>
+            <a:off x="749808" y="5806440"/>
             <a:ext cx="10692079" cy="365760"/>
           </a:xfrm>
           <a:prstGeom prst="rect">
@@ -6169,7 +6177,7 @@
         </p:nvSpPr>
         <p:spPr>
           <a:xfrm>
-            <a:off x="502920" y="6382512"/>
+            <a:off x="566928" y="6382512"/>
             <a:ext cx="7315200" cy="219456"/>
           </a:xfrm>
           <a:prstGeom prst="rect">
@@ -6208,7 +6216,7 @@
         </p:nvSpPr>
         <p:spPr>
           <a:xfrm>
-            <a:off x="10774375" y="6382512"/>
+            <a:off x="10710367" y="6382512"/>
             <a:ext cx="914400" cy="219456"/>
           </a:xfrm>
           <a:prstGeom prst="rect">
@@ -6279,7 +6287,7 @@
         </p:nvSpPr>
         <p:spPr>
           <a:xfrm>
-            <a:off x="502920" y="457200"/>
+            <a:off x="566928" y="457200"/>
             <a:ext cx="384048" cy="384048"/>
           </a:xfrm>
           <a:prstGeom prst="ellipse">
@@ -6299,7 +6307,7 @@
         </p:nvSpPr>
         <p:spPr>
           <a:xfrm>
-            <a:off x="502920" y="457200"/>
+            <a:off x="566928" y="457200"/>
             <a:ext cx="384048" cy="384048"/>
           </a:xfrm>
           <a:prstGeom prst="rect">
@@ -6338,7 +6346,7 @@
         </p:nvSpPr>
         <p:spPr>
           <a:xfrm>
-            <a:off x="1069848" y="457200"/>
+            <a:off x="1133856" y="457200"/>
             <a:ext cx="10490911" cy="182880"/>
           </a:xfrm>
           <a:prstGeom prst="rect">
@@ -6377,7 +6385,7 @@
         </p:nvSpPr>
         <p:spPr>
           <a:xfrm>
-            <a:off x="1069848" y="640080"/>
+            <a:off x="1133856" y="640080"/>
             <a:ext cx="10490911" cy="365760"/>
           </a:xfrm>
           <a:prstGeom prst="rect">
@@ -6387,7 +6395,9 @@
           <a:ln/>
         </p:spPr>
         <p:txBody>
-          <a:bodyPr wrap="square" lIns="0" tIns="0" rIns="0" bIns="0" rtlCol="0" anchor="ctr"/>
+          <a:bodyPr wrap="square" lIns="0" tIns="0" rIns="0" bIns="0" rtlCol="0" anchor="ctr">
+            <a:normAutofit/>
+          </a:bodyPr>
           <a:lstStyle/>
           <a:p>
             <a:pPr indent="0" marL="0">
@@ -6416,17 +6426,19 @@
         </p:nvSpPr>
         <p:spPr>
           <a:xfrm>
-            <a:off x="502920" y="1188720"/>
-            <a:ext cx="11057839" cy="457200"/>
-          </a:xfrm>
-          <a:prstGeom prst="rect">
-            <a:avLst/>
-          </a:prstGeom>
-          <a:noFill/>
-          <a:ln/>
-        </p:spPr>
-        <p:txBody>
-          <a:bodyPr wrap="square" rtlCol="0" anchor="ctr"/>
+            <a:off x="566928" y="1188720"/>
+            <a:ext cx="11057839" cy="219075"/>
+          </a:xfrm>
+          <a:prstGeom prst="rect">
+            <a:avLst/>
+          </a:prstGeom>
+          <a:noFill/>
+          <a:ln/>
+        </p:spPr>
+        <p:txBody>
+          <a:bodyPr wrap="square" lIns="0" tIns="0" rIns="0" bIns="0" rtlCol="0" anchor="ctr">
+            <a:normAutofit/>
+          </a:bodyPr>
           <a:lstStyle/>
           <a:p>
             <a:pPr indent="0" marL="0">
@@ -6455,7 +6467,7 @@
         </p:nvSpPr>
         <p:spPr>
           <a:xfrm>
-            <a:off x="502920" y="1691640"/>
+            <a:off x="566928" y="1480947"/>
             <a:ext cx="11057839" cy="0"/>
           </a:xfrm>
           <a:prstGeom prst="line">
@@ -6478,7 +6490,7 @@
         </p:nvSpPr>
         <p:spPr>
           <a:xfrm>
-            <a:off x="502920" y="1965960"/>
+            <a:off x="566928" y="1618107"/>
             <a:ext cx="2641016" cy="960120"/>
           </a:xfrm>
           <a:prstGeom prst="roundRect">
@@ -6505,7 +6517,7 @@
         </p:nvSpPr>
         <p:spPr>
           <a:xfrm>
-            <a:off x="667512" y="2093976"/>
+            <a:off x="731520" y="1746123"/>
             <a:ext cx="2311832" cy="201168"/>
           </a:xfrm>
           <a:prstGeom prst="rect">
@@ -6515,7 +6527,9 @@
           <a:ln/>
         </p:spPr>
         <p:txBody>
-          <a:bodyPr wrap="square" lIns="0" tIns="0" rIns="0" bIns="0" rtlCol="0" anchor="ctr"/>
+          <a:bodyPr wrap="square" lIns="0" tIns="0" rIns="0" bIns="0" rtlCol="0" anchor="ctr">
+            <a:normAutofit/>
+          </a:bodyPr>
           <a:lstStyle/>
           <a:p>
             <a:pPr indent="0" marL="0">
@@ -6544,8 +6558,8 @@
         </p:nvSpPr>
         <p:spPr>
           <a:xfrm>
-            <a:off x="667512" y="2313432"/>
-            <a:ext cx="2311832" cy="274320"/>
+            <a:off x="731520" y="1965579"/>
+            <a:ext cx="2311832" cy="279400"/>
           </a:xfrm>
           <a:prstGeom prst="rect">
             <a:avLst/>
@@ -6588,7 +6602,7 @@
         </p:nvSpPr>
         <p:spPr>
           <a:xfrm>
-            <a:off x="3308528" y="1965960"/>
+            <a:off x="3372536" y="1618107"/>
             <a:ext cx="2641016" cy="960120"/>
           </a:xfrm>
           <a:prstGeom prst="roundRect">
@@ -6615,7 +6629,7 @@
         </p:nvSpPr>
         <p:spPr>
           <a:xfrm>
-            <a:off x="3473120" y="2093976"/>
+            <a:off x="3537128" y="1746123"/>
             <a:ext cx="2311832" cy="201168"/>
           </a:xfrm>
           <a:prstGeom prst="rect">
@@ -6625,7 +6639,9 @@
           <a:ln/>
         </p:spPr>
         <p:txBody>
-          <a:bodyPr wrap="square" lIns="0" tIns="0" rIns="0" bIns="0" rtlCol="0" anchor="ctr"/>
+          <a:bodyPr wrap="square" lIns="0" tIns="0" rIns="0" bIns="0" rtlCol="0" anchor="ctr">
+            <a:normAutofit/>
+          </a:bodyPr>
           <a:lstStyle/>
           <a:p>
             <a:pPr indent="0" marL="0">
@@ -6654,8 +6670,8 @@
         </p:nvSpPr>
         <p:spPr>
           <a:xfrm>
-            <a:off x="3473120" y="2313432"/>
-            <a:ext cx="2311832" cy="274320"/>
+            <a:off x="3537128" y="1965579"/>
+            <a:ext cx="2311832" cy="279400"/>
           </a:xfrm>
           <a:prstGeom prst="rect">
             <a:avLst/>
@@ -6698,7 +6714,7 @@
         </p:nvSpPr>
         <p:spPr>
           <a:xfrm>
-            <a:off x="6114136" y="1965960"/>
+            <a:off x="6178144" y="1618107"/>
             <a:ext cx="2641016" cy="960120"/>
           </a:xfrm>
           <a:prstGeom prst="roundRect">
@@ -6725,7 +6741,7 @@
         </p:nvSpPr>
         <p:spPr>
           <a:xfrm>
-            <a:off x="6278728" y="2093976"/>
+            <a:off x="6342736" y="1746123"/>
             <a:ext cx="2311832" cy="201168"/>
           </a:xfrm>
           <a:prstGeom prst="rect">
@@ -6735,7 +6751,9 @@
           <a:ln/>
         </p:spPr>
         <p:txBody>
-          <a:bodyPr wrap="square" lIns="0" tIns="0" rIns="0" bIns="0" rtlCol="0" anchor="ctr"/>
+          <a:bodyPr wrap="square" lIns="0" tIns="0" rIns="0" bIns="0" rtlCol="0" anchor="ctr">
+            <a:normAutofit/>
+          </a:bodyPr>
           <a:lstStyle/>
           <a:p>
             <a:pPr indent="0" marL="0">
@@ -6764,8 +6782,8 @@
         </p:nvSpPr>
         <p:spPr>
           <a:xfrm>
-            <a:off x="6278728" y="2313432"/>
-            <a:ext cx="2311832" cy="274320"/>
+            <a:off x="6342736" y="1965579"/>
+            <a:ext cx="2311832" cy="279400"/>
           </a:xfrm>
           <a:prstGeom prst="rect">
             <a:avLst/>
@@ -6808,7 +6826,7 @@
         </p:nvSpPr>
         <p:spPr>
           <a:xfrm>
-            <a:off x="8919743" y="1965960"/>
+            <a:off x="8983751" y="1618107"/>
             <a:ext cx="2641016" cy="960120"/>
           </a:xfrm>
           <a:prstGeom prst="roundRect">
@@ -6835,7 +6853,7 @@
         </p:nvSpPr>
         <p:spPr>
           <a:xfrm>
-            <a:off x="9084335" y="2093976"/>
+            <a:off x="9148343" y="1746123"/>
             <a:ext cx="2311832" cy="201168"/>
           </a:xfrm>
           <a:prstGeom prst="rect">
@@ -6845,7 +6863,9 @@
           <a:ln/>
         </p:spPr>
         <p:txBody>
-          <a:bodyPr wrap="square" lIns="0" tIns="0" rIns="0" bIns="0" rtlCol="0" anchor="ctr"/>
+          <a:bodyPr wrap="square" lIns="0" tIns="0" rIns="0" bIns="0" rtlCol="0" anchor="ctr">
+            <a:normAutofit/>
+          </a:bodyPr>
           <a:lstStyle/>
           <a:p>
             <a:pPr indent="0" marL="0">
@@ -6874,8 +6894,8 @@
         </p:nvSpPr>
         <p:spPr>
           <a:xfrm>
-            <a:off x="9084335" y="2313432"/>
-            <a:ext cx="2311832" cy="274320"/>
+            <a:off x="9148343" y="1965579"/>
+            <a:ext cx="2311832" cy="279400"/>
           </a:xfrm>
           <a:prstGeom prst="rect">
             <a:avLst/>
@@ -6918,7 +6938,7 @@
         </p:nvSpPr>
         <p:spPr>
           <a:xfrm>
-            <a:off x="502920" y="3090672"/>
+            <a:off x="566928" y="2742819"/>
             <a:ext cx="2641016" cy="960120"/>
           </a:xfrm>
           <a:prstGeom prst="roundRect">
@@ -6945,7 +6965,7 @@
         </p:nvSpPr>
         <p:spPr>
           <a:xfrm>
-            <a:off x="667512" y="3218688"/>
+            <a:off x="731520" y="2870835"/>
             <a:ext cx="2311832" cy="201168"/>
           </a:xfrm>
           <a:prstGeom prst="rect">
@@ -6955,7 +6975,9 @@
           <a:ln/>
         </p:spPr>
         <p:txBody>
-          <a:bodyPr wrap="square" lIns="0" tIns="0" rIns="0" bIns="0" rtlCol="0" anchor="ctr"/>
+          <a:bodyPr wrap="square" lIns="0" tIns="0" rIns="0" bIns="0" rtlCol="0" anchor="ctr">
+            <a:normAutofit/>
+          </a:bodyPr>
           <a:lstStyle/>
           <a:p>
             <a:pPr indent="0" marL="0">
@@ -6984,8 +7006,8 @@
         </p:nvSpPr>
         <p:spPr>
           <a:xfrm>
-            <a:off x="667512" y="3438144"/>
-            <a:ext cx="2311832" cy="274320"/>
+            <a:off x="731520" y="3090291"/>
+            <a:ext cx="2311832" cy="279400"/>
           </a:xfrm>
           <a:prstGeom prst="rect">
             <a:avLst/>
@@ -7028,7 +7050,7 @@
         </p:nvSpPr>
         <p:spPr>
           <a:xfrm>
-            <a:off x="3308528" y="3090672"/>
+            <a:off x="3372536" y="2742819"/>
             <a:ext cx="2641016" cy="960120"/>
           </a:xfrm>
           <a:prstGeom prst="roundRect">
@@ -7055,7 +7077,7 @@
         </p:nvSpPr>
         <p:spPr>
           <a:xfrm>
-            <a:off x="3473120" y="3218688"/>
+            <a:off x="3537128" y="2870835"/>
             <a:ext cx="2311832" cy="201168"/>
           </a:xfrm>
           <a:prstGeom prst="rect">
@@ -7065,7 +7087,9 @@
           <a:ln/>
         </p:spPr>
         <p:txBody>
-          <a:bodyPr wrap="square" lIns="0" tIns="0" rIns="0" bIns="0" rtlCol="0" anchor="ctr"/>
+          <a:bodyPr wrap="square" lIns="0" tIns="0" rIns="0" bIns="0" rtlCol="0" anchor="ctr">
+            <a:normAutofit/>
+          </a:bodyPr>
           <a:lstStyle/>
           <a:p>
             <a:pPr indent="0" marL="0">
@@ -7094,8 +7118,8 @@
         </p:nvSpPr>
         <p:spPr>
           <a:xfrm>
-            <a:off x="3473120" y="3438144"/>
-            <a:ext cx="2311832" cy="274320"/>
+            <a:off x="3537128" y="3090291"/>
+            <a:ext cx="2311832" cy="279400"/>
           </a:xfrm>
           <a:prstGeom prst="rect">
             <a:avLst/>
@@ -7138,7 +7162,7 @@
         </p:nvSpPr>
         <p:spPr>
           <a:xfrm>
-            <a:off x="6114136" y="3090672"/>
+            <a:off x="6178144" y="2742819"/>
             <a:ext cx="2641016" cy="960120"/>
           </a:xfrm>
           <a:prstGeom prst="roundRect">
@@ -7165,7 +7189,7 @@
         </p:nvSpPr>
         <p:spPr>
           <a:xfrm>
-            <a:off x="6278728" y="3218688"/>
+            <a:off x="6342736" y="2870835"/>
             <a:ext cx="2311832" cy="201168"/>
           </a:xfrm>
           <a:prstGeom prst="rect">
@@ -7175,7 +7199,9 @@
           <a:ln/>
         </p:spPr>
         <p:txBody>
-          <a:bodyPr wrap="square" lIns="0" tIns="0" rIns="0" bIns="0" rtlCol="0" anchor="ctr"/>
+          <a:bodyPr wrap="square" lIns="0" tIns="0" rIns="0" bIns="0" rtlCol="0" anchor="ctr">
+            <a:normAutofit/>
+          </a:bodyPr>
           <a:lstStyle/>
           <a:p>
             <a:pPr indent="0" marL="0">
@@ -7204,8 +7230,8 @@
         </p:nvSpPr>
         <p:spPr>
           <a:xfrm>
-            <a:off x="6278728" y="3438144"/>
-            <a:ext cx="2311832" cy="274320"/>
+            <a:off x="6342736" y="3090291"/>
+            <a:ext cx="2311832" cy="279400"/>
           </a:xfrm>
           <a:prstGeom prst="rect">
             <a:avLst/>
@@ -7248,7 +7274,7 @@
         </p:nvSpPr>
         <p:spPr>
           <a:xfrm>
-            <a:off x="8919743" y="3090672"/>
+            <a:off x="8983751" y="2742819"/>
             <a:ext cx="2641016" cy="960120"/>
           </a:xfrm>
           <a:prstGeom prst="roundRect">
@@ -7275,7 +7301,7 @@
         </p:nvSpPr>
         <p:spPr>
           <a:xfrm>
-            <a:off x="9084335" y="3218688"/>
+            <a:off x="9148343" y="2870835"/>
             <a:ext cx="2311832" cy="201168"/>
           </a:xfrm>
           <a:prstGeom prst="rect">
@@ -7285,7 +7311,9 @@
           <a:ln/>
         </p:spPr>
         <p:txBody>
-          <a:bodyPr wrap="square" lIns="0" tIns="0" rIns="0" bIns="0" rtlCol="0" anchor="ctr"/>
+          <a:bodyPr wrap="square" lIns="0" tIns="0" rIns="0" bIns="0" rtlCol="0" anchor="ctr">
+            <a:normAutofit/>
+          </a:bodyPr>
           <a:lstStyle/>
           <a:p>
             <a:pPr indent="0" marL="0">
@@ -7314,8 +7342,8 @@
         </p:nvSpPr>
         <p:spPr>
           <a:xfrm>
-            <a:off x="9084335" y="3438144"/>
-            <a:ext cx="2311832" cy="274320"/>
+            <a:off x="9148343" y="3090291"/>
+            <a:ext cx="2311832" cy="279400"/>
           </a:xfrm>
           <a:prstGeom prst="rect">
             <a:avLst/>
@@ -7358,7 +7386,7 @@
         </p:nvSpPr>
         <p:spPr>
           <a:xfrm>
-            <a:off x="502920" y="4306824"/>
+            <a:off x="566928" y="3958971"/>
             <a:ext cx="11057839" cy="274320"/>
           </a:xfrm>
           <a:prstGeom prst="rect">
@@ -7397,12 +7425,12 @@
         </p:nvSpPr>
         <p:spPr>
           <a:xfrm>
-            <a:off x="502920" y="4636008"/>
-            <a:ext cx="11057839" cy="396240"/>
+            <a:off x="566928" y="4288155"/>
+            <a:ext cx="11057839" cy="512191"/>
           </a:xfrm>
           <a:prstGeom prst="roundRect">
             <a:avLst>
-              <a:gd name="adj" fmla="val 11538"/>
+              <a:gd name="adj" fmla="val 8926"/>
             </a:avLst>
           </a:prstGeom>
           <a:solidFill>
@@ -7424,12 +7452,12 @@
         </p:nvSpPr>
         <p:spPr>
           <a:xfrm>
-            <a:off x="612648" y="4709160"/>
-            <a:ext cx="411480" cy="249936"/>
+            <a:off x="676656" y="4361371"/>
+            <a:ext cx="411480" cy="365760"/>
           </a:xfrm>
           <a:prstGeom prst="roundRect">
             <a:avLst>
-              <a:gd name="adj" fmla="val 14634"/>
+              <a:gd name="adj" fmla="val 10000"/>
             </a:avLst>
           </a:prstGeom>
           <a:solidFill>
@@ -7451,8 +7479,8 @@
         </p:nvSpPr>
         <p:spPr>
           <a:xfrm>
-            <a:off x="612648" y="4709160"/>
-            <a:ext cx="411480" cy="249936"/>
+            <a:off x="676656" y="4361371"/>
+            <a:ext cx="411480" cy="365760"/>
           </a:xfrm>
           <a:prstGeom prst="rect">
             <a:avLst/>
@@ -7490,8 +7518,8 @@
         </p:nvSpPr>
         <p:spPr>
           <a:xfrm>
-            <a:off x="1143000" y="4672584"/>
-            <a:ext cx="10280599" cy="323088"/>
+            <a:off x="1207008" y="4324731"/>
+            <a:ext cx="10280599" cy="439039"/>
           </a:xfrm>
           <a:prstGeom prst="rect">
             <a:avLst/>
@@ -7507,7 +7535,7 @@
               <a:buNone/>
             </a:pPr>
             <a:r>
-              <a:rPr lang="en-US" sz="1000" dirty="0">
+              <a:rPr lang="en-US" sz="1150" dirty="0">
                 <a:solidFill>
                   <a:srgbClr val="10161F"/>
                 </a:solidFill>
@@ -7517,7 +7545,7 @@
               </a:rPr>
               <a:t>입지 가치: 대중교통 역세권 입지, 해당 권역 업무·상업 중심지 배후 수요 확보</a:t>
             </a:r>
-            <a:endParaRPr lang="en-US" sz="1000" dirty="0"/>
+            <a:endParaRPr lang="en-US" sz="1150" dirty="0"/>
           </a:p>
         </p:txBody>
       </p:sp>
@@ -7529,12 +7557,12 @@
         </p:nvSpPr>
         <p:spPr>
           <a:xfrm>
-            <a:off x="502920" y="5114544"/>
-            <a:ext cx="11057839" cy="396240"/>
+            <a:off x="566928" y="4882642"/>
+            <a:ext cx="11057839" cy="512191"/>
           </a:xfrm>
           <a:prstGeom prst="roundRect">
             <a:avLst>
-              <a:gd name="adj" fmla="val 11538"/>
+              <a:gd name="adj" fmla="val 8926"/>
             </a:avLst>
           </a:prstGeom>
           <a:solidFill>
@@ -7556,12 +7584,12 @@
         </p:nvSpPr>
         <p:spPr>
           <a:xfrm>
-            <a:off x="612648" y="5187696"/>
-            <a:ext cx="411480" cy="249936"/>
+            <a:off x="676656" y="4955858"/>
+            <a:ext cx="411480" cy="365760"/>
           </a:xfrm>
           <a:prstGeom prst="roundRect">
             <a:avLst>
-              <a:gd name="adj" fmla="val 14634"/>
+              <a:gd name="adj" fmla="val 10000"/>
             </a:avLst>
           </a:prstGeom>
           <a:solidFill>
@@ -7583,8 +7611,8 @@
         </p:nvSpPr>
         <p:spPr>
           <a:xfrm>
-            <a:off x="612648" y="5187696"/>
-            <a:ext cx="411480" cy="249936"/>
+            <a:off x="676656" y="4955858"/>
+            <a:ext cx="411480" cy="365760"/>
           </a:xfrm>
           <a:prstGeom prst="rect">
             <a:avLst/>
@@ -7622,8 +7650,8 @@
         </p:nvSpPr>
         <p:spPr>
           <a:xfrm>
-            <a:off x="1143000" y="5151120"/>
-            <a:ext cx="10280599" cy="323088"/>
+            <a:off x="1207008" y="4919218"/>
+            <a:ext cx="10280599" cy="439039"/>
           </a:xfrm>
           <a:prstGeom prst="rect">
             <a:avLst/>
@@ -7639,7 +7667,7 @@
               <a:buNone/>
             </a:pPr>
             <a:r>
-              <a:rPr lang="en-US" sz="1000" dirty="0">
+              <a:rPr lang="en-US" sz="1150" dirty="0">
                 <a:solidFill>
                   <a:srgbClr val="10161F"/>
                 </a:solidFill>
@@ -7649,7 +7677,7 @@
               </a:rPr>
               <a:t>자산 규모: 해당 권역 소재 단독 빌딩 매입 기회</a:t>
             </a:r>
-            <a:endParaRPr lang="en-US" sz="1000" dirty="0"/>
+            <a:endParaRPr lang="en-US" sz="1150" dirty="0"/>
           </a:p>
         </p:txBody>
       </p:sp>
@@ -7661,12 +7689,12 @@
         </p:nvSpPr>
         <p:spPr>
           <a:xfrm>
-            <a:off x="502920" y="5593080"/>
-            <a:ext cx="11057839" cy="396240"/>
+            <a:off x="566928" y="5477129"/>
+            <a:ext cx="11057839" cy="512191"/>
           </a:xfrm>
           <a:prstGeom prst="roundRect">
             <a:avLst>
-              <a:gd name="adj" fmla="val 11538"/>
+              <a:gd name="adj" fmla="val 8926"/>
             </a:avLst>
           </a:prstGeom>
           <a:solidFill>
@@ -7688,12 +7716,12 @@
         </p:nvSpPr>
         <p:spPr>
           <a:xfrm>
-            <a:off x="612648" y="5666232"/>
-            <a:ext cx="411480" cy="249936"/>
+            <a:off x="676656" y="5550345"/>
+            <a:ext cx="411480" cy="365760"/>
           </a:xfrm>
           <a:prstGeom prst="roundRect">
             <a:avLst>
-              <a:gd name="adj" fmla="val 14634"/>
+              <a:gd name="adj" fmla="val 10000"/>
             </a:avLst>
           </a:prstGeom>
           <a:solidFill>
@@ -7715,8 +7743,8 @@
         </p:nvSpPr>
         <p:spPr>
           <a:xfrm>
-            <a:off x="612648" y="5666232"/>
-            <a:ext cx="411480" cy="249936"/>
+            <a:off x="676656" y="5550345"/>
+            <a:ext cx="411480" cy="365760"/>
           </a:xfrm>
           <a:prstGeom prst="rect">
             <a:avLst/>
@@ -7754,8 +7782,8 @@
         </p:nvSpPr>
         <p:spPr>
           <a:xfrm>
-            <a:off x="1143000" y="5629656"/>
-            <a:ext cx="10280599" cy="323088"/>
+            <a:off x="1207008" y="5513705"/>
+            <a:ext cx="10280599" cy="439039"/>
           </a:xfrm>
           <a:prstGeom prst="rect">
             <a:avLst/>
@@ -7771,7 +7799,7 @@
               <a:buNone/>
             </a:pPr>
             <a:r>
-              <a:rPr lang="en-US" sz="1000" dirty="0">
+              <a:rPr lang="en-US" sz="1150" dirty="0">
                 <a:solidFill>
                   <a:srgbClr val="10161F"/>
                 </a:solidFill>
@@ -7781,7 +7809,7 @@
               </a:rPr>
               <a:t>수익 안정성: 안정적 임대수익 기반 투자 매물</a:t>
             </a:r>
-            <a:endParaRPr lang="en-US" sz="1000" dirty="0"/>
+            <a:endParaRPr lang="en-US" sz="1150" dirty="0"/>
           </a:p>
         </p:txBody>
       </p:sp>
@@ -7793,7 +7821,7 @@
         </p:nvSpPr>
         <p:spPr>
           <a:xfrm>
-            <a:off x="502920" y="6382512"/>
+            <a:off x="566928" y="6382512"/>
             <a:ext cx="7315200" cy="219456"/>
           </a:xfrm>
           <a:prstGeom prst="rect">
@@ -7832,7 +7860,7 @@
         </p:nvSpPr>
         <p:spPr>
           <a:xfrm>
-            <a:off x="10774375" y="6382512"/>
+            <a:off x="10710367" y="6382512"/>
             <a:ext cx="914400" cy="219456"/>
           </a:xfrm>
           <a:prstGeom prst="rect">
@@ -7903,7 +7931,7 @@
         </p:nvSpPr>
         <p:spPr>
           <a:xfrm>
-            <a:off x="502920" y="457200"/>
+            <a:off x="566928" y="457200"/>
             <a:ext cx="384048" cy="384048"/>
           </a:xfrm>
           <a:prstGeom prst="ellipse">
@@ -7923,7 +7951,7 @@
         </p:nvSpPr>
         <p:spPr>
           <a:xfrm>
-            <a:off x="502920" y="457200"/>
+            <a:off x="566928" y="457200"/>
             <a:ext cx="384048" cy="384048"/>
           </a:xfrm>
           <a:prstGeom prst="rect">
@@ -7962,7 +7990,7 @@
         </p:nvSpPr>
         <p:spPr>
           <a:xfrm>
-            <a:off x="1069848" y="457200"/>
+            <a:off x="1133856" y="457200"/>
             <a:ext cx="10490911" cy="182880"/>
           </a:xfrm>
           <a:prstGeom prst="rect">
@@ -8001,7 +8029,7 @@
         </p:nvSpPr>
         <p:spPr>
           <a:xfrm>
-            <a:off x="1069848" y="640080"/>
+            <a:off x="1133856" y="640080"/>
             <a:ext cx="10490911" cy="365760"/>
           </a:xfrm>
           <a:prstGeom prst="rect">
@@ -8011,7 +8039,9 @@
           <a:ln/>
         </p:spPr>
         <p:txBody>
-          <a:bodyPr wrap="square" lIns="0" tIns="0" rIns="0" bIns="0" rtlCol="0" anchor="ctr"/>
+          <a:bodyPr wrap="square" lIns="0" tIns="0" rIns="0" bIns="0" rtlCol="0" anchor="ctr">
+            <a:normAutofit/>
+          </a:bodyPr>
           <a:lstStyle/>
           <a:p>
             <a:pPr indent="0" marL="0">
@@ -8048,7 +8078,7 @@
         </p:blipFill>
         <p:spPr>
           <a:xfrm>
-            <a:off x="502920" y="1481328"/>
+            <a:off x="566928" y="1481328"/>
             <a:ext cx="5120640" cy="4114800"/>
           </a:xfrm>
           <a:prstGeom prst="rect">
@@ -8064,7 +8094,7 @@
         </p:nvSpPr>
         <p:spPr>
           <a:xfrm>
-            <a:off x="5989320" y="1481328"/>
+            <a:off x="6053328" y="1481328"/>
             <a:ext cx="1560003" cy="457200"/>
           </a:xfrm>
           <a:prstGeom prst="rect">
@@ -8074,7 +8104,9 @@
           <a:ln/>
         </p:spPr>
         <p:txBody>
-          <a:bodyPr wrap="square" lIns="0" tIns="0" rIns="0" bIns="0" rtlCol="0" anchor="ctr"/>
+          <a:bodyPr wrap="square" lIns="0" tIns="0" rIns="0" bIns="0" rtlCol="0" anchor="ctr">
+            <a:normAutofit/>
+          </a:bodyPr>
           <a:lstStyle/>
           <a:p>
             <a:pPr indent="0" marL="0">
@@ -8106,7 +8138,7 @@
         </p:nvSpPr>
         <p:spPr>
           <a:xfrm>
-            <a:off x="7549323" y="1481328"/>
+            <a:off x="7613331" y="1481328"/>
             <a:ext cx="4011436" cy="457200"/>
           </a:xfrm>
           <a:prstGeom prst="rect">
@@ -8116,7 +8148,9 @@
           <a:ln/>
         </p:spPr>
         <p:txBody>
-          <a:bodyPr wrap="square" lIns="0" tIns="0" rIns="0" bIns="0" rtlCol="0" anchor="ctr"/>
+          <a:bodyPr wrap="square" lIns="0" tIns="0" rIns="0" bIns="0" rtlCol="0" anchor="ctr">
+            <a:normAutofit/>
+          </a:bodyPr>
           <a:lstStyle/>
           <a:p>
             <a:pPr indent="0" marL="0">
@@ -8148,7 +8182,7 @@
         </p:nvSpPr>
         <p:spPr>
           <a:xfrm>
-            <a:off x="5989320" y="1938528"/>
+            <a:off x="6053328" y="1938528"/>
             <a:ext cx="5571439" cy="0"/>
           </a:xfrm>
           <a:prstGeom prst="line">
@@ -8171,7 +8205,7 @@
         </p:nvSpPr>
         <p:spPr>
           <a:xfrm>
-            <a:off x="5989320" y="1938528"/>
+            <a:off x="6053328" y="1938528"/>
             <a:ext cx="1560003" cy="457200"/>
           </a:xfrm>
           <a:prstGeom prst="rect">
@@ -8181,7 +8215,9 @@
           <a:ln/>
         </p:spPr>
         <p:txBody>
-          <a:bodyPr wrap="square" lIns="0" tIns="0" rIns="0" bIns="0" rtlCol="0" anchor="ctr"/>
+          <a:bodyPr wrap="square" lIns="0" tIns="0" rIns="0" bIns="0" rtlCol="0" anchor="ctr">
+            <a:normAutofit/>
+          </a:bodyPr>
           <a:lstStyle/>
           <a:p>
             <a:pPr indent="0" marL="0">
@@ -8213,7 +8249,7 @@
         </p:nvSpPr>
         <p:spPr>
           <a:xfrm>
-            <a:off x="7549323" y="1938528"/>
+            <a:off x="7613331" y="1938528"/>
             <a:ext cx="4011436" cy="457200"/>
           </a:xfrm>
           <a:prstGeom prst="rect">
@@ -8223,7 +8259,9 @@
           <a:ln/>
         </p:spPr>
         <p:txBody>
-          <a:bodyPr wrap="square" lIns="0" tIns="0" rIns="0" bIns="0" rtlCol="0" anchor="ctr"/>
+          <a:bodyPr wrap="square" lIns="0" tIns="0" rIns="0" bIns="0" rtlCol="0" anchor="ctr">
+            <a:normAutofit/>
+          </a:bodyPr>
           <a:lstStyle/>
           <a:p>
             <a:pPr indent="0" marL="0">
@@ -8255,7 +8293,7 @@
         </p:nvSpPr>
         <p:spPr>
           <a:xfrm>
-            <a:off x="5989320" y="2505456"/>
+            <a:off x="6053328" y="2505456"/>
             <a:ext cx="5571439" cy="658368"/>
           </a:xfrm>
           <a:prstGeom prst="roundRect">
@@ -8277,7 +8315,7 @@
         </p:nvSpPr>
         <p:spPr>
           <a:xfrm>
-            <a:off x="5989320" y="2560320"/>
+            <a:off x="6053328" y="2560320"/>
             <a:ext cx="36576" cy="548640"/>
           </a:xfrm>
           <a:prstGeom prst="rect">
@@ -8297,7 +8335,7 @@
         </p:nvSpPr>
         <p:spPr>
           <a:xfrm>
-            <a:off x="6135624" y="2596896"/>
+            <a:off x="6199632" y="2596896"/>
             <a:ext cx="5315407" cy="201168"/>
           </a:xfrm>
           <a:prstGeom prst="rect">
@@ -8336,7 +8374,7 @@
         </p:nvSpPr>
         <p:spPr>
           <a:xfrm>
-            <a:off x="6135624" y="2798064"/>
+            <a:off x="6199632" y="2798064"/>
             <a:ext cx="5315407" cy="329184"/>
           </a:xfrm>
           <a:prstGeom prst="rect">
@@ -8379,7 +8417,7 @@
         </p:nvSpPr>
         <p:spPr>
           <a:xfrm>
-            <a:off x="502920" y="6382512"/>
+            <a:off x="566928" y="6382512"/>
             <a:ext cx="7315200" cy="219456"/>
           </a:xfrm>
           <a:prstGeom prst="rect">
@@ -8418,7 +8456,7 @@
         </p:nvSpPr>
         <p:spPr>
           <a:xfrm>
-            <a:off x="10774375" y="6382512"/>
+            <a:off x="10710367" y="6382512"/>
             <a:ext cx="914400" cy="219456"/>
           </a:xfrm>
           <a:prstGeom prst="rect">
@@ -8489,7 +8527,7 @@
         </p:nvSpPr>
         <p:spPr>
           <a:xfrm>
-            <a:off x="502920" y="457200"/>
+            <a:off x="566928" y="457200"/>
             <a:ext cx="384048" cy="384048"/>
           </a:xfrm>
           <a:prstGeom prst="ellipse">
@@ -8509,7 +8547,7 @@
         </p:nvSpPr>
         <p:spPr>
           <a:xfrm>
-            <a:off x="502920" y="457200"/>
+            <a:off x="566928" y="457200"/>
             <a:ext cx="384048" cy="384048"/>
           </a:xfrm>
           <a:prstGeom prst="rect">
@@ -8548,7 +8586,7 @@
         </p:nvSpPr>
         <p:spPr>
           <a:xfrm>
-            <a:off x="1069848" y="457200"/>
+            <a:off x="1133856" y="457200"/>
             <a:ext cx="10490911" cy="182880"/>
           </a:xfrm>
           <a:prstGeom prst="rect">
@@ -8587,7 +8625,7 @@
         </p:nvSpPr>
         <p:spPr>
           <a:xfrm>
-            <a:off x="1069848" y="640080"/>
+            <a:off x="1133856" y="640080"/>
             <a:ext cx="10490911" cy="365760"/>
           </a:xfrm>
           <a:prstGeom prst="rect">
@@ -8597,6 +8635,47 @@
           <a:ln/>
         </p:spPr>
         <p:txBody>
+          <a:bodyPr wrap="square" lIns="0" tIns="0" rIns="0" bIns="0" rtlCol="0" anchor="ctr">
+            <a:normAutofit/>
+          </a:bodyPr>
+          <a:lstStyle/>
+          <a:p>
+            <a:pPr indent="0" marL="0">
+              <a:buNone/>
+            </a:pPr>
+            <a:r>
+              <a:rPr lang="en-US" sz="2300" b="1" dirty="0">
+                <a:solidFill>
+                  <a:srgbClr val="10161F"/>
+                </a:solidFill>
+                <a:latin typeface="Pretendard" pitchFamily="34" charset="0"/>
+                <a:ea typeface="Pretendard" pitchFamily="34" charset="-122"/>
+                <a:cs typeface="Pretendard" pitchFamily="34" charset="-120"/>
+              </a:rPr>
+              <a:t>토지 현황</a:t>
+            </a:r>
+            <a:endParaRPr lang="en-US" sz="2300" dirty="0"/>
+          </a:p>
+        </p:txBody>
+      </p:sp>
+      <p:sp>
+        <p:nvSpPr>
+          <p:cNvPr id="6" name="Text 4"/>
+          <p:cNvSpPr/>
+          <p:nvPr/>
+        </p:nvSpPr>
+        <p:spPr>
+          <a:xfrm>
+            <a:off x="566928" y="1371600"/>
+            <a:ext cx="6858000" cy="237744"/>
+          </a:xfrm>
+          <a:prstGeom prst="rect">
+            <a:avLst/>
+          </a:prstGeom>
+          <a:noFill/>
+          <a:ln/>
+        </p:spPr>
+        <p:txBody>
           <a:bodyPr wrap="square" lIns="0" tIns="0" rIns="0" bIns="0" rtlCol="0" anchor="ctr"/>
           <a:lstStyle/>
           <a:p>
@@ -8604,7 +8683,7 @@
               <a:buNone/>
             </a:pPr>
             <a:r>
-              <a:rPr lang="en-US" sz="2300" b="1" dirty="0">
+              <a:rPr lang="en-US" sz="1100" b="1" dirty="0">
                 <a:solidFill>
                   <a:srgbClr val="10161F"/>
                 </a:solidFill>
@@ -8614,45 +8693,6 @@
               </a:rPr>
               <a:t>토지 현황</a:t>
             </a:r>
-            <a:endParaRPr lang="en-US" sz="2300" dirty="0"/>
-          </a:p>
-        </p:txBody>
-      </p:sp>
-      <p:sp>
-        <p:nvSpPr>
-          <p:cNvPr id="6" name="Text 4"/>
-          <p:cNvSpPr/>
-          <p:nvPr/>
-        </p:nvSpPr>
-        <p:spPr>
-          <a:xfrm>
-            <a:off x="502920" y="1371600"/>
-            <a:ext cx="6858000" cy="237744"/>
-          </a:xfrm>
-          <a:prstGeom prst="rect">
-            <a:avLst/>
-          </a:prstGeom>
-          <a:noFill/>
-          <a:ln/>
-        </p:spPr>
-        <p:txBody>
-          <a:bodyPr wrap="square" lIns="0" tIns="0" rIns="0" bIns="0" rtlCol="0" anchor="ctr"/>
-          <a:lstStyle/>
-          <a:p>
-            <a:pPr indent="0" marL="0">
-              <a:buNone/>
-            </a:pPr>
-            <a:r>
-              <a:rPr lang="en-US" sz="1100" b="1" dirty="0">
-                <a:solidFill>
-                  <a:srgbClr val="10161F"/>
-                </a:solidFill>
-                <a:latin typeface="Pretendard" pitchFamily="34" charset="0"/>
-                <a:ea typeface="Pretendard" pitchFamily="34" charset="-122"/>
-                <a:cs typeface="Pretendard" pitchFamily="34" charset="-120"/>
-              </a:rPr>
-              <a:t>토지 현황</a:t>
-            </a:r>
             <a:endParaRPr lang="en-US" sz="1100" dirty="0"/>
           </a:p>
         </p:txBody>
@@ -8665,7 +8705,7 @@
         </p:nvSpPr>
         <p:spPr>
           <a:xfrm>
-            <a:off x="502920" y="1645920"/>
+            <a:off x="566928" y="1645920"/>
             <a:ext cx="1920240" cy="402336"/>
           </a:xfrm>
           <a:prstGeom prst="rect">
@@ -8675,7 +8715,9 @@
           <a:ln/>
         </p:spPr>
         <p:txBody>
-          <a:bodyPr wrap="square" lIns="0" tIns="0" rIns="0" bIns="0" rtlCol="0" anchor="ctr"/>
+          <a:bodyPr wrap="square" lIns="0" tIns="0" rIns="0" bIns="0" rtlCol="0" anchor="ctr">
+            <a:normAutofit/>
+          </a:bodyPr>
           <a:lstStyle/>
           <a:p>
             <a:pPr indent="0" marL="0">
@@ -8707,7 +8749,7 @@
         </p:nvSpPr>
         <p:spPr>
           <a:xfrm>
-            <a:off x="2423160" y="1645920"/>
+            <a:off x="2487168" y="1645920"/>
             <a:ext cx="4937760" cy="402336"/>
           </a:xfrm>
           <a:prstGeom prst="rect">
@@ -8717,7 +8759,9 @@
           <a:ln/>
         </p:spPr>
         <p:txBody>
-          <a:bodyPr wrap="square" lIns="0" tIns="0" rIns="0" bIns="0" rtlCol="0" anchor="ctr"/>
+          <a:bodyPr wrap="square" lIns="0" tIns="0" rIns="0" bIns="0" rtlCol="0" anchor="ctr">
+            <a:normAutofit/>
+          </a:bodyPr>
           <a:lstStyle/>
           <a:p>
             <a:pPr indent="0" marL="0">
@@ -8749,7 +8793,7 @@
         </p:nvSpPr>
         <p:spPr>
           <a:xfrm>
-            <a:off x="502920" y="2048256"/>
+            <a:off x="566928" y="2048256"/>
             <a:ext cx="6858000" cy="0"/>
           </a:xfrm>
           <a:prstGeom prst="line">
@@ -8772,7 +8816,7 @@
         </p:nvSpPr>
         <p:spPr>
           <a:xfrm>
-            <a:off x="502920" y="2048256"/>
+            <a:off x="566928" y="2048256"/>
             <a:ext cx="1920240" cy="402336"/>
           </a:xfrm>
           <a:prstGeom prst="rect">
@@ -8782,7 +8826,9 @@
           <a:ln/>
         </p:spPr>
         <p:txBody>
-          <a:bodyPr wrap="square" lIns="0" tIns="0" rIns="0" bIns="0" rtlCol="0" anchor="ctr"/>
+          <a:bodyPr wrap="square" lIns="0" tIns="0" rIns="0" bIns="0" rtlCol="0" anchor="ctr">
+            <a:normAutofit/>
+          </a:bodyPr>
           <a:lstStyle/>
           <a:p>
             <a:pPr indent="0" marL="0">
@@ -8814,7 +8860,7 @@
         </p:nvSpPr>
         <p:spPr>
           <a:xfrm>
-            <a:off x="2423160" y="2048256"/>
+            <a:off x="2487168" y="2048256"/>
             <a:ext cx="4937760" cy="402336"/>
           </a:xfrm>
           <a:prstGeom prst="rect">
@@ -8824,7 +8870,9 @@
           <a:ln/>
         </p:spPr>
         <p:txBody>
-          <a:bodyPr wrap="square" lIns="0" tIns="0" rIns="0" bIns="0" rtlCol="0" anchor="ctr"/>
+          <a:bodyPr wrap="square" lIns="0" tIns="0" rIns="0" bIns="0" rtlCol="0" anchor="ctr">
+            <a:normAutofit/>
+          </a:bodyPr>
           <a:lstStyle/>
           <a:p>
             <a:pPr indent="0" marL="0">
@@ -8856,7 +8904,7 @@
         </p:nvSpPr>
         <p:spPr>
           <a:xfrm>
-            <a:off x="7540600" y="1371600"/>
+            <a:off x="7604608" y="1371600"/>
             <a:ext cx="0" cy="4754880"/>
           </a:xfrm>
           <a:prstGeom prst="line">
@@ -8879,7 +8927,7 @@
         </p:nvSpPr>
         <p:spPr>
           <a:xfrm>
-            <a:off x="7720279" y="1645920"/>
+            <a:off x="7784287" y="1645920"/>
             <a:ext cx="3840480" cy="2103120"/>
           </a:xfrm>
           <a:prstGeom prst="roundRect">
@@ -8901,7 +8949,7 @@
         </p:nvSpPr>
         <p:spPr>
           <a:xfrm>
-            <a:off x="7720279" y="1700784"/>
+            <a:off x="7784287" y="1700784"/>
             <a:ext cx="36576" cy="1993392"/>
           </a:xfrm>
           <a:prstGeom prst="rect">
@@ -8921,7 +8969,7 @@
         </p:nvSpPr>
         <p:spPr>
           <a:xfrm>
-            <a:off x="7866583" y="1737360"/>
+            <a:off x="7930591" y="1737360"/>
             <a:ext cx="3584448" cy="201168"/>
           </a:xfrm>
           <a:prstGeom prst="rect">
@@ -8960,7 +9008,7 @@
         </p:nvSpPr>
         <p:spPr>
           <a:xfrm>
-            <a:off x="7866583" y="1938528"/>
+            <a:off x="7930591" y="1938528"/>
             <a:ext cx="3584448" cy="1773936"/>
           </a:xfrm>
           <a:prstGeom prst="rect">
@@ -9003,7 +9051,7 @@
         </p:nvSpPr>
         <p:spPr>
           <a:xfrm>
-            <a:off x="7720279" y="3977640"/>
+            <a:off x="7784287" y="3977640"/>
             <a:ext cx="3840480" cy="2148840"/>
           </a:xfrm>
           <a:prstGeom prst="roundRect">
@@ -9025,7 +9073,7 @@
         </p:nvSpPr>
         <p:spPr>
           <a:xfrm>
-            <a:off x="7720279" y="4032504"/>
+            <a:off x="7784287" y="4032504"/>
             <a:ext cx="36576" cy="2039112"/>
           </a:xfrm>
           <a:prstGeom prst="rect">
@@ -9045,7 +9093,7 @@
         </p:nvSpPr>
         <p:spPr>
           <a:xfrm>
-            <a:off x="7866583" y="4069080"/>
+            <a:off x="7930591" y="4069080"/>
             <a:ext cx="3584448" cy="201168"/>
           </a:xfrm>
           <a:prstGeom prst="rect">
@@ -9084,7 +9132,7 @@
         </p:nvSpPr>
         <p:spPr>
           <a:xfrm>
-            <a:off x="7866583" y="4270248"/>
+            <a:off x="7930591" y="4270248"/>
             <a:ext cx="3584448" cy="1819656"/>
           </a:xfrm>
           <a:prstGeom prst="rect">
@@ -9175,7 +9223,7 @@
         </p:nvSpPr>
         <p:spPr>
           <a:xfrm>
-            <a:off x="502920" y="6382512"/>
+            <a:off x="566928" y="6382512"/>
             <a:ext cx="7315200" cy="219456"/>
           </a:xfrm>
           <a:prstGeom prst="rect">
@@ -9214,7 +9262,7 @@
         </p:nvSpPr>
         <p:spPr>
           <a:xfrm>
-            <a:off x="10774375" y="6382512"/>
+            <a:off x="10710367" y="6382512"/>
             <a:ext cx="914400" cy="219456"/>
           </a:xfrm>
           <a:prstGeom prst="rect">
@@ -9285,7 +9333,7 @@
         </p:nvSpPr>
         <p:spPr>
           <a:xfrm>
-            <a:off x="502920" y="457200"/>
+            <a:off x="566928" y="457200"/>
             <a:ext cx="384048" cy="384048"/>
           </a:xfrm>
           <a:prstGeom prst="ellipse">
@@ -9305,7 +9353,7 @@
         </p:nvSpPr>
         <p:spPr>
           <a:xfrm>
-            <a:off x="502920" y="457200"/>
+            <a:off x="566928" y="457200"/>
             <a:ext cx="384048" cy="384048"/>
           </a:xfrm>
           <a:prstGeom prst="rect">
@@ -9344,7 +9392,7 @@
         </p:nvSpPr>
         <p:spPr>
           <a:xfrm>
-            <a:off x="1069848" y="457200"/>
+            <a:off x="1133856" y="457200"/>
             <a:ext cx="10490911" cy="182880"/>
           </a:xfrm>
           <a:prstGeom prst="rect">
@@ -9383,7 +9431,7 @@
         </p:nvSpPr>
         <p:spPr>
           <a:xfrm>
-            <a:off x="1069848" y="640080"/>
+            <a:off x="1133856" y="640080"/>
             <a:ext cx="10490911" cy="365760"/>
           </a:xfrm>
           <a:prstGeom prst="rect">
@@ -9393,6 +9441,47 @@
           <a:ln/>
         </p:spPr>
         <p:txBody>
+          <a:bodyPr wrap="square" lIns="0" tIns="0" rIns="0" bIns="0" rtlCol="0" anchor="ctr">
+            <a:normAutofit/>
+          </a:bodyPr>
+          <a:lstStyle/>
+          <a:p>
+            <a:pPr indent="0" marL="0">
+              <a:buNone/>
+            </a:pPr>
+            <a:r>
+              <a:rPr lang="en-US" sz="2300" b="1" dirty="0">
+                <a:solidFill>
+                  <a:srgbClr val="10161F"/>
+                </a:solidFill>
+                <a:latin typeface="Pretendard" pitchFamily="34" charset="0"/>
+                <a:ea typeface="Pretendard" pitchFamily="34" charset="-122"/>
+                <a:cs typeface="Pretendard" pitchFamily="34" charset="-120"/>
+              </a:rPr>
+              <a:t>건물 개요</a:t>
+            </a:r>
+            <a:endParaRPr lang="en-US" sz="2300" dirty="0"/>
+          </a:p>
+        </p:txBody>
+      </p:sp>
+      <p:sp>
+        <p:nvSpPr>
+          <p:cNvPr id="6" name="Text 4"/>
+          <p:cNvSpPr/>
+          <p:nvPr/>
+        </p:nvSpPr>
+        <p:spPr>
+          <a:xfrm>
+            <a:off x="566928" y="1371600"/>
+            <a:ext cx="6858000" cy="237744"/>
+          </a:xfrm>
+          <a:prstGeom prst="rect">
+            <a:avLst/>
+          </a:prstGeom>
+          <a:noFill/>
+          <a:ln/>
+        </p:spPr>
+        <p:txBody>
           <a:bodyPr wrap="square" lIns="0" tIns="0" rIns="0" bIns="0" rtlCol="0" anchor="ctr"/>
           <a:lstStyle/>
           <a:p>
@@ -9400,7 +9489,7 @@
               <a:buNone/>
             </a:pPr>
             <a:r>
-              <a:rPr lang="en-US" sz="2300" b="1" dirty="0">
+              <a:rPr lang="en-US" sz="1100" b="1" dirty="0">
                 <a:solidFill>
                   <a:srgbClr val="10161F"/>
                 </a:solidFill>
@@ -9408,45 +9497,6 @@
                 <a:ea typeface="Pretendard" pitchFamily="34" charset="-122"/>
                 <a:cs typeface="Pretendard" pitchFamily="34" charset="-120"/>
               </a:rPr>
-              <a:t>건물 개요</a:t>
-            </a:r>
-            <a:endParaRPr lang="en-US" sz="2300" dirty="0"/>
-          </a:p>
-        </p:txBody>
-      </p:sp>
-      <p:sp>
-        <p:nvSpPr>
-          <p:cNvPr id="6" name="Text 4"/>
-          <p:cNvSpPr/>
-          <p:nvPr/>
-        </p:nvSpPr>
-        <p:spPr>
-          <a:xfrm>
-            <a:off x="502920" y="1371600"/>
-            <a:ext cx="6858000" cy="237744"/>
-          </a:xfrm>
-          <a:prstGeom prst="rect">
-            <a:avLst/>
-          </a:prstGeom>
-          <a:noFill/>
-          <a:ln/>
-        </p:spPr>
-        <p:txBody>
-          <a:bodyPr wrap="square" lIns="0" tIns="0" rIns="0" bIns="0" rtlCol="0" anchor="ctr"/>
-          <a:lstStyle/>
-          <a:p>
-            <a:pPr indent="0" marL="0">
-              <a:buNone/>
-            </a:pPr>
-            <a:r>
-              <a:rPr lang="en-US" sz="1100" b="1" dirty="0">
-                <a:solidFill>
-                  <a:srgbClr val="10161F"/>
-                </a:solidFill>
-                <a:latin typeface="Pretendard" pitchFamily="34" charset="0"/>
-                <a:ea typeface="Pretendard" pitchFamily="34" charset="-122"/>
-                <a:cs typeface="Pretendard" pitchFamily="34" charset="-120"/>
-              </a:rPr>
               <a:t>건축물 개요 및 물리 스펙</a:t>
             </a:r>
             <a:endParaRPr lang="en-US" sz="1100" dirty="0"/>
@@ -9461,7 +9511,7 @@
         </p:nvSpPr>
         <p:spPr>
           <a:xfrm>
-            <a:off x="502920" y="1645920"/>
+            <a:off x="566928" y="1645920"/>
             <a:ext cx="1920240" cy="402336"/>
           </a:xfrm>
           <a:prstGeom prst="rect">
@@ -9471,7 +9521,9 @@
           <a:ln/>
         </p:spPr>
         <p:txBody>
-          <a:bodyPr wrap="square" lIns="0" tIns="0" rIns="0" bIns="0" rtlCol="0" anchor="ctr"/>
+          <a:bodyPr wrap="square" lIns="0" tIns="0" rIns="0" bIns="0" rtlCol="0" anchor="ctr">
+            <a:normAutofit/>
+          </a:bodyPr>
           <a:lstStyle/>
           <a:p>
             <a:pPr indent="0" marL="0">
@@ -9503,7 +9555,7 @@
         </p:nvSpPr>
         <p:spPr>
           <a:xfrm>
-            <a:off x="2423160" y="1645920"/>
+            <a:off x="2487168" y="1645920"/>
             <a:ext cx="4937760" cy="402336"/>
           </a:xfrm>
           <a:prstGeom prst="rect">
@@ -9513,7 +9565,9 @@
           <a:ln/>
         </p:spPr>
         <p:txBody>
-          <a:bodyPr wrap="square" lIns="0" tIns="0" rIns="0" bIns="0" rtlCol="0" anchor="ctr"/>
+          <a:bodyPr wrap="square" lIns="0" tIns="0" rIns="0" bIns="0" rtlCol="0" anchor="ctr">
+            <a:normAutofit/>
+          </a:bodyPr>
           <a:lstStyle/>
           <a:p>
             <a:pPr indent="0" marL="0">
@@ -9545,7 +9599,7 @@
         </p:nvSpPr>
         <p:spPr>
           <a:xfrm>
-            <a:off x="502920" y="2048256"/>
+            <a:off x="566928" y="2048256"/>
             <a:ext cx="6858000" cy="0"/>
           </a:xfrm>
           <a:prstGeom prst="line">
@@ -9568,7 +9622,7 @@
         </p:nvSpPr>
         <p:spPr>
           <a:xfrm>
-            <a:off x="502920" y="2048256"/>
+            <a:off x="566928" y="2048256"/>
             <a:ext cx="1920240" cy="402336"/>
           </a:xfrm>
           <a:prstGeom prst="rect">
@@ -9578,7 +9632,9 @@
           <a:ln/>
         </p:spPr>
         <p:txBody>
-          <a:bodyPr wrap="square" lIns="0" tIns="0" rIns="0" bIns="0" rtlCol="0" anchor="ctr"/>
+          <a:bodyPr wrap="square" lIns="0" tIns="0" rIns="0" bIns="0" rtlCol="0" anchor="ctr">
+            <a:normAutofit/>
+          </a:bodyPr>
           <a:lstStyle/>
           <a:p>
             <a:pPr indent="0" marL="0">
@@ -9610,7 +9666,7 @@
         </p:nvSpPr>
         <p:spPr>
           <a:xfrm>
-            <a:off x="2423160" y="2048256"/>
+            <a:off x="2487168" y="2048256"/>
             <a:ext cx="4937760" cy="402336"/>
           </a:xfrm>
           <a:prstGeom prst="rect">
@@ -9620,7 +9676,9 @@
           <a:ln/>
         </p:spPr>
         <p:txBody>
-          <a:bodyPr wrap="square" lIns="0" tIns="0" rIns="0" bIns="0" rtlCol="0" anchor="ctr"/>
+          <a:bodyPr wrap="square" lIns="0" tIns="0" rIns="0" bIns="0" rtlCol="0" anchor="ctr">
+            <a:normAutofit/>
+          </a:bodyPr>
           <a:lstStyle/>
           <a:p>
             <a:pPr indent="0" marL="0">
@@ -9652,7 +9710,7 @@
         </p:nvSpPr>
         <p:spPr>
           <a:xfrm>
-            <a:off x="502920" y="2450592"/>
+            <a:off x="566928" y="2450592"/>
             <a:ext cx="6858000" cy="0"/>
           </a:xfrm>
           <a:prstGeom prst="line">
@@ -9675,7 +9733,7 @@
         </p:nvSpPr>
         <p:spPr>
           <a:xfrm>
-            <a:off x="502920" y="2450592"/>
+            <a:off x="566928" y="2450592"/>
             <a:ext cx="1920240" cy="402336"/>
           </a:xfrm>
           <a:prstGeom prst="rect">
@@ -9685,7 +9743,9 @@
           <a:ln/>
         </p:spPr>
         <p:txBody>
-          <a:bodyPr wrap="square" lIns="0" tIns="0" rIns="0" bIns="0" rtlCol="0" anchor="ctr"/>
+          <a:bodyPr wrap="square" lIns="0" tIns="0" rIns="0" bIns="0" rtlCol="0" anchor="ctr">
+            <a:normAutofit/>
+          </a:bodyPr>
           <a:lstStyle/>
           <a:p>
             <a:pPr indent="0" marL="0">
@@ -9717,7 +9777,7 @@
         </p:nvSpPr>
         <p:spPr>
           <a:xfrm>
-            <a:off x="2423160" y="2450592"/>
+            <a:off x="2487168" y="2450592"/>
             <a:ext cx="4937760" cy="402336"/>
           </a:xfrm>
           <a:prstGeom prst="rect">
@@ -9727,7 +9787,9 @@
           <a:ln/>
         </p:spPr>
         <p:txBody>
-          <a:bodyPr wrap="square" lIns="0" tIns="0" rIns="0" bIns="0" rtlCol="0" anchor="ctr"/>
+          <a:bodyPr wrap="square" lIns="0" tIns="0" rIns="0" bIns="0" rtlCol="0" anchor="ctr">
+            <a:normAutofit/>
+          </a:bodyPr>
           <a:lstStyle/>
           <a:p>
             <a:pPr indent="0" marL="0">
@@ -9759,7 +9821,7 @@
         </p:nvSpPr>
         <p:spPr>
           <a:xfrm>
-            <a:off x="7540600" y="1371600"/>
+            <a:off x="7604608" y="1371600"/>
             <a:ext cx="0" cy="4754880"/>
           </a:xfrm>
           <a:prstGeom prst="line">
@@ -9782,7 +9844,7 @@
         </p:nvSpPr>
         <p:spPr>
           <a:xfrm>
-            <a:off x="7720279" y="1645920"/>
+            <a:off x="7784287" y="1645920"/>
             <a:ext cx="3840480" cy="1645920"/>
           </a:xfrm>
           <a:prstGeom prst="roundRect">
@@ -9804,7 +9866,7 @@
         </p:nvSpPr>
         <p:spPr>
           <a:xfrm>
-            <a:off x="7720279" y="1700784"/>
+            <a:off x="7784287" y="1700784"/>
             <a:ext cx="36576" cy="1536192"/>
           </a:xfrm>
           <a:prstGeom prst="rect">
@@ -9824,7 +9886,7 @@
         </p:nvSpPr>
         <p:spPr>
           <a:xfrm>
-            <a:off x="7866583" y="1737360"/>
+            <a:off x="7930591" y="1737360"/>
             <a:ext cx="3584448" cy="201168"/>
           </a:xfrm>
           <a:prstGeom prst="rect">
@@ -9852,7 +9914,7 @@
         </p:nvSpPr>
         <p:spPr>
           <a:xfrm>
-            <a:off x="7866583" y="1938528"/>
+            <a:off x="7930591" y="1938528"/>
             <a:ext cx="3584448" cy="1316736"/>
           </a:xfrm>
           <a:prstGeom prst="rect">
@@ -9894,7 +9956,7 @@
         </p:nvSpPr>
         <p:spPr>
           <a:xfrm>
-            <a:off x="502920" y="6382512"/>
+            <a:off x="566928" y="6382512"/>
             <a:ext cx="7315200" cy="219456"/>
           </a:xfrm>
           <a:prstGeom prst="rect">
@@ -9933,7 +9995,7 @@
         </p:nvSpPr>
         <p:spPr>
           <a:xfrm>
-            <a:off x="10774375" y="6382512"/>
+            <a:off x="10710367" y="6382512"/>
             <a:ext cx="914400" cy="219456"/>
           </a:xfrm>
           <a:prstGeom prst="rect">
@@ -10004,7 +10066,7 @@
         </p:nvSpPr>
         <p:spPr>
           <a:xfrm>
-            <a:off x="502920" y="457200"/>
+            <a:off x="566928" y="457200"/>
             <a:ext cx="384048" cy="384048"/>
           </a:xfrm>
           <a:prstGeom prst="ellipse">
@@ -10024,7 +10086,7 @@
         </p:nvSpPr>
         <p:spPr>
           <a:xfrm>
-            <a:off x="502920" y="457200"/>
+            <a:off x="566928" y="457200"/>
             <a:ext cx="384048" cy="384048"/>
           </a:xfrm>
           <a:prstGeom prst="rect">
@@ -10063,7 +10125,7 @@
         </p:nvSpPr>
         <p:spPr>
           <a:xfrm>
-            <a:off x="1069848" y="457200"/>
+            <a:off x="1133856" y="457200"/>
             <a:ext cx="10490911" cy="182880"/>
           </a:xfrm>
           <a:prstGeom prst="rect">
@@ -10102,7 +10164,7 @@
         </p:nvSpPr>
         <p:spPr>
           <a:xfrm>
-            <a:off x="1069848" y="640080"/>
+            <a:off x="1133856" y="640080"/>
             <a:ext cx="10490911" cy="365760"/>
           </a:xfrm>
           <a:prstGeom prst="rect">
@@ -10112,7 +10174,9 @@
           <a:ln/>
         </p:spPr>
         <p:txBody>
-          <a:bodyPr wrap="square" lIns="0" tIns="0" rIns="0" bIns="0" rtlCol="0" anchor="ctr"/>
+          <a:bodyPr wrap="square" lIns="0" tIns="0" rIns="0" bIns="0" rtlCol="0" anchor="ctr">
+            <a:normAutofit/>
+          </a:bodyPr>
           <a:lstStyle/>
           <a:p>
             <a:pPr indent="0" marL="0">
@@ -10148,7 +10212,7 @@
           </p:nvPr>
         </p:nvGraphicFramePr>
         <p:xfrm>
-          <a:off x="502920" y="1645920"/>
+          <a:off x="566928" y="1645920"/>
           <a:ext cx="11057839" cy="914400"/>
         </p:xfrm>
         <a:graphic>
@@ -10167,7 +10231,7 @@
                     <a:bodyPr/>
                     <a:lstStyle/>
                     <a:p>
-                      <a:pPr indent="0" marL="0">
+                      <a:pPr algn="ctr" indent="0" marL="0">
                         <a:buNone/>
                       </a:pPr>
                       <a:r>
@@ -10235,7 +10299,7 @@
                     <a:bodyPr/>
                     <a:lstStyle/>
                     <a:p>
-                      <a:pPr indent="0" marL="0">
+                      <a:pPr algn="l" indent="0" marL="0">
                         <a:buNone/>
                       </a:pPr>
                       <a:r>
@@ -10303,7 +10367,7 @@
                     <a:bodyPr/>
                     <a:lstStyle/>
                     <a:p>
-                      <a:pPr indent="0" marL="0">
+                      <a:pPr algn="r" indent="0" marL="0">
                         <a:buNone/>
                       </a:pPr>
                       <a:r>
@@ -10371,7 +10435,7 @@
                     <a:bodyPr/>
                     <a:lstStyle/>
                     <a:p>
-                      <a:pPr indent="0" marL="0">
+                      <a:pPr algn="r" indent="0" marL="0">
                         <a:buNone/>
                       </a:pPr>
                       <a:r>
@@ -10441,7 +10505,7 @@
                     <a:bodyPr/>
                     <a:lstStyle/>
                     <a:p>
-                      <a:pPr indent="0" marL="0">
+                      <a:pPr algn="ctr" indent="0" marL="0">
                         <a:buNone/>
                       </a:pPr>
                       <a:r>
@@ -10509,7 +10573,7 @@
                     <a:bodyPr/>
                     <a:lstStyle/>
                     <a:p>
-                      <a:pPr indent="0" marL="0">
+                      <a:pPr algn="l" indent="0" marL="0">
                         <a:buNone/>
                       </a:pPr>
                       <a:r>
@@ -10577,7 +10641,7 @@
                     <a:bodyPr/>
                     <a:lstStyle/>
                     <a:p>
-                      <a:pPr indent="0" marL="0">
+                      <a:pPr algn="r" indent="0" marL="0">
                         <a:buNone/>
                       </a:pPr>
                       <a:r>
@@ -10645,7 +10709,7 @@
                     <a:bodyPr/>
                     <a:lstStyle/>
                     <a:p>
-                      <a:pPr indent="0" marL="0">
+                      <a:pPr algn="r" indent="0" marL="0">
                         <a:buNone/>
                       </a:pPr>
                       <a:r>
@@ -10715,7 +10779,7 @@
                     <a:bodyPr/>
                     <a:lstStyle/>
                     <a:p>
-                      <a:pPr indent="0" marL="0">
+                      <a:pPr algn="ctr" indent="0" marL="0">
                         <a:buNone/>
                       </a:pPr>
                       <a:r>
@@ -10783,7 +10847,7 @@
                     <a:bodyPr/>
                     <a:lstStyle/>
                     <a:p>
-                      <a:pPr indent="0" marL="0">
+                      <a:pPr algn="l" indent="0" marL="0">
                         <a:buNone/>
                       </a:pPr>
                       <a:r>
@@ -10851,7 +10915,7 @@
                     <a:bodyPr/>
                     <a:lstStyle/>
                     <a:p>
-                      <a:pPr indent="0" marL="0">
+                      <a:pPr algn="r" indent="0" marL="0">
                         <a:buNone/>
                       </a:pPr>
                       <a:r>
@@ -10919,7 +10983,7 @@
                     <a:bodyPr/>
                     <a:lstStyle/>
                     <a:p>
-                      <a:pPr indent="0" marL="0">
+                      <a:pPr algn="r" indent="0" marL="0">
                         <a:buNone/>
                       </a:pPr>
                       <a:r>
@@ -10995,7 +11059,7 @@
         </p:nvSpPr>
         <p:spPr>
           <a:xfrm>
-            <a:off x="502920" y="6382512"/>
+            <a:off x="566928" y="6382512"/>
             <a:ext cx="7315200" cy="219456"/>
           </a:xfrm>
           <a:prstGeom prst="rect">
@@ -11034,7 +11098,7 @@
         </p:nvSpPr>
         <p:spPr>
           <a:xfrm>
-            <a:off x="10774375" y="6382512"/>
+            <a:off x="10710367" y="6382512"/>
             <a:ext cx="914400" cy="219456"/>
           </a:xfrm>
           <a:prstGeom prst="rect">
@@ -11105,7 +11169,7 @@
         </p:nvSpPr>
         <p:spPr>
           <a:xfrm>
-            <a:off x="502920" y="457200"/>
+            <a:off x="566928" y="457200"/>
             <a:ext cx="384048" cy="384048"/>
           </a:xfrm>
           <a:prstGeom prst="ellipse">
@@ -11125,7 +11189,7 @@
         </p:nvSpPr>
         <p:spPr>
           <a:xfrm>
-            <a:off x="502920" y="457200"/>
+            <a:off x="566928" y="457200"/>
             <a:ext cx="384048" cy="384048"/>
           </a:xfrm>
           <a:prstGeom prst="rect">
@@ -11164,7 +11228,7 @@
         </p:nvSpPr>
         <p:spPr>
           <a:xfrm>
-            <a:off x="1069848" y="457200"/>
+            <a:off x="1133856" y="457200"/>
             <a:ext cx="10490911" cy="182880"/>
           </a:xfrm>
           <a:prstGeom prst="rect">
@@ -11203,7 +11267,7 @@
         </p:nvSpPr>
         <p:spPr>
           <a:xfrm>
-            <a:off x="1069848" y="640080"/>
+            <a:off x="1133856" y="640080"/>
             <a:ext cx="10490911" cy="365760"/>
           </a:xfrm>
           <a:prstGeom prst="rect">
@@ -11213,6 +11277,47 @@
           <a:ln/>
         </p:spPr>
         <p:txBody>
+          <a:bodyPr wrap="square" lIns="0" tIns="0" rIns="0" bIns="0" rtlCol="0" anchor="ctr">
+            <a:normAutofit/>
+          </a:bodyPr>
+          <a:lstStyle/>
+          <a:p>
+            <a:pPr indent="0" marL="0">
+              <a:buNone/>
+            </a:pPr>
+            <a:r>
+              <a:rPr lang="en-US" sz="2300" b="1" dirty="0">
+                <a:solidFill>
+                  <a:srgbClr val="10161F"/>
+                </a:solidFill>
+                <a:latin typeface="Pretendard" pitchFamily="34" charset="0"/>
+                <a:ea typeface="Pretendard" pitchFamily="34" charset="-122"/>
+                <a:cs typeface="Pretendard" pitchFamily="34" charset="-120"/>
+              </a:rPr>
+              <a:t>임대안정성</a:t>
+            </a:r>
+            <a:endParaRPr lang="en-US" sz="2300" dirty="0"/>
+          </a:p>
+        </p:txBody>
+      </p:sp>
+      <p:sp>
+        <p:nvSpPr>
+          <p:cNvPr id="6" name="Text 4"/>
+          <p:cNvSpPr/>
+          <p:nvPr/>
+        </p:nvSpPr>
+        <p:spPr>
+          <a:xfrm>
+            <a:off x="566928" y="1371600"/>
+            <a:ext cx="6858000" cy="237744"/>
+          </a:xfrm>
+          <a:prstGeom prst="rect">
+            <a:avLst/>
+          </a:prstGeom>
+          <a:noFill/>
+          <a:ln/>
+        </p:spPr>
+        <p:txBody>
           <a:bodyPr wrap="square" lIns="0" tIns="0" rIns="0" bIns="0" rtlCol="0" anchor="ctr"/>
           <a:lstStyle/>
           <a:p>
@@ -11220,7 +11325,7 @@
               <a:buNone/>
             </a:pPr>
             <a:r>
-              <a:rPr lang="en-US" sz="2300" b="1" dirty="0">
+              <a:rPr lang="en-US" sz="1100" b="1" dirty="0">
                 <a:solidFill>
                   <a:srgbClr val="10161F"/>
                 </a:solidFill>
@@ -11228,45 +11333,6 @@
                 <a:ea typeface="Pretendard" pitchFamily="34" charset="-122"/>
                 <a:cs typeface="Pretendard" pitchFamily="34" charset="-120"/>
               </a:rPr>
-              <a:t>임대안정성</a:t>
-            </a:r>
-            <a:endParaRPr lang="en-US" sz="2300" dirty="0"/>
-          </a:p>
-        </p:txBody>
-      </p:sp>
-      <p:sp>
-        <p:nvSpPr>
-          <p:cNvPr id="6" name="Text 4"/>
-          <p:cNvSpPr/>
-          <p:nvPr/>
-        </p:nvSpPr>
-        <p:spPr>
-          <a:xfrm>
-            <a:off x="502920" y="1371600"/>
-            <a:ext cx="6858000" cy="237744"/>
-          </a:xfrm>
-          <a:prstGeom prst="rect">
-            <a:avLst/>
-          </a:prstGeom>
-          <a:noFill/>
-          <a:ln/>
-        </p:spPr>
-        <p:txBody>
-          <a:bodyPr wrap="square" lIns="0" tIns="0" rIns="0" bIns="0" rtlCol="0" anchor="ctr"/>
-          <a:lstStyle/>
-          <a:p>
-            <a:pPr indent="0" marL="0">
-              <a:buNone/>
-            </a:pPr>
-            <a:r>
-              <a:rPr lang="en-US" sz="1100" b="1" dirty="0">
-                <a:solidFill>
-                  <a:srgbClr val="10161F"/>
-                </a:solidFill>
-                <a:latin typeface="Pretendard" pitchFamily="34" charset="0"/>
-                <a:ea typeface="Pretendard" pitchFamily="34" charset="-122"/>
-                <a:cs typeface="Pretendard" pitchFamily="34" charset="-120"/>
-              </a:rPr>
               <a:t>건축물 개요 및 물리 스펙</a:t>
             </a:r>
             <a:endParaRPr lang="en-US" sz="1100" dirty="0"/>
@@ -11281,7 +11347,7 @@
         </p:nvSpPr>
         <p:spPr>
           <a:xfrm>
-            <a:off x="502920" y="1645920"/>
+            <a:off x="566928" y="1645920"/>
             <a:ext cx="1920240" cy="402336"/>
           </a:xfrm>
           <a:prstGeom prst="rect">
@@ -11291,7 +11357,9 @@
           <a:ln/>
         </p:spPr>
         <p:txBody>
-          <a:bodyPr wrap="square" lIns="0" tIns="0" rIns="0" bIns="0" rtlCol="0" anchor="ctr"/>
+          <a:bodyPr wrap="square" lIns="0" tIns="0" rIns="0" bIns="0" rtlCol="0" anchor="ctr">
+            <a:normAutofit/>
+          </a:bodyPr>
           <a:lstStyle/>
           <a:p>
             <a:pPr indent="0" marL="0">
@@ -11323,7 +11391,7 @@
         </p:nvSpPr>
         <p:spPr>
           <a:xfrm>
-            <a:off x="2423160" y="1645920"/>
+            <a:off x="2487168" y="1645920"/>
             <a:ext cx="4937760" cy="402336"/>
           </a:xfrm>
           <a:prstGeom prst="rect">
@@ -11333,7 +11401,9 @@
           <a:ln/>
         </p:spPr>
         <p:txBody>
-          <a:bodyPr wrap="square" lIns="0" tIns="0" rIns="0" bIns="0" rtlCol="0" anchor="ctr"/>
+          <a:bodyPr wrap="square" lIns="0" tIns="0" rIns="0" bIns="0" rtlCol="0" anchor="ctr">
+            <a:normAutofit/>
+          </a:bodyPr>
           <a:lstStyle/>
           <a:p>
             <a:pPr indent="0" marL="0">
@@ -11365,7 +11435,7 @@
         </p:nvSpPr>
         <p:spPr>
           <a:xfrm>
-            <a:off x="502920" y="2048256"/>
+            <a:off x="566928" y="2048256"/>
             <a:ext cx="6858000" cy="0"/>
           </a:xfrm>
           <a:prstGeom prst="line">
@@ -11388,7 +11458,7 @@
         </p:nvSpPr>
         <p:spPr>
           <a:xfrm>
-            <a:off x="502920" y="2048256"/>
+            <a:off x="566928" y="2048256"/>
             <a:ext cx="1920240" cy="402336"/>
           </a:xfrm>
           <a:prstGeom prst="rect">
@@ -11398,7 +11468,9 @@
           <a:ln/>
         </p:spPr>
         <p:txBody>
-          <a:bodyPr wrap="square" lIns="0" tIns="0" rIns="0" bIns="0" rtlCol="0" anchor="ctr"/>
+          <a:bodyPr wrap="square" lIns="0" tIns="0" rIns="0" bIns="0" rtlCol="0" anchor="ctr">
+            <a:normAutofit/>
+          </a:bodyPr>
           <a:lstStyle/>
           <a:p>
             <a:pPr indent="0" marL="0">
@@ -11430,7 +11502,7 @@
         </p:nvSpPr>
         <p:spPr>
           <a:xfrm>
-            <a:off x="2423160" y="2048256"/>
+            <a:off x="2487168" y="2048256"/>
             <a:ext cx="4937760" cy="402336"/>
           </a:xfrm>
           <a:prstGeom prst="rect">
@@ -11440,7 +11512,9 @@
           <a:ln/>
         </p:spPr>
         <p:txBody>
-          <a:bodyPr wrap="square" lIns="0" tIns="0" rIns="0" bIns="0" rtlCol="0" anchor="ctr"/>
+          <a:bodyPr wrap="square" lIns="0" tIns="0" rIns="0" bIns="0" rtlCol="0" anchor="ctr">
+            <a:normAutofit/>
+          </a:bodyPr>
           <a:lstStyle/>
           <a:p>
             <a:pPr indent="0" marL="0">
@@ -11472,7 +11546,7 @@
         </p:nvSpPr>
         <p:spPr>
           <a:xfrm>
-            <a:off x="7540600" y="1371600"/>
+            <a:off x="7604608" y="1371600"/>
             <a:ext cx="0" cy="4754880"/>
           </a:xfrm>
           <a:prstGeom prst="line">
@@ -11495,7 +11569,7 @@
         </p:nvSpPr>
         <p:spPr>
           <a:xfrm>
-            <a:off x="7720279" y="1645920"/>
+            <a:off x="7784287" y="1645920"/>
             <a:ext cx="3840480" cy="1645920"/>
           </a:xfrm>
           <a:prstGeom prst="roundRect">
@@ -11517,7 +11591,7 @@
         </p:nvSpPr>
         <p:spPr>
           <a:xfrm>
-            <a:off x="7720279" y="1700784"/>
+            <a:off x="7784287" y="1700784"/>
             <a:ext cx="36576" cy="1536192"/>
           </a:xfrm>
           <a:prstGeom prst="rect">
@@ -11537,7 +11611,7 @@
         </p:nvSpPr>
         <p:spPr>
           <a:xfrm>
-            <a:off x="7866583" y="1737360"/>
+            <a:off x="7930591" y="1737360"/>
             <a:ext cx="3584448" cy="201168"/>
           </a:xfrm>
           <a:prstGeom prst="rect">
@@ -11565,7 +11639,7 @@
         </p:nvSpPr>
         <p:spPr>
           <a:xfrm>
-            <a:off x="7866583" y="1938528"/>
+            <a:off x="7930591" y="1938528"/>
             <a:ext cx="3584448" cy="1316736"/>
           </a:xfrm>
           <a:prstGeom prst="rect">
@@ -11607,7 +11681,7 @@
         </p:nvSpPr>
         <p:spPr>
           <a:xfrm>
-            <a:off x="502920" y="6382512"/>
+            <a:off x="566928" y="6382512"/>
             <a:ext cx="7315200" cy="219456"/>
           </a:xfrm>
           <a:prstGeom prst="rect">
@@ -11646,7 +11720,7 @@
         </p:nvSpPr>
         <p:spPr>
           <a:xfrm>
-            <a:off x="10774375" y="6382512"/>
+            <a:off x="10710367" y="6382512"/>
             <a:ext cx="914400" cy="219456"/>
           </a:xfrm>
           <a:prstGeom prst="rect">
@@ -11717,7 +11791,7 @@
         </p:nvSpPr>
         <p:spPr>
           <a:xfrm>
-            <a:off x="502920" y="457200"/>
+            <a:off x="566928" y="457200"/>
             <a:ext cx="384048" cy="384048"/>
           </a:xfrm>
           <a:prstGeom prst="ellipse">
@@ -11737,7 +11811,7 @@
         </p:nvSpPr>
         <p:spPr>
           <a:xfrm>
-            <a:off x="502920" y="457200"/>
+            <a:off x="566928" y="457200"/>
             <a:ext cx="384048" cy="384048"/>
           </a:xfrm>
           <a:prstGeom prst="rect">
@@ -11776,7 +11850,7 @@
         </p:nvSpPr>
         <p:spPr>
           <a:xfrm>
-            <a:off x="1069848" y="457200"/>
+            <a:off x="1133856" y="457200"/>
             <a:ext cx="10490911" cy="182880"/>
           </a:xfrm>
           <a:prstGeom prst="rect">
@@ -11815,7 +11889,7 @@
         </p:nvSpPr>
         <p:spPr>
           <a:xfrm>
-            <a:off x="1069848" y="640080"/>
+            <a:off x="1133856" y="640080"/>
             <a:ext cx="10490911" cy="365760"/>
           </a:xfrm>
           <a:prstGeom prst="rect">
@@ -11825,7 +11899,9 @@
           <a:ln/>
         </p:spPr>
         <p:txBody>
-          <a:bodyPr wrap="square" lIns="0" tIns="0" rIns="0" bIns="0" rtlCol="0" anchor="ctr"/>
+          <a:bodyPr wrap="square" lIns="0" tIns="0" rIns="0" bIns="0" rtlCol="0" anchor="ctr">
+            <a:normAutofit/>
+          </a:bodyPr>
           <a:lstStyle/>
           <a:p>
             <a:pPr indent="0" marL="0">
@@ -11854,7 +11930,7 @@
         </p:nvSpPr>
         <p:spPr>
           <a:xfrm>
-            <a:off x="502920" y="1325880"/>
+            <a:off x="566928" y="1325880"/>
             <a:ext cx="11057839" cy="0"/>
           </a:xfrm>
           <a:prstGeom prst="line">
@@ -11877,7 +11953,7 @@
         </p:nvSpPr>
         <p:spPr>
           <a:xfrm>
-            <a:off x="502920" y="1554480"/>
+            <a:off x="566928" y="1554480"/>
             <a:ext cx="3576218" cy="1188720"/>
           </a:xfrm>
           <a:prstGeom prst="roundRect">
@@ -11904,7 +11980,7 @@
         </p:nvSpPr>
         <p:spPr>
           <a:xfrm>
-            <a:off x="667512" y="1682496"/>
+            <a:off x="731520" y="1682496"/>
             <a:ext cx="3247034" cy="201168"/>
           </a:xfrm>
           <a:prstGeom prst="rect">
@@ -11914,7 +11990,9 @@
           <a:ln/>
         </p:spPr>
         <p:txBody>
-          <a:bodyPr wrap="square" lIns="0" tIns="0" rIns="0" bIns="0" rtlCol="0" anchor="ctr"/>
+          <a:bodyPr wrap="square" lIns="0" tIns="0" rIns="0" bIns="0" rtlCol="0" anchor="ctr">
+            <a:normAutofit/>
+          </a:bodyPr>
           <a:lstStyle/>
           <a:p>
             <a:pPr indent="0" marL="0">
@@ -11943,8 +12021,8 @@
         </p:nvSpPr>
         <p:spPr>
           <a:xfrm>
-            <a:off x="667512" y="1901952"/>
-            <a:ext cx="3247034" cy="402336"/>
+            <a:off x="731520" y="1901952"/>
+            <a:ext cx="3247034" cy="279400"/>
           </a:xfrm>
           <a:prstGeom prst="rect">
             <a:avLst/>
@@ -11987,7 +12065,7 @@
         </p:nvSpPr>
         <p:spPr>
           <a:xfrm>
-            <a:off x="4243730" y="1554480"/>
+            <a:off x="4307738" y="1554480"/>
             <a:ext cx="3576218" cy="1188720"/>
           </a:xfrm>
           <a:prstGeom prst="roundRect">
@@ -12014,7 +12092,7 @@
         </p:nvSpPr>
         <p:spPr>
           <a:xfrm>
-            <a:off x="4408322" y="1682496"/>
+            <a:off x="4472330" y="1682496"/>
             <a:ext cx="3247034" cy="201168"/>
           </a:xfrm>
           <a:prstGeom prst="rect">
@@ -12024,7 +12102,9 @@
           <a:ln/>
         </p:spPr>
         <p:txBody>
-          <a:bodyPr wrap="square" lIns="0" tIns="0" rIns="0" bIns="0" rtlCol="0" anchor="ctr"/>
+          <a:bodyPr wrap="square" lIns="0" tIns="0" rIns="0" bIns="0" rtlCol="0" anchor="ctr">
+            <a:normAutofit/>
+          </a:bodyPr>
           <a:lstStyle/>
           <a:p>
             <a:pPr indent="0" marL="0">
@@ -12053,8 +12133,8 @@
         </p:nvSpPr>
         <p:spPr>
           <a:xfrm>
-            <a:off x="4408322" y="1901952"/>
-            <a:ext cx="3247034" cy="402336"/>
+            <a:off x="4472330" y="1901952"/>
+            <a:ext cx="3247034" cy="279400"/>
           </a:xfrm>
           <a:prstGeom prst="rect">
             <a:avLst/>
@@ -12097,7 +12177,7 @@
         </p:nvSpPr>
         <p:spPr>
           <a:xfrm>
-            <a:off x="7984541" y="1554480"/>
+            <a:off x="8048549" y="1554480"/>
             <a:ext cx="3576218" cy="1188720"/>
           </a:xfrm>
           <a:prstGeom prst="roundRect">
@@ -12124,7 +12204,7 @@
         </p:nvSpPr>
         <p:spPr>
           <a:xfrm>
-            <a:off x="8149133" y="1682496"/>
+            <a:off x="8213141" y="1682496"/>
             <a:ext cx="3247034" cy="201168"/>
           </a:xfrm>
           <a:prstGeom prst="rect">
@@ -12134,7 +12214,9 @@
           <a:ln/>
         </p:spPr>
         <p:txBody>
-          <a:bodyPr wrap="square" lIns="0" tIns="0" rIns="0" bIns="0" rtlCol="0" anchor="ctr"/>
+          <a:bodyPr wrap="square" lIns="0" tIns="0" rIns="0" bIns="0" rtlCol="0" anchor="ctr">
+            <a:normAutofit/>
+          </a:bodyPr>
           <a:lstStyle/>
           <a:p>
             <a:pPr indent="0" marL="0">
@@ -12163,8 +12245,8 @@
         </p:nvSpPr>
         <p:spPr>
           <a:xfrm>
-            <a:off x="8149133" y="1901952"/>
-            <a:ext cx="3247034" cy="402336"/>
+            <a:off x="8213141" y="1901952"/>
+            <a:ext cx="3247034" cy="279400"/>
           </a:xfrm>
           <a:prstGeom prst="rect">
             <a:avLst/>
@@ -12207,7 +12289,7 @@
         </p:nvSpPr>
         <p:spPr>
           <a:xfrm>
-            <a:off x="502920" y="2999232"/>
+            <a:off x="566928" y="2999232"/>
             <a:ext cx="11057839" cy="1280160"/>
           </a:xfrm>
           <a:prstGeom prst="roundRect">
@@ -12229,7 +12311,7 @@
         </p:nvSpPr>
         <p:spPr>
           <a:xfrm>
-            <a:off x="502920" y="3054096"/>
+            <a:off x="566928" y="3054096"/>
             <a:ext cx="36576" cy="1170432"/>
           </a:xfrm>
           <a:prstGeom prst="rect">
@@ -12249,7 +12331,7 @@
         </p:nvSpPr>
         <p:spPr>
           <a:xfrm>
-            <a:off x="649224" y="3090672"/>
+            <a:off x="713232" y="3090672"/>
             <a:ext cx="10801807" cy="201168"/>
           </a:xfrm>
           <a:prstGeom prst="rect">
@@ -12288,7 +12370,7 @@
         </p:nvSpPr>
         <p:spPr>
           <a:xfrm>
-            <a:off x="649224" y="3291840"/>
+            <a:off x="713232" y="3291840"/>
             <a:ext cx="10801807" cy="950976"/>
           </a:xfrm>
           <a:prstGeom prst="rect">
@@ -12330,7 +12412,7 @@
         </p:nvSpPr>
         <p:spPr>
           <a:xfrm>
-            <a:off x="502920" y="6382512"/>
+            <a:off x="566928" y="6382512"/>
             <a:ext cx="7315200" cy="219456"/>
           </a:xfrm>
           <a:prstGeom prst="rect">
@@ -12369,7 +12451,7 @@
         </p:nvSpPr>
         <p:spPr>
           <a:xfrm>
-            <a:off x="10774375" y="6382512"/>
+            <a:off x="10710367" y="6382512"/>
             <a:ext cx="914400" cy="219456"/>
           </a:xfrm>
           <a:prstGeom prst="rect">
@@ -12440,7 +12522,7 @@
         </p:nvSpPr>
         <p:spPr>
           <a:xfrm>
-            <a:off x="502920" y="457200"/>
+            <a:off x="566928" y="457200"/>
             <a:ext cx="384048" cy="384048"/>
           </a:xfrm>
           <a:prstGeom prst="ellipse">
@@ -12460,7 +12542,7 @@
         </p:nvSpPr>
         <p:spPr>
           <a:xfrm>
-            <a:off x="502920" y="457200"/>
+            <a:off x="566928" y="457200"/>
             <a:ext cx="384048" cy="384048"/>
           </a:xfrm>
           <a:prstGeom prst="rect">
@@ -12499,7 +12581,7 @@
         </p:nvSpPr>
         <p:spPr>
           <a:xfrm>
-            <a:off x="1069848" y="457200"/>
+            <a:off x="1133856" y="457200"/>
             <a:ext cx="10490911" cy="182880"/>
           </a:xfrm>
           <a:prstGeom prst="rect">
@@ -12538,7 +12620,7 @@
         </p:nvSpPr>
         <p:spPr>
           <a:xfrm>
-            <a:off x="1069848" y="640080"/>
+            <a:off x="1133856" y="640080"/>
             <a:ext cx="10490911" cy="365760"/>
           </a:xfrm>
           <a:prstGeom prst="rect">
@@ -12548,7 +12630,9 @@
           <a:ln/>
         </p:spPr>
         <p:txBody>
-          <a:bodyPr wrap="square" lIns="0" tIns="0" rIns="0" bIns="0" rtlCol="0" anchor="ctr"/>
+          <a:bodyPr wrap="square" lIns="0" tIns="0" rIns="0" bIns="0" rtlCol="0" anchor="ctr">
+            <a:normAutofit/>
+          </a:bodyPr>
           <a:lstStyle/>
           <a:p>
             <a:pPr indent="0" marL="0">
@@ -12577,7 +12661,7 @@
         </p:nvSpPr>
         <p:spPr>
           <a:xfrm>
-            <a:off x="502920" y="4937760"/>
+            <a:off x="566928" y="4937760"/>
             <a:ext cx="11057839" cy="804672"/>
           </a:xfrm>
           <a:prstGeom prst="roundRect">
@@ -12604,7 +12688,7 @@
         </p:nvSpPr>
         <p:spPr>
           <a:xfrm>
-            <a:off x="685800" y="5047488"/>
+            <a:off x="749808" y="5047488"/>
             <a:ext cx="1691640" cy="256032"/>
           </a:xfrm>
           <a:prstGeom prst="rect">
@@ -12643,7 +12727,7 @@
         </p:nvSpPr>
         <p:spPr>
           <a:xfrm>
-            <a:off x="2423160" y="5010912"/>
+            <a:off x="2487168" y="5010912"/>
             <a:ext cx="8954719" cy="658368"/>
           </a:xfrm>
           <a:prstGeom prst="rect">
@@ -12685,7 +12769,7 @@
         </p:nvSpPr>
         <p:spPr>
           <a:xfrm>
-            <a:off x="502920" y="6382512"/>
+            <a:off x="566928" y="6382512"/>
             <a:ext cx="7315200" cy="219456"/>
           </a:xfrm>
           <a:prstGeom prst="rect">
@@ -12724,7 +12808,7 @@
         </p:nvSpPr>
         <p:spPr>
           <a:xfrm>
-            <a:off x="10774375" y="6382512"/>
+            <a:off x="10710367" y="6382512"/>
             <a:ext cx="914400" cy="219456"/>
           </a:xfrm>
           <a:prstGeom prst="rect">

--- a/docs/test/stress/e2e-outputs/income_pro_gradeC_pr07.pptx
+++ b/docs/test/stress/e2e-outputs/income_pro_gradeC_pr07.pptx
@@ -2196,10 +2196,15 @@
           <a:ln/>
         </p:spPr>
         <p:txBody>
-          <a:bodyPr wrap="square" lIns="0" tIns="0" rIns="0" bIns="0" rtlCol="0" anchor="ctr"/>
+          <a:bodyPr wrap="square" lIns="0" tIns="0" rIns="0" bIns="0" rtlCol="0" anchor="ctr">
+            <a:normAutofit/>
+          </a:bodyPr>
           <a:lstStyle/>
           <a:p>
             <a:pPr algn="l" indent="0" marL="0">
+              <a:lnSpc>
+                <a:spcPct val="100000"/>
+              </a:lnSpc>
               <a:buNone/>
             </a:pPr>
             <a:r>
@@ -7096,7 +7101,7 @@
               <a:buNone/>
             </a:pPr>
             <a:r>
-              <a:rPr lang="en-US" sz="850" dirty="0">
+              <a:rPr lang="en-US" sz="950" dirty="0">
                 <a:solidFill>
                   <a:srgbClr val="718096"/>
                 </a:solidFill>
@@ -7104,9 +7109,9 @@
                 <a:ea typeface="Pretendard" pitchFamily="34" charset="-122"/>
                 <a:cs typeface="Pretendard" pitchFamily="34" charset="-120"/>
               </a:rPr>
-              <a:t>연 수익률(Cap Rate)</a:t>
-            </a:r>
-            <a:endParaRPr lang="en-US" sz="850" dirty="0"/>
+              <a:t>연 수익률</a:t>
+            </a:r>
+            <a:endParaRPr lang="en-US" sz="950" dirty="0"/>
           </a:p>
         </p:txBody>
       </p:sp>
@@ -7208,7 +7213,7 @@
               <a:buNone/>
             </a:pPr>
             <a:r>
-              <a:rPr lang="en-US" sz="950" dirty="0">
+              <a:rPr lang="en-US" sz="850" dirty="0">
                 <a:solidFill>
                   <a:srgbClr val="718096"/>
                 </a:solidFill>
@@ -7216,9 +7221,9 @@
                 <a:ea typeface="Pretendard" pitchFamily="34" charset="-122"/>
                 <a:cs typeface="Pretendard" pitchFamily="34" charset="-120"/>
               </a:rPr>
-              <a:t>실투자금</a:t>
-            </a:r>
-            <a:endParaRPr lang="en-US" sz="950" dirty="0"/>
+              <a:t>실투자금 (취득비용 포함)</a:t>
+            </a:r>
+            <a:endParaRPr lang="en-US" sz="850" dirty="0"/>
           </a:p>
         </p:txBody>
       </p:sp>
@@ -7368,11 +7373,11 @@
                 <a:solidFill>
                   <a:srgbClr val="10161F"/>
                 </a:solidFill>
-                <a:latin typeface="Pretendard" pitchFamily="34" charset="0"/>
-                <a:ea typeface="Pretendard" pitchFamily="34" charset="-122"/>
-                <a:cs typeface="Pretendard" pitchFamily="34" charset="-120"/>
-              </a:rPr>
-              <a:t>확인 중</a:t>
+                <a:latin typeface="Arial" pitchFamily="34" charset="0"/>
+                <a:ea typeface="Arial" pitchFamily="34" charset="-122"/>
+                <a:cs typeface="Arial" pitchFamily="34" charset="-120"/>
+              </a:rPr>
+              <a:t>-</a:t>
             </a:r>
             <a:endParaRPr lang="en-US" sz="2200" dirty="0"/>
           </a:p>
@@ -7528,7 +7533,9 @@
           <a:ln/>
         </p:spPr>
         <p:txBody>
-          <a:bodyPr wrap="square" lIns="0" tIns="0" rIns="0" bIns="0" rtlCol="0" anchor="ctr"/>
+          <a:bodyPr wrap="square" lIns="0" tIns="0" rIns="0" bIns="0" rtlCol="0" anchor="ctr">
+            <a:normAutofit/>
+          </a:bodyPr>
           <a:lstStyle/>
           <a:p>
             <a:pPr indent="0" marL="0">
@@ -7660,7 +7667,9 @@
           <a:ln/>
         </p:spPr>
         <p:txBody>
-          <a:bodyPr wrap="square" lIns="0" tIns="0" rIns="0" bIns="0" rtlCol="0" anchor="ctr"/>
+          <a:bodyPr wrap="square" lIns="0" tIns="0" rIns="0" bIns="0" rtlCol="0" anchor="ctr">
+            <a:normAutofit/>
+          </a:bodyPr>
           <a:lstStyle/>
           <a:p>
             <a:pPr indent="0" marL="0">
@@ -7675,7 +7684,7 @@
                 <a:ea typeface="Pretendard" pitchFamily="34" charset="-122"/>
                 <a:cs typeface="Pretendard" pitchFamily="34" charset="-120"/>
               </a:rPr>
-              <a:t>자산 규모: 해당 권역 소재 단독 빌딩 매입 기회</a:t>
+              <a:t>안정적 현금흐름: 전 층 임차인 운영 기반의 안정적 월 임대수익 창출</a:t>
             </a:r>
             <a:endParaRPr lang="en-US" sz="1150" dirty="0"/>
           </a:p>
@@ -7792,7 +7801,9 @@
           <a:ln/>
         </p:spPr>
         <p:txBody>
-          <a:bodyPr wrap="square" lIns="0" tIns="0" rIns="0" bIns="0" rtlCol="0" anchor="ctr"/>
+          <a:bodyPr wrap="square" lIns="0" tIns="0" rIns="0" bIns="0" rtlCol="0" anchor="ctr">
+            <a:normAutofit/>
+          </a:bodyPr>
           <a:lstStyle/>
           <a:p>
             <a:pPr indent="0" marL="0">
@@ -7807,7 +7818,7 @@
                 <a:ea typeface="Pretendard" pitchFamily="34" charset="-122"/>
                 <a:cs typeface="Pretendard" pitchFamily="34" charset="-120"/>
               </a:rPr>
-              <a:t>수익 안정성: 안정적 임대수익 기반 투자 매물</a:t>
+              <a:t>자산 규모: 해당 권역 소재 단독 빌딩 매입 기회</a:t>
             </a:r>
             <a:endParaRPr lang="en-US" sz="1150" dirty="0"/>
           </a:p>
@@ -8088,7 +8099,183 @@
       </p:pic>
       <p:sp>
         <p:nvSpPr>
-          <p:cNvPr id="7" name="Text 4"/>
+          <p:cNvPr id="7" name="Shape 4"/>
+          <p:cNvSpPr/>
+          <p:nvPr/>
+        </p:nvSpPr>
+        <p:spPr>
+          <a:xfrm>
+            <a:off x="704088" y="5184648"/>
+            <a:ext cx="3200400" cy="320040"/>
+          </a:xfrm>
+          <a:prstGeom prst="roundRect">
+            <a:avLst>
+              <a:gd name="adj" fmla="val 11429"/>
+            </a:avLst>
+          </a:prstGeom>
+          <a:solidFill>
+            <a:srgbClr val="FFFFFF">
+              <a:alpha val="90000"/>
+            </a:srgbClr>
+          </a:solidFill>
+          <a:ln w="10160">
+            <a:solidFill>
+              <a:srgbClr val="CBD5E1"/>
+            </a:solidFill>
+            <a:prstDash val="solid"/>
+          </a:ln>
+        </p:spPr>
+      </p:sp>
+      <p:sp>
+        <p:nvSpPr>
+          <p:cNvPr id="8" name="Text 5"/>
+          <p:cNvSpPr/>
+          <p:nvPr/>
+        </p:nvSpPr>
+        <p:spPr>
+          <a:xfrm>
+            <a:off x="749808" y="5202936"/>
+            <a:ext cx="3108960" cy="274320"/>
+          </a:xfrm>
+          <a:prstGeom prst="rect">
+            <a:avLst/>
+          </a:prstGeom>
+          <a:noFill/>
+          <a:ln/>
+        </p:spPr>
+        <p:txBody>
+          <a:bodyPr wrap="square" rtlCol="0" anchor="ctr"/>
+          <a:lstStyle/>
+          <a:p>
+            <a:pPr indent="0" marL="0">
+              <a:buNone/>
+            </a:pPr>
+            <a:r>
+              <a:rPr lang="en-US" sz="900" b="1" dirty="0">
+                <a:solidFill>
+                  <a:srgbClr val="B8860B"/>
+                </a:solidFill>
+                <a:latin typeface="Pretendard" pitchFamily="34" charset="0"/>
+                <a:ea typeface="Pretendard" pitchFamily="34" charset="-122"/>
+                <a:cs typeface="Pretendard" pitchFamily="34" charset="-120"/>
+              </a:rPr>
+              <a:t>★ </a:t>
+            </a:r>
+            <a:pPr indent="0" marL="0">
+              <a:buNone/>
+            </a:pPr>
+            <a:r>
+              <a:rPr lang="en-US" sz="850" b="1" dirty="0">
+                <a:solidFill>
+                  <a:srgbClr val="1E293B"/>
+                </a:solidFill>
+                <a:latin typeface="Pretendard" pitchFamily="34" charset="0"/>
+                <a:ea typeface="Pretendard" pitchFamily="34" charset="-122"/>
+                <a:cs typeface="Pretendard" pitchFamily="34" charset="-120"/>
+              </a:rPr>
+              <a:t>대상 자산(본건)   </a:t>
+            </a:r>
+            <a:pPr indent="0" marL="0">
+              <a:buNone/>
+            </a:pPr>
+            <a:r>
+              <a:rPr lang="en-US" sz="1000" b="1" dirty="0">
+                <a:solidFill>
+                  <a:srgbClr val="B8860B"/>
+                </a:solidFill>
+                <a:latin typeface="Pretendard" pitchFamily="34" charset="0"/>
+                <a:ea typeface="Pretendard" pitchFamily="34" charset="-122"/>
+                <a:cs typeface="Pretendard" pitchFamily="34" charset="-120"/>
+              </a:rPr>
+              <a:t>╌ </a:t>
+            </a:r>
+            <a:pPr indent="0" marL="0">
+              <a:buNone/>
+            </a:pPr>
+            <a:r>
+              <a:rPr lang="en-US" sz="850" dirty="0">
+                <a:solidFill>
+                  <a:srgbClr val="475569"/>
+                </a:solidFill>
+                <a:latin typeface="Pretendard" pitchFamily="34" charset="0"/>
+                <a:ea typeface="Pretendard" pitchFamily="34" charset="-122"/>
+                <a:cs typeface="Pretendard" pitchFamily="34" charset="-120"/>
+              </a:rPr>
+              <a:t>도보 5분 반경 (약 400m)</a:t>
+            </a:r>
+            <a:endParaRPr lang="en-US" sz="900" dirty="0"/>
+          </a:p>
+        </p:txBody>
+      </p:sp>
+      <p:sp>
+        <p:nvSpPr>
+          <p:cNvPr id="9" name="Shape 6"/>
+          <p:cNvSpPr/>
+          <p:nvPr/>
+        </p:nvSpPr>
+        <p:spPr>
+          <a:xfrm>
+            <a:off x="2715768" y="3739896"/>
+            <a:ext cx="822960" cy="219456"/>
+          </a:xfrm>
+          <a:prstGeom prst="roundRect">
+            <a:avLst>
+              <a:gd name="adj" fmla="val 16667"/>
+            </a:avLst>
+          </a:prstGeom>
+          <a:solidFill>
+            <a:srgbClr val="132A3A"/>
+          </a:solidFill>
+          <a:ln w="12700">
+            <a:solidFill>
+              <a:srgbClr val="FFFFFF"/>
+            </a:solidFill>
+            <a:prstDash val="solid"/>
+          </a:ln>
+        </p:spPr>
+      </p:sp>
+      <p:sp>
+        <p:nvSpPr>
+          <p:cNvPr id="10" name="Text 7"/>
+          <p:cNvSpPr/>
+          <p:nvPr/>
+        </p:nvSpPr>
+        <p:spPr>
+          <a:xfrm>
+            <a:off x="2715768" y="3739896"/>
+            <a:ext cx="822960" cy="219456"/>
+          </a:xfrm>
+          <a:prstGeom prst="rect">
+            <a:avLst/>
+          </a:prstGeom>
+          <a:noFill/>
+          <a:ln/>
+        </p:spPr>
+        <p:txBody>
+          <a:bodyPr wrap="square" rtlCol="0" anchor="ctr"/>
+          <a:lstStyle/>
+          <a:p>
+            <a:pPr algn="ctr" indent="0" marL="0">
+              <a:buNone/>
+            </a:pPr>
+            <a:r>
+              <a:rPr lang="en-US" sz="900" b="1" dirty="0">
+                <a:solidFill>
+                  <a:srgbClr val="FFFFFF"/>
+                </a:solidFill>
+                <a:latin typeface="Pretendard" pitchFamily="34" charset="0"/>
+                <a:ea typeface="Pretendard" pitchFamily="34" charset="-122"/>
+                <a:cs typeface="Pretendard" pitchFamily="34" charset="-120"/>
+              </a:rPr>
+              <a:t>★ 본건</a:t>
+            </a:r>
+            <a:endParaRPr lang="en-US" sz="900" dirty="0"/>
+          </a:p>
+        </p:txBody>
+      </p:sp>
+      <p:sp>
+        <p:nvSpPr>
+          <p:cNvPr id="11" name="Text 8"/>
           <p:cNvSpPr/>
           <p:nvPr/>
         </p:nvSpPr>
@@ -8132,7 +8319,7 @@
       </p:sp>
       <p:sp>
         <p:nvSpPr>
-          <p:cNvPr id="8" name="Text 5"/>
+          <p:cNvPr id="12" name="Text 9"/>
           <p:cNvSpPr/>
           <p:nvPr/>
         </p:nvSpPr>
@@ -8176,7 +8363,7 @@
       </p:sp>
       <p:sp>
         <p:nvSpPr>
-          <p:cNvPr id="9" name="Shape 6"/>
+          <p:cNvPr id="13" name="Shape 10"/>
           <p:cNvSpPr/>
           <p:nvPr/>
         </p:nvSpPr>
@@ -8199,7 +8386,7 @@
       </p:sp>
       <p:sp>
         <p:nvSpPr>
-          <p:cNvPr id="10" name="Text 7"/>
+          <p:cNvPr id="14" name="Text 11"/>
           <p:cNvSpPr/>
           <p:nvPr/>
         </p:nvSpPr>
@@ -8243,7 +8430,7 @@
       </p:sp>
       <p:sp>
         <p:nvSpPr>
-          <p:cNvPr id="11" name="Text 8"/>
+          <p:cNvPr id="15" name="Text 12"/>
           <p:cNvSpPr/>
           <p:nvPr/>
         </p:nvSpPr>
@@ -8287,7 +8474,7 @@
       </p:sp>
       <p:sp>
         <p:nvSpPr>
-          <p:cNvPr id="12" name="Shape 9"/>
+          <p:cNvPr id="16" name="Shape 13"/>
           <p:cNvSpPr/>
           <p:nvPr/>
         </p:nvSpPr>
@@ -8309,7 +8496,7 @@
       </p:sp>
       <p:sp>
         <p:nvSpPr>
-          <p:cNvPr id="13" name="Shape 10"/>
+          <p:cNvPr id="17" name="Shape 14"/>
           <p:cNvSpPr/>
           <p:nvPr/>
         </p:nvSpPr>
@@ -8329,7 +8516,7 @@
       </p:sp>
       <p:sp>
         <p:nvSpPr>
-          <p:cNvPr id="14" name="Text 11"/>
+          <p:cNvPr id="18" name="Text 15"/>
           <p:cNvSpPr/>
           <p:nvPr/>
         </p:nvSpPr>
@@ -8368,7 +8555,7 @@
       </p:sp>
       <p:sp>
         <p:nvSpPr>
-          <p:cNvPr id="15" name="Text 12"/>
+          <p:cNvPr id="19" name="Text 16"/>
           <p:cNvSpPr/>
           <p:nvPr/>
         </p:nvSpPr>
@@ -8411,7 +8598,7 @@
       </p:sp>
       <p:sp>
         <p:nvSpPr>
-          <p:cNvPr id="16" name="Text 13"/>
+          <p:cNvPr id="20" name="Text 17"/>
           <p:cNvSpPr/>
           <p:nvPr/>
         </p:nvSpPr>
@@ -8450,7 +8637,7 @@
       </p:sp>
       <p:sp>
         <p:nvSpPr>
-          <p:cNvPr id="17" name="Text 14"/>
+          <p:cNvPr id="21" name="Text 18"/>
           <p:cNvSpPr/>
           <p:nvPr/>
         </p:nvSpPr>
